--- a/emyaa-ceo-deck/output/final-deck/eMYAA-Marketing-Update-01.10.2026-CEO-Redesigned.pptx
+++ b/emyaa-ceo-deck/output/final-deck/eMYAA-Marketing-Update-01.10.2026-CEO-Redesigned.pptx
@@ -13,21 +13,19 @@
     <p:sldId id="261" r:id="rId7"/>
     <p:sldId id="262" r:id="rId8"/>
     <p:sldId id="263" r:id="rId9"/>
-    <p:sldId id="264" r:id="rId10"/>
-    <p:sldId id="265" r:id="rId11"/>
   </p:sldIdLst>
   <p:notesMasterIdLst>
-    <p:notesMasterId r:id="rId12"/>
+    <p:notesMasterId r:id="rId10"/>
   </p:notesMasterIdLst>
   <p:sldSz cx="12192000" cy="6858000"/>
   <p:notesSz cx="6858000" cy="12192000"/>
   <p:embeddedFontLst>
     <p:embeddedFont>
       <p:font typeface="Exo 2" charset="0"/>
-      <p:regular r:id="rId17"/>
-      <p:bold r:id="rId18"/>
-      <p:italic r:id="rId19"/>
-      <p:boldItalic r:id="rId20"/>
+      <p:regular r:id="rId15"/>
+      <p:bold r:id="rId16"/>
+      <p:italic r:id="rId17"/>
+      <p:boldItalic r:id="rId18"/>
     </p:embeddedFont>
   </p:embeddedFontLst>
   <p:defaultTextStyle>
@@ -1757,293 +1755,6 @@
 </c:chartSpace>
 </file>
 
-<file path=ppt/charts/chart6.xml><?xml version="1.0" encoding="utf-8"?>
-<c:chartSpace xmlns:c="http://schemas.openxmlformats.org/drawingml/2006/chart" xmlns:a="http://schemas.openxmlformats.org/drawingml/2006/main" xmlns:r="http://schemas.openxmlformats.org/officeDocument/2006/relationships">
-  <c:date1904 val="0"/>
-  <c:roundedCorners val="1"/>
-  <c:chart>
-    <c:title>
-      <c:tx>
-        <c:rich>
-          <a:bodyPr/>
-          <a:lstStyle/>
-          <a:p>
-            <a:pPr>
-              <a:defRPr sz="1100" b="0" i="0" u="none" strike="noStrike">
-                <a:solidFill>
-                  <a:srgbClr val="132257"/>
-                </a:solidFill>
-                <a:latin typeface="Exo 2"/>
-              </a:defRPr>
-            </a:pPr>
-            <a:r>
-              <a:rPr sz="1100" b="0" i="0" u="none" strike="noStrike">
-                <a:solidFill>
-                  <a:srgbClr val="132257"/>
-                </a:solidFill>
-                <a:latin typeface="Exo 2"/>
-              </a:rPr>
-              <a:t>Instagram views per post (as shown on profile grid)</a:t>
-            </a:r>
-          </a:p>
-        </c:rich>
-      </c:tx>
-      <c:layout/>
-      <c:overlay val="0"/>
-    </c:title>
-    <c:autoTitleDeleted val="0"/>
-    <c:plotArea>
-      <c:layout/>
-      <c:barChart>
-        <c:barDir val="bar"/>
-        <c:grouping val="clustered"/>
-        <c:varyColors val="0"/>
-        <c:ser>
-          <c:idx val="0"/>
-          <c:order val="0"/>
-          <c:tx>
-            <c:strRef>
-              <c:f>Sheet1!$B$1</c:f>
-              <c:strCache>
-                <c:ptCount val="1"/>
-                <c:pt idx="0">
-                  <c:v>Views</c:v>
-                </c:pt>
-              </c:strCache>
-            </c:strRef>
-          </c:tx>
-          <c:spPr>
-            <a:solidFill>
-              <a:srgbClr val="132257"/>
-            </a:solidFill>
-            <a:effectLst/>
-          </c:spPr>
-          <c:invertIfNegative val="0"/>
-          <c:dLbls>
-            <c:numFmt formatCode="[&gt;=1000000]0.0,,&quot;M&quot;;[&gt;=1000]0.0,&quot;K&quot;;0" sourceLinked="0"/>
-            <c:txPr>
-              <a:bodyPr/>
-              <a:lstStyle/>
-              <a:p>
-                <a:pPr>
-                  <a:defRPr b="0" i="0" strike="noStrike" sz="1000" u="none">
-                    <a:solidFill>
-                      <a:srgbClr val="132257"/>
-                    </a:solidFill>
-                    <a:latin typeface="Exo 2"/>
-                  </a:defRPr>
-                </a:pPr>
-              </a:p>
-            </c:txPr>
-            <c:showLegendKey val="0"/>
-            <c:showVal val="1"/>
-            <c:showCatName val="0"/>
-            <c:showSerName val="0"/>
-            <c:showPercent val="0"/>
-            <c:showBubbleSize val="0"/>
-            <c:showLeaderLines val="0"/>
-          </c:dLbls>
-          <c:cat>
-            <c:multiLvlStrRef>
-              <c:f>Sheet1!$A$2:$A$9</c:f>
-              <c:multiLvlStrCache>
-                <c:ptCount val="8"/>
-                <c:lvl>
-                  <c:pt idx="0">
-                    <c:v>Musheera reel</c:v>
-                  </c:pt>
-                  <c:pt idx="1">
-                    <c:v>Ali Sabeel reel</c:v>
-                  </c:pt>
-                  <c:pt idx="2">
-                    <c:v>Mention &amp; Win $500 graphic</c:v>
-                  </c:pt>
-                  <c:pt idx="3">
-                    <c:v>Open account, win $500 graphic</c:v>
-                  </c:pt>
-                  <c:pt idx="4">
-                    <c:v>Trade &amp; Win graphic</c:v>
-                  </c:pt>
-                  <c:pt idx="5">
-                    <c:v>No limits graphic</c:v>
-                  </c:pt>
-                  <c:pt idx="6">
-                    <c:v>How-to video, presenter</c:v>
-                  </c:pt>
-                  <c:pt idx="7">
-                    <c:v>Start trading graphic</c:v>
-                  </c:pt>
-                </c:lvl>
-              </c:multiLvlStrCache>
-            </c:multiLvlStrRef>
-          </c:cat>
-          <c:val>
-            <c:numRef>
-              <c:f>Sheet1!$B$2:$B$9</c:f>
-              <c:numCache>
-                <c:formatCode>General</c:formatCode>
-                <c:ptCount val="8"/>
-                <c:pt idx="0">
-                  <c:v>5300000</c:v>
-                </c:pt>
-                <c:pt idx="1">
-                  <c:v>1300000</c:v>
-                </c:pt>
-                <c:pt idx="2">
-                  <c:v>186000</c:v>
-                </c:pt>
-                <c:pt idx="3">
-                  <c:v>26300</c:v>
-                </c:pt>
-                <c:pt idx="4">
-                  <c:v>549</c:v>
-                </c:pt>
-                <c:pt idx="5">
-                  <c:v>347</c:v>
-                </c:pt>
-                <c:pt idx="6">
-                  <c:v>332</c:v>
-                </c:pt>
-                <c:pt idx="7">
-                  <c:v>262</c:v>
-                </c:pt>
-              </c:numCache>
-            </c:numRef>
-          </c:val>
-        </c:ser>
-        <c:dLbls>
-          <c:numFmt formatCode="[&gt;=1000000]0.0,,&quot;M&quot;;[&gt;=1000]0.0,&quot;K&quot;;0" sourceLinked="0"/>
-          <c:txPr>
-            <a:bodyPr/>
-            <a:lstStyle/>
-            <a:p>
-              <a:pPr>
-                <a:defRPr b="0" i="0" strike="noStrike" sz="1000" u="none">
-                  <a:solidFill>
-                    <a:srgbClr val="132257"/>
-                  </a:solidFill>
-                  <a:latin typeface="Exo 2"/>
-                </a:defRPr>
-              </a:pPr>
-            </a:p>
-          </c:txPr>
-          <c:showLegendKey val="0"/>
-          <c:showVal val="1"/>
-          <c:showCatName val="0"/>
-          <c:showSerName val="0"/>
-          <c:showPercent val="0"/>
-          <c:showBubbleSize val="0"/>
-          <c:showLeaderLines val="0"/>
-        </c:dLbls>
-        <c:gapWidth val="45"/>
-        <c:overlap val="0"/>
-        <c:axId val="2094734554"/>
-        <c:axId val="2094734552"/>
-        <c:axId val="2094734556"/>
-      </c:barChart>
-      <c:catAx>
-        <c:axId val="2094734554"/>
-        <c:scaling>
-          <c:orientation val="maxMin"/>
-        </c:scaling>
-        <c:delete val="0"/>
-        <c:axPos val="l"/>
-        <c:numFmt formatCode="General" sourceLinked="1"/>
-        <c:majorTickMark val="out"/>
-        <c:minorTickMark val="none"/>
-        <c:tickLblPos val="nextTo"/>
-        <c:spPr>
-          <a:ln w="12700" cap="flat">
-            <a:noFill/>
-            <a:prstDash val="solid"/>
-            <a:round/>
-          </a:ln>
-        </c:spPr>
-        <c:txPr>
-          <a:bodyPr/>
-          <a:lstStyle/>
-          <a:p>
-            <a:pPr>
-              <a:defRPr sz="1000" b="0" i="0" u="none" strike="noStrike">
-                <a:solidFill>
-                  <a:srgbClr val="1F2A44"/>
-                </a:solidFill>
-                <a:latin typeface="Exo 2"/>
-              </a:defRPr>
-            </a:pPr>
-            <a:endParaRPr lang="en-US"/>
-          </a:p>
-        </c:txPr>
-        <c:crossAx val="2094734552"/>
-        <c:crosses val="autoZero"/>
-        <c:auto val="1"/>
-        <c:lblAlgn val="ctr"/>
-        <c:noMultiLvlLbl val="1"/>
-      </c:catAx>
-      <c:valAx>
-        <c:axId val="2094734552"/>
-        <c:scaling>
-          <c:orientation val="minMax"/>
-          <c:max val="6500000"/>
-        </c:scaling>
-        <c:delete val="1"/>
-        <c:axPos val="b"/>
-        <c:numFmt formatCode="General" sourceLinked="0"/>
-        <c:majorTickMark val="out"/>
-        <c:minorTickMark val="none"/>
-        <c:tickLblPos val="low"/>
-        <c:spPr>
-          <a:ln w="12700" cap="flat">
-            <a:solidFill>
-              <a:srgbClr val="888888"/>
-            </a:solidFill>
-            <a:prstDash val="solid"/>
-            <a:round/>
-          </a:ln>
-        </c:spPr>
-        <c:txPr>
-          <a:bodyPr/>
-          <a:lstStyle/>
-          <a:p>
-            <a:pPr>
-              <a:defRPr sz="1200" b="0" i="0" u="none" strike="noStrike">
-                <a:solidFill>
-                  <a:srgbClr val="000000"/>
-                </a:solidFill>
-                <a:latin typeface="Arial"/>
-              </a:defRPr>
-            </a:pPr>
-            <a:endParaRPr lang="en-US"/>
-          </a:p>
-        </c:txPr>
-        <c:crossAx val="2094734554"/>
-        <c:crosses val="autoZero"/>
-        <c:crossBetween val="between"/>
-      </c:valAx>
-      <c:spPr>
-        <a:noFill/>
-        <a:ln>
-          <a:noFill/>
-        </a:ln>
-        <a:effectLst/>
-      </c:spPr>
-    </c:plotArea>
-    <c:plotVisOnly val="1"/>
-    <c:dispBlanksAs val="span"/>
-  </c:chart>
-  <c:spPr>
-    <a:noFill/>
-    <a:ln>
-      <a:noFill/>
-    </a:ln>
-    <a:effectLst/>
-  </c:spPr>
-  <c:externalData r:id="rId1">
-    <c:autoUpdate val="0"/>
-  </c:externalData>
-</c:chartSpace>
-</file>
-
 <file path=ppt/notesMasters/notesMaster1.xml><?xml version="1.0" encoding="utf-8"?>
 <p:notesMaster xmlns:a="http://schemas.openxmlformats.org/drawingml/2006/main" xmlns:r="http://schemas.openxmlformats.org/officeDocument/2006/relationships" xmlns:p="http://schemas.openxmlformats.org/presentationml/2006/main">
   <p:cSld>
@@ -2481,94 +2192,6 @@
 </p:notes>
 </file>
 
-<file path=ppt/notesSlides/notesSlide10.xml><?xml version="1.0" encoding="utf-8"?>
-<p:notes xmlns:a="http://schemas.openxmlformats.org/drawingml/2006/main" xmlns:r="http://schemas.openxmlformats.org/officeDocument/2006/relationships" xmlns:p="http://schemas.openxmlformats.org/presentationml/2006/main">
-  <p:cSld>
-    <p:spTree>
-      <p:nvGrpSpPr>
-        <p:cNvPr id="1" name=""/>
-        <p:cNvGrpSpPr/>
-        <p:nvPr/>
-      </p:nvGrpSpPr>
-      <p:grpSpPr>
-        <a:xfrm>
-          <a:off x="0" y="0"/>
-          <a:ext cx="0" cy="0"/>
-          <a:chOff x="0" y="0"/>
-          <a:chExt cx="0" cy="0"/>
-        </a:xfrm>
-      </p:grpSpPr>
-      <p:sp>
-        <p:nvSpPr>
-          <p:cNvPr id="2" name="Slide Image Placeholder 1"/>
-          <p:cNvSpPr>
-            <a:spLocks noGrp="1" noRot="1" noChangeAspect="1"/>
-          </p:cNvSpPr>
-          <p:nvPr>
-            <p:ph type="sldImg"/>
-          </p:nvPr>
-        </p:nvSpPr>
-        <p:spPr/>
-      </p:sp>
-      <p:sp>
-        <p:nvSpPr>
-          <p:cNvPr id="3" name="Notes Placeholder 2"/>
-          <p:cNvSpPr>
-            <a:spLocks noGrp="1"/>
-          </p:cNvSpPr>
-          <p:nvPr>
-            <p:ph type="body" idx="1"/>
-          </p:nvPr>
-        </p:nvSpPr>
-        <p:spPr/>
-        <p:txBody>
-          <a:bodyPr/>
-          <a:lstStyle/>
-          <a:p>
-            <a:r>
-              <a:rPr lang="en-US" dirty="0"/>
-              <a:t>Decision 2 follows from the GA4 campaign export: Arabic has a lower engagement rate (86.9% vs 97.2%) but more key events per session (1.05 vs 0.94). Decision 3 follows from the dashboards: +36 downloads but +3 onboarded in the first six days of paid testing. Decision 5: the $5,000 campaign T&amp;Cs were sent for approval on 20 Jul and no sign-off is on file.</a:t>
-            </a:r>
-            <a:endParaRPr lang="en-US" dirty="0"/>
-          </a:p>
-        </p:txBody>
-      </p:sp>
-      <p:sp>
-        <p:nvSpPr>
-          <p:cNvPr id="4" name="Slide Number Placeholder 3"/>
-          <p:cNvSpPr>
-            <a:spLocks noGrp="1"/>
-          </p:cNvSpPr>
-          <p:nvPr>
-            <p:ph type="sldNum" sz="quarter" idx="10"/>
-          </p:nvPr>
-        </p:nvSpPr>
-        <p:spPr/>
-        <p:txBody>
-          <a:bodyPr/>
-          <a:lstStyle/>
-          <a:p>
-            <a:fld id="{F7021451-1387-4CA6-816F-3879F97B5CBC}" type="slidenum">
-              <a:rPr lang="en-US"/>
-              <a:t>10</a:t>
-            </a:fld>
-            <a:endParaRPr lang="en-US"/>
-          </a:p>
-        </p:txBody>
-      </p:sp>
-    </p:spTree>
-    <p:extLst>
-      <p:ext uri="{BB962C8B-B14F-4D97-AF65-F5344CB8AC3E}">
-        <p14:creationId xmlns:p14="http://schemas.microsoft.com/office/powerpoint/2010/main" val="1024086991"/>
-      </p:ext>
-    </p:extLst>
-  </p:cSld>
-  <p:clrMapOvr>
-    <a:masterClrMapping/>
-  </p:clrMapOvr>
-</p:notes>
-</file>
-
 <file path=ppt/notesSlides/notesSlide2.xml><?xml version="1.0" encoding="utf-8"?>
 <p:notes xmlns:a="http://schemas.openxmlformats.org/drawingml/2006/main" xmlns:r="http://schemas.openxmlformats.org/officeDocument/2006/relationships" xmlns:p="http://schemas.openxmlformats.org/presentationml/2006/main">
   <p:cSld>
@@ -3055,7 +2678,7 @@
           <a:p>
             <a:r>
               <a:rPr lang="en-US" dirty="0"/>
-              <a:t>The how-to video showed 319 views in the previous draft and 332 on the screenshot, so the screenshot is the later capture. Ali Sabeel posted 2 Sep per the September calendar. Manal Talal: brief sent and production started; October calendar V2 date 22 Oct. Hamed Al Bloushi: November per the rollout plan (the September calendar had listed 29 Sep). Abdulelah Al Harbi thumbnail is a video still supplied by the team; no view count yet. No item is awaiting approval per the team. The same six creators, plus Ammar Alshaikh, have finalized scripts for the $5,000 Prize Campaign (approval checklist).</a:t>
+              <a:t>Pipeline: Ali Sabeel posted 2 Sep (September calendar); Manal Talal brief sent and in production, October calendar V2 date 22 Oct; Hamed Al Bloushi November per the rollout plan (the September calendar had listed 29 Sep). The how-to video showed 319 views in the previous draft and 332 on the screenshot (later capture). Instagram views: Musheera 5.3M, Ali Sabeel 1.3M, Mention &amp; Win graphic 186K; every other post on the grid is under 600, so reach depends on a few (likely boosted) assets. Excluded as unverified: 2,271,132 'all-time' views (one reel alone shows 5.3M) and format shares, which differ between decks. LinkedIn: +6,075% is growth in new followers (247 vs 4 in the prior 30 days), not total followers; the LinkedIn export (31 May-28 Aug) shows 498 new followers, 493 in June, contradicting the draft's 284 baseline. Website: 587 sessions, 11 from Instagram, 1-28 Sep.</a:t>
             </a:r>
             <a:endParaRPr lang="en-US" dirty="0"/>
           </a:p>
@@ -3143,7 +2766,7 @@
           <a:p>
             <a:r>
               <a:rPr lang="en-US" dirty="0"/>
-              <a:t>Chart uses only view counts visible on the Instagram grid screenshot. Excluded as unverified or inconsistent: 2,271,132 'all-time' views (one reel alone shows 5.3M); format shares, which differ between decks (73.3/25.9/0.7 in the Marketing Update vs 59.2/38.1 in the Performance Analysis deck). LinkedIn: 247 new followers in the last 30 days vs 4 in the prior 30 days is the +6,075%; it is growth in new followers, not in total followers. The LinkedIn export (31 May-28 Aug) shows 498 new followers, 493 of them in June and 4 in August, which contradicts the draft's derived baseline of 284 followers '30 days ago'.</a:t>
+              <a:t>Decision 2 follows from the GA4 campaign export: Arabic has a lower engagement rate (86.9% vs 97.2%) but more key events per session (1.05 vs 0.94). Decision 3 follows from the dashboards: +36 downloads but +3 onboarded in the first six days of paid testing. Open items: deposits $12,206 (Board, verbal from Malek) vs $10,029.69 on the dashboard (relabelled 'Total AUM' from 20 Sep) vs $11,195.88 in the KPI workbook; clients 61 on the Board 'as at 17 Sep' vs 54 on the 17 Sep dashboard and 60 on 27 Sep; no Ignite spend, cost per key event or LinkedIn lead data, and the key event is undefined; no September social exports; the 793% active-user rise (GA card, prior week implied) and LinkedIn +118% / +155% are not traceable to an export; LinkedIn followers 531 vs 586; $5,000 campaign T&amp;Cs sent for approval on 20 Jul with no sign-off on file. Market Pulse: in-app feature in discussion (Exante data access).</a:t>
             </a:r>
             <a:endParaRPr lang="en-US" dirty="0"/>
           </a:p>
@@ -3167,94 +2790,6 @@
             <a:fld id="{F7021451-1387-4CA6-816F-3879F97B5CBC}" type="slidenum">
               <a:rPr lang="en-US"/>
               <a:t>8</a:t>
-            </a:fld>
-            <a:endParaRPr lang="en-US"/>
-          </a:p>
-        </p:txBody>
-      </p:sp>
-    </p:spTree>
-    <p:extLst>
-      <p:ext uri="{BB962C8B-B14F-4D97-AF65-F5344CB8AC3E}">
-        <p14:creationId xmlns:p14="http://schemas.microsoft.com/office/powerpoint/2010/main" val="1024086991"/>
-      </p:ext>
-    </p:extLst>
-  </p:cSld>
-  <p:clrMapOvr>
-    <a:masterClrMapping/>
-  </p:clrMapOvr>
-</p:notes>
-</file>
-
-<file path=ppt/notesSlides/notesSlide9.xml><?xml version="1.0" encoding="utf-8"?>
-<p:notes xmlns:a="http://schemas.openxmlformats.org/drawingml/2006/main" xmlns:r="http://schemas.openxmlformats.org/officeDocument/2006/relationships" xmlns:p="http://schemas.openxmlformats.org/presentationml/2006/main">
-  <p:cSld>
-    <p:spTree>
-      <p:nvGrpSpPr>
-        <p:cNvPr id="1" name=""/>
-        <p:cNvGrpSpPr/>
-        <p:nvPr/>
-      </p:nvGrpSpPr>
-      <p:grpSpPr>
-        <a:xfrm>
-          <a:off x="0" y="0"/>
-          <a:ext cx="0" cy="0"/>
-          <a:chOff x="0" y="0"/>
-          <a:chExt cx="0" cy="0"/>
-        </a:xfrm>
-      </p:grpSpPr>
-      <p:sp>
-        <p:nvSpPr>
-          <p:cNvPr id="2" name="Slide Image Placeholder 1"/>
-          <p:cNvSpPr>
-            <a:spLocks noGrp="1" noRot="1" noChangeAspect="1"/>
-          </p:cNvSpPr>
-          <p:nvPr>
-            <p:ph type="sldImg"/>
-          </p:nvPr>
-        </p:nvSpPr>
-        <p:spPr/>
-      </p:sp>
-      <p:sp>
-        <p:nvSpPr>
-          <p:cNvPr id="3" name="Notes Placeholder 2"/>
-          <p:cNvSpPr>
-            <a:spLocks noGrp="1"/>
-          </p:cNvSpPr>
-          <p:nvPr>
-            <p:ph type="body" idx="1"/>
-          </p:nvPr>
-        </p:nvSpPr>
-        <p:spPr/>
-        <p:txBody>
-          <a:bodyPr/>
-          <a:lstStyle/>
-          <a:p>
-            <a:r>
-              <a:rPr lang="en-US" dirty="0"/>
-              <a:t>Gross deposits: the Board shows $12,206 (Malek's figure, verbal); the dashboard figure of $10,029.69 is relabelled from 'Total Deposits' to 'Total AUM' from 20 Sep; the KPI workbook shows $11,195.88 for September. Client count: Board 61 'as at 17 Sep'; dashboards 54 (17 Sep) and 60 (27 Sep); KPI workbook 54. $5,000 campaign: bilingual T&amp;Cs 'sent for approval' on 20 Jul, no sign-off on file. Market Pulse: calendar posts 30 Sep and 29 Oct; the in-app Market Pulse feature is 'in discussion', with Exante verifying data-provider access.</a:t>
-            </a:r>
-            <a:endParaRPr lang="en-US" dirty="0"/>
-          </a:p>
-        </p:txBody>
-      </p:sp>
-      <p:sp>
-        <p:nvSpPr>
-          <p:cNvPr id="4" name="Slide Number Placeholder 3"/>
-          <p:cNvSpPr>
-            <a:spLocks noGrp="1"/>
-          </p:cNvSpPr>
-          <p:nvPr>
-            <p:ph type="sldNum" sz="quarter" idx="10"/>
-          </p:nvPr>
-        </p:nvSpPr>
-        <p:spPr/>
-        <p:txBody>
-          <a:bodyPr/>
-          <a:lstStyle/>
-          <a:p>
-            <a:fld id="{F7021451-1387-4CA6-816F-3879F97B5CBC}" type="slidenum">
-              <a:rPr lang="en-US"/>
-              <a:t>9</a:t>
             </a:fld>
             <a:endParaRPr lang="en-US"/>
           </a:p>
@@ -3823,1862 +3358,6 @@
 </p:sld>
 </file>
 
-<file path=ppt/slides/slide10.xml><?xml version="1.0" encoding="utf-8"?>
-<p:sld xmlns:a="http://schemas.openxmlformats.org/drawingml/2006/main" xmlns:r="http://schemas.openxmlformats.org/officeDocument/2006/relationships" xmlns:p="http://schemas.openxmlformats.org/presentationml/2006/main">
-  <p:cSld name="Slide 10">
-    <p:bg>
-      <p:bgPr>
-        <a:solidFill>
-          <a:srgbClr val="FFFFFF"/>
-        </a:solidFill>
-      </p:bgPr>
-    </p:bg>
-    <p:spTree>
-      <p:nvGrpSpPr>
-        <p:cNvPr id="1" name=""/>
-        <p:cNvGrpSpPr/>
-        <p:nvPr/>
-      </p:nvGrpSpPr>
-      <p:grpSpPr>
-        <a:xfrm>
-          <a:off x="0" y="0"/>
-          <a:ext cx="0" cy="0"/>
-          <a:chOff x="0" y="0"/>
-          <a:chExt cx="0" cy="0"/>
-        </a:xfrm>
-      </p:grpSpPr>
-      <p:pic>
-        <p:nvPicPr>
-          <p:cNvPr id="2" name="Image 0" descr="/home/user/HatemIsa_202508993_IT9002_NLP_Project/emyaa-ceo-deck/working/charts/board_header.png">    </p:cNvPr>
-          <p:cNvPicPr>
-            <a:picLocks noChangeAspect="1"/>
-          </p:cNvPicPr>
-          <p:nvPr/>
-        </p:nvPicPr>
-        <p:blipFill>
-          <a:blip r:embed="rId1"/>
-          <a:stretch>
-            <a:fillRect/>
-          </a:stretch>
-        </p:blipFill>
-        <p:spPr>
-          <a:xfrm>
-            <a:off x="0" y="0"/>
-            <a:ext cx="12191695" cy="1298448"/>
-          </a:xfrm>
-          <a:prstGeom prst="rect">
-            <a:avLst/>
-          </a:prstGeom>
-        </p:spPr>
-      </p:pic>
-      <p:sp>
-        <p:nvSpPr>
-          <p:cNvPr id="3" name="Shape 0"/>
-          <p:cNvSpPr/>
-          <p:nvPr/>
-        </p:nvSpPr>
-        <p:spPr>
-          <a:xfrm>
-            <a:off x="0" y="1298448"/>
-            <a:ext cx="12191695" cy="24689"/>
-          </a:xfrm>
-          <a:prstGeom prst="rect">
-            <a:avLst/>
-          </a:prstGeom>
-          <a:solidFill>
-            <a:srgbClr val="D4AF37"/>
-          </a:solidFill>
-          <a:ln w="12700">
-            <a:solidFill>
-              <a:srgbClr val="D4AF37"/>
-            </a:solidFill>
-            <a:prstDash val="solid"/>
-          </a:ln>
-        </p:spPr>
-      </p:sp>
-      <p:sp>
-        <p:nvSpPr>
-          <p:cNvPr id="4" name="Text 1"/>
-          <p:cNvSpPr txBox="1"/>
-          <p:nvPr/>
-        </p:nvSpPr>
-        <p:spPr>
-          <a:xfrm>
-            <a:off x="566928" y="274320"/>
-            <a:ext cx="9144000" cy="182880"/>
-          </a:xfrm>
-          <a:prstGeom prst="rect">
-            <a:avLst/>
-          </a:prstGeom>
-          <a:noFill/>
-          <a:ln/>
-        </p:spPr>
-        <p:txBody>
-          <a:bodyPr wrap="square" lIns="0" tIns="0" rIns="0" bIns="0" rtlCol="0" anchor="t"/>
-          <a:lstStyle/>
-          <a:p>
-            <a:pPr indent="0" marL="0">
-              <a:buNone/>
-            </a:pPr>
-            <a:r>
-              <a:rPr lang="en-US" sz="900" b="1" spc="200" kern="0" dirty="0">
-                <a:solidFill>
-                  <a:srgbClr val="D4AF37"/>
-                </a:solidFill>
-                <a:latin typeface="Exo 2" pitchFamily="34" charset="0"/>
-                <a:ea typeface="Exo 2" pitchFamily="34" charset="-122"/>
-                <a:cs typeface="Exo 2" pitchFamily="34" charset="-120"/>
-              </a:rPr>
-              <a:t>CEO DECISIONS AND NEXT STEPS</a:t>
-            </a:r>
-            <a:endParaRPr lang="en-US" sz="900" dirty="0"/>
-          </a:p>
-        </p:txBody>
-      </p:sp>
-      <p:sp>
-        <p:nvSpPr>
-          <p:cNvPr id="5" name="Text 2"/>
-          <p:cNvSpPr txBox="1"/>
-          <p:nvPr/>
-        </p:nvSpPr>
-        <p:spPr>
-          <a:xfrm>
-            <a:off x="566928" y="475488"/>
-            <a:ext cx="9326880" cy="749808"/>
-          </a:xfrm>
-          <a:prstGeom prst="rect">
-            <a:avLst/>
-          </a:prstGeom>
-          <a:noFill/>
-          <a:ln/>
-        </p:spPr>
-        <p:txBody>
-          <a:bodyPr wrap="square" lIns="0" tIns="0" rIns="0" bIns="0" rtlCol="0" anchor="ctr"/>
-          <a:lstStyle/>
-          <a:p>
-            <a:pPr indent="0" marL="0">
-              <a:buNone/>
-            </a:pPr>
-            <a:r>
-              <a:rPr lang="en-US" sz="2000" b="1" dirty="0">
-                <a:solidFill>
-                  <a:srgbClr val="FFFFFF"/>
-                </a:solidFill>
-                <a:latin typeface="Exo 2" pitchFamily="34" charset="0"/>
-                <a:ea typeface="Exo 2" pitchFamily="34" charset="-122"/>
-                <a:cs typeface="Exo 2" pitchFamily="34" charset="-120"/>
-              </a:rPr>
-              <a:t>Five decisions for today</a:t>
-            </a:r>
-            <a:endParaRPr lang="en-US" sz="2000" dirty="0"/>
-          </a:p>
-        </p:txBody>
-      </p:sp>
-      <p:pic>
-        <p:nvPicPr>
-          <p:cNvPr id="6" name="Image 1" descr="/home/user/HatemIsa_202508993_IT9002_NLP_Project/emyaa-ceo-deck/working/charts/ajyad_white.png">    </p:cNvPr>
-          <p:cNvPicPr>
-            <a:picLocks noChangeAspect="1"/>
-          </p:cNvPicPr>
-          <p:nvPr/>
-        </p:nvPicPr>
-        <p:blipFill>
-          <a:blip r:embed="rId2"/>
-          <a:stretch>
-            <a:fillRect/>
-          </a:stretch>
-        </p:blipFill>
-        <p:spPr>
-          <a:xfrm>
-            <a:off x="10305288" y="457200"/>
-            <a:ext cx="1325880" cy="384048"/>
-          </a:xfrm>
-          <a:prstGeom prst="rect">
-            <a:avLst/>
-          </a:prstGeom>
-        </p:spPr>
-      </p:pic>
-      <p:sp>
-        <p:nvSpPr>
-          <p:cNvPr id="7" name="Shape 3"/>
-          <p:cNvSpPr/>
-          <p:nvPr/>
-        </p:nvSpPr>
-        <p:spPr>
-          <a:xfrm>
-            <a:off x="566928" y="5669280"/>
-            <a:ext cx="11064240" cy="457200"/>
-          </a:xfrm>
-          <a:prstGeom prst="rect">
-            <a:avLst/>
-          </a:prstGeom>
-          <a:solidFill>
-            <a:srgbClr val="E3E8F2"/>
-          </a:solidFill>
-          <a:ln w="12700">
-            <a:solidFill>
-              <a:srgbClr val="E3E8F2"/>
-            </a:solidFill>
-            <a:prstDash val="solid"/>
-          </a:ln>
-        </p:spPr>
-      </p:sp>
-      <p:sp>
-        <p:nvSpPr>
-          <p:cNvPr id="8" name="Shape 4"/>
-          <p:cNvSpPr/>
-          <p:nvPr/>
-        </p:nvSpPr>
-        <p:spPr>
-          <a:xfrm>
-            <a:off x="566928" y="5669280"/>
-            <a:ext cx="45720" cy="457200"/>
-          </a:xfrm>
-          <a:prstGeom prst="rect">
-            <a:avLst/>
-          </a:prstGeom>
-          <a:solidFill>
-            <a:srgbClr val="D4AF37"/>
-          </a:solidFill>
-          <a:ln w="12700">
-            <a:solidFill>
-              <a:srgbClr val="D4AF37"/>
-            </a:solidFill>
-            <a:prstDash val="solid"/>
-          </a:ln>
-        </p:spPr>
-      </p:sp>
-      <p:sp>
-        <p:nvSpPr>
-          <p:cNvPr id="9" name="Text 5"/>
-          <p:cNvSpPr txBox="1"/>
-          <p:nvPr/>
-        </p:nvSpPr>
-        <p:spPr>
-          <a:xfrm>
-            <a:off x="777240" y="5669280"/>
-            <a:ext cx="10744200" cy="457200"/>
-          </a:xfrm>
-          <a:prstGeom prst="rect">
-            <a:avLst/>
-          </a:prstGeom>
-          <a:noFill/>
-          <a:ln/>
-        </p:spPr>
-        <p:txBody>
-          <a:bodyPr wrap="square" lIns="0" tIns="0" rIns="0" bIns="0" rtlCol="0" anchor="ctr"/>
-          <a:lstStyle/>
-          <a:p>
-            <a:pPr indent="0" marL="0">
-              <a:buNone/>
-            </a:pPr>
-            <a:r>
-              <a:rPr lang="en-US" sz="1150" b="1" dirty="0">
-                <a:solidFill>
-                  <a:srgbClr val="132257"/>
-                </a:solidFill>
-                <a:latin typeface="Exo 2" pitchFamily="34" charset="0"/>
-                <a:ea typeface="Exo 2" pitchFamily="34" charset="-122"/>
-                <a:cs typeface="Exo 2" pitchFamily="34" charset="-120"/>
-              </a:rPr>
-              <a:t>Takeaway   </a:t>
-            </a:r>
-            <a:pPr indent="0" marL="0">
-              <a:buNone/>
-            </a:pPr>
-            <a:r>
-              <a:rPr lang="en-US" sz="1150" dirty="0">
-                <a:solidFill>
-                  <a:srgbClr val="1F2A44"/>
-                </a:solidFill>
-                <a:latin typeface="Exo 2" pitchFamily="34" charset="0"/>
-                <a:ea typeface="Exo 2" pitchFamily="34" charset="-122"/>
-                <a:cs typeface="Exo 2" pitchFamily="34" charset="-120"/>
-              </a:rPr>
-              <a:t>With these, the next update reports cost per account against Board targets.</a:t>
-            </a:r>
-            <a:endParaRPr lang="en-US" sz="1150" dirty="0"/>
-          </a:p>
-        </p:txBody>
-      </p:sp>
-      <p:sp>
-        <p:nvSpPr>
-          <p:cNvPr id="10" name="Text 6"/>
-          <p:cNvSpPr txBox="1"/>
-          <p:nvPr/>
-        </p:nvSpPr>
-        <p:spPr>
-          <a:xfrm>
-            <a:off x="566928" y="6199632"/>
-            <a:ext cx="9692640" cy="274320"/>
-          </a:xfrm>
-          <a:prstGeom prst="rect">
-            <a:avLst/>
-          </a:prstGeom>
-          <a:noFill/>
-          <a:ln/>
-        </p:spPr>
-        <p:txBody>
-          <a:bodyPr wrap="square" lIns="0" tIns="0" rIns="0" bIns="0" rtlCol="0" anchor="t"/>
-          <a:lstStyle/>
-          <a:p>
-            <a:pPr indent="0" marL="0">
-              <a:buNone/>
-            </a:pPr>
-            <a:r>
-              <a:rPr lang="en-US" sz="800" dirty="0">
-                <a:solidFill>
-                  <a:srgbClr val="7A849C"/>
-                </a:solidFill>
-                <a:latin typeface="Exo 2" pitchFamily="34" charset="0"/>
-                <a:ea typeface="Exo 2" pitchFamily="34" charset="-122"/>
-                <a:cs typeface="Exo 2" pitchFamily="34" charset="-120"/>
-              </a:rPr>
-              <a:t>Source: Proposed by Marketing based on this update. Dates are proposals for CEO confirmation. CAC targets from the Board update, 17 Sep 2026.</a:t>
-            </a:r>
-            <a:endParaRPr lang="en-US" sz="800" dirty="0"/>
-          </a:p>
-        </p:txBody>
-      </p:sp>
-      <p:sp>
-        <p:nvSpPr>
-          <p:cNvPr id="11" name="Text 7"/>
-          <p:cNvSpPr txBox="1"/>
-          <p:nvPr/>
-        </p:nvSpPr>
-        <p:spPr>
-          <a:xfrm>
-            <a:off x="566928" y="6510528"/>
-            <a:ext cx="5486400" cy="201168"/>
-          </a:xfrm>
-          <a:prstGeom prst="rect">
-            <a:avLst/>
-          </a:prstGeom>
-          <a:noFill/>
-          <a:ln/>
-        </p:spPr>
-        <p:txBody>
-          <a:bodyPr wrap="square" lIns="0" tIns="0" rIns="0" bIns="0" rtlCol="0" anchor="t"/>
-          <a:lstStyle/>
-          <a:p>
-            <a:pPr indent="0" marL="0">
-              <a:buNone/>
-            </a:pPr>
-            <a:r>
-              <a:rPr lang="en-US" sz="800" dirty="0">
-                <a:solidFill>
-                  <a:srgbClr val="8A93A8"/>
-                </a:solidFill>
-                <a:latin typeface="Exo 2" pitchFamily="34" charset="0"/>
-                <a:ea typeface="Exo 2" pitchFamily="34" charset="-122"/>
-                <a:cs typeface="Exo 2" pitchFamily="34" charset="-120"/>
-              </a:rPr>
-              <a:t>eMYAA Trading Platform  |  CEO Marketing Update</a:t>
-            </a:r>
-            <a:endParaRPr lang="en-US" sz="800" dirty="0"/>
-          </a:p>
-        </p:txBody>
-      </p:sp>
-      <p:sp>
-        <p:nvSpPr>
-          <p:cNvPr id="12" name="Text 8"/>
-          <p:cNvSpPr txBox="1"/>
-          <p:nvPr/>
-        </p:nvSpPr>
-        <p:spPr>
-          <a:xfrm>
-            <a:off x="9802368" y="6510528"/>
-            <a:ext cx="457200" cy="201168"/>
-          </a:xfrm>
-          <a:prstGeom prst="rect">
-            <a:avLst/>
-          </a:prstGeom>
-          <a:noFill/>
-          <a:ln/>
-        </p:spPr>
-        <p:txBody>
-          <a:bodyPr wrap="square" lIns="0" tIns="0" rIns="0" bIns="0" rtlCol="0" anchor="t"/>
-          <a:lstStyle/>
-          <a:p>
-            <a:pPr algn="r" indent="0" marL="0">
-              <a:buNone/>
-            </a:pPr>
-            <a:r>
-              <a:rPr lang="en-US" sz="800" dirty="0">
-                <a:solidFill>
-                  <a:srgbClr val="8A93A8"/>
-                </a:solidFill>
-                <a:latin typeface="Exo 2" pitchFamily="34" charset="0"/>
-                <a:ea typeface="Exo 2" pitchFamily="34" charset="-122"/>
-                <a:cs typeface="Exo 2" pitchFamily="34" charset="-120"/>
-              </a:rPr>
-              <a:t>10</a:t>
-            </a:r>
-            <a:endParaRPr lang="en-US" sz="800" dirty="0"/>
-          </a:p>
-        </p:txBody>
-      </p:sp>
-      <p:pic>
-        <p:nvPicPr>
-          <p:cNvPr id="13" name="Image 2" descr="/home/user/HatemIsa_202508993_IT9002_NLP_Project/emyaa-ceo-deck/working/charts/emyaa_navy.png">    </p:cNvPr>
-          <p:cNvPicPr>
-            <a:picLocks noChangeAspect="1"/>
-          </p:cNvPicPr>
-          <p:nvPr/>
-        </p:nvPicPr>
-        <p:blipFill>
-          <a:blip r:embed="rId3"/>
-          <a:stretch>
-            <a:fillRect/>
-          </a:stretch>
-        </p:blipFill>
-        <p:spPr>
-          <a:xfrm>
-            <a:off x="10607040" y="6336792"/>
-            <a:ext cx="1024128" cy="365760"/>
-          </a:xfrm>
-          <a:prstGeom prst="rect">
-            <a:avLst/>
-          </a:prstGeom>
-        </p:spPr>
-      </p:pic>
-      <p:graphicFrame>
-        <p:nvGraphicFramePr>
-          <p:cNvPr id="11" name="Table 0"/>
-          <p:cNvGraphicFramePr>
-            <a:graphicFrameLocks noGrp="1"/>
-          </p:cNvGraphicFramePr>
-          <p:nvPr>
-            <p:extLst>
-              <p:ext uri="{D42A27DB-BD31-4B8C-83A1-F6EECF244321}">
-                <p14:modId xmlns:p14="http://schemas.microsoft.com/office/powerpoint/2010/main" val="1579011935"/>
-              </p:ext>
-            </p:extLst>
-          </p:nvPr>
-        </p:nvGraphicFramePr>
-        <p:xfrm>
-          <a:off x="566928" y="1536192"/>
-          <a:ext cx="11064240" cy="914400"/>
-        </p:xfrm>
-        <a:graphic>
-          <a:graphicData uri="http://schemas.openxmlformats.org/drawingml/2006/table">
-            <a:tbl>
-              <a:tblPr/>
-              <a:tblGrid>
-                <a:gridCol w="457200"/>
-                <a:gridCol w="4754880"/>
-                <a:gridCol w="1920240"/>
-                <a:gridCol w="1188720"/>
-                <a:gridCol w="2743200"/>
-              </a:tblGrid>
-              <a:tr h="384048">
-                <a:tc>
-                  <a:txBody>
-                    <a:bodyPr/>
-                    <a:lstStyle/>
-                    <a:p>
-                      <a:pPr indent="0" marL="0">
-                        <a:buNone/>
-                      </a:pPr>
-                      <a:endParaRPr lang="en-US" sz="1150" dirty="0">
-                        <a:latin typeface="Exo 2" charset="0"/>
-                        <a:ea typeface="Exo 2" charset="0"/>
-                        <a:cs typeface="Exo 2" charset="0"/>
-                      </a:endParaRPr>
-                    </a:p>
-                  </a:txBody>
-                  <a:tcPr marL="76200" marR="76200" marT="25400" marB="25400" anchor="ctr">
-                    <a:lnL w="0" cap="flat" cmpd="sng" algn="ctr">
-                      <a:noFill/>
-                    </a:lnL>
-                    <a:lnR w="0" cap="flat" cmpd="sng" algn="ctr">
-                      <a:noFill/>
-                    </a:lnR>
-                    <a:lnT w="0" cap="flat" cmpd="sng" algn="ctr">
-                      <a:noFill/>
-                    </a:lnT>
-                    <a:lnB w="0" cap="flat" cmpd="sng" algn="ctr">
-                      <a:noFill/>
-                    </a:lnB>
-                    <a:solidFill>
-                      <a:srgbClr val="132257"/>
-                    </a:solidFill>
-                  </a:tcPr>
-                </a:tc>
-                <a:tc>
-                  <a:txBody>
-                    <a:bodyPr/>
-                    <a:lstStyle/>
-                    <a:p>
-                      <a:pPr indent="0" marL="0">
-                        <a:buNone/>
-                      </a:pPr>
-                      <a:r>
-                        <a:rPr lang="en-US" sz="1150" b="1" dirty="0">
-                          <a:solidFill>
-                            <a:srgbClr val="FFFFFF"/>
-                          </a:solidFill>
-                          <a:latin typeface="Exo 2" pitchFamily="34" charset="0"/>
-                          <a:ea typeface="Exo 2" pitchFamily="34" charset="-122"/>
-                          <a:cs typeface="Exo 2" pitchFamily="34" charset="-120"/>
-                        </a:rPr>
-                        <a:t>Decision required</a:t>
-                      </a:r>
-                      <a:endParaRPr lang="en-US" sz="1150" dirty="0">
-                        <a:latin typeface="Exo 2" charset="0"/>
-                        <a:ea typeface="Exo 2" charset="0"/>
-                        <a:cs typeface="Exo 2" charset="0"/>
-                      </a:endParaRPr>
-                    </a:p>
-                  </a:txBody>
-                  <a:tcPr marL="76200" marR="76200" marT="25400" marB="25400" anchor="ctr">
-                    <a:lnL w="0" cap="flat" cmpd="sng" algn="ctr">
-                      <a:noFill/>
-                    </a:lnL>
-                    <a:lnR w="0" cap="flat" cmpd="sng" algn="ctr">
-                      <a:noFill/>
-                    </a:lnR>
-                    <a:lnT w="0" cap="flat" cmpd="sng" algn="ctr">
-                      <a:noFill/>
-                    </a:lnT>
-                    <a:lnB w="0" cap="flat" cmpd="sng" algn="ctr">
-                      <a:noFill/>
-                    </a:lnB>
-                    <a:solidFill>
-                      <a:srgbClr val="132257"/>
-                    </a:solidFill>
-                  </a:tcPr>
-                </a:tc>
-                <a:tc>
-                  <a:txBody>
-                    <a:bodyPr/>
-                    <a:lstStyle/>
-                    <a:p>
-                      <a:pPr indent="0" marL="0">
-                        <a:buNone/>
-                      </a:pPr>
-                      <a:r>
-                        <a:rPr lang="en-US" sz="1150" b="1" dirty="0">
-                          <a:solidFill>
-                            <a:srgbClr val="FFFFFF"/>
-                          </a:solidFill>
-                          <a:latin typeface="Exo 2" pitchFamily="34" charset="0"/>
-                          <a:ea typeface="Exo 2" pitchFamily="34" charset="-122"/>
-                          <a:cs typeface="Exo 2" pitchFamily="34" charset="-120"/>
-                        </a:rPr>
-                        <a:t>Owner</a:t>
-                      </a:r>
-                      <a:endParaRPr lang="en-US" sz="1150" dirty="0">
-                        <a:latin typeface="Exo 2" charset="0"/>
-                        <a:ea typeface="Exo 2" charset="0"/>
-                        <a:cs typeface="Exo 2" charset="0"/>
-                      </a:endParaRPr>
-                    </a:p>
-                  </a:txBody>
-                  <a:tcPr marL="76200" marR="76200" marT="25400" marB="25400" anchor="ctr">
-                    <a:lnL w="0" cap="flat" cmpd="sng" algn="ctr">
-                      <a:noFill/>
-                    </a:lnL>
-                    <a:lnR w="0" cap="flat" cmpd="sng" algn="ctr">
-                      <a:noFill/>
-                    </a:lnR>
-                    <a:lnT w="0" cap="flat" cmpd="sng" algn="ctr">
-                      <a:noFill/>
-                    </a:lnT>
-                    <a:lnB w="0" cap="flat" cmpd="sng" algn="ctr">
-                      <a:noFill/>
-                    </a:lnB>
-                    <a:solidFill>
-                      <a:srgbClr val="132257"/>
-                    </a:solidFill>
-                  </a:tcPr>
-                </a:tc>
-                <a:tc>
-                  <a:txBody>
-                    <a:bodyPr/>
-                    <a:lstStyle/>
-                    <a:p>
-                      <a:pPr indent="0" marL="0">
-                        <a:buNone/>
-                      </a:pPr>
-                      <a:r>
-                        <a:rPr lang="en-US" sz="1150" b="1" dirty="0">
-                          <a:solidFill>
-                            <a:srgbClr val="FFFFFF"/>
-                          </a:solidFill>
-                          <a:latin typeface="Exo 2" pitchFamily="34" charset="0"/>
-                          <a:ea typeface="Exo 2" pitchFamily="34" charset="-122"/>
-                          <a:cs typeface="Exo 2" pitchFamily="34" charset="-120"/>
-                        </a:rPr>
-                        <a:t>By</a:t>
-                      </a:r>
-                      <a:endParaRPr lang="en-US" sz="1150" dirty="0">
-                        <a:latin typeface="Exo 2" charset="0"/>
-                        <a:ea typeface="Exo 2" charset="0"/>
-                        <a:cs typeface="Exo 2" charset="0"/>
-                      </a:endParaRPr>
-                    </a:p>
-                  </a:txBody>
-                  <a:tcPr marL="76200" marR="76200" marT="25400" marB="25400" anchor="ctr">
-                    <a:lnL w="0" cap="flat" cmpd="sng" algn="ctr">
-                      <a:noFill/>
-                    </a:lnL>
-                    <a:lnR w="0" cap="flat" cmpd="sng" algn="ctr">
-                      <a:noFill/>
-                    </a:lnR>
-                    <a:lnT w="0" cap="flat" cmpd="sng" algn="ctr">
-                      <a:noFill/>
-                    </a:lnT>
-                    <a:lnB w="0" cap="flat" cmpd="sng" algn="ctr">
-                      <a:noFill/>
-                    </a:lnB>
-                    <a:solidFill>
-                      <a:srgbClr val="132257"/>
-                    </a:solidFill>
-                  </a:tcPr>
-                </a:tc>
-                <a:tc>
-                  <a:txBody>
-                    <a:bodyPr/>
-                    <a:lstStyle/>
-                    <a:p>
-                      <a:pPr indent="0" marL="0">
-                        <a:buNone/>
-                      </a:pPr>
-                      <a:r>
-                        <a:rPr lang="en-US" sz="1150" b="1" dirty="0">
-                          <a:solidFill>
-                            <a:srgbClr val="FFFFFF"/>
-                          </a:solidFill>
-                          <a:latin typeface="Exo 2" pitchFamily="34" charset="0"/>
-                          <a:ea typeface="Exo 2" pitchFamily="34" charset="-122"/>
-                          <a:cs typeface="Exo 2" pitchFamily="34" charset="-120"/>
-                        </a:rPr>
-                        <a:t>Expected outcome</a:t>
-                      </a:r>
-                      <a:endParaRPr lang="en-US" sz="1150" dirty="0">
-                        <a:latin typeface="Exo 2" charset="0"/>
-                        <a:ea typeface="Exo 2" charset="0"/>
-                        <a:cs typeface="Exo 2" charset="0"/>
-                      </a:endParaRPr>
-                    </a:p>
-                  </a:txBody>
-                  <a:tcPr marL="76200" marR="76200" marT="25400" marB="25400" anchor="ctr">
-                    <a:lnL w="0" cap="flat" cmpd="sng" algn="ctr">
-                      <a:noFill/>
-                    </a:lnL>
-                    <a:lnR w="0" cap="flat" cmpd="sng" algn="ctr">
-                      <a:noFill/>
-                    </a:lnR>
-                    <a:lnT w="0" cap="flat" cmpd="sng" algn="ctr">
-                      <a:noFill/>
-                    </a:lnT>
-                    <a:lnB w="0" cap="flat" cmpd="sng" algn="ctr">
-                      <a:noFill/>
-                    </a:lnB>
-                    <a:solidFill>
-                      <a:srgbClr val="132257"/>
-                    </a:solidFill>
-                  </a:tcPr>
-                </a:tc>
-              </a:tr>
-              <a:tr h="676656">
-                <a:tc>
-                  <a:txBody>
-                    <a:bodyPr/>
-                    <a:lstStyle/>
-                    <a:p>
-                      <a:pPr indent="0" marL="0">
-                        <a:buNone/>
-                      </a:pPr>
-                      <a:r>
-                        <a:rPr lang="en-US" sz="1600" b="1" dirty="0">
-                          <a:solidFill>
-                            <a:srgbClr val="D4AF37"/>
-                          </a:solidFill>
-                          <a:latin typeface="Exo 2" pitchFamily="34" charset="0"/>
-                          <a:ea typeface="Exo 2" pitchFamily="34" charset="-122"/>
-                          <a:cs typeface="Exo 2" pitchFamily="34" charset="-120"/>
-                        </a:rPr>
-                        <a:t>1</a:t>
-                      </a:r>
-                      <a:endParaRPr lang="en-US" sz="1600" dirty="0">
-                        <a:latin typeface="Exo 2" charset="0"/>
-                        <a:ea typeface="Exo 2" charset="0"/>
-                        <a:cs typeface="Exo 2" charset="0"/>
-                      </a:endParaRPr>
-                    </a:p>
-                  </a:txBody>
-                  <a:tcPr marL="76200" marR="76200" marT="25400" marB="25400" anchor="ctr">
-                    <a:lnL w="0" cap="flat" cmpd="sng" algn="ctr">
-                      <a:noFill/>
-                    </a:lnL>
-                    <a:lnR w="0" cap="flat" cmpd="sng" algn="ctr">
-                      <a:noFill/>
-                    </a:lnR>
-                    <a:lnT w="0" cap="flat" cmpd="sng" algn="ctr">
-                      <a:noFill/>
-                    </a:lnT>
-                    <a:lnB w="9525" cap="flat" cmpd="sng" algn="ctr">
-                      <a:solidFill>
-                        <a:srgbClr val="D9DFEA"/>
-                      </a:solidFill>
-                      <a:prstDash val="solid"/>
-                      <a:round/>
-                      <a:headEnd type="none" w="med" len="med"/>
-                      <a:tailEnd type="none" w="med" len="med"/>
-                    </a:lnB>
-                  </a:tcPr>
-                </a:tc>
-                <a:tc>
-                  <a:txBody>
-                    <a:bodyPr/>
-                    <a:lstStyle/>
-                    <a:p>
-                      <a:pPr indent="0" marL="0">
-                        <a:buNone/>
-                      </a:pPr>
-                      <a:r>
-                        <a:rPr lang="en-US" sz="1200" dirty="0">
-                          <a:solidFill>
-                            <a:srgbClr val="1F2A44"/>
-                          </a:solidFill>
-                          <a:latin typeface="Exo 2" pitchFamily="34" charset="0"/>
-                          <a:ea typeface="Exo 2" pitchFamily="34" charset="-122"/>
-                          <a:cs typeface="Exo 2" pitchFamily="34" charset="-120"/>
-                        </a:rPr>
-                        <a:t>Set 20 Oct as the go or hold point for paid media, judged on cost per account against Board CAC targets</a:t>
-                      </a:r>
-                      <a:endParaRPr lang="en-US" sz="1200" dirty="0">
-                        <a:latin typeface="Exo 2" charset="0"/>
-                        <a:ea typeface="Exo 2" charset="0"/>
-                        <a:cs typeface="Exo 2" charset="0"/>
-                      </a:endParaRPr>
-                    </a:p>
-                  </a:txBody>
-                  <a:tcPr marL="76200" marR="76200" marT="25400" marB="25400" anchor="ctr">
-                    <a:lnL w="0" cap="flat" cmpd="sng" algn="ctr">
-                      <a:noFill/>
-                    </a:lnL>
-                    <a:lnR w="0" cap="flat" cmpd="sng" algn="ctr">
-                      <a:noFill/>
-                    </a:lnR>
-                    <a:lnT w="0" cap="flat" cmpd="sng" algn="ctr">
-                      <a:noFill/>
-                    </a:lnT>
-                    <a:lnB w="9525" cap="flat" cmpd="sng" algn="ctr">
-                      <a:solidFill>
-                        <a:srgbClr val="D9DFEA"/>
-                      </a:solidFill>
-                      <a:prstDash val="solid"/>
-                      <a:round/>
-                      <a:headEnd type="none" w="med" len="med"/>
-                      <a:tailEnd type="none" w="med" len="med"/>
-                    </a:lnB>
-                  </a:tcPr>
-                </a:tc>
-                <a:tc>
-                  <a:txBody>
-                    <a:bodyPr/>
-                    <a:lstStyle/>
-                    <a:p>
-                      <a:pPr indent="0" marL="0">
-                        <a:buNone/>
-                      </a:pPr>
-                      <a:r>
-                        <a:rPr lang="en-US" sz="1200" dirty="0">
-                          <a:solidFill>
-                            <a:srgbClr val="1F2A44"/>
-                          </a:solidFill>
-                          <a:latin typeface="Exo 2" pitchFamily="34" charset="0"/>
-                          <a:ea typeface="Exo 2" pitchFamily="34" charset="-122"/>
-                          <a:cs typeface="Exo 2" pitchFamily="34" charset="-120"/>
-                        </a:rPr>
-                        <a:t>Marketing with Ignite</a:t>
-                      </a:r>
-                      <a:endParaRPr lang="en-US" sz="1200" dirty="0">
-                        <a:latin typeface="Exo 2" charset="0"/>
-                        <a:ea typeface="Exo 2" charset="0"/>
-                        <a:cs typeface="Exo 2" charset="0"/>
-                      </a:endParaRPr>
-                    </a:p>
-                  </a:txBody>
-                  <a:tcPr marL="76200" marR="76200" marT="25400" marB="25400" anchor="ctr">
-                    <a:lnL w="0" cap="flat" cmpd="sng" algn="ctr">
-                      <a:noFill/>
-                    </a:lnL>
-                    <a:lnR w="0" cap="flat" cmpd="sng" algn="ctr">
-                      <a:noFill/>
-                    </a:lnR>
-                    <a:lnT w="0" cap="flat" cmpd="sng" algn="ctr">
-                      <a:noFill/>
-                    </a:lnT>
-                    <a:lnB w="9525" cap="flat" cmpd="sng" algn="ctr">
-                      <a:solidFill>
-                        <a:srgbClr val="D9DFEA"/>
-                      </a:solidFill>
-                      <a:prstDash val="solid"/>
-                      <a:round/>
-                      <a:headEnd type="none" w="med" len="med"/>
-                      <a:tailEnd type="none" w="med" len="med"/>
-                    </a:lnB>
-                  </a:tcPr>
-                </a:tc>
-                <a:tc>
-                  <a:txBody>
-                    <a:bodyPr/>
-                    <a:lstStyle/>
-                    <a:p>
-                      <a:pPr indent="0" marL="0">
-                        <a:buNone/>
-                      </a:pPr>
-                      <a:r>
-                        <a:rPr lang="en-US" sz="1200" dirty="0">
-                          <a:solidFill>
-                            <a:srgbClr val="1F2A44"/>
-                          </a:solidFill>
-                          <a:latin typeface="Exo 2" pitchFamily="34" charset="0"/>
-                          <a:ea typeface="Exo 2" pitchFamily="34" charset="-122"/>
-                          <a:cs typeface="Exo 2" pitchFamily="34" charset="-120"/>
-                        </a:rPr>
-                        <a:t>20 Oct</a:t>
-                      </a:r>
-                      <a:endParaRPr lang="en-US" sz="1200" dirty="0">
-                        <a:latin typeface="Exo 2" charset="0"/>
-                        <a:ea typeface="Exo 2" charset="0"/>
-                        <a:cs typeface="Exo 2" charset="0"/>
-                      </a:endParaRPr>
-                    </a:p>
-                  </a:txBody>
-                  <a:tcPr marL="76200" marR="76200" marT="25400" marB="25400" anchor="ctr">
-                    <a:lnL w="0" cap="flat" cmpd="sng" algn="ctr">
-                      <a:noFill/>
-                    </a:lnL>
-                    <a:lnR w="0" cap="flat" cmpd="sng" algn="ctr">
-                      <a:noFill/>
-                    </a:lnR>
-                    <a:lnT w="0" cap="flat" cmpd="sng" algn="ctr">
-                      <a:noFill/>
-                    </a:lnT>
-                    <a:lnB w="9525" cap="flat" cmpd="sng" algn="ctr">
-                      <a:solidFill>
-                        <a:srgbClr val="D9DFEA"/>
-                      </a:solidFill>
-                      <a:prstDash val="solid"/>
-                      <a:round/>
-                      <a:headEnd type="none" w="med" len="med"/>
-                      <a:tailEnd type="none" w="med" len="med"/>
-                    </a:lnB>
-                  </a:tcPr>
-                </a:tc>
-                <a:tc>
-                  <a:txBody>
-                    <a:bodyPr/>
-                    <a:lstStyle/>
-                    <a:p>
-                      <a:pPr indent="0" marL="0">
-                        <a:buNone/>
-                      </a:pPr>
-                      <a:r>
-                        <a:rPr lang="en-US" sz="1200" dirty="0">
-                          <a:solidFill>
-                            <a:srgbClr val="1F2A44"/>
-                          </a:solidFill>
-                          <a:latin typeface="Exo 2" pitchFamily="34" charset="0"/>
-                          <a:ea typeface="Exo 2" pitchFamily="34" charset="-122"/>
-                          <a:cs typeface="Exo 2" pitchFamily="34" charset="-120"/>
-                        </a:rPr>
-                        <a:t>Remaining budget goes to what converts</a:t>
-                      </a:r>
-                      <a:endParaRPr lang="en-US" sz="1200" dirty="0">
-                        <a:latin typeface="Exo 2" charset="0"/>
-                        <a:ea typeface="Exo 2" charset="0"/>
-                        <a:cs typeface="Exo 2" charset="0"/>
-                      </a:endParaRPr>
-                    </a:p>
-                  </a:txBody>
-                  <a:tcPr marL="76200" marR="76200" marT="25400" marB="25400" anchor="ctr">
-                    <a:lnL w="0" cap="flat" cmpd="sng" algn="ctr">
-                      <a:noFill/>
-                    </a:lnL>
-                    <a:lnR w="0" cap="flat" cmpd="sng" algn="ctr">
-                      <a:noFill/>
-                    </a:lnR>
-                    <a:lnT w="0" cap="flat" cmpd="sng" algn="ctr">
-                      <a:noFill/>
-                    </a:lnT>
-                    <a:lnB w="9525" cap="flat" cmpd="sng" algn="ctr">
-                      <a:solidFill>
-                        <a:srgbClr val="D9DFEA"/>
-                      </a:solidFill>
-                      <a:prstDash val="solid"/>
-                      <a:round/>
-                      <a:headEnd type="none" w="med" len="med"/>
-                      <a:tailEnd type="none" w="med" len="med"/>
-                    </a:lnB>
-                  </a:tcPr>
-                </a:tc>
-              </a:tr>
-              <a:tr h="676656">
-                <a:tc>
-                  <a:txBody>
-                    <a:bodyPr/>
-                    <a:lstStyle/>
-                    <a:p>
-                      <a:pPr indent="0" marL="0">
-                        <a:buNone/>
-                      </a:pPr>
-                      <a:r>
-                        <a:rPr lang="en-US" sz="1600" b="1" dirty="0">
-                          <a:solidFill>
-                            <a:srgbClr val="D4AF37"/>
-                          </a:solidFill>
-                          <a:latin typeface="Exo 2" pitchFamily="34" charset="0"/>
-                          <a:ea typeface="Exo 2" pitchFamily="34" charset="-122"/>
-                          <a:cs typeface="Exo 2" pitchFamily="34" charset="-120"/>
-                        </a:rPr>
-                        <a:t>2</a:t>
-                      </a:r>
-                      <a:endParaRPr lang="en-US" sz="1600" dirty="0">
-                        <a:latin typeface="Exo 2" charset="0"/>
-                        <a:ea typeface="Exo 2" charset="0"/>
-                        <a:cs typeface="Exo 2" charset="0"/>
-                      </a:endParaRPr>
-                    </a:p>
-                  </a:txBody>
-                  <a:tcPr marL="76200" marR="76200" marT="25400" marB="25400" anchor="ctr">
-                    <a:lnL w="0" cap="flat" cmpd="sng" algn="ctr">
-                      <a:noFill/>
-                    </a:lnL>
-                    <a:lnR w="0" cap="flat" cmpd="sng" algn="ctr">
-                      <a:noFill/>
-                    </a:lnR>
-                    <a:lnT w="0" cap="flat" cmpd="sng" algn="ctr">
-                      <a:noFill/>
-                    </a:lnT>
-                    <a:lnB w="9525" cap="flat" cmpd="sng" algn="ctr">
-                      <a:solidFill>
-                        <a:srgbClr val="D9DFEA"/>
-                      </a:solidFill>
-                      <a:prstDash val="solid"/>
-                      <a:round/>
-                      <a:headEnd type="none" w="med" len="med"/>
-                      <a:tailEnd type="none" w="med" len="med"/>
-                    </a:lnB>
-                  </a:tcPr>
-                </a:tc>
-                <a:tc>
-                  <a:txBody>
-                    <a:bodyPr/>
-                    <a:lstStyle/>
-                    <a:p>
-                      <a:pPr indent="0" marL="0">
-                        <a:buNone/>
-                      </a:pPr>
-                      <a:r>
-                        <a:rPr lang="en-US" sz="1200" dirty="0">
-                          <a:solidFill>
-                            <a:srgbClr val="1F2A44"/>
-                          </a:solidFill>
-                          <a:latin typeface="Exo 2" pitchFamily="34" charset="0"/>
-                          <a:ea typeface="Exo 2" pitchFamily="34" charset="-122"/>
-                          <a:cs typeface="Exo 2" pitchFamily="34" charset="-120"/>
-                        </a:rPr>
-                        <a:t>Keep both Arabic and English ads live until the key event is defined and costed</a:t>
-                      </a:r>
-                      <a:endParaRPr lang="en-US" sz="1200" dirty="0">
-                        <a:latin typeface="Exo 2" charset="0"/>
-                        <a:ea typeface="Exo 2" charset="0"/>
-                        <a:cs typeface="Exo 2" charset="0"/>
-                      </a:endParaRPr>
-                    </a:p>
-                  </a:txBody>
-                  <a:tcPr marL="76200" marR="76200" marT="25400" marB="25400" anchor="ctr">
-                    <a:lnL w="0" cap="flat" cmpd="sng" algn="ctr">
-                      <a:noFill/>
-                    </a:lnL>
-                    <a:lnR w="0" cap="flat" cmpd="sng" algn="ctr">
-                      <a:noFill/>
-                    </a:lnR>
-                    <a:lnT w="0" cap="flat" cmpd="sng" algn="ctr">
-                      <a:noFill/>
-                    </a:lnT>
-                    <a:lnB w="9525" cap="flat" cmpd="sng" algn="ctr">
-                      <a:solidFill>
-                        <a:srgbClr val="D9DFEA"/>
-                      </a:solidFill>
-                      <a:prstDash val="solid"/>
-                      <a:round/>
-                      <a:headEnd type="none" w="med" len="med"/>
-                      <a:tailEnd type="none" w="med" len="med"/>
-                    </a:lnB>
-                  </a:tcPr>
-                </a:tc>
-                <a:tc>
-                  <a:txBody>
-                    <a:bodyPr/>
-                    <a:lstStyle/>
-                    <a:p>
-                      <a:pPr indent="0" marL="0">
-                        <a:buNone/>
-                      </a:pPr>
-                      <a:r>
-                        <a:rPr lang="en-US" sz="1200" dirty="0">
-                          <a:solidFill>
-                            <a:srgbClr val="1F2A44"/>
-                          </a:solidFill>
-                          <a:latin typeface="Exo 2" pitchFamily="34" charset="0"/>
-                          <a:ea typeface="Exo 2" pitchFamily="34" charset="-122"/>
-                          <a:cs typeface="Exo 2" pitchFamily="34" charset="-120"/>
-                        </a:rPr>
-                        <a:t>Marketing</a:t>
-                      </a:r>
-                      <a:endParaRPr lang="en-US" sz="1200" dirty="0">
-                        <a:latin typeface="Exo 2" charset="0"/>
-                        <a:ea typeface="Exo 2" charset="0"/>
-                        <a:cs typeface="Exo 2" charset="0"/>
-                      </a:endParaRPr>
-                    </a:p>
-                  </a:txBody>
-                  <a:tcPr marL="76200" marR="76200" marT="25400" marB="25400" anchor="ctr">
-                    <a:lnL w="0" cap="flat" cmpd="sng" algn="ctr">
-                      <a:noFill/>
-                    </a:lnL>
-                    <a:lnR w="0" cap="flat" cmpd="sng" algn="ctr">
-                      <a:noFill/>
-                    </a:lnR>
-                    <a:lnT w="0" cap="flat" cmpd="sng" algn="ctr">
-                      <a:noFill/>
-                    </a:lnT>
-                    <a:lnB w="9525" cap="flat" cmpd="sng" algn="ctr">
-                      <a:solidFill>
-                        <a:srgbClr val="D9DFEA"/>
-                      </a:solidFill>
-                      <a:prstDash val="solid"/>
-                      <a:round/>
-                      <a:headEnd type="none" w="med" len="med"/>
-                      <a:tailEnd type="none" w="med" len="med"/>
-                    </a:lnB>
-                  </a:tcPr>
-                </a:tc>
-                <a:tc>
-                  <a:txBody>
-                    <a:bodyPr/>
-                    <a:lstStyle/>
-                    <a:p>
-                      <a:pPr indent="0" marL="0">
-                        <a:buNone/>
-                      </a:pPr>
-                      <a:r>
-                        <a:rPr lang="en-US" sz="1200" dirty="0">
-                          <a:solidFill>
-                            <a:srgbClr val="1F2A44"/>
-                          </a:solidFill>
-                          <a:latin typeface="Exo 2" pitchFamily="34" charset="0"/>
-                          <a:ea typeface="Exo 2" pitchFamily="34" charset="-122"/>
-                          <a:cs typeface="Exo 2" pitchFamily="34" charset="-120"/>
-                        </a:rPr>
-                        <a:t>10 Oct</a:t>
-                      </a:r>
-                      <a:endParaRPr lang="en-US" sz="1200" dirty="0">
-                        <a:latin typeface="Exo 2" charset="0"/>
-                        <a:ea typeface="Exo 2" charset="0"/>
-                        <a:cs typeface="Exo 2" charset="0"/>
-                      </a:endParaRPr>
-                    </a:p>
-                  </a:txBody>
-                  <a:tcPr marL="76200" marR="76200" marT="25400" marB="25400" anchor="ctr">
-                    <a:lnL w="0" cap="flat" cmpd="sng" algn="ctr">
-                      <a:noFill/>
-                    </a:lnL>
-                    <a:lnR w="0" cap="flat" cmpd="sng" algn="ctr">
-                      <a:noFill/>
-                    </a:lnR>
-                    <a:lnT w="0" cap="flat" cmpd="sng" algn="ctr">
-                      <a:noFill/>
-                    </a:lnT>
-                    <a:lnB w="9525" cap="flat" cmpd="sng" algn="ctr">
-                      <a:solidFill>
-                        <a:srgbClr val="D9DFEA"/>
-                      </a:solidFill>
-                      <a:prstDash val="solid"/>
-                      <a:round/>
-                      <a:headEnd type="none" w="med" len="med"/>
-                      <a:tailEnd type="none" w="med" len="med"/>
-                    </a:lnB>
-                  </a:tcPr>
-                </a:tc>
-                <a:tc>
-                  <a:txBody>
-                    <a:bodyPr/>
-                    <a:lstStyle/>
-                    <a:p>
-                      <a:pPr indent="0" marL="0">
-                        <a:buNone/>
-                      </a:pPr>
-                      <a:r>
-                        <a:rPr lang="en-US" sz="1200" dirty="0">
-                          <a:solidFill>
-                            <a:srgbClr val="1F2A44"/>
-                          </a:solidFill>
-                          <a:latin typeface="Exo 2" pitchFamily="34" charset="0"/>
-                          <a:ea typeface="Exo 2" pitchFamily="34" charset="-122"/>
-                          <a:cs typeface="Exo 2" pitchFamily="34" charset="-120"/>
-                        </a:rPr>
-                        <a:t>No cut to the version with more key events</a:t>
-                      </a:r>
-                      <a:endParaRPr lang="en-US" sz="1200" dirty="0">
-                        <a:latin typeface="Exo 2" charset="0"/>
-                        <a:ea typeface="Exo 2" charset="0"/>
-                        <a:cs typeface="Exo 2" charset="0"/>
-                      </a:endParaRPr>
-                    </a:p>
-                  </a:txBody>
-                  <a:tcPr marL="76200" marR="76200" marT="25400" marB="25400" anchor="ctr">
-                    <a:lnL w="0" cap="flat" cmpd="sng" algn="ctr">
-                      <a:noFill/>
-                    </a:lnL>
-                    <a:lnR w="0" cap="flat" cmpd="sng" algn="ctr">
-                      <a:noFill/>
-                    </a:lnR>
-                    <a:lnT w="0" cap="flat" cmpd="sng" algn="ctr">
-                      <a:noFill/>
-                    </a:lnT>
-                    <a:lnB w="9525" cap="flat" cmpd="sng" algn="ctr">
-                      <a:solidFill>
-                        <a:srgbClr val="D9DFEA"/>
-                      </a:solidFill>
-                      <a:prstDash val="solid"/>
-                      <a:round/>
-                      <a:headEnd type="none" w="med" len="med"/>
-                      <a:tailEnd type="none" w="med" len="med"/>
-                    </a:lnB>
-                  </a:tcPr>
-                </a:tc>
-              </a:tr>
-              <a:tr h="676656">
-                <a:tc>
-                  <a:txBody>
-                    <a:bodyPr/>
-                    <a:lstStyle/>
-                    <a:p>
-                      <a:pPr indent="0" marL="0">
-                        <a:buNone/>
-                      </a:pPr>
-                      <a:r>
-                        <a:rPr lang="en-US" sz="1600" b="1" dirty="0">
-                          <a:solidFill>
-                            <a:srgbClr val="D4AF37"/>
-                          </a:solidFill>
-                          <a:latin typeface="Exo 2" pitchFamily="34" charset="0"/>
-                          <a:ea typeface="Exo 2" pitchFamily="34" charset="-122"/>
-                          <a:cs typeface="Exo 2" pitchFamily="34" charset="-120"/>
-                        </a:rPr>
-                        <a:t>3</a:t>
-                      </a:r>
-                      <a:endParaRPr lang="en-US" sz="1600" dirty="0">
-                        <a:latin typeface="Exo 2" charset="0"/>
-                        <a:ea typeface="Exo 2" charset="0"/>
-                        <a:cs typeface="Exo 2" charset="0"/>
-                      </a:endParaRPr>
-                    </a:p>
-                  </a:txBody>
-                  <a:tcPr marL="76200" marR="76200" marT="25400" marB="25400" anchor="ctr">
-                    <a:lnL w="0" cap="flat" cmpd="sng" algn="ctr">
-                      <a:noFill/>
-                    </a:lnL>
-                    <a:lnR w="0" cap="flat" cmpd="sng" algn="ctr">
-                      <a:noFill/>
-                    </a:lnR>
-                    <a:lnT w="0" cap="flat" cmpd="sng" algn="ctr">
-                      <a:noFill/>
-                    </a:lnT>
-                    <a:lnB w="9525" cap="flat" cmpd="sng" algn="ctr">
-                      <a:solidFill>
-                        <a:srgbClr val="D9DFEA"/>
-                      </a:solidFill>
-                      <a:prstDash val="solid"/>
-                      <a:round/>
-                      <a:headEnd type="none" w="med" len="med"/>
-                      <a:tailEnd type="none" w="med" len="med"/>
-                    </a:lnB>
-                  </a:tcPr>
-                </a:tc>
-                <a:tc>
-                  <a:txBody>
-                    <a:bodyPr/>
-                    <a:lstStyle/>
-                    <a:p>
-                      <a:pPr indent="0" marL="0">
-                        <a:buNone/>
-                      </a:pPr>
-                      <a:r>
-                        <a:rPr lang="en-US" sz="1200" dirty="0">
-                          <a:solidFill>
-                            <a:srgbClr val="1F2A44"/>
-                          </a:solidFill>
-                          <a:latin typeface="Exo 2" pitchFamily="34" charset="0"/>
-                          <a:ea typeface="Exo 2" pitchFamily="34" charset="-122"/>
-                          <a:cs typeface="Exo 2" pitchFamily="34" charset="-120"/>
-                        </a:rPr>
-                        <a:t>Fix onboarding drop-off: follow up every new download that has not completed KYC</a:t>
-                      </a:r>
-                      <a:endParaRPr lang="en-US" sz="1200" dirty="0">
-                        <a:latin typeface="Exo 2" charset="0"/>
-                        <a:ea typeface="Exo 2" charset="0"/>
-                        <a:cs typeface="Exo 2" charset="0"/>
-                      </a:endParaRPr>
-                    </a:p>
-                  </a:txBody>
-                  <a:tcPr marL="76200" marR="76200" marT="25400" marB="25400" anchor="ctr">
-                    <a:lnL w="0" cap="flat" cmpd="sng" algn="ctr">
-                      <a:noFill/>
-                    </a:lnL>
-                    <a:lnR w="0" cap="flat" cmpd="sng" algn="ctr">
-                      <a:noFill/>
-                    </a:lnR>
-                    <a:lnT w="0" cap="flat" cmpd="sng" algn="ctr">
-                      <a:noFill/>
-                    </a:lnT>
-                    <a:lnB w="9525" cap="flat" cmpd="sng" algn="ctr">
-                      <a:solidFill>
-                        <a:srgbClr val="D9DFEA"/>
-                      </a:solidFill>
-                      <a:prstDash val="solid"/>
-                      <a:round/>
-                      <a:headEnd type="none" w="med" len="med"/>
-                      <a:tailEnd type="none" w="med" len="med"/>
-                    </a:lnB>
-                  </a:tcPr>
-                </a:tc>
-                <a:tc>
-                  <a:txBody>
-                    <a:bodyPr/>
-                    <a:lstStyle/>
-                    <a:p>
-                      <a:pPr indent="0" marL="0">
-                        <a:buNone/>
-                      </a:pPr>
-                      <a:r>
-                        <a:rPr lang="en-US" sz="1200" dirty="0">
-                          <a:solidFill>
-                            <a:srgbClr val="1F2A44"/>
-                          </a:solidFill>
-                          <a:latin typeface="Exo 2" pitchFamily="34" charset="0"/>
-                          <a:ea typeface="Exo 2" pitchFamily="34" charset="-122"/>
-                          <a:cs typeface="Exo 2" pitchFamily="34" charset="-120"/>
-                        </a:rPr>
-                        <a:t>Client Experience</a:t>
-                      </a:r>
-                      <a:endParaRPr lang="en-US" sz="1200" dirty="0">
-                        <a:latin typeface="Exo 2" charset="0"/>
-                        <a:ea typeface="Exo 2" charset="0"/>
-                        <a:cs typeface="Exo 2" charset="0"/>
-                      </a:endParaRPr>
-                    </a:p>
-                  </a:txBody>
-                  <a:tcPr marL="76200" marR="76200" marT="25400" marB="25400" anchor="ctr">
-                    <a:lnL w="0" cap="flat" cmpd="sng" algn="ctr">
-                      <a:noFill/>
-                    </a:lnL>
-                    <a:lnR w="0" cap="flat" cmpd="sng" algn="ctr">
-                      <a:noFill/>
-                    </a:lnR>
-                    <a:lnT w="0" cap="flat" cmpd="sng" algn="ctr">
-                      <a:noFill/>
-                    </a:lnT>
-                    <a:lnB w="9525" cap="flat" cmpd="sng" algn="ctr">
-                      <a:solidFill>
-                        <a:srgbClr val="D9DFEA"/>
-                      </a:solidFill>
-                      <a:prstDash val="solid"/>
-                      <a:round/>
-                      <a:headEnd type="none" w="med" len="med"/>
-                      <a:tailEnd type="none" w="med" len="med"/>
-                    </a:lnB>
-                  </a:tcPr>
-                </a:tc>
-                <a:tc>
-                  <a:txBody>
-                    <a:bodyPr/>
-                    <a:lstStyle/>
-                    <a:p>
-                      <a:pPr indent="0" marL="0">
-                        <a:buNone/>
-                      </a:pPr>
-                      <a:r>
-                        <a:rPr lang="en-US" sz="1200" dirty="0">
-                          <a:solidFill>
-                            <a:srgbClr val="1F2A44"/>
-                          </a:solidFill>
-                          <a:latin typeface="Exo 2" pitchFamily="34" charset="0"/>
-                          <a:ea typeface="Exo 2" pitchFamily="34" charset="-122"/>
-                          <a:cs typeface="Exo 2" pitchFamily="34" charset="-120"/>
-                        </a:rPr>
-                        <a:t>10 Oct</a:t>
-                      </a:r>
-                      <a:endParaRPr lang="en-US" sz="1200" dirty="0">
-                        <a:latin typeface="Exo 2" charset="0"/>
-                        <a:ea typeface="Exo 2" charset="0"/>
-                        <a:cs typeface="Exo 2" charset="0"/>
-                      </a:endParaRPr>
-                    </a:p>
-                  </a:txBody>
-                  <a:tcPr marL="76200" marR="76200" marT="25400" marB="25400" anchor="ctr">
-                    <a:lnL w="0" cap="flat" cmpd="sng" algn="ctr">
-                      <a:noFill/>
-                    </a:lnL>
-                    <a:lnR w="0" cap="flat" cmpd="sng" algn="ctr">
-                      <a:noFill/>
-                    </a:lnR>
-                    <a:lnT w="0" cap="flat" cmpd="sng" algn="ctr">
-                      <a:noFill/>
-                    </a:lnT>
-                    <a:lnB w="9525" cap="flat" cmpd="sng" algn="ctr">
-                      <a:solidFill>
-                        <a:srgbClr val="D9DFEA"/>
-                      </a:solidFill>
-                      <a:prstDash val="solid"/>
-                      <a:round/>
-                      <a:headEnd type="none" w="med" len="med"/>
-                      <a:tailEnd type="none" w="med" len="med"/>
-                    </a:lnB>
-                  </a:tcPr>
-                </a:tc>
-                <a:tc>
-                  <a:txBody>
-                    <a:bodyPr/>
-                    <a:lstStyle/>
-                    <a:p>
-                      <a:pPr indent="0" marL="0">
-                        <a:buNone/>
-                      </a:pPr>
-                      <a:r>
-                        <a:rPr lang="en-US" sz="1200" dirty="0">
-                          <a:solidFill>
-                            <a:srgbClr val="1F2A44"/>
-                          </a:solidFill>
-                          <a:latin typeface="Exo 2" pitchFamily="34" charset="0"/>
-                          <a:ea typeface="Exo 2" pitchFamily="34" charset="-122"/>
-                          <a:cs typeface="Exo 2" pitchFamily="34" charset="-120"/>
-                        </a:rPr>
-                        <a:t>More of the new downloads become accounts</a:t>
-                      </a:r>
-                      <a:endParaRPr lang="en-US" sz="1200" dirty="0">
-                        <a:latin typeface="Exo 2" charset="0"/>
-                        <a:ea typeface="Exo 2" charset="0"/>
-                        <a:cs typeface="Exo 2" charset="0"/>
-                      </a:endParaRPr>
-                    </a:p>
-                  </a:txBody>
-                  <a:tcPr marL="76200" marR="76200" marT="25400" marB="25400" anchor="ctr">
-                    <a:lnL w="0" cap="flat" cmpd="sng" algn="ctr">
-                      <a:noFill/>
-                    </a:lnL>
-                    <a:lnR w="0" cap="flat" cmpd="sng" algn="ctr">
-                      <a:noFill/>
-                    </a:lnR>
-                    <a:lnT w="0" cap="flat" cmpd="sng" algn="ctr">
-                      <a:noFill/>
-                    </a:lnT>
-                    <a:lnB w="9525" cap="flat" cmpd="sng" algn="ctr">
-                      <a:solidFill>
-                        <a:srgbClr val="D9DFEA"/>
-                      </a:solidFill>
-                      <a:prstDash val="solid"/>
-                      <a:round/>
-                      <a:headEnd type="none" w="med" len="med"/>
-                      <a:tailEnd type="none" w="med" len="med"/>
-                    </a:lnB>
-                  </a:tcPr>
-                </a:tc>
-              </a:tr>
-              <a:tr h="676656">
-                <a:tc>
-                  <a:txBody>
-                    <a:bodyPr/>
-                    <a:lstStyle/>
-                    <a:p>
-                      <a:pPr indent="0" marL="0">
-                        <a:buNone/>
-                      </a:pPr>
-                      <a:r>
-                        <a:rPr lang="en-US" sz="1600" b="1" dirty="0">
-                          <a:solidFill>
-                            <a:srgbClr val="D4AF37"/>
-                          </a:solidFill>
-                          <a:latin typeface="Exo 2" pitchFamily="34" charset="0"/>
-                          <a:ea typeface="Exo 2" pitchFamily="34" charset="-122"/>
-                          <a:cs typeface="Exo 2" pitchFamily="34" charset="-120"/>
-                        </a:rPr>
-                        <a:t>4</a:t>
-                      </a:r>
-                      <a:endParaRPr lang="en-US" sz="1600" dirty="0">
-                        <a:latin typeface="Exo 2" charset="0"/>
-                        <a:ea typeface="Exo 2" charset="0"/>
-                        <a:cs typeface="Exo 2" charset="0"/>
-                      </a:endParaRPr>
-                    </a:p>
-                  </a:txBody>
-                  <a:tcPr marL="76200" marR="76200" marT="25400" marB="25400" anchor="ctr">
-                    <a:lnL w="0" cap="flat" cmpd="sng" algn="ctr">
-                      <a:noFill/>
-                    </a:lnL>
-                    <a:lnR w="0" cap="flat" cmpd="sng" algn="ctr">
-                      <a:noFill/>
-                    </a:lnR>
-                    <a:lnT w="0" cap="flat" cmpd="sng" algn="ctr">
-                      <a:noFill/>
-                    </a:lnT>
-                    <a:lnB w="9525" cap="flat" cmpd="sng" algn="ctr">
-                      <a:solidFill>
-                        <a:srgbClr val="D9DFEA"/>
-                      </a:solidFill>
-                      <a:prstDash val="solid"/>
-                      <a:round/>
-                      <a:headEnd type="none" w="med" len="med"/>
-                      <a:tailEnd type="none" w="med" len="med"/>
-                    </a:lnB>
-                  </a:tcPr>
-                </a:tc>
-                <a:tc>
-                  <a:txBody>
-                    <a:bodyPr/>
-                    <a:lstStyle/>
-                    <a:p>
-                      <a:pPr indent="0" marL="0">
-                        <a:buNone/>
-                      </a:pPr>
-                      <a:r>
-                        <a:rPr lang="en-US" sz="1200" dirty="0">
-                          <a:solidFill>
-                            <a:srgbClr val="1F2A44"/>
-                          </a:solidFill>
-                          <a:latin typeface="Exo 2" pitchFamily="34" charset="0"/>
-                          <a:ea typeface="Exo 2" pitchFamily="34" charset="-122"/>
-                          <a:cs typeface="Exo 2" pitchFamily="34" charset="-120"/>
-                        </a:rPr>
-                        <a:t>Require a monthly data pack: GA4, social, Google Ads, LinkedIn Ads, deposits</a:t>
-                      </a:r>
-                      <a:endParaRPr lang="en-US" sz="1200" dirty="0">
-                        <a:latin typeface="Exo 2" charset="0"/>
-                        <a:ea typeface="Exo 2" charset="0"/>
-                        <a:cs typeface="Exo 2" charset="0"/>
-                      </a:endParaRPr>
-                    </a:p>
-                  </a:txBody>
-                  <a:tcPr marL="76200" marR="76200" marT="25400" marB="25400" anchor="ctr">
-                    <a:lnL w="0" cap="flat" cmpd="sng" algn="ctr">
-                      <a:noFill/>
-                    </a:lnL>
-                    <a:lnR w="0" cap="flat" cmpd="sng" algn="ctr">
-                      <a:noFill/>
-                    </a:lnR>
-                    <a:lnT w="0" cap="flat" cmpd="sng" algn="ctr">
-                      <a:noFill/>
-                    </a:lnT>
-                    <a:lnB w="9525" cap="flat" cmpd="sng" algn="ctr">
-                      <a:solidFill>
-                        <a:srgbClr val="D9DFEA"/>
-                      </a:solidFill>
-                      <a:prstDash val="solid"/>
-                      <a:round/>
-                      <a:headEnd type="none" w="med" len="med"/>
-                      <a:tailEnd type="none" w="med" len="med"/>
-                    </a:lnB>
-                  </a:tcPr>
-                </a:tc>
-                <a:tc>
-                  <a:txBody>
-                    <a:bodyPr/>
-                    <a:lstStyle/>
-                    <a:p>
-                      <a:pPr indent="0" marL="0">
-                        <a:buNone/>
-                      </a:pPr>
-                      <a:r>
-                        <a:rPr lang="en-US" sz="1200" dirty="0">
-                          <a:solidFill>
-                            <a:srgbClr val="1F2A44"/>
-                          </a:solidFill>
-                          <a:latin typeface="Exo 2" pitchFamily="34" charset="0"/>
-                          <a:ea typeface="Exo 2" pitchFamily="34" charset="-122"/>
-                          <a:cs typeface="Exo 2" pitchFamily="34" charset="-120"/>
-                        </a:rPr>
-                        <a:t>Marketing and Malek</a:t>
-                      </a:r>
-                      <a:endParaRPr lang="en-US" sz="1200" dirty="0">
-                        <a:latin typeface="Exo 2" charset="0"/>
-                        <a:ea typeface="Exo 2" charset="0"/>
-                        <a:cs typeface="Exo 2" charset="0"/>
-                      </a:endParaRPr>
-                    </a:p>
-                  </a:txBody>
-                  <a:tcPr marL="76200" marR="76200" marT="25400" marB="25400" anchor="ctr">
-                    <a:lnL w="0" cap="flat" cmpd="sng" algn="ctr">
-                      <a:noFill/>
-                    </a:lnL>
-                    <a:lnR w="0" cap="flat" cmpd="sng" algn="ctr">
-                      <a:noFill/>
-                    </a:lnR>
-                    <a:lnT w="0" cap="flat" cmpd="sng" algn="ctr">
-                      <a:noFill/>
-                    </a:lnT>
-                    <a:lnB w="9525" cap="flat" cmpd="sng" algn="ctr">
-                      <a:solidFill>
-                        <a:srgbClr val="D9DFEA"/>
-                      </a:solidFill>
-                      <a:prstDash val="solid"/>
-                      <a:round/>
-                      <a:headEnd type="none" w="med" len="med"/>
-                      <a:tailEnd type="none" w="med" len="med"/>
-                    </a:lnB>
-                  </a:tcPr>
-                </a:tc>
-                <a:tc>
-                  <a:txBody>
-                    <a:bodyPr/>
-                    <a:lstStyle/>
-                    <a:p>
-                      <a:pPr indent="0" marL="0">
-                        <a:buNone/>
-                      </a:pPr>
-                      <a:r>
-                        <a:rPr lang="en-US" sz="1200" dirty="0">
-                          <a:solidFill>
-                            <a:srgbClr val="1F2A44"/>
-                          </a:solidFill>
-                          <a:latin typeface="Exo 2" pitchFamily="34" charset="0"/>
-                          <a:ea typeface="Exo 2" pitchFamily="34" charset="-122"/>
-                          <a:cs typeface="Exo 2" pitchFamily="34" charset="-120"/>
-                        </a:rPr>
-                        <a:t>First pack 8 Oct</a:t>
-                      </a:r>
-                      <a:endParaRPr lang="en-US" sz="1200" dirty="0">
-                        <a:latin typeface="Exo 2" charset="0"/>
-                        <a:ea typeface="Exo 2" charset="0"/>
-                        <a:cs typeface="Exo 2" charset="0"/>
-                      </a:endParaRPr>
-                    </a:p>
-                  </a:txBody>
-                  <a:tcPr marL="76200" marR="76200" marT="25400" marB="25400" anchor="ctr">
-                    <a:lnL w="0" cap="flat" cmpd="sng" algn="ctr">
-                      <a:noFill/>
-                    </a:lnL>
-                    <a:lnR w="0" cap="flat" cmpd="sng" algn="ctr">
-                      <a:noFill/>
-                    </a:lnR>
-                    <a:lnT w="0" cap="flat" cmpd="sng" algn="ctr">
-                      <a:noFill/>
-                    </a:lnT>
-                    <a:lnB w="9525" cap="flat" cmpd="sng" algn="ctr">
-                      <a:solidFill>
-                        <a:srgbClr val="D9DFEA"/>
-                      </a:solidFill>
-                      <a:prstDash val="solid"/>
-                      <a:round/>
-                      <a:headEnd type="none" w="med" len="med"/>
-                      <a:tailEnd type="none" w="med" len="med"/>
-                    </a:lnB>
-                  </a:tcPr>
-                </a:tc>
-                <a:tc>
-                  <a:txBody>
-                    <a:bodyPr/>
-                    <a:lstStyle/>
-                    <a:p>
-                      <a:pPr indent="0" marL="0">
-                        <a:buNone/>
-                      </a:pPr>
-                      <a:r>
-                        <a:rPr lang="en-US" sz="1200" dirty="0">
-                          <a:solidFill>
-                            <a:srgbClr val="1F2A44"/>
-                          </a:solidFill>
-                          <a:latin typeface="Exo 2" pitchFamily="34" charset="0"/>
-                          <a:ea typeface="Exo 2" pitchFamily="34" charset="-122"/>
-                          <a:cs typeface="Exo 2" pitchFamily="34" charset="-120"/>
-                        </a:rPr>
-                        <a:t>Every figure in the next update is sourced</a:t>
-                      </a:r>
-                      <a:endParaRPr lang="en-US" sz="1200" dirty="0">
-                        <a:latin typeface="Exo 2" charset="0"/>
-                        <a:ea typeface="Exo 2" charset="0"/>
-                        <a:cs typeface="Exo 2" charset="0"/>
-                      </a:endParaRPr>
-                    </a:p>
-                  </a:txBody>
-                  <a:tcPr marL="76200" marR="76200" marT="25400" marB="25400" anchor="ctr">
-                    <a:lnL w="0" cap="flat" cmpd="sng" algn="ctr">
-                      <a:noFill/>
-                    </a:lnL>
-                    <a:lnR w="0" cap="flat" cmpd="sng" algn="ctr">
-                      <a:noFill/>
-                    </a:lnR>
-                    <a:lnT w="0" cap="flat" cmpd="sng" algn="ctr">
-                      <a:noFill/>
-                    </a:lnT>
-                    <a:lnB w="9525" cap="flat" cmpd="sng" algn="ctr">
-                      <a:solidFill>
-                        <a:srgbClr val="D9DFEA"/>
-                      </a:solidFill>
-                      <a:prstDash val="solid"/>
-                      <a:round/>
-                      <a:headEnd type="none" w="med" len="med"/>
-                      <a:tailEnd type="none" w="med" len="med"/>
-                    </a:lnB>
-                  </a:tcPr>
-                </a:tc>
-              </a:tr>
-              <a:tr h="676656">
-                <a:tc>
-                  <a:txBody>
-                    <a:bodyPr/>
-                    <a:lstStyle/>
-                    <a:p>
-                      <a:pPr indent="0" marL="0">
-                        <a:buNone/>
-                      </a:pPr>
-                      <a:r>
-                        <a:rPr lang="en-US" sz="1600" b="1" dirty="0">
-                          <a:solidFill>
-                            <a:srgbClr val="D4AF37"/>
-                          </a:solidFill>
-                          <a:latin typeface="Exo 2" pitchFamily="34" charset="0"/>
-                          <a:ea typeface="Exo 2" pitchFamily="34" charset="-122"/>
-                          <a:cs typeface="Exo 2" pitchFamily="34" charset="-120"/>
-                        </a:rPr>
-                        <a:t>5</a:t>
-                      </a:r>
-                      <a:endParaRPr lang="en-US" sz="1600" dirty="0">
-                        <a:latin typeface="Exo 2" charset="0"/>
-                        <a:ea typeface="Exo 2" charset="0"/>
-                        <a:cs typeface="Exo 2" charset="0"/>
-                      </a:endParaRPr>
-                    </a:p>
-                  </a:txBody>
-                  <a:tcPr marL="76200" marR="76200" marT="25400" marB="25400" anchor="ctr">
-                    <a:lnL w="0" cap="flat" cmpd="sng" algn="ctr">
-                      <a:noFill/>
-                    </a:lnL>
-                    <a:lnR w="0" cap="flat" cmpd="sng" algn="ctr">
-                      <a:noFill/>
-                    </a:lnR>
-                    <a:lnT w="0" cap="flat" cmpd="sng" algn="ctr">
-                      <a:noFill/>
-                    </a:lnT>
-                    <a:lnB w="9525" cap="flat" cmpd="sng" algn="ctr">
-                      <a:solidFill>
-                        <a:srgbClr val="D9DFEA"/>
-                      </a:solidFill>
-                      <a:prstDash val="solid"/>
-                      <a:round/>
-                      <a:headEnd type="none" w="med" len="med"/>
-                      <a:tailEnd type="none" w="med" len="med"/>
-                    </a:lnB>
-                  </a:tcPr>
-                </a:tc>
-                <a:tc>
-                  <a:txBody>
-                    <a:bodyPr/>
-                    <a:lstStyle/>
-                    <a:p>
-                      <a:pPr indent="0" marL="0">
-                        <a:buNone/>
-                      </a:pPr>
-                      <a:r>
-                        <a:rPr lang="en-US" sz="1200" dirty="0">
-                          <a:solidFill>
-                            <a:srgbClr val="1F2A44"/>
-                          </a:solidFill>
-                          <a:latin typeface="Exo 2" pitchFamily="34" charset="0"/>
-                          <a:ea typeface="Exo 2" pitchFamily="34" charset="-122"/>
-                          <a:cs typeface="Exo 2" pitchFamily="34" charset="-120"/>
-                        </a:rPr>
-                        <a:t>Confirm sign-off of the $5,000 campaign T&amp;Cs and require a Mention &amp; Win close-out</a:t>
-                      </a:r>
-                      <a:endParaRPr lang="en-US" sz="1200" dirty="0">
-                        <a:latin typeface="Exo 2" charset="0"/>
-                        <a:ea typeface="Exo 2" charset="0"/>
-                        <a:cs typeface="Exo 2" charset="0"/>
-                      </a:endParaRPr>
-                    </a:p>
-                  </a:txBody>
-                  <a:tcPr marL="76200" marR="76200" marT="25400" marB="25400" anchor="ctr">
-                    <a:lnL w="0" cap="flat" cmpd="sng" algn="ctr">
-                      <a:noFill/>
-                    </a:lnL>
-                    <a:lnR w="0" cap="flat" cmpd="sng" algn="ctr">
-                      <a:noFill/>
-                    </a:lnR>
-                    <a:lnT w="0" cap="flat" cmpd="sng" algn="ctr">
-                      <a:noFill/>
-                    </a:lnT>
-                    <a:lnB w="9525" cap="flat" cmpd="sng" algn="ctr">
-                      <a:solidFill>
-                        <a:srgbClr val="D9DFEA"/>
-                      </a:solidFill>
-                      <a:prstDash val="solid"/>
-                      <a:round/>
-                      <a:headEnd type="none" w="med" len="med"/>
-                      <a:tailEnd type="none" w="med" len="med"/>
-                    </a:lnB>
-                  </a:tcPr>
-                </a:tc>
-                <a:tc>
-                  <a:txBody>
-                    <a:bodyPr/>
-                    <a:lstStyle/>
-                    <a:p>
-                      <a:pPr indent="0" marL="0">
-                        <a:buNone/>
-                      </a:pPr>
-                      <a:r>
-                        <a:rPr lang="en-US" sz="1200" dirty="0">
-                          <a:solidFill>
-                            <a:srgbClr val="1F2A44"/>
-                          </a:solidFill>
-                          <a:latin typeface="Exo 2" pitchFamily="34" charset="0"/>
-                          <a:ea typeface="Exo 2" pitchFamily="34" charset="-122"/>
-                          <a:cs typeface="Exo 2" pitchFamily="34" charset="-120"/>
-                        </a:rPr>
-                        <a:t>Compliance and Marketing</a:t>
-                      </a:r>
-                      <a:endParaRPr lang="en-US" sz="1200" dirty="0">
-                        <a:latin typeface="Exo 2" charset="0"/>
-                        <a:ea typeface="Exo 2" charset="0"/>
-                        <a:cs typeface="Exo 2" charset="0"/>
-                      </a:endParaRPr>
-                    </a:p>
-                  </a:txBody>
-                  <a:tcPr marL="76200" marR="76200" marT="25400" marB="25400" anchor="ctr">
-                    <a:lnL w="0" cap="flat" cmpd="sng" algn="ctr">
-                      <a:noFill/>
-                    </a:lnL>
-                    <a:lnR w="0" cap="flat" cmpd="sng" algn="ctr">
-                      <a:noFill/>
-                    </a:lnR>
-                    <a:lnT w="0" cap="flat" cmpd="sng" algn="ctr">
-                      <a:noFill/>
-                    </a:lnT>
-                    <a:lnB w="9525" cap="flat" cmpd="sng" algn="ctr">
-                      <a:solidFill>
-                        <a:srgbClr val="D9DFEA"/>
-                      </a:solidFill>
-                      <a:prstDash val="solid"/>
-                      <a:round/>
-                      <a:headEnd type="none" w="med" len="med"/>
-                      <a:tailEnd type="none" w="med" len="med"/>
-                    </a:lnB>
-                  </a:tcPr>
-                </a:tc>
-                <a:tc>
-                  <a:txBody>
-                    <a:bodyPr/>
-                    <a:lstStyle/>
-                    <a:p>
-                      <a:pPr indent="0" marL="0">
-                        <a:buNone/>
-                      </a:pPr>
-                      <a:r>
-                        <a:rPr lang="en-US" sz="1200" dirty="0">
-                          <a:solidFill>
-                            <a:srgbClr val="1F2A44"/>
-                          </a:solidFill>
-                          <a:latin typeface="Exo 2" pitchFamily="34" charset="0"/>
-                          <a:ea typeface="Exo 2" pitchFamily="34" charset="-122"/>
-                          <a:cs typeface="Exo 2" pitchFamily="34" charset="-120"/>
-                        </a:rPr>
-                        <a:t>27 Oct</a:t>
-                      </a:r>
-                      <a:endParaRPr lang="en-US" sz="1200" dirty="0">
-                        <a:latin typeface="Exo 2" charset="0"/>
-                        <a:ea typeface="Exo 2" charset="0"/>
-                        <a:cs typeface="Exo 2" charset="0"/>
-                      </a:endParaRPr>
-                    </a:p>
-                  </a:txBody>
-                  <a:tcPr marL="76200" marR="76200" marT="25400" marB="25400" anchor="ctr">
-                    <a:lnL w="0" cap="flat" cmpd="sng" algn="ctr">
-                      <a:noFill/>
-                    </a:lnL>
-                    <a:lnR w="0" cap="flat" cmpd="sng" algn="ctr">
-                      <a:noFill/>
-                    </a:lnR>
-                    <a:lnT w="0" cap="flat" cmpd="sng" algn="ctr">
-                      <a:noFill/>
-                    </a:lnT>
-                    <a:lnB w="9525" cap="flat" cmpd="sng" algn="ctr">
-                      <a:solidFill>
-                        <a:srgbClr val="D9DFEA"/>
-                      </a:solidFill>
-                      <a:prstDash val="solid"/>
-                      <a:round/>
-                      <a:headEnd type="none" w="med" len="med"/>
-                      <a:tailEnd type="none" w="med" len="med"/>
-                    </a:lnB>
-                  </a:tcPr>
-                </a:tc>
-                <a:tc>
-                  <a:txBody>
-                    <a:bodyPr/>
-                    <a:lstStyle/>
-                    <a:p>
-                      <a:pPr indent="0" marL="0">
-                        <a:buNone/>
-                      </a:pPr>
-                      <a:r>
-                        <a:rPr lang="en-US" sz="1200" dirty="0">
-                          <a:solidFill>
-                            <a:srgbClr val="1F2A44"/>
-                          </a:solidFill>
-                          <a:latin typeface="Exo 2" pitchFamily="34" charset="0"/>
-                          <a:ea typeface="Exo 2" pitchFamily="34" charset="-122"/>
-                          <a:cs typeface="Exo 2" pitchFamily="34" charset="-120"/>
-                        </a:rPr>
-                        <a:t>Both campaigns on record and measured</a:t>
-                      </a:r>
-                      <a:endParaRPr lang="en-US" sz="1200" dirty="0">
-                        <a:latin typeface="Exo 2" charset="0"/>
-                        <a:ea typeface="Exo 2" charset="0"/>
-                        <a:cs typeface="Exo 2" charset="0"/>
-                      </a:endParaRPr>
-                    </a:p>
-                  </a:txBody>
-                  <a:tcPr marL="76200" marR="76200" marT="25400" marB="25400" anchor="ctr">
-                    <a:lnL w="0" cap="flat" cmpd="sng" algn="ctr">
-                      <a:noFill/>
-                    </a:lnL>
-                    <a:lnR w="0" cap="flat" cmpd="sng" algn="ctr">
-                      <a:noFill/>
-                    </a:lnR>
-                    <a:lnT w="0" cap="flat" cmpd="sng" algn="ctr">
-                      <a:noFill/>
-                    </a:lnT>
-                    <a:lnB w="9525" cap="flat" cmpd="sng" algn="ctr">
-                      <a:solidFill>
-                        <a:srgbClr val="D9DFEA"/>
-                      </a:solidFill>
-                      <a:prstDash val="solid"/>
-                      <a:round/>
-                      <a:headEnd type="none" w="med" len="med"/>
-                      <a:tailEnd type="none" w="med" len="med"/>
-                    </a:lnB>
-                  </a:tcPr>
-                </a:tc>
-              </a:tr>
-            </a:tbl>
-          </a:graphicData>
-        </a:graphic>
-      </p:graphicFrame>
-    </p:spTree>
-  </p:cSld>
-  <p:clrMapOvr>
-    <a:masterClrMapping/>
-  </p:clrMapOvr>
-</p:sld>
-</file>
-
 <file path=ppt/slides/slide2.xml><?xml version="1.0" encoding="utf-8"?>
 <p:sld xmlns:a="http://schemas.openxmlformats.org/drawingml/2006/main" xmlns:r="http://schemas.openxmlformats.org/officeDocument/2006/relationships" xmlns:p="http://schemas.openxmlformats.org/presentationml/2006/main">
   <p:cSld name="Slide 2">
@@ -11809,7 +9488,7 @@
                 <a:ea typeface="Exo 2" pitchFamily="34" charset="-122"/>
                 <a:cs typeface="Exo 2" pitchFamily="34" charset="-120"/>
               </a:rPr>
-              <a:t>CONTENT PRODUCTION</a:t>
+              <a:t>CONTENT AND SOCIAL</a:t>
             </a:r>
             <a:endParaRPr lang="en-US" sz="900" dirty="0"/>
           </a:p>
@@ -11848,7 +9527,7 @@
                 <a:ea typeface="Exo 2" pitchFamily="34" charset="-122"/>
                 <a:cs typeface="Exo 2" pitchFamily="34" charset="-120"/>
               </a:rPr>
-              <a:t>One creator a month is on plan: three videos posted, Manal Talal posts 22 October</a:t>
+              <a:t>Content is on plan; Instagram reach sits in a few posts and other channels lack September exports</a:t>
             </a:r>
             <a:endParaRPr lang="en-US" sz="2000" dirty="0"/>
           </a:p>
@@ -11975,7 +9654,7 @@
                 <a:ea typeface="Exo 2" pitchFamily="34" charset="-122"/>
                 <a:cs typeface="Exo 2" pitchFamily="34" charset="-120"/>
               </a:rPr>
-              <a:t>On plan through November. Abdulelah Al Harbi still has no view count.</a:t>
+              <a:t>On plan through November. Next: September exports for every channel and a view count for Abdulelah Al Harbi.</a:t>
             </a:r>
             <a:endParaRPr lang="en-US" sz="1150" dirty="0"/>
           </a:p>
@@ -12014,7 +9693,7 @@
                 <a:ea typeface="Exo 2" pitchFamily="34" charset="-122"/>
                 <a:cs typeface="Exo 2" pitchFamily="34" charset="-120"/>
               </a:rPr>
-              <a:t>Source: Instagram grid screenshot (videos matched to names by view count); Abdulelah Al Harbi video still supplied by the team; Sep and Oct 2026 calendars; rollout plan.</a:t>
+              <a:t>Source: Instagram grid screenshot; Abdulelah still from the team; Sep and Oct 2026 calendars; LinkedIn export to 28 Aug; X and TikTok per Performance Analysis deck; GA4 1-28 Sep.</a:t>
             </a:r>
             <a:endParaRPr lang="en-US" sz="800" dirty="0"/>
           </a:p>
@@ -12130,7 +9809,7 @@
         </p:nvSpPr>
         <p:spPr>
           <a:xfrm>
-            <a:off x="1412748" y="1938528"/>
+            <a:off x="1412748" y="1764792"/>
             <a:ext cx="9372600" cy="0"/>
           </a:xfrm>
           <a:prstGeom prst="line">
@@ -12153,8 +9832,8 @@
         </p:nvSpPr>
         <p:spPr>
           <a:xfrm>
-            <a:off x="566928" y="1554480"/>
-            <a:ext cx="1691640" cy="228600"/>
+            <a:off x="566928" y="1444752"/>
+            <a:ext cx="1691640" cy="201168"/>
           </a:xfrm>
           <a:prstGeom prst="rect">
             <a:avLst/>
@@ -12170,7 +9849,7 @@
               <a:buNone/>
             </a:pPr>
             <a:r>
-              <a:rPr lang="en-US" sz="1000" b="1" spc="200" kern="0" dirty="0">
+              <a:rPr lang="en-US" sz="950" b="1" spc="200" kern="0" dirty="0">
                 <a:solidFill>
                   <a:srgbClr val="9A7B1F"/>
                 </a:solidFill>
@@ -12180,7 +9859,7 @@
               </a:rPr>
               <a:t>JUL</a:t>
             </a:r>
-            <a:endParaRPr lang="en-US" sz="1000" dirty="0"/>
+            <a:endParaRPr lang="en-US" sz="950" dirty="0"/>
           </a:p>
         </p:txBody>
       </p:sp>
@@ -12192,8 +9871,8 @@
         </p:nvSpPr>
         <p:spPr>
           <a:xfrm>
-            <a:off x="1312164" y="1837944"/>
-            <a:ext cx="201168" cy="201168"/>
+            <a:off x="1321308" y="1673352"/>
+            <a:ext cx="182880" cy="182880"/>
           </a:xfrm>
           <a:prstGeom prst="ellipse">
             <a:avLst/>
@@ -12225,8 +9904,8 @@
         </p:blipFill>
         <p:spPr>
           <a:xfrm>
-            <a:off x="704088" y="2212848"/>
-            <a:ext cx="1417320" cy="1828800"/>
+            <a:off x="909828" y="1938528"/>
+            <a:ext cx="1005840" cy="1298448"/>
           </a:xfrm>
           <a:prstGeom prst="rect">
             <a:avLst/>
@@ -12241,8 +9920,8 @@
         </p:nvSpPr>
         <p:spPr>
           <a:xfrm>
-            <a:off x="566928" y="4160520"/>
-            <a:ext cx="1691640" cy="502920"/>
+            <a:off x="566928" y="3291840"/>
+            <a:ext cx="1691640" cy="237744"/>
           </a:xfrm>
           <a:prstGeom prst="rect">
             <a:avLst/>
@@ -12258,7 +9937,7 @@
               <a:buNone/>
             </a:pPr>
             <a:r>
-              <a:rPr lang="en-US" sz="1200" b="1" dirty="0">
+              <a:rPr lang="en-US" sz="1100" b="1" dirty="0">
                 <a:solidFill>
                   <a:srgbClr val="132257"/>
                 </a:solidFill>
@@ -12268,7 +9947,7 @@
               </a:rPr>
               <a:t>Musheera</a:t>
             </a:r>
-            <a:endParaRPr lang="en-US" sz="1200" dirty="0"/>
+            <a:endParaRPr lang="en-US" sz="1100" dirty="0"/>
           </a:p>
         </p:txBody>
       </p:sp>
@@ -12280,8 +9959,8 @@
         </p:nvSpPr>
         <p:spPr>
           <a:xfrm>
-            <a:off x="566928" y="4709160"/>
-            <a:ext cx="1691640" cy="274320"/>
+            <a:off x="521208" y="3538728"/>
+            <a:ext cx="1783080" cy="237744"/>
           </a:xfrm>
           <a:prstGeom prst="rect">
             <a:avLst/>
@@ -12297,7 +9976,7 @@
               <a:buNone/>
             </a:pPr>
             <a:r>
-              <a:rPr lang="en-US" sz="1050" dirty="0">
+              <a:rPr lang="en-US" sz="900" dirty="0">
                 <a:solidFill>
                   <a:srgbClr val="132257"/>
                 </a:solidFill>
@@ -12311,7 +9990,7 @@
               <a:buNone/>
             </a:pPr>
             <a:r>
-              <a:rPr lang="en-US" sz="1050" b="1" dirty="0">
+              <a:rPr lang="en-US" sz="900" b="1" dirty="0">
                 <a:solidFill>
                   <a:srgbClr val="132257"/>
                 </a:solidFill>
@@ -12321,36 +10000,11 @@
               </a:rPr>
               <a:t>Posted</a:t>
             </a:r>
-            <a:endParaRPr lang="en-US" sz="1050" dirty="0"/>
-          </a:p>
-        </p:txBody>
-      </p:sp>
-      <p:sp>
-        <p:nvSpPr>
-          <p:cNvPr id="21" name="Text 14"/>
-          <p:cNvSpPr txBox="1"/>
-          <p:nvPr/>
-        </p:nvSpPr>
-        <p:spPr>
-          <a:xfrm>
-            <a:off x="566928" y="5001768"/>
-            <a:ext cx="1691640" cy="274320"/>
-          </a:xfrm>
-          <a:prstGeom prst="rect">
-            <a:avLst/>
-          </a:prstGeom>
-          <a:noFill/>
-          <a:ln/>
-        </p:spPr>
-        <p:txBody>
-          <a:bodyPr wrap="square" lIns="0" tIns="0" rIns="0" bIns="0" rtlCol="0" anchor="t"/>
-          <a:lstStyle/>
-          <a:p>
             <a:pPr algn="ctr" indent="0" marL="0">
               <a:buNone/>
             </a:pPr>
             <a:r>
-              <a:rPr lang="en-US" sz="1050" dirty="0">
+              <a:rPr lang="en-US" sz="900" dirty="0">
                 <a:solidFill>
                   <a:srgbClr val="7A849C"/>
                 </a:solidFill>
@@ -12358,22 +10012,22 @@
                 <a:ea typeface="Exo 2" pitchFamily="34" charset="-122"/>
                 <a:cs typeface="Exo 2" pitchFamily="34" charset="-120"/>
               </a:rPr>
-              <a:t>5.3M views</a:t>
-            </a:r>
-            <a:endParaRPr lang="en-US" sz="1050" dirty="0"/>
+              <a:t>  5.3M views</a:t>
+            </a:r>
+            <a:endParaRPr lang="en-US" sz="900" dirty="0"/>
           </a:p>
         </p:txBody>
       </p:sp>
       <p:sp>
         <p:nvSpPr>
-          <p:cNvPr id="22" name="Text 15"/>
+          <p:cNvPr id="21" name="Text 14"/>
           <p:cNvSpPr txBox="1"/>
           <p:nvPr/>
         </p:nvSpPr>
         <p:spPr>
           <a:xfrm>
-            <a:off x="2441448" y="1554480"/>
-            <a:ext cx="1691640" cy="228600"/>
+            <a:off x="2441448" y="1444752"/>
+            <a:ext cx="1691640" cy="201168"/>
           </a:xfrm>
           <a:prstGeom prst="rect">
             <a:avLst/>
@@ -12389,7 +10043,7 @@
               <a:buNone/>
             </a:pPr>
             <a:r>
-              <a:rPr lang="en-US" sz="1000" b="1" spc="200" kern="0" dirty="0">
+              <a:rPr lang="en-US" sz="950" b="1" spc="200" kern="0" dirty="0">
                 <a:solidFill>
                   <a:srgbClr val="9A7B1F"/>
                 </a:solidFill>
@@ -12399,20 +10053,20 @@
               </a:rPr>
               <a:t>AUG</a:t>
             </a:r>
-            <a:endParaRPr lang="en-US" sz="1000" dirty="0"/>
+            <a:endParaRPr lang="en-US" sz="950" dirty="0"/>
           </a:p>
         </p:txBody>
       </p:sp>
       <p:sp>
         <p:nvSpPr>
-          <p:cNvPr id="23" name="Shape 16"/>
+          <p:cNvPr id="22" name="Shape 15"/>
           <p:cNvSpPr/>
           <p:nvPr/>
         </p:nvSpPr>
         <p:spPr>
           <a:xfrm>
-            <a:off x="3186684" y="1837944"/>
-            <a:ext cx="201168" cy="201168"/>
+            <a:off x="3195828" y="1673352"/>
+            <a:ext cx="182880" cy="182880"/>
           </a:xfrm>
           <a:prstGeom prst="ellipse">
             <a:avLst/>
@@ -12430,7 +10084,7 @@
       </p:sp>
       <p:pic>
         <p:nvPicPr>
-          <p:cNvPr id="24" name="Image 4" descr="/home/user/HatemIsa_202508993_IT9002_NLP_Project/emyaa-ceo-deck/working/charts/tile9_ali.png">    </p:cNvPr>
+          <p:cNvPr id="23" name="Image 4" descr="/home/user/HatemIsa_202508993_IT9002_NLP_Project/emyaa-ceo-deck/working/charts/tile9_ali.png">    </p:cNvPr>
           <p:cNvPicPr>
             <a:picLocks noChangeAspect="1"/>
           </p:cNvPicPr>
@@ -12444,8 +10098,8 @@
         </p:blipFill>
         <p:spPr>
           <a:xfrm>
-            <a:off x="2578608" y="2212848"/>
-            <a:ext cx="1417320" cy="1828800"/>
+            <a:off x="2784348" y="1938528"/>
+            <a:ext cx="1005840" cy="1298448"/>
           </a:xfrm>
           <a:prstGeom prst="rect">
             <a:avLst/>
@@ -12454,14 +10108,14 @@
       </p:pic>
       <p:sp>
         <p:nvSpPr>
-          <p:cNvPr id="25" name="Text 17"/>
+          <p:cNvPr id="24" name="Text 16"/>
           <p:cNvSpPr txBox="1"/>
           <p:nvPr/>
         </p:nvSpPr>
         <p:spPr>
           <a:xfrm>
-            <a:off x="2441448" y="4160520"/>
-            <a:ext cx="1691640" cy="502920"/>
+            <a:off x="2441448" y="3291840"/>
+            <a:ext cx="1691640" cy="237744"/>
           </a:xfrm>
           <a:prstGeom prst="rect">
             <a:avLst/>
@@ -12477,7 +10131,7 @@
               <a:buNone/>
             </a:pPr>
             <a:r>
-              <a:rPr lang="en-US" sz="1200" b="1" dirty="0">
+              <a:rPr lang="en-US" sz="1100" b="1" dirty="0">
                 <a:solidFill>
                   <a:srgbClr val="132257"/>
                 </a:solidFill>
@@ -12487,20 +10141,20 @@
               </a:rPr>
               <a:t>Ali Sabeel</a:t>
             </a:r>
-            <a:endParaRPr lang="en-US" sz="1200" dirty="0"/>
+            <a:endParaRPr lang="en-US" sz="1100" dirty="0"/>
           </a:p>
         </p:txBody>
       </p:sp>
       <p:sp>
         <p:nvSpPr>
-          <p:cNvPr id="26" name="Text 18"/>
+          <p:cNvPr id="25" name="Text 17"/>
           <p:cNvSpPr txBox="1"/>
           <p:nvPr/>
         </p:nvSpPr>
         <p:spPr>
           <a:xfrm>
-            <a:off x="2441448" y="4709160"/>
-            <a:ext cx="1691640" cy="274320"/>
+            <a:off x="2395728" y="3538728"/>
+            <a:ext cx="1783080" cy="237744"/>
           </a:xfrm>
           <a:prstGeom prst="rect">
             <a:avLst/>
@@ -12516,7 +10170,7 @@
               <a:buNone/>
             </a:pPr>
             <a:r>
-              <a:rPr lang="en-US" sz="1050" dirty="0">
+              <a:rPr lang="en-US" sz="900" dirty="0">
                 <a:solidFill>
                   <a:srgbClr val="132257"/>
                 </a:solidFill>
@@ -12530,7 +10184,7 @@
               <a:buNone/>
             </a:pPr>
             <a:r>
-              <a:rPr lang="en-US" sz="1050" b="1" dirty="0">
+              <a:rPr lang="en-US" sz="900" b="1" dirty="0">
                 <a:solidFill>
                   <a:srgbClr val="132257"/>
                 </a:solidFill>
@@ -12540,36 +10194,11 @@
               </a:rPr>
               <a:t>Posted</a:t>
             </a:r>
-            <a:endParaRPr lang="en-US" sz="1050" dirty="0"/>
-          </a:p>
-        </p:txBody>
-      </p:sp>
-      <p:sp>
-        <p:nvSpPr>
-          <p:cNvPr id="27" name="Text 19"/>
-          <p:cNvSpPr txBox="1"/>
-          <p:nvPr/>
-        </p:nvSpPr>
-        <p:spPr>
-          <a:xfrm>
-            <a:off x="2441448" y="5001768"/>
-            <a:ext cx="1691640" cy="274320"/>
-          </a:xfrm>
-          <a:prstGeom prst="rect">
-            <a:avLst/>
-          </a:prstGeom>
-          <a:noFill/>
-          <a:ln/>
-        </p:spPr>
-        <p:txBody>
-          <a:bodyPr wrap="square" lIns="0" tIns="0" rIns="0" bIns="0" rtlCol="0" anchor="t"/>
-          <a:lstStyle/>
-          <a:p>
             <a:pPr algn="ctr" indent="0" marL="0">
               <a:buNone/>
             </a:pPr>
             <a:r>
-              <a:rPr lang="en-US" sz="1050" dirty="0">
+              <a:rPr lang="en-US" sz="900" dirty="0">
                 <a:solidFill>
                   <a:srgbClr val="7A849C"/>
                 </a:solidFill>
@@ -12577,22 +10206,22 @@
                 <a:ea typeface="Exo 2" pitchFamily="34" charset="-122"/>
                 <a:cs typeface="Exo 2" pitchFamily="34" charset="-120"/>
               </a:rPr>
-              <a:t>1.3M views</a:t>
-            </a:r>
-            <a:endParaRPr lang="en-US" sz="1050" dirty="0"/>
+              <a:t>  1.3M views</a:t>
+            </a:r>
+            <a:endParaRPr lang="en-US" sz="900" dirty="0"/>
           </a:p>
         </p:txBody>
       </p:sp>
       <p:sp>
         <p:nvSpPr>
-          <p:cNvPr id="28" name="Text 20"/>
+          <p:cNvPr id="26" name="Text 18"/>
           <p:cNvSpPr txBox="1"/>
           <p:nvPr/>
         </p:nvSpPr>
         <p:spPr>
           <a:xfrm>
-            <a:off x="4315968" y="1554480"/>
-            <a:ext cx="1691640" cy="228600"/>
+            <a:off x="4315968" y="1444752"/>
+            <a:ext cx="1691640" cy="201168"/>
           </a:xfrm>
           <a:prstGeom prst="rect">
             <a:avLst/>
@@ -12608,7 +10237,7 @@
               <a:buNone/>
             </a:pPr>
             <a:r>
-              <a:rPr lang="en-US" sz="1000" b="1" spc="200" kern="0" dirty="0">
+              <a:rPr lang="en-US" sz="950" b="1" spc="200" kern="0" dirty="0">
                 <a:solidFill>
                   <a:srgbClr val="9A7B1F"/>
                 </a:solidFill>
@@ -12618,20 +10247,20 @@
               </a:rPr>
               <a:t>SEP</a:t>
             </a:r>
-            <a:endParaRPr lang="en-US" sz="1000" dirty="0"/>
+            <a:endParaRPr lang="en-US" sz="950" dirty="0"/>
           </a:p>
         </p:txBody>
       </p:sp>
       <p:sp>
         <p:nvSpPr>
-          <p:cNvPr id="29" name="Shape 21"/>
+          <p:cNvPr id="27" name="Shape 19"/>
           <p:cNvSpPr/>
           <p:nvPr/>
         </p:nvSpPr>
         <p:spPr>
           <a:xfrm>
-            <a:off x="5061204" y="1837944"/>
-            <a:ext cx="201168" cy="201168"/>
+            <a:off x="5070348" y="1673352"/>
+            <a:ext cx="182880" cy="182880"/>
           </a:xfrm>
           <a:prstGeom prst="ellipse">
             <a:avLst/>
@@ -12649,7 +10278,7 @@
       </p:sp>
       <p:pic>
         <p:nvPicPr>
-          <p:cNvPr id="30" name="Image 5" descr="/home/user/HatemIsa_202508993_IT9002_NLP_Project/emyaa-ceo-deck/working/charts/tile9_abdulelah.png">    </p:cNvPr>
+          <p:cNvPr id="28" name="Image 5" descr="/home/user/HatemIsa_202508993_IT9002_NLP_Project/emyaa-ceo-deck/working/charts/tile9_abdulelah.png">    </p:cNvPr>
           <p:cNvPicPr>
             <a:picLocks noChangeAspect="1"/>
           </p:cNvPicPr>
@@ -12663,8 +10292,8 @@
         </p:blipFill>
         <p:spPr>
           <a:xfrm>
-            <a:off x="4453128" y="2212848"/>
-            <a:ext cx="1417320" cy="1828800"/>
+            <a:off x="4658868" y="1938528"/>
+            <a:ext cx="1005840" cy="1298448"/>
           </a:xfrm>
           <a:prstGeom prst="rect">
             <a:avLst/>
@@ -12673,14 +10302,14 @@
       </p:pic>
       <p:sp>
         <p:nvSpPr>
-          <p:cNvPr id="31" name="Text 22"/>
+          <p:cNvPr id="29" name="Text 20"/>
           <p:cNvSpPr txBox="1"/>
           <p:nvPr/>
         </p:nvSpPr>
         <p:spPr>
           <a:xfrm>
-            <a:off x="4315968" y="4160520"/>
-            <a:ext cx="1691640" cy="502920"/>
+            <a:off x="4315968" y="3291840"/>
+            <a:ext cx="1691640" cy="237744"/>
           </a:xfrm>
           <a:prstGeom prst="rect">
             <a:avLst/>
@@ -12696,7 +10325,7 @@
               <a:buNone/>
             </a:pPr>
             <a:r>
-              <a:rPr lang="en-US" sz="1200" b="1" dirty="0">
+              <a:rPr lang="en-US" sz="1100" b="1" dirty="0">
                 <a:solidFill>
                   <a:srgbClr val="132257"/>
                 </a:solidFill>
@@ -12706,20 +10335,20 @@
               </a:rPr>
               <a:t>Abdulelah Al Harbi</a:t>
             </a:r>
-            <a:endParaRPr lang="en-US" sz="1200" dirty="0"/>
+            <a:endParaRPr lang="en-US" sz="1100" dirty="0"/>
           </a:p>
         </p:txBody>
       </p:sp>
       <p:sp>
         <p:nvSpPr>
-          <p:cNvPr id="32" name="Text 23"/>
+          <p:cNvPr id="30" name="Text 21"/>
           <p:cNvSpPr txBox="1"/>
           <p:nvPr/>
         </p:nvSpPr>
         <p:spPr>
           <a:xfrm>
-            <a:off x="4315968" y="4709160"/>
-            <a:ext cx="1691640" cy="274320"/>
+            <a:off x="4270248" y="3538728"/>
+            <a:ext cx="1783080" cy="237744"/>
           </a:xfrm>
           <a:prstGeom prst="rect">
             <a:avLst/>
@@ -12735,7 +10364,7 @@
               <a:buNone/>
             </a:pPr>
             <a:r>
-              <a:rPr lang="en-US" sz="1050" dirty="0">
+              <a:rPr lang="en-US" sz="900" dirty="0">
                 <a:solidFill>
                   <a:srgbClr val="132257"/>
                 </a:solidFill>
@@ -12749,7 +10378,7 @@
               <a:buNone/>
             </a:pPr>
             <a:r>
-              <a:rPr lang="en-US" sz="1050" b="1" dirty="0">
+              <a:rPr lang="en-US" sz="900" b="1" dirty="0">
                 <a:solidFill>
                   <a:srgbClr val="132257"/>
                 </a:solidFill>
@@ -12759,36 +10388,11 @@
               </a:rPr>
               <a:t>Posted</a:t>
             </a:r>
-            <a:endParaRPr lang="en-US" sz="1050" dirty="0"/>
-          </a:p>
-        </p:txBody>
-      </p:sp>
-      <p:sp>
-        <p:nvSpPr>
-          <p:cNvPr id="33" name="Text 24"/>
-          <p:cNvSpPr txBox="1"/>
-          <p:nvPr/>
-        </p:nvSpPr>
-        <p:spPr>
-          <a:xfrm>
-            <a:off x="4315968" y="5001768"/>
-            <a:ext cx="1691640" cy="274320"/>
-          </a:xfrm>
-          <a:prstGeom prst="rect">
-            <a:avLst/>
-          </a:prstGeom>
-          <a:noFill/>
-          <a:ln/>
-        </p:spPr>
-        <p:txBody>
-          <a:bodyPr wrap="square" lIns="0" tIns="0" rIns="0" bIns="0" rtlCol="0" anchor="t"/>
-          <a:lstStyle/>
-          <a:p>
             <a:pPr algn="ctr" indent="0" marL="0">
               <a:buNone/>
             </a:pPr>
             <a:r>
-              <a:rPr lang="en-US" sz="1050" dirty="0">
+              <a:rPr lang="en-US" sz="900" dirty="0">
                 <a:solidFill>
                   <a:srgbClr val="7A849C"/>
                 </a:solidFill>
@@ -12796,22 +10400,22 @@
                 <a:ea typeface="Exo 2" pitchFamily="34" charset="-122"/>
                 <a:cs typeface="Exo 2" pitchFamily="34" charset="-120"/>
               </a:rPr>
-              <a:t>Views not supplied</a:t>
-            </a:r>
-            <a:endParaRPr lang="en-US" sz="1050" dirty="0"/>
+              <a:t>  views not supplied</a:t>
+            </a:r>
+            <a:endParaRPr lang="en-US" sz="900" dirty="0"/>
           </a:p>
         </p:txBody>
       </p:sp>
       <p:sp>
         <p:nvSpPr>
-          <p:cNvPr id="34" name="Text 25"/>
+          <p:cNvPr id="31" name="Text 22"/>
           <p:cNvSpPr txBox="1"/>
           <p:nvPr/>
         </p:nvSpPr>
         <p:spPr>
           <a:xfrm>
-            <a:off x="6190488" y="1554480"/>
-            <a:ext cx="1691640" cy="228600"/>
+            <a:off x="6190488" y="1444752"/>
+            <a:ext cx="1691640" cy="201168"/>
           </a:xfrm>
           <a:prstGeom prst="rect">
             <a:avLst/>
@@ -12827,7 +10431,7 @@
               <a:buNone/>
             </a:pPr>
             <a:r>
-              <a:rPr lang="en-US" sz="1000" b="1" spc="200" kern="0" dirty="0">
+              <a:rPr lang="en-US" sz="950" b="1" spc="200" kern="0" dirty="0">
                 <a:solidFill>
                   <a:srgbClr val="9A7B1F"/>
                 </a:solidFill>
@@ -12837,20 +10441,20 @@
               </a:rPr>
               <a:t>SEP</a:t>
             </a:r>
-            <a:endParaRPr lang="en-US" sz="1000" dirty="0"/>
+            <a:endParaRPr lang="en-US" sz="950" dirty="0"/>
           </a:p>
         </p:txBody>
       </p:sp>
       <p:sp>
         <p:nvSpPr>
-          <p:cNvPr id="35" name="Shape 26"/>
+          <p:cNvPr id="32" name="Shape 23"/>
           <p:cNvSpPr/>
           <p:nvPr/>
         </p:nvSpPr>
         <p:spPr>
           <a:xfrm>
-            <a:off x="6935724" y="1837944"/>
-            <a:ext cx="201168" cy="201168"/>
+            <a:off x="6944868" y="1673352"/>
+            <a:ext cx="182880" cy="182880"/>
           </a:xfrm>
           <a:prstGeom prst="ellipse">
             <a:avLst/>
@@ -12868,7 +10472,7 @@
       </p:sp>
       <p:pic>
         <p:nvPicPr>
-          <p:cNvPr id="36" name="Image 6" descr="/home/user/HatemIsa_202508993_IT9002_NLP_Project/emyaa-ceo-deck/working/charts/tile9_howto.png">    </p:cNvPr>
+          <p:cNvPr id="33" name="Image 6" descr="/home/user/HatemIsa_202508993_IT9002_NLP_Project/emyaa-ceo-deck/working/charts/tile9_howto.png">    </p:cNvPr>
           <p:cNvPicPr>
             <a:picLocks noChangeAspect="1"/>
           </p:cNvPicPr>
@@ -12882,8 +10486,8 @@
         </p:blipFill>
         <p:spPr>
           <a:xfrm>
-            <a:off x="6327648" y="2212848"/>
-            <a:ext cx="1417320" cy="1828800"/>
+            <a:off x="6533388" y="1938528"/>
+            <a:ext cx="1005840" cy="1298448"/>
           </a:xfrm>
           <a:prstGeom prst="rect">
             <a:avLst/>
@@ -12892,14 +10496,14 @@
       </p:pic>
       <p:sp>
         <p:nvSpPr>
-          <p:cNvPr id="37" name="Text 27"/>
+          <p:cNvPr id="34" name="Text 24"/>
           <p:cNvSpPr txBox="1"/>
           <p:nvPr/>
         </p:nvSpPr>
         <p:spPr>
           <a:xfrm>
-            <a:off x="6190488" y="4160520"/>
-            <a:ext cx="1691640" cy="502920"/>
+            <a:off x="6190488" y="3291840"/>
+            <a:ext cx="1691640" cy="237744"/>
           </a:xfrm>
           <a:prstGeom prst="rect">
             <a:avLst/>
@@ -12915,7 +10519,7 @@
               <a:buNone/>
             </a:pPr>
             <a:r>
-              <a:rPr lang="en-US" sz="1200" b="1" dirty="0">
+              <a:rPr lang="en-US" sz="1100" b="1" dirty="0">
                 <a:solidFill>
                   <a:srgbClr val="132257"/>
                 </a:solidFill>
@@ -12923,22 +10527,22 @@
                 <a:ea typeface="Exo 2" pitchFamily="34" charset="-122"/>
                 <a:cs typeface="Exo 2" pitchFamily="34" charset="-120"/>
               </a:rPr>
-              <a:t>How-to, human presenter</a:t>
-            </a:r>
-            <a:endParaRPr lang="en-US" sz="1200" dirty="0"/>
+              <a:t>How-to, presenter</a:t>
+            </a:r>
+            <a:endParaRPr lang="en-US" sz="1100" dirty="0"/>
           </a:p>
         </p:txBody>
       </p:sp>
       <p:sp>
         <p:nvSpPr>
-          <p:cNvPr id="38" name="Text 28"/>
+          <p:cNvPr id="35" name="Text 25"/>
           <p:cNvSpPr txBox="1"/>
           <p:nvPr/>
         </p:nvSpPr>
         <p:spPr>
           <a:xfrm>
-            <a:off x="6190488" y="4709160"/>
-            <a:ext cx="1691640" cy="274320"/>
+            <a:off x="6144768" y="3538728"/>
+            <a:ext cx="1783080" cy="237744"/>
           </a:xfrm>
           <a:prstGeom prst="rect">
             <a:avLst/>
@@ -12954,7 +10558,7 @@
               <a:buNone/>
             </a:pPr>
             <a:r>
-              <a:rPr lang="en-US" sz="1050" dirty="0">
+              <a:rPr lang="en-US" sz="900" dirty="0">
                 <a:solidFill>
                   <a:srgbClr val="132257"/>
                 </a:solidFill>
@@ -12968,7 +10572,7 @@
               <a:buNone/>
             </a:pPr>
             <a:r>
-              <a:rPr lang="en-US" sz="1050" b="1" dirty="0">
+              <a:rPr lang="en-US" sz="900" b="1" dirty="0">
                 <a:solidFill>
                   <a:srgbClr val="132257"/>
                 </a:solidFill>
@@ -12978,36 +10582,11 @@
               </a:rPr>
               <a:t>Posted</a:t>
             </a:r>
-            <a:endParaRPr lang="en-US" sz="1050" dirty="0"/>
-          </a:p>
-        </p:txBody>
-      </p:sp>
-      <p:sp>
-        <p:nvSpPr>
-          <p:cNvPr id="39" name="Text 29"/>
-          <p:cNvSpPr txBox="1"/>
-          <p:nvPr/>
-        </p:nvSpPr>
-        <p:spPr>
-          <a:xfrm>
-            <a:off x="6190488" y="5001768"/>
-            <a:ext cx="1691640" cy="274320"/>
-          </a:xfrm>
-          <a:prstGeom prst="rect">
-            <a:avLst/>
-          </a:prstGeom>
-          <a:noFill/>
-          <a:ln/>
-        </p:spPr>
-        <p:txBody>
-          <a:bodyPr wrap="square" lIns="0" tIns="0" rIns="0" bIns="0" rtlCol="0" anchor="t"/>
-          <a:lstStyle/>
-          <a:p>
             <a:pPr algn="ctr" indent="0" marL="0">
               <a:buNone/>
             </a:pPr>
             <a:r>
-              <a:rPr lang="en-US" sz="1050" dirty="0">
+              <a:rPr lang="en-US" sz="900" dirty="0">
                 <a:solidFill>
                   <a:srgbClr val="7A849C"/>
                 </a:solidFill>
@@ -13015,22 +10594,22 @@
                 <a:ea typeface="Exo 2" pitchFamily="34" charset="-122"/>
                 <a:cs typeface="Exo 2" pitchFamily="34" charset="-120"/>
               </a:rPr>
-              <a:t>332 views</a:t>
-            </a:r>
-            <a:endParaRPr lang="en-US" sz="1050" dirty="0"/>
+              <a:t>  332 views</a:t>
+            </a:r>
+            <a:endParaRPr lang="en-US" sz="900" dirty="0"/>
           </a:p>
         </p:txBody>
       </p:sp>
       <p:sp>
         <p:nvSpPr>
-          <p:cNvPr id="40" name="Text 30"/>
+          <p:cNvPr id="36" name="Text 26"/>
           <p:cNvSpPr txBox="1"/>
           <p:nvPr/>
         </p:nvSpPr>
         <p:spPr>
           <a:xfrm>
-            <a:off x="8065008" y="1554480"/>
-            <a:ext cx="1691640" cy="228600"/>
+            <a:off x="8065008" y="1444752"/>
+            <a:ext cx="1691640" cy="201168"/>
           </a:xfrm>
           <a:prstGeom prst="rect">
             <a:avLst/>
@@ -13046,7 +10625,7 @@
               <a:buNone/>
             </a:pPr>
             <a:r>
-              <a:rPr lang="en-US" sz="1000" b="1" spc="200" kern="0" dirty="0">
+              <a:rPr lang="en-US" sz="950" b="1" spc="200" kern="0" dirty="0">
                 <a:solidFill>
                   <a:srgbClr val="9A7B1F"/>
                 </a:solidFill>
@@ -13056,20 +10635,20 @@
               </a:rPr>
               <a:t>OCT</a:t>
             </a:r>
-            <a:endParaRPr lang="en-US" sz="1000" dirty="0"/>
+            <a:endParaRPr lang="en-US" sz="950" dirty="0"/>
           </a:p>
         </p:txBody>
       </p:sp>
       <p:sp>
         <p:nvSpPr>
-          <p:cNvPr id="41" name="Shape 31"/>
+          <p:cNvPr id="37" name="Shape 27"/>
           <p:cNvSpPr/>
           <p:nvPr/>
         </p:nvSpPr>
         <p:spPr>
           <a:xfrm>
-            <a:off x="8810244" y="1837944"/>
-            <a:ext cx="201168" cy="201168"/>
+            <a:off x="8819388" y="1673352"/>
+            <a:ext cx="182880" cy="182880"/>
           </a:xfrm>
           <a:prstGeom prst="ellipse">
             <a:avLst/>
@@ -13087,14 +10666,14 @@
       </p:sp>
       <p:sp>
         <p:nvSpPr>
-          <p:cNvPr id="42" name="Shape 32"/>
+          <p:cNvPr id="38" name="Shape 28"/>
           <p:cNvSpPr/>
           <p:nvPr/>
         </p:nvSpPr>
         <p:spPr>
           <a:xfrm>
-            <a:off x="8202168" y="2212848"/>
-            <a:ext cx="1417320" cy="1828800"/>
+            <a:off x="8407908" y="1938528"/>
+            <a:ext cx="1005840" cy="1298448"/>
           </a:xfrm>
           <a:prstGeom prst="rect">
             <a:avLst/>
@@ -13112,14 +10691,14 @@
       </p:sp>
       <p:sp>
         <p:nvSpPr>
-          <p:cNvPr id="43" name="Text 33"/>
+          <p:cNvPr id="39" name="Text 29"/>
           <p:cNvSpPr txBox="1"/>
           <p:nvPr/>
         </p:nvSpPr>
         <p:spPr>
           <a:xfrm>
-            <a:off x="8293608" y="2212848"/>
-            <a:ext cx="1234440" cy="1828800"/>
+            <a:off x="8453628" y="1938528"/>
+            <a:ext cx="914400" cy="1298448"/>
           </a:xfrm>
           <a:prstGeom prst="rect">
             <a:avLst/>
@@ -13135,7 +10714,7 @@
               <a:buNone/>
             </a:pPr>
             <a:r>
-              <a:rPr lang="en-US" sz="1000" dirty="0">
+              <a:rPr lang="en-US" sz="950" dirty="0">
                 <a:solidFill>
                   <a:srgbClr val="7A849C"/>
                 </a:solidFill>
@@ -13145,20 +10724,20 @@
               </a:rPr>
               <a:t>In production</a:t>
             </a:r>
-            <a:endParaRPr lang="en-US" sz="1000" dirty="0"/>
+            <a:endParaRPr lang="en-US" sz="950" dirty="0"/>
           </a:p>
         </p:txBody>
       </p:sp>
       <p:sp>
         <p:nvSpPr>
-          <p:cNvPr id="44" name="Text 34"/>
+          <p:cNvPr id="40" name="Text 30"/>
           <p:cNvSpPr txBox="1"/>
           <p:nvPr/>
         </p:nvSpPr>
         <p:spPr>
           <a:xfrm>
-            <a:off x="8065008" y="4160520"/>
-            <a:ext cx="1691640" cy="502920"/>
+            <a:off x="8065008" y="3291840"/>
+            <a:ext cx="1691640" cy="237744"/>
           </a:xfrm>
           <a:prstGeom prst="rect">
             <a:avLst/>
@@ -13174,7 +10753,7 @@
               <a:buNone/>
             </a:pPr>
             <a:r>
-              <a:rPr lang="en-US" sz="1200" b="1" dirty="0">
+              <a:rPr lang="en-US" sz="1100" b="1" dirty="0">
                 <a:solidFill>
                   <a:srgbClr val="132257"/>
                 </a:solidFill>
@@ -13184,20 +10763,20 @@
               </a:rPr>
               <a:t>Manal Talal</a:t>
             </a:r>
-            <a:endParaRPr lang="en-US" sz="1200" dirty="0"/>
+            <a:endParaRPr lang="en-US" sz="1100" dirty="0"/>
           </a:p>
         </p:txBody>
       </p:sp>
       <p:sp>
         <p:nvSpPr>
-          <p:cNvPr id="45" name="Text 35"/>
+          <p:cNvPr id="41" name="Text 31"/>
           <p:cNvSpPr txBox="1"/>
           <p:nvPr/>
         </p:nvSpPr>
         <p:spPr>
           <a:xfrm>
-            <a:off x="8065008" y="4709160"/>
-            <a:ext cx="1691640" cy="274320"/>
+            <a:off x="8019288" y="3538728"/>
+            <a:ext cx="1783080" cy="237744"/>
           </a:xfrm>
           <a:prstGeom prst="rect">
             <a:avLst/>
@@ -13213,7 +10792,7 @@
               <a:buNone/>
             </a:pPr>
             <a:r>
-              <a:rPr lang="en-US" sz="1050" dirty="0">
+              <a:rPr lang="en-US" sz="900" dirty="0">
                 <a:solidFill>
                   <a:srgbClr val="7A849C"/>
                 </a:solidFill>
@@ -13227,7 +10806,7 @@
               <a:buNone/>
             </a:pPr>
             <a:r>
-              <a:rPr lang="en-US" sz="1050" b="1" dirty="0">
+              <a:rPr lang="en-US" sz="900" b="1" dirty="0">
                 <a:solidFill>
                   <a:srgbClr val="7A849C"/>
                 </a:solidFill>
@@ -13237,36 +10816,11 @@
               </a:rPr>
               <a:t>In production</a:t>
             </a:r>
-            <a:endParaRPr lang="en-US" sz="1050" dirty="0"/>
-          </a:p>
-        </p:txBody>
-      </p:sp>
-      <p:sp>
-        <p:nvSpPr>
-          <p:cNvPr id="46" name="Text 36"/>
-          <p:cNvSpPr txBox="1"/>
-          <p:nvPr/>
-        </p:nvSpPr>
-        <p:spPr>
-          <a:xfrm>
-            <a:off x="8065008" y="5001768"/>
-            <a:ext cx="1691640" cy="274320"/>
-          </a:xfrm>
-          <a:prstGeom prst="rect">
-            <a:avLst/>
-          </a:prstGeom>
-          <a:noFill/>
-          <a:ln/>
-        </p:spPr>
-        <p:txBody>
-          <a:bodyPr wrap="square" lIns="0" tIns="0" rIns="0" bIns="0" rtlCol="0" anchor="t"/>
-          <a:lstStyle/>
-          <a:p>
             <a:pPr algn="ctr" indent="0" marL="0">
               <a:buNone/>
             </a:pPr>
             <a:r>
-              <a:rPr lang="en-US" sz="1050" dirty="0">
+              <a:rPr lang="en-US" sz="900" dirty="0">
                 <a:solidFill>
                   <a:srgbClr val="7A849C"/>
                 </a:solidFill>
@@ -13274,22 +10828,22 @@
                 <a:ea typeface="Exo 2" pitchFamily="34" charset="-122"/>
                 <a:cs typeface="Exo 2" pitchFamily="34" charset="-120"/>
               </a:rPr>
-              <a:t>Calendar: 22 Oct</a:t>
-            </a:r>
-            <a:endParaRPr lang="en-US" sz="1050" dirty="0"/>
+              <a:t>  calendar: 22 Oct</a:t>
+            </a:r>
+            <a:endParaRPr lang="en-US" sz="900" dirty="0"/>
           </a:p>
         </p:txBody>
       </p:sp>
       <p:sp>
         <p:nvSpPr>
-          <p:cNvPr id="47" name="Text 37"/>
+          <p:cNvPr id="42" name="Text 32"/>
           <p:cNvSpPr txBox="1"/>
           <p:nvPr/>
         </p:nvSpPr>
         <p:spPr>
           <a:xfrm>
-            <a:off x="9939528" y="1554480"/>
-            <a:ext cx="1691640" cy="228600"/>
+            <a:off x="9939528" y="1444752"/>
+            <a:ext cx="1691640" cy="201168"/>
           </a:xfrm>
           <a:prstGeom prst="rect">
             <a:avLst/>
@@ -13305,7 +10859,7 @@
               <a:buNone/>
             </a:pPr>
             <a:r>
-              <a:rPr lang="en-US" sz="1000" b="1" spc="200" kern="0" dirty="0">
+              <a:rPr lang="en-US" sz="950" b="1" spc="200" kern="0" dirty="0">
                 <a:solidFill>
                   <a:srgbClr val="9A7B1F"/>
                 </a:solidFill>
@@ -13315,20 +10869,20 @@
               </a:rPr>
               <a:t>NOV</a:t>
             </a:r>
-            <a:endParaRPr lang="en-US" sz="1000" dirty="0"/>
+            <a:endParaRPr lang="en-US" sz="950" dirty="0"/>
           </a:p>
         </p:txBody>
       </p:sp>
       <p:sp>
         <p:nvSpPr>
-          <p:cNvPr id="48" name="Shape 38"/>
+          <p:cNvPr id="43" name="Shape 33"/>
           <p:cNvSpPr/>
           <p:nvPr/>
         </p:nvSpPr>
         <p:spPr>
           <a:xfrm>
-            <a:off x="10684764" y="1837944"/>
-            <a:ext cx="201168" cy="201168"/>
+            <a:off x="10693908" y="1673352"/>
+            <a:ext cx="182880" cy="182880"/>
           </a:xfrm>
           <a:prstGeom prst="ellipse">
             <a:avLst/>
@@ -13346,14 +10900,14 @@
       </p:sp>
       <p:sp>
         <p:nvSpPr>
-          <p:cNvPr id="49" name="Shape 39"/>
+          <p:cNvPr id="44" name="Shape 34"/>
           <p:cNvSpPr/>
           <p:nvPr/>
         </p:nvSpPr>
         <p:spPr>
           <a:xfrm>
-            <a:off x="10076688" y="2212848"/>
-            <a:ext cx="1417320" cy="1828800"/>
+            <a:off x="10282428" y="1938528"/>
+            <a:ext cx="1005840" cy="1298448"/>
           </a:xfrm>
           <a:prstGeom prst="rect">
             <a:avLst/>
@@ -13371,14 +10925,14 @@
       </p:sp>
       <p:sp>
         <p:nvSpPr>
-          <p:cNvPr id="50" name="Text 40"/>
+          <p:cNvPr id="45" name="Text 35"/>
           <p:cNvSpPr txBox="1"/>
           <p:nvPr/>
         </p:nvSpPr>
         <p:spPr>
           <a:xfrm>
-            <a:off x="10168128" y="2212848"/>
-            <a:ext cx="1234440" cy="1828800"/>
+            <a:off x="10328148" y="1938528"/>
+            <a:ext cx="914400" cy="1298448"/>
           </a:xfrm>
           <a:prstGeom prst="rect">
             <a:avLst/>
@@ -13394,7 +10948,7 @@
               <a:buNone/>
             </a:pPr>
             <a:r>
-              <a:rPr lang="en-US" sz="1000" dirty="0">
+              <a:rPr lang="en-US" sz="950" dirty="0">
                 <a:solidFill>
                   <a:srgbClr val="7A849C"/>
                 </a:solidFill>
@@ -13404,20 +10958,20 @@
               </a:rPr>
               <a:t>Scheduled</a:t>
             </a:r>
-            <a:endParaRPr lang="en-US" sz="1000" dirty="0"/>
+            <a:endParaRPr lang="en-US" sz="950" dirty="0"/>
           </a:p>
         </p:txBody>
       </p:sp>
       <p:sp>
         <p:nvSpPr>
-          <p:cNvPr id="51" name="Text 41"/>
+          <p:cNvPr id="46" name="Text 36"/>
           <p:cNvSpPr txBox="1"/>
           <p:nvPr/>
         </p:nvSpPr>
         <p:spPr>
           <a:xfrm>
-            <a:off x="9939528" y="4160520"/>
-            <a:ext cx="1691640" cy="502920"/>
+            <a:off x="9939528" y="3291840"/>
+            <a:ext cx="1691640" cy="237744"/>
           </a:xfrm>
           <a:prstGeom prst="rect">
             <a:avLst/>
@@ -13433,7 +10987,7 @@
               <a:buNone/>
             </a:pPr>
             <a:r>
-              <a:rPr lang="en-US" sz="1200" b="1" dirty="0">
+              <a:rPr lang="en-US" sz="1100" b="1" dirty="0">
                 <a:solidFill>
                   <a:srgbClr val="132257"/>
                 </a:solidFill>
@@ -13443,20 +10997,20 @@
               </a:rPr>
               <a:t>Hamed Al Bloushi</a:t>
             </a:r>
-            <a:endParaRPr lang="en-US" sz="1200" dirty="0"/>
+            <a:endParaRPr lang="en-US" sz="1100" dirty="0"/>
           </a:p>
         </p:txBody>
       </p:sp>
       <p:sp>
         <p:nvSpPr>
-          <p:cNvPr id="52" name="Text 42"/>
+          <p:cNvPr id="47" name="Text 37"/>
           <p:cNvSpPr txBox="1"/>
           <p:nvPr/>
         </p:nvSpPr>
         <p:spPr>
           <a:xfrm>
-            <a:off x="9939528" y="4709160"/>
-            <a:ext cx="1691640" cy="274320"/>
+            <a:off x="9893808" y="3538728"/>
+            <a:ext cx="1783080" cy="237744"/>
           </a:xfrm>
           <a:prstGeom prst="rect">
             <a:avLst/>
@@ -13472,7 +11026,7 @@
               <a:buNone/>
             </a:pPr>
             <a:r>
-              <a:rPr lang="en-US" sz="1050" dirty="0">
+              <a:rPr lang="en-US" sz="900" dirty="0">
                 <a:solidFill>
                   <a:srgbClr val="7A849C"/>
                 </a:solidFill>
@@ -13486,7 +11040,7 @@
               <a:buNone/>
             </a:pPr>
             <a:r>
-              <a:rPr lang="en-US" sz="1050" b="1" dirty="0">
+              <a:rPr lang="en-US" sz="900" b="1" dirty="0">
                 <a:solidFill>
                   <a:srgbClr val="7A849C"/>
                 </a:solidFill>
@@ -13496,36 +11050,11 @@
               </a:rPr>
               <a:t>Scheduled</a:t>
             </a:r>
-            <a:endParaRPr lang="en-US" sz="1050" dirty="0"/>
-          </a:p>
-        </p:txBody>
-      </p:sp>
-      <p:sp>
-        <p:nvSpPr>
-          <p:cNvPr id="53" name="Text 43"/>
-          <p:cNvSpPr txBox="1"/>
-          <p:nvPr/>
-        </p:nvSpPr>
-        <p:spPr>
-          <a:xfrm>
-            <a:off x="9939528" y="5001768"/>
-            <a:ext cx="1691640" cy="274320"/>
-          </a:xfrm>
-          <a:prstGeom prst="rect">
-            <a:avLst/>
-          </a:prstGeom>
-          <a:noFill/>
-          <a:ln/>
-        </p:spPr>
-        <p:txBody>
-          <a:bodyPr wrap="square" lIns="0" tIns="0" rIns="0" bIns="0" rtlCol="0" anchor="t"/>
-          <a:lstStyle/>
-          <a:p>
             <a:pPr algn="ctr" indent="0" marL="0">
               <a:buNone/>
             </a:pPr>
             <a:r>
-              <a:rPr lang="en-US" sz="1050" dirty="0">
+              <a:rPr lang="en-US" sz="900" dirty="0">
                 <a:solidFill>
                   <a:srgbClr val="7A849C"/>
                 </a:solidFill>
@@ -13533,12 +11062,1038 @@
                 <a:ea typeface="Exo 2" pitchFamily="34" charset="-122"/>
                 <a:cs typeface="Exo 2" pitchFamily="34" charset="-120"/>
               </a:rPr>
-              <a:t>Per rollout plan</a:t>
-            </a:r>
-            <a:endParaRPr lang="en-US" sz="1050" dirty="0"/>
+              <a:t>  per rollout plan</a:t>
+            </a:r>
+            <a:endParaRPr lang="en-US" sz="900" dirty="0"/>
           </a:p>
         </p:txBody>
       </p:sp>
+      <p:graphicFrame>
+        <p:nvGraphicFramePr>
+          <p:cNvPr id="8" name="Table 0"/>
+          <p:cNvGraphicFramePr>
+            <a:graphicFrameLocks noGrp="1"/>
+          </p:cNvGraphicFramePr>
+          <p:nvPr>
+            <p:extLst>
+              <p:ext uri="{D42A27DB-BD31-4B8C-83A1-F6EECF244321}">
+                <p14:modId xmlns:p14="http://schemas.microsoft.com/office/powerpoint/2010/main" val="1579011935"/>
+              </p:ext>
+            </p:extLst>
+          </p:nvPr>
+        </p:nvGraphicFramePr>
+        <p:xfrm>
+          <a:off x="566928" y="3959352"/>
+          <a:ext cx="11064240" cy="914400"/>
+        </p:xfrm>
+        <a:graphic>
+          <a:graphicData uri="http://schemas.openxmlformats.org/drawingml/2006/table">
+            <a:tbl>
+              <a:tblPr/>
+              <a:tblGrid>
+                <a:gridCol w="1188720"/>
+                <a:gridCol w="6949440"/>
+                <a:gridCol w="1463040"/>
+                <a:gridCol w="1463040"/>
+              </a:tblGrid>
+              <a:tr h="274320">
+                <a:tc>
+                  <a:txBody>
+                    <a:bodyPr/>
+                    <a:lstStyle/>
+                    <a:p>
+                      <a:pPr indent="0" marL="0">
+                        <a:buNone/>
+                      </a:pPr>
+                      <a:r>
+                        <a:rPr lang="en-US" sz="1000" b="1" dirty="0">
+                          <a:solidFill>
+                            <a:srgbClr val="FFFFFF"/>
+                          </a:solidFill>
+                          <a:latin typeface="Exo 2" pitchFamily="34" charset="0"/>
+                          <a:ea typeface="Exo 2" pitchFamily="34" charset="-122"/>
+                          <a:cs typeface="Exo 2" pitchFamily="34" charset="-120"/>
+                        </a:rPr>
+                        <a:t>Channel</a:t>
+                      </a:r>
+                      <a:endParaRPr lang="en-US" sz="1000" dirty="0">
+                        <a:latin typeface="Exo 2" charset="0"/>
+                        <a:ea typeface="Exo 2" charset="0"/>
+                        <a:cs typeface="Exo 2" charset="0"/>
+                      </a:endParaRPr>
+                    </a:p>
+                  </a:txBody>
+                  <a:tcPr marL="63500" marR="63500" marT="12700" marB="12700" anchor="ctr">
+                    <a:lnL w="0" cap="flat" cmpd="sng" algn="ctr">
+                      <a:noFill/>
+                    </a:lnL>
+                    <a:lnR w="0" cap="flat" cmpd="sng" algn="ctr">
+                      <a:noFill/>
+                    </a:lnR>
+                    <a:lnT w="0" cap="flat" cmpd="sng" algn="ctr">
+                      <a:noFill/>
+                    </a:lnT>
+                    <a:lnB w="0" cap="flat" cmpd="sng" algn="ctr">
+                      <a:noFill/>
+                    </a:lnB>
+                    <a:solidFill>
+                      <a:srgbClr val="132257"/>
+                    </a:solidFill>
+                  </a:tcPr>
+                </a:tc>
+                <a:tc>
+                  <a:txBody>
+                    <a:bodyPr/>
+                    <a:lstStyle/>
+                    <a:p>
+                      <a:pPr indent="0" marL="0">
+                        <a:buNone/>
+                      </a:pPr>
+                      <a:r>
+                        <a:rPr lang="en-US" sz="1000" b="1" dirty="0">
+                          <a:solidFill>
+                            <a:srgbClr val="FFFFFF"/>
+                          </a:solidFill>
+                          <a:latin typeface="Exo 2" pitchFamily="34" charset="0"/>
+                          <a:ea typeface="Exo 2" pitchFamily="34" charset="-122"/>
+                          <a:cs typeface="Exo 2" pitchFamily="34" charset="-120"/>
+                        </a:rPr>
+                        <a:t>Latest figure</a:t>
+                      </a:r>
+                      <a:endParaRPr lang="en-US" sz="1000" dirty="0">
+                        <a:latin typeface="Exo 2" charset="0"/>
+                        <a:ea typeface="Exo 2" charset="0"/>
+                        <a:cs typeface="Exo 2" charset="0"/>
+                      </a:endParaRPr>
+                    </a:p>
+                  </a:txBody>
+                  <a:tcPr marL="63500" marR="63500" marT="12700" marB="12700" anchor="ctr">
+                    <a:lnL w="0" cap="flat" cmpd="sng" algn="ctr">
+                      <a:noFill/>
+                    </a:lnL>
+                    <a:lnR w="0" cap="flat" cmpd="sng" algn="ctr">
+                      <a:noFill/>
+                    </a:lnR>
+                    <a:lnT w="0" cap="flat" cmpd="sng" algn="ctr">
+                      <a:noFill/>
+                    </a:lnT>
+                    <a:lnB w="0" cap="flat" cmpd="sng" algn="ctr">
+                      <a:noFill/>
+                    </a:lnB>
+                    <a:solidFill>
+                      <a:srgbClr val="132257"/>
+                    </a:solidFill>
+                  </a:tcPr>
+                </a:tc>
+                <a:tc>
+                  <a:txBody>
+                    <a:bodyPr/>
+                    <a:lstStyle/>
+                    <a:p>
+                      <a:pPr indent="0" marL="0">
+                        <a:buNone/>
+                      </a:pPr>
+                      <a:r>
+                        <a:rPr lang="en-US" sz="1000" b="1" dirty="0">
+                          <a:solidFill>
+                            <a:srgbClr val="FFFFFF"/>
+                          </a:solidFill>
+                          <a:latin typeface="Exo 2" pitchFamily="34" charset="0"/>
+                          <a:ea typeface="Exo 2" pitchFamily="34" charset="-122"/>
+                          <a:cs typeface="Exo 2" pitchFamily="34" charset="-120"/>
+                        </a:rPr>
+                        <a:t>Period</a:t>
+                      </a:r>
+                      <a:endParaRPr lang="en-US" sz="1000" dirty="0">
+                        <a:latin typeface="Exo 2" charset="0"/>
+                        <a:ea typeface="Exo 2" charset="0"/>
+                        <a:cs typeface="Exo 2" charset="0"/>
+                      </a:endParaRPr>
+                    </a:p>
+                  </a:txBody>
+                  <a:tcPr marL="63500" marR="63500" marT="12700" marB="12700" anchor="ctr">
+                    <a:lnL w="0" cap="flat" cmpd="sng" algn="ctr">
+                      <a:noFill/>
+                    </a:lnL>
+                    <a:lnR w="0" cap="flat" cmpd="sng" algn="ctr">
+                      <a:noFill/>
+                    </a:lnR>
+                    <a:lnT w="0" cap="flat" cmpd="sng" algn="ctr">
+                      <a:noFill/>
+                    </a:lnT>
+                    <a:lnB w="0" cap="flat" cmpd="sng" algn="ctr">
+                      <a:noFill/>
+                    </a:lnB>
+                    <a:solidFill>
+                      <a:srgbClr val="132257"/>
+                    </a:solidFill>
+                  </a:tcPr>
+                </a:tc>
+                <a:tc>
+                  <a:txBody>
+                    <a:bodyPr/>
+                    <a:lstStyle/>
+                    <a:p>
+                      <a:pPr indent="0" marL="0">
+                        <a:buNone/>
+                      </a:pPr>
+                      <a:r>
+                        <a:rPr lang="en-US" sz="1000" b="1" dirty="0">
+                          <a:solidFill>
+                            <a:srgbClr val="FFFFFF"/>
+                          </a:solidFill>
+                          <a:latin typeface="Exo 2" pitchFamily="34" charset="0"/>
+                          <a:ea typeface="Exo 2" pitchFamily="34" charset="-122"/>
+                          <a:cs typeface="Exo 2" pitchFamily="34" charset="-120"/>
+                        </a:rPr>
+                        <a:t>Status</a:t>
+                      </a:r>
+                      <a:endParaRPr lang="en-US" sz="1000" dirty="0">
+                        <a:latin typeface="Exo 2" charset="0"/>
+                        <a:ea typeface="Exo 2" charset="0"/>
+                        <a:cs typeface="Exo 2" charset="0"/>
+                      </a:endParaRPr>
+                    </a:p>
+                  </a:txBody>
+                  <a:tcPr marL="63500" marR="63500" marT="12700" marB="12700" anchor="ctr">
+                    <a:lnL w="0" cap="flat" cmpd="sng" algn="ctr">
+                      <a:noFill/>
+                    </a:lnL>
+                    <a:lnR w="0" cap="flat" cmpd="sng" algn="ctr">
+                      <a:noFill/>
+                    </a:lnR>
+                    <a:lnT w="0" cap="flat" cmpd="sng" algn="ctr">
+                      <a:noFill/>
+                    </a:lnT>
+                    <a:lnB w="0" cap="flat" cmpd="sng" algn="ctr">
+                      <a:noFill/>
+                    </a:lnB>
+                    <a:solidFill>
+                      <a:srgbClr val="132257"/>
+                    </a:solidFill>
+                  </a:tcPr>
+                </a:tc>
+              </a:tr>
+              <a:tr h="329184">
+                <a:tc>
+                  <a:txBody>
+                    <a:bodyPr/>
+                    <a:lstStyle/>
+                    <a:p>
+                      <a:pPr indent="0" marL="0">
+                        <a:buNone/>
+                      </a:pPr>
+                      <a:r>
+                        <a:rPr lang="en-US" sz="950" dirty="0">
+                          <a:solidFill>
+                            <a:srgbClr val="1F2A44"/>
+                          </a:solidFill>
+                          <a:latin typeface="Exo 2" pitchFamily="34" charset="0"/>
+                          <a:ea typeface="Exo 2" pitchFamily="34" charset="-122"/>
+                          <a:cs typeface="Exo 2" pitchFamily="34" charset="-120"/>
+                        </a:rPr>
+                        <a:t>Instagram</a:t>
+                      </a:r>
+                      <a:endParaRPr lang="en-US" sz="950" dirty="0">
+                        <a:latin typeface="Exo 2" charset="0"/>
+                        <a:ea typeface="Exo 2" charset="0"/>
+                        <a:cs typeface="Exo 2" charset="0"/>
+                      </a:endParaRPr>
+                    </a:p>
+                  </a:txBody>
+                  <a:tcPr marL="63500" marR="63500" marT="12700" marB="12700" anchor="ctr">
+                    <a:lnL w="0" cap="flat" cmpd="sng" algn="ctr">
+                      <a:noFill/>
+                    </a:lnL>
+                    <a:lnR w="0" cap="flat" cmpd="sng" algn="ctr">
+                      <a:noFill/>
+                    </a:lnR>
+                    <a:lnT w="0" cap="flat" cmpd="sng" algn="ctr">
+                      <a:noFill/>
+                    </a:lnT>
+                    <a:lnB w="9525" cap="flat" cmpd="sng" algn="ctr">
+                      <a:solidFill>
+                        <a:srgbClr val="D9DFEA"/>
+                      </a:solidFill>
+                      <a:prstDash val="solid"/>
+                      <a:round/>
+                      <a:headEnd type="none" w="med" len="med"/>
+                      <a:tailEnd type="none" w="med" len="med"/>
+                    </a:lnB>
+                  </a:tcPr>
+                </a:tc>
+                <a:tc>
+                  <a:txBody>
+                    <a:bodyPr/>
+                    <a:lstStyle/>
+                    <a:p>
+                      <a:pPr indent="0" marL="0">
+                        <a:buNone/>
+                      </a:pPr>
+                      <a:r>
+                        <a:rPr lang="en-US" sz="950" dirty="0">
+                          <a:solidFill>
+                            <a:srgbClr val="1F2A44"/>
+                          </a:solidFill>
+                          <a:latin typeface="Exo 2" pitchFamily="34" charset="0"/>
+                          <a:ea typeface="Exo 2" pitchFamily="34" charset="-122"/>
+                          <a:cs typeface="Exo 2" pitchFamily="34" charset="-120"/>
+                        </a:rPr>
+                        <a:t>2,116 followers; 5.3M, 1.3M and 186K views on the top three posts, every other post under 600</a:t>
+                      </a:r>
+                      <a:endParaRPr lang="en-US" sz="950" dirty="0">
+                        <a:latin typeface="Exo 2" charset="0"/>
+                        <a:ea typeface="Exo 2" charset="0"/>
+                        <a:cs typeface="Exo 2" charset="0"/>
+                      </a:endParaRPr>
+                    </a:p>
+                  </a:txBody>
+                  <a:tcPr marL="63500" marR="63500" marT="12700" marB="12700" anchor="ctr">
+                    <a:lnL w="0" cap="flat" cmpd="sng" algn="ctr">
+                      <a:noFill/>
+                    </a:lnL>
+                    <a:lnR w="0" cap="flat" cmpd="sng" algn="ctr">
+                      <a:noFill/>
+                    </a:lnR>
+                    <a:lnT w="0" cap="flat" cmpd="sng" algn="ctr">
+                      <a:noFill/>
+                    </a:lnT>
+                    <a:lnB w="9525" cap="flat" cmpd="sng" algn="ctr">
+                      <a:solidFill>
+                        <a:srgbClr val="D9DFEA"/>
+                      </a:solidFill>
+                      <a:prstDash val="solid"/>
+                      <a:round/>
+                      <a:headEnd type="none" w="med" len="med"/>
+                      <a:tailEnd type="none" w="med" len="med"/>
+                    </a:lnB>
+                  </a:tcPr>
+                </a:tc>
+                <a:tc>
+                  <a:txBody>
+                    <a:bodyPr/>
+                    <a:lstStyle/>
+                    <a:p>
+                      <a:pPr indent="0" marL="0">
+                        <a:buNone/>
+                      </a:pPr>
+                      <a:r>
+                        <a:rPr lang="en-US" sz="950" dirty="0">
+                          <a:solidFill>
+                            <a:srgbClr val="1F2A44"/>
+                          </a:solidFill>
+                          <a:latin typeface="Exo 2" pitchFamily="34" charset="0"/>
+                          <a:ea typeface="Exo 2" pitchFamily="34" charset="-122"/>
+                          <a:cs typeface="Exo 2" pitchFamily="34" charset="-120"/>
+                        </a:rPr>
+                        <a:t>Late Sep</a:t>
+                      </a:r>
+                      <a:endParaRPr lang="en-US" sz="950" dirty="0">
+                        <a:latin typeface="Exo 2" charset="0"/>
+                        <a:ea typeface="Exo 2" charset="0"/>
+                        <a:cs typeface="Exo 2" charset="0"/>
+                      </a:endParaRPr>
+                    </a:p>
+                  </a:txBody>
+                  <a:tcPr marL="63500" marR="63500" marT="12700" marB="12700" anchor="ctr">
+                    <a:lnL w="0" cap="flat" cmpd="sng" algn="ctr">
+                      <a:noFill/>
+                    </a:lnL>
+                    <a:lnR w="0" cap="flat" cmpd="sng" algn="ctr">
+                      <a:noFill/>
+                    </a:lnR>
+                    <a:lnT w="0" cap="flat" cmpd="sng" algn="ctr">
+                      <a:noFill/>
+                    </a:lnT>
+                    <a:lnB w="9525" cap="flat" cmpd="sng" algn="ctr">
+                      <a:solidFill>
+                        <a:srgbClr val="D9DFEA"/>
+                      </a:solidFill>
+                      <a:prstDash val="solid"/>
+                      <a:round/>
+                      <a:headEnd type="none" w="med" len="med"/>
+                      <a:tailEnd type="none" w="med" len="med"/>
+                    </a:lnB>
+                  </a:tcPr>
+                </a:tc>
+                <a:tc>
+                  <a:txBody>
+                    <a:bodyPr/>
+                    <a:lstStyle/>
+                    <a:p>
+                      <a:pPr indent="0" marL="0">
+                        <a:buNone/>
+                      </a:pPr>
+                      <a:r>
+                        <a:rPr lang="en-US" sz="950" dirty="0">
+                          <a:solidFill>
+                            <a:srgbClr val="9A7B1F"/>
+                          </a:solidFill>
+                          <a:latin typeface="Exo 2" pitchFamily="34" charset="0"/>
+                          <a:ea typeface="Exo 2" pitchFamily="34" charset="-122"/>
+                          <a:cs typeface="Exo 2" pitchFamily="34" charset="-120"/>
+                        </a:rPr>
+                        <a:t>● </a:t>
+                      </a:r>
+                      <a:pPr indent="0" marL="0">
+                        <a:buNone/>
+                      </a:pPr>
+                      <a:r>
+                        <a:rPr lang="en-US" sz="950" b="1" dirty="0">
+                          <a:solidFill>
+                            <a:srgbClr val="9A7B1F"/>
+                          </a:solidFill>
+                          <a:latin typeface="Exo 2" pitchFamily="34" charset="0"/>
+                          <a:ea typeface="Exo 2" pitchFamily="34" charset="-122"/>
+                          <a:cs typeface="Exo 2" pitchFamily="34" charset="-120"/>
+                        </a:rPr>
+                        <a:t>Reported</a:t>
+                      </a:r>
+                      <a:endParaRPr lang="en-US" sz="950" dirty="0">
+                        <a:latin typeface="Exo 2" charset="0"/>
+                        <a:ea typeface="Exo 2" charset="0"/>
+                        <a:cs typeface="Exo 2" charset="0"/>
+                      </a:endParaRPr>
+                    </a:p>
+                  </a:txBody>
+                  <a:tcPr marL="63500" marR="63500" marT="12700" marB="12700" anchor="ctr">
+                    <a:lnL w="0" cap="flat" cmpd="sng" algn="ctr">
+                      <a:noFill/>
+                    </a:lnL>
+                    <a:lnR w="0" cap="flat" cmpd="sng" algn="ctr">
+                      <a:noFill/>
+                    </a:lnR>
+                    <a:lnT w="0" cap="flat" cmpd="sng" algn="ctr">
+                      <a:noFill/>
+                    </a:lnT>
+                    <a:lnB w="9525" cap="flat" cmpd="sng" algn="ctr">
+                      <a:solidFill>
+                        <a:srgbClr val="D9DFEA"/>
+                      </a:solidFill>
+                      <a:prstDash val="solid"/>
+                      <a:round/>
+                      <a:headEnd type="none" w="med" len="med"/>
+                      <a:tailEnd type="none" w="med" len="med"/>
+                    </a:lnB>
+                  </a:tcPr>
+                </a:tc>
+              </a:tr>
+              <a:tr h="329184">
+                <a:tc>
+                  <a:txBody>
+                    <a:bodyPr/>
+                    <a:lstStyle/>
+                    <a:p>
+                      <a:pPr indent="0" marL="0">
+                        <a:buNone/>
+                      </a:pPr>
+                      <a:r>
+                        <a:rPr lang="en-US" sz="950" dirty="0">
+                          <a:solidFill>
+                            <a:srgbClr val="1F2A44"/>
+                          </a:solidFill>
+                          <a:latin typeface="Exo 2" pitchFamily="34" charset="0"/>
+                          <a:ea typeface="Exo 2" pitchFamily="34" charset="-122"/>
+                          <a:cs typeface="Exo 2" pitchFamily="34" charset="-120"/>
+                        </a:rPr>
+                        <a:t>LinkedIn</a:t>
+                      </a:r>
+                      <a:endParaRPr lang="en-US" sz="950" dirty="0">
+                        <a:latin typeface="Exo 2" charset="0"/>
+                        <a:ea typeface="Exo 2" charset="0"/>
+                        <a:cs typeface="Exo 2" charset="0"/>
+                      </a:endParaRPr>
+                    </a:p>
+                  </a:txBody>
+                  <a:tcPr marL="63500" marR="63500" marT="12700" marB="12700" anchor="ctr">
+                    <a:lnL w="0" cap="flat" cmpd="sng" algn="ctr">
+                      <a:noFill/>
+                    </a:lnL>
+                    <a:lnR w="0" cap="flat" cmpd="sng" algn="ctr">
+                      <a:noFill/>
+                    </a:lnR>
+                    <a:lnT w="0" cap="flat" cmpd="sng" algn="ctr">
+                      <a:noFill/>
+                    </a:lnT>
+                    <a:lnB w="9525" cap="flat" cmpd="sng" algn="ctr">
+                      <a:solidFill>
+                        <a:srgbClr val="D9DFEA"/>
+                      </a:solidFill>
+                      <a:prstDash val="solid"/>
+                      <a:round/>
+                      <a:headEnd type="none" w="med" len="med"/>
+                      <a:tailEnd type="none" w="med" len="med"/>
+                    </a:lnB>
+                  </a:tcPr>
+                </a:tc>
+                <a:tc>
+                  <a:txBody>
+                    <a:bodyPr/>
+                    <a:lstStyle/>
+                    <a:p>
+                      <a:pPr indent="0" marL="0">
+                        <a:buNone/>
+                      </a:pPr>
+                      <a:r>
+                        <a:rPr lang="en-US" sz="950" dirty="0">
+                          <a:solidFill>
+                            <a:srgbClr val="1F2A44"/>
+                          </a:solidFill>
+                          <a:latin typeface="Exo 2" pitchFamily="34" charset="0"/>
+                          <a:ea typeface="Exo 2" pitchFamily="34" charset="-122"/>
+                          <a:cs typeface="Exo 2" pitchFamily="34" charset="-120"/>
+                        </a:rPr>
+                        <a:t>531 followers (586 in an earlier count); 247 new vs 4 prior; 559 impressions, +118%</a:t>
+                      </a:r>
+                      <a:endParaRPr lang="en-US" sz="950" dirty="0">
+                        <a:latin typeface="Exo 2" charset="0"/>
+                        <a:ea typeface="Exo 2" charset="0"/>
+                        <a:cs typeface="Exo 2" charset="0"/>
+                      </a:endParaRPr>
+                    </a:p>
+                  </a:txBody>
+                  <a:tcPr marL="63500" marR="63500" marT="12700" marB="12700" anchor="ctr">
+                    <a:lnL w="0" cap="flat" cmpd="sng" algn="ctr">
+                      <a:noFill/>
+                    </a:lnL>
+                    <a:lnR w="0" cap="flat" cmpd="sng" algn="ctr">
+                      <a:noFill/>
+                    </a:lnR>
+                    <a:lnT w="0" cap="flat" cmpd="sng" algn="ctr">
+                      <a:noFill/>
+                    </a:lnT>
+                    <a:lnB w="9525" cap="flat" cmpd="sng" algn="ctr">
+                      <a:solidFill>
+                        <a:srgbClr val="D9DFEA"/>
+                      </a:solidFill>
+                      <a:prstDash val="solid"/>
+                      <a:round/>
+                      <a:headEnd type="none" w="med" len="med"/>
+                      <a:tailEnd type="none" w="med" len="med"/>
+                    </a:lnB>
+                  </a:tcPr>
+                </a:tc>
+                <a:tc>
+                  <a:txBody>
+                    <a:bodyPr/>
+                    <a:lstStyle/>
+                    <a:p>
+                      <a:pPr indent="0" marL="0">
+                        <a:buNone/>
+                      </a:pPr>
+                      <a:r>
+                        <a:rPr lang="en-US" sz="950" dirty="0">
+                          <a:solidFill>
+                            <a:srgbClr val="1F2A44"/>
+                          </a:solidFill>
+                          <a:latin typeface="Exo 2" pitchFamily="34" charset="0"/>
+                          <a:ea typeface="Exo 2" pitchFamily="34" charset="-122"/>
+                          <a:cs typeface="Exo 2" pitchFamily="34" charset="-120"/>
+                        </a:rPr>
+                        <a:t>30 days; 13-27 Sep</a:t>
+                      </a:r>
+                      <a:endParaRPr lang="en-US" sz="950" dirty="0">
+                        <a:latin typeface="Exo 2" charset="0"/>
+                        <a:ea typeface="Exo 2" charset="0"/>
+                        <a:cs typeface="Exo 2" charset="0"/>
+                      </a:endParaRPr>
+                    </a:p>
+                  </a:txBody>
+                  <a:tcPr marL="63500" marR="63500" marT="12700" marB="12700" anchor="ctr">
+                    <a:lnL w="0" cap="flat" cmpd="sng" algn="ctr">
+                      <a:noFill/>
+                    </a:lnL>
+                    <a:lnR w="0" cap="flat" cmpd="sng" algn="ctr">
+                      <a:noFill/>
+                    </a:lnR>
+                    <a:lnT w="0" cap="flat" cmpd="sng" algn="ctr">
+                      <a:noFill/>
+                    </a:lnT>
+                    <a:lnB w="9525" cap="flat" cmpd="sng" algn="ctr">
+                      <a:solidFill>
+                        <a:srgbClr val="D9DFEA"/>
+                      </a:solidFill>
+                      <a:prstDash val="solid"/>
+                      <a:round/>
+                      <a:headEnd type="none" w="med" len="med"/>
+                      <a:tailEnd type="none" w="med" len="med"/>
+                    </a:lnB>
+                  </a:tcPr>
+                </a:tc>
+                <a:tc>
+                  <a:txBody>
+                    <a:bodyPr/>
+                    <a:lstStyle/>
+                    <a:p>
+                      <a:pPr indent="0" marL="0">
+                        <a:buNone/>
+                      </a:pPr>
+                      <a:r>
+                        <a:rPr lang="en-US" sz="950" dirty="0">
+                          <a:solidFill>
+                            <a:srgbClr val="C53030"/>
+                          </a:solidFill>
+                          <a:latin typeface="Exo 2" pitchFamily="34" charset="0"/>
+                          <a:ea typeface="Exo 2" pitchFamily="34" charset="-122"/>
+                          <a:cs typeface="Exo 2" pitchFamily="34" charset="-120"/>
+                        </a:rPr>
+                        <a:t>● </a:t>
+                      </a:r>
+                      <a:pPr indent="0" marL="0">
+                        <a:buNone/>
+                      </a:pPr>
+                      <a:r>
+                        <a:rPr lang="en-US" sz="950" b="1" dirty="0">
+                          <a:solidFill>
+                            <a:srgbClr val="C53030"/>
+                          </a:solidFill>
+                          <a:latin typeface="Exo 2" pitchFamily="34" charset="0"/>
+                          <a:ea typeface="Exo 2" pitchFamily="34" charset="-122"/>
+                          <a:cs typeface="Exo 2" pitchFamily="34" charset="-120"/>
+                        </a:rPr>
+                        <a:t>Conflicting</a:t>
+                      </a:r>
+                      <a:endParaRPr lang="en-US" sz="950" dirty="0">
+                        <a:latin typeface="Exo 2" charset="0"/>
+                        <a:ea typeface="Exo 2" charset="0"/>
+                        <a:cs typeface="Exo 2" charset="0"/>
+                      </a:endParaRPr>
+                    </a:p>
+                  </a:txBody>
+                  <a:tcPr marL="63500" marR="63500" marT="12700" marB="12700" anchor="ctr">
+                    <a:lnL w="0" cap="flat" cmpd="sng" algn="ctr">
+                      <a:noFill/>
+                    </a:lnL>
+                    <a:lnR w="0" cap="flat" cmpd="sng" algn="ctr">
+                      <a:noFill/>
+                    </a:lnR>
+                    <a:lnT w="0" cap="flat" cmpd="sng" algn="ctr">
+                      <a:noFill/>
+                    </a:lnT>
+                    <a:lnB w="9525" cap="flat" cmpd="sng" algn="ctr">
+                      <a:solidFill>
+                        <a:srgbClr val="D9DFEA"/>
+                      </a:solidFill>
+                      <a:prstDash val="solid"/>
+                      <a:round/>
+                      <a:headEnd type="none" w="med" len="med"/>
+                      <a:tailEnd type="none" w="med" len="med"/>
+                    </a:lnB>
+                  </a:tcPr>
+                </a:tc>
+              </a:tr>
+              <a:tr h="329184">
+                <a:tc>
+                  <a:txBody>
+                    <a:bodyPr/>
+                    <a:lstStyle/>
+                    <a:p>
+                      <a:pPr indent="0" marL="0">
+                        <a:buNone/>
+                      </a:pPr>
+                      <a:r>
+                        <a:rPr lang="en-US" sz="950" dirty="0">
+                          <a:solidFill>
+                            <a:srgbClr val="1F2A44"/>
+                          </a:solidFill>
+                          <a:latin typeface="Exo 2" pitchFamily="34" charset="0"/>
+                          <a:ea typeface="Exo 2" pitchFamily="34" charset="-122"/>
+                          <a:cs typeface="Exo 2" pitchFamily="34" charset="-120"/>
+                        </a:rPr>
+                        <a:t>X / TikTok</a:t>
+                      </a:r>
+                      <a:endParaRPr lang="en-US" sz="950" dirty="0">
+                        <a:latin typeface="Exo 2" charset="0"/>
+                        <a:ea typeface="Exo 2" charset="0"/>
+                        <a:cs typeface="Exo 2" charset="0"/>
+                      </a:endParaRPr>
+                    </a:p>
+                  </a:txBody>
+                  <a:tcPr marL="63500" marR="63500" marT="12700" marB="12700" anchor="ctr">
+                    <a:lnL w="0" cap="flat" cmpd="sng" algn="ctr">
+                      <a:noFill/>
+                    </a:lnL>
+                    <a:lnR w="0" cap="flat" cmpd="sng" algn="ctr">
+                      <a:noFill/>
+                    </a:lnR>
+                    <a:lnT w="0" cap="flat" cmpd="sng" algn="ctr">
+                      <a:noFill/>
+                    </a:lnT>
+                    <a:lnB w="9525" cap="flat" cmpd="sng" algn="ctr">
+                      <a:solidFill>
+                        <a:srgbClr val="D9DFEA"/>
+                      </a:solidFill>
+                      <a:prstDash val="solid"/>
+                      <a:round/>
+                      <a:headEnd type="none" w="med" len="med"/>
+                      <a:tailEnd type="none" w="med" len="med"/>
+                    </a:lnB>
+                  </a:tcPr>
+                </a:tc>
+                <a:tc>
+                  <a:txBody>
+                    <a:bodyPr/>
+                    <a:lstStyle/>
+                    <a:p>
+                      <a:pPr indent="0" marL="0">
+                        <a:buNone/>
+                      </a:pPr>
+                      <a:r>
+                        <a:rPr lang="en-US" sz="950" dirty="0">
+                          <a:solidFill>
+                            <a:srgbClr val="1F2A44"/>
+                          </a:solidFill>
+                          <a:latin typeface="Exo 2" pitchFamily="34" charset="0"/>
+                          <a:ea typeface="Exo 2" pitchFamily="34" charset="-122"/>
+                          <a:cs typeface="Exo 2" pitchFamily="34" charset="-120"/>
+                        </a:rPr>
+                        <a:t>X: 738 followers, 99 posts, 96.4% Bahrain audience.  TikTok: 15 followers, 176 likes</a:t>
+                      </a:r>
+                      <a:endParaRPr lang="en-US" sz="950" dirty="0">
+                        <a:latin typeface="Exo 2" charset="0"/>
+                        <a:ea typeface="Exo 2" charset="0"/>
+                        <a:cs typeface="Exo 2" charset="0"/>
+                      </a:endParaRPr>
+                    </a:p>
+                  </a:txBody>
+                  <a:tcPr marL="63500" marR="63500" marT="12700" marB="12700" anchor="ctr">
+                    <a:lnL w="0" cap="flat" cmpd="sng" algn="ctr">
+                      <a:noFill/>
+                    </a:lnL>
+                    <a:lnR w="0" cap="flat" cmpd="sng" algn="ctr">
+                      <a:noFill/>
+                    </a:lnR>
+                    <a:lnT w="0" cap="flat" cmpd="sng" algn="ctr">
+                      <a:noFill/>
+                    </a:lnT>
+                    <a:lnB w="9525" cap="flat" cmpd="sng" algn="ctr">
+                      <a:solidFill>
+                        <a:srgbClr val="D9DFEA"/>
+                      </a:solidFill>
+                      <a:prstDash val="solid"/>
+                      <a:round/>
+                      <a:headEnd type="none" w="med" len="med"/>
+                      <a:tailEnd type="none" w="med" len="med"/>
+                    </a:lnB>
+                  </a:tcPr>
+                </a:tc>
+                <a:tc>
+                  <a:txBody>
+                    <a:bodyPr/>
+                    <a:lstStyle/>
+                    <a:p>
+                      <a:pPr indent="0" marL="0">
+                        <a:buNone/>
+                      </a:pPr>
+                      <a:r>
+                        <a:rPr lang="en-US" sz="950" dirty="0">
+                          <a:solidFill>
+                            <a:srgbClr val="1F2A44"/>
+                          </a:solidFill>
+                          <a:latin typeface="Exo 2" pitchFamily="34" charset="0"/>
+                          <a:ea typeface="Exo 2" pitchFamily="34" charset="-122"/>
+                          <a:cs typeface="Exo 2" pitchFamily="34" charset="-120"/>
+                        </a:rPr>
+                        <a:t>Late Sep</a:t>
+                      </a:r>
+                      <a:endParaRPr lang="en-US" sz="950" dirty="0">
+                        <a:latin typeface="Exo 2" charset="0"/>
+                        <a:ea typeface="Exo 2" charset="0"/>
+                        <a:cs typeface="Exo 2" charset="0"/>
+                      </a:endParaRPr>
+                    </a:p>
+                  </a:txBody>
+                  <a:tcPr marL="63500" marR="63500" marT="12700" marB="12700" anchor="ctr">
+                    <a:lnL w="0" cap="flat" cmpd="sng" algn="ctr">
+                      <a:noFill/>
+                    </a:lnL>
+                    <a:lnR w="0" cap="flat" cmpd="sng" algn="ctr">
+                      <a:noFill/>
+                    </a:lnR>
+                    <a:lnT w="0" cap="flat" cmpd="sng" algn="ctr">
+                      <a:noFill/>
+                    </a:lnT>
+                    <a:lnB w="9525" cap="flat" cmpd="sng" algn="ctr">
+                      <a:solidFill>
+                        <a:srgbClr val="D9DFEA"/>
+                      </a:solidFill>
+                      <a:prstDash val="solid"/>
+                      <a:round/>
+                      <a:headEnd type="none" w="med" len="med"/>
+                      <a:tailEnd type="none" w="med" len="med"/>
+                    </a:lnB>
+                  </a:tcPr>
+                </a:tc>
+                <a:tc>
+                  <a:txBody>
+                    <a:bodyPr/>
+                    <a:lstStyle/>
+                    <a:p>
+                      <a:pPr indent="0" marL="0">
+                        <a:buNone/>
+                      </a:pPr>
+                      <a:r>
+                        <a:rPr lang="en-US" sz="950" dirty="0">
+                          <a:solidFill>
+                            <a:srgbClr val="9A7B1F"/>
+                          </a:solidFill>
+                          <a:latin typeface="Exo 2" pitchFamily="34" charset="0"/>
+                          <a:ea typeface="Exo 2" pitchFamily="34" charset="-122"/>
+                          <a:cs typeface="Exo 2" pitchFamily="34" charset="-120"/>
+                        </a:rPr>
+                        <a:t>● </a:t>
+                      </a:r>
+                      <a:pPr indent="0" marL="0">
+                        <a:buNone/>
+                      </a:pPr>
+                      <a:r>
+                        <a:rPr lang="en-US" sz="950" b="1" dirty="0">
+                          <a:solidFill>
+                            <a:srgbClr val="9A7B1F"/>
+                          </a:solidFill>
+                          <a:latin typeface="Exo 2" pitchFamily="34" charset="0"/>
+                          <a:ea typeface="Exo 2" pitchFamily="34" charset="-122"/>
+                          <a:cs typeface="Exo 2" pitchFamily="34" charset="-120"/>
+                        </a:rPr>
+                        <a:t>Reported</a:t>
+                      </a:r>
+                      <a:endParaRPr lang="en-US" sz="950" dirty="0">
+                        <a:latin typeface="Exo 2" charset="0"/>
+                        <a:ea typeface="Exo 2" charset="0"/>
+                        <a:cs typeface="Exo 2" charset="0"/>
+                      </a:endParaRPr>
+                    </a:p>
+                  </a:txBody>
+                  <a:tcPr marL="63500" marR="63500" marT="12700" marB="12700" anchor="ctr">
+                    <a:lnL w="0" cap="flat" cmpd="sng" algn="ctr">
+                      <a:noFill/>
+                    </a:lnL>
+                    <a:lnR w="0" cap="flat" cmpd="sng" algn="ctr">
+                      <a:noFill/>
+                    </a:lnR>
+                    <a:lnT w="0" cap="flat" cmpd="sng" algn="ctr">
+                      <a:noFill/>
+                    </a:lnT>
+                    <a:lnB w="9525" cap="flat" cmpd="sng" algn="ctr">
+                      <a:solidFill>
+                        <a:srgbClr val="D9DFEA"/>
+                      </a:solidFill>
+                      <a:prstDash val="solid"/>
+                      <a:round/>
+                      <a:headEnd type="none" w="med" len="med"/>
+                      <a:tailEnd type="none" w="med" len="med"/>
+                    </a:lnB>
+                  </a:tcPr>
+                </a:tc>
+              </a:tr>
+              <a:tr h="310896">
+                <a:tc>
+                  <a:txBody>
+                    <a:bodyPr/>
+                    <a:lstStyle/>
+                    <a:p>
+                      <a:pPr indent="0" marL="0">
+                        <a:buNone/>
+                      </a:pPr>
+                      <a:r>
+                        <a:rPr lang="en-US" sz="950" dirty="0">
+                          <a:solidFill>
+                            <a:srgbClr val="1F2A44"/>
+                          </a:solidFill>
+                          <a:latin typeface="Exo 2" pitchFamily="34" charset="0"/>
+                          <a:ea typeface="Exo 2" pitchFamily="34" charset="-122"/>
+                          <a:cs typeface="Exo 2" pitchFamily="34" charset="-120"/>
+                        </a:rPr>
+                        <a:t>Website</a:t>
+                      </a:r>
+                      <a:endParaRPr lang="en-US" sz="950" dirty="0">
+                        <a:latin typeface="Exo 2" charset="0"/>
+                        <a:ea typeface="Exo 2" charset="0"/>
+                        <a:cs typeface="Exo 2" charset="0"/>
+                      </a:endParaRPr>
+                    </a:p>
+                  </a:txBody>
+                  <a:tcPr marL="63500" marR="63500" marT="12700" marB="12700" anchor="ctr">
+                    <a:lnL w="0" cap="flat" cmpd="sng" algn="ctr">
+                      <a:noFill/>
+                    </a:lnL>
+                    <a:lnR w="0" cap="flat" cmpd="sng" algn="ctr">
+                      <a:noFill/>
+                    </a:lnR>
+                    <a:lnT w="0" cap="flat" cmpd="sng" algn="ctr">
+                      <a:noFill/>
+                    </a:lnT>
+                    <a:lnB w="9525" cap="flat" cmpd="sng" algn="ctr">
+                      <a:solidFill>
+                        <a:srgbClr val="D9DFEA"/>
+                      </a:solidFill>
+                      <a:prstDash val="solid"/>
+                      <a:round/>
+                      <a:headEnd type="none" w="med" len="med"/>
+                      <a:tailEnd type="none" w="med" len="med"/>
+                    </a:lnB>
+                  </a:tcPr>
+                </a:tc>
+                <a:tc>
+                  <a:txBody>
+                    <a:bodyPr/>
+                    <a:lstStyle/>
+                    <a:p>
+                      <a:pPr indent="0" marL="0">
+                        <a:buNone/>
+                      </a:pPr>
+                      <a:r>
+                        <a:rPr lang="en-US" sz="950" dirty="0">
+                          <a:solidFill>
+                            <a:srgbClr val="1F2A44"/>
+                          </a:solidFill>
+                          <a:latin typeface="Exo 2" pitchFamily="34" charset="0"/>
+                          <a:ea typeface="Exo 2" pitchFamily="34" charset="-122"/>
+                          <a:cs typeface="Exo 2" pitchFamily="34" charset="-120"/>
+                        </a:rPr>
+                        <a:t>587 sessions, of which 11 from Instagram</a:t>
+                      </a:r>
+                      <a:endParaRPr lang="en-US" sz="950" dirty="0">
+                        <a:latin typeface="Exo 2" charset="0"/>
+                        <a:ea typeface="Exo 2" charset="0"/>
+                        <a:cs typeface="Exo 2" charset="0"/>
+                      </a:endParaRPr>
+                    </a:p>
+                  </a:txBody>
+                  <a:tcPr marL="63500" marR="63500" marT="12700" marB="12700" anchor="ctr">
+                    <a:lnL w="0" cap="flat" cmpd="sng" algn="ctr">
+                      <a:noFill/>
+                    </a:lnL>
+                    <a:lnR w="0" cap="flat" cmpd="sng" algn="ctr">
+                      <a:noFill/>
+                    </a:lnR>
+                    <a:lnT w="0" cap="flat" cmpd="sng" algn="ctr">
+                      <a:noFill/>
+                    </a:lnT>
+                    <a:lnB w="9525" cap="flat" cmpd="sng" algn="ctr">
+                      <a:solidFill>
+                        <a:srgbClr val="D9DFEA"/>
+                      </a:solidFill>
+                      <a:prstDash val="solid"/>
+                      <a:round/>
+                      <a:headEnd type="none" w="med" len="med"/>
+                      <a:tailEnd type="none" w="med" len="med"/>
+                    </a:lnB>
+                  </a:tcPr>
+                </a:tc>
+                <a:tc>
+                  <a:txBody>
+                    <a:bodyPr/>
+                    <a:lstStyle/>
+                    <a:p>
+                      <a:pPr indent="0" marL="0">
+                        <a:buNone/>
+                      </a:pPr>
+                      <a:r>
+                        <a:rPr lang="en-US" sz="950" dirty="0">
+                          <a:solidFill>
+                            <a:srgbClr val="1F2A44"/>
+                          </a:solidFill>
+                          <a:latin typeface="Exo 2" pitchFamily="34" charset="0"/>
+                          <a:ea typeface="Exo 2" pitchFamily="34" charset="-122"/>
+                          <a:cs typeface="Exo 2" pitchFamily="34" charset="-120"/>
+                        </a:rPr>
+                        <a:t>1-28 Sep</a:t>
+                      </a:r>
+                      <a:endParaRPr lang="en-US" sz="950" dirty="0">
+                        <a:latin typeface="Exo 2" charset="0"/>
+                        <a:ea typeface="Exo 2" charset="0"/>
+                        <a:cs typeface="Exo 2" charset="0"/>
+                      </a:endParaRPr>
+                    </a:p>
+                  </a:txBody>
+                  <a:tcPr marL="63500" marR="63500" marT="12700" marB="12700" anchor="ctr">
+                    <a:lnL w="0" cap="flat" cmpd="sng" algn="ctr">
+                      <a:noFill/>
+                    </a:lnL>
+                    <a:lnR w="0" cap="flat" cmpd="sng" algn="ctr">
+                      <a:noFill/>
+                    </a:lnR>
+                    <a:lnT w="0" cap="flat" cmpd="sng" algn="ctr">
+                      <a:noFill/>
+                    </a:lnT>
+                    <a:lnB w="9525" cap="flat" cmpd="sng" algn="ctr">
+                      <a:solidFill>
+                        <a:srgbClr val="D9DFEA"/>
+                      </a:solidFill>
+                      <a:prstDash val="solid"/>
+                      <a:round/>
+                      <a:headEnd type="none" w="med" len="med"/>
+                      <a:tailEnd type="none" w="med" len="med"/>
+                    </a:lnB>
+                  </a:tcPr>
+                </a:tc>
+                <a:tc>
+                  <a:txBody>
+                    <a:bodyPr/>
+                    <a:lstStyle/>
+                    <a:p>
+                      <a:pPr indent="0" marL="0">
+                        <a:buNone/>
+                      </a:pPr>
+                      <a:r>
+                        <a:rPr lang="en-US" sz="950" dirty="0">
+                          <a:solidFill>
+                            <a:srgbClr val="1BA97C"/>
+                          </a:solidFill>
+                          <a:latin typeface="Exo 2" pitchFamily="34" charset="0"/>
+                          <a:ea typeface="Exo 2" pitchFamily="34" charset="-122"/>
+                          <a:cs typeface="Exo 2" pitchFamily="34" charset="-120"/>
+                        </a:rPr>
+                        <a:t>● </a:t>
+                      </a:r>
+                      <a:pPr indent="0" marL="0">
+                        <a:buNone/>
+                      </a:pPr>
+                      <a:r>
+                        <a:rPr lang="en-US" sz="950" b="1" dirty="0">
+                          <a:solidFill>
+                            <a:srgbClr val="1BA97C"/>
+                          </a:solidFill>
+                          <a:latin typeface="Exo 2" pitchFamily="34" charset="0"/>
+                          <a:ea typeface="Exo 2" pitchFamily="34" charset="-122"/>
+                          <a:cs typeface="Exo 2" pitchFamily="34" charset="-120"/>
+                        </a:rPr>
+                        <a:t>Verified</a:t>
+                      </a:r>
+                      <a:endParaRPr lang="en-US" sz="950" dirty="0">
+                        <a:latin typeface="Exo 2" charset="0"/>
+                        <a:ea typeface="Exo 2" charset="0"/>
+                        <a:cs typeface="Exo 2" charset="0"/>
+                      </a:endParaRPr>
+                    </a:p>
+                  </a:txBody>
+                  <a:tcPr marL="63500" marR="63500" marT="12700" marB="12700" anchor="ctr">
+                    <a:lnL w="0" cap="flat" cmpd="sng" algn="ctr">
+                      <a:noFill/>
+                    </a:lnL>
+                    <a:lnR w="0" cap="flat" cmpd="sng" algn="ctr">
+                      <a:noFill/>
+                    </a:lnR>
+                    <a:lnT w="0" cap="flat" cmpd="sng" algn="ctr">
+                      <a:noFill/>
+                    </a:lnT>
+                    <a:lnB w="9525" cap="flat" cmpd="sng" algn="ctr">
+                      <a:solidFill>
+                        <a:srgbClr val="D9DFEA"/>
+                      </a:solidFill>
+                      <a:prstDash val="solid"/>
+                      <a:round/>
+                      <a:headEnd type="none" w="med" len="med"/>
+                      <a:tailEnd type="none" w="med" len="med"/>
+                    </a:lnB>
+                  </a:tcPr>
+                </a:tc>
+              </a:tr>
+            </a:tbl>
+          </a:graphicData>
+        </a:graphic>
+      </p:graphicFrame>
     </p:spTree>
   </p:cSld>
   <p:clrMapOvr>
@@ -13653,7 +12208,7 @@
                 <a:ea typeface="Exo 2" pitchFamily="34" charset="-122"/>
                 <a:cs typeface="Exo 2" pitchFamily="34" charset="-120"/>
               </a:rPr>
-              <a:t>SOCIAL AND CONTENT PERFORMANCE</a:t>
+              <a:t>DECISIONS AND OPEN ITEMS</a:t>
             </a:r>
             <a:endParaRPr lang="en-US" sz="900" dirty="0"/>
           </a:p>
@@ -13692,7 +12247,7 @@
                 <a:ea typeface="Exo 2" pitchFamily="34" charset="-122"/>
                 <a:cs typeface="Exo 2" pitchFamily="34" charset="-120"/>
               </a:rPr>
-              <a:t>Instagram reach sits in three posts; other channels lack September exports</a:t>
+              <a:t>Five decisions for today; three open data items must close before 20 October</a:t>
             </a:r>
             <a:endParaRPr lang="en-US" sz="2000" dirty="0"/>
           </a:p>
@@ -13819,7 +12374,7 @@
                 <a:ea typeface="Exo 2" pitchFamily="34" charset="-122"/>
                 <a:cs typeface="Exo 2" pitchFamily="34" charset="-120"/>
               </a:rPr>
-              <a:t>Three posts carry the views; the rest are under 600. Reach depends on a few assets.</a:t>
+              <a:t>Decision 4 closes most of the open items. The three marked 'Blocks 20 Oct' must close before the paid-media call.</a:t>
             </a:r>
             <a:endParaRPr lang="en-US" sz="1150" dirty="0"/>
           </a:p>
@@ -13858,7 +12413,7 @@
                 <a:ea typeface="Exo 2" pitchFamily="34" charset="-122"/>
                 <a:cs typeface="Exo 2" pitchFamily="34" charset="-120"/>
               </a:rPr>
-              <a:t>Source: Instagram grid screenshot (capture date and boost spend unknown); GA4 export 1-28 Sep; LinkedIn export 31 May-28 Aug; X and TikTok from the Performance Analysis deck (screenshots).</a:t>
+              <a:t>Source: Proposed by Marketing based on this update; owners and dates are proposals for CEO confirmation. CAC targets from the Board update, 17 Sep 2026. Detail in Open-Items.md and Percentage-Audit.csv.</a:t>
             </a:r>
             <a:endParaRPr lang="en-US" sz="800" dirty="0"/>
           </a:p>
@@ -13966,22 +12521,6 @@
           </a:prstGeom>
         </p:spPr>
       </p:pic>
-      <p:graphicFrame>
-        <p:nvGraphicFramePr>
-          <p:cNvPr id="15" name="Chart 0" descr=""/>
-          <p:cNvGraphicFramePr/>
-          <p:nvPr/>
-        </p:nvGraphicFramePr>
-        <p:xfrm>
-          <a:off x="566928" y="1481328"/>
-          <a:ext cx="5669280" cy="4069080"/>
-        </p:xfrm>
-        <a:graphic xmlns:a="http://schemas.openxmlformats.org/drawingml/2006/main">
-          <a:graphicData uri="http://schemas.openxmlformats.org/drawingml/2006/chart">
-            <c:chart xmlns:c="http://schemas.openxmlformats.org/drawingml/2006/chart" r:id="rId4"/>
-          </a:graphicData>
-        </a:graphic>
-      </p:graphicFrame>
       <p:graphicFrame>
         <p:nvGraphicFramePr>
           <p:cNvPr id="9" name="Table 0"/>
@@ -13997,20 +12536,20 @@
           </p:nvPr>
         </p:nvGraphicFramePr>
         <p:xfrm>
-          <a:off x="6492240" y="1536192"/>
-          <a:ext cx="5138928" cy="914400"/>
+          <a:off x="566928" y="1536192"/>
+          <a:ext cx="6675120" cy="914400"/>
         </p:xfrm>
         <a:graphic>
           <a:graphicData uri="http://schemas.openxmlformats.org/drawingml/2006/table">
             <a:tbl>
               <a:tblPr/>
               <a:tblGrid>
+                <a:gridCol w="365760"/>
+                <a:gridCol w="3749040"/>
+                <a:gridCol w="1691640"/>
                 <a:gridCol w="868680"/>
-                <a:gridCol w="2148840"/>
-                <a:gridCol w="1024128"/>
-                <a:gridCol w="1097280"/>
               </a:tblGrid>
-              <a:tr h="512064">
+              <a:tr h="329184">
                 <a:tc>
                   <a:txBody>
                     <a:bodyPr/>
@@ -14019,1919 +12558,6 @@
                       <a:pPr indent="0" marL="0">
                         <a:buNone/>
                       </a:pPr>
-                      <a:r>
-                        <a:rPr lang="en-US" sz="1050" b="1" dirty="0">
-                          <a:solidFill>
-                            <a:srgbClr val="FFFFFF"/>
-                          </a:solidFill>
-                          <a:latin typeface="Exo 2" pitchFamily="34" charset="0"/>
-                          <a:ea typeface="Exo 2" pitchFamily="34" charset="-122"/>
-                          <a:cs typeface="Exo 2" pitchFamily="34" charset="-120"/>
-                        </a:rPr>
-                        <a:t>Channel</a:t>
-                      </a:r>
-                      <a:endParaRPr lang="en-US" sz="1050" dirty="0">
-                        <a:latin typeface="Exo 2" charset="0"/>
-                        <a:ea typeface="Exo 2" charset="0"/>
-                        <a:cs typeface="Exo 2" charset="0"/>
-                      </a:endParaRPr>
-                    </a:p>
-                  </a:txBody>
-                  <a:tcPr marL="50800" marR="50800" marT="25400" marB="25400" anchor="ctr">
-                    <a:lnL w="0" cap="flat" cmpd="sng" algn="ctr">
-                      <a:noFill/>
-                    </a:lnL>
-                    <a:lnR w="0" cap="flat" cmpd="sng" algn="ctr">
-                      <a:noFill/>
-                    </a:lnR>
-                    <a:lnT w="0" cap="flat" cmpd="sng" algn="ctr">
-                      <a:noFill/>
-                    </a:lnT>
-                    <a:lnB w="0" cap="flat" cmpd="sng" algn="ctr">
-                      <a:noFill/>
-                    </a:lnB>
-                    <a:solidFill>
-                      <a:srgbClr val="132257"/>
-                    </a:solidFill>
-                  </a:tcPr>
-                </a:tc>
-                <a:tc>
-                  <a:txBody>
-                    <a:bodyPr/>
-                    <a:lstStyle/>
-                    <a:p>
-                      <a:pPr indent="0" marL="0">
-                        <a:buNone/>
-                      </a:pPr>
-                      <a:r>
-                        <a:rPr lang="en-US" sz="1050" b="1" dirty="0">
-                          <a:solidFill>
-                            <a:srgbClr val="FFFFFF"/>
-                          </a:solidFill>
-                          <a:latin typeface="Exo 2" pitchFamily="34" charset="0"/>
-                          <a:ea typeface="Exo 2" pitchFamily="34" charset="-122"/>
-                          <a:cs typeface="Exo 2" pitchFamily="34" charset="-120"/>
-                        </a:rPr>
-                        <a:t>Latest figure</a:t>
-                      </a:r>
-                      <a:endParaRPr lang="en-US" sz="1050" dirty="0">
-                        <a:latin typeface="Exo 2" charset="0"/>
-                        <a:ea typeface="Exo 2" charset="0"/>
-                        <a:cs typeface="Exo 2" charset="0"/>
-                      </a:endParaRPr>
-                    </a:p>
-                  </a:txBody>
-                  <a:tcPr marL="50800" marR="50800" marT="25400" marB="25400" anchor="ctr">
-                    <a:lnL w="0" cap="flat" cmpd="sng" algn="ctr">
-                      <a:noFill/>
-                    </a:lnL>
-                    <a:lnR w="0" cap="flat" cmpd="sng" algn="ctr">
-                      <a:noFill/>
-                    </a:lnR>
-                    <a:lnT w="0" cap="flat" cmpd="sng" algn="ctr">
-                      <a:noFill/>
-                    </a:lnT>
-                    <a:lnB w="0" cap="flat" cmpd="sng" algn="ctr">
-                      <a:noFill/>
-                    </a:lnB>
-                    <a:solidFill>
-                      <a:srgbClr val="132257"/>
-                    </a:solidFill>
-                  </a:tcPr>
-                </a:tc>
-                <a:tc>
-                  <a:txBody>
-                    <a:bodyPr/>
-                    <a:lstStyle/>
-                    <a:p>
-                      <a:pPr indent="0" marL="0">
-                        <a:buNone/>
-                      </a:pPr>
-                      <a:r>
-                        <a:rPr lang="en-US" sz="1050" b="1" dirty="0">
-                          <a:solidFill>
-                            <a:srgbClr val="FFFFFF"/>
-                          </a:solidFill>
-                          <a:latin typeface="Exo 2" pitchFamily="34" charset="0"/>
-                          <a:ea typeface="Exo 2" pitchFamily="34" charset="-122"/>
-                          <a:cs typeface="Exo 2" pitchFamily="34" charset="-120"/>
-                        </a:rPr>
-                        <a:t>Period</a:t>
-                      </a:r>
-                      <a:endParaRPr lang="en-US" sz="1050" dirty="0">
-                        <a:latin typeface="Exo 2" charset="0"/>
-                        <a:ea typeface="Exo 2" charset="0"/>
-                        <a:cs typeface="Exo 2" charset="0"/>
-                      </a:endParaRPr>
-                    </a:p>
-                  </a:txBody>
-                  <a:tcPr marL="50800" marR="50800" marT="25400" marB="25400" anchor="ctr">
-                    <a:lnL w="0" cap="flat" cmpd="sng" algn="ctr">
-                      <a:noFill/>
-                    </a:lnL>
-                    <a:lnR w="0" cap="flat" cmpd="sng" algn="ctr">
-                      <a:noFill/>
-                    </a:lnR>
-                    <a:lnT w="0" cap="flat" cmpd="sng" algn="ctr">
-                      <a:noFill/>
-                    </a:lnT>
-                    <a:lnB w="0" cap="flat" cmpd="sng" algn="ctr">
-                      <a:noFill/>
-                    </a:lnB>
-                    <a:solidFill>
-                      <a:srgbClr val="132257"/>
-                    </a:solidFill>
-                  </a:tcPr>
-                </a:tc>
-                <a:tc>
-                  <a:txBody>
-                    <a:bodyPr/>
-                    <a:lstStyle/>
-                    <a:p>
-                      <a:pPr indent="0" marL="0">
-                        <a:buNone/>
-                      </a:pPr>
-                      <a:r>
-                        <a:rPr lang="en-US" sz="1050" b="1" dirty="0">
-                          <a:solidFill>
-                            <a:srgbClr val="FFFFFF"/>
-                          </a:solidFill>
-                          <a:latin typeface="Exo 2" pitchFamily="34" charset="0"/>
-                          <a:ea typeface="Exo 2" pitchFamily="34" charset="-122"/>
-                          <a:cs typeface="Exo 2" pitchFamily="34" charset="-120"/>
-                        </a:rPr>
-                        <a:t>Status</a:t>
-                      </a:r>
-                      <a:endParaRPr lang="en-US" sz="1050" dirty="0">
-                        <a:latin typeface="Exo 2" charset="0"/>
-                        <a:ea typeface="Exo 2" charset="0"/>
-                        <a:cs typeface="Exo 2" charset="0"/>
-                      </a:endParaRPr>
-                    </a:p>
-                  </a:txBody>
-                  <a:tcPr marL="50800" marR="50800" marT="25400" marB="25400" anchor="ctr">
-                    <a:lnL w="0" cap="flat" cmpd="sng" algn="ctr">
-                      <a:noFill/>
-                    </a:lnL>
-                    <a:lnR w="0" cap="flat" cmpd="sng" algn="ctr">
-                      <a:noFill/>
-                    </a:lnR>
-                    <a:lnT w="0" cap="flat" cmpd="sng" algn="ctr">
-                      <a:noFill/>
-                    </a:lnT>
-                    <a:lnB w="0" cap="flat" cmpd="sng" algn="ctr">
-                      <a:noFill/>
-                    </a:lnB>
-                    <a:solidFill>
-                      <a:srgbClr val="132257"/>
-                    </a:solidFill>
-                  </a:tcPr>
-                </a:tc>
-              </a:tr>
-              <a:tr h="512064">
-                <a:tc>
-                  <a:txBody>
-                    <a:bodyPr/>
-                    <a:lstStyle/>
-                    <a:p>
-                      <a:pPr indent="0" marL="0">
-                        <a:buNone/>
-                      </a:pPr>
-                      <a:r>
-                        <a:rPr lang="en-US" sz="1000" dirty="0">
-                          <a:solidFill>
-                            <a:srgbClr val="1F2A44"/>
-                          </a:solidFill>
-                          <a:latin typeface="Exo 2" pitchFamily="34" charset="0"/>
-                          <a:ea typeface="Exo 2" pitchFamily="34" charset="-122"/>
-                          <a:cs typeface="Exo 2" pitchFamily="34" charset="-120"/>
-                        </a:rPr>
-                        <a:t>Website</a:t>
-                      </a:r>
-                      <a:endParaRPr lang="en-US" sz="1000" dirty="0">
-                        <a:latin typeface="Exo 2" charset="0"/>
-                        <a:ea typeface="Exo 2" charset="0"/>
-                        <a:cs typeface="Exo 2" charset="0"/>
-                      </a:endParaRPr>
-                    </a:p>
-                  </a:txBody>
-                  <a:tcPr marL="50800" marR="50800" marT="25400" marB="25400" anchor="ctr">
-                    <a:lnL w="0" cap="flat" cmpd="sng" algn="ctr">
-                      <a:noFill/>
-                    </a:lnL>
-                    <a:lnR w="0" cap="flat" cmpd="sng" algn="ctr">
-                      <a:noFill/>
-                    </a:lnR>
-                    <a:lnT w="0" cap="flat" cmpd="sng" algn="ctr">
-                      <a:noFill/>
-                    </a:lnT>
-                    <a:lnB w="9525" cap="flat" cmpd="sng" algn="ctr">
-                      <a:solidFill>
-                        <a:srgbClr val="D9DFEA"/>
-                      </a:solidFill>
-                      <a:prstDash val="solid"/>
-                      <a:round/>
-                      <a:headEnd type="none" w="med" len="med"/>
-                      <a:tailEnd type="none" w="med" len="med"/>
-                    </a:lnB>
-                  </a:tcPr>
-                </a:tc>
-                <a:tc>
-                  <a:txBody>
-                    <a:bodyPr/>
-                    <a:lstStyle/>
-                    <a:p>
-                      <a:pPr indent="0" marL="0">
-                        <a:buNone/>
-                      </a:pPr>
-                      <a:r>
-                        <a:rPr lang="en-US" sz="1000" dirty="0">
-                          <a:solidFill>
-                            <a:srgbClr val="1F2A44"/>
-                          </a:solidFill>
-                          <a:latin typeface="Exo 2" pitchFamily="34" charset="0"/>
-                          <a:ea typeface="Exo 2" pitchFamily="34" charset="-122"/>
-                          <a:cs typeface="Exo 2" pitchFamily="34" charset="-120"/>
-                        </a:rPr>
-                        <a:t>587 sessions; 11 from Instagram</a:t>
-                      </a:r>
-                      <a:endParaRPr lang="en-US" sz="1000" dirty="0">
-                        <a:latin typeface="Exo 2" charset="0"/>
-                        <a:ea typeface="Exo 2" charset="0"/>
-                        <a:cs typeface="Exo 2" charset="0"/>
-                      </a:endParaRPr>
-                    </a:p>
-                  </a:txBody>
-                  <a:tcPr marL="50800" marR="50800" marT="25400" marB="25400" anchor="ctr">
-                    <a:lnL w="0" cap="flat" cmpd="sng" algn="ctr">
-                      <a:noFill/>
-                    </a:lnL>
-                    <a:lnR w="0" cap="flat" cmpd="sng" algn="ctr">
-                      <a:noFill/>
-                    </a:lnR>
-                    <a:lnT w="0" cap="flat" cmpd="sng" algn="ctr">
-                      <a:noFill/>
-                    </a:lnT>
-                    <a:lnB w="9525" cap="flat" cmpd="sng" algn="ctr">
-                      <a:solidFill>
-                        <a:srgbClr val="D9DFEA"/>
-                      </a:solidFill>
-                      <a:prstDash val="solid"/>
-                      <a:round/>
-                      <a:headEnd type="none" w="med" len="med"/>
-                      <a:tailEnd type="none" w="med" len="med"/>
-                    </a:lnB>
-                  </a:tcPr>
-                </a:tc>
-                <a:tc>
-                  <a:txBody>
-                    <a:bodyPr/>
-                    <a:lstStyle/>
-                    <a:p>
-                      <a:pPr indent="0" marL="0">
-                        <a:buNone/>
-                      </a:pPr>
-                      <a:r>
-                        <a:rPr lang="en-US" sz="1000" dirty="0">
-                          <a:solidFill>
-                            <a:srgbClr val="1F2A44"/>
-                          </a:solidFill>
-                          <a:latin typeface="Exo 2" pitchFamily="34" charset="0"/>
-                          <a:ea typeface="Exo 2" pitchFamily="34" charset="-122"/>
-                          <a:cs typeface="Exo 2" pitchFamily="34" charset="-120"/>
-                        </a:rPr>
-                        <a:t>1-28 Sep</a:t>
-                      </a:r>
-                      <a:endParaRPr lang="en-US" sz="1000" dirty="0">
-                        <a:latin typeface="Exo 2" charset="0"/>
-                        <a:ea typeface="Exo 2" charset="0"/>
-                        <a:cs typeface="Exo 2" charset="0"/>
-                      </a:endParaRPr>
-                    </a:p>
-                  </a:txBody>
-                  <a:tcPr marL="50800" marR="50800" marT="25400" marB="25400" anchor="ctr">
-                    <a:lnL w="0" cap="flat" cmpd="sng" algn="ctr">
-                      <a:noFill/>
-                    </a:lnL>
-                    <a:lnR w="0" cap="flat" cmpd="sng" algn="ctr">
-                      <a:noFill/>
-                    </a:lnR>
-                    <a:lnT w="0" cap="flat" cmpd="sng" algn="ctr">
-                      <a:noFill/>
-                    </a:lnT>
-                    <a:lnB w="9525" cap="flat" cmpd="sng" algn="ctr">
-                      <a:solidFill>
-                        <a:srgbClr val="D9DFEA"/>
-                      </a:solidFill>
-                      <a:prstDash val="solid"/>
-                      <a:round/>
-                      <a:headEnd type="none" w="med" len="med"/>
-                      <a:tailEnd type="none" w="med" len="med"/>
-                    </a:lnB>
-                  </a:tcPr>
-                </a:tc>
-                <a:tc>
-                  <a:txBody>
-                    <a:bodyPr/>
-                    <a:lstStyle/>
-                    <a:p>
-                      <a:pPr indent="0" marL="0">
-                        <a:buNone/>
-                      </a:pPr>
-                      <a:r>
-                        <a:rPr lang="en-US" sz="1000" dirty="0">
-                          <a:solidFill>
-                            <a:srgbClr val="1BA97C"/>
-                          </a:solidFill>
-                          <a:latin typeface="Exo 2" pitchFamily="34" charset="0"/>
-                          <a:ea typeface="Exo 2" pitchFamily="34" charset="-122"/>
-                          <a:cs typeface="Exo 2" pitchFamily="34" charset="-120"/>
-                        </a:rPr>
-                        <a:t>● </a:t>
-                      </a:r>
-                      <a:pPr indent="0" marL="0">
-                        <a:buNone/>
-                      </a:pPr>
-                      <a:r>
-                        <a:rPr lang="en-US" sz="1000" b="1" dirty="0">
-                          <a:solidFill>
-                            <a:srgbClr val="1BA97C"/>
-                          </a:solidFill>
-                          <a:latin typeface="Exo 2" pitchFamily="34" charset="0"/>
-                          <a:ea typeface="Exo 2" pitchFamily="34" charset="-122"/>
-                          <a:cs typeface="Exo 2" pitchFamily="34" charset="-120"/>
-                        </a:rPr>
-                        <a:t>Verified</a:t>
-                      </a:r>
-                      <a:endParaRPr lang="en-US" sz="1000" dirty="0">
-                        <a:latin typeface="Exo 2" charset="0"/>
-                        <a:ea typeface="Exo 2" charset="0"/>
-                        <a:cs typeface="Exo 2" charset="0"/>
-                      </a:endParaRPr>
-                    </a:p>
-                  </a:txBody>
-                  <a:tcPr marL="50800" marR="50800" marT="25400" marB="25400" anchor="ctr">
-                    <a:lnL w="0" cap="flat" cmpd="sng" algn="ctr">
-                      <a:noFill/>
-                    </a:lnL>
-                    <a:lnR w="0" cap="flat" cmpd="sng" algn="ctr">
-                      <a:noFill/>
-                    </a:lnR>
-                    <a:lnT w="0" cap="flat" cmpd="sng" algn="ctr">
-                      <a:noFill/>
-                    </a:lnT>
-                    <a:lnB w="9525" cap="flat" cmpd="sng" algn="ctr">
-                      <a:solidFill>
-                        <a:srgbClr val="D9DFEA"/>
-                      </a:solidFill>
-                      <a:prstDash val="solid"/>
-                      <a:round/>
-                      <a:headEnd type="none" w="med" len="med"/>
-                      <a:tailEnd type="none" w="med" len="med"/>
-                    </a:lnB>
-                  </a:tcPr>
-                </a:tc>
-              </a:tr>
-              <a:tr h="512064">
-                <a:tc>
-                  <a:txBody>
-                    <a:bodyPr/>
-                    <a:lstStyle/>
-                    <a:p>
-                      <a:pPr indent="0" marL="0">
-                        <a:buNone/>
-                      </a:pPr>
-                      <a:r>
-                        <a:rPr lang="en-US" sz="1000" dirty="0">
-                          <a:solidFill>
-                            <a:srgbClr val="1F2A44"/>
-                          </a:solidFill>
-                          <a:latin typeface="Exo 2" pitchFamily="34" charset="0"/>
-                          <a:ea typeface="Exo 2" pitchFamily="34" charset="-122"/>
-                          <a:cs typeface="Exo 2" pitchFamily="34" charset="-120"/>
-                        </a:rPr>
-                        <a:t>Instagram</a:t>
-                      </a:r>
-                      <a:endParaRPr lang="en-US" sz="1000" dirty="0">
-                        <a:latin typeface="Exo 2" charset="0"/>
-                        <a:ea typeface="Exo 2" charset="0"/>
-                        <a:cs typeface="Exo 2" charset="0"/>
-                      </a:endParaRPr>
-                    </a:p>
-                  </a:txBody>
-                  <a:tcPr marL="50800" marR="50800" marT="25400" marB="25400" anchor="ctr">
-                    <a:lnL w="0" cap="flat" cmpd="sng" algn="ctr">
-                      <a:noFill/>
-                    </a:lnL>
-                    <a:lnR w="0" cap="flat" cmpd="sng" algn="ctr">
-                      <a:noFill/>
-                    </a:lnR>
-                    <a:lnT w="0" cap="flat" cmpd="sng" algn="ctr">
-                      <a:noFill/>
-                    </a:lnT>
-                    <a:lnB w="9525" cap="flat" cmpd="sng" algn="ctr">
-                      <a:solidFill>
-                        <a:srgbClr val="D9DFEA"/>
-                      </a:solidFill>
-                      <a:prstDash val="solid"/>
-                      <a:round/>
-                      <a:headEnd type="none" w="med" len="med"/>
-                      <a:tailEnd type="none" w="med" len="med"/>
-                    </a:lnB>
-                  </a:tcPr>
-                </a:tc>
-                <a:tc>
-                  <a:txBody>
-                    <a:bodyPr/>
-                    <a:lstStyle/>
-                    <a:p>
-                      <a:pPr indent="0" marL="0">
-                        <a:buNone/>
-                      </a:pPr>
-                      <a:r>
-                        <a:rPr lang="en-US" sz="1000" dirty="0">
-                          <a:solidFill>
-                            <a:srgbClr val="1F2A44"/>
-                          </a:solidFill>
-                          <a:latin typeface="Exo 2" pitchFamily="34" charset="0"/>
-                          <a:ea typeface="Exo 2" pitchFamily="34" charset="-122"/>
-                          <a:cs typeface="Exo 2" pitchFamily="34" charset="-120"/>
-                        </a:rPr>
-                        <a:t>2,116 followers</a:t>
-                      </a:r>
-                      <a:endParaRPr lang="en-US" sz="1000" dirty="0">
-                        <a:latin typeface="Exo 2" charset="0"/>
-                        <a:ea typeface="Exo 2" charset="0"/>
-                        <a:cs typeface="Exo 2" charset="0"/>
-                      </a:endParaRPr>
-                    </a:p>
-                  </a:txBody>
-                  <a:tcPr marL="50800" marR="50800" marT="25400" marB="25400" anchor="ctr">
-                    <a:lnL w="0" cap="flat" cmpd="sng" algn="ctr">
-                      <a:noFill/>
-                    </a:lnL>
-                    <a:lnR w="0" cap="flat" cmpd="sng" algn="ctr">
-                      <a:noFill/>
-                    </a:lnR>
-                    <a:lnT w="0" cap="flat" cmpd="sng" algn="ctr">
-                      <a:noFill/>
-                    </a:lnT>
-                    <a:lnB w="9525" cap="flat" cmpd="sng" algn="ctr">
-                      <a:solidFill>
-                        <a:srgbClr val="D9DFEA"/>
-                      </a:solidFill>
-                      <a:prstDash val="solid"/>
-                      <a:round/>
-                      <a:headEnd type="none" w="med" len="med"/>
-                      <a:tailEnd type="none" w="med" len="med"/>
-                    </a:lnB>
-                  </a:tcPr>
-                </a:tc>
-                <a:tc>
-                  <a:txBody>
-                    <a:bodyPr/>
-                    <a:lstStyle/>
-                    <a:p>
-                      <a:pPr indent="0" marL="0">
-                        <a:buNone/>
-                      </a:pPr>
-                      <a:r>
-                        <a:rPr lang="en-US" sz="1000" dirty="0">
-                          <a:solidFill>
-                            <a:srgbClr val="1F2A44"/>
-                          </a:solidFill>
-                          <a:latin typeface="Exo 2" pitchFamily="34" charset="0"/>
-                          <a:ea typeface="Exo 2" pitchFamily="34" charset="-122"/>
-                          <a:cs typeface="Exo 2" pitchFamily="34" charset="-120"/>
-                        </a:rPr>
-                        <a:t>Late Sep</a:t>
-                      </a:r>
-                      <a:endParaRPr lang="en-US" sz="1000" dirty="0">
-                        <a:latin typeface="Exo 2" charset="0"/>
-                        <a:ea typeface="Exo 2" charset="0"/>
-                        <a:cs typeface="Exo 2" charset="0"/>
-                      </a:endParaRPr>
-                    </a:p>
-                  </a:txBody>
-                  <a:tcPr marL="50800" marR="50800" marT="25400" marB="25400" anchor="ctr">
-                    <a:lnL w="0" cap="flat" cmpd="sng" algn="ctr">
-                      <a:noFill/>
-                    </a:lnL>
-                    <a:lnR w="0" cap="flat" cmpd="sng" algn="ctr">
-                      <a:noFill/>
-                    </a:lnR>
-                    <a:lnT w="0" cap="flat" cmpd="sng" algn="ctr">
-                      <a:noFill/>
-                    </a:lnT>
-                    <a:lnB w="9525" cap="flat" cmpd="sng" algn="ctr">
-                      <a:solidFill>
-                        <a:srgbClr val="D9DFEA"/>
-                      </a:solidFill>
-                      <a:prstDash val="solid"/>
-                      <a:round/>
-                      <a:headEnd type="none" w="med" len="med"/>
-                      <a:tailEnd type="none" w="med" len="med"/>
-                    </a:lnB>
-                  </a:tcPr>
-                </a:tc>
-                <a:tc>
-                  <a:txBody>
-                    <a:bodyPr/>
-                    <a:lstStyle/>
-                    <a:p>
-                      <a:pPr indent="0" marL="0">
-                        <a:buNone/>
-                      </a:pPr>
-                      <a:r>
-                        <a:rPr lang="en-US" sz="1000" dirty="0">
-                          <a:solidFill>
-                            <a:srgbClr val="9A7B1F"/>
-                          </a:solidFill>
-                          <a:latin typeface="Exo 2" pitchFamily="34" charset="0"/>
-                          <a:ea typeface="Exo 2" pitchFamily="34" charset="-122"/>
-                          <a:cs typeface="Exo 2" pitchFamily="34" charset="-120"/>
-                        </a:rPr>
-                        <a:t>● </a:t>
-                      </a:r>
-                      <a:pPr indent="0" marL="0">
-                        <a:buNone/>
-                      </a:pPr>
-                      <a:r>
-                        <a:rPr lang="en-US" sz="1000" b="1" dirty="0">
-                          <a:solidFill>
-                            <a:srgbClr val="9A7B1F"/>
-                          </a:solidFill>
-                          <a:latin typeface="Exo 2" pitchFamily="34" charset="0"/>
-                          <a:ea typeface="Exo 2" pitchFamily="34" charset="-122"/>
-                          <a:cs typeface="Exo 2" pitchFamily="34" charset="-120"/>
-                        </a:rPr>
-                        <a:t>Reported</a:t>
-                      </a:r>
-                      <a:endParaRPr lang="en-US" sz="1000" dirty="0">
-                        <a:latin typeface="Exo 2" charset="0"/>
-                        <a:ea typeface="Exo 2" charset="0"/>
-                        <a:cs typeface="Exo 2" charset="0"/>
-                      </a:endParaRPr>
-                    </a:p>
-                  </a:txBody>
-                  <a:tcPr marL="50800" marR="50800" marT="25400" marB="25400" anchor="ctr">
-                    <a:lnL w="0" cap="flat" cmpd="sng" algn="ctr">
-                      <a:noFill/>
-                    </a:lnL>
-                    <a:lnR w="0" cap="flat" cmpd="sng" algn="ctr">
-                      <a:noFill/>
-                    </a:lnR>
-                    <a:lnT w="0" cap="flat" cmpd="sng" algn="ctr">
-                      <a:noFill/>
-                    </a:lnT>
-                    <a:lnB w="9525" cap="flat" cmpd="sng" algn="ctr">
-                      <a:solidFill>
-                        <a:srgbClr val="D9DFEA"/>
-                      </a:solidFill>
-                      <a:prstDash val="solid"/>
-                      <a:round/>
-                      <a:headEnd type="none" w="med" len="med"/>
-                      <a:tailEnd type="none" w="med" len="med"/>
-                    </a:lnB>
-                  </a:tcPr>
-                </a:tc>
-              </a:tr>
-              <a:tr h="512064">
-                <a:tc>
-                  <a:txBody>
-                    <a:bodyPr/>
-                    <a:lstStyle/>
-                    <a:p>
-                      <a:pPr indent="0" marL="0">
-                        <a:buNone/>
-                      </a:pPr>
-                      <a:r>
-                        <a:rPr lang="en-US" sz="1000" dirty="0">
-                          <a:solidFill>
-                            <a:srgbClr val="1F2A44"/>
-                          </a:solidFill>
-                          <a:latin typeface="Exo 2" pitchFamily="34" charset="0"/>
-                          <a:ea typeface="Exo 2" pitchFamily="34" charset="-122"/>
-                          <a:cs typeface="Exo 2" pitchFamily="34" charset="-120"/>
-                        </a:rPr>
-                        <a:t>LinkedIn</a:t>
-                      </a:r>
-                      <a:endParaRPr lang="en-US" sz="1000" dirty="0">
-                        <a:latin typeface="Exo 2" charset="0"/>
-                        <a:ea typeface="Exo 2" charset="0"/>
-                        <a:cs typeface="Exo 2" charset="0"/>
-                      </a:endParaRPr>
-                    </a:p>
-                  </a:txBody>
-                  <a:tcPr marL="50800" marR="50800" marT="25400" marB="25400" anchor="ctr">
-                    <a:lnL w="0" cap="flat" cmpd="sng" algn="ctr">
-                      <a:noFill/>
-                    </a:lnL>
-                    <a:lnR w="0" cap="flat" cmpd="sng" algn="ctr">
-                      <a:noFill/>
-                    </a:lnR>
-                    <a:lnT w="0" cap="flat" cmpd="sng" algn="ctr">
-                      <a:noFill/>
-                    </a:lnT>
-                    <a:lnB w="9525" cap="flat" cmpd="sng" algn="ctr">
-                      <a:solidFill>
-                        <a:srgbClr val="D9DFEA"/>
-                      </a:solidFill>
-                      <a:prstDash val="solid"/>
-                      <a:round/>
-                      <a:headEnd type="none" w="med" len="med"/>
-                      <a:tailEnd type="none" w="med" len="med"/>
-                    </a:lnB>
-                  </a:tcPr>
-                </a:tc>
-                <a:tc>
-                  <a:txBody>
-                    <a:bodyPr/>
-                    <a:lstStyle/>
-                    <a:p>
-                      <a:pPr indent="0" marL="0">
-                        <a:buNone/>
-                      </a:pPr>
-                      <a:r>
-                        <a:rPr lang="en-US" sz="1000" dirty="0">
-                          <a:solidFill>
-                            <a:srgbClr val="1F2A44"/>
-                          </a:solidFill>
-                          <a:latin typeface="Exo 2" pitchFamily="34" charset="0"/>
-                          <a:ea typeface="Exo 2" pitchFamily="34" charset="-122"/>
-                          <a:cs typeface="Exo 2" pitchFamily="34" charset="-120"/>
-                        </a:rPr>
-                        <a:t>531 followers; 247 new vs 4 prior (+6,075% new)</a:t>
-                      </a:r>
-                      <a:endParaRPr lang="en-US" sz="1000" dirty="0">
-                        <a:latin typeface="Exo 2" charset="0"/>
-                        <a:ea typeface="Exo 2" charset="0"/>
-                        <a:cs typeface="Exo 2" charset="0"/>
-                      </a:endParaRPr>
-                    </a:p>
-                  </a:txBody>
-                  <a:tcPr marL="50800" marR="50800" marT="25400" marB="25400" anchor="ctr">
-                    <a:lnL w="0" cap="flat" cmpd="sng" algn="ctr">
-                      <a:noFill/>
-                    </a:lnL>
-                    <a:lnR w="0" cap="flat" cmpd="sng" algn="ctr">
-                      <a:noFill/>
-                    </a:lnR>
-                    <a:lnT w="0" cap="flat" cmpd="sng" algn="ctr">
-                      <a:noFill/>
-                    </a:lnT>
-                    <a:lnB w="9525" cap="flat" cmpd="sng" algn="ctr">
-                      <a:solidFill>
-                        <a:srgbClr val="D9DFEA"/>
-                      </a:solidFill>
-                      <a:prstDash val="solid"/>
-                      <a:round/>
-                      <a:headEnd type="none" w="med" len="med"/>
-                      <a:tailEnd type="none" w="med" len="med"/>
-                    </a:lnB>
-                  </a:tcPr>
-                </a:tc>
-                <a:tc>
-                  <a:txBody>
-                    <a:bodyPr/>
-                    <a:lstStyle/>
-                    <a:p>
-                      <a:pPr indent="0" marL="0">
-                        <a:buNone/>
-                      </a:pPr>
-                      <a:r>
-                        <a:rPr lang="en-US" sz="1000" dirty="0">
-                          <a:solidFill>
-                            <a:srgbClr val="1F2A44"/>
-                          </a:solidFill>
-                          <a:latin typeface="Exo 2" pitchFamily="34" charset="0"/>
-                          <a:ea typeface="Exo 2" pitchFamily="34" charset="-122"/>
-                          <a:cs typeface="Exo 2" pitchFamily="34" charset="-120"/>
-                        </a:rPr>
-                        <a:t>30 days</a:t>
-                      </a:r>
-                      <a:endParaRPr lang="en-US" sz="1000" dirty="0">
-                        <a:latin typeface="Exo 2" charset="0"/>
-                        <a:ea typeface="Exo 2" charset="0"/>
-                        <a:cs typeface="Exo 2" charset="0"/>
-                      </a:endParaRPr>
-                    </a:p>
-                  </a:txBody>
-                  <a:tcPr marL="50800" marR="50800" marT="25400" marB="25400" anchor="ctr">
-                    <a:lnL w="0" cap="flat" cmpd="sng" algn="ctr">
-                      <a:noFill/>
-                    </a:lnL>
-                    <a:lnR w="0" cap="flat" cmpd="sng" algn="ctr">
-                      <a:noFill/>
-                    </a:lnR>
-                    <a:lnT w="0" cap="flat" cmpd="sng" algn="ctr">
-                      <a:noFill/>
-                    </a:lnT>
-                    <a:lnB w="9525" cap="flat" cmpd="sng" algn="ctr">
-                      <a:solidFill>
-                        <a:srgbClr val="D9DFEA"/>
-                      </a:solidFill>
-                      <a:prstDash val="solid"/>
-                      <a:round/>
-                      <a:headEnd type="none" w="med" len="med"/>
-                      <a:tailEnd type="none" w="med" len="med"/>
-                    </a:lnB>
-                  </a:tcPr>
-                </a:tc>
-                <a:tc>
-                  <a:txBody>
-                    <a:bodyPr/>
-                    <a:lstStyle/>
-                    <a:p>
-                      <a:pPr indent="0" marL="0">
-                        <a:buNone/>
-                      </a:pPr>
-                      <a:r>
-                        <a:rPr lang="en-US" sz="1000" dirty="0">
-                          <a:solidFill>
-                            <a:srgbClr val="C53030"/>
-                          </a:solidFill>
-                          <a:latin typeface="Exo 2" pitchFamily="34" charset="0"/>
-                          <a:ea typeface="Exo 2" pitchFamily="34" charset="-122"/>
-                          <a:cs typeface="Exo 2" pitchFamily="34" charset="-120"/>
-                        </a:rPr>
-                        <a:t>● </a:t>
-                      </a:r>
-                      <a:pPr indent="0" marL="0">
-                        <a:buNone/>
-                      </a:pPr>
-                      <a:r>
-                        <a:rPr lang="en-US" sz="1000" b="1" dirty="0">
-                          <a:solidFill>
-                            <a:srgbClr val="C53030"/>
-                          </a:solidFill>
-                          <a:latin typeface="Exo 2" pitchFamily="34" charset="0"/>
-                          <a:ea typeface="Exo 2" pitchFamily="34" charset="-122"/>
-                          <a:cs typeface="Exo 2" pitchFamily="34" charset="-120"/>
-                        </a:rPr>
-                        <a:t>Conflicting</a:t>
-                      </a:r>
-                      <a:endParaRPr lang="en-US" sz="1000" dirty="0">
-                        <a:latin typeface="Exo 2" charset="0"/>
-                        <a:ea typeface="Exo 2" charset="0"/>
-                        <a:cs typeface="Exo 2" charset="0"/>
-                      </a:endParaRPr>
-                    </a:p>
-                  </a:txBody>
-                  <a:tcPr marL="50800" marR="50800" marT="25400" marB="25400" anchor="ctr">
-                    <a:lnL w="0" cap="flat" cmpd="sng" algn="ctr">
-                      <a:noFill/>
-                    </a:lnL>
-                    <a:lnR w="0" cap="flat" cmpd="sng" algn="ctr">
-                      <a:noFill/>
-                    </a:lnR>
-                    <a:lnT w="0" cap="flat" cmpd="sng" algn="ctr">
-                      <a:noFill/>
-                    </a:lnT>
-                    <a:lnB w="9525" cap="flat" cmpd="sng" algn="ctr">
-                      <a:solidFill>
-                        <a:srgbClr val="D9DFEA"/>
-                      </a:solidFill>
-                      <a:prstDash val="solid"/>
-                      <a:round/>
-                      <a:headEnd type="none" w="med" len="med"/>
-                      <a:tailEnd type="none" w="med" len="med"/>
-                    </a:lnB>
-                  </a:tcPr>
-                </a:tc>
-              </a:tr>
-              <a:tr h="512064">
-                <a:tc>
-                  <a:txBody>
-                    <a:bodyPr/>
-                    <a:lstStyle/>
-                    <a:p>
-                      <a:pPr indent="0" marL="0">
-                        <a:buNone/>
-                      </a:pPr>
-                      <a:r>
-                        <a:rPr lang="en-US" sz="1000" dirty="0">
-                          <a:solidFill>
-                            <a:srgbClr val="1F2A44"/>
-                          </a:solidFill>
-                          <a:latin typeface="Exo 2" pitchFamily="34" charset="0"/>
-                          <a:ea typeface="Exo 2" pitchFamily="34" charset="-122"/>
-                          <a:cs typeface="Exo 2" pitchFamily="34" charset="-120"/>
-                        </a:rPr>
-                        <a:t>LinkedIn</a:t>
-                      </a:r>
-                      <a:endParaRPr lang="en-US" sz="1000" dirty="0">
-                        <a:latin typeface="Exo 2" charset="0"/>
-                        <a:ea typeface="Exo 2" charset="0"/>
-                        <a:cs typeface="Exo 2" charset="0"/>
-                      </a:endParaRPr>
-                    </a:p>
-                  </a:txBody>
-                  <a:tcPr marL="50800" marR="50800" marT="25400" marB="25400" anchor="ctr">
-                    <a:lnL w="0" cap="flat" cmpd="sng" algn="ctr">
-                      <a:noFill/>
-                    </a:lnL>
-                    <a:lnR w="0" cap="flat" cmpd="sng" algn="ctr">
-                      <a:noFill/>
-                    </a:lnR>
-                    <a:lnT w="0" cap="flat" cmpd="sng" algn="ctr">
-                      <a:noFill/>
-                    </a:lnT>
-                    <a:lnB w="9525" cap="flat" cmpd="sng" algn="ctr">
-                      <a:solidFill>
-                        <a:srgbClr val="D9DFEA"/>
-                      </a:solidFill>
-                      <a:prstDash val="solid"/>
-                      <a:round/>
-                      <a:headEnd type="none" w="med" len="med"/>
-                      <a:tailEnd type="none" w="med" len="med"/>
-                    </a:lnB>
-                  </a:tcPr>
-                </a:tc>
-                <a:tc>
-                  <a:txBody>
-                    <a:bodyPr/>
-                    <a:lstStyle/>
-                    <a:p>
-                      <a:pPr indent="0" marL="0">
-                        <a:buNone/>
-                      </a:pPr>
-                      <a:r>
-                        <a:rPr lang="en-US" sz="1000" dirty="0">
-                          <a:solidFill>
-                            <a:srgbClr val="1F2A44"/>
-                          </a:solidFill>
-                          <a:latin typeface="Exo 2" pitchFamily="34" charset="0"/>
-                          <a:ea typeface="Exo 2" pitchFamily="34" charset="-122"/>
-                          <a:cs typeface="Exo 2" pitchFamily="34" charset="-120"/>
-                        </a:rPr>
-                        <a:t>559 impressions, +118%</a:t>
-                      </a:r>
-                      <a:endParaRPr lang="en-US" sz="1000" dirty="0">
-                        <a:latin typeface="Exo 2" charset="0"/>
-                        <a:ea typeface="Exo 2" charset="0"/>
-                        <a:cs typeface="Exo 2" charset="0"/>
-                      </a:endParaRPr>
-                    </a:p>
-                  </a:txBody>
-                  <a:tcPr marL="50800" marR="50800" marT="25400" marB="25400" anchor="ctr">
-                    <a:lnL w="0" cap="flat" cmpd="sng" algn="ctr">
-                      <a:noFill/>
-                    </a:lnL>
-                    <a:lnR w="0" cap="flat" cmpd="sng" algn="ctr">
-                      <a:noFill/>
-                    </a:lnR>
-                    <a:lnT w="0" cap="flat" cmpd="sng" algn="ctr">
-                      <a:noFill/>
-                    </a:lnT>
-                    <a:lnB w="9525" cap="flat" cmpd="sng" algn="ctr">
-                      <a:solidFill>
-                        <a:srgbClr val="D9DFEA"/>
-                      </a:solidFill>
-                      <a:prstDash val="solid"/>
-                      <a:round/>
-                      <a:headEnd type="none" w="med" len="med"/>
-                      <a:tailEnd type="none" w="med" len="med"/>
-                    </a:lnB>
-                  </a:tcPr>
-                </a:tc>
-                <a:tc>
-                  <a:txBody>
-                    <a:bodyPr/>
-                    <a:lstStyle/>
-                    <a:p>
-                      <a:pPr indent="0" marL="0">
-                        <a:buNone/>
-                      </a:pPr>
-                      <a:r>
-                        <a:rPr lang="en-US" sz="1000" dirty="0">
-                          <a:solidFill>
-                            <a:srgbClr val="1F2A44"/>
-                          </a:solidFill>
-                          <a:latin typeface="Exo 2" pitchFamily="34" charset="0"/>
-                          <a:ea typeface="Exo 2" pitchFamily="34" charset="-122"/>
-                          <a:cs typeface="Exo 2" pitchFamily="34" charset="-120"/>
-                        </a:rPr>
-                        <a:t>13-27 Sep vs prior</a:t>
-                      </a:r>
-                      <a:endParaRPr lang="en-US" sz="1000" dirty="0">
-                        <a:latin typeface="Exo 2" charset="0"/>
-                        <a:ea typeface="Exo 2" charset="0"/>
-                        <a:cs typeface="Exo 2" charset="0"/>
-                      </a:endParaRPr>
-                    </a:p>
-                  </a:txBody>
-                  <a:tcPr marL="50800" marR="50800" marT="25400" marB="25400" anchor="ctr">
-                    <a:lnL w="0" cap="flat" cmpd="sng" algn="ctr">
-                      <a:noFill/>
-                    </a:lnL>
-                    <a:lnR w="0" cap="flat" cmpd="sng" algn="ctr">
-                      <a:noFill/>
-                    </a:lnR>
-                    <a:lnT w="0" cap="flat" cmpd="sng" algn="ctr">
-                      <a:noFill/>
-                    </a:lnT>
-                    <a:lnB w="9525" cap="flat" cmpd="sng" algn="ctr">
-                      <a:solidFill>
-                        <a:srgbClr val="D9DFEA"/>
-                      </a:solidFill>
-                      <a:prstDash val="solid"/>
-                      <a:round/>
-                      <a:headEnd type="none" w="med" len="med"/>
-                      <a:tailEnd type="none" w="med" len="med"/>
-                    </a:lnB>
-                  </a:tcPr>
-                </a:tc>
-                <a:tc>
-                  <a:txBody>
-                    <a:bodyPr/>
-                    <a:lstStyle/>
-                    <a:p>
-                      <a:pPr indent="0" marL="0">
-                        <a:buNone/>
-                      </a:pPr>
-                      <a:r>
-                        <a:rPr lang="en-US" sz="1000" dirty="0">
-                          <a:solidFill>
-                            <a:srgbClr val="9A7B1F"/>
-                          </a:solidFill>
-                          <a:latin typeface="Exo 2" pitchFamily="34" charset="0"/>
-                          <a:ea typeface="Exo 2" pitchFamily="34" charset="-122"/>
-                          <a:cs typeface="Exo 2" pitchFamily="34" charset="-120"/>
-                        </a:rPr>
-                        <a:t>● </a:t>
-                      </a:r>
-                      <a:pPr indent="0" marL="0">
-                        <a:buNone/>
-                      </a:pPr>
-                      <a:r>
-                        <a:rPr lang="en-US" sz="1000" b="1" dirty="0">
-                          <a:solidFill>
-                            <a:srgbClr val="9A7B1F"/>
-                          </a:solidFill>
-                          <a:latin typeface="Exo 2" pitchFamily="34" charset="0"/>
-                          <a:ea typeface="Exo 2" pitchFamily="34" charset="-122"/>
-                          <a:cs typeface="Exo 2" pitchFamily="34" charset="-120"/>
-                        </a:rPr>
-                        <a:t>Reported</a:t>
-                      </a:r>
-                      <a:endParaRPr lang="en-US" sz="1000" dirty="0">
-                        <a:latin typeface="Exo 2" charset="0"/>
-                        <a:ea typeface="Exo 2" charset="0"/>
-                        <a:cs typeface="Exo 2" charset="0"/>
-                      </a:endParaRPr>
-                    </a:p>
-                  </a:txBody>
-                  <a:tcPr marL="50800" marR="50800" marT="25400" marB="25400" anchor="ctr">
-                    <a:lnL w="0" cap="flat" cmpd="sng" algn="ctr">
-                      <a:noFill/>
-                    </a:lnL>
-                    <a:lnR w="0" cap="flat" cmpd="sng" algn="ctr">
-                      <a:noFill/>
-                    </a:lnR>
-                    <a:lnT w="0" cap="flat" cmpd="sng" algn="ctr">
-                      <a:noFill/>
-                    </a:lnT>
-                    <a:lnB w="9525" cap="flat" cmpd="sng" algn="ctr">
-                      <a:solidFill>
-                        <a:srgbClr val="D9DFEA"/>
-                      </a:solidFill>
-                      <a:prstDash val="solid"/>
-                      <a:round/>
-                      <a:headEnd type="none" w="med" len="med"/>
-                      <a:tailEnd type="none" w="med" len="med"/>
-                    </a:lnB>
-                  </a:tcPr>
-                </a:tc>
-              </a:tr>
-              <a:tr h="512064">
-                <a:tc>
-                  <a:txBody>
-                    <a:bodyPr/>
-                    <a:lstStyle/>
-                    <a:p>
-                      <a:pPr indent="0" marL="0">
-                        <a:buNone/>
-                      </a:pPr>
-                      <a:r>
-                        <a:rPr lang="en-US" sz="1000" dirty="0">
-                          <a:solidFill>
-                            <a:srgbClr val="1F2A44"/>
-                          </a:solidFill>
-                          <a:latin typeface="Exo 2" pitchFamily="34" charset="0"/>
-                          <a:ea typeface="Exo 2" pitchFamily="34" charset="-122"/>
-                          <a:cs typeface="Exo 2" pitchFamily="34" charset="-120"/>
-                        </a:rPr>
-                        <a:t>X</a:t>
-                      </a:r>
-                      <a:endParaRPr lang="en-US" sz="1000" dirty="0">
-                        <a:latin typeface="Exo 2" charset="0"/>
-                        <a:ea typeface="Exo 2" charset="0"/>
-                        <a:cs typeface="Exo 2" charset="0"/>
-                      </a:endParaRPr>
-                    </a:p>
-                  </a:txBody>
-                  <a:tcPr marL="50800" marR="50800" marT="25400" marB="25400" anchor="ctr">
-                    <a:lnL w="0" cap="flat" cmpd="sng" algn="ctr">
-                      <a:noFill/>
-                    </a:lnL>
-                    <a:lnR w="0" cap="flat" cmpd="sng" algn="ctr">
-                      <a:noFill/>
-                    </a:lnR>
-                    <a:lnT w="0" cap="flat" cmpd="sng" algn="ctr">
-                      <a:noFill/>
-                    </a:lnT>
-                    <a:lnB w="9525" cap="flat" cmpd="sng" algn="ctr">
-                      <a:solidFill>
-                        <a:srgbClr val="D9DFEA"/>
-                      </a:solidFill>
-                      <a:prstDash val="solid"/>
-                      <a:round/>
-                      <a:headEnd type="none" w="med" len="med"/>
-                      <a:tailEnd type="none" w="med" len="med"/>
-                    </a:lnB>
-                  </a:tcPr>
-                </a:tc>
-                <a:tc>
-                  <a:txBody>
-                    <a:bodyPr/>
-                    <a:lstStyle/>
-                    <a:p>
-                      <a:pPr indent="0" marL="0">
-                        <a:buNone/>
-                      </a:pPr>
-                      <a:r>
-                        <a:rPr lang="en-US" sz="1000" dirty="0">
-                          <a:solidFill>
-                            <a:srgbClr val="1F2A44"/>
-                          </a:solidFill>
-                          <a:latin typeface="Exo 2" pitchFamily="34" charset="0"/>
-                          <a:ea typeface="Exo 2" pitchFamily="34" charset="-122"/>
-                          <a:cs typeface="Exo 2" pitchFamily="34" charset="-120"/>
-                        </a:rPr>
-                        <a:t>738 followers, 99 posts; 96.4% Bahrain</a:t>
-                      </a:r>
-                      <a:endParaRPr lang="en-US" sz="1000" dirty="0">
-                        <a:latin typeface="Exo 2" charset="0"/>
-                        <a:ea typeface="Exo 2" charset="0"/>
-                        <a:cs typeface="Exo 2" charset="0"/>
-                      </a:endParaRPr>
-                    </a:p>
-                  </a:txBody>
-                  <a:tcPr marL="50800" marR="50800" marT="25400" marB="25400" anchor="ctr">
-                    <a:lnL w="0" cap="flat" cmpd="sng" algn="ctr">
-                      <a:noFill/>
-                    </a:lnL>
-                    <a:lnR w="0" cap="flat" cmpd="sng" algn="ctr">
-                      <a:noFill/>
-                    </a:lnR>
-                    <a:lnT w="0" cap="flat" cmpd="sng" algn="ctr">
-                      <a:noFill/>
-                    </a:lnT>
-                    <a:lnB w="9525" cap="flat" cmpd="sng" algn="ctr">
-                      <a:solidFill>
-                        <a:srgbClr val="D9DFEA"/>
-                      </a:solidFill>
-                      <a:prstDash val="solid"/>
-                      <a:round/>
-                      <a:headEnd type="none" w="med" len="med"/>
-                      <a:tailEnd type="none" w="med" len="med"/>
-                    </a:lnB>
-                  </a:tcPr>
-                </a:tc>
-                <a:tc>
-                  <a:txBody>
-                    <a:bodyPr/>
-                    <a:lstStyle/>
-                    <a:p>
-                      <a:pPr indent="0" marL="0">
-                        <a:buNone/>
-                      </a:pPr>
-                      <a:r>
-                        <a:rPr lang="en-US" sz="1000" dirty="0">
-                          <a:solidFill>
-                            <a:srgbClr val="1F2A44"/>
-                          </a:solidFill>
-                          <a:latin typeface="Exo 2" pitchFamily="34" charset="0"/>
-                          <a:ea typeface="Exo 2" pitchFamily="34" charset="-122"/>
-                          <a:cs typeface="Exo 2" pitchFamily="34" charset="-120"/>
-                        </a:rPr>
-                        <a:t>Late Sep</a:t>
-                      </a:r>
-                      <a:endParaRPr lang="en-US" sz="1000" dirty="0">
-                        <a:latin typeface="Exo 2" charset="0"/>
-                        <a:ea typeface="Exo 2" charset="0"/>
-                        <a:cs typeface="Exo 2" charset="0"/>
-                      </a:endParaRPr>
-                    </a:p>
-                  </a:txBody>
-                  <a:tcPr marL="50800" marR="50800" marT="25400" marB="25400" anchor="ctr">
-                    <a:lnL w="0" cap="flat" cmpd="sng" algn="ctr">
-                      <a:noFill/>
-                    </a:lnL>
-                    <a:lnR w="0" cap="flat" cmpd="sng" algn="ctr">
-                      <a:noFill/>
-                    </a:lnR>
-                    <a:lnT w="0" cap="flat" cmpd="sng" algn="ctr">
-                      <a:noFill/>
-                    </a:lnT>
-                    <a:lnB w="9525" cap="flat" cmpd="sng" algn="ctr">
-                      <a:solidFill>
-                        <a:srgbClr val="D9DFEA"/>
-                      </a:solidFill>
-                      <a:prstDash val="solid"/>
-                      <a:round/>
-                      <a:headEnd type="none" w="med" len="med"/>
-                      <a:tailEnd type="none" w="med" len="med"/>
-                    </a:lnB>
-                  </a:tcPr>
-                </a:tc>
-                <a:tc>
-                  <a:txBody>
-                    <a:bodyPr/>
-                    <a:lstStyle/>
-                    <a:p>
-                      <a:pPr indent="0" marL="0">
-                        <a:buNone/>
-                      </a:pPr>
-                      <a:r>
-                        <a:rPr lang="en-US" sz="1000" dirty="0">
-                          <a:solidFill>
-                            <a:srgbClr val="9A7B1F"/>
-                          </a:solidFill>
-                          <a:latin typeface="Exo 2" pitchFamily="34" charset="0"/>
-                          <a:ea typeface="Exo 2" pitchFamily="34" charset="-122"/>
-                          <a:cs typeface="Exo 2" pitchFamily="34" charset="-120"/>
-                        </a:rPr>
-                        <a:t>● </a:t>
-                      </a:r>
-                      <a:pPr indent="0" marL="0">
-                        <a:buNone/>
-                      </a:pPr>
-                      <a:r>
-                        <a:rPr lang="en-US" sz="1000" b="1" dirty="0">
-                          <a:solidFill>
-                            <a:srgbClr val="9A7B1F"/>
-                          </a:solidFill>
-                          <a:latin typeface="Exo 2" pitchFamily="34" charset="0"/>
-                          <a:ea typeface="Exo 2" pitchFamily="34" charset="-122"/>
-                          <a:cs typeface="Exo 2" pitchFamily="34" charset="-120"/>
-                        </a:rPr>
-                        <a:t>Reported</a:t>
-                      </a:r>
-                      <a:endParaRPr lang="en-US" sz="1000" dirty="0">
-                        <a:latin typeface="Exo 2" charset="0"/>
-                        <a:ea typeface="Exo 2" charset="0"/>
-                        <a:cs typeface="Exo 2" charset="0"/>
-                      </a:endParaRPr>
-                    </a:p>
-                  </a:txBody>
-                  <a:tcPr marL="50800" marR="50800" marT="25400" marB="25400" anchor="ctr">
-                    <a:lnL w="0" cap="flat" cmpd="sng" algn="ctr">
-                      <a:noFill/>
-                    </a:lnL>
-                    <a:lnR w="0" cap="flat" cmpd="sng" algn="ctr">
-                      <a:noFill/>
-                    </a:lnR>
-                    <a:lnT w="0" cap="flat" cmpd="sng" algn="ctr">
-                      <a:noFill/>
-                    </a:lnT>
-                    <a:lnB w="9525" cap="flat" cmpd="sng" algn="ctr">
-                      <a:solidFill>
-                        <a:srgbClr val="D9DFEA"/>
-                      </a:solidFill>
-                      <a:prstDash val="solid"/>
-                      <a:round/>
-                      <a:headEnd type="none" w="med" len="med"/>
-                      <a:tailEnd type="none" w="med" len="med"/>
-                    </a:lnB>
-                  </a:tcPr>
-                </a:tc>
-              </a:tr>
-              <a:tr h="512064">
-                <a:tc>
-                  <a:txBody>
-                    <a:bodyPr/>
-                    <a:lstStyle/>
-                    <a:p>
-                      <a:pPr indent="0" marL="0">
-                        <a:buNone/>
-                      </a:pPr>
-                      <a:r>
-                        <a:rPr lang="en-US" sz="1000" dirty="0">
-                          <a:solidFill>
-                            <a:srgbClr val="1F2A44"/>
-                          </a:solidFill>
-                          <a:latin typeface="Exo 2" pitchFamily="34" charset="0"/>
-                          <a:ea typeface="Exo 2" pitchFamily="34" charset="-122"/>
-                          <a:cs typeface="Exo 2" pitchFamily="34" charset="-120"/>
-                        </a:rPr>
-                        <a:t>TikTok</a:t>
-                      </a:r>
-                      <a:endParaRPr lang="en-US" sz="1000" dirty="0">
-                        <a:latin typeface="Exo 2" charset="0"/>
-                        <a:ea typeface="Exo 2" charset="0"/>
-                        <a:cs typeface="Exo 2" charset="0"/>
-                      </a:endParaRPr>
-                    </a:p>
-                  </a:txBody>
-                  <a:tcPr marL="50800" marR="50800" marT="25400" marB="25400" anchor="ctr">
-                    <a:lnL w="0" cap="flat" cmpd="sng" algn="ctr">
-                      <a:noFill/>
-                    </a:lnL>
-                    <a:lnR w="0" cap="flat" cmpd="sng" algn="ctr">
-                      <a:noFill/>
-                    </a:lnR>
-                    <a:lnT w="0" cap="flat" cmpd="sng" algn="ctr">
-                      <a:noFill/>
-                    </a:lnT>
-                    <a:lnB w="9525" cap="flat" cmpd="sng" algn="ctr">
-                      <a:solidFill>
-                        <a:srgbClr val="D9DFEA"/>
-                      </a:solidFill>
-                      <a:prstDash val="solid"/>
-                      <a:round/>
-                      <a:headEnd type="none" w="med" len="med"/>
-                      <a:tailEnd type="none" w="med" len="med"/>
-                    </a:lnB>
-                  </a:tcPr>
-                </a:tc>
-                <a:tc>
-                  <a:txBody>
-                    <a:bodyPr/>
-                    <a:lstStyle/>
-                    <a:p>
-                      <a:pPr indent="0" marL="0">
-                        <a:buNone/>
-                      </a:pPr>
-                      <a:r>
-                        <a:rPr lang="en-US" sz="1000" dirty="0">
-                          <a:solidFill>
-                            <a:srgbClr val="1F2A44"/>
-                          </a:solidFill>
-                          <a:latin typeface="Exo 2" pitchFamily="34" charset="0"/>
-                          <a:ea typeface="Exo 2" pitchFamily="34" charset="-122"/>
-                          <a:cs typeface="Exo 2" pitchFamily="34" charset="-120"/>
-                        </a:rPr>
-                        <a:t>15 followers, 176 likes</a:t>
-                      </a:r>
-                      <a:endParaRPr lang="en-US" sz="1000" dirty="0">
-                        <a:latin typeface="Exo 2" charset="0"/>
-                        <a:ea typeface="Exo 2" charset="0"/>
-                        <a:cs typeface="Exo 2" charset="0"/>
-                      </a:endParaRPr>
-                    </a:p>
-                  </a:txBody>
-                  <a:tcPr marL="50800" marR="50800" marT="25400" marB="25400" anchor="ctr">
-                    <a:lnL w="0" cap="flat" cmpd="sng" algn="ctr">
-                      <a:noFill/>
-                    </a:lnL>
-                    <a:lnR w="0" cap="flat" cmpd="sng" algn="ctr">
-                      <a:noFill/>
-                    </a:lnR>
-                    <a:lnT w="0" cap="flat" cmpd="sng" algn="ctr">
-                      <a:noFill/>
-                    </a:lnT>
-                    <a:lnB w="9525" cap="flat" cmpd="sng" algn="ctr">
-                      <a:solidFill>
-                        <a:srgbClr val="D9DFEA"/>
-                      </a:solidFill>
-                      <a:prstDash val="solid"/>
-                      <a:round/>
-                      <a:headEnd type="none" w="med" len="med"/>
-                      <a:tailEnd type="none" w="med" len="med"/>
-                    </a:lnB>
-                  </a:tcPr>
-                </a:tc>
-                <a:tc>
-                  <a:txBody>
-                    <a:bodyPr/>
-                    <a:lstStyle/>
-                    <a:p>
-                      <a:pPr indent="0" marL="0">
-                        <a:buNone/>
-                      </a:pPr>
-                      <a:r>
-                        <a:rPr lang="en-US" sz="1000" dirty="0">
-                          <a:solidFill>
-                            <a:srgbClr val="1F2A44"/>
-                          </a:solidFill>
-                          <a:latin typeface="Exo 2" pitchFamily="34" charset="0"/>
-                          <a:ea typeface="Exo 2" pitchFamily="34" charset="-122"/>
-                          <a:cs typeface="Exo 2" pitchFamily="34" charset="-120"/>
-                        </a:rPr>
-                        <a:t>Late Sep</a:t>
-                      </a:r>
-                      <a:endParaRPr lang="en-US" sz="1000" dirty="0">
-                        <a:latin typeface="Exo 2" charset="0"/>
-                        <a:ea typeface="Exo 2" charset="0"/>
-                        <a:cs typeface="Exo 2" charset="0"/>
-                      </a:endParaRPr>
-                    </a:p>
-                  </a:txBody>
-                  <a:tcPr marL="50800" marR="50800" marT="25400" marB="25400" anchor="ctr">
-                    <a:lnL w="0" cap="flat" cmpd="sng" algn="ctr">
-                      <a:noFill/>
-                    </a:lnL>
-                    <a:lnR w="0" cap="flat" cmpd="sng" algn="ctr">
-                      <a:noFill/>
-                    </a:lnR>
-                    <a:lnT w="0" cap="flat" cmpd="sng" algn="ctr">
-                      <a:noFill/>
-                    </a:lnT>
-                    <a:lnB w="9525" cap="flat" cmpd="sng" algn="ctr">
-                      <a:solidFill>
-                        <a:srgbClr val="D9DFEA"/>
-                      </a:solidFill>
-                      <a:prstDash val="solid"/>
-                      <a:round/>
-                      <a:headEnd type="none" w="med" len="med"/>
-                      <a:tailEnd type="none" w="med" len="med"/>
-                    </a:lnB>
-                  </a:tcPr>
-                </a:tc>
-                <a:tc>
-                  <a:txBody>
-                    <a:bodyPr/>
-                    <a:lstStyle/>
-                    <a:p>
-                      <a:pPr indent="0" marL="0">
-                        <a:buNone/>
-                      </a:pPr>
-                      <a:r>
-                        <a:rPr lang="en-US" sz="1000" dirty="0">
-                          <a:solidFill>
-                            <a:srgbClr val="9A7B1F"/>
-                          </a:solidFill>
-                          <a:latin typeface="Exo 2" pitchFamily="34" charset="0"/>
-                          <a:ea typeface="Exo 2" pitchFamily="34" charset="-122"/>
-                          <a:cs typeface="Exo 2" pitchFamily="34" charset="-120"/>
-                        </a:rPr>
-                        <a:t>● </a:t>
-                      </a:r>
-                      <a:pPr indent="0" marL="0">
-                        <a:buNone/>
-                      </a:pPr>
-                      <a:r>
-                        <a:rPr lang="en-US" sz="1000" b="1" dirty="0">
-                          <a:solidFill>
-                            <a:srgbClr val="9A7B1F"/>
-                          </a:solidFill>
-                          <a:latin typeface="Exo 2" pitchFamily="34" charset="0"/>
-                          <a:ea typeface="Exo 2" pitchFamily="34" charset="-122"/>
-                          <a:cs typeface="Exo 2" pitchFamily="34" charset="-120"/>
-                        </a:rPr>
-                        <a:t>Reported</a:t>
-                      </a:r>
-                      <a:endParaRPr lang="en-US" sz="1000" dirty="0">
-                        <a:latin typeface="Exo 2" charset="0"/>
-                        <a:ea typeface="Exo 2" charset="0"/>
-                        <a:cs typeface="Exo 2" charset="0"/>
-                      </a:endParaRPr>
-                    </a:p>
-                  </a:txBody>
-                  <a:tcPr marL="50800" marR="50800" marT="25400" marB="25400" anchor="ctr">
-                    <a:lnL w="0" cap="flat" cmpd="sng" algn="ctr">
-                      <a:noFill/>
-                    </a:lnL>
-                    <a:lnR w="0" cap="flat" cmpd="sng" algn="ctr">
-                      <a:noFill/>
-                    </a:lnR>
-                    <a:lnT w="0" cap="flat" cmpd="sng" algn="ctr">
-                      <a:noFill/>
-                    </a:lnT>
-                    <a:lnB w="9525" cap="flat" cmpd="sng" algn="ctr">
-                      <a:solidFill>
-                        <a:srgbClr val="D9DFEA"/>
-                      </a:solidFill>
-                      <a:prstDash val="solid"/>
-                      <a:round/>
-                      <a:headEnd type="none" w="med" len="med"/>
-                      <a:tailEnd type="none" w="med" len="med"/>
-                    </a:lnB>
-                  </a:tcPr>
-                </a:tc>
-              </a:tr>
-            </a:tbl>
-          </a:graphicData>
-        </a:graphic>
-      </p:graphicFrame>
-      <p:sp>
-        <p:nvSpPr>
-          <p:cNvPr id="17" name="Text 9"/>
-          <p:cNvSpPr txBox="1"/>
-          <p:nvPr/>
-        </p:nvSpPr>
-        <p:spPr>
-          <a:xfrm>
-            <a:off x="6492240" y="5230368"/>
-            <a:ext cx="5138928" cy="320040"/>
-          </a:xfrm>
-          <a:prstGeom prst="rect">
-            <a:avLst/>
-          </a:prstGeom>
-          <a:noFill/>
-          <a:ln/>
-        </p:spPr>
-        <p:txBody>
-          <a:bodyPr wrap="square" lIns="0" tIns="0" rIns="0" bIns="0" rtlCol="0" anchor="t"/>
-          <a:lstStyle/>
-          <a:p>
-            <a:pPr indent="0" marL="0">
-              <a:buNone/>
-            </a:pPr>
-            <a:r>
-              <a:rPr lang="en-US" sz="900" i="1" dirty="0">
-                <a:solidFill>
-                  <a:srgbClr val="7A849C"/>
-                </a:solidFill>
-                <a:latin typeface="Exo 2" pitchFamily="34" charset="0"/>
-                <a:ea typeface="Exo 2" pitchFamily="34" charset="-122"/>
-                <a:cs typeface="Exo 2" pitchFamily="34" charset="-120"/>
-              </a:rPr>
-              <a:t>LinkedIn total also appears as 586 in an earlier count; export ends 28 Aug.</a:t>
-            </a:r>
-            <a:endParaRPr lang="en-US" sz="900" dirty="0"/>
-          </a:p>
-        </p:txBody>
-      </p:sp>
-    </p:spTree>
-  </p:cSld>
-  <p:clrMapOvr>
-    <a:masterClrMapping/>
-  </p:clrMapOvr>
-</p:sld>
-</file>
-
-<file path=ppt/slides/slide9.xml><?xml version="1.0" encoding="utf-8"?>
-<p:sld xmlns:a="http://schemas.openxmlformats.org/drawingml/2006/main" xmlns:r="http://schemas.openxmlformats.org/officeDocument/2006/relationships" xmlns:p="http://schemas.openxmlformats.org/presentationml/2006/main">
-  <p:cSld name="Slide 9">
-    <p:bg>
-      <p:bgPr>
-        <a:solidFill>
-          <a:srgbClr val="FFFFFF"/>
-        </a:solidFill>
-      </p:bgPr>
-    </p:bg>
-    <p:spTree>
-      <p:nvGrpSpPr>
-        <p:cNvPr id="1" name=""/>
-        <p:cNvGrpSpPr/>
-        <p:nvPr/>
-      </p:nvGrpSpPr>
-      <p:grpSpPr>
-        <a:xfrm>
-          <a:off x="0" y="0"/>
-          <a:ext cx="0" cy="0"/>
-          <a:chOff x="0" y="0"/>
-          <a:chExt cx="0" cy="0"/>
-        </a:xfrm>
-      </p:grpSpPr>
-      <p:pic>
-        <p:nvPicPr>
-          <p:cNvPr id="2" name="Image 0" descr="/home/user/HatemIsa_202508993_IT9002_NLP_Project/emyaa-ceo-deck/working/charts/board_header.png">    </p:cNvPr>
-          <p:cNvPicPr>
-            <a:picLocks noChangeAspect="1"/>
-          </p:cNvPicPr>
-          <p:nvPr/>
-        </p:nvPicPr>
-        <p:blipFill>
-          <a:blip r:embed="rId1"/>
-          <a:stretch>
-            <a:fillRect/>
-          </a:stretch>
-        </p:blipFill>
-        <p:spPr>
-          <a:xfrm>
-            <a:off x="0" y="0"/>
-            <a:ext cx="12191695" cy="1298448"/>
-          </a:xfrm>
-          <a:prstGeom prst="rect">
-            <a:avLst/>
-          </a:prstGeom>
-        </p:spPr>
-      </p:pic>
-      <p:sp>
-        <p:nvSpPr>
-          <p:cNvPr id="3" name="Shape 0"/>
-          <p:cNvSpPr/>
-          <p:nvPr/>
-        </p:nvSpPr>
-        <p:spPr>
-          <a:xfrm>
-            <a:off x="0" y="1298448"/>
-            <a:ext cx="12191695" cy="24689"/>
-          </a:xfrm>
-          <a:prstGeom prst="rect">
-            <a:avLst/>
-          </a:prstGeom>
-          <a:solidFill>
-            <a:srgbClr val="D4AF37"/>
-          </a:solidFill>
-          <a:ln w="12700">
-            <a:solidFill>
-              <a:srgbClr val="D4AF37"/>
-            </a:solidFill>
-            <a:prstDash val="solid"/>
-          </a:ln>
-        </p:spPr>
-      </p:sp>
-      <p:sp>
-        <p:nvSpPr>
-          <p:cNvPr id="4" name="Text 1"/>
-          <p:cNvSpPr txBox="1"/>
-          <p:nvPr/>
-        </p:nvSpPr>
-        <p:spPr>
-          <a:xfrm>
-            <a:off x="566928" y="274320"/>
-            <a:ext cx="9144000" cy="182880"/>
-          </a:xfrm>
-          <a:prstGeom prst="rect">
-            <a:avLst/>
-          </a:prstGeom>
-          <a:noFill/>
-          <a:ln/>
-        </p:spPr>
-        <p:txBody>
-          <a:bodyPr wrap="square" lIns="0" tIns="0" rIns="0" bIns="0" rtlCol="0" anchor="t"/>
-          <a:lstStyle/>
-          <a:p>
-            <a:pPr indent="0" marL="0">
-              <a:buNone/>
-            </a:pPr>
-            <a:r>
-              <a:rPr lang="en-US" sz="900" b="1" spc="200" kern="0" dirty="0">
-                <a:solidFill>
-                  <a:srgbClr val="D4AF37"/>
-                </a:solidFill>
-                <a:latin typeface="Exo 2" pitchFamily="34" charset="0"/>
-                <a:ea typeface="Exo 2" pitchFamily="34" charset="-122"/>
-                <a:cs typeface="Exo 2" pitchFamily="34" charset="-120"/>
-              </a:rPr>
-              <a:t>RISKS AND DATA GAPS</a:t>
-            </a:r>
-            <a:endParaRPr lang="en-US" sz="900" dirty="0"/>
-          </a:p>
-        </p:txBody>
-      </p:sp>
-      <p:sp>
-        <p:nvSpPr>
-          <p:cNvPr id="5" name="Text 2"/>
-          <p:cNvSpPr txBox="1"/>
-          <p:nvPr/>
-        </p:nvSpPr>
-        <p:spPr>
-          <a:xfrm>
-            <a:off x="566928" y="475488"/>
-            <a:ext cx="9326880" cy="749808"/>
-          </a:xfrm>
-          <a:prstGeom prst="rect">
-            <a:avLst/>
-          </a:prstGeom>
-          <a:noFill/>
-          <a:ln/>
-        </p:spPr>
-        <p:txBody>
-          <a:bodyPr wrap="square" lIns="0" tIns="0" rIns="0" bIns="0" rtlCol="0" anchor="ctr"/>
-          <a:lstStyle/>
-          <a:p>
-            <a:pPr indent="0" marL="0">
-              <a:buNone/>
-            </a:pPr>
-            <a:r>
-              <a:rPr lang="en-US" sz="2000" b="1" dirty="0">
-                <a:solidFill>
-                  <a:srgbClr val="FFFFFF"/>
-                </a:solidFill>
-                <a:latin typeface="Exo 2" pitchFamily="34" charset="0"/>
-                <a:ea typeface="Exo 2" pitchFamily="34" charset="-122"/>
-                <a:cs typeface="Exo 2" pitchFamily="34" charset="-120"/>
-              </a:rPr>
-              <a:t>Seven open items; three block the 20 October paid-media decision</a:t>
-            </a:r>
-            <a:endParaRPr lang="en-US" sz="2000" dirty="0"/>
-          </a:p>
-        </p:txBody>
-      </p:sp>
-      <p:pic>
-        <p:nvPicPr>
-          <p:cNvPr id="6" name="Image 1" descr="/home/user/HatemIsa_202508993_IT9002_NLP_Project/emyaa-ceo-deck/working/charts/ajyad_white.png">    </p:cNvPr>
-          <p:cNvPicPr>
-            <a:picLocks noChangeAspect="1"/>
-          </p:cNvPicPr>
-          <p:nvPr/>
-        </p:nvPicPr>
-        <p:blipFill>
-          <a:blip r:embed="rId2"/>
-          <a:stretch>
-            <a:fillRect/>
-          </a:stretch>
-        </p:blipFill>
-        <p:spPr>
-          <a:xfrm>
-            <a:off x="10305288" y="457200"/>
-            <a:ext cx="1325880" cy="384048"/>
-          </a:xfrm>
-          <a:prstGeom prst="rect">
-            <a:avLst/>
-          </a:prstGeom>
-        </p:spPr>
-      </p:pic>
-      <p:sp>
-        <p:nvSpPr>
-          <p:cNvPr id="7" name="Shape 3"/>
-          <p:cNvSpPr/>
-          <p:nvPr/>
-        </p:nvSpPr>
-        <p:spPr>
-          <a:xfrm>
-            <a:off x="566928" y="5669280"/>
-            <a:ext cx="11064240" cy="457200"/>
-          </a:xfrm>
-          <a:prstGeom prst="rect">
-            <a:avLst/>
-          </a:prstGeom>
-          <a:solidFill>
-            <a:srgbClr val="E3E8F2"/>
-          </a:solidFill>
-          <a:ln w="12700">
-            <a:solidFill>
-              <a:srgbClr val="E3E8F2"/>
-            </a:solidFill>
-            <a:prstDash val="solid"/>
-          </a:ln>
-        </p:spPr>
-      </p:sp>
-      <p:sp>
-        <p:nvSpPr>
-          <p:cNvPr id="8" name="Shape 4"/>
-          <p:cNvSpPr/>
-          <p:nvPr/>
-        </p:nvSpPr>
-        <p:spPr>
-          <a:xfrm>
-            <a:off x="566928" y="5669280"/>
-            <a:ext cx="45720" cy="457200"/>
-          </a:xfrm>
-          <a:prstGeom prst="rect">
-            <a:avLst/>
-          </a:prstGeom>
-          <a:solidFill>
-            <a:srgbClr val="D4AF37"/>
-          </a:solidFill>
-          <a:ln w="12700">
-            <a:solidFill>
-              <a:srgbClr val="D4AF37"/>
-            </a:solidFill>
-            <a:prstDash val="solid"/>
-          </a:ln>
-        </p:spPr>
-      </p:sp>
-      <p:sp>
-        <p:nvSpPr>
-          <p:cNvPr id="9" name="Text 5"/>
-          <p:cNvSpPr txBox="1"/>
-          <p:nvPr/>
-        </p:nvSpPr>
-        <p:spPr>
-          <a:xfrm>
-            <a:off x="777240" y="5669280"/>
-            <a:ext cx="10744200" cy="457200"/>
-          </a:xfrm>
-          <a:prstGeom prst="rect">
-            <a:avLst/>
-          </a:prstGeom>
-          <a:noFill/>
-          <a:ln/>
-        </p:spPr>
-        <p:txBody>
-          <a:bodyPr wrap="square" lIns="0" tIns="0" rIns="0" bIns="0" rtlCol="0" anchor="ctr"/>
-          <a:lstStyle/>
-          <a:p>
-            <a:pPr indent="0" marL="0">
-              <a:buNone/>
-            </a:pPr>
-            <a:r>
-              <a:rPr lang="en-US" sz="1150" b="1" dirty="0">
-                <a:solidFill>
-                  <a:srgbClr val="132257"/>
-                </a:solidFill>
-                <a:latin typeface="Exo 2" pitchFamily="34" charset="0"/>
-                <a:ea typeface="Exo 2" pitchFamily="34" charset="-122"/>
-                <a:cs typeface="Exo 2" pitchFamily="34" charset="-120"/>
-              </a:rPr>
-              <a:t>Takeaway   </a:t>
-            </a:r>
-            <a:pPr indent="0" marL="0">
-              <a:buNone/>
-            </a:pPr>
-            <a:r>
-              <a:rPr lang="en-US" sz="1150" dirty="0">
-                <a:solidFill>
-                  <a:srgbClr val="1F2A44"/>
-                </a:solidFill>
-                <a:latin typeface="Exo 2" pitchFamily="34" charset="0"/>
-                <a:ea typeface="Exo 2" pitchFamily="34" charset="-122"/>
-                <a:cs typeface="Exo 2" pitchFamily="34" charset="-120"/>
-              </a:rPr>
-              <a:t>Owners and dates are proposed. Items 1, 4 and 5 must close before 20 October.</a:t>
-            </a:r>
-            <a:endParaRPr lang="en-US" sz="1150" dirty="0"/>
-          </a:p>
-        </p:txBody>
-      </p:sp>
-      <p:sp>
-        <p:nvSpPr>
-          <p:cNvPr id="10" name="Text 6"/>
-          <p:cNvSpPr txBox="1"/>
-          <p:nvPr/>
-        </p:nvSpPr>
-        <p:spPr>
-          <a:xfrm>
-            <a:off x="566928" y="6199632"/>
-            <a:ext cx="9692640" cy="274320"/>
-          </a:xfrm>
-          <a:prstGeom prst="rect">
-            <a:avLst/>
-          </a:prstGeom>
-          <a:noFill/>
-          <a:ln/>
-        </p:spPr>
-        <p:txBody>
-          <a:bodyPr wrap="square" lIns="0" tIns="0" rIns="0" bIns="0" rtlCol="0" anchor="t"/>
-          <a:lstStyle/>
-          <a:p>
-            <a:pPr indent="0" marL="0">
-              <a:buNone/>
-            </a:pPr>
-            <a:r>
-              <a:rPr lang="en-US" sz="800" dirty="0">
-                <a:solidFill>
-                  <a:srgbClr val="7A849C"/>
-                </a:solidFill>
-                <a:latin typeface="Exo 2" pitchFamily="34" charset="0"/>
-                <a:ea typeface="Exo 2" pitchFamily="34" charset="-122"/>
-                <a:cs typeface="Exo 2" pitchFamily="34" charset="-120"/>
-              </a:rPr>
-              <a:t>Source: Audit of the previous drafts against GA4 exports, daily dashboards, LinkedIn export, Board update and campaign files. See Percentage-Audit.csv and Source-Traceability.csv.</a:t>
-            </a:r>
-            <a:endParaRPr lang="en-US" sz="800" dirty="0"/>
-          </a:p>
-        </p:txBody>
-      </p:sp>
-      <p:sp>
-        <p:nvSpPr>
-          <p:cNvPr id="11" name="Text 7"/>
-          <p:cNvSpPr txBox="1"/>
-          <p:nvPr/>
-        </p:nvSpPr>
-        <p:spPr>
-          <a:xfrm>
-            <a:off x="566928" y="6510528"/>
-            <a:ext cx="5486400" cy="201168"/>
-          </a:xfrm>
-          <a:prstGeom prst="rect">
-            <a:avLst/>
-          </a:prstGeom>
-          <a:noFill/>
-          <a:ln/>
-        </p:spPr>
-        <p:txBody>
-          <a:bodyPr wrap="square" lIns="0" tIns="0" rIns="0" bIns="0" rtlCol="0" anchor="t"/>
-          <a:lstStyle/>
-          <a:p>
-            <a:pPr indent="0" marL="0">
-              <a:buNone/>
-            </a:pPr>
-            <a:r>
-              <a:rPr lang="en-US" sz="800" dirty="0">
-                <a:solidFill>
-                  <a:srgbClr val="8A93A8"/>
-                </a:solidFill>
-                <a:latin typeface="Exo 2" pitchFamily="34" charset="0"/>
-                <a:ea typeface="Exo 2" pitchFamily="34" charset="-122"/>
-                <a:cs typeface="Exo 2" pitchFamily="34" charset="-120"/>
-              </a:rPr>
-              <a:t>eMYAA Trading Platform  |  CEO Marketing Update</a:t>
-            </a:r>
-            <a:endParaRPr lang="en-US" sz="800" dirty="0"/>
-          </a:p>
-        </p:txBody>
-      </p:sp>
-      <p:sp>
-        <p:nvSpPr>
-          <p:cNvPr id="12" name="Text 8"/>
-          <p:cNvSpPr txBox="1"/>
-          <p:nvPr/>
-        </p:nvSpPr>
-        <p:spPr>
-          <a:xfrm>
-            <a:off x="9802368" y="6510528"/>
-            <a:ext cx="457200" cy="201168"/>
-          </a:xfrm>
-          <a:prstGeom prst="rect">
-            <a:avLst/>
-          </a:prstGeom>
-          <a:noFill/>
-          <a:ln/>
-        </p:spPr>
-        <p:txBody>
-          <a:bodyPr wrap="square" lIns="0" tIns="0" rIns="0" bIns="0" rtlCol="0" anchor="t"/>
-          <a:lstStyle/>
-          <a:p>
-            <a:pPr algn="r" indent="0" marL="0">
-              <a:buNone/>
-            </a:pPr>
-            <a:r>
-              <a:rPr lang="en-US" sz="800" dirty="0">
-                <a:solidFill>
-                  <a:srgbClr val="8A93A8"/>
-                </a:solidFill>
-                <a:latin typeface="Exo 2" pitchFamily="34" charset="0"/>
-                <a:ea typeface="Exo 2" pitchFamily="34" charset="-122"/>
-                <a:cs typeface="Exo 2" pitchFamily="34" charset="-120"/>
-              </a:rPr>
-              <a:t>9</a:t>
-            </a:r>
-            <a:endParaRPr lang="en-US" sz="800" dirty="0"/>
-          </a:p>
-        </p:txBody>
-      </p:sp>
-      <p:pic>
-        <p:nvPicPr>
-          <p:cNvPr id="13" name="Image 2" descr="/home/user/HatemIsa_202508993_IT9002_NLP_Project/emyaa-ceo-deck/working/charts/emyaa_navy.png">    </p:cNvPr>
-          <p:cNvPicPr>
-            <a:picLocks noChangeAspect="1"/>
-          </p:cNvPicPr>
-          <p:nvPr/>
-        </p:nvPicPr>
-        <p:blipFill>
-          <a:blip r:embed="rId3"/>
-          <a:stretch>
-            <a:fillRect/>
-          </a:stretch>
-        </p:blipFill>
-        <p:spPr>
-          <a:xfrm>
-            <a:off x="10607040" y="6336792"/>
-            <a:ext cx="1024128" cy="365760"/>
-          </a:xfrm>
-          <a:prstGeom prst="rect">
-            <a:avLst/>
-          </a:prstGeom>
-        </p:spPr>
-      </p:pic>
-      <p:graphicFrame>
-        <p:nvGraphicFramePr>
-          <p:cNvPr id="10" name="Table 0"/>
-          <p:cNvGraphicFramePr>
-            <a:graphicFrameLocks noGrp="1"/>
-          </p:cNvGraphicFramePr>
-          <p:nvPr>
-            <p:extLst>
-              <p:ext uri="{D42A27DB-BD31-4B8C-83A1-F6EECF244321}">
-                <p14:modId xmlns:p14="http://schemas.microsoft.com/office/powerpoint/2010/main" val="1579011935"/>
-              </p:ext>
-            </p:extLst>
-          </p:nvPr>
-        </p:nvGraphicFramePr>
-        <p:xfrm>
-          <a:off x="566928" y="1536192"/>
-          <a:ext cx="11064240" cy="914400"/>
-        </p:xfrm>
-        <a:graphic>
-          <a:graphicData uri="http://schemas.openxmlformats.org/drawingml/2006/table">
-            <a:tbl>
-              <a:tblPr/>
-              <a:tblGrid>
-                <a:gridCol w="365760"/>
-                <a:gridCol w="4160520"/>
-                <a:gridCol w="2514600"/>
-                <a:gridCol w="1554480"/>
-                <a:gridCol w="960120"/>
-                <a:gridCol w="1508760"/>
-              </a:tblGrid>
-              <a:tr h="475488">
-                <a:tc>
-                  <a:txBody>
-                    <a:bodyPr/>
-                    <a:lstStyle/>
-                    <a:p>
-                      <a:pPr indent="0" marL="0">
-                        <a:buNone/>
-                      </a:pPr>
-                      <a:r>
-                        <a:rPr lang="en-US" sz="1100" b="1" dirty="0">
-                          <a:solidFill>
-                            <a:srgbClr val="FFFFFF"/>
-                          </a:solidFill>
-                          <a:latin typeface="Exo 2" pitchFamily="34" charset="0"/>
-                          <a:ea typeface="Exo 2" pitchFamily="34" charset="-122"/>
-                          <a:cs typeface="Exo 2" pitchFamily="34" charset="-120"/>
-                        </a:rPr>
-                        <a:t>#</a:t>
-                      </a:r>
                       <a:endParaRPr lang="en-US" sz="1100" dirty="0">
                         <a:latin typeface="Exo 2" charset="0"/>
                         <a:ea typeface="Exo 2" charset="0"/>
@@ -15974,51 +12600,7 @@
                           <a:ea typeface="Exo 2" pitchFamily="34" charset="-122"/>
                           <a:cs typeface="Exo 2" pitchFamily="34" charset="-120"/>
                         </a:rPr>
-                        <a:t>Issue</a:t>
-                      </a:r>
-                      <a:endParaRPr lang="en-US" sz="1100" dirty="0">
-                        <a:latin typeface="Exo 2" charset="0"/>
-                        <a:ea typeface="Exo 2" charset="0"/>
-                        <a:cs typeface="Exo 2" charset="0"/>
-                      </a:endParaRPr>
-                    </a:p>
-                  </a:txBody>
-                  <a:tcPr marL="63500" marR="63500" marT="25400" marB="25400" anchor="ctr">
-                    <a:lnL w="0" cap="flat" cmpd="sng" algn="ctr">
-                      <a:noFill/>
-                    </a:lnL>
-                    <a:lnR w="0" cap="flat" cmpd="sng" algn="ctr">
-                      <a:noFill/>
-                    </a:lnR>
-                    <a:lnT w="0" cap="flat" cmpd="sng" algn="ctr">
-                      <a:noFill/>
-                    </a:lnT>
-                    <a:lnB w="0" cap="flat" cmpd="sng" algn="ctr">
-                      <a:noFill/>
-                    </a:lnB>
-                    <a:solidFill>
-                      <a:srgbClr val="132257"/>
-                    </a:solidFill>
-                  </a:tcPr>
-                </a:tc>
-                <a:tc>
-                  <a:txBody>
-                    <a:bodyPr/>
-                    <a:lstStyle/>
-                    <a:p>
-                      <a:pPr indent="0" marL="0">
-                        <a:buNone/>
-                      </a:pPr>
-                      <a:r>
-                        <a:rPr lang="en-US" sz="1100" b="1" dirty="0">
-                          <a:solidFill>
-                            <a:srgbClr val="FFFFFF"/>
-                          </a:solidFill>
-                          <a:latin typeface="Exo 2" pitchFamily="34" charset="0"/>
-                          <a:ea typeface="Exo 2" pitchFamily="34" charset="-122"/>
-                          <a:cs typeface="Exo 2" pitchFamily="34" charset="-120"/>
-                        </a:rPr>
-                        <a:t>Impact</a:t>
+                        <a:t>Decision</a:t>
                       </a:r>
                       <a:endParaRPr lang="en-US" sz="1100" dirty="0">
                         <a:latin typeface="Exo 2" charset="0"/>
@@ -16106,7 +12688,7 @@
                           <a:ea typeface="Exo 2" pitchFamily="34" charset="-122"/>
                           <a:cs typeface="Exo 2" pitchFamily="34" charset="-120"/>
                         </a:rPr>
-                        <a:t>Required by</a:t>
+                        <a:t>By</a:t>
                       </a:r>
                       <a:endParaRPr lang="en-US" sz="1100" dirty="0">
                         <a:latin typeface="Exo 2" charset="0"/>
@@ -16133,6 +12715,8 @@
                     </a:solidFill>
                   </a:tcPr>
                 </a:tc>
+              </a:tr>
+              <a:tr h="713232">
                 <a:tc>
                   <a:txBody>
                     <a:bodyPr/>
@@ -16142,55 +12726,9 @@
                         <a:buNone/>
                       </a:pPr>
                       <a:r>
-                        <a:rPr lang="en-US" sz="1100" b="1" dirty="0">
+                        <a:rPr lang="en-US" sz="1400" b="1" dirty="0">
                           <a:solidFill>
-                            <a:srgbClr val="FFFFFF"/>
-                          </a:solidFill>
-                          <a:latin typeface="Exo 2" pitchFamily="34" charset="0"/>
-                          <a:ea typeface="Exo 2" pitchFamily="34" charset="-122"/>
-                          <a:cs typeface="Exo 2" pitchFamily="34" charset="-120"/>
-                        </a:rPr>
-                        <a:t>Status</a:t>
-                      </a:r>
-                      <a:endParaRPr lang="en-US" sz="1100" dirty="0">
-                        <a:latin typeface="Exo 2" charset="0"/>
-                        <a:ea typeface="Exo 2" charset="0"/>
-                        <a:cs typeface="Exo 2" charset="0"/>
-                      </a:endParaRPr>
-                    </a:p>
-                  </a:txBody>
-                  <a:tcPr marL="63500" marR="63500" marT="25400" marB="25400" anchor="ctr">
-                    <a:lnL w="0" cap="flat" cmpd="sng" algn="ctr">
-                      <a:noFill/>
-                    </a:lnL>
-                    <a:lnR w="0" cap="flat" cmpd="sng" algn="ctr">
-                      <a:noFill/>
-                    </a:lnR>
-                    <a:lnT w="0" cap="flat" cmpd="sng" algn="ctr">
-                      <a:noFill/>
-                    </a:lnT>
-                    <a:lnB w="0" cap="flat" cmpd="sng" algn="ctr">
-                      <a:noFill/>
-                    </a:lnB>
-                    <a:solidFill>
-                      <a:srgbClr val="132257"/>
-                    </a:solidFill>
-                  </a:tcPr>
-                </a:tc>
-              </a:tr>
-              <a:tr h="475488">
-                <a:tc>
-                  <a:txBody>
-                    <a:bodyPr/>
-                    <a:lstStyle/>
-                    <a:p>
-                      <a:pPr indent="0" marL="0">
-                        <a:buNone/>
-                      </a:pPr>
-                      <a:r>
-                        <a:rPr lang="en-US" sz="1100" dirty="0">
-                          <a:solidFill>
-                            <a:srgbClr val="1F2A44"/>
+                            <a:srgbClr val="D4AF37"/>
                           </a:solidFill>
                           <a:latin typeface="Exo 2" pitchFamily="34" charset="0"/>
                           <a:ea typeface="Exo 2" pitchFamily="34" charset="-122"/>
@@ -16198,7 +12736,7 @@
                         </a:rPr>
                         <a:t>1</a:t>
                       </a:r>
-                      <a:endParaRPr lang="en-US" sz="1100" dirty="0">
+                      <a:endParaRPr lang="en-US" sz="1400" dirty="0">
                         <a:latin typeface="Exo 2" charset="0"/>
                         <a:ea typeface="Exo 2" charset="0"/>
                         <a:cs typeface="Exo 2" charset="0"/>
@@ -16243,7 +12781,7 @@
                           <a:ea typeface="Exo 2" pitchFamily="34" charset="-122"/>
                           <a:cs typeface="Exo 2" pitchFamily="34" charset="-120"/>
                         </a:rPr>
-                        <a:t>Deposits: $12,206 (Board, verbal) vs $10,029.69 on dashboard, relabelled 'AUM' from 20 Sep</a:t>
+                        <a:t>Go or hold on paid media, judged on cost per account vs Board CAC targets</a:t>
                       </a:r>
                       <a:endParaRPr lang="en-US" sz="1100" dirty="0">
                         <a:latin typeface="Exo 2" charset="0"/>
@@ -16290,7 +12828,7 @@
                           <a:ea typeface="Exo 2" pitchFamily="34" charset="-122"/>
                           <a:cs typeface="Exo 2" pitchFamily="34" charset="-120"/>
                         </a:rPr>
-                        <a:t>Deposit story rests on an unsourced figure</a:t>
+                        <a:t>Marketing with Ignite</a:t>
                       </a:r>
                       <a:endParaRPr lang="en-US" sz="1100" dirty="0">
                         <a:latin typeface="Exo 2" charset="0"/>
@@ -16337,7 +12875,530 @@
                           <a:ea typeface="Exo 2" pitchFamily="34" charset="-122"/>
                           <a:cs typeface="Exo 2" pitchFamily="34" charset="-120"/>
                         </a:rPr>
-                        <a:t>Malek</a:t>
+                        <a:t>20 Oct</a:t>
+                      </a:r>
+                      <a:endParaRPr lang="en-US" sz="1100" dirty="0">
+                        <a:latin typeface="Exo 2" charset="0"/>
+                        <a:ea typeface="Exo 2" charset="0"/>
+                        <a:cs typeface="Exo 2" charset="0"/>
+                      </a:endParaRPr>
+                    </a:p>
+                  </a:txBody>
+                  <a:tcPr marL="63500" marR="63500" marT="25400" marB="25400" anchor="ctr">
+                    <a:lnL w="0" cap="flat" cmpd="sng" algn="ctr">
+                      <a:noFill/>
+                    </a:lnL>
+                    <a:lnR w="0" cap="flat" cmpd="sng" algn="ctr">
+                      <a:noFill/>
+                    </a:lnR>
+                    <a:lnT w="0" cap="flat" cmpd="sng" algn="ctr">
+                      <a:noFill/>
+                    </a:lnT>
+                    <a:lnB w="9525" cap="flat" cmpd="sng" algn="ctr">
+                      <a:solidFill>
+                        <a:srgbClr val="D9DFEA"/>
+                      </a:solidFill>
+                      <a:prstDash val="solid"/>
+                      <a:round/>
+                      <a:headEnd type="none" w="med" len="med"/>
+                      <a:tailEnd type="none" w="med" len="med"/>
+                    </a:lnB>
+                  </a:tcPr>
+                </a:tc>
+              </a:tr>
+              <a:tr h="713232">
+                <a:tc>
+                  <a:txBody>
+                    <a:bodyPr/>
+                    <a:lstStyle/>
+                    <a:p>
+                      <a:pPr indent="0" marL="0">
+                        <a:buNone/>
+                      </a:pPr>
+                      <a:r>
+                        <a:rPr lang="en-US" sz="1400" b="1" dirty="0">
+                          <a:solidFill>
+                            <a:srgbClr val="D4AF37"/>
+                          </a:solidFill>
+                          <a:latin typeface="Exo 2" pitchFamily="34" charset="0"/>
+                          <a:ea typeface="Exo 2" pitchFamily="34" charset="-122"/>
+                          <a:cs typeface="Exo 2" pitchFamily="34" charset="-120"/>
+                        </a:rPr>
+                        <a:t>2</a:t>
+                      </a:r>
+                      <a:endParaRPr lang="en-US" sz="1400" dirty="0">
+                        <a:latin typeface="Exo 2" charset="0"/>
+                        <a:ea typeface="Exo 2" charset="0"/>
+                        <a:cs typeface="Exo 2" charset="0"/>
+                      </a:endParaRPr>
+                    </a:p>
+                  </a:txBody>
+                  <a:tcPr marL="63500" marR="63500" marT="25400" marB="25400" anchor="ctr">
+                    <a:lnL w="0" cap="flat" cmpd="sng" algn="ctr">
+                      <a:noFill/>
+                    </a:lnL>
+                    <a:lnR w="0" cap="flat" cmpd="sng" algn="ctr">
+                      <a:noFill/>
+                    </a:lnR>
+                    <a:lnT w="0" cap="flat" cmpd="sng" algn="ctr">
+                      <a:noFill/>
+                    </a:lnT>
+                    <a:lnB w="9525" cap="flat" cmpd="sng" algn="ctr">
+                      <a:solidFill>
+                        <a:srgbClr val="D9DFEA"/>
+                      </a:solidFill>
+                      <a:prstDash val="solid"/>
+                      <a:round/>
+                      <a:headEnd type="none" w="med" len="med"/>
+                      <a:tailEnd type="none" w="med" len="med"/>
+                    </a:lnB>
+                  </a:tcPr>
+                </a:tc>
+                <a:tc>
+                  <a:txBody>
+                    <a:bodyPr/>
+                    <a:lstStyle/>
+                    <a:p>
+                      <a:pPr indent="0" marL="0">
+                        <a:buNone/>
+                      </a:pPr>
+                      <a:r>
+                        <a:rPr lang="en-US" sz="1100" dirty="0">
+                          <a:solidFill>
+                            <a:srgbClr val="1F2A44"/>
+                          </a:solidFill>
+                          <a:latin typeface="Exo 2" pitchFamily="34" charset="0"/>
+                          <a:ea typeface="Exo 2" pitchFamily="34" charset="-122"/>
+                          <a:cs typeface="Exo 2" pitchFamily="34" charset="-120"/>
+                        </a:rPr>
+                        <a:t>Keep Arabic and English ads live until the key event is defined and costed</a:t>
+                      </a:r>
+                      <a:endParaRPr lang="en-US" sz="1100" dirty="0">
+                        <a:latin typeface="Exo 2" charset="0"/>
+                        <a:ea typeface="Exo 2" charset="0"/>
+                        <a:cs typeface="Exo 2" charset="0"/>
+                      </a:endParaRPr>
+                    </a:p>
+                  </a:txBody>
+                  <a:tcPr marL="63500" marR="63500" marT="25400" marB="25400" anchor="ctr">
+                    <a:lnL w="0" cap="flat" cmpd="sng" algn="ctr">
+                      <a:noFill/>
+                    </a:lnL>
+                    <a:lnR w="0" cap="flat" cmpd="sng" algn="ctr">
+                      <a:noFill/>
+                    </a:lnR>
+                    <a:lnT w="0" cap="flat" cmpd="sng" algn="ctr">
+                      <a:noFill/>
+                    </a:lnT>
+                    <a:lnB w="9525" cap="flat" cmpd="sng" algn="ctr">
+                      <a:solidFill>
+                        <a:srgbClr val="D9DFEA"/>
+                      </a:solidFill>
+                      <a:prstDash val="solid"/>
+                      <a:round/>
+                      <a:headEnd type="none" w="med" len="med"/>
+                      <a:tailEnd type="none" w="med" len="med"/>
+                    </a:lnB>
+                  </a:tcPr>
+                </a:tc>
+                <a:tc>
+                  <a:txBody>
+                    <a:bodyPr/>
+                    <a:lstStyle/>
+                    <a:p>
+                      <a:pPr indent="0" marL="0">
+                        <a:buNone/>
+                      </a:pPr>
+                      <a:r>
+                        <a:rPr lang="en-US" sz="1100" dirty="0">
+                          <a:solidFill>
+                            <a:srgbClr val="1F2A44"/>
+                          </a:solidFill>
+                          <a:latin typeface="Exo 2" pitchFamily="34" charset="0"/>
+                          <a:ea typeface="Exo 2" pitchFamily="34" charset="-122"/>
+                          <a:cs typeface="Exo 2" pitchFamily="34" charset="-120"/>
+                        </a:rPr>
+                        <a:t>Marketing</a:t>
+                      </a:r>
+                      <a:endParaRPr lang="en-US" sz="1100" dirty="0">
+                        <a:latin typeface="Exo 2" charset="0"/>
+                        <a:ea typeface="Exo 2" charset="0"/>
+                        <a:cs typeface="Exo 2" charset="0"/>
+                      </a:endParaRPr>
+                    </a:p>
+                  </a:txBody>
+                  <a:tcPr marL="63500" marR="63500" marT="25400" marB="25400" anchor="ctr">
+                    <a:lnL w="0" cap="flat" cmpd="sng" algn="ctr">
+                      <a:noFill/>
+                    </a:lnL>
+                    <a:lnR w="0" cap="flat" cmpd="sng" algn="ctr">
+                      <a:noFill/>
+                    </a:lnR>
+                    <a:lnT w="0" cap="flat" cmpd="sng" algn="ctr">
+                      <a:noFill/>
+                    </a:lnT>
+                    <a:lnB w="9525" cap="flat" cmpd="sng" algn="ctr">
+                      <a:solidFill>
+                        <a:srgbClr val="D9DFEA"/>
+                      </a:solidFill>
+                      <a:prstDash val="solid"/>
+                      <a:round/>
+                      <a:headEnd type="none" w="med" len="med"/>
+                      <a:tailEnd type="none" w="med" len="med"/>
+                    </a:lnB>
+                  </a:tcPr>
+                </a:tc>
+                <a:tc>
+                  <a:txBody>
+                    <a:bodyPr/>
+                    <a:lstStyle/>
+                    <a:p>
+                      <a:pPr indent="0" marL="0">
+                        <a:buNone/>
+                      </a:pPr>
+                      <a:r>
+                        <a:rPr lang="en-US" sz="1100" dirty="0">
+                          <a:solidFill>
+                            <a:srgbClr val="1F2A44"/>
+                          </a:solidFill>
+                          <a:latin typeface="Exo 2" pitchFamily="34" charset="0"/>
+                          <a:ea typeface="Exo 2" pitchFamily="34" charset="-122"/>
+                          <a:cs typeface="Exo 2" pitchFamily="34" charset="-120"/>
+                        </a:rPr>
+                        <a:t>10 Oct</a:t>
+                      </a:r>
+                      <a:endParaRPr lang="en-US" sz="1100" dirty="0">
+                        <a:latin typeface="Exo 2" charset="0"/>
+                        <a:ea typeface="Exo 2" charset="0"/>
+                        <a:cs typeface="Exo 2" charset="0"/>
+                      </a:endParaRPr>
+                    </a:p>
+                  </a:txBody>
+                  <a:tcPr marL="63500" marR="63500" marT="25400" marB="25400" anchor="ctr">
+                    <a:lnL w="0" cap="flat" cmpd="sng" algn="ctr">
+                      <a:noFill/>
+                    </a:lnL>
+                    <a:lnR w="0" cap="flat" cmpd="sng" algn="ctr">
+                      <a:noFill/>
+                    </a:lnR>
+                    <a:lnT w="0" cap="flat" cmpd="sng" algn="ctr">
+                      <a:noFill/>
+                    </a:lnT>
+                    <a:lnB w="9525" cap="flat" cmpd="sng" algn="ctr">
+                      <a:solidFill>
+                        <a:srgbClr val="D9DFEA"/>
+                      </a:solidFill>
+                      <a:prstDash val="solid"/>
+                      <a:round/>
+                      <a:headEnd type="none" w="med" len="med"/>
+                      <a:tailEnd type="none" w="med" len="med"/>
+                    </a:lnB>
+                  </a:tcPr>
+                </a:tc>
+              </a:tr>
+              <a:tr h="713232">
+                <a:tc>
+                  <a:txBody>
+                    <a:bodyPr/>
+                    <a:lstStyle/>
+                    <a:p>
+                      <a:pPr indent="0" marL="0">
+                        <a:buNone/>
+                      </a:pPr>
+                      <a:r>
+                        <a:rPr lang="en-US" sz="1400" b="1" dirty="0">
+                          <a:solidFill>
+                            <a:srgbClr val="D4AF37"/>
+                          </a:solidFill>
+                          <a:latin typeface="Exo 2" pitchFamily="34" charset="0"/>
+                          <a:ea typeface="Exo 2" pitchFamily="34" charset="-122"/>
+                          <a:cs typeface="Exo 2" pitchFamily="34" charset="-120"/>
+                        </a:rPr>
+                        <a:t>3</a:t>
+                      </a:r>
+                      <a:endParaRPr lang="en-US" sz="1400" dirty="0">
+                        <a:latin typeface="Exo 2" charset="0"/>
+                        <a:ea typeface="Exo 2" charset="0"/>
+                        <a:cs typeface="Exo 2" charset="0"/>
+                      </a:endParaRPr>
+                    </a:p>
+                  </a:txBody>
+                  <a:tcPr marL="63500" marR="63500" marT="25400" marB="25400" anchor="ctr">
+                    <a:lnL w="0" cap="flat" cmpd="sng" algn="ctr">
+                      <a:noFill/>
+                    </a:lnL>
+                    <a:lnR w="0" cap="flat" cmpd="sng" algn="ctr">
+                      <a:noFill/>
+                    </a:lnR>
+                    <a:lnT w="0" cap="flat" cmpd="sng" algn="ctr">
+                      <a:noFill/>
+                    </a:lnT>
+                    <a:lnB w="9525" cap="flat" cmpd="sng" algn="ctr">
+                      <a:solidFill>
+                        <a:srgbClr val="D9DFEA"/>
+                      </a:solidFill>
+                      <a:prstDash val="solid"/>
+                      <a:round/>
+                      <a:headEnd type="none" w="med" len="med"/>
+                      <a:tailEnd type="none" w="med" len="med"/>
+                    </a:lnB>
+                  </a:tcPr>
+                </a:tc>
+                <a:tc>
+                  <a:txBody>
+                    <a:bodyPr/>
+                    <a:lstStyle/>
+                    <a:p>
+                      <a:pPr indent="0" marL="0">
+                        <a:buNone/>
+                      </a:pPr>
+                      <a:r>
+                        <a:rPr lang="en-US" sz="1100" dirty="0">
+                          <a:solidFill>
+                            <a:srgbClr val="1F2A44"/>
+                          </a:solidFill>
+                          <a:latin typeface="Exo 2" pitchFamily="34" charset="0"/>
+                          <a:ea typeface="Exo 2" pitchFamily="34" charset="-122"/>
+                          <a:cs typeface="Exo 2" pitchFamily="34" charset="-120"/>
+                        </a:rPr>
+                        <a:t>Follow up every new download that has not completed KYC</a:t>
+                      </a:r>
+                      <a:endParaRPr lang="en-US" sz="1100" dirty="0">
+                        <a:latin typeface="Exo 2" charset="0"/>
+                        <a:ea typeface="Exo 2" charset="0"/>
+                        <a:cs typeface="Exo 2" charset="0"/>
+                      </a:endParaRPr>
+                    </a:p>
+                  </a:txBody>
+                  <a:tcPr marL="63500" marR="63500" marT="25400" marB="25400" anchor="ctr">
+                    <a:lnL w="0" cap="flat" cmpd="sng" algn="ctr">
+                      <a:noFill/>
+                    </a:lnL>
+                    <a:lnR w="0" cap="flat" cmpd="sng" algn="ctr">
+                      <a:noFill/>
+                    </a:lnR>
+                    <a:lnT w="0" cap="flat" cmpd="sng" algn="ctr">
+                      <a:noFill/>
+                    </a:lnT>
+                    <a:lnB w="9525" cap="flat" cmpd="sng" algn="ctr">
+                      <a:solidFill>
+                        <a:srgbClr val="D9DFEA"/>
+                      </a:solidFill>
+                      <a:prstDash val="solid"/>
+                      <a:round/>
+                      <a:headEnd type="none" w="med" len="med"/>
+                      <a:tailEnd type="none" w="med" len="med"/>
+                    </a:lnB>
+                  </a:tcPr>
+                </a:tc>
+                <a:tc>
+                  <a:txBody>
+                    <a:bodyPr/>
+                    <a:lstStyle/>
+                    <a:p>
+                      <a:pPr indent="0" marL="0">
+                        <a:buNone/>
+                      </a:pPr>
+                      <a:r>
+                        <a:rPr lang="en-US" sz="1100" dirty="0">
+                          <a:solidFill>
+                            <a:srgbClr val="1F2A44"/>
+                          </a:solidFill>
+                          <a:latin typeface="Exo 2" pitchFamily="34" charset="0"/>
+                          <a:ea typeface="Exo 2" pitchFamily="34" charset="-122"/>
+                          <a:cs typeface="Exo 2" pitchFamily="34" charset="-120"/>
+                        </a:rPr>
+                        <a:t>Client Experience</a:t>
+                      </a:r>
+                      <a:endParaRPr lang="en-US" sz="1100" dirty="0">
+                        <a:latin typeface="Exo 2" charset="0"/>
+                        <a:ea typeface="Exo 2" charset="0"/>
+                        <a:cs typeface="Exo 2" charset="0"/>
+                      </a:endParaRPr>
+                    </a:p>
+                  </a:txBody>
+                  <a:tcPr marL="63500" marR="63500" marT="25400" marB="25400" anchor="ctr">
+                    <a:lnL w="0" cap="flat" cmpd="sng" algn="ctr">
+                      <a:noFill/>
+                    </a:lnL>
+                    <a:lnR w="0" cap="flat" cmpd="sng" algn="ctr">
+                      <a:noFill/>
+                    </a:lnR>
+                    <a:lnT w="0" cap="flat" cmpd="sng" algn="ctr">
+                      <a:noFill/>
+                    </a:lnT>
+                    <a:lnB w="9525" cap="flat" cmpd="sng" algn="ctr">
+                      <a:solidFill>
+                        <a:srgbClr val="D9DFEA"/>
+                      </a:solidFill>
+                      <a:prstDash val="solid"/>
+                      <a:round/>
+                      <a:headEnd type="none" w="med" len="med"/>
+                      <a:tailEnd type="none" w="med" len="med"/>
+                    </a:lnB>
+                  </a:tcPr>
+                </a:tc>
+                <a:tc>
+                  <a:txBody>
+                    <a:bodyPr/>
+                    <a:lstStyle/>
+                    <a:p>
+                      <a:pPr indent="0" marL="0">
+                        <a:buNone/>
+                      </a:pPr>
+                      <a:r>
+                        <a:rPr lang="en-US" sz="1100" dirty="0">
+                          <a:solidFill>
+                            <a:srgbClr val="1F2A44"/>
+                          </a:solidFill>
+                          <a:latin typeface="Exo 2" pitchFamily="34" charset="0"/>
+                          <a:ea typeface="Exo 2" pitchFamily="34" charset="-122"/>
+                          <a:cs typeface="Exo 2" pitchFamily="34" charset="-120"/>
+                        </a:rPr>
+                        <a:t>10 Oct</a:t>
+                      </a:r>
+                      <a:endParaRPr lang="en-US" sz="1100" dirty="0">
+                        <a:latin typeface="Exo 2" charset="0"/>
+                        <a:ea typeface="Exo 2" charset="0"/>
+                        <a:cs typeface="Exo 2" charset="0"/>
+                      </a:endParaRPr>
+                    </a:p>
+                  </a:txBody>
+                  <a:tcPr marL="63500" marR="63500" marT="25400" marB="25400" anchor="ctr">
+                    <a:lnL w="0" cap="flat" cmpd="sng" algn="ctr">
+                      <a:noFill/>
+                    </a:lnL>
+                    <a:lnR w="0" cap="flat" cmpd="sng" algn="ctr">
+                      <a:noFill/>
+                    </a:lnR>
+                    <a:lnT w="0" cap="flat" cmpd="sng" algn="ctr">
+                      <a:noFill/>
+                    </a:lnT>
+                    <a:lnB w="9525" cap="flat" cmpd="sng" algn="ctr">
+                      <a:solidFill>
+                        <a:srgbClr val="D9DFEA"/>
+                      </a:solidFill>
+                      <a:prstDash val="solid"/>
+                      <a:round/>
+                      <a:headEnd type="none" w="med" len="med"/>
+                      <a:tailEnd type="none" w="med" len="med"/>
+                    </a:lnB>
+                  </a:tcPr>
+                </a:tc>
+              </a:tr>
+              <a:tr h="713232">
+                <a:tc>
+                  <a:txBody>
+                    <a:bodyPr/>
+                    <a:lstStyle/>
+                    <a:p>
+                      <a:pPr indent="0" marL="0">
+                        <a:buNone/>
+                      </a:pPr>
+                      <a:r>
+                        <a:rPr lang="en-US" sz="1400" b="1" dirty="0">
+                          <a:solidFill>
+                            <a:srgbClr val="D4AF37"/>
+                          </a:solidFill>
+                          <a:latin typeface="Exo 2" pitchFamily="34" charset="0"/>
+                          <a:ea typeface="Exo 2" pitchFamily="34" charset="-122"/>
+                          <a:cs typeface="Exo 2" pitchFamily="34" charset="-120"/>
+                        </a:rPr>
+                        <a:t>4</a:t>
+                      </a:r>
+                      <a:endParaRPr lang="en-US" sz="1400" dirty="0">
+                        <a:latin typeface="Exo 2" charset="0"/>
+                        <a:ea typeface="Exo 2" charset="0"/>
+                        <a:cs typeface="Exo 2" charset="0"/>
+                      </a:endParaRPr>
+                    </a:p>
+                  </a:txBody>
+                  <a:tcPr marL="63500" marR="63500" marT="25400" marB="25400" anchor="ctr">
+                    <a:lnL w="0" cap="flat" cmpd="sng" algn="ctr">
+                      <a:noFill/>
+                    </a:lnL>
+                    <a:lnR w="0" cap="flat" cmpd="sng" algn="ctr">
+                      <a:noFill/>
+                    </a:lnR>
+                    <a:lnT w="0" cap="flat" cmpd="sng" algn="ctr">
+                      <a:noFill/>
+                    </a:lnT>
+                    <a:lnB w="9525" cap="flat" cmpd="sng" algn="ctr">
+                      <a:solidFill>
+                        <a:srgbClr val="D9DFEA"/>
+                      </a:solidFill>
+                      <a:prstDash val="solid"/>
+                      <a:round/>
+                      <a:headEnd type="none" w="med" len="med"/>
+                      <a:tailEnd type="none" w="med" len="med"/>
+                    </a:lnB>
+                  </a:tcPr>
+                </a:tc>
+                <a:tc>
+                  <a:txBody>
+                    <a:bodyPr/>
+                    <a:lstStyle/>
+                    <a:p>
+                      <a:pPr indent="0" marL="0">
+                        <a:buNone/>
+                      </a:pPr>
+                      <a:r>
+                        <a:rPr lang="en-US" sz="1100" dirty="0">
+                          <a:solidFill>
+                            <a:srgbClr val="1F2A44"/>
+                          </a:solidFill>
+                          <a:latin typeface="Exo 2" pitchFamily="34" charset="0"/>
+                          <a:ea typeface="Exo 2" pitchFamily="34" charset="-122"/>
+                          <a:cs typeface="Exo 2" pitchFamily="34" charset="-120"/>
+                        </a:rPr>
+                        <a:t>Monthly data pack: GA4, social, Google and LinkedIn Ads, deposits</a:t>
+                      </a:r>
+                      <a:endParaRPr lang="en-US" sz="1100" dirty="0">
+                        <a:latin typeface="Exo 2" charset="0"/>
+                        <a:ea typeface="Exo 2" charset="0"/>
+                        <a:cs typeface="Exo 2" charset="0"/>
+                      </a:endParaRPr>
+                    </a:p>
+                  </a:txBody>
+                  <a:tcPr marL="63500" marR="63500" marT="25400" marB="25400" anchor="ctr">
+                    <a:lnL w="0" cap="flat" cmpd="sng" algn="ctr">
+                      <a:noFill/>
+                    </a:lnL>
+                    <a:lnR w="0" cap="flat" cmpd="sng" algn="ctr">
+                      <a:noFill/>
+                    </a:lnR>
+                    <a:lnT w="0" cap="flat" cmpd="sng" algn="ctr">
+                      <a:noFill/>
+                    </a:lnT>
+                    <a:lnB w="9525" cap="flat" cmpd="sng" algn="ctr">
+                      <a:solidFill>
+                        <a:srgbClr val="D9DFEA"/>
+                      </a:solidFill>
+                      <a:prstDash val="solid"/>
+                      <a:round/>
+                      <a:headEnd type="none" w="med" len="med"/>
+                      <a:tailEnd type="none" w="med" len="med"/>
+                    </a:lnB>
+                  </a:tcPr>
+                </a:tc>
+                <a:tc>
+                  <a:txBody>
+                    <a:bodyPr/>
+                    <a:lstStyle/>
+                    <a:p>
+                      <a:pPr indent="0" marL="0">
+                        <a:buNone/>
+                      </a:pPr>
+                      <a:r>
+                        <a:rPr lang="en-US" sz="1100" dirty="0">
+                          <a:solidFill>
+                            <a:srgbClr val="1F2A44"/>
+                          </a:solidFill>
+                          <a:latin typeface="Exo 2" pitchFamily="34" charset="0"/>
+                          <a:ea typeface="Exo 2" pitchFamily="34" charset="-122"/>
+                          <a:cs typeface="Exo 2" pitchFamily="34" charset="-120"/>
+                        </a:rPr>
+                        <a:t>Marketing and Malek</a:t>
                       </a:r>
                       <a:endParaRPr lang="en-US" sz="1100" dirty="0">
                         <a:latin typeface="Exo 2" charset="0"/>
@@ -16414,6 +13475,8 @@
                     </a:lnB>
                   </a:tcPr>
                 </a:tc>
+              </a:tr>
+              <a:tr h="713232">
                 <a:tc>
                   <a:txBody>
                     <a:bodyPr/>
@@ -16423,80 +13486,17 @@
                         <a:buNone/>
                       </a:pPr>
                       <a:r>
-                        <a:rPr lang="en-US" sz="1100" dirty="0">
+                        <a:rPr lang="en-US" sz="1400" b="1" dirty="0">
                           <a:solidFill>
-                            <a:srgbClr val="C53030"/>
+                            <a:srgbClr val="D4AF37"/>
                           </a:solidFill>
                           <a:latin typeface="Exo 2" pitchFamily="34" charset="0"/>
                           <a:ea typeface="Exo 2" pitchFamily="34" charset="-122"/>
                           <a:cs typeface="Exo 2" pitchFamily="34" charset="-120"/>
                         </a:rPr>
-                        <a:t>● </a:t>
+                        <a:t>5</a:t>
                       </a:r>
-                      <a:pPr indent="0" marL="0">
-                        <a:buNone/>
-                      </a:pPr>
-                      <a:r>
-                        <a:rPr lang="en-US" sz="1100" b="1" dirty="0">
-                          <a:solidFill>
-                            <a:srgbClr val="C53030"/>
-                          </a:solidFill>
-                          <a:latin typeface="Exo 2" pitchFamily="34" charset="0"/>
-                          <a:ea typeface="Exo 2" pitchFamily="34" charset="-122"/>
-                          <a:cs typeface="Exo 2" pitchFamily="34" charset="-120"/>
-                        </a:rPr>
-                        <a:t>Open</a:t>
-                      </a:r>
-                      <a:endParaRPr lang="en-US" sz="1100" dirty="0">
-                        <a:latin typeface="Exo 2" charset="0"/>
-                        <a:ea typeface="Exo 2" charset="0"/>
-                        <a:cs typeface="Exo 2" charset="0"/>
-                      </a:endParaRPr>
-                    </a:p>
-                  </a:txBody>
-                  <a:tcPr marL="63500" marR="63500" marT="25400" marB="25400" anchor="ctr">
-                    <a:lnL w="0" cap="flat" cmpd="sng" algn="ctr">
-                      <a:noFill/>
-                    </a:lnL>
-                    <a:lnR w="0" cap="flat" cmpd="sng" algn="ctr">
-                      <a:noFill/>
-                    </a:lnR>
-                    <a:lnT w="0" cap="flat" cmpd="sng" algn="ctr">
-                      <a:noFill/>
-                    </a:lnT>
-                    <a:lnB w="9525" cap="flat" cmpd="sng" algn="ctr">
-                      <a:solidFill>
-                        <a:srgbClr val="D9DFEA"/>
-                      </a:solidFill>
-                      <a:prstDash val="solid"/>
-                      <a:round/>
-                      <a:headEnd type="none" w="med" len="med"/>
-                      <a:tailEnd type="none" w="med" len="med"/>
-                    </a:lnB>
-                  </a:tcPr>
-                </a:tc>
-              </a:tr>
-              <a:tr h="475488">
-                <a:tc>
-                  <a:txBody>
-                    <a:bodyPr/>
-                    <a:lstStyle/>
-                    <a:p>
-                      <a:pPr indent="0" marL="0">
-                        <a:buNone/>
-                      </a:pPr>
-                      <a:r>
-                        <a:rPr lang="en-US" sz="1100" dirty="0">
-                          <a:solidFill>
-                            <a:srgbClr val="1F2A44"/>
-                          </a:solidFill>
-                          <a:latin typeface="Exo 2" pitchFamily="34" charset="0"/>
-                          <a:ea typeface="Exo 2" pitchFamily="34" charset="-122"/>
-                          <a:cs typeface="Exo 2" pitchFamily="34" charset="-120"/>
-                        </a:rPr>
-                        <a:t>2</a:t>
-                      </a:r>
-                      <a:endParaRPr lang="en-US" sz="1100" dirty="0">
+                      <a:endParaRPr lang="en-US" sz="1400" dirty="0">
                         <a:latin typeface="Exo 2" charset="0"/>
                         <a:ea typeface="Exo 2" charset="0"/>
                         <a:cs typeface="Exo 2" charset="0"/>
@@ -16541,7 +13541,7 @@
                           <a:ea typeface="Exo 2" pitchFamily="34" charset="-122"/>
                           <a:cs typeface="Exo 2" pitchFamily="34" charset="-120"/>
                         </a:rPr>
-                        <a:t>No September exports for Instagram, LinkedIn, X, TikTok (LinkedIn export ends 28 Aug)</a:t>
+                        <a:t>Sign off the $5,000 campaign T&amp;Cs; close out Mention &amp; Win</a:t>
                       </a:r>
                       <a:endParaRPr lang="en-US" sz="1100" dirty="0">
                         <a:latin typeface="Exo 2" charset="0"/>
@@ -16588,7 +13588,7 @@
                           <a:ea typeface="Exo 2" pitchFamily="34" charset="-122"/>
                           <a:cs typeface="Exo 2" pitchFamily="34" charset="-120"/>
                         </a:rPr>
-                        <a:t>Social results are screenshot-only</a:t>
+                        <a:t>Compliance and Marketing</a:t>
                       </a:r>
                       <a:endParaRPr lang="en-US" sz="1100" dirty="0">
                         <a:latin typeface="Exo 2" charset="0"/>
@@ -16635,9 +13635,178 @@
                           <a:ea typeface="Exo 2" pitchFamily="34" charset="-122"/>
                           <a:cs typeface="Exo 2" pitchFamily="34" charset="-120"/>
                         </a:rPr>
-                        <a:t>Marketing</a:t>
+                        <a:t>27 Oct</a:t>
                       </a:r>
                       <a:endParaRPr lang="en-US" sz="1100" dirty="0">
+                        <a:latin typeface="Exo 2" charset="0"/>
+                        <a:ea typeface="Exo 2" charset="0"/>
+                        <a:cs typeface="Exo 2" charset="0"/>
+                      </a:endParaRPr>
+                    </a:p>
+                  </a:txBody>
+                  <a:tcPr marL="63500" marR="63500" marT="25400" marB="25400" anchor="ctr">
+                    <a:lnL w="0" cap="flat" cmpd="sng" algn="ctr">
+                      <a:noFill/>
+                    </a:lnL>
+                    <a:lnR w="0" cap="flat" cmpd="sng" algn="ctr">
+                      <a:noFill/>
+                    </a:lnR>
+                    <a:lnT w="0" cap="flat" cmpd="sng" algn="ctr">
+                      <a:noFill/>
+                    </a:lnT>
+                    <a:lnB w="9525" cap="flat" cmpd="sng" algn="ctr">
+                      <a:solidFill>
+                        <a:srgbClr val="D9DFEA"/>
+                      </a:solidFill>
+                      <a:prstDash val="solid"/>
+                      <a:round/>
+                      <a:headEnd type="none" w="med" len="med"/>
+                      <a:tailEnd type="none" w="med" len="med"/>
+                    </a:lnB>
+                  </a:tcPr>
+                </a:tc>
+              </a:tr>
+            </a:tbl>
+          </a:graphicData>
+        </a:graphic>
+      </p:graphicFrame>
+      <p:graphicFrame>
+        <p:nvGraphicFramePr>
+          <p:cNvPr id="17" name="Table 1"/>
+          <p:cNvGraphicFramePr>
+            <a:graphicFrameLocks noGrp="1"/>
+          </p:cNvGraphicFramePr>
+          <p:nvPr>
+            <p:extLst>
+              <p:ext uri="{D42A27DB-BD31-4B8C-83A1-F6EECF244321}">
+                <p14:modId xmlns:p14="http://schemas.microsoft.com/office/powerpoint/2010/main" val="1579011935"/>
+              </p:ext>
+            </p:extLst>
+          </p:nvPr>
+        </p:nvGraphicFramePr>
+        <p:xfrm>
+          <a:off x="7498080" y="1536192"/>
+          <a:ext cx="4133088" cy="914400"/>
+        </p:xfrm>
+        <a:graphic>
+          <a:graphicData uri="http://schemas.openxmlformats.org/drawingml/2006/table">
+            <a:tbl>
+              <a:tblPr/>
+              <a:tblGrid>
+                <a:gridCol w="3017520"/>
+                <a:gridCol w="1115568"/>
+              </a:tblGrid>
+              <a:tr h="329184">
+                <a:tc>
+                  <a:txBody>
+                    <a:bodyPr/>
+                    <a:lstStyle/>
+                    <a:p>
+                      <a:pPr indent="0" marL="0">
+                        <a:buNone/>
+                      </a:pPr>
+                      <a:r>
+                        <a:rPr lang="en-US" sz="1050" b="1" dirty="0">
+                          <a:solidFill>
+                            <a:srgbClr val="FFFFFF"/>
+                          </a:solidFill>
+                          <a:latin typeface="Exo 2" pitchFamily="34" charset="0"/>
+                          <a:ea typeface="Exo 2" pitchFamily="34" charset="-122"/>
+                          <a:cs typeface="Exo 2" pitchFamily="34" charset="-120"/>
+                        </a:rPr>
+                        <a:t>Open item</a:t>
+                      </a:r>
+                      <a:endParaRPr lang="en-US" sz="1050" dirty="0">
+                        <a:latin typeface="Exo 2" charset="0"/>
+                        <a:ea typeface="Exo 2" charset="0"/>
+                        <a:cs typeface="Exo 2" charset="0"/>
+                      </a:endParaRPr>
+                    </a:p>
+                  </a:txBody>
+                  <a:tcPr marL="63500" marR="63500" marT="25400" marB="25400" anchor="ctr">
+                    <a:lnL w="0" cap="flat" cmpd="sng" algn="ctr">
+                      <a:noFill/>
+                    </a:lnL>
+                    <a:lnR w="0" cap="flat" cmpd="sng" algn="ctr">
+                      <a:noFill/>
+                    </a:lnR>
+                    <a:lnT w="0" cap="flat" cmpd="sng" algn="ctr">
+                      <a:noFill/>
+                    </a:lnT>
+                    <a:lnB w="0" cap="flat" cmpd="sng" algn="ctr">
+                      <a:noFill/>
+                    </a:lnB>
+                    <a:solidFill>
+                      <a:srgbClr val="132257"/>
+                    </a:solidFill>
+                  </a:tcPr>
+                </a:tc>
+                <a:tc>
+                  <a:txBody>
+                    <a:bodyPr/>
+                    <a:lstStyle/>
+                    <a:p>
+                      <a:pPr indent="0" marL="0">
+                        <a:buNone/>
+                      </a:pPr>
+                      <a:r>
+                        <a:rPr lang="en-US" sz="1050" b="1" dirty="0">
+                          <a:solidFill>
+                            <a:srgbClr val="FFFFFF"/>
+                          </a:solidFill>
+                          <a:latin typeface="Exo 2" pitchFamily="34" charset="0"/>
+                          <a:ea typeface="Exo 2" pitchFamily="34" charset="-122"/>
+                          <a:cs typeface="Exo 2" pitchFamily="34" charset="-120"/>
+                        </a:rPr>
+                        <a:t>Status</a:t>
+                      </a:r>
+                      <a:endParaRPr lang="en-US" sz="1050" dirty="0">
+                        <a:latin typeface="Exo 2" charset="0"/>
+                        <a:ea typeface="Exo 2" charset="0"/>
+                        <a:cs typeface="Exo 2" charset="0"/>
+                      </a:endParaRPr>
+                    </a:p>
+                  </a:txBody>
+                  <a:tcPr marL="63500" marR="63500" marT="25400" marB="25400" anchor="ctr">
+                    <a:lnL w="0" cap="flat" cmpd="sng" algn="ctr">
+                      <a:noFill/>
+                    </a:lnL>
+                    <a:lnR w="0" cap="flat" cmpd="sng" algn="ctr">
+                      <a:noFill/>
+                    </a:lnR>
+                    <a:lnT w="0" cap="flat" cmpd="sng" algn="ctr">
+                      <a:noFill/>
+                    </a:lnT>
+                    <a:lnB w="0" cap="flat" cmpd="sng" algn="ctr">
+                      <a:noFill/>
+                    </a:lnB>
+                    <a:solidFill>
+                      <a:srgbClr val="132257"/>
+                    </a:solidFill>
+                  </a:tcPr>
+                </a:tc>
+              </a:tr>
+              <a:tr h="484632">
+                <a:tc>
+                  <a:txBody>
+                    <a:bodyPr/>
+                    <a:lstStyle/>
+                    <a:p>
+                      <a:pPr indent="0" marL="0">
+                        <a:buNone/>
+                      </a:pPr>
+                      <a:r>
+                        <a:rPr lang="en-US" sz="950" dirty="0">
+                          <a:solidFill>
+                            <a:srgbClr val="1F2A44"/>
+                          </a:solidFill>
+                          <a:latin typeface="Exo 2" pitchFamily="34" charset="0"/>
+                          <a:ea typeface="Exo 2" pitchFamily="34" charset="-122"/>
+                          <a:cs typeface="Exo 2" pitchFamily="34" charset="-120"/>
+                        </a:rPr>
+                        <a:t>Deposits: three different figures; Board $12,206 is verbal</a:t>
+                      </a:r>
+                      <a:endParaRPr lang="en-US" sz="950" dirty="0">
                         <a:latin typeface="Exo 2" charset="0"/>
                         <a:ea typeface="Exo 2" charset="0"/>
                         <a:cs typeface="Exo 2" charset="0"/>
@@ -16674,7 +13843,56 @@
                         <a:buNone/>
                       </a:pPr>
                       <a:r>
-                        <a:rPr lang="en-US" sz="1100" dirty="0">
+                        <a:rPr lang="en-US" sz="950" b="1" dirty="0">
+                          <a:solidFill>
+                            <a:srgbClr val="C53030"/>
+                          </a:solidFill>
+                          <a:latin typeface="Exo 2" pitchFamily="34" charset="0"/>
+                          <a:ea typeface="Exo 2" pitchFamily="34" charset="-122"/>
+                          <a:cs typeface="Exo 2" pitchFamily="34" charset="-120"/>
+                        </a:rPr>
+                        <a:t>Blocks 20 Oct</a:t>
+                      </a:r>
+                      <a:endParaRPr lang="en-US" sz="950" dirty="0">
+                        <a:latin typeface="Exo 2" charset="0"/>
+                        <a:ea typeface="Exo 2" charset="0"/>
+                        <a:cs typeface="Exo 2" charset="0"/>
+                      </a:endParaRPr>
+                    </a:p>
+                  </a:txBody>
+                  <a:tcPr marL="63500" marR="63500" marT="25400" marB="25400" anchor="ctr">
+                    <a:lnL w="0" cap="flat" cmpd="sng" algn="ctr">
+                      <a:noFill/>
+                    </a:lnL>
+                    <a:lnR w="0" cap="flat" cmpd="sng" algn="ctr">
+                      <a:noFill/>
+                    </a:lnR>
+                    <a:lnT w="0" cap="flat" cmpd="sng" algn="ctr">
+                      <a:noFill/>
+                    </a:lnT>
+                    <a:lnB w="9525" cap="flat" cmpd="sng" algn="ctr">
+                      <a:solidFill>
+                        <a:srgbClr val="D9DFEA"/>
+                      </a:solidFill>
+                      <a:prstDash val="solid"/>
+                      <a:round/>
+                      <a:headEnd type="none" w="med" len="med"/>
+                      <a:tailEnd type="none" w="med" len="med"/>
+                    </a:lnB>
+                  </a:tcPr>
+                </a:tc>
+              </a:tr>
+              <a:tr h="484632">
+                <a:tc>
+                  <a:txBody>
+                    <a:bodyPr/>
+                    <a:lstStyle/>
+                    <a:p>
+                      <a:pPr indent="0" marL="0">
+                        <a:buNone/>
+                      </a:pPr>
+                      <a:r>
+                        <a:rPr lang="en-US" sz="950" dirty="0">
                           <a:solidFill>
                             <a:srgbClr val="1F2A44"/>
                           </a:solidFill>
@@ -16682,9 +13900,9 @@
                           <a:ea typeface="Exo 2" pitchFamily="34" charset="-122"/>
                           <a:cs typeface="Exo 2" pitchFamily="34" charset="-120"/>
                         </a:rPr>
-                        <a:t>8 Oct</a:t>
+                        <a:t>Clients: Board 61 vs dashboard 54 on 17 Sep</a:t>
                       </a:r>
-                      <a:endParaRPr lang="en-US" sz="1100" dirty="0">
+                      <a:endParaRPr lang="en-US" sz="950" dirty="0">
                         <a:latin typeface="Exo 2" charset="0"/>
                         <a:ea typeface="Exo 2" charset="0"/>
                         <a:cs typeface="Exo 2" charset="0"/>
@@ -16721,7 +13939,7 @@
                         <a:buNone/>
                       </a:pPr>
                       <a:r>
-                        <a:rPr lang="en-US" sz="1100" dirty="0">
+                        <a:rPr lang="en-US" sz="950" b="1" dirty="0">
                           <a:solidFill>
                             <a:srgbClr val="C53030"/>
                           </a:solidFill>
@@ -16729,23 +13947,9 @@
                           <a:ea typeface="Exo 2" pitchFamily="34" charset="-122"/>
                           <a:cs typeface="Exo 2" pitchFamily="34" charset="-120"/>
                         </a:rPr>
-                        <a:t>● </a:t>
+                        <a:t>Blocks 20 Oct</a:t>
                       </a:r>
-                      <a:pPr indent="0" marL="0">
-                        <a:buNone/>
-                      </a:pPr>
-                      <a:r>
-                        <a:rPr lang="en-US" sz="1100" b="1" dirty="0">
-                          <a:solidFill>
-                            <a:srgbClr val="C53030"/>
-                          </a:solidFill>
-                          <a:latin typeface="Exo 2" pitchFamily="34" charset="0"/>
-                          <a:ea typeface="Exo 2" pitchFamily="34" charset="-122"/>
-                          <a:cs typeface="Exo 2" pitchFamily="34" charset="-120"/>
-                        </a:rPr>
-                        <a:t>Open</a:t>
-                      </a:r>
-                      <a:endParaRPr lang="en-US" sz="1100" dirty="0">
+                      <a:endParaRPr lang="en-US" sz="950" dirty="0">
                         <a:latin typeface="Exo 2" charset="0"/>
                         <a:ea typeface="Exo 2" charset="0"/>
                         <a:cs typeface="Exo 2" charset="0"/>
@@ -16774,7 +13978,7 @@
                   </a:tcPr>
                 </a:tc>
               </a:tr>
-              <a:tr h="475488">
+              <a:tr h="484632">
                 <a:tc>
                   <a:txBody>
                     <a:bodyPr/>
@@ -16784,7 +13988,7 @@
                         <a:buNone/>
                       </a:pPr>
                       <a:r>
-                        <a:rPr lang="en-US" sz="1100" dirty="0">
+                        <a:rPr lang="en-US" sz="950" dirty="0">
                           <a:solidFill>
                             <a:srgbClr val="1F2A44"/>
                           </a:solidFill>
@@ -16792,9 +13996,9 @@
                           <a:ea typeface="Exo 2" pitchFamily="34" charset="-122"/>
                           <a:cs typeface="Exo 2" pitchFamily="34" charset="-120"/>
                         </a:rPr>
-                        <a:t>3</a:t>
+                        <a:t>No ad spend, LinkedIn leads or key-event definition</a:t>
                       </a:r>
-                      <a:endParaRPr lang="en-US" sz="1100" dirty="0">
+                      <a:endParaRPr lang="en-US" sz="950" dirty="0">
                         <a:latin typeface="Exo 2" charset="0"/>
                         <a:ea typeface="Exo 2" charset="0"/>
                         <a:cs typeface="Exo 2" charset="0"/>
@@ -16831,7 +14035,56 @@
                         <a:buNone/>
                       </a:pPr>
                       <a:r>
-                        <a:rPr lang="en-US" sz="1100" dirty="0">
+                        <a:rPr lang="en-US" sz="950" b="1" dirty="0">
+                          <a:solidFill>
+                            <a:srgbClr val="C53030"/>
+                          </a:solidFill>
+                          <a:latin typeface="Exo 2" pitchFamily="34" charset="0"/>
+                          <a:ea typeface="Exo 2" pitchFamily="34" charset="-122"/>
+                          <a:cs typeface="Exo 2" pitchFamily="34" charset="-120"/>
+                        </a:rPr>
+                        <a:t>Blocks 20 Oct</a:t>
+                      </a:r>
+                      <a:endParaRPr lang="en-US" sz="950" dirty="0">
+                        <a:latin typeface="Exo 2" charset="0"/>
+                        <a:ea typeface="Exo 2" charset="0"/>
+                        <a:cs typeface="Exo 2" charset="0"/>
+                      </a:endParaRPr>
+                    </a:p>
+                  </a:txBody>
+                  <a:tcPr marL="63500" marR="63500" marT="25400" marB="25400" anchor="ctr">
+                    <a:lnL w="0" cap="flat" cmpd="sng" algn="ctr">
+                      <a:noFill/>
+                    </a:lnL>
+                    <a:lnR w="0" cap="flat" cmpd="sng" algn="ctr">
+                      <a:noFill/>
+                    </a:lnR>
+                    <a:lnT w="0" cap="flat" cmpd="sng" algn="ctr">
+                      <a:noFill/>
+                    </a:lnT>
+                    <a:lnB w="9525" cap="flat" cmpd="sng" algn="ctr">
+                      <a:solidFill>
+                        <a:srgbClr val="D9DFEA"/>
+                      </a:solidFill>
+                      <a:prstDash val="solid"/>
+                      <a:round/>
+                      <a:headEnd type="none" w="med" len="med"/>
+                      <a:tailEnd type="none" w="med" len="med"/>
+                    </a:lnB>
+                  </a:tcPr>
+                </a:tc>
+              </a:tr>
+              <a:tr h="484632">
+                <a:tc>
+                  <a:txBody>
+                    <a:bodyPr/>
+                    <a:lstStyle/>
+                    <a:p>
+                      <a:pPr indent="0" marL="0">
+                        <a:buNone/>
+                      </a:pPr>
+                      <a:r>
+                        <a:rPr lang="en-US" sz="950" dirty="0">
                           <a:solidFill>
                             <a:srgbClr val="1F2A44"/>
                           </a:solidFill>
@@ -16839,9 +14092,9 @@
                           <a:ea typeface="Exo 2" pitchFamily="34" charset="-122"/>
                           <a:cs typeface="Exo 2" pitchFamily="34" charset="-120"/>
                         </a:rPr>
-                        <a:t>793% active-user rise (GA card) and LinkedIn +118% / +155% not traceable to an export</a:t>
+                        <a:t>No September exports for social channels</a:t>
                       </a:r>
-                      <a:endParaRPr lang="en-US" sz="1100" dirty="0">
+                      <a:endParaRPr lang="en-US" sz="950" dirty="0">
                         <a:latin typeface="Exo 2" charset="0"/>
                         <a:ea typeface="Exo 2" charset="0"/>
                         <a:cs typeface="Exo 2" charset="0"/>
@@ -16878,7 +14131,56 @@
                         <a:buNone/>
                       </a:pPr>
                       <a:r>
-                        <a:rPr lang="en-US" sz="1100" dirty="0">
+                        <a:rPr lang="en-US" sz="950" b="1" dirty="0">
+                          <a:solidFill>
+                            <a:srgbClr val="9A7B1F"/>
+                          </a:solidFill>
+                          <a:latin typeface="Exo 2" pitchFamily="34" charset="0"/>
+                          <a:ea typeface="Exo 2" pitchFamily="34" charset="-122"/>
+                          <a:cs typeface="Exo 2" pitchFamily="34" charset="-120"/>
+                        </a:rPr>
+                        <a:t>Open</a:t>
+                      </a:r>
+                      <a:endParaRPr lang="en-US" sz="950" dirty="0">
+                        <a:latin typeface="Exo 2" charset="0"/>
+                        <a:ea typeface="Exo 2" charset="0"/>
+                        <a:cs typeface="Exo 2" charset="0"/>
+                      </a:endParaRPr>
+                    </a:p>
+                  </a:txBody>
+                  <a:tcPr marL="63500" marR="63500" marT="25400" marB="25400" anchor="ctr">
+                    <a:lnL w="0" cap="flat" cmpd="sng" algn="ctr">
+                      <a:noFill/>
+                    </a:lnL>
+                    <a:lnR w="0" cap="flat" cmpd="sng" algn="ctr">
+                      <a:noFill/>
+                    </a:lnR>
+                    <a:lnT w="0" cap="flat" cmpd="sng" algn="ctr">
+                      <a:noFill/>
+                    </a:lnT>
+                    <a:lnB w="9525" cap="flat" cmpd="sng" algn="ctr">
+                      <a:solidFill>
+                        <a:srgbClr val="D9DFEA"/>
+                      </a:solidFill>
+                      <a:prstDash val="solid"/>
+                      <a:round/>
+                      <a:headEnd type="none" w="med" len="med"/>
+                      <a:tailEnd type="none" w="med" len="med"/>
+                    </a:lnB>
+                  </a:tcPr>
+                </a:tc>
+              </a:tr>
+              <a:tr h="484632">
+                <a:tc>
+                  <a:txBody>
+                    <a:bodyPr/>
+                    <a:lstStyle/>
+                    <a:p>
+                      <a:pPr indent="0" marL="0">
+                        <a:buNone/>
+                      </a:pPr>
+                      <a:r>
+                        <a:rPr lang="en-US" sz="950" dirty="0">
                           <a:solidFill>
                             <a:srgbClr val="1F2A44"/>
                           </a:solidFill>
@@ -16886,9 +14188,9 @@
                           <a:ea typeface="Exo 2" pitchFamily="34" charset="-122"/>
                           <a:cs typeface="Exo 2" pitchFamily="34" charset="-120"/>
                         </a:rPr>
-                        <a:t>Risk of overstating results</a:t>
+                        <a:t>793% and LinkedIn +118% / +155% not exported</a:t>
                       </a:r>
-                      <a:endParaRPr lang="en-US" sz="1100" dirty="0">
+                      <a:endParaRPr lang="en-US" sz="950" dirty="0">
                         <a:latin typeface="Exo 2" charset="0"/>
                         <a:ea typeface="Exo 2" charset="0"/>
                         <a:cs typeface="Exo 2" charset="0"/>
@@ -16925,7 +14227,56 @@
                         <a:buNone/>
                       </a:pPr>
                       <a:r>
-                        <a:rPr lang="en-US" sz="1100" dirty="0">
+                        <a:rPr lang="en-US" sz="950" b="1" dirty="0">
+                          <a:solidFill>
+                            <a:srgbClr val="9A7B1F"/>
+                          </a:solidFill>
+                          <a:latin typeface="Exo 2" pitchFamily="34" charset="0"/>
+                          <a:ea typeface="Exo 2" pitchFamily="34" charset="-122"/>
+                          <a:cs typeface="Exo 2" pitchFamily="34" charset="-120"/>
+                        </a:rPr>
+                        <a:t>Open</a:t>
+                      </a:r>
+                      <a:endParaRPr lang="en-US" sz="950" dirty="0">
+                        <a:latin typeface="Exo 2" charset="0"/>
+                        <a:ea typeface="Exo 2" charset="0"/>
+                        <a:cs typeface="Exo 2" charset="0"/>
+                      </a:endParaRPr>
+                    </a:p>
+                  </a:txBody>
+                  <a:tcPr marL="63500" marR="63500" marT="25400" marB="25400" anchor="ctr">
+                    <a:lnL w="0" cap="flat" cmpd="sng" algn="ctr">
+                      <a:noFill/>
+                    </a:lnL>
+                    <a:lnR w="0" cap="flat" cmpd="sng" algn="ctr">
+                      <a:noFill/>
+                    </a:lnR>
+                    <a:lnT w="0" cap="flat" cmpd="sng" algn="ctr">
+                      <a:noFill/>
+                    </a:lnT>
+                    <a:lnB w="9525" cap="flat" cmpd="sng" algn="ctr">
+                      <a:solidFill>
+                        <a:srgbClr val="D9DFEA"/>
+                      </a:solidFill>
+                      <a:prstDash val="solid"/>
+                      <a:round/>
+                      <a:headEnd type="none" w="med" len="med"/>
+                      <a:tailEnd type="none" w="med" len="med"/>
+                    </a:lnB>
+                  </a:tcPr>
+                </a:tc>
+              </a:tr>
+              <a:tr h="484632">
+                <a:tc>
+                  <a:txBody>
+                    <a:bodyPr/>
+                    <a:lstStyle/>
+                    <a:p>
+                      <a:pPr indent="0" marL="0">
+                        <a:buNone/>
+                      </a:pPr>
+                      <a:r>
+                        <a:rPr lang="en-US" sz="950" dirty="0">
                           <a:solidFill>
                             <a:srgbClr val="1F2A44"/>
                           </a:solidFill>
@@ -16933,9 +14284,9 @@
                           <a:ea typeface="Exo 2" pitchFamily="34" charset="-122"/>
                           <a:cs typeface="Exo 2" pitchFamily="34" charset="-120"/>
                         </a:rPr>
-                        <a:t>Marketing</a:t>
+                        <a:t>LinkedIn followers: 531 vs 586</a:t>
                       </a:r>
-                      <a:endParaRPr lang="en-US" sz="1100" dirty="0">
+                      <a:endParaRPr lang="en-US" sz="950" dirty="0">
                         <a:latin typeface="Exo 2" charset="0"/>
                         <a:ea typeface="Exo 2" charset="0"/>
                         <a:cs typeface="Exo 2" charset="0"/>
@@ -16972,7 +14323,56 @@
                         <a:buNone/>
                       </a:pPr>
                       <a:r>
-                        <a:rPr lang="en-US" sz="1100" dirty="0">
+                        <a:rPr lang="en-US" sz="950" b="1" dirty="0">
+                          <a:solidFill>
+                            <a:srgbClr val="9A7B1F"/>
+                          </a:solidFill>
+                          <a:latin typeface="Exo 2" pitchFamily="34" charset="0"/>
+                          <a:ea typeface="Exo 2" pitchFamily="34" charset="-122"/>
+                          <a:cs typeface="Exo 2" pitchFamily="34" charset="-120"/>
+                        </a:rPr>
+                        <a:t>Open</a:t>
+                      </a:r>
+                      <a:endParaRPr lang="en-US" sz="950" dirty="0">
+                        <a:latin typeface="Exo 2" charset="0"/>
+                        <a:ea typeface="Exo 2" charset="0"/>
+                        <a:cs typeface="Exo 2" charset="0"/>
+                      </a:endParaRPr>
+                    </a:p>
+                  </a:txBody>
+                  <a:tcPr marL="63500" marR="63500" marT="25400" marB="25400" anchor="ctr">
+                    <a:lnL w="0" cap="flat" cmpd="sng" algn="ctr">
+                      <a:noFill/>
+                    </a:lnL>
+                    <a:lnR w="0" cap="flat" cmpd="sng" algn="ctr">
+                      <a:noFill/>
+                    </a:lnR>
+                    <a:lnT w="0" cap="flat" cmpd="sng" algn="ctr">
+                      <a:noFill/>
+                    </a:lnT>
+                    <a:lnB w="9525" cap="flat" cmpd="sng" algn="ctr">
+                      <a:solidFill>
+                        <a:srgbClr val="D9DFEA"/>
+                      </a:solidFill>
+                      <a:prstDash val="solid"/>
+                      <a:round/>
+                      <a:headEnd type="none" w="med" len="med"/>
+                      <a:tailEnd type="none" w="med" len="med"/>
+                    </a:lnB>
+                  </a:tcPr>
+                </a:tc>
+              </a:tr>
+              <a:tr h="493776">
+                <a:tc>
+                  <a:txBody>
+                    <a:bodyPr/>
+                    <a:lstStyle/>
+                    <a:p>
+                      <a:pPr indent="0" marL="0">
+                        <a:buNone/>
+                      </a:pPr>
+                      <a:r>
+                        <a:rPr lang="en-US" sz="950" dirty="0">
                           <a:solidFill>
                             <a:srgbClr val="1F2A44"/>
                           </a:solidFill>
@@ -16980,9 +14380,9 @@
                           <a:ea typeface="Exo 2" pitchFamily="34" charset="-122"/>
                           <a:cs typeface="Exo 2" pitchFamily="34" charset="-120"/>
                         </a:rPr>
-                        <a:t>8 Oct</a:t>
+                        <a:t>$5,000 campaign T&amp;C sign-off not on file</a:t>
                       </a:r>
-                      <a:endParaRPr lang="en-US" sz="1100" dirty="0">
+                      <a:endParaRPr lang="en-US" sz="950" dirty="0">
                         <a:latin typeface="Exo 2" charset="0"/>
                         <a:ea typeface="Exo 2" charset="0"/>
                         <a:cs typeface="Exo 2" charset="0"/>
@@ -17019,7 +14419,7 @@
                         <a:buNone/>
                       </a:pPr>
                       <a:r>
-                        <a:rPr lang="en-US" sz="1100" dirty="0">
+                        <a:rPr lang="en-US" sz="950" b="1" dirty="0">
                           <a:solidFill>
                             <a:srgbClr val="9A7B1F"/>
                           </a:solidFill>
@@ -17027,1215 +14427,9 @@
                           <a:ea typeface="Exo 2" pitchFamily="34" charset="-122"/>
                           <a:cs typeface="Exo 2" pitchFamily="34" charset="-120"/>
                         </a:rPr>
-                        <a:t>● </a:t>
-                      </a:r>
-                      <a:pPr indent="0" marL="0">
-                        <a:buNone/>
-                      </a:pPr>
-                      <a:r>
-                        <a:rPr lang="en-US" sz="1100" b="1" dirty="0">
-                          <a:solidFill>
-                            <a:srgbClr val="9A7B1F"/>
-                          </a:solidFill>
-                          <a:latin typeface="Exo 2" pitchFamily="34" charset="0"/>
-                          <a:ea typeface="Exo 2" pitchFamily="34" charset="-122"/>
-                          <a:cs typeface="Exo 2" pitchFamily="34" charset="-120"/>
-                        </a:rPr>
-                        <a:t>Pending evidence</a:t>
-                      </a:r>
-                      <a:endParaRPr lang="en-US" sz="1100" dirty="0">
-                        <a:latin typeface="Exo 2" charset="0"/>
-                        <a:ea typeface="Exo 2" charset="0"/>
-                        <a:cs typeface="Exo 2" charset="0"/>
-                      </a:endParaRPr>
-                    </a:p>
-                  </a:txBody>
-                  <a:tcPr marL="63500" marR="63500" marT="25400" marB="25400" anchor="ctr">
-                    <a:lnL w="0" cap="flat" cmpd="sng" algn="ctr">
-                      <a:noFill/>
-                    </a:lnL>
-                    <a:lnR w="0" cap="flat" cmpd="sng" algn="ctr">
-                      <a:noFill/>
-                    </a:lnR>
-                    <a:lnT w="0" cap="flat" cmpd="sng" algn="ctr">
-                      <a:noFill/>
-                    </a:lnT>
-                    <a:lnB w="9525" cap="flat" cmpd="sng" algn="ctr">
-                      <a:solidFill>
-                        <a:srgbClr val="D9DFEA"/>
-                      </a:solidFill>
-                      <a:prstDash val="solid"/>
-                      <a:round/>
-                      <a:headEnd type="none" w="med" len="med"/>
-                      <a:tailEnd type="none" w="med" len="med"/>
-                    </a:lnB>
-                  </a:tcPr>
-                </a:tc>
-              </a:tr>
-              <a:tr h="475488">
-                <a:tc>
-                  <a:txBody>
-                    <a:bodyPr/>
-                    <a:lstStyle/>
-                    <a:p>
-                      <a:pPr indent="0" marL="0">
-                        <a:buNone/>
-                      </a:pPr>
-                      <a:r>
-                        <a:rPr lang="en-US" sz="1100" dirty="0">
-                          <a:solidFill>
-                            <a:srgbClr val="1F2A44"/>
-                          </a:solidFill>
-                          <a:latin typeface="Exo 2" pitchFamily="34" charset="0"/>
-                          <a:ea typeface="Exo 2" pitchFamily="34" charset="-122"/>
-                          <a:cs typeface="Exo 2" pitchFamily="34" charset="-120"/>
-                        </a:rPr>
-                        <a:t>4</a:t>
-                      </a:r>
-                      <a:endParaRPr lang="en-US" sz="1100" dirty="0">
-                        <a:latin typeface="Exo 2" charset="0"/>
-                        <a:ea typeface="Exo 2" charset="0"/>
-                        <a:cs typeface="Exo 2" charset="0"/>
-                      </a:endParaRPr>
-                    </a:p>
-                  </a:txBody>
-                  <a:tcPr marL="63500" marR="63500" marT="25400" marB="25400" anchor="ctr">
-                    <a:lnL w="0" cap="flat" cmpd="sng" algn="ctr">
-                      <a:noFill/>
-                    </a:lnL>
-                    <a:lnR w="0" cap="flat" cmpd="sng" algn="ctr">
-                      <a:noFill/>
-                    </a:lnR>
-                    <a:lnT w="0" cap="flat" cmpd="sng" algn="ctr">
-                      <a:noFill/>
-                    </a:lnT>
-                    <a:lnB w="9525" cap="flat" cmpd="sng" algn="ctr">
-                      <a:solidFill>
-                        <a:srgbClr val="D9DFEA"/>
-                      </a:solidFill>
-                      <a:prstDash val="solid"/>
-                      <a:round/>
-                      <a:headEnd type="none" w="med" len="med"/>
-                      <a:tailEnd type="none" w="med" len="med"/>
-                    </a:lnB>
-                  </a:tcPr>
-                </a:tc>
-                <a:tc>
-                  <a:txBody>
-                    <a:bodyPr/>
-                    <a:lstStyle/>
-                    <a:p>
-                      <a:pPr indent="0" marL="0">
-                        <a:buNone/>
-                      </a:pPr>
-                      <a:r>
-                        <a:rPr lang="en-US" sz="1100" dirty="0">
-                          <a:solidFill>
-                            <a:srgbClr val="1F2A44"/>
-                          </a:solidFill>
-                          <a:latin typeface="Exo 2" pitchFamily="34" charset="0"/>
-                          <a:ea typeface="Exo 2" pitchFamily="34" charset="-122"/>
-                          <a:cs typeface="Exo 2" pitchFamily="34" charset="-120"/>
-                        </a:rPr>
-                        <a:t>No spend, cost per key event or LinkedIn leads; key event undefined</a:t>
-                      </a:r>
-                      <a:endParaRPr lang="en-US" sz="1100" dirty="0">
-                        <a:latin typeface="Exo 2" charset="0"/>
-                        <a:ea typeface="Exo 2" charset="0"/>
-                        <a:cs typeface="Exo 2" charset="0"/>
-                      </a:endParaRPr>
-                    </a:p>
-                  </a:txBody>
-                  <a:tcPr marL="63500" marR="63500" marT="25400" marB="25400" anchor="ctr">
-                    <a:lnL w="0" cap="flat" cmpd="sng" algn="ctr">
-                      <a:noFill/>
-                    </a:lnL>
-                    <a:lnR w="0" cap="flat" cmpd="sng" algn="ctr">
-                      <a:noFill/>
-                    </a:lnR>
-                    <a:lnT w="0" cap="flat" cmpd="sng" algn="ctr">
-                      <a:noFill/>
-                    </a:lnT>
-                    <a:lnB w="9525" cap="flat" cmpd="sng" algn="ctr">
-                      <a:solidFill>
-                        <a:srgbClr val="D9DFEA"/>
-                      </a:solidFill>
-                      <a:prstDash val="solid"/>
-                      <a:round/>
-                      <a:headEnd type="none" w="med" len="med"/>
-                      <a:tailEnd type="none" w="med" len="med"/>
-                    </a:lnB>
-                  </a:tcPr>
-                </a:tc>
-                <a:tc>
-                  <a:txBody>
-                    <a:bodyPr/>
-                    <a:lstStyle/>
-                    <a:p>
-                      <a:pPr indent="0" marL="0">
-                        <a:buNone/>
-                      </a:pPr>
-                      <a:r>
-                        <a:rPr lang="en-US" sz="1100" dirty="0">
-                          <a:solidFill>
-                            <a:srgbClr val="1F2A44"/>
-                          </a:solidFill>
-                          <a:latin typeface="Exo 2" pitchFamily="34" charset="0"/>
-                          <a:ea typeface="Exo 2" pitchFamily="34" charset="-122"/>
-                          <a:cs typeface="Exo 2" pitchFamily="34" charset="-120"/>
-                        </a:rPr>
-                        <a:t>Cannot test Board CAC targets</a:t>
-                      </a:r>
-                      <a:endParaRPr lang="en-US" sz="1100" dirty="0">
-                        <a:latin typeface="Exo 2" charset="0"/>
-                        <a:ea typeface="Exo 2" charset="0"/>
-                        <a:cs typeface="Exo 2" charset="0"/>
-                      </a:endParaRPr>
-                    </a:p>
-                  </a:txBody>
-                  <a:tcPr marL="63500" marR="63500" marT="25400" marB="25400" anchor="ctr">
-                    <a:lnL w="0" cap="flat" cmpd="sng" algn="ctr">
-                      <a:noFill/>
-                    </a:lnL>
-                    <a:lnR w="0" cap="flat" cmpd="sng" algn="ctr">
-                      <a:noFill/>
-                    </a:lnR>
-                    <a:lnT w="0" cap="flat" cmpd="sng" algn="ctr">
-                      <a:noFill/>
-                    </a:lnT>
-                    <a:lnB w="9525" cap="flat" cmpd="sng" algn="ctr">
-                      <a:solidFill>
-                        <a:srgbClr val="D9DFEA"/>
-                      </a:solidFill>
-                      <a:prstDash val="solid"/>
-                      <a:round/>
-                      <a:headEnd type="none" w="med" len="med"/>
-                      <a:tailEnd type="none" w="med" len="med"/>
-                    </a:lnB>
-                  </a:tcPr>
-                </a:tc>
-                <a:tc>
-                  <a:txBody>
-                    <a:bodyPr/>
-                    <a:lstStyle/>
-                    <a:p>
-                      <a:pPr indent="0" marL="0">
-                        <a:buNone/>
-                      </a:pPr>
-                      <a:r>
-                        <a:rPr lang="en-US" sz="1100" dirty="0">
-                          <a:solidFill>
-                            <a:srgbClr val="1F2A44"/>
-                          </a:solidFill>
-                          <a:latin typeface="Exo 2" pitchFamily="34" charset="0"/>
-                          <a:ea typeface="Exo 2" pitchFamily="34" charset="-122"/>
-                          <a:cs typeface="Exo 2" pitchFamily="34" charset="-120"/>
-                        </a:rPr>
-                        <a:t>Marketing with Ignite</a:t>
-                      </a:r>
-                      <a:endParaRPr lang="en-US" sz="1100" dirty="0">
-                        <a:latin typeface="Exo 2" charset="0"/>
-                        <a:ea typeface="Exo 2" charset="0"/>
-                        <a:cs typeface="Exo 2" charset="0"/>
-                      </a:endParaRPr>
-                    </a:p>
-                  </a:txBody>
-                  <a:tcPr marL="63500" marR="63500" marT="25400" marB="25400" anchor="ctr">
-                    <a:lnL w="0" cap="flat" cmpd="sng" algn="ctr">
-                      <a:noFill/>
-                    </a:lnL>
-                    <a:lnR w="0" cap="flat" cmpd="sng" algn="ctr">
-                      <a:noFill/>
-                    </a:lnR>
-                    <a:lnT w="0" cap="flat" cmpd="sng" algn="ctr">
-                      <a:noFill/>
-                    </a:lnT>
-                    <a:lnB w="9525" cap="flat" cmpd="sng" algn="ctr">
-                      <a:solidFill>
-                        <a:srgbClr val="D9DFEA"/>
-                      </a:solidFill>
-                      <a:prstDash val="solid"/>
-                      <a:round/>
-                      <a:headEnd type="none" w="med" len="med"/>
-                      <a:tailEnd type="none" w="med" len="med"/>
-                    </a:lnB>
-                  </a:tcPr>
-                </a:tc>
-                <a:tc>
-                  <a:txBody>
-                    <a:bodyPr/>
-                    <a:lstStyle/>
-                    <a:p>
-                      <a:pPr indent="0" marL="0">
-                        <a:buNone/>
-                      </a:pPr>
-                      <a:r>
-                        <a:rPr lang="en-US" sz="1100" dirty="0">
-                          <a:solidFill>
-                            <a:srgbClr val="1F2A44"/>
-                          </a:solidFill>
-                          <a:latin typeface="Exo 2" pitchFamily="34" charset="0"/>
-                          <a:ea typeface="Exo 2" pitchFamily="34" charset="-122"/>
-                          <a:cs typeface="Exo 2" pitchFamily="34" charset="-120"/>
-                        </a:rPr>
-                        <a:t>15 Oct</a:t>
-                      </a:r>
-                      <a:endParaRPr lang="en-US" sz="1100" dirty="0">
-                        <a:latin typeface="Exo 2" charset="0"/>
-                        <a:ea typeface="Exo 2" charset="0"/>
-                        <a:cs typeface="Exo 2" charset="0"/>
-                      </a:endParaRPr>
-                    </a:p>
-                  </a:txBody>
-                  <a:tcPr marL="63500" marR="63500" marT="25400" marB="25400" anchor="ctr">
-                    <a:lnL w="0" cap="flat" cmpd="sng" algn="ctr">
-                      <a:noFill/>
-                    </a:lnL>
-                    <a:lnR w="0" cap="flat" cmpd="sng" algn="ctr">
-                      <a:noFill/>
-                    </a:lnR>
-                    <a:lnT w="0" cap="flat" cmpd="sng" algn="ctr">
-                      <a:noFill/>
-                    </a:lnT>
-                    <a:lnB w="9525" cap="flat" cmpd="sng" algn="ctr">
-                      <a:solidFill>
-                        <a:srgbClr val="D9DFEA"/>
-                      </a:solidFill>
-                      <a:prstDash val="solid"/>
-                      <a:round/>
-                      <a:headEnd type="none" w="med" len="med"/>
-                      <a:tailEnd type="none" w="med" len="med"/>
-                    </a:lnB>
-                  </a:tcPr>
-                </a:tc>
-                <a:tc>
-                  <a:txBody>
-                    <a:bodyPr/>
-                    <a:lstStyle/>
-                    <a:p>
-                      <a:pPr indent="0" marL="0">
-                        <a:buNone/>
-                      </a:pPr>
-                      <a:r>
-                        <a:rPr lang="en-US" sz="1100" dirty="0">
-                          <a:solidFill>
-                            <a:srgbClr val="C53030"/>
-                          </a:solidFill>
-                          <a:latin typeface="Exo 2" pitchFamily="34" charset="0"/>
-                          <a:ea typeface="Exo 2" pitchFamily="34" charset="-122"/>
-                          <a:cs typeface="Exo 2" pitchFamily="34" charset="-120"/>
-                        </a:rPr>
-                        <a:t>● </a:t>
-                      </a:r>
-                      <a:pPr indent="0" marL="0">
-                        <a:buNone/>
-                      </a:pPr>
-                      <a:r>
-                        <a:rPr lang="en-US" sz="1100" b="1" dirty="0">
-                          <a:solidFill>
-                            <a:srgbClr val="C53030"/>
-                          </a:solidFill>
-                          <a:latin typeface="Exo 2" pitchFamily="34" charset="0"/>
-                          <a:ea typeface="Exo 2" pitchFamily="34" charset="-122"/>
-                          <a:cs typeface="Exo 2" pitchFamily="34" charset="-120"/>
-                        </a:rPr>
                         <a:t>Open</a:t>
                       </a:r>
-                      <a:endParaRPr lang="en-US" sz="1100" dirty="0">
-                        <a:latin typeface="Exo 2" charset="0"/>
-                        <a:ea typeface="Exo 2" charset="0"/>
-                        <a:cs typeface="Exo 2" charset="0"/>
-                      </a:endParaRPr>
-                    </a:p>
-                  </a:txBody>
-                  <a:tcPr marL="63500" marR="63500" marT="25400" marB="25400" anchor="ctr">
-                    <a:lnL w="0" cap="flat" cmpd="sng" algn="ctr">
-                      <a:noFill/>
-                    </a:lnL>
-                    <a:lnR w="0" cap="flat" cmpd="sng" algn="ctr">
-                      <a:noFill/>
-                    </a:lnR>
-                    <a:lnT w="0" cap="flat" cmpd="sng" algn="ctr">
-                      <a:noFill/>
-                    </a:lnT>
-                    <a:lnB w="9525" cap="flat" cmpd="sng" algn="ctr">
-                      <a:solidFill>
-                        <a:srgbClr val="D9DFEA"/>
-                      </a:solidFill>
-                      <a:prstDash val="solid"/>
-                      <a:round/>
-                      <a:headEnd type="none" w="med" len="med"/>
-                      <a:tailEnd type="none" w="med" len="med"/>
-                    </a:lnB>
-                  </a:tcPr>
-                </a:tc>
-              </a:tr>
-              <a:tr h="475488">
-                <a:tc>
-                  <a:txBody>
-                    <a:bodyPr/>
-                    <a:lstStyle/>
-                    <a:p>
-                      <a:pPr indent="0" marL="0">
-                        <a:buNone/>
-                      </a:pPr>
-                      <a:r>
-                        <a:rPr lang="en-US" sz="1100" dirty="0">
-                          <a:solidFill>
-                            <a:srgbClr val="1F2A44"/>
-                          </a:solidFill>
-                          <a:latin typeface="Exo 2" pitchFamily="34" charset="0"/>
-                          <a:ea typeface="Exo 2" pitchFamily="34" charset="-122"/>
-                          <a:cs typeface="Exo 2" pitchFamily="34" charset="-120"/>
-                        </a:rPr>
-                        <a:t>5</a:t>
-                      </a:r>
-                      <a:endParaRPr lang="en-US" sz="1100" dirty="0">
-                        <a:latin typeface="Exo 2" charset="0"/>
-                        <a:ea typeface="Exo 2" charset="0"/>
-                        <a:cs typeface="Exo 2" charset="0"/>
-                      </a:endParaRPr>
-                    </a:p>
-                  </a:txBody>
-                  <a:tcPr marL="63500" marR="63500" marT="25400" marB="25400" anchor="ctr">
-                    <a:lnL w="0" cap="flat" cmpd="sng" algn="ctr">
-                      <a:noFill/>
-                    </a:lnL>
-                    <a:lnR w="0" cap="flat" cmpd="sng" algn="ctr">
-                      <a:noFill/>
-                    </a:lnR>
-                    <a:lnT w="0" cap="flat" cmpd="sng" algn="ctr">
-                      <a:noFill/>
-                    </a:lnT>
-                    <a:lnB w="9525" cap="flat" cmpd="sng" algn="ctr">
-                      <a:solidFill>
-                        <a:srgbClr val="D9DFEA"/>
-                      </a:solidFill>
-                      <a:prstDash val="solid"/>
-                      <a:round/>
-                      <a:headEnd type="none" w="med" len="med"/>
-                      <a:tailEnd type="none" w="med" len="med"/>
-                    </a:lnB>
-                  </a:tcPr>
-                </a:tc>
-                <a:tc>
-                  <a:txBody>
-                    <a:bodyPr/>
-                    <a:lstStyle/>
-                    <a:p>
-                      <a:pPr indent="0" marL="0">
-                        <a:buNone/>
-                      </a:pPr>
-                      <a:r>
-                        <a:rPr lang="en-US" sz="1100" dirty="0">
-                          <a:solidFill>
-                            <a:srgbClr val="1F2A44"/>
-                          </a:solidFill>
-                          <a:latin typeface="Exo 2" pitchFamily="34" charset="0"/>
-                          <a:ea typeface="Exo 2" pitchFamily="34" charset="-122"/>
-                          <a:cs typeface="Exo 2" pitchFamily="34" charset="-120"/>
-                        </a:rPr>
-                        <a:t>Clients: Board 61 'as at 17 Sep' vs dashboard 54 (17 Sep) and 60 (27 Sep)</a:t>
-                      </a:r>
-                      <a:endParaRPr lang="en-US" sz="1100" dirty="0">
-                        <a:latin typeface="Exo 2" charset="0"/>
-                        <a:ea typeface="Exo 2" charset="0"/>
-                        <a:cs typeface="Exo 2" charset="0"/>
-                      </a:endParaRPr>
-                    </a:p>
-                  </a:txBody>
-                  <a:tcPr marL="63500" marR="63500" marT="25400" marB="25400" anchor="ctr">
-                    <a:lnL w="0" cap="flat" cmpd="sng" algn="ctr">
-                      <a:noFill/>
-                    </a:lnL>
-                    <a:lnR w="0" cap="flat" cmpd="sng" algn="ctr">
-                      <a:noFill/>
-                    </a:lnR>
-                    <a:lnT w="0" cap="flat" cmpd="sng" algn="ctr">
-                      <a:noFill/>
-                    </a:lnT>
-                    <a:lnB w="9525" cap="flat" cmpd="sng" algn="ctr">
-                      <a:solidFill>
-                        <a:srgbClr val="D9DFEA"/>
-                      </a:solidFill>
-                      <a:prstDash val="solid"/>
-                      <a:round/>
-                      <a:headEnd type="none" w="med" len="med"/>
-                      <a:tailEnd type="none" w="med" len="med"/>
-                    </a:lnB>
-                  </a:tcPr>
-                </a:tc>
-                <a:tc>
-                  <a:txBody>
-                    <a:bodyPr/>
-                    <a:lstStyle/>
-                    <a:p>
-                      <a:pPr indent="0" marL="0">
-                        <a:buNone/>
-                      </a:pPr>
-                      <a:r>
-                        <a:rPr lang="en-US" sz="1100" dirty="0">
-                          <a:solidFill>
-                            <a:srgbClr val="1F2A44"/>
-                          </a:solidFill>
-                          <a:latin typeface="Exo 2" pitchFamily="34" charset="0"/>
-                          <a:ea typeface="Exo 2" pitchFamily="34" charset="-122"/>
-                          <a:cs typeface="Exo 2" pitchFamily="34" charset="-120"/>
-                        </a:rPr>
-                        <a:t>Board figure may run ahead of source</a:t>
-                      </a:r>
-                      <a:endParaRPr lang="en-US" sz="1100" dirty="0">
-                        <a:latin typeface="Exo 2" charset="0"/>
-                        <a:ea typeface="Exo 2" charset="0"/>
-                        <a:cs typeface="Exo 2" charset="0"/>
-                      </a:endParaRPr>
-                    </a:p>
-                  </a:txBody>
-                  <a:tcPr marL="63500" marR="63500" marT="25400" marB="25400" anchor="ctr">
-                    <a:lnL w="0" cap="flat" cmpd="sng" algn="ctr">
-                      <a:noFill/>
-                    </a:lnL>
-                    <a:lnR w="0" cap="flat" cmpd="sng" algn="ctr">
-                      <a:noFill/>
-                    </a:lnR>
-                    <a:lnT w="0" cap="flat" cmpd="sng" algn="ctr">
-                      <a:noFill/>
-                    </a:lnT>
-                    <a:lnB w="9525" cap="flat" cmpd="sng" algn="ctr">
-                      <a:solidFill>
-                        <a:srgbClr val="D9DFEA"/>
-                      </a:solidFill>
-                      <a:prstDash val="solid"/>
-                      <a:round/>
-                      <a:headEnd type="none" w="med" len="med"/>
-                      <a:tailEnd type="none" w="med" len="med"/>
-                    </a:lnB>
-                  </a:tcPr>
-                </a:tc>
-                <a:tc>
-                  <a:txBody>
-                    <a:bodyPr/>
-                    <a:lstStyle/>
-                    <a:p>
-                      <a:pPr indent="0" marL="0">
-                        <a:buNone/>
-                      </a:pPr>
-                      <a:r>
-                        <a:rPr lang="en-US" sz="1100" dirty="0">
-                          <a:solidFill>
-                            <a:srgbClr val="1F2A44"/>
-                          </a:solidFill>
-                          <a:latin typeface="Exo 2" pitchFamily="34" charset="0"/>
-                          <a:ea typeface="Exo 2" pitchFamily="34" charset="-122"/>
-                          <a:cs typeface="Exo 2" pitchFamily="34" charset="-120"/>
-                        </a:rPr>
-                        <a:t>Malek</a:t>
-                      </a:r>
-                      <a:endParaRPr lang="en-US" sz="1100" dirty="0">
-                        <a:latin typeface="Exo 2" charset="0"/>
-                        <a:ea typeface="Exo 2" charset="0"/>
-                        <a:cs typeface="Exo 2" charset="0"/>
-                      </a:endParaRPr>
-                    </a:p>
-                  </a:txBody>
-                  <a:tcPr marL="63500" marR="63500" marT="25400" marB="25400" anchor="ctr">
-                    <a:lnL w="0" cap="flat" cmpd="sng" algn="ctr">
-                      <a:noFill/>
-                    </a:lnL>
-                    <a:lnR w="0" cap="flat" cmpd="sng" algn="ctr">
-                      <a:noFill/>
-                    </a:lnR>
-                    <a:lnT w="0" cap="flat" cmpd="sng" algn="ctr">
-                      <a:noFill/>
-                    </a:lnT>
-                    <a:lnB w="9525" cap="flat" cmpd="sng" algn="ctr">
-                      <a:solidFill>
-                        <a:srgbClr val="D9DFEA"/>
-                      </a:solidFill>
-                      <a:prstDash val="solid"/>
-                      <a:round/>
-                      <a:headEnd type="none" w="med" len="med"/>
-                      <a:tailEnd type="none" w="med" len="med"/>
-                    </a:lnB>
-                  </a:tcPr>
-                </a:tc>
-                <a:tc>
-                  <a:txBody>
-                    <a:bodyPr/>
-                    <a:lstStyle/>
-                    <a:p>
-                      <a:pPr indent="0" marL="0">
-                        <a:buNone/>
-                      </a:pPr>
-                      <a:r>
-                        <a:rPr lang="en-US" sz="1100" dirty="0">
-                          <a:solidFill>
-                            <a:srgbClr val="1F2A44"/>
-                          </a:solidFill>
-                          <a:latin typeface="Exo 2" pitchFamily="34" charset="0"/>
-                          <a:ea typeface="Exo 2" pitchFamily="34" charset="-122"/>
-                          <a:cs typeface="Exo 2" pitchFamily="34" charset="-120"/>
-                        </a:rPr>
-                        <a:t>8 Oct</a:t>
-                      </a:r>
-                      <a:endParaRPr lang="en-US" sz="1100" dirty="0">
-                        <a:latin typeface="Exo 2" charset="0"/>
-                        <a:ea typeface="Exo 2" charset="0"/>
-                        <a:cs typeface="Exo 2" charset="0"/>
-                      </a:endParaRPr>
-                    </a:p>
-                  </a:txBody>
-                  <a:tcPr marL="63500" marR="63500" marT="25400" marB="25400" anchor="ctr">
-                    <a:lnL w="0" cap="flat" cmpd="sng" algn="ctr">
-                      <a:noFill/>
-                    </a:lnL>
-                    <a:lnR w="0" cap="flat" cmpd="sng" algn="ctr">
-                      <a:noFill/>
-                    </a:lnR>
-                    <a:lnT w="0" cap="flat" cmpd="sng" algn="ctr">
-                      <a:noFill/>
-                    </a:lnT>
-                    <a:lnB w="9525" cap="flat" cmpd="sng" algn="ctr">
-                      <a:solidFill>
-                        <a:srgbClr val="D9DFEA"/>
-                      </a:solidFill>
-                      <a:prstDash val="solid"/>
-                      <a:round/>
-                      <a:headEnd type="none" w="med" len="med"/>
-                      <a:tailEnd type="none" w="med" len="med"/>
-                    </a:lnB>
-                  </a:tcPr>
-                </a:tc>
-                <a:tc>
-                  <a:txBody>
-                    <a:bodyPr/>
-                    <a:lstStyle/>
-                    <a:p>
-                      <a:pPr indent="0" marL="0">
-                        <a:buNone/>
-                      </a:pPr>
-                      <a:r>
-                        <a:rPr lang="en-US" sz="1100" dirty="0">
-                          <a:solidFill>
-                            <a:srgbClr val="C53030"/>
-                          </a:solidFill>
-                          <a:latin typeface="Exo 2" pitchFamily="34" charset="0"/>
-                          <a:ea typeface="Exo 2" pitchFamily="34" charset="-122"/>
-                          <a:cs typeface="Exo 2" pitchFamily="34" charset="-120"/>
-                        </a:rPr>
-                        <a:t>● </a:t>
-                      </a:r>
-                      <a:pPr indent="0" marL="0">
-                        <a:buNone/>
-                      </a:pPr>
-                      <a:r>
-                        <a:rPr lang="en-US" sz="1100" b="1" dirty="0">
-                          <a:solidFill>
-                            <a:srgbClr val="C53030"/>
-                          </a:solidFill>
-                          <a:latin typeface="Exo 2" pitchFamily="34" charset="0"/>
-                          <a:ea typeface="Exo 2" pitchFamily="34" charset="-122"/>
-                          <a:cs typeface="Exo 2" pitchFamily="34" charset="-120"/>
-                        </a:rPr>
-                        <a:t>Open</a:t>
-                      </a:r>
-                      <a:endParaRPr lang="en-US" sz="1100" dirty="0">
-                        <a:latin typeface="Exo 2" charset="0"/>
-                        <a:ea typeface="Exo 2" charset="0"/>
-                        <a:cs typeface="Exo 2" charset="0"/>
-                      </a:endParaRPr>
-                    </a:p>
-                  </a:txBody>
-                  <a:tcPr marL="63500" marR="63500" marT="25400" marB="25400" anchor="ctr">
-                    <a:lnL w="0" cap="flat" cmpd="sng" algn="ctr">
-                      <a:noFill/>
-                    </a:lnL>
-                    <a:lnR w="0" cap="flat" cmpd="sng" algn="ctr">
-                      <a:noFill/>
-                    </a:lnR>
-                    <a:lnT w="0" cap="flat" cmpd="sng" algn="ctr">
-                      <a:noFill/>
-                    </a:lnT>
-                    <a:lnB w="9525" cap="flat" cmpd="sng" algn="ctr">
-                      <a:solidFill>
-                        <a:srgbClr val="D9DFEA"/>
-                      </a:solidFill>
-                      <a:prstDash val="solid"/>
-                      <a:round/>
-                      <a:headEnd type="none" w="med" len="med"/>
-                      <a:tailEnd type="none" w="med" len="med"/>
-                    </a:lnB>
-                  </a:tcPr>
-                </a:tc>
-              </a:tr>
-              <a:tr h="475488">
-                <a:tc>
-                  <a:txBody>
-                    <a:bodyPr/>
-                    <a:lstStyle/>
-                    <a:p>
-                      <a:pPr indent="0" marL="0">
-                        <a:buNone/>
-                      </a:pPr>
-                      <a:r>
-                        <a:rPr lang="en-US" sz="1100" dirty="0">
-                          <a:solidFill>
-                            <a:srgbClr val="1F2A44"/>
-                          </a:solidFill>
-                          <a:latin typeface="Exo 2" pitchFamily="34" charset="0"/>
-                          <a:ea typeface="Exo 2" pitchFamily="34" charset="-122"/>
-                          <a:cs typeface="Exo 2" pitchFamily="34" charset="-120"/>
-                        </a:rPr>
-                        <a:t>6</a:t>
-                      </a:r>
-                      <a:endParaRPr lang="en-US" sz="1100" dirty="0">
-                        <a:latin typeface="Exo 2" charset="0"/>
-                        <a:ea typeface="Exo 2" charset="0"/>
-                        <a:cs typeface="Exo 2" charset="0"/>
-                      </a:endParaRPr>
-                    </a:p>
-                  </a:txBody>
-                  <a:tcPr marL="63500" marR="63500" marT="25400" marB="25400" anchor="ctr">
-                    <a:lnL w="0" cap="flat" cmpd="sng" algn="ctr">
-                      <a:noFill/>
-                    </a:lnL>
-                    <a:lnR w="0" cap="flat" cmpd="sng" algn="ctr">
-                      <a:noFill/>
-                    </a:lnR>
-                    <a:lnT w="0" cap="flat" cmpd="sng" algn="ctr">
-                      <a:noFill/>
-                    </a:lnT>
-                    <a:lnB w="9525" cap="flat" cmpd="sng" algn="ctr">
-                      <a:solidFill>
-                        <a:srgbClr val="D9DFEA"/>
-                      </a:solidFill>
-                      <a:prstDash val="solid"/>
-                      <a:round/>
-                      <a:headEnd type="none" w="med" len="med"/>
-                      <a:tailEnd type="none" w="med" len="med"/>
-                    </a:lnB>
-                  </a:tcPr>
-                </a:tc>
-                <a:tc>
-                  <a:txBody>
-                    <a:bodyPr/>
-                    <a:lstStyle/>
-                    <a:p>
-                      <a:pPr indent="0" marL="0">
-                        <a:buNone/>
-                      </a:pPr>
-                      <a:r>
-                        <a:rPr lang="en-US" sz="1100" dirty="0">
-                          <a:solidFill>
-                            <a:srgbClr val="1F2A44"/>
-                          </a:solidFill>
-                          <a:latin typeface="Exo 2" pitchFamily="34" charset="0"/>
-                          <a:ea typeface="Exo 2" pitchFamily="34" charset="-122"/>
-                          <a:cs typeface="Exo 2" pitchFamily="34" charset="-120"/>
-                        </a:rPr>
-                        <a:t>LinkedIn followers: 531 now, 586 in an earlier count</a:t>
-                      </a:r>
-                      <a:endParaRPr lang="en-US" sz="1100" dirty="0">
-                        <a:latin typeface="Exo 2" charset="0"/>
-                        <a:ea typeface="Exo 2" charset="0"/>
-                        <a:cs typeface="Exo 2" charset="0"/>
-                      </a:endParaRPr>
-                    </a:p>
-                  </a:txBody>
-                  <a:tcPr marL="63500" marR="63500" marT="25400" marB="25400" anchor="ctr">
-                    <a:lnL w="0" cap="flat" cmpd="sng" algn="ctr">
-                      <a:noFill/>
-                    </a:lnL>
-                    <a:lnR w="0" cap="flat" cmpd="sng" algn="ctr">
-                      <a:noFill/>
-                    </a:lnR>
-                    <a:lnT w="0" cap="flat" cmpd="sng" algn="ctr">
-                      <a:noFill/>
-                    </a:lnT>
-                    <a:lnB w="9525" cap="flat" cmpd="sng" algn="ctr">
-                      <a:solidFill>
-                        <a:srgbClr val="D9DFEA"/>
-                      </a:solidFill>
-                      <a:prstDash val="solid"/>
-                      <a:round/>
-                      <a:headEnd type="none" w="med" len="med"/>
-                      <a:tailEnd type="none" w="med" len="med"/>
-                    </a:lnB>
-                  </a:tcPr>
-                </a:tc>
-                <a:tc>
-                  <a:txBody>
-                    <a:bodyPr/>
-                    <a:lstStyle/>
-                    <a:p>
-                      <a:pPr indent="0" marL="0">
-                        <a:buNone/>
-                      </a:pPr>
-                      <a:r>
-                        <a:rPr lang="en-US" sz="1100" dirty="0">
-                          <a:solidFill>
-                            <a:srgbClr val="1F2A44"/>
-                          </a:solidFill>
-                          <a:latin typeface="Exo 2" pitchFamily="34" charset="0"/>
-                          <a:ea typeface="Exo 2" pitchFamily="34" charset="-122"/>
-                          <a:cs typeface="Exo 2" pitchFamily="34" charset="-120"/>
-                        </a:rPr>
-                        <a:t>Growth claim unreliable</a:t>
-                      </a:r>
-                      <a:endParaRPr lang="en-US" sz="1100" dirty="0">
-                        <a:latin typeface="Exo 2" charset="0"/>
-                        <a:ea typeface="Exo 2" charset="0"/>
-                        <a:cs typeface="Exo 2" charset="0"/>
-                      </a:endParaRPr>
-                    </a:p>
-                  </a:txBody>
-                  <a:tcPr marL="63500" marR="63500" marT="25400" marB="25400" anchor="ctr">
-                    <a:lnL w="0" cap="flat" cmpd="sng" algn="ctr">
-                      <a:noFill/>
-                    </a:lnL>
-                    <a:lnR w="0" cap="flat" cmpd="sng" algn="ctr">
-                      <a:noFill/>
-                    </a:lnR>
-                    <a:lnT w="0" cap="flat" cmpd="sng" algn="ctr">
-                      <a:noFill/>
-                    </a:lnT>
-                    <a:lnB w="9525" cap="flat" cmpd="sng" algn="ctr">
-                      <a:solidFill>
-                        <a:srgbClr val="D9DFEA"/>
-                      </a:solidFill>
-                      <a:prstDash val="solid"/>
-                      <a:round/>
-                      <a:headEnd type="none" w="med" len="med"/>
-                      <a:tailEnd type="none" w="med" len="med"/>
-                    </a:lnB>
-                  </a:tcPr>
-                </a:tc>
-                <a:tc>
-                  <a:txBody>
-                    <a:bodyPr/>
-                    <a:lstStyle/>
-                    <a:p>
-                      <a:pPr indent="0" marL="0">
-                        <a:buNone/>
-                      </a:pPr>
-                      <a:r>
-                        <a:rPr lang="en-US" sz="1100" dirty="0">
-                          <a:solidFill>
-                            <a:srgbClr val="1F2A44"/>
-                          </a:solidFill>
-                          <a:latin typeface="Exo 2" pitchFamily="34" charset="0"/>
-                          <a:ea typeface="Exo 2" pitchFamily="34" charset="-122"/>
-                          <a:cs typeface="Exo 2" pitchFamily="34" charset="-120"/>
-                        </a:rPr>
-                        <a:t>Marketing with Ignite</a:t>
-                      </a:r>
-                      <a:endParaRPr lang="en-US" sz="1100" dirty="0">
-                        <a:latin typeface="Exo 2" charset="0"/>
-                        <a:ea typeface="Exo 2" charset="0"/>
-                        <a:cs typeface="Exo 2" charset="0"/>
-                      </a:endParaRPr>
-                    </a:p>
-                  </a:txBody>
-                  <a:tcPr marL="63500" marR="63500" marT="25400" marB="25400" anchor="ctr">
-                    <a:lnL w="0" cap="flat" cmpd="sng" algn="ctr">
-                      <a:noFill/>
-                    </a:lnL>
-                    <a:lnR w="0" cap="flat" cmpd="sng" algn="ctr">
-                      <a:noFill/>
-                    </a:lnR>
-                    <a:lnT w="0" cap="flat" cmpd="sng" algn="ctr">
-                      <a:noFill/>
-                    </a:lnT>
-                    <a:lnB w="9525" cap="flat" cmpd="sng" algn="ctr">
-                      <a:solidFill>
-                        <a:srgbClr val="D9DFEA"/>
-                      </a:solidFill>
-                      <a:prstDash val="solid"/>
-                      <a:round/>
-                      <a:headEnd type="none" w="med" len="med"/>
-                      <a:tailEnd type="none" w="med" len="med"/>
-                    </a:lnB>
-                  </a:tcPr>
-                </a:tc>
-                <a:tc>
-                  <a:txBody>
-                    <a:bodyPr/>
-                    <a:lstStyle/>
-                    <a:p>
-                      <a:pPr indent="0" marL="0">
-                        <a:buNone/>
-                      </a:pPr>
-                      <a:r>
-                        <a:rPr lang="en-US" sz="1100" dirty="0">
-                          <a:solidFill>
-                            <a:srgbClr val="1F2A44"/>
-                          </a:solidFill>
-                          <a:latin typeface="Exo 2" pitchFamily="34" charset="0"/>
-                          <a:ea typeface="Exo 2" pitchFamily="34" charset="-122"/>
-                          <a:cs typeface="Exo 2" pitchFamily="34" charset="-120"/>
-                        </a:rPr>
-                        <a:t>8 Oct</a:t>
-                      </a:r>
-                      <a:endParaRPr lang="en-US" sz="1100" dirty="0">
-                        <a:latin typeface="Exo 2" charset="0"/>
-                        <a:ea typeface="Exo 2" charset="0"/>
-                        <a:cs typeface="Exo 2" charset="0"/>
-                      </a:endParaRPr>
-                    </a:p>
-                  </a:txBody>
-                  <a:tcPr marL="63500" marR="63500" marT="25400" marB="25400" anchor="ctr">
-                    <a:lnL w="0" cap="flat" cmpd="sng" algn="ctr">
-                      <a:noFill/>
-                    </a:lnL>
-                    <a:lnR w="0" cap="flat" cmpd="sng" algn="ctr">
-                      <a:noFill/>
-                    </a:lnR>
-                    <a:lnT w="0" cap="flat" cmpd="sng" algn="ctr">
-                      <a:noFill/>
-                    </a:lnT>
-                    <a:lnB w="9525" cap="flat" cmpd="sng" algn="ctr">
-                      <a:solidFill>
-                        <a:srgbClr val="D9DFEA"/>
-                      </a:solidFill>
-                      <a:prstDash val="solid"/>
-                      <a:round/>
-                      <a:headEnd type="none" w="med" len="med"/>
-                      <a:tailEnd type="none" w="med" len="med"/>
-                    </a:lnB>
-                  </a:tcPr>
-                </a:tc>
-                <a:tc>
-                  <a:txBody>
-                    <a:bodyPr/>
-                    <a:lstStyle/>
-                    <a:p>
-                      <a:pPr indent="0" marL="0">
-                        <a:buNone/>
-                      </a:pPr>
-                      <a:r>
-                        <a:rPr lang="en-US" sz="1100" dirty="0">
-                          <a:solidFill>
-                            <a:srgbClr val="C53030"/>
-                          </a:solidFill>
-                          <a:latin typeface="Exo 2" pitchFamily="34" charset="0"/>
-                          <a:ea typeface="Exo 2" pitchFamily="34" charset="-122"/>
-                          <a:cs typeface="Exo 2" pitchFamily="34" charset="-120"/>
-                        </a:rPr>
-                        <a:t>● </a:t>
-                      </a:r>
-                      <a:pPr indent="0" marL="0">
-                        <a:buNone/>
-                      </a:pPr>
-                      <a:r>
-                        <a:rPr lang="en-US" sz="1100" b="1" dirty="0">
-                          <a:solidFill>
-                            <a:srgbClr val="C53030"/>
-                          </a:solidFill>
-                          <a:latin typeface="Exo 2" pitchFamily="34" charset="0"/>
-                          <a:ea typeface="Exo 2" pitchFamily="34" charset="-122"/>
-                          <a:cs typeface="Exo 2" pitchFamily="34" charset="-120"/>
-                        </a:rPr>
-                        <a:t>Open</a:t>
-                      </a:r>
-                      <a:endParaRPr lang="en-US" sz="1100" dirty="0">
-                        <a:latin typeface="Exo 2" charset="0"/>
-                        <a:ea typeface="Exo 2" charset="0"/>
-                        <a:cs typeface="Exo 2" charset="0"/>
-                      </a:endParaRPr>
-                    </a:p>
-                  </a:txBody>
-                  <a:tcPr marL="63500" marR="63500" marT="25400" marB="25400" anchor="ctr">
-                    <a:lnL w="0" cap="flat" cmpd="sng" algn="ctr">
-                      <a:noFill/>
-                    </a:lnL>
-                    <a:lnR w="0" cap="flat" cmpd="sng" algn="ctr">
-                      <a:noFill/>
-                    </a:lnR>
-                    <a:lnT w="0" cap="flat" cmpd="sng" algn="ctr">
-                      <a:noFill/>
-                    </a:lnT>
-                    <a:lnB w="9525" cap="flat" cmpd="sng" algn="ctr">
-                      <a:solidFill>
-                        <a:srgbClr val="D9DFEA"/>
-                      </a:solidFill>
-                      <a:prstDash val="solid"/>
-                      <a:round/>
-                      <a:headEnd type="none" w="med" len="med"/>
-                      <a:tailEnd type="none" w="med" len="med"/>
-                    </a:lnB>
-                  </a:tcPr>
-                </a:tc>
-              </a:tr>
-              <a:tr h="475488">
-                <a:tc>
-                  <a:txBody>
-                    <a:bodyPr/>
-                    <a:lstStyle/>
-                    <a:p>
-                      <a:pPr indent="0" marL="0">
-                        <a:buNone/>
-                      </a:pPr>
-                      <a:r>
-                        <a:rPr lang="en-US" sz="1100" dirty="0">
-                          <a:solidFill>
-                            <a:srgbClr val="1F2A44"/>
-                          </a:solidFill>
-                          <a:latin typeface="Exo 2" pitchFamily="34" charset="0"/>
-                          <a:ea typeface="Exo 2" pitchFamily="34" charset="-122"/>
-                          <a:cs typeface="Exo 2" pitchFamily="34" charset="-120"/>
-                        </a:rPr>
-                        <a:t>7</a:t>
-                      </a:r>
-                      <a:endParaRPr lang="en-US" sz="1100" dirty="0">
-                        <a:latin typeface="Exo 2" charset="0"/>
-                        <a:ea typeface="Exo 2" charset="0"/>
-                        <a:cs typeface="Exo 2" charset="0"/>
-                      </a:endParaRPr>
-                    </a:p>
-                  </a:txBody>
-                  <a:tcPr marL="63500" marR="63500" marT="25400" marB="25400" anchor="ctr">
-                    <a:lnL w="0" cap="flat" cmpd="sng" algn="ctr">
-                      <a:noFill/>
-                    </a:lnL>
-                    <a:lnR w="0" cap="flat" cmpd="sng" algn="ctr">
-                      <a:noFill/>
-                    </a:lnR>
-                    <a:lnT w="0" cap="flat" cmpd="sng" algn="ctr">
-                      <a:noFill/>
-                    </a:lnT>
-                    <a:lnB w="9525" cap="flat" cmpd="sng" algn="ctr">
-                      <a:solidFill>
-                        <a:srgbClr val="D9DFEA"/>
-                      </a:solidFill>
-                      <a:prstDash val="solid"/>
-                      <a:round/>
-                      <a:headEnd type="none" w="med" len="med"/>
-                      <a:tailEnd type="none" w="med" len="med"/>
-                    </a:lnB>
-                  </a:tcPr>
-                </a:tc>
-                <a:tc>
-                  <a:txBody>
-                    <a:bodyPr/>
-                    <a:lstStyle/>
-                    <a:p>
-                      <a:pPr indent="0" marL="0">
-                        <a:buNone/>
-                      </a:pPr>
-                      <a:r>
-                        <a:rPr lang="en-US" sz="1100" dirty="0">
-                          <a:solidFill>
-                            <a:srgbClr val="1F2A44"/>
-                          </a:solidFill>
-                          <a:latin typeface="Exo 2" pitchFamily="34" charset="0"/>
-                          <a:ea typeface="Exo 2" pitchFamily="34" charset="-122"/>
-                          <a:cs typeface="Exo 2" pitchFamily="34" charset="-120"/>
-                        </a:rPr>
-                        <a:t>$5,000 campaign T&amp;Cs sent for approval 20 Jul, no sign-off on file; Market Pulse feature in discussion</a:t>
-                      </a:r>
-                      <a:endParaRPr lang="en-US" sz="1100" dirty="0">
-                        <a:latin typeface="Exo 2" charset="0"/>
-                        <a:ea typeface="Exo 2" charset="0"/>
-                        <a:cs typeface="Exo 2" charset="0"/>
-                      </a:endParaRPr>
-                    </a:p>
-                  </a:txBody>
-                  <a:tcPr marL="63500" marR="63500" marT="25400" marB="25400" anchor="ctr">
-                    <a:lnL w="0" cap="flat" cmpd="sng" algn="ctr">
-                      <a:noFill/>
-                    </a:lnL>
-                    <a:lnR w="0" cap="flat" cmpd="sng" algn="ctr">
-                      <a:noFill/>
-                    </a:lnR>
-                    <a:lnT w="0" cap="flat" cmpd="sng" algn="ctr">
-                      <a:noFill/>
-                    </a:lnT>
-                    <a:lnB w="9525" cap="flat" cmpd="sng" algn="ctr">
-                      <a:solidFill>
-                        <a:srgbClr val="D9DFEA"/>
-                      </a:solidFill>
-                      <a:prstDash val="solid"/>
-                      <a:round/>
-                      <a:headEnd type="none" w="med" len="med"/>
-                      <a:tailEnd type="none" w="med" len="med"/>
-                    </a:lnB>
-                  </a:tcPr>
-                </a:tc>
-                <a:tc>
-                  <a:txBody>
-                    <a:bodyPr/>
-                    <a:lstStyle/>
-                    <a:p>
-                      <a:pPr indent="0" marL="0">
-                        <a:buNone/>
-                      </a:pPr>
-                      <a:r>
-                        <a:rPr lang="en-US" sz="1100" dirty="0">
-                          <a:solidFill>
-                            <a:srgbClr val="1F2A44"/>
-                          </a:solidFill>
-                          <a:latin typeface="Exo 2" pitchFamily="34" charset="0"/>
-                          <a:ea typeface="Exo 2" pitchFamily="34" charset="-122"/>
-                          <a:cs typeface="Exo 2" pitchFamily="34" charset="-120"/>
-                        </a:rPr>
-                        <a:t>Regulatory and content dependency</a:t>
-                      </a:r>
-                      <a:endParaRPr lang="en-US" sz="1100" dirty="0">
-                        <a:latin typeface="Exo 2" charset="0"/>
-                        <a:ea typeface="Exo 2" charset="0"/>
-                        <a:cs typeface="Exo 2" charset="0"/>
-                      </a:endParaRPr>
-                    </a:p>
-                  </a:txBody>
-                  <a:tcPr marL="63500" marR="63500" marT="25400" marB="25400" anchor="ctr">
-                    <a:lnL w="0" cap="flat" cmpd="sng" algn="ctr">
-                      <a:noFill/>
-                    </a:lnL>
-                    <a:lnR w="0" cap="flat" cmpd="sng" algn="ctr">
-                      <a:noFill/>
-                    </a:lnR>
-                    <a:lnT w="0" cap="flat" cmpd="sng" algn="ctr">
-                      <a:noFill/>
-                    </a:lnT>
-                    <a:lnB w="9525" cap="flat" cmpd="sng" algn="ctr">
-                      <a:solidFill>
-                        <a:srgbClr val="D9DFEA"/>
-                      </a:solidFill>
-                      <a:prstDash val="solid"/>
-                      <a:round/>
-                      <a:headEnd type="none" w="med" len="med"/>
-                      <a:tailEnd type="none" w="med" len="med"/>
-                    </a:lnB>
-                  </a:tcPr>
-                </a:tc>
-                <a:tc>
-                  <a:txBody>
-                    <a:bodyPr/>
-                    <a:lstStyle/>
-                    <a:p>
-                      <a:pPr indent="0" marL="0">
-                        <a:buNone/>
-                      </a:pPr>
-                      <a:r>
-                        <a:rPr lang="en-US" sz="1100" dirty="0">
-                          <a:solidFill>
-                            <a:srgbClr val="1F2A44"/>
-                          </a:solidFill>
-                          <a:latin typeface="Exo 2" pitchFamily="34" charset="0"/>
-                          <a:ea typeface="Exo 2" pitchFamily="34" charset="-122"/>
-                          <a:cs typeface="Exo 2" pitchFamily="34" charset="-120"/>
-                        </a:rPr>
-                        <a:t>Compliance, IT</a:t>
-                      </a:r>
-                      <a:endParaRPr lang="en-US" sz="1100" dirty="0">
-                        <a:latin typeface="Exo 2" charset="0"/>
-                        <a:ea typeface="Exo 2" charset="0"/>
-                        <a:cs typeface="Exo 2" charset="0"/>
-                      </a:endParaRPr>
-                    </a:p>
-                  </a:txBody>
-                  <a:tcPr marL="63500" marR="63500" marT="25400" marB="25400" anchor="ctr">
-                    <a:lnL w="0" cap="flat" cmpd="sng" algn="ctr">
-                      <a:noFill/>
-                    </a:lnL>
-                    <a:lnR w="0" cap="flat" cmpd="sng" algn="ctr">
-                      <a:noFill/>
-                    </a:lnR>
-                    <a:lnT w="0" cap="flat" cmpd="sng" algn="ctr">
-                      <a:noFill/>
-                    </a:lnT>
-                    <a:lnB w="9525" cap="flat" cmpd="sng" algn="ctr">
-                      <a:solidFill>
-                        <a:srgbClr val="D9DFEA"/>
-                      </a:solidFill>
-                      <a:prstDash val="solid"/>
-                      <a:round/>
-                      <a:headEnd type="none" w="med" len="med"/>
-                      <a:tailEnd type="none" w="med" len="med"/>
-                    </a:lnB>
-                  </a:tcPr>
-                </a:tc>
-                <a:tc>
-                  <a:txBody>
-                    <a:bodyPr/>
-                    <a:lstStyle/>
-                    <a:p>
-                      <a:pPr indent="0" marL="0">
-                        <a:buNone/>
-                      </a:pPr>
-                      <a:r>
-                        <a:rPr lang="en-US" sz="1100" dirty="0">
-                          <a:solidFill>
-                            <a:srgbClr val="1F2A44"/>
-                          </a:solidFill>
-                          <a:latin typeface="Exo 2" pitchFamily="34" charset="0"/>
-                          <a:ea typeface="Exo 2" pitchFamily="34" charset="-122"/>
-                          <a:cs typeface="Exo 2" pitchFamily="34" charset="-120"/>
-                        </a:rPr>
-                        <a:t>15 Oct</a:t>
-                      </a:r>
-                      <a:endParaRPr lang="en-US" sz="1100" dirty="0">
-                        <a:latin typeface="Exo 2" charset="0"/>
-                        <a:ea typeface="Exo 2" charset="0"/>
-                        <a:cs typeface="Exo 2" charset="0"/>
-                      </a:endParaRPr>
-                    </a:p>
-                  </a:txBody>
-                  <a:tcPr marL="63500" marR="63500" marT="25400" marB="25400" anchor="ctr">
-                    <a:lnL w="0" cap="flat" cmpd="sng" algn="ctr">
-                      <a:noFill/>
-                    </a:lnL>
-                    <a:lnR w="0" cap="flat" cmpd="sng" algn="ctr">
-                      <a:noFill/>
-                    </a:lnR>
-                    <a:lnT w="0" cap="flat" cmpd="sng" algn="ctr">
-                      <a:noFill/>
-                    </a:lnT>
-                    <a:lnB w="9525" cap="flat" cmpd="sng" algn="ctr">
-                      <a:solidFill>
-                        <a:srgbClr val="D9DFEA"/>
-                      </a:solidFill>
-                      <a:prstDash val="solid"/>
-                      <a:round/>
-                      <a:headEnd type="none" w="med" len="med"/>
-                      <a:tailEnd type="none" w="med" len="med"/>
-                    </a:lnB>
-                  </a:tcPr>
-                </a:tc>
-                <a:tc>
-                  <a:txBody>
-                    <a:bodyPr/>
-                    <a:lstStyle/>
-                    <a:p>
-                      <a:pPr indent="0" marL="0">
-                        <a:buNone/>
-                      </a:pPr>
-                      <a:r>
-                        <a:rPr lang="en-US" sz="1100" dirty="0">
-                          <a:solidFill>
-                            <a:srgbClr val="9A7B1F"/>
-                          </a:solidFill>
-                          <a:latin typeface="Exo 2" pitchFamily="34" charset="0"/>
-                          <a:ea typeface="Exo 2" pitchFamily="34" charset="-122"/>
-                          <a:cs typeface="Exo 2" pitchFamily="34" charset="-120"/>
-                        </a:rPr>
-                        <a:t>● </a:t>
-                      </a:r>
-                      <a:pPr indent="0" marL="0">
-                        <a:buNone/>
-                      </a:pPr>
-                      <a:r>
-                        <a:rPr lang="en-US" sz="1100" b="1" dirty="0">
-                          <a:solidFill>
-                            <a:srgbClr val="9A7B1F"/>
-                          </a:solidFill>
-                          <a:latin typeface="Exo 2" pitchFamily="34" charset="0"/>
-                          <a:ea typeface="Exo 2" pitchFamily="34" charset="-122"/>
-                          <a:cs typeface="Exo 2" pitchFamily="34" charset="-120"/>
-                        </a:rPr>
-                        <a:t>Pending evidence</a:t>
-                      </a:r>
-                      <a:endParaRPr lang="en-US" sz="1100" dirty="0">
+                      <a:endParaRPr lang="en-US" sz="950" dirty="0">
                         <a:latin typeface="Exo 2" charset="0"/>
                         <a:ea typeface="Exo 2" charset="0"/>
                         <a:cs typeface="Exo 2" charset="0"/>

--- a/emyaa-ceo-deck/output/final-deck/eMYAA-Marketing-Update-01.10.2026-CEO-Redesigned.pptx
+++ b/emyaa-ceo-deck/output/final-deck/eMYAA-Marketing-Update-01.10.2026-CEO-Redesigned.pptx
@@ -1152,7 +1152,7 @@
           <a:p>
             <a:r>
               <a:rPr lang="en-US" dirty="0"/>
-              <a:t>Decision 2 follows from the GA4 campaign export: Arabic has a lower engagement rate (86.9% vs 97.2%) but more key events per session (1.05 vs 0.94). Decision 3 follows from the dashboards: +36 downloads but +3 onboarded in the first six days of paid testing. Open items: deposits $12,206 (Board, verbal from Malek) vs $10,029.69 on the dashboard (relabelled 'Total AUM' from 20 Sep) vs $11,195.88 in the KPI workbook; clients 61 on the Board 'as at 17 Sep' vs 54 on the 17 Sep dashboard and 60 on 27 Sep; no Ignite spend, cost per key event or LinkedIn lead data, and the key event is undefined; no September social exports; the 793% active-user rise (GA card, prior week implied) and LinkedIn +118% / +155% are not traceable to an export; LinkedIn followers 531 vs 586; $5,000 campaign T&amp;Cs sent for approval on 20 Jul with no sign-off on file. Market Pulse: in-app feature in discussion (Exante data access).</a:t>
+              <a:t>Decision 2 follows from the GA4 campaign export: Arabic has a lower engagement rate (86.9% vs 97.2%) but more key events per session (1.05 vs 0.94). Decision 3 follows from the dashboards: +36 downloads but +3 onboarded in the first six days of paid testing. Open items: gross deposits of $12,206 rest on Malek's message of 29 Sep with no written export (the dashboard's $10,029.69 is assets under management, a different measure; the Board shows both); the Board figures (61 clients, $12,206) are as at 28 Sep, and Board slide 3 wrongly says 'as at 17 September', corrected in the separate Board update file; no Ignite spend, cost per key event or LinkedIn lead data, and the key event is undefined; no September social exports; the 793% active-user rise (GA card, prior week implied) and LinkedIn +118% / +155% are not traceable to an export; LinkedIn followers 531 vs 586; $5,000 campaign T&amp;Cs sent for approval on 20 Jul with no sign-off on file. Market Pulse: in-app feature in discussion (Exante data access).</a:t>
             </a:r>
             <a:endParaRPr lang="en-US" dirty="0"/>
           </a:p>
@@ -5213,7 +5213,7 @@
                 <a:ea typeface="Exo 2" pitchFamily="34" charset="-122"/>
                 <a:cs typeface="Exo 2" pitchFamily="34" charset="-120"/>
               </a:rPr>
-              <a:t>Five decisions for today; three open data items must close before 20 October</a:t>
+              <a:t>Five decisions for today; one open data item blocks the 20 October call</a:t>
             </a:r>
             <a:endParaRPr lang="en-US" sz="2000" dirty="0"/>
           </a:p>
@@ -5340,7 +5340,7 @@
                 <a:ea typeface="Exo 2" pitchFamily="34" charset="-122"/>
                 <a:cs typeface="Exo 2" pitchFamily="34" charset="-120"/>
               </a:rPr>
-              <a:t>Decision 4 closes most of the open items. The three marked 'Blocks 20 Oct' must close before the paid-media call.</a:t>
+              <a:t>Ignite must supply spend and lead data before 20 October. Decision 4 closes most of the other open items.</a:t>
             </a:r>
             <a:endParaRPr lang="en-US" sz="1150" dirty="0"/>
           </a:p>
@@ -6770,7 +6770,7 @@
                           <a:ea typeface="Exo 2" pitchFamily="34" charset="-122"/>
                           <a:cs typeface="Exo 2" pitchFamily="34" charset="-120"/>
                         </a:rPr>
-                        <a:t>Deposits: three different figures; Board $12,206 is verbal</a:t>
+                        <a:t>No ad spend, LinkedIn leads or key-event definition</a:t>
                       </a:r>
                       <a:endParaRPr lang="en-US" sz="950" dirty="0">
                         <a:latin typeface="Exo 2" charset="0"/>
@@ -6866,7 +6866,7 @@
                           <a:ea typeface="Exo 2" pitchFamily="34" charset="-122"/>
                           <a:cs typeface="Exo 2" pitchFamily="34" charset="-120"/>
                         </a:rPr>
-                        <a:t>Clients: Board 61 vs dashboard 54 on 17 Sep</a:t>
+                        <a:t>Deposits: $12,206 has no written export yet</a:t>
                       </a:r>
                       <a:endParaRPr lang="en-US" sz="950" dirty="0">
                         <a:latin typeface="Exo 2" charset="0"/>
@@ -6907,13 +6907,13 @@
                       <a:r>
                         <a:rPr lang="en-US" sz="950" b="1" dirty="0">
                           <a:solidFill>
-                            <a:srgbClr val="C53030"/>
-                          </a:solidFill>
-                          <a:latin typeface="Exo 2" pitchFamily="34" charset="0"/>
-                          <a:ea typeface="Exo 2" pitchFamily="34" charset="-122"/>
-                          <a:cs typeface="Exo 2" pitchFamily="34" charset="-120"/>
-                        </a:rPr>
-                        <a:t>Blocks 20 Oct</a:t>
+                            <a:srgbClr val="9A7B1F"/>
+                          </a:solidFill>
+                          <a:latin typeface="Exo 2" pitchFamily="34" charset="0"/>
+                          <a:ea typeface="Exo 2" pitchFamily="34" charset="-122"/>
+                          <a:cs typeface="Exo 2" pitchFamily="34" charset="-120"/>
+                        </a:rPr>
+                        <a:t>Open</a:t>
                       </a:r>
                       <a:endParaRPr lang="en-US" sz="950" dirty="0">
                         <a:latin typeface="Exo 2" charset="0"/>
@@ -6962,7 +6962,7 @@
                           <a:ea typeface="Exo 2" pitchFamily="34" charset="-122"/>
                           <a:cs typeface="Exo 2" pitchFamily="34" charset="-120"/>
                         </a:rPr>
-                        <a:t>No ad spend, LinkedIn leads or key-event definition</a:t>
+                        <a:t>No September exports for social channels</a:t>
                       </a:r>
                       <a:endParaRPr lang="en-US" sz="950" dirty="0">
                         <a:latin typeface="Exo 2" charset="0"/>
@@ -7003,13 +7003,13 @@
                       <a:r>
                         <a:rPr lang="en-US" sz="950" b="1" dirty="0">
                           <a:solidFill>
-                            <a:srgbClr val="C53030"/>
-                          </a:solidFill>
-                          <a:latin typeface="Exo 2" pitchFamily="34" charset="0"/>
-                          <a:ea typeface="Exo 2" pitchFamily="34" charset="-122"/>
-                          <a:cs typeface="Exo 2" pitchFamily="34" charset="-120"/>
-                        </a:rPr>
-                        <a:t>Blocks 20 Oct</a:t>
+                            <a:srgbClr val="9A7B1F"/>
+                          </a:solidFill>
+                          <a:latin typeface="Exo 2" pitchFamily="34" charset="0"/>
+                          <a:ea typeface="Exo 2" pitchFamily="34" charset="-122"/>
+                          <a:cs typeface="Exo 2" pitchFamily="34" charset="-120"/>
+                        </a:rPr>
+                        <a:t>Open</a:t>
                       </a:r>
                       <a:endParaRPr lang="en-US" sz="950" dirty="0">
                         <a:latin typeface="Exo 2" charset="0"/>
@@ -7058,7 +7058,7 @@
                           <a:ea typeface="Exo 2" pitchFamily="34" charset="-122"/>
                           <a:cs typeface="Exo 2" pitchFamily="34" charset="-120"/>
                         </a:rPr>
-                        <a:t>No September exports for social channels</a:t>
+                        <a:t>793% and LinkedIn +118% / +155% not exported</a:t>
                       </a:r>
                       <a:endParaRPr lang="en-US" sz="950" dirty="0">
                         <a:latin typeface="Exo 2" charset="0"/>
@@ -7154,7 +7154,7 @@
                           <a:ea typeface="Exo 2" pitchFamily="34" charset="-122"/>
                           <a:cs typeface="Exo 2" pitchFamily="34" charset="-120"/>
                         </a:rPr>
-                        <a:t>793% and LinkedIn +118% / +155% not exported</a:t>
+                        <a:t>LinkedIn followers: 531 vs 586</a:t>
                       </a:r>
                       <a:endParaRPr lang="en-US" sz="950" dirty="0">
                         <a:latin typeface="Exo 2" charset="0"/>
@@ -7250,7 +7250,7 @@
                           <a:ea typeface="Exo 2" pitchFamily="34" charset="-122"/>
                           <a:cs typeface="Exo 2" pitchFamily="34" charset="-120"/>
                         </a:rPr>
-                        <a:t>LinkedIn followers: 531 vs 586</a:t>
+                        <a:t>$5,000 campaign T&amp;C sign-off not on file</a:t>
                       </a:r>
                       <a:endParaRPr lang="en-US" sz="950" dirty="0">
                         <a:latin typeface="Exo 2" charset="0"/>
@@ -7346,7 +7346,7 @@
                           <a:ea typeface="Exo 2" pitchFamily="34" charset="-122"/>
                           <a:cs typeface="Exo 2" pitchFamily="34" charset="-120"/>
                         </a:rPr>
-                        <a:t>$5,000 campaign T&amp;C sign-off not on file</a:t>
+                        <a:t>Board slide 3 date: 17 Sep should read 28 Sep</a:t>
                       </a:r>
                       <a:endParaRPr lang="en-US" sz="950" dirty="0">
                         <a:latin typeface="Exo 2" charset="0"/>
@@ -7387,13 +7387,13 @@
                       <a:r>
                         <a:rPr lang="en-US" sz="950" b="1" dirty="0">
                           <a:solidFill>
-                            <a:srgbClr val="9A7B1F"/>
-                          </a:solidFill>
-                          <a:latin typeface="Exo 2" pitchFamily="34" charset="0"/>
-                          <a:ea typeface="Exo 2" pitchFamily="34" charset="-122"/>
-                          <a:cs typeface="Exo 2" pitchFamily="34" charset="-120"/>
-                        </a:rPr>
-                        <a:t>Open</a:t>
+                            <a:srgbClr val="1BA97C"/>
+                          </a:solidFill>
+                          <a:latin typeface="Exo 2" pitchFamily="34" charset="0"/>
+                          <a:ea typeface="Exo 2" pitchFamily="34" charset="-122"/>
+                          <a:cs typeface="Exo 2" pitchFamily="34" charset="-120"/>
+                        </a:rPr>
+                        <a:t>Fixed</a:t>
                       </a:r>
                       <a:endParaRPr lang="en-US" sz="950" dirty="0">
                         <a:latin typeface="Exo 2" charset="0"/>

--- a/emyaa-ceo-deck/output/final-deck/eMYAA-Marketing-Update-01.10.2026-CEO-Redesigned.pptx
+++ b/emyaa-ceo-deck/output/final-deck/eMYAA-Marketing-Update-01.10.2026-CEO-Redesigned.pptx
@@ -9,19 +9,21 @@
     <p:sldId id="257" r:id="rId3"/>
     <p:sldId id="258" r:id="rId4"/>
     <p:sldId id="259" r:id="rId5"/>
+    <p:sldId id="260" r:id="rId6"/>
+    <p:sldId id="261" r:id="rId7"/>
   </p:sldIdLst>
   <p:notesMasterIdLst>
-    <p:notesMasterId r:id="rId6"/>
+    <p:notesMasterId r:id="rId8"/>
   </p:notesMasterIdLst>
   <p:sldSz cx="12192000" cy="6858000"/>
   <p:notesSz cx="6858000" cy="12192000"/>
   <p:embeddedFontLst>
     <p:embeddedFont>
       <p:font typeface="Exo 2" charset="0"/>
-      <p:regular r:id="rId11"/>
-      <p:bold r:id="rId12"/>
-      <p:italic r:id="rId13"/>
-      <p:boldItalic r:id="rId14"/>
+      <p:regular r:id="rId13"/>
+      <p:bold r:id="rId14"/>
+      <p:italic r:id="rId15"/>
+      <p:boldItalic r:id="rId16"/>
     </p:embeddedFont>
   </p:embeddedFontLst>
   <p:defaultTextStyle>
@@ -493,6 +495,816 @@
 </c:chartSpace>
 </file>
 
+<file path=ppt/charts/chart2.xml><?xml version="1.0" encoding="utf-8"?>
+<c:chartSpace xmlns:c="http://schemas.openxmlformats.org/drawingml/2006/chart" xmlns:a="http://schemas.openxmlformats.org/drawingml/2006/main" xmlns:r="http://schemas.openxmlformats.org/officeDocument/2006/relationships">
+  <c:date1904 val="0"/>
+  <c:roundedCorners val="1"/>
+  <c:chart>
+    <c:title>
+      <c:tx>
+        <c:rich>
+          <a:bodyPr/>
+          <a:lstStyle/>
+          <a:p>
+            <a:pPr>
+              <a:defRPr sz="1100" b="0" i="0" u="none" strike="noStrike">
+                <a:solidFill>
+                  <a:srgbClr val="132257"/>
+                </a:solidFill>
+                <a:latin typeface="Exo 2"/>
+              </a:defRPr>
+            </a:pPr>
+            <a:r>
+              <a:rPr sz="1100" b="0" i="0" u="none" strike="noStrike">
+                <a:solidFill>
+                  <a:srgbClr val="132257"/>
+                </a:solidFill>
+                <a:latin typeface="Exo 2"/>
+              </a:rPr>
+              <a:t>App installs, cumulative (Android + iOS), by dashboard report date</a:t>
+            </a:r>
+          </a:p>
+        </c:rich>
+      </c:tx>
+      <c:layout/>
+      <c:overlay val="0"/>
+    </c:title>
+    <c:autoTitleDeleted val="0"/>
+    <c:plotArea>
+      <c:layout/>
+      <c:lineChart>
+        <c:varyColors val="0"/>
+        <c:ser>
+          <c:idx val="0"/>
+          <c:order val="0"/>
+          <c:tx>
+            <c:strRef>
+              <c:f>Sheet1!$B$1</c:f>
+              <c:strCache>
+                <c:ptCount val="1"/>
+                <c:pt idx="0">
+                  <c:v>App installs, cumulative</c:v>
+                </c:pt>
+              </c:strCache>
+            </c:strRef>
+          </c:tx>
+          <c:spPr>
+            <a:solidFill>
+              <a:srgbClr val="132257"/>
+            </a:solidFill>
+            <a:ln w="31750" cap="flat">
+              <a:solidFill>
+                <a:srgbClr val="132257"/>
+              </a:solidFill>
+              <a:prstDash val="solid"/>
+              <a:round/>
+            </a:ln>
+            <a:effectLst/>
+          </c:spPr>
+          <c:invertIfNegative val="0"/>
+          <c:dLbls>
+            <c:numFmt formatCode="#,##0" sourceLinked="0"/>
+            <c:txPr>
+              <a:bodyPr/>
+              <a:lstStyle/>
+              <a:p>
+                <a:pPr>
+                  <a:defRPr b="0" i="0" strike="noStrike" sz="1000" u="none">
+                    <a:solidFill>
+                      <a:srgbClr val="132257"/>
+                    </a:solidFill>
+                    <a:latin typeface="Exo 2"/>
+                  </a:defRPr>
+                </a:pPr>
+              </a:p>
+            </c:txPr>
+            <c:showLegendKey val="0"/>
+            <c:showVal val="0"/>
+            <c:showCatName val="0"/>
+            <c:showSerName val="0"/>
+            <c:showPercent val="0"/>
+            <c:showBubbleSize val="0"/>
+            <c:showLeaderLines val="0"/>
+          </c:dLbls>
+          <c:marker>
+            <c:symbol val="circle"/>
+            <c:size val="6"/>
+            <c:spPr>
+              <a:solidFill>
+                <a:srgbClr val="132257"/>
+              </a:solidFill>
+              <a:ln w="9525" cap="flat">
+                <a:solidFill>
+                  <a:srgbClr val="132257"/>
+                </a:solidFill>
+                <a:prstDash val="solid"/>
+                <a:round/>
+              </a:ln>
+              <a:effectLst/>
+            </c:spPr>
+          </c:marker>
+          <c:cat>
+            <c:multiLvlStrRef>
+              <c:f>Sheet1!$A$2:$A$17</c:f>
+              <c:multiLvlStrCache>
+                <c:ptCount val="16"/>
+                <c:lvl>
+                  <c:pt idx="0">
+                    <c:v>1 Sep</c:v>
+                  </c:pt>
+                  <c:pt idx="1">
+                    <c:v>2</c:v>
+                  </c:pt>
+                  <c:pt idx="2">
+                    <c:v>3</c:v>
+                  </c:pt>
+                  <c:pt idx="3">
+                    <c:v>8</c:v>
+                  </c:pt>
+                  <c:pt idx="4">
+                    <c:v>9</c:v>
+                  </c:pt>
+                  <c:pt idx="5">
+                    <c:v>10</c:v>
+                  </c:pt>
+                  <c:pt idx="6">
+                    <c:v>13</c:v>
+                  </c:pt>
+                  <c:pt idx="7">
+                    <c:v>14</c:v>
+                  </c:pt>
+                  <c:pt idx="8">
+                    <c:v>16</c:v>
+                  </c:pt>
+                  <c:pt idx="9">
+                    <c:v>17</c:v>
+                  </c:pt>
+                  <c:pt idx="10">
+                    <c:v>20</c:v>
+                  </c:pt>
+                  <c:pt idx="11">
+                    <c:v>21</c:v>
+                  </c:pt>
+                  <c:pt idx="12">
+                    <c:v>22 Sep: ads live</c:v>
+                  </c:pt>
+                  <c:pt idx="13">
+                    <c:v>23</c:v>
+                  </c:pt>
+                  <c:pt idx="14">
+                    <c:v>24</c:v>
+                  </c:pt>
+                  <c:pt idx="15">
+                    <c:v>27 Sep</c:v>
+                  </c:pt>
+                </c:lvl>
+              </c:multiLvlStrCache>
+            </c:multiLvlStrRef>
+          </c:cat>
+          <c:val>
+            <c:numRef>
+              <c:f>Sheet1!$B$2:$B$17</c:f>
+              <c:numCache>
+                <c:formatCode>General</c:formatCode>
+                <c:ptCount val="16"/>
+                <c:pt idx="0">
+                  <c:v>373</c:v>
+                </c:pt>
+                <c:pt idx="1">
+                  <c:v>389</c:v>
+                </c:pt>
+                <c:pt idx="2">
+                  <c:v>395</c:v>
+                </c:pt>
+                <c:pt idx="3">
+                  <c:v>403</c:v>
+                </c:pt>
+                <c:pt idx="4">
+                  <c:v>410</c:v>
+                </c:pt>
+                <c:pt idx="5">
+                  <c:v>414</c:v>
+                </c:pt>
+                <c:pt idx="6">
+                  <c:v>419</c:v>
+                </c:pt>
+                <c:pt idx="7">
+                  <c:v>423</c:v>
+                </c:pt>
+                <c:pt idx="8">
+                  <c:v>430</c:v>
+                </c:pt>
+                <c:pt idx="9">
+                  <c:v>432</c:v>
+                </c:pt>
+                <c:pt idx="10">
+                  <c:v>437</c:v>
+                </c:pt>
+                <c:pt idx="11">
+                  <c:v>437</c:v>
+                </c:pt>
+                <c:pt idx="12">
+                  <c:v>452</c:v>
+                </c:pt>
+                <c:pt idx="13">
+                  <c:v>454</c:v>
+                </c:pt>
+                <c:pt idx="14">
+                  <c:v>455</c:v>
+                </c:pt>
+                <c:pt idx="15">
+                  <c:v>473</c:v>
+                </c:pt>
+              </c:numCache>
+            </c:numRef>
+          </c:val>
+          <c:smooth val="0"/>
+        </c:ser>
+        <c:dLbls>
+          <c:numFmt formatCode="#,##0" sourceLinked="0"/>
+          <c:txPr>
+            <a:bodyPr/>
+            <a:lstStyle/>
+            <a:p>
+              <a:pPr>
+                <a:defRPr b="0" i="0" strike="noStrike" sz="1000" u="none">
+                  <a:solidFill>
+                    <a:srgbClr val="132257"/>
+                  </a:solidFill>
+                  <a:latin typeface="Exo 2"/>
+                </a:defRPr>
+              </a:pPr>
+            </a:p>
+          </c:txPr>
+          <c:showLegendKey val="0"/>
+          <c:showVal val="0"/>
+          <c:showCatName val="0"/>
+          <c:showSerName val="0"/>
+          <c:showPercent val="0"/>
+          <c:showBubbleSize val="0"/>
+          <c:showLeaderLines val="0"/>
+        </c:dLbls>
+        <c:marker val="1"/>
+        <c:axId val="2094734554"/>
+        <c:axId val="2094734552"/>
+        <c:axId val="2094734556"/>
+      </c:lineChart>
+      <c:catAx>
+        <c:axId val="2094734554"/>
+        <c:scaling>
+          <c:orientation val="minMax"/>
+        </c:scaling>
+        <c:delete val="0"/>
+        <c:axPos val="b"/>
+        <c:numFmt formatCode="General" sourceLinked="1"/>
+        <c:majorTickMark val="out"/>
+        <c:minorTickMark val="none"/>
+        <c:tickLblPos val="low"/>
+        <c:spPr>
+          <a:ln w="12700" cap="flat">
+            <a:solidFill>
+              <a:srgbClr val="888888"/>
+            </a:solidFill>
+            <a:prstDash val="solid"/>
+            <a:round/>
+          </a:ln>
+        </c:spPr>
+        <c:txPr>
+          <a:bodyPr/>
+          <a:lstStyle/>
+          <a:p>
+            <a:pPr>
+              <a:defRPr sz="850" b="0" i="0" u="none" strike="noStrike">
+                <a:solidFill>
+                  <a:srgbClr val="7A849C"/>
+                </a:solidFill>
+                <a:latin typeface="Exo 2"/>
+              </a:defRPr>
+            </a:pPr>
+            <a:endParaRPr lang="en-US"/>
+          </a:p>
+        </c:txPr>
+        <c:crossAx val="2094734552"/>
+        <c:crosses val="autoZero"/>
+        <c:auto val="1"/>
+        <c:lblAlgn val="ctr"/>
+        <c:noMultiLvlLbl val="1"/>
+      </c:catAx>
+      <c:valAx>
+        <c:axId val="2094734552"/>
+        <c:scaling>
+          <c:orientation val="minMax"/>
+          <c:max val="480"/>
+          <c:min val="360"/>
+        </c:scaling>
+        <c:delete val="0"/>
+        <c:axPos val="l"/>
+        <c:majorGridlines>
+          <c:spPr>
+            <a:ln w="6350" cap="flat">
+              <a:solidFill>
+                <a:srgbClr val="E6EAF2"/>
+              </a:solidFill>
+              <a:prstDash val="solid"/>
+              <a:round/>
+            </a:ln>
+          </c:spPr>
+        </c:majorGridlines>
+        <c:numFmt formatCode="General" sourceLinked="0"/>
+        <c:majorTickMark val="out"/>
+        <c:minorTickMark val="none"/>
+        <c:tickLblPos val="nextTo"/>
+        <c:spPr>
+          <a:ln w="12700" cap="flat">
+            <a:solidFill>
+              <a:srgbClr val="888888"/>
+            </a:solidFill>
+            <a:prstDash val="solid"/>
+            <a:round/>
+          </a:ln>
+        </c:spPr>
+        <c:txPr>
+          <a:bodyPr/>
+          <a:lstStyle/>
+          <a:p>
+            <a:pPr>
+              <a:defRPr sz="900" b="0" i="0" u="none" strike="noStrike">
+                <a:solidFill>
+                  <a:srgbClr val="7A849C"/>
+                </a:solidFill>
+                <a:latin typeface="Exo 2"/>
+              </a:defRPr>
+            </a:pPr>
+            <a:endParaRPr lang="en-US"/>
+          </a:p>
+        </c:txPr>
+        <c:crossAx val="2094734554"/>
+        <c:crosses val="autoZero"/>
+        <c:crossBetween val="between"/>
+        <c:majorUnit val="30"/>
+      </c:valAx>
+      <c:spPr>
+        <a:noFill/>
+        <a:ln>
+          <a:noFill/>
+        </a:ln>
+        <a:effectLst/>
+      </c:spPr>
+    </c:plotArea>
+    <c:plotVisOnly val="1"/>
+    <c:dispBlanksAs val="span"/>
+  </c:chart>
+  <c:spPr>
+    <a:noFill/>
+    <a:ln>
+      <a:noFill/>
+    </a:ln>
+    <a:effectLst/>
+  </c:spPr>
+  <c:externalData r:id="rId1">
+    <c:autoUpdate val="0"/>
+  </c:externalData>
+</c:chartSpace>
+</file>
+
+<file path=ppt/charts/chart3.xml><?xml version="1.0" encoding="utf-8"?>
+<c:chartSpace xmlns:c="http://schemas.openxmlformats.org/drawingml/2006/chart" xmlns:a="http://schemas.openxmlformats.org/drawingml/2006/main" xmlns:r="http://schemas.openxmlformats.org/officeDocument/2006/relationships">
+  <c:date1904 val="0"/>
+  <c:roundedCorners val="1"/>
+  <c:chart>
+    <c:title>
+      <c:tx>
+        <c:rich>
+          <a:bodyPr/>
+          <a:lstStyle/>
+          <a:p>
+            <a:pPr>
+              <a:defRPr sz="1100" b="0" i="0" u="none" strike="noStrike">
+                <a:solidFill>
+                  <a:srgbClr val="132257"/>
+                </a:solidFill>
+                <a:latin typeface="Exo 2"/>
+              </a:defRPr>
+            </a:pPr>
+            <a:r>
+              <a:rPr sz="1100" b="0" i="0" u="none" strike="noStrike">
+                <a:solidFill>
+                  <a:srgbClr val="132257"/>
+                </a:solidFill>
+                <a:latin typeface="Exo 2"/>
+              </a:rPr>
+              <a:t>English relative to Arabic, % difference, 1-28 Sep</a:t>
+            </a:r>
+          </a:p>
+        </c:rich>
+      </c:tx>
+      <c:layout/>
+      <c:overlay val="0"/>
+    </c:title>
+    <c:autoTitleDeleted val="0"/>
+    <c:plotArea>
+      <c:layout/>
+      <c:barChart>
+        <c:barDir val="bar"/>
+        <c:grouping val="stacked"/>
+        <c:varyColors val="0"/>
+        <c:ser>
+          <c:idx val="0"/>
+          <c:order val="0"/>
+          <c:tx>
+            <c:strRef>
+              <c:f>Sheet1!$B$1</c:f>
+              <c:strCache>
+                <c:ptCount val="1"/>
+                <c:pt idx="0">
+                  <c:v>English ahead</c:v>
+                </c:pt>
+              </c:strCache>
+            </c:strRef>
+          </c:tx>
+          <c:spPr>
+            <a:solidFill>
+              <a:srgbClr val="132257"/>
+            </a:solidFill>
+            <a:effectLst/>
+          </c:spPr>
+          <c:invertIfNegative val="0"/>
+          <c:dLbls>
+            <c:numFmt formatCode="+0.0&quot;%&quot;;-0.0&quot;%&quot;;;" sourceLinked="0"/>
+            <c:txPr>
+              <a:bodyPr/>
+              <a:lstStyle/>
+              <a:p>
+                <a:pPr>
+                  <a:defRPr b="1" i="0" strike="noStrike" sz="1000" u="none">
+                    <a:solidFill>
+                      <a:srgbClr val="FFFFFF"/>
+                    </a:solidFill>
+                    <a:latin typeface="Exo 2"/>
+                  </a:defRPr>
+                </a:pPr>
+              </a:p>
+            </c:txPr>
+            <c:dLblPos val="inEnd"/>
+            <c:showLegendKey val="0"/>
+            <c:showVal val="1"/>
+            <c:showCatName val="0"/>
+            <c:showSerName val="0"/>
+            <c:showPercent val="0"/>
+            <c:showBubbleSize val="0"/>
+            <c:showLeaderLines val="0"/>
+          </c:dLbls>
+          <c:cat>
+            <c:multiLvlStrRef>
+              <c:f>Sheet1!$A$2:$A$10</c:f>
+              <c:multiLvlStrCache>
+                <c:ptCount val="9"/>
+                <c:lvl>
+                  <c:pt idx="0">
+                    <c:v>Sessions</c:v>
+                  </c:pt>
+                  <c:pt idx="1">
+                    <c:v>Active users</c:v>
+                  </c:pt>
+                  <c:pt idx="2">
+                    <c:v>Engaged sessions</c:v>
+                  </c:pt>
+                  <c:pt idx="3">
+                    <c:v>Engagement rate</c:v>
+                  </c:pt>
+                  <c:pt idx="4">
+                    <c:v>Time per session</c:v>
+                  </c:pt>
+                  <c:pt idx="5">
+                    <c:v>Events per session</c:v>
+                  </c:pt>
+                  <c:pt idx="6">
+                    <c:v>Total events</c:v>
+                  </c:pt>
+                  <c:pt idx="7">
+                    <c:v>Key events</c:v>
+                  </c:pt>
+                  <c:pt idx="8">
+                    <c:v>Key events per session</c:v>
+                  </c:pt>
+                </c:lvl>
+              </c:multiLvlStrCache>
+            </c:multiLvlStrRef>
+          </c:cat>
+          <c:val>
+            <c:numRef>
+              <c:f>Sheet1!$B$2:$B$10</c:f>
+              <c:numCache>
+                <c:formatCode>General</c:formatCode>
+                <c:ptCount val="9"/>
+                <c:pt idx="0">
+                  <c:v>20.5</c:v>
+                </c:pt>
+                <c:pt idx="1">
+                  <c:v>18.9</c:v>
+                </c:pt>
+                <c:pt idx="2">
+                  <c:v>34.6</c:v>
+                </c:pt>
+                <c:pt idx="3">
+                  <c:v>11.8</c:v>
+                </c:pt>
+                <c:pt idx="4">
+                  <c:v>24.2</c:v>
+                </c:pt>
+                <c:pt idx="5">
+                  <c:v>19.2</c:v>
+                </c:pt>
+                <c:pt idx="6">
+                  <c:v>43.6</c:v>
+                </c:pt>
+                <c:pt idx="7">
+                  <c:v>8.1</c:v>
+                </c:pt>
+                <c:pt idx="8">
+                  <c:v>0</c:v>
+                </c:pt>
+              </c:numCache>
+            </c:numRef>
+          </c:val>
+        </c:ser>
+        <c:ser>
+          <c:idx val="1"/>
+          <c:order val="1"/>
+          <c:tx>
+            <c:strRef>
+              <c:f>Sheet1!$C$1</c:f>
+              <c:strCache>
+                <c:ptCount val="1"/>
+                <c:pt idx="0">
+                  <c:v>Arabic ahead</c:v>
+                </c:pt>
+              </c:strCache>
+            </c:strRef>
+          </c:tx>
+          <c:spPr>
+            <a:solidFill>
+              <a:srgbClr val="D4AF37"/>
+            </a:solidFill>
+            <a:effectLst/>
+          </c:spPr>
+          <c:invertIfNegative val="0"/>
+          <c:dLbls>
+            <c:numFmt formatCode="+0.0&quot;%&quot;;-0.0&quot;%&quot;;;" sourceLinked="0"/>
+            <c:txPr>
+              <a:bodyPr/>
+              <a:lstStyle/>
+              <a:p>
+                <a:pPr>
+                  <a:defRPr b="1" i="0" strike="noStrike" sz="1000" u="none">
+                    <a:solidFill>
+                      <a:srgbClr val="FFFFFF"/>
+                    </a:solidFill>
+                    <a:latin typeface="Exo 2"/>
+                  </a:defRPr>
+                </a:pPr>
+              </a:p>
+            </c:txPr>
+            <c:dLblPos val="inEnd"/>
+            <c:showLegendKey val="0"/>
+            <c:showVal val="1"/>
+            <c:showCatName val="0"/>
+            <c:showSerName val="0"/>
+            <c:showPercent val="0"/>
+            <c:showBubbleSize val="0"/>
+            <c:showLeaderLines val="0"/>
+          </c:dLbls>
+          <c:cat>
+            <c:multiLvlStrRef>
+              <c:f>Sheet1!$A$2:$A$10</c:f>
+              <c:multiLvlStrCache>
+                <c:ptCount val="9"/>
+                <c:lvl>
+                  <c:pt idx="0">
+                    <c:v>Sessions</c:v>
+                  </c:pt>
+                  <c:pt idx="1">
+                    <c:v>Active users</c:v>
+                  </c:pt>
+                  <c:pt idx="2">
+                    <c:v>Engaged sessions</c:v>
+                  </c:pt>
+                  <c:pt idx="3">
+                    <c:v>Engagement rate</c:v>
+                  </c:pt>
+                  <c:pt idx="4">
+                    <c:v>Time per session</c:v>
+                  </c:pt>
+                  <c:pt idx="5">
+                    <c:v>Events per session</c:v>
+                  </c:pt>
+                  <c:pt idx="6">
+                    <c:v>Total events</c:v>
+                  </c:pt>
+                  <c:pt idx="7">
+                    <c:v>Key events</c:v>
+                  </c:pt>
+                  <c:pt idx="8">
+                    <c:v>Key events per session</c:v>
+                  </c:pt>
+                </c:lvl>
+              </c:multiLvlStrCache>
+            </c:multiLvlStrRef>
+          </c:cat>
+          <c:val>
+            <c:numRef>
+              <c:f>Sheet1!$C$2:$C$10</c:f>
+              <c:numCache>
+                <c:formatCode>General</c:formatCode>
+                <c:ptCount val="9"/>
+                <c:pt idx="0">
+                  <c:v>0</c:v>
+                </c:pt>
+                <c:pt idx="1">
+                  <c:v>0</c:v>
+                </c:pt>
+                <c:pt idx="2">
+                  <c:v>0</c:v>
+                </c:pt>
+                <c:pt idx="3">
+                  <c:v>0</c:v>
+                </c:pt>
+                <c:pt idx="4">
+                  <c:v>0</c:v>
+                </c:pt>
+                <c:pt idx="5">
+                  <c:v>0</c:v>
+                </c:pt>
+                <c:pt idx="6">
+                  <c:v>0</c:v>
+                </c:pt>
+                <c:pt idx="7">
+                  <c:v>0</c:v>
+                </c:pt>
+                <c:pt idx="8">
+                  <c:v>-10.2</c:v>
+                </c:pt>
+              </c:numCache>
+            </c:numRef>
+          </c:val>
+        </c:ser>
+        <c:dLbls>
+          <c:numFmt formatCode="+0.0&quot;%&quot;;-0.0&quot;%&quot;;;" sourceLinked="0"/>
+          <c:txPr>
+            <a:bodyPr/>
+            <a:lstStyle/>
+            <a:p>
+              <a:pPr>
+                <a:defRPr b="1" i="0" strike="noStrike" sz="1000" u="none">
+                  <a:solidFill>
+                    <a:srgbClr val="FFFFFF"/>
+                  </a:solidFill>
+                  <a:latin typeface="Exo 2"/>
+                </a:defRPr>
+              </a:pPr>
+            </a:p>
+          </c:txPr>
+          <c:dLblPos val="inEnd"/>
+          <c:showLegendKey val="0"/>
+          <c:showVal val="1"/>
+          <c:showCatName val="0"/>
+          <c:showSerName val="0"/>
+          <c:showPercent val="0"/>
+          <c:showBubbleSize val="0"/>
+          <c:showLeaderLines val="0"/>
+        </c:dLbls>
+        <c:gapWidth val="40"/>
+        <c:overlap val="100"/>
+        <c:axId val="2094734554"/>
+        <c:axId val="2094734552"/>
+        <c:axId val="2094734556"/>
+      </c:barChart>
+      <c:catAx>
+        <c:axId val="2094734554"/>
+        <c:scaling>
+          <c:orientation val="maxMin"/>
+        </c:scaling>
+        <c:delete val="0"/>
+        <c:axPos val="l"/>
+        <c:numFmt formatCode="General" sourceLinked="1"/>
+        <c:majorTickMark val="out"/>
+        <c:minorTickMark val="none"/>
+        <c:tickLblPos val="low"/>
+        <c:spPr>
+          <a:ln w="12700" cap="flat">
+            <a:solidFill>
+              <a:srgbClr val="888888"/>
+            </a:solidFill>
+            <a:prstDash val="solid"/>
+            <a:round/>
+          </a:ln>
+        </c:spPr>
+        <c:txPr>
+          <a:bodyPr/>
+          <a:lstStyle/>
+          <a:p>
+            <a:pPr>
+              <a:defRPr sz="1000" b="0" i="0" u="none" strike="noStrike">
+                <a:solidFill>
+                  <a:srgbClr val="1F2A44"/>
+                </a:solidFill>
+                <a:latin typeface="Exo 2"/>
+              </a:defRPr>
+            </a:pPr>
+            <a:endParaRPr lang="en-US"/>
+          </a:p>
+        </c:txPr>
+        <c:crossAx val="2094734552"/>
+        <c:crosses val="autoZero"/>
+        <c:auto val="1"/>
+        <c:lblAlgn val="ctr"/>
+        <c:noMultiLvlLbl val="1"/>
+      </c:catAx>
+      <c:valAx>
+        <c:axId val="2094734552"/>
+        <c:scaling>
+          <c:orientation val="minMax"/>
+          <c:max val="50"/>
+          <c:min val="-20"/>
+        </c:scaling>
+        <c:delete val="1"/>
+        <c:axPos val="b"/>
+        <c:numFmt formatCode="General" sourceLinked="0"/>
+        <c:majorTickMark val="out"/>
+        <c:minorTickMark val="none"/>
+        <c:tickLblPos val="low"/>
+        <c:spPr>
+          <a:ln w="12700" cap="flat">
+            <a:solidFill>
+              <a:srgbClr val="888888"/>
+            </a:solidFill>
+            <a:prstDash val="solid"/>
+            <a:round/>
+          </a:ln>
+        </c:spPr>
+        <c:txPr>
+          <a:bodyPr/>
+          <a:lstStyle/>
+          <a:p>
+            <a:pPr>
+              <a:defRPr sz="1200" b="0" i="0" u="none" strike="noStrike">
+                <a:solidFill>
+                  <a:srgbClr val="000000"/>
+                </a:solidFill>
+                <a:latin typeface="Arial"/>
+              </a:defRPr>
+            </a:pPr>
+            <a:endParaRPr lang="en-US"/>
+          </a:p>
+        </c:txPr>
+        <c:crossAx val="2094734554"/>
+        <c:crosses val="autoZero"/>
+        <c:crossBetween val="between"/>
+      </c:valAx>
+      <c:spPr>
+        <a:noFill/>
+        <a:ln>
+          <a:noFill/>
+        </a:ln>
+        <a:effectLst/>
+      </c:spPr>
+    </c:plotArea>
+    <c:legend>
+      <c:legendPos val="b"/>
+      <c:overlay val="0"/>
+      <c:txPr>
+        <a:bodyPr/>
+        <a:lstStyle/>
+        <a:p>
+          <a:pPr>
+            <a:defRPr sz="1000">
+              <a:solidFill>
+                <a:srgbClr val="1F2A44"/>
+              </a:solidFill>
+              <a:latin typeface="Exo 2"/>
+              <a:cs typeface="Exo 2"/>
+            </a:defRPr>
+          </a:pPr>
+          <a:endParaRPr lang="en-US"/>
+        </a:p>
+      </c:txPr>
+    </c:legend>
+    <c:plotVisOnly val="1"/>
+    <c:dispBlanksAs val="span"/>
+  </c:chart>
+  <c:spPr>
+    <a:noFill/>
+    <a:ln>
+      <a:noFill/>
+    </a:ln>
+    <a:effectLst/>
+  </c:spPr>
+  <c:externalData r:id="rId1">
+    <c:autoUpdate val="0"/>
+  </c:externalData>
+</c:chartSpace>
+</file>
+
 <file path=ppt/notesMasters/notesMaster1.xml><?xml version="1.0" encoding="utf-8"?>
 <p:notesMaster xmlns:a="http://schemas.openxmlformats.org/drawingml/2006/main" xmlns:r="http://schemas.openxmlformats.org/officeDocument/2006/relationships" xmlns:p="http://schemas.openxmlformats.org/presentationml/2006/main">
   <p:cSld>
@@ -1152,7 +1964,7 @@
           <a:p>
             <a:r>
               <a:rPr lang="en-US" dirty="0"/>
-              <a:t>Decision 2 follows from the GA4 campaign export: Arabic has a lower engagement rate (86.9% vs 97.2%) but more key events per session (1.05 vs 0.94). Decision 3 follows from the dashboards: +36 downloads but +3 onboarded in the first six days of paid testing. Open items: gross deposits of $12,206 rest on Malek's message of 29 Sep with no written export (the dashboard's $10,029.69 is assets under management, a different measure; the Board shows both); the Board figures (61 clients, $12,206) are as at 28 Sep, and Board slide 3 wrongly says 'as at 17 September', corrected in the separate Board update file; no Ignite spend, cost per key event or LinkedIn lead data, and the key event is undefined; no September social exports; the 793% active-user rise (GA card, prior week implied) and LinkedIn +118% / +155% are not traceable to an export; LinkedIn followers 531 vs 586; $5,000 campaign T&amp;Cs sent for approval on 20 Jul with no sign-off on file. Market Pulse: in-app feature in discussion (Exante data access).</a:t>
+              <a:t>Installs (Android + iOS, cumulative) on dashboard report dates: 1 Sep 373, 2 Sep 389, 3 Sep 395, 8 Sep 403, 9 Sep 410, 10 Sep 414, 13 Sep 419, 14 Sep 423, 16 Sep 430, 17 Sep 432, 20 Sep 437, 21 Sep 437, 22 Sep 452, 23 Sep 454, 24 Sep 455, 27 Sep 473. Report dates are irregular, so the line is spaced by report, not by calendar day. Pace: +36 in the six days 21-27 Sep (6 a day) vs +30 in 1-8 Sep (4.3 a day, when the Ali Sabeel video and baseline sponsor ads were running) and +14 in 14-21 Sep. Split 21-27 Sep: Android +17, iOS +19. Funnel: 409 google / cpc sessions and 400 key events in GA4 (1-28 Sep); the key event is not defined in the export. Installs and onboarding come from the platform dashboard and cover all sources; there is no link yet from an ad click to an install. The app link (onelink.to/gpbwrg) already exists and can carry campaign tags. Onboarded users 57 to 60 over 21-27 Sep.</a:t>
             </a:r>
             <a:endParaRPr lang="en-US" dirty="0"/>
           </a:p>
@@ -1176,6 +1988,182 @@
             <a:fld id="{F7021451-1387-4CA6-816F-3879F97B5CBC}" type="slidenum">
               <a:rPr lang="en-US"/>
               <a:t>4</a:t>
+            </a:fld>
+            <a:endParaRPr lang="en-US"/>
+          </a:p>
+        </p:txBody>
+      </p:sp>
+    </p:spTree>
+    <p:extLst>
+      <p:ext uri="{BB962C8B-B14F-4D97-AF65-F5344CB8AC3E}">
+        <p14:creationId xmlns:p14="http://schemas.microsoft.com/office/powerpoint/2010/main" val="1024086991"/>
+      </p:ext>
+    </p:extLst>
+  </p:cSld>
+  <p:clrMapOvr>
+    <a:masterClrMapping/>
+  </p:clrMapOvr>
+</p:notes>
+</file>
+
+<file path=ppt/notesSlides/notesSlide5.xml><?xml version="1.0" encoding="utf-8"?>
+<p:notes xmlns:a="http://schemas.openxmlformats.org/drawingml/2006/main" xmlns:r="http://schemas.openxmlformats.org/officeDocument/2006/relationships" xmlns:p="http://schemas.openxmlformats.org/presentationml/2006/main">
+  <p:cSld>
+    <p:spTree>
+      <p:nvGrpSpPr>
+        <p:cNvPr id="1" name=""/>
+        <p:cNvGrpSpPr/>
+        <p:nvPr/>
+      </p:nvGrpSpPr>
+      <p:grpSpPr>
+        <a:xfrm>
+          <a:off x="0" y="0"/>
+          <a:ext cx="0" cy="0"/>
+          <a:chOff x="0" y="0"/>
+          <a:chExt cx="0" cy="0"/>
+        </a:xfrm>
+      </p:grpSpPr>
+      <p:sp>
+        <p:nvSpPr>
+          <p:cNvPr id="2" name="Slide Image Placeholder 1"/>
+          <p:cNvSpPr>
+            <a:spLocks noGrp="1" noRot="1" noChangeAspect="1"/>
+          </p:cNvSpPr>
+          <p:nvPr>
+            <p:ph type="sldImg"/>
+          </p:nvPr>
+        </p:nvSpPr>
+        <p:spPr/>
+      </p:sp>
+      <p:sp>
+        <p:nvSpPr>
+          <p:cNvPr id="3" name="Notes Placeholder 2"/>
+          <p:cNvSpPr>
+            <a:spLocks noGrp="1"/>
+          </p:cNvSpPr>
+          <p:nvPr>
+            <p:ph type="body" idx="1"/>
+          </p:nvPr>
+        </p:nvSpPr>
+        <p:spPr/>
+        <p:txBody>
+          <a:bodyPr/>
+          <a:lstStyle/>
+          <a:p>
+            <a:r>
+              <a:rPr lang="en-US" dirty="0"/>
+              <a:t>English vs Arabic, 1-28 Sep: sessions 212 vs 176 (+20.5%); active users 208 vs 175 (+18.9%); engaged sessions 206 vs 153 (+34.6%); engagement rate 97.2% vs 86.9% (+10.2 points, +11.8% relative); average engagement time per session 19.9s vs 16.0s (+24.2%); events per session 6.49 vs 5.44 (+19.2%); event count 1,376 vs 958 (+43.6%); key events 200 vs 185 (+8.1%); key events per session 0.94 vs 1.05 (Arabic ahead by 10.2%). Early data from about one week of spend, and spend per campaign is not in the export, so this compares engagement, not cost efficiency. The previous draft's claim that English leads 'on every measured metric' is not correct.</a:t>
+            </a:r>
+            <a:endParaRPr lang="en-US" dirty="0"/>
+          </a:p>
+        </p:txBody>
+      </p:sp>
+      <p:sp>
+        <p:nvSpPr>
+          <p:cNvPr id="4" name="Slide Number Placeholder 3"/>
+          <p:cNvSpPr>
+            <a:spLocks noGrp="1"/>
+          </p:cNvSpPr>
+          <p:nvPr>
+            <p:ph type="sldNum" sz="quarter" idx="10"/>
+          </p:nvPr>
+        </p:nvSpPr>
+        <p:spPr/>
+        <p:txBody>
+          <a:bodyPr/>
+          <a:lstStyle/>
+          <a:p>
+            <a:fld id="{F7021451-1387-4CA6-816F-3879F97B5CBC}" type="slidenum">
+              <a:rPr lang="en-US"/>
+              <a:t>5</a:t>
+            </a:fld>
+            <a:endParaRPr lang="en-US"/>
+          </a:p>
+        </p:txBody>
+      </p:sp>
+    </p:spTree>
+    <p:extLst>
+      <p:ext uri="{BB962C8B-B14F-4D97-AF65-F5344CB8AC3E}">
+        <p14:creationId xmlns:p14="http://schemas.microsoft.com/office/powerpoint/2010/main" val="1024086991"/>
+      </p:ext>
+    </p:extLst>
+  </p:cSld>
+  <p:clrMapOvr>
+    <a:masterClrMapping/>
+  </p:clrMapOvr>
+</p:notes>
+</file>
+
+<file path=ppt/notesSlides/notesSlide6.xml><?xml version="1.0" encoding="utf-8"?>
+<p:notes xmlns:a="http://schemas.openxmlformats.org/drawingml/2006/main" xmlns:r="http://schemas.openxmlformats.org/officeDocument/2006/relationships" xmlns:p="http://schemas.openxmlformats.org/presentationml/2006/main">
+  <p:cSld>
+    <p:spTree>
+      <p:nvGrpSpPr>
+        <p:cNvPr id="1" name=""/>
+        <p:cNvGrpSpPr/>
+        <p:nvPr/>
+      </p:nvGrpSpPr>
+      <p:grpSpPr>
+        <a:xfrm>
+          <a:off x="0" y="0"/>
+          <a:ext cx="0" cy="0"/>
+          <a:chOff x="0" y="0"/>
+          <a:chExt cx="0" cy="0"/>
+        </a:xfrm>
+      </p:grpSpPr>
+      <p:sp>
+        <p:nvSpPr>
+          <p:cNvPr id="2" name="Slide Image Placeholder 1"/>
+          <p:cNvSpPr>
+            <a:spLocks noGrp="1" noRot="1" noChangeAspect="1"/>
+          </p:cNvSpPr>
+          <p:nvPr>
+            <p:ph type="sldImg"/>
+          </p:nvPr>
+        </p:nvSpPr>
+        <p:spPr/>
+      </p:sp>
+      <p:sp>
+        <p:nvSpPr>
+          <p:cNvPr id="3" name="Notes Placeholder 2"/>
+          <p:cNvSpPr>
+            <a:spLocks noGrp="1"/>
+          </p:cNvSpPr>
+          <p:nvPr>
+            <p:ph type="body" idx="1"/>
+          </p:nvPr>
+        </p:nvSpPr>
+        <p:spPr/>
+        <p:txBody>
+          <a:bodyPr/>
+          <a:lstStyle/>
+          <a:p>
+            <a:r>
+              <a:rPr lang="en-US" dirty="0"/>
+              <a:t>Decision 2 follows from the GA4 campaign export: Arabic has a lower engagement rate (86.9% vs 97.2%) but more key events per session (1.05 vs 0.94). Decision 3 follows from the dashboards: +36 downloads but +3 onboarded in the first six days of paid testing. Open items: gross deposits of $12,206 rest on Malek's message of 29 Sep with no written export (the dashboard's $10,029.69 is assets under management, a different measure; the Board shows both); the Board figures (61 clients, $12,206) are as at 28 Sep, and Board slide 3 wrongly says 'as at 17 September', corrected in the separate Board update file; no Ignite spend, cost per key event or LinkedIn lead data, and the key event is undefined; no September social exports; the 793% active-user rise (GA card, prior week implied) and LinkedIn +118% / +155% are not traceable to an export; LinkedIn followers 531 vs 586; $5,000 campaign T&amp;Cs sent for approval on 20 Jul with no sign-off on file. Market Pulse: in-app feature in discussion (Exante data access).</a:t>
+            </a:r>
+            <a:endParaRPr lang="en-US" dirty="0"/>
+          </a:p>
+        </p:txBody>
+      </p:sp>
+      <p:sp>
+        <p:nvSpPr>
+          <p:cNvPr id="4" name="Slide Number Placeholder 3"/>
+          <p:cNvSpPr>
+            <a:spLocks noGrp="1"/>
+          </p:cNvSpPr>
+          <p:nvPr>
+            <p:ph type="sldNum" sz="quarter" idx="10"/>
+          </p:nvPr>
+        </p:nvSpPr>
+        <p:spPr/>
+        <p:txBody>
+          <a:bodyPr/>
+          <a:lstStyle/>
+          <a:p>
+            <a:fld id="{F7021451-1387-4CA6-816F-3879F97B5CBC}" type="slidenum">
+              <a:rPr lang="en-US"/>
+              <a:t>6</a:t>
             </a:fld>
             <a:endParaRPr lang="en-US"/>
           </a:p>
@@ -5174,6 +6162,2387 @@
                 <a:ea typeface="Exo 2" pitchFamily="34" charset="-122"/>
                 <a:cs typeface="Exo 2" pitchFamily="34" charset="-120"/>
               </a:rPr>
+              <a:t>GOOGLE ADS AND INSTALLS</a:t>
+            </a:r>
+            <a:endParaRPr lang="en-US" sz="900" dirty="0"/>
+          </a:p>
+        </p:txBody>
+      </p:sp>
+      <p:sp>
+        <p:nvSpPr>
+          <p:cNvPr id="5" name="Text 2"/>
+          <p:cNvSpPr txBox="1"/>
+          <p:nvPr/>
+        </p:nvSpPr>
+        <p:spPr>
+          <a:xfrm>
+            <a:off x="566928" y="475488"/>
+            <a:ext cx="9326880" cy="749808"/>
+          </a:xfrm>
+          <a:prstGeom prst="rect">
+            <a:avLst/>
+          </a:prstGeom>
+          <a:noFill/>
+          <a:ln/>
+        </p:spPr>
+        <p:txBody>
+          <a:bodyPr wrap="square" lIns="0" tIns="0" rIns="0" bIns="0" rtlCol="0" anchor="ctr"/>
+          <a:lstStyle/>
+          <a:p>
+            <a:pPr indent="0" marL="0">
+              <a:buNone/>
+            </a:pPr>
+            <a:r>
+              <a:rPr lang="en-US" sz="2000" b="1" dirty="0">
+                <a:solidFill>
+                  <a:srgbClr val="FFFFFF"/>
+                </a:solidFill>
+                <a:latin typeface="Exo 2" pitchFamily="34" charset="0"/>
+                <a:ea typeface="Exo 2" pitchFamily="34" charset="-122"/>
+                <a:cs typeface="Exo 2" pitchFamily="34" charset="-120"/>
+              </a:rPr>
+              <a:t>Google Ads went live on 22 September; installs then grew at their fastest weekly pace of the month</a:t>
+            </a:r>
+            <a:endParaRPr lang="en-US" sz="2000" dirty="0"/>
+          </a:p>
+        </p:txBody>
+      </p:sp>
+      <p:pic>
+        <p:nvPicPr>
+          <p:cNvPr id="6" name="Image 1" descr="/home/user/HatemIsa_202508993_IT9002_NLP_Project/emyaa-ceo-deck/working/charts/ajyad_white.png">    </p:cNvPr>
+          <p:cNvPicPr>
+            <a:picLocks noChangeAspect="1"/>
+          </p:cNvPicPr>
+          <p:nvPr/>
+        </p:nvPicPr>
+        <p:blipFill>
+          <a:blip r:embed="rId2"/>
+          <a:stretch>
+            <a:fillRect/>
+          </a:stretch>
+        </p:blipFill>
+        <p:spPr>
+          <a:xfrm>
+            <a:off x="10305288" y="457200"/>
+            <a:ext cx="1325880" cy="384048"/>
+          </a:xfrm>
+          <a:prstGeom prst="rect">
+            <a:avLst/>
+          </a:prstGeom>
+        </p:spPr>
+      </p:pic>
+      <p:sp>
+        <p:nvSpPr>
+          <p:cNvPr id="7" name="Shape 3"/>
+          <p:cNvSpPr/>
+          <p:nvPr/>
+        </p:nvSpPr>
+        <p:spPr>
+          <a:xfrm>
+            <a:off x="566928" y="5669280"/>
+            <a:ext cx="11064240" cy="457200"/>
+          </a:xfrm>
+          <a:prstGeom prst="rect">
+            <a:avLst/>
+          </a:prstGeom>
+          <a:solidFill>
+            <a:srgbClr val="E3E8F2"/>
+          </a:solidFill>
+          <a:ln w="12700">
+            <a:solidFill>
+              <a:srgbClr val="E3E8F2"/>
+            </a:solidFill>
+            <a:prstDash val="solid"/>
+          </a:ln>
+        </p:spPr>
+      </p:sp>
+      <p:sp>
+        <p:nvSpPr>
+          <p:cNvPr id="8" name="Shape 4"/>
+          <p:cNvSpPr/>
+          <p:nvPr/>
+        </p:nvSpPr>
+        <p:spPr>
+          <a:xfrm>
+            <a:off x="566928" y="5669280"/>
+            <a:ext cx="45720" cy="457200"/>
+          </a:xfrm>
+          <a:prstGeom prst="rect">
+            <a:avLst/>
+          </a:prstGeom>
+          <a:solidFill>
+            <a:srgbClr val="D4AF37"/>
+          </a:solidFill>
+          <a:ln w="12700">
+            <a:solidFill>
+              <a:srgbClr val="D4AF37"/>
+            </a:solidFill>
+            <a:prstDash val="solid"/>
+          </a:ln>
+        </p:spPr>
+      </p:sp>
+      <p:sp>
+        <p:nvSpPr>
+          <p:cNvPr id="9" name="Text 5"/>
+          <p:cNvSpPr txBox="1"/>
+          <p:nvPr/>
+        </p:nvSpPr>
+        <p:spPr>
+          <a:xfrm>
+            <a:off x="777240" y="5669280"/>
+            <a:ext cx="10744200" cy="457200"/>
+          </a:xfrm>
+          <a:prstGeom prst="rect">
+            <a:avLst/>
+          </a:prstGeom>
+          <a:noFill/>
+          <a:ln/>
+        </p:spPr>
+        <p:txBody>
+          <a:bodyPr wrap="square" lIns="0" tIns="0" rIns="0" bIns="0" rtlCol="0" anchor="ctr"/>
+          <a:lstStyle/>
+          <a:p>
+            <a:pPr indent="0" marL="0">
+              <a:buNone/>
+            </a:pPr>
+            <a:r>
+              <a:rPr lang="en-US" sz="1150" b="1" dirty="0">
+                <a:solidFill>
+                  <a:srgbClr val="132257"/>
+                </a:solidFill>
+                <a:latin typeface="Exo 2" pitchFamily="34" charset="0"/>
+                <a:ea typeface="Exo 2" pitchFamily="34" charset="-122"/>
+                <a:cs typeface="Exo 2" pitchFamily="34" charset="-120"/>
+              </a:rPr>
+              <a:t>Takeaway   </a:t>
+            </a:r>
+            <a:pPr indent="0" marL="0">
+              <a:buNone/>
+            </a:pPr>
+            <a:r>
+              <a:rPr lang="en-US" sz="1150" dirty="0">
+                <a:solidFill>
+                  <a:srgbClr val="1F2A44"/>
+                </a:solidFill>
+                <a:latin typeface="Exo 2" pitchFamily="34" charset="0"/>
+                <a:ea typeface="Exo 2" pitchFamily="34" charset="-122"/>
+                <a:cs typeface="Exo 2" pitchFamily="34" charset="-120"/>
+              </a:rPr>
+              <a:t>Paid search is moving installs, but installs are not yet tracked back to the ads. Connect ad clicks to the app link so cost per install can be reported.</a:t>
+            </a:r>
+            <a:endParaRPr lang="en-US" sz="1150" dirty="0"/>
+          </a:p>
+        </p:txBody>
+      </p:sp>
+      <p:sp>
+        <p:nvSpPr>
+          <p:cNvPr id="10" name="Text 6"/>
+          <p:cNvSpPr txBox="1"/>
+          <p:nvPr/>
+        </p:nvSpPr>
+        <p:spPr>
+          <a:xfrm>
+            <a:off x="566928" y="6199632"/>
+            <a:ext cx="9692640" cy="274320"/>
+          </a:xfrm>
+          <a:prstGeom prst="rect">
+            <a:avLst/>
+          </a:prstGeom>
+          <a:noFill/>
+          <a:ln/>
+        </p:spPr>
+        <p:txBody>
+          <a:bodyPr wrap="square" lIns="0" tIns="0" rIns="0" bIns="0" rtlCol="0" anchor="t"/>
+          <a:lstStyle/>
+          <a:p>
+            <a:pPr indent="0" marL="0">
+              <a:buNone/>
+            </a:pPr>
+            <a:r>
+              <a:rPr lang="en-US" sz="800" dirty="0">
+                <a:solidFill>
+                  <a:srgbClr val="7A849C"/>
+                </a:solidFill>
+                <a:latin typeface="Exo 2" pitchFamily="34" charset="0"/>
+                <a:ea typeface="Exo 2" pitchFamily="34" charset="-122"/>
+                <a:cs typeface="Exo 2" pitchFamily="34" charset="-120"/>
+              </a:rPr>
+              <a:t>Source: App installs: eMYAA Daily Performance Dashboards (Android + iOS, cumulative, on report dates 1-27 Sep 2026). Ads: GA4 Reports snapshot and Google Ads campaigns exports, 1-28 Sep 2026.</a:t>
+            </a:r>
+            <a:endParaRPr lang="en-US" sz="800" dirty="0"/>
+          </a:p>
+        </p:txBody>
+      </p:sp>
+      <p:sp>
+        <p:nvSpPr>
+          <p:cNvPr id="11" name="Text 7"/>
+          <p:cNvSpPr txBox="1"/>
+          <p:nvPr/>
+        </p:nvSpPr>
+        <p:spPr>
+          <a:xfrm>
+            <a:off x="566928" y="6510528"/>
+            <a:ext cx="5486400" cy="201168"/>
+          </a:xfrm>
+          <a:prstGeom prst="rect">
+            <a:avLst/>
+          </a:prstGeom>
+          <a:noFill/>
+          <a:ln/>
+        </p:spPr>
+        <p:txBody>
+          <a:bodyPr wrap="square" lIns="0" tIns="0" rIns="0" bIns="0" rtlCol="0" anchor="t"/>
+          <a:lstStyle/>
+          <a:p>
+            <a:pPr indent="0" marL="0">
+              <a:buNone/>
+            </a:pPr>
+            <a:r>
+              <a:rPr lang="en-US" sz="800" dirty="0">
+                <a:solidFill>
+                  <a:srgbClr val="8A93A8"/>
+                </a:solidFill>
+                <a:latin typeface="Exo 2" pitchFamily="34" charset="0"/>
+                <a:ea typeface="Exo 2" pitchFamily="34" charset="-122"/>
+                <a:cs typeface="Exo 2" pitchFamily="34" charset="-120"/>
+              </a:rPr>
+              <a:t>eMYAA Trading Platform  |  CEO Marketing Update</a:t>
+            </a:r>
+            <a:endParaRPr lang="en-US" sz="800" dirty="0"/>
+          </a:p>
+        </p:txBody>
+      </p:sp>
+      <p:sp>
+        <p:nvSpPr>
+          <p:cNvPr id="12" name="Text 8"/>
+          <p:cNvSpPr txBox="1"/>
+          <p:nvPr/>
+        </p:nvSpPr>
+        <p:spPr>
+          <a:xfrm>
+            <a:off x="9802368" y="6510528"/>
+            <a:ext cx="457200" cy="201168"/>
+          </a:xfrm>
+          <a:prstGeom prst="rect">
+            <a:avLst/>
+          </a:prstGeom>
+          <a:noFill/>
+          <a:ln/>
+        </p:spPr>
+        <p:txBody>
+          <a:bodyPr wrap="square" lIns="0" tIns="0" rIns="0" bIns="0" rtlCol="0" anchor="t"/>
+          <a:lstStyle/>
+          <a:p>
+            <a:pPr algn="r" indent="0" marL="0">
+              <a:buNone/>
+            </a:pPr>
+            <a:r>
+              <a:rPr lang="en-US" sz="800" dirty="0">
+                <a:solidFill>
+                  <a:srgbClr val="8A93A8"/>
+                </a:solidFill>
+                <a:latin typeface="Exo 2" pitchFamily="34" charset="0"/>
+                <a:ea typeface="Exo 2" pitchFamily="34" charset="-122"/>
+                <a:cs typeface="Exo 2" pitchFamily="34" charset="-120"/>
+              </a:rPr>
+              <a:t>4</a:t>
+            </a:r>
+            <a:endParaRPr lang="en-US" sz="800" dirty="0"/>
+          </a:p>
+        </p:txBody>
+      </p:sp>
+      <p:pic>
+        <p:nvPicPr>
+          <p:cNvPr id="13" name="Image 2" descr="/home/user/HatemIsa_202508993_IT9002_NLP_Project/emyaa-ceo-deck/working/charts/emyaa_navy.png">    </p:cNvPr>
+          <p:cNvPicPr>
+            <a:picLocks noChangeAspect="1"/>
+          </p:cNvPicPr>
+          <p:nvPr/>
+        </p:nvPicPr>
+        <p:blipFill>
+          <a:blip r:embed="rId3"/>
+          <a:stretch>
+            <a:fillRect/>
+          </a:stretch>
+        </p:blipFill>
+        <p:spPr>
+          <a:xfrm>
+            <a:off x="10607040" y="6336792"/>
+            <a:ext cx="1024128" cy="365760"/>
+          </a:xfrm>
+          <a:prstGeom prst="rect">
+            <a:avLst/>
+          </a:prstGeom>
+        </p:spPr>
+      </p:pic>
+      <p:graphicFrame>
+        <p:nvGraphicFramePr>
+          <p:cNvPr id="15" name="Chart 0" descr=""/>
+          <p:cNvGraphicFramePr/>
+          <p:nvPr/>
+        </p:nvGraphicFramePr>
+        <p:xfrm>
+          <a:off x="566928" y="1508760"/>
+          <a:ext cx="6720840" cy="4069080"/>
+        </p:xfrm>
+        <a:graphic xmlns:a="http://schemas.openxmlformats.org/drawingml/2006/main">
+          <a:graphicData uri="http://schemas.openxmlformats.org/drawingml/2006/chart">
+            <c:chart xmlns:c="http://schemas.openxmlformats.org/drawingml/2006/chart" r:id="rId4"/>
+          </a:graphicData>
+        </a:graphic>
+      </p:graphicFrame>
+      <p:sp>
+        <p:nvSpPr>
+          <p:cNvPr id="16" name="Text 9"/>
+          <p:cNvSpPr txBox="1"/>
+          <p:nvPr/>
+        </p:nvSpPr>
+        <p:spPr>
+          <a:xfrm>
+            <a:off x="4892040" y="2011680"/>
+            <a:ext cx="2194560" cy="457200"/>
+          </a:xfrm>
+          <a:prstGeom prst="rect">
+            <a:avLst/>
+          </a:prstGeom>
+          <a:noFill/>
+          <a:ln/>
+        </p:spPr>
+        <p:txBody>
+          <a:bodyPr wrap="square" lIns="0" tIns="0" rIns="0" bIns="0" rtlCol="0" anchor="t"/>
+          <a:lstStyle/>
+          <a:p>
+            <a:pPr indent="0" marL="0">
+              <a:buNone/>
+            </a:pPr>
+            <a:r>
+              <a:rPr lang="en-US" sz="1050" b="1" dirty="0">
+                <a:solidFill>
+                  <a:srgbClr val="1BA97C"/>
+                </a:solidFill>
+                <a:latin typeface="Exo 2" pitchFamily="34" charset="0"/>
+                <a:ea typeface="Exo 2" pitchFamily="34" charset="-122"/>
+                <a:cs typeface="Exo 2" pitchFamily="34" charset="-120"/>
+              </a:rPr>
+              <a:t>+36 in 6 days</a:t>
+            </a:r>
+            <a:endParaRPr lang="en-US" sz="1050" dirty="0"/>
+          </a:p>
+          <a:p>
+            <a:pPr indent="0" marL="0">
+              <a:buNone/>
+            </a:pPr>
+            <a:r>
+              <a:rPr lang="en-US" sz="1050" dirty="0">
+                <a:solidFill>
+                  <a:srgbClr val="7A849C"/>
+                </a:solidFill>
+                <a:latin typeface="Exo 2" pitchFamily="34" charset="0"/>
+                <a:ea typeface="Exo 2" pitchFamily="34" charset="-122"/>
+                <a:cs typeface="Exo 2" pitchFamily="34" charset="-120"/>
+              </a:rPr>
+              <a:t>21-27 Sep, after launch</a:t>
+            </a:r>
+            <a:endParaRPr lang="en-US" sz="1050" dirty="0"/>
+          </a:p>
+        </p:txBody>
+      </p:sp>
+      <p:sp>
+        <p:nvSpPr>
+          <p:cNvPr id="17" name="Text 10"/>
+          <p:cNvSpPr txBox="1"/>
+          <p:nvPr/>
+        </p:nvSpPr>
+        <p:spPr>
+          <a:xfrm>
+            <a:off x="4069080" y="3703320"/>
+            <a:ext cx="2103120" cy="457200"/>
+          </a:xfrm>
+          <a:prstGeom prst="rect">
+            <a:avLst/>
+          </a:prstGeom>
+          <a:noFill/>
+          <a:ln/>
+        </p:spPr>
+        <p:txBody>
+          <a:bodyPr wrap="square" lIns="0" tIns="0" rIns="0" bIns="0" rtlCol="0" anchor="t"/>
+          <a:lstStyle/>
+          <a:p>
+            <a:pPr indent="0" marL="0">
+              <a:buNone/>
+            </a:pPr>
+            <a:r>
+              <a:rPr lang="en-US" sz="1050" b="1" dirty="0">
+                <a:solidFill>
+                  <a:srgbClr val="132257"/>
+                </a:solidFill>
+                <a:latin typeface="Exo 2" pitchFamily="34" charset="0"/>
+                <a:ea typeface="Exo 2" pitchFamily="34" charset="-122"/>
+                <a:cs typeface="Exo 2" pitchFamily="34" charset="-120"/>
+              </a:rPr>
+              <a:t>+14 in 7 days</a:t>
+            </a:r>
+            <a:endParaRPr lang="en-US" sz="1050" dirty="0"/>
+          </a:p>
+          <a:p>
+            <a:pPr indent="0" marL="0">
+              <a:buNone/>
+            </a:pPr>
+            <a:r>
+              <a:rPr lang="en-US" sz="1050" dirty="0">
+                <a:solidFill>
+                  <a:srgbClr val="7A849C"/>
+                </a:solidFill>
+                <a:latin typeface="Exo 2" pitchFamily="34" charset="0"/>
+                <a:ea typeface="Exo 2" pitchFamily="34" charset="-122"/>
+                <a:cs typeface="Exo 2" pitchFamily="34" charset="-120"/>
+              </a:rPr>
+              <a:t>14-21 Sep, before launch</a:t>
+            </a:r>
+            <a:endParaRPr lang="en-US" sz="1050" dirty="0"/>
+          </a:p>
+        </p:txBody>
+      </p:sp>
+      <p:sp>
+        <p:nvSpPr>
+          <p:cNvPr id="18" name="Text 11"/>
+          <p:cNvSpPr txBox="1"/>
+          <p:nvPr/>
+        </p:nvSpPr>
+        <p:spPr>
+          <a:xfrm>
+            <a:off x="7589520" y="1481328"/>
+            <a:ext cx="4041648" cy="228600"/>
+          </a:xfrm>
+          <a:prstGeom prst="rect">
+            <a:avLst/>
+          </a:prstGeom>
+          <a:noFill/>
+          <a:ln/>
+        </p:spPr>
+        <p:txBody>
+          <a:bodyPr wrap="square" lIns="0" tIns="0" rIns="0" bIns="0" rtlCol="0" anchor="t"/>
+          <a:lstStyle/>
+          <a:p>
+            <a:pPr indent="0" marL="0">
+              <a:buNone/>
+            </a:pPr>
+            <a:r>
+              <a:rPr lang="en-US" sz="900" b="1" spc="200" kern="0" dirty="0">
+                <a:solidFill>
+                  <a:srgbClr val="9A7B1F"/>
+                </a:solidFill>
+                <a:latin typeface="Exo 2" pitchFamily="34" charset="0"/>
+                <a:ea typeface="Exo 2" pitchFamily="34" charset="-122"/>
+                <a:cs typeface="Exo 2" pitchFamily="34" charset="-120"/>
+              </a:rPr>
+              <a:t>FROM AD TO ACCOUNT</a:t>
+            </a:r>
+            <a:endParaRPr lang="en-US" sz="900" dirty="0"/>
+          </a:p>
+        </p:txBody>
+      </p:sp>
+      <p:sp>
+        <p:nvSpPr>
+          <p:cNvPr id="19" name="Shape 12"/>
+          <p:cNvSpPr/>
+          <p:nvPr/>
+        </p:nvSpPr>
+        <p:spPr>
+          <a:xfrm>
+            <a:off x="7589520" y="1810512"/>
+            <a:ext cx="4041648" cy="713232"/>
+          </a:xfrm>
+          <a:prstGeom prst="rect">
+            <a:avLst/>
+          </a:prstGeom>
+          <a:solidFill>
+            <a:srgbClr val="132257"/>
+          </a:solidFill>
+          <a:ln w="19050">
+            <a:solidFill>
+              <a:srgbClr val="132257"/>
+            </a:solidFill>
+            <a:prstDash val="solid"/>
+          </a:ln>
+        </p:spPr>
+      </p:sp>
+      <p:sp>
+        <p:nvSpPr>
+          <p:cNvPr id="20" name="Text 13"/>
+          <p:cNvSpPr txBox="1"/>
+          <p:nvPr/>
+        </p:nvSpPr>
+        <p:spPr>
+          <a:xfrm>
+            <a:off x="7726680" y="1810512"/>
+            <a:ext cx="868680" cy="713232"/>
+          </a:xfrm>
+          <a:prstGeom prst="rect">
+            <a:avLst/>
+          </a:prstGeom>
+          <a:noFill/>
+          <a:ln/>
+        </p:spPr>
+        <p:txBody>
+          <a:bodyPr wrap="square" lIns="0" tIns="0" rIns="0" bIns="0" rtlCol="0" anchor="ctr"/>
+          <a:lstStyle/>
+          <a:p>
+            <a:pPr indent="0" marL="0">
+              <a:buNone/>
+            </a:pPr>
+            <a:r>
+              <a:rPr lang="en-US" sz="2200" b="1" dirty="0">
+                <a:solidFill>
+                  <a:srgbClr val="FFFFFF"/>
+                </a:solidFill>
+                <a:latin typeface="Exo 2" pitchFamily="34" charset="0"/>
+                <a:ea typeface="Exo 2" pitchFamily="34" charset="-122"/>
+                <a:cs typeface="Exo 2" pitchFamily="34" charset="-120"/>
+              </a:rPr>
+              <a:t>409</a:t>
+            </a:r>
+            <a:endParaRPr lang="en-US" sz="2200" dirty="0"/>
+          </a:p>
+        </p:txBody>
+      </p:sp>
+      <p:sp>
+        <p:nvSpPr>
+          <p:cNvPr id="21" name="Text 14"/>
+          <p:cNvSpPr txBox="1"/>
+          <p:nvPr/>
+        </p:nvSpPr>
+        <p:spPr>
+          <a:xfrm>
+            <a:off x="8595360" y="1810512"/>
+            <a:ext cx="2944368" cy="713232"/>
+          </a:xfrm>
+          <a:prstGeom prst="rect">
+            <a:avLst/>
+          </a:prstGeom>
+          <a:noFill/>
+          <a:ln/>
+        </p:spPr>
+        <p:txBody>
+          <a:bodyPr wrap="square" lIns="0" tIns="0" rIns="0" bIns="0" rtlCol="0" anchor="ctr"/>
+          <a:lstStyle/>
+          <a:p>
+            <a:pPr indent="0" marL="0">
+              <a:buNone/>
+            </a:pPr>
+            <a:r>
+              <a:rPr lang="en-US" sz="1000" b="1" dirty="0">
+                <a:solidFill>
+                  <a:srgbClr val="FFFFFF"/>
+                </a:solidFill>
+                <a:latin typeface="Exo 2" pitchFamily="34" charset="0"/>
+                <a:ea typeface="Exo 2" pitchFamily="34" charset="-122"/>
+                <a:cs typeface="Exo 2" pitchFamily="34" charset="-120"/>
+              </a:rPr>
+              <a:t>Google Ads sessions</a:t>
+            </a:r>
+            <a:endParaRPr lang="en-US" sz="1000" dirty="0"/>
+          </a:p>
+          <a:p>
+            <a:pPr indent="0" marL="0">
+              <a:buNone/>
+            </a:pPr>
+            <a:r>
+              <a:rPr lang="en-US" sz="850" dirty="0">
+                <a:solidFill>
+                  <a:srgbClr val="FFFFFF"/>
+                </a:solidFill>
+                <a:latin typeface="Exo 2" pitchFamily="34" charset="0"/>
+                <a:ea typeface="Exo 2" pitchFamily="34" charset="-122"/>
+                <a:cs typeface="Exo 2" pitchFamily="34" charset="-120"/>
+              </a:rPr>
+              <a:t>GA4, 1-28 Sep</a:t>
+            </a:r>
+            <a:endParaRPr lang="en-US" sz="1000" dirty="0"/>
+          </a:p>
+        </p:txBody>
+      </p:sp>
+      <p:sp>
+        <p:nvSpPr>
+          <p:cNvPr id="22" name="Shape 15"/>
+          <p:cNvSpPr/>
+          <p:nvPr/>
+        </p:nvSpPr>
+        <p:spPr>
+          <a:xfrm>
+            <a:off x="7827264" y="2706624"/>
+            <a:ext cx="3566160" cy="713232"/>
+          </a:xfrm>
+          <a:prstGeom prst="rect">
+            <a:avLst/>
+          </a:prstGeom>
+          <a:solidFill>
+            <a:srgbClr val="132257"/>
+          </a:solidFill>
+          <a:ln w="19050">
+            <a:solidFill>
+              <a:srgbClr val="132257"/>
+            </a:solidFill>
+            <a:prstDash val="solid"/>
+          </a:ln>
+        </p:spPr>
+      </p:sp>
+      <p:sp>
+        <p:nvSpPr>
+          <p:cNvPr id="23" name="Text 16"/>
+          <p:cNvSpPr txBox="1"/>
+          <p:nvPr/>
+        </p:nvSpPr>
+        <p:spPr>
+          <a:xfrm>
+            <a:off x="7964424" y="2706624"/>
+            <a:ext cx="868680" cy="713232"/>
+          </a:xfrm>
+          <a:prstGeom prst="rect">
+            <a:avLst/>
+          </a:prstGeom>
+          <a:noFill/>
+          <a:ln/>
+        </p:spPr>
+        <p:txBody>
+          <a:bodyPr wrap="square" lIns="0" tIns="0" rIns="0" bIns="0" rtlCol="0" anchor="ctr"/>
+          <a:lstStyle/>
+          <a:p>
+            <a:pPr indent="0" marL="0">
+              <a:buNone/>
+            </a:pPr>
+            <a:r>
+              <a:rPr lang="en-US" sz="2200" b="1" dirty="0">
+                <a:solidFill>
+                  <a:srgbClr val="FFFFFF"/>
+                </a:solidFill>
+                <a:latin typeface="Exo 2" pitchFamily="34" charset="0"/>
+                <a:ea typeface="Exo 2" pitchFamily="34" charset="-122"/>
+                <a:cs typeface="Exo 2" pitchFamily="34" charset="-120"/>
+              </a:rPr>
+              <a:t>400</a:t>
+            </a:r>
+            <a:endParaRPr lang="en-US" sz="2200" dirty="0"/>
+          </a:p>
+        </p:txBody>
+      </p:sp>
+      <p:sp>
+        <p:nvSpPr>
+          <p:cNvPr id="24" name="Text 17"/>
+          <p:cNvSpPr txBox="1"/>
+          <p:nvPr/>
+        </p:nvSpPr>
+        <p:spPr>
+          <a:xfrm>
+            <a:off x="8833104" y="2706624"/>
+            <a:ext cx="2468880" cy="713232"/>
+          </a:xfrm>
+          <a:prstGeom prst="rect">
+            <a:avLst/>
+          </a:prstGeom>
+          <a:noFill/>
+          <a:ln/>
+        </p:spPr>
+        <p:txBody>
+          <a:bodyPr wrap="square" lIns="0" tIns="0" rIns="0" bIns="0" rtlCol="0" anchor="ctr"/>
+          <a:lstStyle/>
+          <a:p>
+            <a:pPr indent="0" marL="0">
+              <a:buNone/>
+            </a:pPr>
+            <a:r>
+              <a:rPr lang="en-US" sz="1000" b="1" dirty="0">
+                <a:solidFill>
+                  <a:srgbClr val="FFFFFF"/>
+                </a:solidFill>
+                <a:latin typeface="Exo 2" pitchFamily="34" charset="0"/>
+                <a:ea typeface="Exo 2" pitchFamily="34" charset="-122"/>
+                <a:cs typeface="Exo 2" pitchFamily="34" charset="-120"/>
+              </a:rPr>
+              <a:t>key events on those sessions</a:t>
+            </a:r>
+            <a:endParaRPr lang="en-US" sz="1000" dirty="0"/>
+          </a:p>
+          <a:p>
+            <a:pPr indent="0" marL="0">
+              <a:buNone/>
+            </a:pPr>
+            <a:r>
+              <a:rPr lang="en-US" sz="850" dirty="0">
+                <a:solidFill>
+                  <a:srgbClr val="FFFFFF"/>
+                </a:solidFill>
+                <a:latin typeface="Exo 2" pitchFamily="34" charset="0"/>
+                <a:ea typeface="Exo 2" pitchFamily="34" charset="-122"/>
+                <a:cs typeface="Exo 2" pitchFamily="34" charset="-120"/>
+              </a:rPr>
+              <a:t>event not yet defined</a:t>
+            </a:r>
+            <a:endParaRPr lang="en-US" sz="1000" dirty="0"/>
+          </a:p>
+        </p:txBody>
+      </p:sp>
+      <p:sp>
+        <p:nvSpPr>
+          <p:cNvPr id="25" name="Shape 18"/>
+          <p:cNvSpPr/>
+          <p:nvPr/>
+        </p:nvSpPr>
+        <p:spPr>
+          <a:xfrm>
+            <a:off x="8065008" y="3803904"/>
+            <a:ext cx="3090672" cy="713232"/>
+          </a:xfrm>
+          <a:prstGeom prst="rect">
+            <a:avLst/>
+          </a:prstGeom>
+          <a:solidFill>
+            <a:srgbClr val="FFFFFF"/>
+          </a:solidFill>
+          <a:ln w="19050">
+            <a:solidFill>
+              <a:srgbClr val="D4AF37"/>
+            </a:solidFill>
+            <a:prstDash val="solid"/>
+          </a:ln>
+        </p:spPr>
+      </p:sp>
+      <p:sp>
+        <p:nvSpPr>
+          <p:cNvPr id="26" name="Text 19"/>
+          <p:cNvSpPr txBox="1"/>
+          <p:nvPr/>
+        </p:nvSpPr>
+        <p:spPr>
+          <a:xfrm>
+            <a:off x="8202168" y="3803904"/>
+            <a:ext cx="868680" cy="713232"/>
+          </a:xfrm>
+          <a:prstGeom prst="rect">
+            <a:avLst/>
+          </a:prstGeom>
+          <a:noFill/>
+          <a:ln/>
+        </p:spPr>
+        <p:txBody>
+          <a:bodyPr wrap="square" lIns="0" tIns="0" rIns="0" bIns="0" rtlCol="0" anchor="ctr"/>
+          <a:lstStyle/>
+          <a:p>
+            <a:pPr indent="0" marL="0">
+              <a:buNone/>
+            </a:pPr>
+            <a:r>
+              <a:rPr lang="en-US" sz="2200" b="1" dirty="0">
+                <a:solidFill>
+                  <a:srgbClr val="D4AF37"/>
+                </a:solidFill>
+                <a:latin typeface="Exo 2" pitchFamily="34" charset="0"/>
+                <a:ea typeface="Exo 2" pitchFamily="34" charset="-122"/>
+                <a:cs typeface="Exo 2" pitchFamily="34" charset="-120"/>
+              </a:rPr>
+              <a:t>+36</a:t>
+            </a:r>
+            <a:endParaRPr lang="en-US" sz="2200" dirty="0"/>
+          </a:p>
+        </p:txBody>
+      </p:sp>
+      <p:sp>
+        <p:nvSpPr>
+          <p:cNvPr id="27" name="Text 20"/>
+          <p:cNvSpPr txBox="1"/>
+          <p:nvPr/>
+        </p:nvSpPr>
+        <p:spPr>
+          <a:xfrm>
+            <a:off x="9070848" y="3803904"/>
+            <a:ext cx="1993392" cy="713232"/>
+          </a:xfrm>
+          <a:prstGeom prst="rect">
+            <a:avLst/>
+          </a:prstGeom>
+          <a:noFill/>
+          <a:ln/>
+        </p:spPr>
+        <p:txBody>
+          <a:bodyPr wrap="square" lIns="0" tIns="0" rIns="0" bIns="0" rtlCol="0" anchor="ctr"/>
+          <a:lstStyle/>
+          <a:p>
+            <a:pPr indent="0" marL="0">
+              <a:buNone/>
+            </a:pPr>
+            <a:r>
+              <a:rPr lang="en-US" sz="1000" b="1" dirty="0">
+                <a:solidFill>
+                  <a:srgbClr val="132257"/>
+                </a:solidFill>
+                <a:latin typeface="Exo 2" pitchFamily="34" charset="0"/>
+                <a:ea typeface="Exo 2" pitchFamily="34" charset="-122"/>
+                <a:cs typeface="Exo 2" pitchFamily="34" charset="-120"/>
+              </a:rPr>
+              <a:t>app installs, 21-27 Sep</a:t>
+            </a:r>
+            <a:endParaRPr lang="en-US" sz="1000" dirty="0"/>
+          </a:p>
+          <a:p>
+            <a:pPr indent="0" marL="0">
+              <a:buNone/>
+            </a:pPr>
+            <a:r>
+              <a:rPr lang="en-US" sz="850" dirty="0">
+                <a:solidFill>
+                  <a:srgbClr val="132257"/>
+                </a:solidFill>
+                <a:latin typeface="Exo 2" pitchFamily="34" charset="0"/>
+                <a:ea typeface="Exo 2" pitchFamily="34" charset="-122"/>
+                <a:cs typeface="Exo 2" pitchFamily="34" charset="-120"/>
+              </a:rPr>
+              <a:t>all sources</a:t>
+            </a:r>
+            <a:endParaRPr lang="en-US" sz="1000" dirty="0"/>
+          </a:p>
+        </p:txBody>
+      </p:sp>
+      <p:sp>
+        <p:nvSpPr>
+          <p:cNvPr id="28" name="Shape 21"/>
+          <p:cNvSpPr/>
+          <p:nvPr/>
+        </p:nvSpPr>
+        <p:spPr>
+          <a:xfrm>
+            <a:off x="8302752" y="4700016"/>
+            <a:ext cx="2615184" cy="713232"/>
+          </a:xfrm>
+          <a:prstGeom prst="rect">
+            <a:avLst/>
+          </a:prstGeom>
+          <a:solidFill>
+            <a:srgbClr val="FFFFFF"/>
+          </a:solidFill>
+          <a:ln w="19050">
+            <a:solidFill>
+              <a:srgbClr val="C53030"/>
+            </a:solidFill>
+            <a:prstDash val="solid"/>
+          </a:ln>
+        </p:spPr>
+      </p:sp>
+      <p:sp>
+        <p:nvSpPr>
+          <p:cNvPr id="29" name="Text 22"/>
+          <p:cNvSpPr txBox="1"/>
+          <p:nvPr/>
+        </p:nvSpPr>
+        <p:spPr>
+          <a:xfrm>
+            <a:off x="8439912" y="4700016"/>
+            <a:ext cx="868680" cy="713232"/>
+          </a:xfrm>
+          <a:prstGeom prst="rect">
+            <a:avLst/>
+          </a:prstGeom>
+          <a:noFill/>
+          <a:ln/>
+        </p:spPr>
+        <p:txBody>
+          <a:bodyPr wrap="square" lIns="0" tIns="0" rIns="0" bIns="0" rtlCol="0" anchor="ctr"/>
+          <a:lstStyle/>
+          <a:p>
+            <a:pPr indent="0" marL="0">
+              <a:buNone/>
+            </a:pPr>
+            <a:r>
+              <a:rPr lang="en-US" sz="2200" b="1" dirty="0">
+                <a:solidFill>
+                  <a:srgbClr val="C53030"/>
+                </a:solidFill>
+                <a:latin typeface="Exo 2" pitchFamily="34" charset="0"/>
+                <a:ea typeface="Exo 2" pitchFamily="34" charset="-122"/>
+                <a:cs typeface="Exo 2" pitchFamily="34" charset="-120"/>
+              </a:rPr>
+              <a:t>+3</a:t>
+            </a:r>
+            <a:endParaRPr lang="en-US" sz="2200" dirty="0"/>
+          </a:p>
+        </p:txBody>
+      </p:sp>
+      <p:sp>
+        <p:nvSpPr>
+          <p:cNvPr id="30" name="Text 23"/>
+          <p:cNvSpPr txBox="1"/>
+          <p:nvPr/>
+        </p:nvSpPr>
+        <p:spPr>
+          <a:xfrm>
+            <a:off x="9308592" y="4700016"/>
+            <a:ext cx="1517904" cy="713232"/>
+          </a:xfrm>
+          <a:prstGeom prst="rect">
+            <a:avLst/>
+          </a:prstGeom>
+          <a:noFill/>
+          <a:ln/>
+        </p:spPr>
+        <p:txBody>
+          <a:bodyPr wrap="square" lIns="0" tIns="0" rIns="0" bIns="0" rtlCol="0" anchor="ctr"/>
+          <a:lstStyle/>
+          <a:p>
+            <a:pPr indent="0" marL="0">
+              <a:buNone/>
+            </a:pPr>
+            <a:r>
+              <a:rPr lang="en-US" sz="1000" b="1" dirty="0">
+                <a:solidFill>
+                  <a:srgbClr val="132257"/>
+                </a:solidFill>
+                <a:latin typeface="Exo 2" pitchFamily="34" charset="0"/>
+                <a:ea typeface="Exo 2" pitchFamily="34" charset="-122"/>
+                <a:cs typeface="Exo 2" pitchFamily="34" charset="-120"/>
+              </a:rPr>
+              <a:t>onboarded, 21-27 Sep</a:t>
+            </a:r>
+            <a:endParaRPr lang="en-US" sz="1000" dirty="0"/>
+          </a:p>
+          <a:p>
+            <a:pPr indent="0" marL="0">
+              <a:buNone/>
+            </a:pPr>
+            <a:r>
+              <a:rPr lang="en-US" sz="850" dirty="0">
+                <a:solidFill>
+                  <a:srgbClr val="132257"/>
+                </a:solidFill>
+                <a:latin typeface="Exo 2" pitchFamily="34" charset="0"/>
+                <a:ea typeface="Exo 2" pitchFamily="34" charset="-122"/>
+                <a:cs typeface="Exo 2" pitchFamily="34" charset="-120"/>
+              </a:rPr>
+              <a:t>all sources</a:t>
+            </a:r>
+            <a:endParaRPr lang="en-US" sz="1000" dirty="0"/>
+          </a:p>
+        </p:txBody>
+      </p:sp>
+      <p:sp>
+        <p:nvSpPr>
+          <p:cNvPr id="31" name="Shape 24"/>
+          <p:cNvSpPr/>
+          <p:nvPr/>
+        </p:nvSpPr>
+        <p:spPr>
+          <a:xfrm>
+            <a:off x="7589520" y="3630168"/>
+            <a:ext cx="4041648" cy="0"/>
+          </a:xfrm>
+          <a:prstGeom prst="line">
+            <a:avLst/>
+          </a:prstGeom>
+          <a:noFill/>
+          <a:ln w="12700">
+            <a:solidFill>
+              <a:srgbClr val="C53030"/>
+            </a:solidFill>
+            <a:prstDash val="dash"/>
+          </a:ln>
+        </p:spPr>
+      </p:sp>
+      <p:sp>
+        <p:nvSpPr>
+          <p:cNvPr id="32" name="Text 25"/>
+          <p:cNvSpPr txBox="1"/>
+          <p:nvPr/>
+        </p:nvSpPr>
+        <p:spPr>
+          <a:xfrm>
+            <a:off x="7589520" y="3648456"/>
+            <a:ext cx="4041648" cy="182880"/>
+          </a:xfrm>
+          <a:prstGeom prst="rect">
+            <a:avLst/>
+          </a:prstGeom>
+          <a:noFill/>
+          <a:ln/>
+        </p:spPr>
+        <p:txBody>
+          <a:bodyPr wrap="square" lIns="0" tIns="0" rIns="0" bIns="0" rtlCol="0" anchor="t"/>
+          <a:lstStyle/>
+          <a:p>
+            <a:pPr algn="ctr" indent="0" marL="0">
+              <a:buNone/>
+            </a:pPr>
+            <a:r>
+              <a:rPr lang="en-US" sz="850" b="1" dirty="0">
+                <a:solidFill>
+                  <a:srgbClr val="C53030"/>
+                </a:solidFill>
+                <a:latin typeface="Exo 2" pitchFamily="34" charset="0"/>
+                <a:ea typeface="Exo 2" pitchFamily="34" charset="-122"/>
+                <a:cs typeface="Exo 2" pitchFamily="34" charset="-120"/>
+              </a:rPr>
+              <a:t>Tracking gap: installs not yet linked to ad clicks</a:t>
+            </a:r>
+            <a:endParaRPr lang="en-US" sz="850" dirty="0"/>
+          </a:p>
+        </p:txBody>
+      </p:sp>
+    </p:spTree>
+  </p:cSld>
+  <p:clrMapOvr>
+    <a:masterClrMapping/>
+  </p:clrMapOvr>
+</p:sld>
+</file>
+
+<file path=ppt/slides/slide5.xml><?xml version="1.0" encoding="utf-8"?>
+<p:sld xmlns:a="http://schemas.openxmlformats.org/drawingml/2006/main" xmlns:r="http://schemas.openxmlformats.org/officeDocument/2006/relationships" xmlns:p="http://schemas.openxmlformats.org/presentationml/2006/main">
+  <p:cSld name="Slide 5">
+    <p:bg>
+      <p:bgPr>
+        <a:solidFill>
+          <a:srgbClr val="FFFFFF"/>
+        </a:solidFill>
+      </p:bgPr>
+    </p:bg>
+    <p:spTree>
+      <p:nvGrpSpPr>
+        <p:cNvPr id="1" name=""/>
+        <p:cNvGrpSpPr/>
+        <p:nvPr/>
+      </p:nvGrpSpPr>
+      <p:grpSpPr>
+        <a:xfrm>
+          <a:off x="0" y="0"/>
+          <a:ext cx="0" cy="0"/>
+          <a:chOff x="0" y="0"/>
+          <a:chExt cx="0" cy="0"/>
+        </a:xfrm>
+      </p:grpSpPr>
+      <p:pic>
+        <p:nvPicPr>
+          <p:cNvPr id="2" name="Image 0" descr="/home/user/HatemIsa_202508993_IT9002_NLP_Project/emyaa-ceo-deck/working/charts/board_header.png">    </p:cNvPr>
+          <p:cNvPicPr>
+            <a:picLocks noChangeAspect="1"/>
+          </p:cNvPicPr>
+          <p:nvPr/>
+        </p:nvPicPr>
+        <p:blipFill>
+          <a:blip r:embed="rId1"/>
+          <a:stretch>
+            <a:fillRect/>
+          </a:stretch>
+        </p:blipFill>
+        <p:spPr>
+          <a:xfrm>
+            <a:off x="0" y="0"/>
+            <a:ext cx="12191695" cy="1298448"/>
+          </a:xfrm>
+          <a:prstGeom prst="rect">
+            <a:avLst/>
+          </a:prstGeom>
+        </p:spPr>
+      </p:pic>
+      <p:sp>
+        <p:nvSpPr>
+          <p:cNvPr id="3" name="Shape 0"/>
+          <p:cNvSpPr/>
+          <p:nvPr/>
+        </p:nvSpPr>
+        <p:spPr>
+          <a:xfrm>
+            <a:off x="0" y="1298448"/>
+            <a:ext cx="12191695" cy="24689"/>
+          </a:xfrm>
+          <a:prstGeom prst="rect">
+            <a:avLst/>
+          </a:prstGeom>
+          <a:solidFill>
+            <a:srgbClr val="D4AF37"/>
+          </a:solidFill>
+          <a:ln w="12700">
+            <a:solidFill>
+              <a:srgbClr val="D4AF37"/>
+            </a:solidFill>
+            <a:prstDash val="solid"/>
+          </a:ln>
+        </p:spPr>
+      </p:sp>
+      <p:sp>
+        <p:nvSpPr>
+          <p:cNvPr id="4" name="Text 1"/>
+          <p:cNvSpPr txBox="1"/>
+          <p:nvPr/>
+        </p:nvSpPr>
+        <p:spPr>
+          <a:xfrm>
+            <a:off x="566928" y="274320"/>
+            <a:ext cx="9144000" cy="182880"/>
+          </a:xfrm>
+          <a:prstGeom prst="rect">
+            <a:avLst/>
+          </a:prstGeom>
+          <a:noFill/>
+          <a:ln/>
+        </p:spPr>
+        <p:txBody>
+          <a:bodyPr wrap="square" lIns="0" tIns="0" rIns="0" bIns="0" rtlCol="0" anchor="t"/>
+          <a:lstStyle/>
+          <a:p>
+            <a:pPr indent="0" marL="0">
+              <a:buNone/>
+            </a:pPr>
+            <a:r>
+              <a:rPr lang="en-US" sz="900" b="1" spc="200" kern="0" dirty="0">
+                <a:solidFill>
+                  <a:srgbClr val="D4AF37"/>
+                </a:solidFill>
+                <a:latin typeface="Exo 2" pitchFamily="34" charset="0"/>
+                <a:ea typeface="Exo 2" pitchFamily="34" charset="-122"/>
+                <a:cs typeface="Exo 2" pitchFamily="34" charset="-120"/>
+              </a:rPr>
+              <a:t>ENGLISH VS ARABIC</a:t>
+            </a:r>
+            <a:endParaRPr lang="en-US" sz="900" dirty="0"/>
+          </a:p>
+        </p:txBody>
+      </p:sp>
+      <p:sp>
+        <p:nvSpPr>
+          <p:cNvPr id="5" name="Text 2"/>
+          <p:cNvSpPr txBox="1"/>
+          <p:nvPr/>
+        </p:nvSpPr>
+        <p:spPr>
+          <a:xfrm>
+            <a:off x="566928" y="475488"/>
+            <a:ext cx="9326880" cy="749808"/>
+          </a:xfrm>
+          <a:prstGeom prst="rect">
+            <a:avLst/>
+          </a:prstGeom>
+          <a:noFill/>
+          <a:ln/>
+        </p:spPr>
+        <p:txBody>
+          <a:bodyPr wrap="square" lIns="0" tIns="0" rIns="0" bIns="0" rtlCol="0" anchor="ctr"/>
+          <a:lstStyle/>
+          <a:p>
+            <a:pPr indent="0" marL="0">
+              <a:buNone/>
+            </a:pPr>
+            <a:r>
+              <a:rPr lang="en-US" sz="2000" b="1" dirty="0">
+                <a:solidFill>
+                  <a:srgbClr val="FFFFFF"/>
+                </a:solidFill>
+                <a:latin typeface="Exo 2" pitchFamily="34" charset="0"/>
+                <a:ea typeface="Exo 2" pitchFamily="34" charset="-122"/>
+                <a:cs typeface="Exo 2" pitchFamily="34" charset="-120"/>
+              </a:rPr>
+              <a:t>English ads lead Arabic on traffic and engagement; Arabic still logs more key events per session</a:t>
+            </a:r>
+            <a:endParaRPr lang="en-US" sz="2000" dirty="0"/>
+          </a:p>
+        </p:txBody>
+      </p:sp>
+      <p:pic>
+        <p:nvPicPr>
+          <p:cNvPr id="6" name="Image 1" descr="/home/user/HatemIsa_202508993_IT9002_NLP_Project/emyaa-ceo-deck/working/charts/ajyad_white.png">    </p:cNvPr>
+          <p:cNvPicPr>
+            <a:picLocks noChangeAspect="1"/>
+          </p:cNvPicPr>
+          <p:nvPr/>
+        </p:nvPicPr>
+        <p:blipFill>
+          <a:blip r:embed="rId2"/>
+          <a:stretch>
+            <a:fillRect/>
+          </a:stretch>
+        </p:blipFill>
+        <p:spPr>
+          <a:xfrm>
+            <a:off x="10305288" y="457200"/>
+            <a:ext cx="1325880" cy="384048"/>
+          </a:xfrm>
+          <a:prstGeom prst="rect">
+            <a:avLst/>
+          </a:prstGeom>
+        </p:spPr>
+      </p:pic>
+      <p:sp>
+        <p:nvSpPr>
+          <p:cNvPr id="7" name="Shape 3"/>
+          <p:cNvSpPr/>
+          <p:nvPr/>
+        </p:nvSpPr>
+        <p:spPr>
+          <a:xfrm>
+            <a:off x="566928" y="5669280"/>
+            <a:ext cx="11064240" cy="457200"/>
+          </a:xfrm>
+          <a:prstGeom prst="rect">
+            <a:avLst/>
+          </a:prstGeom>
+          <a:solidFill>
+            <a:srgbClr val="E3E8F2"/>
+          </a:solidFill>
+          <a:ln w="12700">
+            <a:solidFill>
+              <a:srgbClr val="E3E8F2"/>
+            </a:solidFill>
+            <a:prstDash val="solid"/>
+          </a:ln>
+        </p:spPr>
+      </p:sp>
+      <p:sp>
+        <p:nvSpPr>
+          <p:cNvPr id="8" name="Shape 4"/>
+          <p:cNvSpPr/>
+          <p:nvPr/>
+        </p:nvSpPr>
+        <p:spPr>
+          <a:xfrm>
+            <a:off x="566928" y="5669280"/>
+            <a:ext cx="45720" cy="457200"/>
+          </a:xfrm>
+          <a:prstGeom prst="rect">
+            <a:avLst/>
+          </a:prstGeom>
+          <a:solidFill>
+            <a:srgbClr val="D4AF37"/>
+          </a:solidFill>
+          <a:ln w="12700">
+            <a:solidFill>
+              <a:srgbClr val="D4AF37"/>
+            </a:solidFill>
+            <a:prstDash val="solid"/>
+          </a:ln>
+        </p:spPr>
+      </p:sp>
+      <p:sp>
+        <p:nvSpPr>
+          <p:cNvPr id="9" name="Text 5"/>
+          <p:cNvSpPr txBox="1"/>
+          <p:nvPr/>
+        </p:nvSpPr>
+        <p:spPr>
+          <a:xfrm>
+            <a:off x="777240" y="5669280"/>
+            <a:ext cx="10744200" cy="457200"/>
+          </a:xfrm>
+          <a:prstGeom prst="rect">
+            <a:avLst/>
+          </a:prstGeom>
+          <a:noFill/>
+          <a:ln/>
+        </p:spPr>
+        <p:txBody>
+          <a:bodyPr wrap="square" lIns="0" tIns="0" rIns="0" bIns="0" rtlCol="0" anchor="ctr"/>
+          <a:lstStyle/>
+          <a:p>
+            <a:pPr indent="0" marL="0">
+              <a:buNone/>
+            </a:pPr>
+            <a:r>
+              <a:rPr lang="en-US" sz="1150" b="1" dirty="0">
+                <a:solidFill>
+                  <a:srgbClr val="132257"/>
+                </a:solidFill>
+                <a:latin typeface="Exo 2" pitchFamily="34" charset="0"/>
+                <a:ea typeface="Exo 2" pitchFamily="34" charset="-122"/>
+                <a:cs typeface="Exo 2" pitchFamily="34" charset="-120"/>
+              </a:rPr>
+              <a:t>Takeaway   </a:t>
+            </a:r>
+            <a:pPr indent="0" marL="0">
+              <a:buNone/>
+            </a:pPr>
+            <a:r>
+              <a:rPr lang="en-US" sz="1150" dirty="0">
+                <a:solidFill>
+                  <a:srgbClr val="1F2A44"/>
+                </a:solidFill>
+                <a:latin typeface="Exo 2" pitchFamily="34" charset="0"/>
+                <a:ea typeface="Exo 2" pitchFamily="34" charset="-122"/>
+                <a:cs typeface="Exo 2" pitchFamily="34" charset="-120"/>
+              </a:rPr>
+              <a:t>English is ahead on 8 of 9 measures. Refresh the Arabic creative to lift engagement, but keep it live: it converts slightly better per session.</a:t>
+            </a:r>
+            <a:endParaRPr lang="en-US" sz="1150" dirty="0"/>
+          </a:p>
+        </p:txBody>
+      </p:sp>
+      <p:sp>
+        <p:nvSpPr>
+          <p:cNvPr id="10" name="Text 6"/>
+          <p:cNvSpPr txBox="1"/>
+          <p:nvPr/>
+        </p:nvSpPr>
+        <p:spPr>
+          <a:xfrm>
+            <a:off x="566928" y="6199632"/>
+            <a:ext cx="9692640" cy="274320"/>
+          </a:xfrm>
+          <a:prstGeom prst="rect">
+            <a:avLst/>
+          </a:prstGeom>
+          <a:noFill/>
+          <a:ln/>
+        </p:spPr>
+        <p:txBody>
+          <a:bodyPr wrap="square" lIns="0" tIns="0" rIns="0" bIns="0" rtlCol="0" anchor="t"/>
+          <a:lstStyle/>
+          <a:p>
+            <a:pPr indent="0" marL="0">
+              <a:buNone/>
+            </a:pPr>
+            <a:r>
+              <a:rPr lang="en-US" sz="800" dirty="0">
+                <a:solidFill>
+                  <a:srgbClr val="7A849C"/>
+                </a:solidFill>
+                <a:latin typeface="Exo 2" pitchFamily="34" charset="0"/>
+                <a:ea typeface="Exo 2" pitchFamily="34" charset="-122"/>
+                <a:cs typeface="Exo 2" pitchFamily="34" charset="-120"/>
+              </a:rPr>
+              <a:t>Source: GA4 Google Ads campaigns export, 1-28 Sep 2026: 'Website conversion - Saudi - English' vs '... - Arabic'. Campaigns live from 22 Sep. Key event not defined in the export.</a:t>
+            </a:r>
+            <a:endParaRPr lang="en-US" sz="800" dirty="0"/>
+          </a:p>
+        </p:txBody>
+      </p:sp>
+      <p:sp>
+        <p:nvSpPr>
+          <p:cNvPr id="11" name="Text 7"/>
+          <p:cNvSpPr txBox="1"/>
+          <p:nvPr/>
+        </p:nvSpPr>
+        <p:spPr>
+          <a:xfrm>
+            <a:off x="566928" y="6510528"/>
+            <a:ext cx="5486400" cy="201168"/>
+          </a:xfrm>
+          <a:prstGeom prst="rect">
+            <a:avLst/>
+          </a:prstGeom>
+          <a:noFill/>
+          <a:ln/>
+        </p:spPr>
+        <p:txBody>
+          <a:bodyPr wrap="square" lIns="0" tIns="0" rIns="0" bIns="0" rtlCol="0" anchor="t"/>
+          <a:lstStyle/>
+          <a:p>
+            <a:pPr indent="0" marL="0">
+              <a:buNone/>
+            </a:pPr>
+            <a:r>
+              <a:rPr lang="en-US" sz="800" dirty="0">
+                <a:solidFill>
+                  <a:srgbClr val="8A93A8"/>
+                </a:solidFill>
+                <a:latin typeface="Exo 2" pitchFamily="34" charset="0"/>
+                <a:ea typeface="Exo 2" pitchFamily="34" charset="-122"/>
+                <a:cs typeface="Exo 2" pitchFamily="34" charset="-120"/>
+              </a:rPr>
+              <a:t>eMYAA Trading Platform  |  CEO Marketing Update</a:t>
+            </a:r>
+            <a:endParaRPr lang="en-US" sz="800" dirty="0"/>
+          </a:p>
+        </p:txBody>
+      </p:sp>
+      <p:sp>
+        <p:nvSpPr>
+          <p:cNvPr id="12" name="Text 8"/>
+          <p:cNvSpPr txBox="1"/>
+          <p:nvPr/>
+        </p:nvSpPr>
+        <p:spPr>
+          <a:xfrm>
+            <a:off x="9802368" y="6510528"/>
+            <a:ext cx="457200" cy="201168"/>
+          </a:xfrm>
+          <a:prstGeom prst="rect">
+            <a:avLst/>
+          </a:prstGeom>
+          <a:noFill/>
+          <a:ln/>
+        </p:spPr>
+        <p:txBody>
+          <a:bodyPr wrap="square" lIns="0" tIns="0" rIns="0" bIns="0" rtlCol="0" anchor="t"/>
+          <a:lstStyle/>
+          <a:p>
+            <a:pPr algn="r" indent="0" marL="0">
+              <a:buNone/>
+            </a:pPr>
+            <a:r>
+              <a:rPr lang="en-US" sz="800" dirty="0">
+                <a:solidFill>
+                  <a:srgbClr val="8A93A8"/>
+                </a:solidFill>
+                <a:latin typeface="Exo 2" pitchFamily="34" charset="0"/>
+                <a:ea typeface="Exo 2" pitchFamily="34" charset="-122"/>
+                <a:cs typeface="Exo 2" pitchFamily="34" charset="-120"/>
+              </a:rPr>
+              <a:t>5</a:t>
+            </a:r>
+            <a:endParaRPr lang="en-US" sz="800" dirty="0"/>
+          </a:p>
+        </p:txBody>
+      </p:sp>
+      <p:pic>
+        <p:nvPicPr>
+          <p:cNvPr id="13" name="Image 2" descr="/home/user/HatemIsa_202508993_IT9002_NLP_Project/emyaa-ceo-deck/working/charts/emyaa_navy.png">    </p:cNvPr>
+          <p:cNvPicPr>
+            <a:picLocks noChangeAspect="1"/>
+          </p:cNvPicPr>
+          <p:nvPr/>
+        </p:nvPicPr>
+        <p:blipFill>
+          <a:blip r:embed="rId3"/>
+          <a:stretch>
+            <a:fillRect/>
+          </a:stretch>
+        </p:blipFill>
+        <p:spPr>
+          <a:xfrm>
+            <a:off x="10607040" y="6336792"/>
+            <a:ext cx="1024128" cy="365760"/>
+          </a:xfrm>
+          <a:prstGeom prst="rect">
+            <a:avLst/>
+          </a:prstGeom>
+        </p:spPr>
+      </p:pic>
+      <p:sp>
+        <p:nvSpPr>
+          <p:cNvPr id="15" name="Shape 9"/>
+          <p:cNvSpPr/>
+          <p:nvPr/>
+        </p:nvSpPr>
+        <p:spPr>
+          <a:xfrm>
+            <a:off x="566928" y="1572768"/>
+            <a:ext cx="4206240" cy="1828800"/>
+          </a:xfrm>
+          <a:prstGeom prst="rect">
+            <a:avLst/>
+          </a:prstGeom>
+          <a:solidFill>
+            <a:srgbClr val="FFFFFF"/>
+          </a:solidFill>
+          <a:ln w="9525">
+            <a:solidFill>
+              <a:srgbClr val="D9DFEA"/>
+            </a:solidFill>
+            <a:prstDash val="solid"/>
+          </a:ln>
+        </p:spPr>
+      </p:sp>
+      <p:sp>
+        <p:nvSpPr>
+          <p:cNvPr id="16" name="Shape 10"/>
+          <p:cNvSpPr/>
+          <p:nvPr/>
+        </p:nvSpPr>
+        <p:spPr>
+          <a:xfrm>
+            <a:off x="566928" y="1572768"/>
+            <a:ext cx="4206240" cy="32004"/>
+          </a:xfrm>
+          <a:prstGeom prst="rect">
+            <a:avLst/>
+          </a:prstGeom>
+          <a:solidFill>
+            <a:srgbClr val="132257"/>
+          </a:solidFill>
+          <a:ln w="12700">
+            <a:solidFill>
+              <a:srgbClr val="132257"/>
+            </a:solidFill>
+            <a:prstDash val="solid"/>
+          </a:ln>
+        </p:spPr>
+      </p:sp>
+      <p:sp>
+        <p:nvSpPr>
+          <p:cNvPr id="17" name="Text 11"/>
+          <p:cNvSpPr txBox="1"/>
+          <p:nvPr/>
+        </p:nvSpPr>
+        <p:spPr>
+          <a:xfrm>
+            <a:off x="795528" y="1755648"/>
+            <a:ext cx="2743200" cy="228600"/>
+          </a:xfrm>
+          <a:prstGeom prst="rect">
+            <a:avLst/>
+          </a:prstGeom>
+          <a:noFill/>
+          <a:ln/>
+        </p:spPr>
+        <p:txBody>
+          <a:bodyPr wrap="square" lIns="0" tIns="0" rIns="0" bIns="0" rtlCol="0" anchor="t"/>
+          <a:lstStyle/>
+          <a:p>
+            <a:pPr indent="0" marL="0">
+              <a:buNone/>
+            </a:pPr>
+            <a:r>
+              <a:rPr lang="en-US" sz="900" b="1" spc="200" kern="0" dirty="0">
+                <a:solidFill>
+                  <a:srgbClr val="9A7B1F"/>
+                </a:solidFill>
+                <a:latin typeface="Exo 2" pitchFamily="34" charset="0"/>
+                <a:ea typeface="Exo 2" pitchFamily="34" charset="-122"/>
+                <a:cs typeface="Exo 2" pitchFamily="34" charset="-120"/>
+              </a:rPr>
+              <a:t>ENGLISH CAMPAIGN</a:t>
+            </a:r>
+            <a:endParaRPr lang="en-US" sz="900" dirty="0"/>
+          </a:p>
+        </p:txBody>
+      </p:sp>
+      <p:sp>
+        <p:nvSpPr>
+          <p:cNvPr id="18" name="Text 12"/>
+          <p:cNvSpPr txBox="1"/>
+          <p:nvPr/>
+        </p:nvSpPr>
+        <p:spPr>
+          <a:xfrm>
+            <a:off x="795528" y="2075688"/>
+            <a:ext cx="1920240" cy="347472"/>
+          </a:xfrm>
+          <a:prstGeom prst="rect">
+            <a:avLst/>
+          </a:prstGeom>
+          <a:noFill/>
+          <a:ln/>
+        </p:spPr>
+        <p:txBody>
+          <a:bodyPr wrap="square" lIns="0" tIns="0" rIns="0" bIns="0" rtlCol="0" anchor="t"/>
+          <a:lstStyle/>
+          <a:p>
+            <a:pPr indent="0" marL="0">
+              <a:buNone/>
+            </a:pPr>
+            <a:r>
+              <a:rPr lang="en-US" sz="2000" b="1" dirty="0">
+                <a:solidFill>
+                  <a:srgbClr val="1BA97C"/>
+                </a:solidFill>
+                <a:latin typeface="Exo 2" pitchFamily="34" charset="0"/>
+                <a:ea typeface="Exo 2" pitchFamily="34" charset="-122"/>
+                <a:cs typeface="Exo 2" pitchFamily="34" charset="-120"/>
+              </a:rPr>
+              <a:t>212</a:t>
+            </a:r>
+            <a:endParaRPr lang="en-US" sz="2000" dirty="0"/>
+          </a:p>
+        </p:txBody>
+      </p:sp>
+      <p:sp>
+        <p:nvSpPr>
+          <p:cNvPr id="19" name="Text 13"/>
+          <p:cNvSpPr txBox="1"/>
+          <p:nvPr/>
+        </p:nvSpPr>
+        <p:spPr>
+          <a:xfrm>
+            <a:off x="795528" y="2404872"/>
+            <a:ext cx="1920240" cy="228600"/>
+          </a:xfrm>
+          <a:prstGeom prst="rect">
+            <a:avLst/>
+          </a:prstGeom>
+          <a:noFill/>
+          <a:ln/>
+        </p:spPr>
+        <p:txBody>
+          <a:bodyPr wrap="square" lIns="0" tIns="0" rIns="0" bIns="0" rtlCol="0" anchor="t"/>
+          <a:lstStyle/>
+          <a:p>
+            <a:pPr indent="0" marL="0">
+              <a:buNone/>
+            </a:pPr>
+            <a:r>
+              <a:rPr lang="en-US" sz="900" dirty="0">
+                <a:solidFill>
+                  <a:srgbClr val="7A849C"/>
+                </a:solidFill>
+                <a:latin typeface="Exo 2" pitchFamily="34" charset="0"/>
+                <a:ea typeface="Exo 2" pitchFamily="34" charset="-122"/>
+                <a:cs typeface="Exo 2" pitchFamily="34" charset="-120"/>
+              </a:rPr>
+              <a:t>sessions</a:t>
+            </a:r>
+            <a:endParaRPr lang="en-US" sz="900" dirty="0"/>
+          </a:p>
+        </p:txBody>
+      </p:sp>
+      <p:sp>
+        <p:nvSpPr>
+          <p:cNvPr id="20" name="Text 14"/>
+          <p:cNvSpPr txBox="1"/>
+          <p:nvPr/>
+        </p:nvSpPr>
+        <p:spPr>
+          <a:xfrm>
+            <a:off x="2807208" y="2075688"/>
+            <a:ext cx="1920240" cy="347472"/>
+          </a:xfrm>
+          <a:prstGeom prst="rect">
+            <a:avLst/>
+          </a:prstGeom>
+          <a:noFill/>
+          <a:ln/>
+        </p:spPr>
+        <p:txBody>
+          <a:bodyPr wrap="square" lIns="0" tIns="0" rIns="0" bIns="0" rtlCol="0" anchor="t"/>
+          <a:lstStyle/>
+          <a:p>
+            <a:pPr indent="0" marL="0">
+              <a:buNone/>
+            </a:pPr>
+            <a:r>
+              <a:rPr lang="en-US" sz="2000" b="1" dirty="0">
+                <a:solidFill>
+                  <a:srgbClr val="1BA97C"/>
+                </a:solidFill>
+                <a:latin typeface="Exo 2" pitchFamily="34" charset="0"/>
+                <a:ea typeface="Exo 2" pitchFamily="34" charset="-122"/>
+                <a:cs typeface="Exo 2" pitchFamily="34" charset="-120"/>
+              </a:rPr>
+              <a:t>97.2%</a:t>
+            </a:r>
+            <a:endParaRPr lang="en-US" sz="2000" dirty="0"/>
+          </a:p>
+        </p:txBody>
+      </p:sp>
+      <p:sp>
+        <p:nvSpPr>
+          <p:cNvPr id="21" name="Text 15"/>
+          <p:cNvSpPr txBox="1"/>
+          <p:nvPr/>
+        </p:nvSpPr>
+        <p:spPr>
+          <a:xfrm>
+            <a:off x="2807208" y="2404872"/>
+            <a:ext cx="1920240" cy="228600"/>
+          </a:xfrm>
+          <a:prstGeom prst="rect">
+            <a:avLst/>
+          </a:prstGeom>
+          <a:noFill/>
+          <a:ln/>
+        </p:spPr>
+        <p:txBody>
+          <a:bodyPr wrap="square" lIns="0" tIns="0" rIns="0" bIns="0" rtlCol="0" anchor="t"/>
+          <a:lstStyle/>
+          <a:p>
+            <a:pPr indent="0" marL="0">
+              <a:buNone/>
+            </a:pPr>
+            <a:r>
+              <a:rPr lang="en-US" sz="900" dirty="0">
+                <a:solidFill>
+                  <a:srgbClr val="7A849C"/>
+                </a:solidFill>
+                <a:latin typeface="Exo 2" pitchFamily="34" charset="0"/>
+                <a:ea typeface="Exo 2" pitchFamily="34" charset="-122"/>
+                <a:cs typeface="Exo 2" pitchFamily="34" charset="-120"/>
+              </a:rPr>
+              <a:t>engagement rate</a:t>
+            </a:r>
+            <a:endParaRPr lang="en-US" sz="900" dirty="0"/>
+          </a:p>
+        </p:txBody>
+      </p:sp>
+      <p:sp>
+        <p:nvSpPr>
+          <p:cNvPr id="22" name="Text 16"/>
+          <p:cNvSpPr txBox="1"/>
+          <p:nvPr/>
+        </p:nvSpPr>
+        <p:spPr>
+          <a:xfrm>
+            <a:off x="795528" y="2715768"/>
+            <a:ext cx="1920240" cy="347472"/>
+          </a:xfrm>
+          <a:prstGeom prst="rect">
+            <a:avLst/>
+          </a:prstGeom>
+          <a:noFill/>
+          <a:ln/>
+        </p:spPr>
+        <p:txBody>
+          <a:bodyPr wrap="square" lIns="0" tIns="0" rIns="0" bIns="0" rtlCol="0" anchor="t"/>
+          <a:lstStyle/>
+          <a:p>
+            <a:pPr indent="0" marL="0">
+              <a:buNone/>
+            </a:pPr>
+            <a:r>
+              <a:rPr lang="en-US" sz="2000" b="1" dirty="0">
+                <a:solidFill>
+                  <a:srgbClr val="1BA97C"/>
+                </a:solidFill>
+                <a:latin typeface="Exo 2" pitchFamily="34" charset="0"/>
+                <a:ea typeface="Exo 2" pitchFamily="34" charset="-122"/>
+                <a:cs typeface="Exo 2" pitchFamily="34" charset="-120"/>
+              </a:rPr>
+              <a:t>19.9s</a:t>
+            </a:r>
+            <a:endParaRPr lang="en-US" sz="2000" dirty="0"/>
+          </a:p>
+        </p:txBody>
+      </p:sp>
+      <p:sp>
+        <p:nvSpPr>
+          <p:cNvPr id="23" name="Text 17"/>
+          <p:cNvSpPr txBox="1"/>
+          <p:nvPr/>
+        </p:nvSpPr>
+        <p:spPr>
+          <a:xfrm>
+            <a:off x="795528" y="3044952"/>
+            <a:ext cx="1920240" cy="228600"/>
+          </a:xfrm>
+          <a:prstGeom prst="rect">
+            <a:avLst/>
+          </a:prstGeom>
+          <a:noFill/>
+          <a:ln/>
+        </p:spPr>
+        <p:txBody>
+          <a:bodyPr wrap="square" lIns="0" tIns="0" rIns="0" bIns="0" rtlCol="0" anchor="t"/>
+          <a:lstStyle/>
+          <a:p>
+            <a:pPr indent="0" marL="0">
+              <a:buNone/>
+            </a:pPr>
+            <a:r>
+              <a:rPr lang="en-US" sz="900" dirty="0">
+                <a:solidFill>
+                  <a:srgbClr val="7A849C"/>
+                </a:solidFill>
+                <a:latin typeface="Exo 2" pitchFamily="34" charset="0"/>
+                <a:ea typeface="Exo 2" pitchFamily="34" charset="-122"/>
+                <a:cs typeface="Exo 2" pitchFamily="34" charset="-120"/>
+              </a:rPr>
+              <a:t>per session</a:t>
+            </a:r>
+            <a:endParaRPr lang="en-US" sz="900" dirty="0"/>
+          </a:p>
+        </p:txBody>
+      </p:sp>
+      <p:sp>
+        <p:nvSpPr>
+          <p:cNvPr id="24" name="Text 18"/>
+          <p:cNvSpPr txBox="1"/>
+          <p:nvPr/>
+        </p:nvSpPr>
+        <p:spPr>
+          <a:xfrm>
+            <a:off x="2807208" y="2715768"/>
+            <a:ext cx="1920240" cy="347472"/>
+          </a:xfrm>
+          <a:prstGeom prst="rect">
+            <a:avLst/>
+          </a:prstGeom>
+          <a:noFill/>
+          <a:ln/>
+        </p:spPr>
+        <p:txBody>
+          <a:bodyPr wrap="square" lIns="0" tIns="0" rIns="0" bIns="0" rtlCol="0" anchor="t"/>
+          <a:lstStyle/>
+          <a:p>
+            <a:pPr indent="0" marL="0">
+              <a:buNone/>
+            </a:pPr>
+            <a:r>
+              <a:rPr lang="en-US" sz="2000" b="1" dirty="0">
+                <a:solidFill>
+                  <a:srgbClr val="132257"/>
+                </a:solidFill>
+                <a:latin typeface="Exo 2" pitchFamily="34" charset="0"/>
+                <a:ea typeface="Exo 2" pitchFamily="34" charset="-122"/>
+                <a:cs typeface="Exo 2" pitchFamily="34" charset="-120"/>
+              </a:rPr>
+              <a:t>0.94</a:t>
+            </a:r>
+            <a:endParaRPr lang="en-US" sz="2000" dirty="0"/>
+          </a:p>
+        </p:txBody>
+      </p:sp>
+      <p:sp>
+        <p:nvSpPr>
+          <p:cNvPr id="25" name="Text 19"/>
+          <p:cNvSpPr txBox="1"/>
+          <p:nvPr/>
+        </p:nvSpPr>
+        <p:spPr>
+          <a:xfrm>
+            <a:off x="2807208" y="3044952"/>
+            <a:ext cx="1920240" cy="228600"/>
+          </a:xfrm>
+          <a:prstGeom prst="rect">
+            <a:avLst/>
+          </a:prstGeom>
+          <a:noFill/>
+          <a:ln/>
+        </p:spPr>
+        <p:txBody>
+          <a:bodyPr wrap="square" lIns="0" tIns="0" rIns="0" bIns="0" rtlCol="0" anchor="t"/>
+          <a:lstStyle/>
+          <a:p>
+            <a:pPr indent="0" marL="0">
+              <a:buNone/>
+            </a:pPr>
+            <a:r>
+              <a:rPr lang="en-US" sz="900" dirty="0">
+                <a:solidFill>
+                  <a:srgbClr val="7A849C"/>
+                </a:solidFill>
+                <a:latin typeface="Exo 2" pitchFamily="34" charset="0"/>
+                <a:ea typeface="Exo 2" pitchFamily="34" charset="-122"/>
+                <a:cs typeface="Exo 2" pitchFamily="34" charset="-120"/>
+              </a:rPr>
+              <a:t>key events per session</a:t>
+            </a:r>
+            <a:endParaRPr lang="en-US" sz="900" dirty="0"/>
+          </a:p>
+        </p:txBody>
+      </p:sp>
+      <p:sp>
+        <p:nvSpPr>
+          <p:cNvPr id="26" name="Shape 20"/>
+          <p:cNvSpPr/>
+          <p:nvPr/>
+        </p:nvSpPr>
+        <p:spPr>
+          <a:xfrm>
+            <a:off x="566928" y="3584448"/>
+            <a:ext cx="4206240" cy="1828800"/>
+          </a:xfrm>
+          <a:prstGeom prst="rect">
+            <a:avLst/>
+          </a:prstGeom>
+          <a:solidFill>
+            <a:srgbClr val="FFFFFF"/>
+          </a:solidFill>
+          <a:ln w="9525">
+            <a:solidFill>
+              <a:srgbClr val="D9DFEA"/>
+            </a:solidFill>
+            <a:prstDash val="solid"/>
+          </a:ln>
+        </p:spPr>
+      </p:sp>
+      <p:sp>
+        <p:nvSpPr>
+          <p:cNvPr id="27" name="Shape 21"/>
+          <p:cNvSpPr/>
+          <p:nvPr/>
+        </p:nvSpPr>
+        <p:spPr>
+          <a:xfrm>
+            <a:off x="566928" y="3584448"/>
+            <a:ext cx="4206240" cy="32004"/>
+          </a:xfrm>
+          <a:prstGeom prst="rect">
+            <a:avLst/>
+          </a:prstGeom>
+          <a:solidFill>
+            <a:srgbClr val="D4AF37"/>
+          </a:solidFill>
+          <a:ln w="12700">
+            <a:solidFill>
+              <a:srgbClr val="D4AF37"/>
+            </a:solidFill>
+            <a:prstDash val="solid"/>
+          </a:ln>
+        </p:spPr>
+      </p:sp>
+      <p:sp>
+        <p:nvSpPr>
+          <p:cNvPr id="28" name="Text 22"/>
+          <p:cNvSpPr txBox="1"/>
+          <p:nvPr/>
+        </p:nvSpPr>
+        <p:spPr>
+          <a:xfrm>
+            <a:off x="795528" y="3767328"/>
+            <a:ext cx="2743200" cy="228600"/>
+          </a:xfrm>
+          <a:prstGeom prst="rect">
+            <a:avLst/>
+          </a:prstGeom>
+          <a:noFill/>
+          <a:ln/>
+        </p:spPr>
+        <p:txBody>
+          <a:bodyPr wrap="square" lIns="0" tIns="0" rIns="0" bIns="0" rtlCol="0" anchor="t"/>
+          <a:lstStyle/>
+          <a:p>
+            <a:pPr indent="0" marL="0">
+              <a:buNone/>
+            </a:pPr>
+            <a:r>
+              <a:rPr lang="en-US" sz="900" b="1" spc="200" kern="0" dirty="0">
+                <a:solidFill>
+                  <a:srgbClr val="9A7B1F"/>
+                </a:solidFill>
+                <a:latin typeface="Exo 2" pitchFamily="34" charset="0"/>
+                <a:ea typeface="Exo 2" pitchFamily="34" charset="-122"/>
+                <a:cs typeface="Exo 2" pitchFamily="34" charset="-120"/>
+              </a:rPr>
+              <a:t>ARABIC CAMPAIGN</a:t>
+            </a:r>
+            <a:endParaRPr lang="en-US" sz="900" dirty="0"/>
+          </a:p>
+        </p:txBody>
+      </p:sp>
+      <p:sp>
+        <p:nvSpPr>
+          <p:cNvPr id="29" name="Text 23"/>
+          <p:cNvSpPr txBox="1"/>
+          <p:nvPr/>
+        </p:nvSpPr>
+        <p:spPr>
+          <a:xfrm>
+            <a:off x="795528" y="4087368"/>
+            <a:ext cx="1920240" cy="347472"/>
+          </a:xfrm>
+          <a:prstGeom prst="rect">
+            <a:avLst/>
+          </a:prstGeom>
+          <a:noFill/>
+          <a:ln/>
+        </p:spPr>
+        <p:txBody>
+          <a:bodyPr wrap="square" lIns="0" tIns="0" rIns="0" bIns="0" rtlCol="0" anchor="t"/>
+          <a:lstStyle/>
+          <a:p>
+            <a:pPr indent="0" marL="0">
+              <a:buNone/>
+            </a:pPr>
+            <a:r>
+              <a:rPr lang="en-US" sz="2000" b="1" dirty="0">
+                <a:solidFill>
+                  <a:srgbClr val="132257"/>
+                </a:solidFill>
+                <a:latin typeface="Exo 2" pitchFamily="34" charset="0"/>
+                <a:ea typeface="Exo 2" pitchFamily="34" charset="-122"/>
+                <a:cs typeface="Exo 2" pitchFamily="34" charset="-120"/>
+              </a:rPr>
+              <a:t>176</a:t>
+            </a:r>
+            <a:endParaRPr lang="en-US" sz="2000" dirty="0"/>
+          </a:p>
+        </p:txBody>
+      </p:sp>
+      <p:sp>
+        <p:nvSpPr>
+          <p:cNvPr id="30" name="Text 24"/>
+          <p:cNvSpPr txBox="1"/>
+          <p:nvPr/>
+        </p:nvSpPr>
+        <p:spPr>
+          <a:xfrm>
+            <a:off x="795528" y="4416552"/>
+            <a:ext cx="1920240" cy="228600"/>
+          </a:xfrm>
+          <a:prstGeom prst="rect">
+            <a:avLst/>
+          </a:prstGeom>
+          <a:noFill/>
+          <a:ln/>
+        </p:spPr>
+        <p:txBody>
+          <a:bodyPr wrap="square" lIns="0" tIns="0" rIns="0" bIns="0" rtlCol="0" anchor="t"/>
+          <a:lstStyle/>
+          <a:p>
+            <a:pPr indent="0" marL="0">
+              <a:buNone/>
+            </a:pPr>
+            <a:r>
+              <a:rPr lang="en-US" sz="900" dirty="0">
+                <a:solidFill>
+                  <a:srgbClr val="7A849C"/>
+                </a:solidFill>
+                <a:latin typeface="Exo 2" pitchFamily="34" charset="0"/>
+                <a:ea typeface="Exo 2" pitchFamily="34" charset="-122"/>
+                <a:cs typeface="Exo 2" pitchFamily="34" charset="-120"/>
+              </a:rPr>
+              <a:t>sessions</a:t>
+            </a:r>
+            <a:endParaRPr lang="en-US" sz="900" dirty="0"/>
+          </a:p>
+        </p:txBody>
+      </p:sp>
+      <p:sp>
+        <p:nvSpPr>
+          <p:cNvPr id="31" name="Text 25"/>
+          <p:cNvSpPr txBox="1"/>
+          <p:nvPr/>
+        </p:nvSpPr>
+        <p:spPr>
+          <a:xfrm>
+            <a:off x="2807208" y="4087368"/>
+            <a:ext cx="1920240" cy="347472"/>
+          </a:xfrm>
+          <a:prstGeom prst="rect">
+            <a:avLst/>
+          </a:prstGeom>
+          <a:noFill/>
+          <a:ln/>
+        </p:spPr>
+        <p:txBody>
+          <a:bodyPr wrap="square" lIns="0" tIns="0" rIns="0" bIns="0" rtlCol="0" anchor="t"/>
+          <a:lstStyle/>
+          <a:p>
+            <a:pPr indent="0" marL="0">
+              <a:buNone/>
+            </a:pPr>
+            <a:r>
+              <a:rPr lang="en-US" sz="2000" b="1" dirty="0">
+                <a:solidFill>
+                  <a:srgbClr val="132257"/>
+                </a:solidFill>
+                <a:latin typeface="Exo 2" pitchFamily="34" charset="0"/>
+                <a:ea typeface="Exo 2" pitchFamily="34" charset="-122"/>
+                <a:cs typeface="Exo 2" pitchFamily="34" charset="-120"/>
+              </a:rPr>
+              <a:t>86.9%</a:t>
+            </a:r>
+            <a:endParaRPr lang="en-US" sz="2000" dirty="0"/>
+          </a:p>
+        </p:txBody>
+      </p:sp>
+      <p:sp>
+        <p:nvSpPr>
+          <p:cNvPr id="32" name="Text 26"/>
+          <p:cNvSpPr txBox="1"/>
+          <p:nvPr/>
+        </p:nvSpPr>
+        <p:spPr>
+          <a:xfrm>
+            <a:off x="2807208" y="4416552"/>
+            <a:ext cx="1920240" cy="228600"/>
+          </a:xfrm>
+          <a:prstGeom prst="rect">
+            <a:avLst/>
+          </a:prstGeom>
+          <a:noFill/>
+          <a:ln/>
+        </p:spPr>
+        <p:txBody>
+          <a:bodyPr wrap="square" lIns="0" tIns="0" rIns="0" bIns="0" rtlCol="0" anchor="t"/>
+          <a:lstStyle/>
+          <a:p>
+            <a:pPr indent="0" marL="0">
+              <a:buNone/>
+            </a:pPr>
+            <a:r>
+              <a:rPr lang="en-US" sz="900" dirty="0">
+                <a:solidFill>
+                  <a:srgbClr val="7A849C"/>
+                </a:solidFill>
+                <a:latin typeface="Exo 2" pitchFamily="34" charset="0"/>
+                <a:ea typeface="Exo 2" pitchFamily="34" charset="-122"/>
+                <a:cs typeface="Exo 2" pitchFamily="34" charset="-120"/>
+              </a:rPr>
+              <a:t>engagement rate</a:t>
+            </a:r>
+            <a:endParaRPr lang="en-US" sz="900" dirty="0"/>
+          </a:p>
+        </p:txBody>
+      </p:sp>
+      <p:sp>
+        <p:nvSpPr>
+          <p:cNvPr id="33" name="Text 27"/>
+          <p:cNvSpPr txBox="1"/>
+          <p:nvPr/>
+        </p:nvSpPr>
+        <p:spPr>
+          <a:xfrm>
+            <a:off x="795528" y="4727448"/>
+            <a:ext cx="1920240" cy="347472"/>
+          </a:xfrm>
+          <a:prstGeom prst="rect">
+            <a:avLst/>
+          </a:prstGeom>
+          <a:noFill/>
+          <a:ln/>
+        </p:spPr>
+        <p:txBody>
+          <a:bodyPr wrap="square" lIns="0" tIns="0" rIns="0" bIns="0" rtlCol="0" anchor="t"/>
+          <a:lstStyle/>
+          <a:p>
+            <a:pPr indent="0" marL="0">
+              <a:buNone/>
+            </a:pPr>
+            <a:r>
+              <a:rPr lang="en-US" sz="2000" b="1" dirty="0">
+                <a:solidFill>
+                  <a:srgbClr val="132257"/>
+                </a:solidFill>
+                <a:latin typeface="Exo 2" pitchFamily="34" charset="0"/>
+                <a:ea typeface="Exo 2" pitchFamily="34" charset="-122"/>
+                <a:cs typeface="Exo 2" pitchFamily="34" charset="-120"/>
+              </a:rPr>
+              <a:t>16.0s</a:t>
+            </a:r>
+            <a:endParaRPr lang="en-US" sz="2000" dirty="0"/>
+          </a:p>
+        </p:txBody>
+      </p:sp>
+      <p:sp>
+        <p:nvSpPr>
+          <p:cNvPr id="34" name="Text 28"/>
+          <p:cNvSpPr txBox="1"/>
+          <p:nvPr/>
+        </p:nvSpPr>
+        <p:spPr>
+          <a:xfrm>
+            <a:off x="795528" y="5056632"/>
+            <a:ext cx="1920240" cy="228600"/>
+          </a:xfrm>
+          <a:prstGeom prst="rect">
+            <a:avLst/>
+          </a:prstGeom>
+          <a:noFill/>
+          <a:ln/>
+        </p:spPr>
+        <p:txBody>
+          <a:bodyPr wrap="square" lIns="0" tIns="0" rIns="0" bIns="0" rtlCol="0" anchor="t"/>
+          <a:lstStyle/>
+          <a:p>
+            <a:pPr indent="0" marL="0">
+              <a:buNone/>
+            </a:pPr>
+            <a:r>
+              <a:rPr lang="en-US" sz="900" dirty="0">
+                <a:solidFill>
+                  <a:srgbClr val="7A849C"/>
+                </a:solidFill>
+                <a:latin typeface="Exo 2" pitchFamily="34" charset="0"/>
+                <a:ea typeface="Exo 2" pitchFamily="34" charset="-122"/>
+                <a:cs typeface="Exo 2" pitchFamily="34" charset="-120"/>
+              </a:rPr>
+              <a:t>per session</a:t>
+            </a:r>
+            <a:endParaRPr lang="en-US" sz="900" dirty="0"/>
+          </a:p>
+        </p:txBody>
+      </p:sp>
+      <p:sp>
+        <p:nvSpPr>
+          <p:cNvPr id="35" name="Text 29"/>
+          <p:cNvSpPr txBox="1"/>
+          <p:nvPr/>
+        </p:nvSpPr>
+        <p:spPr>
+          <a:xfrm>
+            <a:off x="2807208" y="4727448"/>
+            <a:ext cx="1920240" cy="347472"/>
+          </a:xfrm>
+          <a:prstGeom prst="rect">
+            <a:avLst/>
+          </a:prstGeom>
+          <a:noFill/>
+          <a:ln/>
+        </p:spPr>
+        <p:txBody>
+          <a:bodyPr wrap="square" lIns="0" tIns="0" rIns="0" bIns="0" rtlCol="0" anchor="t"/>
+          <a:lstStyle/>
+          <a:p>
+            <a:pPr indent="0" marL="0">
+              <a:buNone/>
+            </a:pPr>
+            <a:r>
+              <a:rPr lang="en-US" sz="2000" b="1" dirty="0">
+                <a:solidFill>
+                  <a:srgbClr val="1BA97C"/>
+                </a:solidFill>
+                <a:latin typeface="Exo 2" pitchFamily="34" charset="0"/>
+                <a:ea typeface="Exo 2" pitchFamily="34" charset="-122"/>
+                <a:cs typeface="Exo 2" pitchFamily="34" charset="-120"/>
+              </a:rPr>
+              <a:t>1.05</a:t>
+            </a:r>
+            <a:endParaRPr lang="en-US" sz="2000" dirty="0"/>
+          </a:p>
+        </p:txBody>
+      </p:sp>
+      <p:sp>
+        <p:nvSpPr>
+          <p:cNvPr id="36" name="Text 30"/>
+          <p:cNvSpPr txBox="1"/>
+          <p:nvPr/>
+        </p:nvSpPr>
+        <p:spPr>
+          <a:xfrm>
+            <a:off x="2807208" y="5056632"/>
+            <a:ext cx="1920240" cy="228600"/>
+          </a:xfrm>
+          <a:prstGeom prst="rect">
+            <a:avLst/>
+          </a:prstGeom>
+          <a:noFill/>
+          <a:ln/>
+        </p:spPr>
+        <p:txBody>
+          <a:bodyPr wrap="square" lIns="0" tIns="0" rIns="0" bIns="0" rtlCol="0" anchor="t"/>
+          <a:lstStyle/>
+          <a:p>
+            <a:pPr indent="0" marL="0">
+              <a:buNone/>
+            </a:pPr>
+            <a:r>
+              <a:rPr lang="en-US" sz="900" dirty="0">
+                <a:solidFill>
+                  <a:srgbClr val="7A849C"/>
+                </a:solidFill>
+                <a:latin typeface="Exo 2" pitchFamily="34" charset="0"/>
+                <a:ea typeface="Exo 2" pitchFamily="34" charset="-122"/>
+                <a:cs typeface="Exo 2" pitchFamily="34" charset="-120"/>
+              </a:rPr>
+              <a:t>key events per session</a:t>
+            </a:r>
+            <a:endParaRPr lang="en-US" sz="900" dirty="0"/>
+          </a:p>
+        </p:txBody>
+      </p:sp>
+      <p:graphicFrame>
+        <p:nvGraphicFramePr>
+          <p:cNvPr id="37" name="Chart 0" descr=""/>
+          <p:cNvGraphicFramePr/>
+          <p:nvPr/>
+        </p:nvGraphicFramePr>
+        <p:xfrm>
+          <a:off x="5074920" y="1508760"/>
+          <a:ext cx="6556248" cy="4069080"/>
+        </p:xfrm>
+        <a:graphic xmlns:a="http://schemas.openxmlformats.org/drawingml/2006/main">
+          <a:graphicData uri="http://schemas.openxmlformats.org/drawingml/2006/chart">
+            <c:chart xmlns:c="http://schemas.openxmlformats.org/drawingml/2006/chart" r:id="rId4"/>
+          </a:graphicData>
+        </a:graphic>
+      </p:graphicFrame>
+    </p:spTree>
+  </p:cSld>
+  <p:clrMapOvr>
+    <a:masterClrMapping/>
+  </p:clrMapOvr>
+</p:sld>
+</file>
+
+<file path=ppt/slides/slide6.xml><?xml version="1.0" encoding="utf-8"?>
+<p:sld xmlns:a="http://schemas.openxmlformats.org/drawingml/2006/main" xmlns:r="http://schemas.openxmlformats.org/officeDocument/2006/relationships" xmlns:p="http://schemas.openxmlformats.org/presentationml/2006/main">
+  <p:cSld name="Slide 6">
+    <p:bg>
+      <p:bgPr>
+        <a:solidFill>
+          <a:srgbClr val="FFFFFF"/>
+        </a:solidFill>
+      </p:bgPr>
+    </p:bg>
+    <p:spTree>
+      <p:nvGrpSpPr>
+        <p:cNvPr id="1" name=""/>
+        <p:cNvGrpSpPr/>
+        <p:nvPr/>
+      </p:nvGrpSpPr>
+      <p:grpSpPr>
+        <a:xfrm>
+          <a:off x="0" y="0"/>
+          <a:ext cx="0" cy="0"/>
+          <a:chOff x="0" y="0"/>
+          <a:chExt cx="0" cy="0"/>
+        </a:xfrm>
+      </p:grpSpPr>
+      <p:pic>
+        <p:nvPicPr>
+          <p:cNvPr id="2" name="Image 0" descr="/home/user/HatemIsa_202508993_IT9002_NLP_Project/emyaa-ceo-deck/working/charts/board_header.png">    </p:cNvPr>
+          <p:cNvPicPr>
+            <a:picLocks noChangeAspect="1"/>
+          </p:cNvPicPr>
+          <p:nvPr/>
+        </p:nvPicPr>
+        <p:blipFill>
+          <a:blip r:embed="rId1"/>
+          <a:stretch>
+            <a:fillRect/>
+          </a:stretch>
+        </p:blipFill>
+        <p:spPr>
+          <a:xfrm>
+            <a:off x="0" y="0"/>
+            <a:ext cx="12191695" cy="1298448"/>
+          </a:xfrm>
+          <a:prstGeom prst="rect">
+            <a:avLst/>
+          </a:prstGeom>
+        </p:spPr>
+      </p:pic>
+      <p:sp>
+        <p:nvSpPr>
+          <p:cNvPr id="3" name="Shape 0"/>
+          <p:cNvSpPr/>
+          <p:nvPr/>
+        </p:nvSpPr>
+        <p:spPr>
+          <a:xfrm>
+            <a:off x="0" y="1298448"/>
+            <a:ext cx="12191695" cy="24689"/>
+          </a:xfrm>
+          <a:prstGeom prst="rect">
+            <a:avLst/>
+          </a:prstGeom>
+          <a:solidFill>
+            <a:srgbClr val="D4AF37"/>
+          </a:solidFill>
+          <a:ln w="12700">
+            <a:solidFill>
+              <a:srgbClr val="D4AF37"/>
+            </a:solidFill>
+            <a:prstDash val="solid"/>
+          </a:ln>
+        </p:spPr>
+      </p:sp>
+      <p:sp>
+        <p:nvSpPr>
+          <p:cNvPr id="4" name="Text 1"/>
+          <p:cNvSpPr txBox="1"/>
+          <p:nvPr/>
+        </p:nvSpPr>
+        <p:spPr>
+          <a:xfrm>
+            <a:off x="566928" y="274320"/>
+            <a:ext cx="9144000" cy="182880"/>
+          </a:xfrm>
+          <a:prstGeom prst="rect">
+            <a:avLst/>
+          </a:prstGeom>
+          <a:noFill/>
+          <a:ln/>
+        </p:spPr>
+        <p:txBody>
+          <a:bodyPr wrap="square" lIns="0" tIns="0" rIns="0" bIns="0" rtlCol="0" anchor="t"/>
+          <a:lstStyle/>
+          <a:p>
+            <a:pPr indent="0" marL="0">
+              <a:buNone/>
+            </a:pPr>
+            <a:r>
+              <a:rPr lang="en-US" sz="900" b="1" spc="200" kern="0" dirty="0">
+                <a:solidFill>
+                  <a:srgbClr val="D4AF37"/>
+                </a:solidFill>
+                <a:latin typeface="Exo 2" pitchFamily="34" charset="0"/>
+                <a:ea typeface="Exo 2" pitchFamily="34" charset="-122"/>
+                <a:cs typeface="Exo 2" pitchFamily="34" charset="-120"/>
+              </a:rPr>
               <a:t>DECISIONS AND OPEN ITEMS</a:t>
             </a:r>
             <a:endParaRPr lang="en-US" sz="900" dirty="0"/>
@@ -5457,7 +8826,7 @@
                 <a:ea typeface="Exo 2" pitchFamily="34" charset="-122"/>
                 <a:cs typeface="Exo 2" pitchFamily="34" charset="-120"/>
               </a:rPr>
-              <a:t>4</a:t>
+              <a:t>6</a:t>
             </a:r>
             <a:endParaRPr lang="en-US" sz="800" dirty="0"/>
           </a:p>
@@ -5489,7 +8858,7 @@
       </p:pic>
       <p:graphicFrame>
         <p:nvGraphicFramePr>
-          <p:cNvPr id="5" name="Table 0"/>
+          <p:cNvPr id="7" name="Table 0"/>
           <p:cNvGraphicFramePr>
             <a:graphicFrameLocks noGrp="1"/>
           </p:cNvGraphicFramePr>
@@ -6638,7 +10007,7 @@
       </p:graphicFrame>
       <p:graphicFrame>
         <p:nvGraphicFramePr>
-          <p:cNvPr id="9" name="Table 1"/>
+          <p:cNvPr id="13" name="Table 1"/>
           <p:cNvGraphicFramePr>
             <a:graphicFrameLocks noGrp="1"/>
           </p:cNvGraphicFramePr>

--- a/emyaa-ceo-deck/output/final-deck/eMYAA-Marketing-Update-01.10.2026-CEO-Redesigned.pptx
+++ b/emyaa-ceo-deck/output/final-deck/eMYAA-Marketing-Update-01.10.2026-CEO-Redesigned.pptx
@@ -119,1190 +119,6 @@
     </a:lvl9pPr>
   </p:defaultTextStyle>
 </p:presentation>
-</file>
-
-<file path=ppt/charts/chart1.xml><?xml version="1.0" encoding="utf-8"?>
-<c:chartSpace xmlns:c="http://schemas.openxmlformats.org/drawingml/2006/chart" xmlns:a="http://schemas.openxmlformats.org/drawingml/2006/main" xmlns:r="http://schemas.openxmlformats.org/officeDocument/2006/relationships">
-  <c:date1904 val="0"/>
-  <c:roundedCorners val="1"/>
-  <c:chart>
-    <c:title>
-      <c:tx>
-        <c:rich>
-          <a:bodyPr/>
-          <a:lstStyle/>
-          <a:p>
-            <a:pPr>
-              <a:defRPr sz="1100" b="0" i="0" u="none" strike="noStrike">
-                <a:solidFill>
-                  <a:srgbClr val="132257"/>
-                </a:solidFill>
-                <a:latin typeface="Exo 2"/>
-              </a:defRPr>
-            </a:pPr>
-            <a:r>
-              <a:rPr sz="1100" b="0" i="0" u="none" strike="noStrike">
-                <a:solidFill>
-                  <a:srgbClr val="132257"/>
-                </a:solidFill>
-                <a:latin typeface="Exo 2"/>
-              </a:rPr>
-              <a:t>Net new app downloads and onboarded users between dashboard dates</a:t>
-            </a:r>
-          </a:p>
-        </c:rich>
-      </c:tx>
-      <c:layout/>
-      <c:overlay val="0"/>
-    </c:title>
-    <c:autoTitleDeleted val="0"/>
-    <c:plotArea>
-      <c:layout/>
-      <c:barChart>
-        <c:barDir val="col"/>
-        <c:grouping val="clustered"/>
-        <c:varyColors val="0"/>
-        <c:ser>
-          <c:idx val="0"/>
-          <c:order val="0"/>
-          <c:tx>
-            <c:strRef>
-              <c:f>Sheet1!$B$1</c:f>
-              <c:strCache>
-                <c:ptCount val="1"/>
-                <c:pt idx="0">
-                  <c:v>App downloads added</c:v>
-                </c:pt>
-              </c:strCache>
-            </c:strRef>
-          </c:tx>
-          <c:spPr>
-            <a:solidFill>
-              <a:srgbClr val="132257"/>
-            </a:solidFill>
-            <a:effectLst/>
-          </c:spPr>
-          <c:invertIfNegative val="0"/>
-          <c:dLbls>
-            <c:numFmt formatCode="#,##0" sourceLinked="0"/>
-            <c:txPr>
-              <a:bodyPr/>
-              <a:lstStyle/>
-              <a:p>
-                <a:pPr>
-                  <a:defRPr b="1" i="0" strike="noStrike" sz="1100" u="none">
-                    <a:solidFill>
-                      <a:srgbClr val="132257"/>
-                    </a:solidFill>
-                    <a:latin typeface="Exo 2"/>
-                  </a:defRPr>
-                </a:pPr>
-              </a:p>
-            </c:txPr>
-            <c:showLegendKey val="0"/>
-            <c:showVal val="1"/>
-            <c:showCatName val="0"/>
-            <c:showSerName val="0"/>
-            <c:showPercent val="0"/>
-            <c:showBubbleSize val="0"/>
-            <c:showLeaderLines val="0"/>
-          </c:dLbls>
-          <c:cat>
-            <c:multiLvlStrRef>
-              <c:f>Sheet1!$A$2:$A$5</c:f>
-              <c:multiLvlStrCache>
-                <c:ptCount val="4"/>
-                <c:lvl>
-                  <c:pt idx="0">
-                    <c:v>1-8 Sep</c:v>
-                  </c:pt>
-                  <c:pt idx="1">
-                    <c:v>8-14 Sep</c:v>
-                  </c:pt>
-                  <c:pt idx="2">
-                    <c:v>14-21 Sep</c:v>
-                  </c:pt>
-                  <c:pt idx="3">
-                    <c:v>21-27 Sep (paid live)</c:v>
-                  </c:pt>
-                </c:lvl>
-              </c:multiLvlStrCache>
-            </c:multiLvlStrRef>
-          </c:cat>
-          <c:val>
-            <c:numRef>
-              <c:f>Sheet1!$B$2:$B$5</c:f>
-              <c:numCache>
-                <c:formatCode>General</c:formatCode>
-                <c:ptCount val="4"/>
-                <c:pt idx="0">
-                  <c:v>30</c:v>
-                </c:pt>
-                <c:pt idx="1">
-                  <c:v>20</c:v>
-                </c:pt>
-                <c:pt idx="2">
-                  <c:v>14</c:v>
-                </c:pt>
-                <c:pt idx="3">
-                  <c:v>36</c:v>
-                </c:pt>
-              </c:numCache>
-            </c:numRef>
-          </c:val>
-        </c:ser>
-        <c:ser>
-          <c:idx val="1"/>
-          <c:order val="1"/>
-          <c:tx>
-            <c:strRef>
-              <c:f>Sheet1!$C$1</c:f>
-              <c:strCache>
-                <c:ptCount val="1"/>
-                <c:pt idx="0">
-                  <c:v>Users onboarded</c:v>
-                </c:pt>
-              </c:strCache>
-            </c:strRef>
-          </c:tx>
-          <c:spPr>
-            <a:solidFill>
-              <a:srgbClr val="1BA97C"/>
-            </a:solidFill>
-            <a:effectLst/>
-          </c:spPr>
-          <c:invertIfNegative val="0"/>
-          <c:dLbls>
-            <c:numFmt formatCode="#,##0" sourceLinked="0"/>
-            <c:txPr>
-              <a:bodyPr/>
-              <a:lstStyle/>
-              <a:p>
-                <a:pPr>
-                  <a:defRPr b="1" i="0" strike="noStrike" sz="1100" u="none">
-                    <a:solidFill>
-                      <a:srgbClr val="132257"/>
-                    </a:solidFill>
-                    <a:latin typeface="Exo 2"/>
-                  </a:defRPr>
-                </a:pPr>
-              </a:p>
-            </c:txPr>
-            <c:showLegendKey val="0"/>
-            <c:showVal val="1"/>
-            <c:showCatName val="0"/>
-            <c:showSerName val="0"/>
-            <c:showPercent val="0"/>
-            <c:showBubbleSize val="0"/>
-            <c:showLeaderLines val="0"/>
-          </c:dLbls>
-          <c:cat>
-            <c:multiLvlStrRef>
-              <c:f>Sheet1!$A$2:$A$5</c:f>
-              <c:multiLvlStrCache>
-                <c:ptCount val="4"/>
-                <c:lvl>
-                  <c:pt idx="0">
-                    <c:v>1-8 Sep</c:v>
-                  </c:pt>
-                  <c:pt idx="1">
-                    <c:v>8-14 Sep</c:v>
-                  </c:pt>
-                  <c:pt idx="2">
-                    <c:v>14-21 Sep</c:v>
-                  </c:pt>
-                  <c:pt idx="3">
-                    <c:v>21-27 Sep (paid live)</c:v>
-                  </c:pt>
-                </c:lvl>
-              </c:multiLvlStrCache>
-            </c:multiLvlStrRef>
-          </c:cat>
-          <c:val>
-            <c:numRef>
-              <c:f>Sheet1!$C$2:$C$5</c:f>
-              <c:numCache>
-                <c:formatCode>General</c:formatCode>
-                <c:ptCount val="4"/>
-                <c:pt idx="0">
-                  <c:v>1</c:v>
-                </c:pt>
-                <c:pt idx="1">
-                  <c:v>3</c:v>
-                </c:pt>
-                <c:pt idx="2">
-                  <c:v>5</c:v>
-                </c:pt>
-                <c:pt idx="3">
-                  <c:v>3</c:v>
-                </c:pt>
-              </c:numCache>
-            </c:numRef>
-          </c:val>
-        </c:ser>
-        <c:dLbls>
-          <c:numFmt formatCode="#,##0" sourceLinked="0"/>
-          <c:txPr>
-            <a:bodyPr/>
-            <a:lstStyle/>
-            <a:p>
-              <a:pPr>
-                <a:defRPr b="1" i="0" strike="noStrike" sz="1100" u="none">
-                  <a:solidFill>
-                    <a:srgbClr val="132257"/>
-                  </a:solidFill>
-                  <a:latin typeface="Exo 2"/>
-                </a:defRPr>
-              </a:pPr>
-            </a:p>
-          </c:txPr>
-          <c:showLegendKey val="0"/>
-          <c:showVal val="1"/>
-          <c:showCatName val="0"/>
-          <c:showSerName val="0"/>
-          <c:showPercent val="0"/>
-          <c:showBubbleSize val="0"/>
-          <c:showLeaderLines val="0"/>
-        </c:dLbls>
-        <c:gapWidth val="55"/>
-        <c:overlap val="0"/>
-        <c:axId val="2094734554"/>
-        <c:axId val="2094734552"/>
-        <c:axId val="2094734556"/>
-      </c:barChart>
-      <c:catAx>
-        <c:axId val="2094734554"/>
-        <c:scaling>
-          <c:orientation val="minMax"/>
-        </c:scaling>
-        <c:delete val="0"/>
-        <c:axPos val="b"/>
-        <c:numFmt formatCode="General" sourceLinked="1"/>
-        <c:majorTickMark val="out"/>
-        <c:minorTickMark val="none"/>
-        <c:tickLblPos val="low"/>
-        <c:spPr>
-          <a:ln w="12700" cap="flat">
-            <a:solidFill>
-              <a:srgbClr val="888888"/>
-            </a:solidFill>
-            <a:prstDash val="solid"/>
-            <a:round/>
-          </a:ln>
-        </c:spPr>
-        <c:txPr>
-          <a:bodyPr/>
-          <a:lstStyle/>
-          <a:p>
-            <a:pPr>
-              <a:defRPr sz="1050" b="0" i="0" u="none" strike="noStrike">
-                <a:solidFill>
-                  <a:srgbClr val="1F2A44"/>
-                </a:solidFill>
-                <a:latin typeface="Exo 2"/>
-              </a:defRPr>
-            </a:pPr>
-            <a:endParaRPr lang="en-US"/>
-          </a:p>
-        </c:txPr>
-        <c:crossAx val="2094734552"/>
-        <c:crosses val="autoZero"/>
-        <c:auto val="1"/>
-        <c:lblAlgn val="ctr"/>
-        <c:noMultiLvlLbl val="1"/>
-      </c:catAx>
-      <c:valAx>
-        <c:axId val="2094734552"/>
-        <c:scaling>
-          <c:orientation val="minMax"/>
-          <c:max val="42"/>
-        </c:scaling>
-        <c:delete val="1"/>
-        <c:axPos val="l"/>
-        <c:numFmt formatCode="General" sourceLinked="0"/>
-        <c:majorTickMark val="out"/>
-        <c:minorTickMark val="none"/>
-        <c:tickLblPos val="nextTo"/>
-        <c:spPr>
-          <a:ln w="12700" cap="flat">
-            <a:solidFill>
-              <a:srgbClr val="888888"/>
-            </a:solidFill>
-            <a:prstDash val="solid"/>
-            <a:round/>
-          </a:ln>
-        </c:spPr>
-        <c:txPr>
-          <a:bodyPr/>
-          <a:lstStyle/>
-          <a:p>
-            <a:pPr>
-              <a:defRPr sz="1200" b="0" i="0" u="none" strike="noStrike">
-                <a:solidFill>
-                  <a:srgbClr val="000000"/>
-                </a:solidFill>
-                <a:latin typeface="Arial"/>
-              </a:defRPr>
-            </a:pPr>
-            <a:endParaRPr lang="en-US"/>
-          </a:p>
-        </c:txPr>
-        <c:crossAx val="2094734554"/>
-        <c:crosses val="autoZero"/>
-        <c:crossBetween val="between"/>
-      </c:valAx>
-      <c:spPr>
-        <a:noFill/>
-        <a:ln>
-          <a:noFill/>
-        </a:ln>
-        <a:effectLst/>
-      </c:spPr>
-    </c:plotArea>
-    <c:legend>
-      <c:legendPos val="b"/>
-      <c:overlay val="0"/>
-      <c:txPr>
-        <a:bodyPr/>
-        <a:lstStyle/>
-        <a:p>
-          <a:pPr>
-            <a:defRPr sz="1000">
-              <a:solidFill>
-                <a:srgbClr val="1F2A44"/>
-              </a:solidFill>
-              <a:latin typeface="Exo 2"/>
-              <a:cs typeface="Exo 2"/>
-            </a:defRPr>
-          </a:pPr>
-          <a:endParaRPr lang="en-US"/>
-        </a:p>
-      </c:txPr>
-    </c:legend>
-    <c:plotVisOnly val="1"/>
-    <c:dispBlanksAs val="span"/>
-  </c:chart>
-  <c:spPr>
-    <a:noFill/>
-    <a:ln>
-      <a:noFill/>
-    </a:ln>
-    <a:effectLst/>
-  </c:spPr>
-  <c:externalData r:id="rId1">
-    <c:autoUpdate val="0"/>
-  </c:externalData>
-</c:chartSpace>
-</file>
-
-<file path=ppt/charts/chart2.xml><?xml version="1.0" encoding="utf-8"?>
-<c:chartSpace xmlns:c="http://schemas.openxmlformats.org/drawingml/2006/chart" xmlns:a="http://schemas.openxmlformats.org/drawingml/2006/main" xmlns:r="http://schemas.openxmlformats.org/officeDocument/2006/relationships">
-  <c:date1904 val="0"/>
-  <c:roundedCorners val="1"/>
-  <c:chart>
-    <c:title>
-      <c:tx>
-        <c:rich>
-          <a:bodyPr/>
-          <a:lstStyle/>
-          <a:p>
-            <a:pPr>
-              <a:defRPr sz="1100" b="0" i="0" u="none" strike="noStrike">
-                <a:solidFill>
-                  <a:srgbClr val="132257"/>
-                </a:solidFill>
-                <a:latin typeface="Exo 2"/>
-              </a:defRPr>
-            </a:pPr>
-            <a:r>
-              <a:rPr sz="1100" b="0" i="0" u="none" strike="noStrike">
-                <a:solidFill>
-                  <a:srgbClr val="132257"/>
-                </a:solidFill>
-                <a:latin typeface="Exo 2"/>
-              </a:rPr>
-              <a:t>App installs, cumulative (Android + iOS), by dashboard report date</a:t>
-            </a:r>
-          </a:p>
-        </c:rich>
-      </c:tx>
-      <c:layout/>
-      <c:overlay val="0"/>
-    </c:title>
-    <c:autoTitleDeleted val="0"/>
-    <c:plotArea>
-      <c:layout/>
-      <c:lineChart>
-        <c:varyColors val="0"/>
-        <c:ser>
-          <c:idx val="0"/>
-          <c:order val="0"/>
-          <c:tx>
-            <c:strRef>
-              <c:f>Sheet1!$B$1</c:f>
-              <c:strCache>
-                <c:ptCount val="1"/>
-                <c:pt idx="0">
-                  <c:v>App installs, cumulative</c:v>
-                </c:pt>
-              </c:strCache>
-            </c:strRef>
-          </c:tx>
-          <c:spPr>
-            <a:solidFill>
-              <a:srgbClr val="132257"/>
-            </a:solidFill>
-            <a:ln w="31750" cap="flat">
-              <a:solidFill>
-                <a:srgbClr val="132257"/>
-              </a:solidFill>
-              <a:prstDash val="solid"/>
-              <a:round/>
-            </a:ln>
-            <a:effectLst/>
-          </c:spPr>
-          <c:invertIfNegative val="0"/>
-          <c:dLbls>
-            <c:numFmt formatCode="#,##0" sourceLinked="0"/>
-            <c:txPr>
-              <a:bodyPr/>
-              <a:lstStyle/>
-              <a:p>
-                <a:pPr>
-                  <a:defRPr b="0" i="0" strike="noStrike" sz="1000" u="none">
-                    <a:solidFill>
-                      <a:srgbClr val="132257"/>
-                    </a:solidFill>
-                    <a:latin typeface="Exo 2"/>
-                  </a:defRPr>
-                </a:pPr>
-              </a:p>
-            </c:txPr>
-            <c:showLegendKey val="0"/>
-            <c:showVal val="0"/>
-            <c:showCatName val="0"/>
-            <c:showSerName val="0"/>
-            <c:showPercent val="0"/>
-            <c:showBubbleSize val="0"/>
-            <c:showLeaderLines val="0"/>
-          </c:dLbls>
-          <c:marker>
-            <c:symbol val="circle"/>
-            <c:size val="6"/>
-            <c:spPr>
-              <a:solidFill>
-                <a:srgbClr val="132257"/>
-              </a:solidFill>
-              <a:ln w="9525" cap="flat">
-                <a:solidFill>
-                  <a:srgbClr val="132257"/>
-                </a:solidFill>
-                <a:prstDash val="solid"/>
-                <a:round/>
-              </a:ln>
-              <a:effectLst/>
-            </c:spPr>
-          </c:marker>
-          <c:cat>
-            <c:multiLvlStrRef>
-              <c:f>Sheet1!$A$2:$A$17</c:f>
-              <c:multiLvlStrCache>
-                <c:ptCount val="16"/>
-                <c:lvl>
-                  <c:pt idx="0">
-                    <c:v>1 Sep</c:v>
-                  </c:pt>
-                  <c:pt idx="1">
-                    <c:v>2</c:v>
-                  </c:pt>
-                  <c:pt idx="2">
-                    <c:v>3</c:v>
-                  </c:pt>
-                  <c:pt idx="3">
-                    <c:v>8</c:v>
-                  </c:pt>
-                  <c:pt idx="4">
-                    <c:v>9</c:v>
-                  </c:pt>
-                  <c:pt idx="5">
-                    <c:v>10</c:v>
-                  </c:pt>
-                  <c:pt idx="6">
-                    <c:v>13</c:v>
-                  </c:pt>
-                  <c:pt idx="7">
-                    <c:v>14</c:v>
-                  </c:pt>
-                  <c:pt idx="8">
-                    <c:v>16</c:v>
-                  </c:pt>
-                  <c:pt idx="9">
-                    <c:v>17</c:v>
-                  </c:pt>
-                  <c:pt idx="10">
-                    <c:v>20</c:v>
-                  </c:pt>
-                  <c:pt idx="11">
-                    <c:v>21</c:v>
-                  </c:pt>
-                  <c:pt idx="12">
-                    <c:v>22 Sep: ads live</c:v>
-                  </c:pt>
-                  <c:pt idx="13">
-                    <c:v>23</c:v>
-                  </c:pt>
-                  <c:pt idx="14">
-                    <c:v>24</c:v>
-                  </c:pt>
-                  <c:pt idx="15">
-                    <c:v>27 Sep</c:v>
-                  </c:pt>
-                </c:lvl>
-              </c:multiLvlStrCache>
-            </c:multiLvlStrRef>
-          </c:cat>
-          <c:val>
-            <c:numRef>
-              <c:f>Sheet1!$B$2:$B$17</c:f>
-              <c:numCache>
-                <c:formatCode>General</c:formatCode>
-                <c:ptCount val="16"/>
-                <c:pt idx="0">
-                  <c:v>373</c:v>
-                </c:pt>
-                <c:pt idx="1">
-                  <c:v>389</c:v>
-                </c:pt>
-                <c:pt idx="2">
-                  <c:v>395</c:v>
-                </c:pt>
-                <c:pt idx="3">
-                  <c:v>403</c:v>
-                </c:pt>
-                <c:pt idx="4">
-                  <c:v>410</c:v>
-                </c:pt>
-                <c:pt idx="5">
-                  <c:v>414</c:v>
-                </c:pt>
-                <c:pt idx="6">
-                  <c:v>419</c:v>
-                </c:pt>
-                <c:pt idx="7">
-                  <c:v>423</c:v>
-                </c:pt>
-                <c:pt idx="8">
-                  <c:v>430</c:v>
-                </c:pt>
-                <c:pt idx="9">
-                  <c:v>432</c:v>
-                </c:pt>
-                <c:pt idx="10">
-                  <c:v>437</c:v>
-                </c:pt>
-                <c:pt idx="11">
-                  <c:v>437</c:v>
-                </c:pt>
-                <c:pt idx="12">
-                  <c:v>452</c:v>
-                </c:pt>
-                <c:pt idx="13">
-                  <c:v>454</c:v>
-                </c:pt>
-                <c:pt idx="14">
-                  <c:v>455</c:v>
-                </c:pt>
-                <c:pt idx="15">
-                  <c:v>473</c:v>
-                </c:pt>
-              </c:numCache>
-            </c:numRef>
-          </c:val>
-          <c:smooth val="0"/>
-        </c:ser>
-        <c:dLbls>
-          <c:numFmt formatCode="#,##0" sourceLinked="0"/>
-          <c:txPr>
-            <a:bodyPr/>
-            <a:lstStyle/>
-            <a:p>
-              <a:pPr>
-                <a:defRPr b="0" i="0" strike="noStrike" sz="1000" u="none">
-                  <a:solidFill>
-                    <a:srgbClr val="132257"/>
-                  </a:solidFill>
-                  <a:latin typeface="Exo 2"/>
-                </a:defRPr>
-              </a:pPr>
-            </a:p>
-          </c:txPr>
-          <c:showLegendKey val="0"/>
-          <c:showVal val="0"/>
-          <c:showCatName val="0"/>
-          <c:showSerName val="0"/>
-          <c:showPercent val="0"/>
-          <c:showBubbleSize val="0"/>
-          <c:showLeaderLines val="0"/>
-        </c:dLbls>
-        <c:marker val="1"/>
-        <c:axId val="2094734554"/>
-        <c:axId val="2094734552"/>
-        <c:axId val="2094734556"/>
-      </c:lineChart>
-      <c:catAx>
-        <c:axId val="2094734554"/>
-        <c:scaling>
-          <c:orientation val="minMax"/>
-        </c:scaling>
-        <c:delete val="0"/>
-        <c:axPos val="b"/>
-        <c:numFmt formatCode="General" sourceLinked="1"/>
-        <c:majorTickMark val="out"/>
-        <c:minorTickMark val="none"/>
-        <c:tickLblPos val="low"/>
-        <c:spPr>
-          <a:ln w="12700" cap="flat">
-            <a:solidFill>
-              <a:srgbClr val="888888"/>
-            </a:solidFill>
-            <a:prstDash val="solid"/>
-            <a:round/>
-          </a:ln>
-        </c:spPr>
-        <c:txPr>
-          <a:bodyPr/>
-          <a:lstStyle/>
-          <a:p>
-            <a:pPr>
-              <a:defRPr sz="850" b="0" i="0" u="none" strike="noStrike">
-                <a:solidFill>
-                  <a:srgbClr val="7A849C"/>
-                </a:solidFill>
-                <a:latin typeface="Exo 2"/>
-              </a:defRPr>
-            </a:pPr>
-            <a:endParaRPr lang="en-US"/>
-          </a:p>
-        </c:txPr>
-        <c:crossAx val="2094734552"/>
-        <c:crosses val="autoZero"/>
-        <c:auto val="1"/>
-        <c:lblAlgn val="ctr"/>
-        <c:noMultiLvlLbl val="1"/>
-      </c:catAx>
-      <c:valAx>
-        <c:axId val="2094734552"/>
-        <c:scaling>
-          <c:orientation val="minMax"/>
-          <c:max val="480"/>
-          <c:min val="360"/>
-        </c:scaling>
-        <c:delete val="0"/>
-        <c:axPos val="l"/>
-        <c:majorGridlines>
-          <c:spPr>
-            <a:ln w="6350" cap="flat">
-              <a:solidFill>
-                <a:srgbClr val="E6EAF2"/>
-              </a:solidFill>
-              <a:prstDash val="solid"/>
-              <a:round/>
-            </a:ln>
-          </c:spPr>
-        </c:majorGridlines>
-        <c:numFmt formatCode="General" sourceLinked="0"/>
-        <c:majorTickMark val="out"/>
-        <c:minorTickMark val="none"/>
-        <c:tickLblPos val="nextTo"/>
-        <c:spPr>
-          <a:ln w="12700" cap="flat">
-            <a:solidFill>
-              <a:srgbClr val="888888"/>
-            </a:solidFill>
-            <a:prstDash val="solid"/>
-            <a:round/>
-          </a:ln>
-        </c:spPr>
-        <c:txPr>
-          <a:bodyPr/>
-          <a:lstStyle/>
-          <a:p>
-            <a:pPr>
-              <a:defRPr sz="900" b="0" i="0" u="none" strike="noStrike">
-                <a:solidFill>
-                  <a:srgbClr val="7A849C"/>
-                </a:solidFill>
-                <a:latin typeface="Exo 2"/>
-              </a:defRPr>
-            </a:pPr>
-            <a:endParaRPr lang="en-US"/>
-          </a:p>
-        </c:txPr>
-        <c:crossAx val="2094734554"/>
-        <c:crosses val="autoZero"/>
-        <c:crossBetween val="between"/>
-        <c:majorUnit val="30"/>
-      </c:valAx>
-      <c:spPr>
-        <a:noFill/>
-        <a:ln>
-          <a:noFill/>
-        </a:ln>
-        <a:effectLst/>
-      </c:spPr>
-    </c:plotArea>
-    <c:plotVisOnly val="1"/>
-    <c:dispBlanksAs val="span"/>
-  </c:chart>
-  <c:spPr>
-    <a:noFill/>
-    <a:ln>
-      <a:noFill/>
-    </a:ln>
-    <a:effectLst/>
-  </c:spPr>
-  <c:externalData r:id="rId1">
-    <c:autoUpdate val="0"/>
-  </c:externalData>
-</c:chartSpace>
-</file>
-
-<file path=ppt/charts/chart3.xml><?xml version="1.0" encoding="utf-8"?>
-<c:chartSpace xmlns:c="http://schemas.openxmlformats.org/drawingml/2006/chart" xmlns:a="http://schemas.openxmlformats.org/drawingml/2006/main" xmlns:r="http://schemas.openxmlformats.org/officeDocument/2006/relationships">
-  <c:date1904 val="0"/>
-  <c:roundedCorners val="1"/>
-  <c:chart>
-    <c:title>
-      <c:tx>
-        <c:rich>
-          <a:bodyPr/>
-          <a:lstStyle/>
-          <a:p>
-            <a:pPr>
-              <a:defRPr sz="1100" b="0" i="0" u="none" strike="noStrike">
-                <a:solidFill>
-                  <a:srgbClr val="132257"/>
-                </a:solidFill>
-                <a:latin typeface="Exo 2"/>
-              </a:defRPr>
-            </a:pPr>
-            <a:r>
-              <a:rPr sz="1100" b="0" i="0" u="none" strike="noStrike">
-                <a:solidFill>
-                  <a:srgbClr val="132257"/>
-                </a:solidFill>
-                <a:latin typeface="Exo 2"/>
-              </a:rPr>
-              <a:t>English relative to Arabic, % difference, 1-28 Sep</a:t>
-            </a:r>
-          </a:p>
-        </c:rich>
-      </c:tx>
-      <c:layout/>
-      <c:overlay val="0"/>
-    </c:title>
-    <c:autoTitleDeleted val="0"/>
-    <c:plotArea>
-      <c:layout/>
-      <c:barChart>
-        <c:barDir val="bar"/>
-        <c:grouping val="stacked"/>
-        <c:varyColors val="0"/>
-        <c:ser>
-          <c:idx val="0"/>
-          <c:order val="0"/>
-          <c:tx>
-            <c:strRef>
-              <c:f>Sheet1!$B$1</c:f>
-              <c:strCache>
-                <c:ptCount val="1"/>
-                <c:pt idx="0">
-                  <c:v>English ahead</c:v>
-                </c:pt>
-              </c:strCache>
-            </c:strRef>
-          </c:tx>
-          <c:spPr>
-            <a:solidFill>
-              <a:srgbClr val="132257"/>
-            </a:solidFill>
-            <a:effectLst/>
-          </c:spPr>
-          <c:invertIfNegative val="0"/>
-          <c:dLbls>
-            <c:numFmt formatCode="+0.0&quot;%&quot;;-0.0&quot;%&quot;;;" sourceLinked="0"/>
-            <c:txPr>
-              <a:bodyPr/>
-              <a:lstStyle/>
-              <a:p>
-                <a:pPr>
-                  <a:defRPr b="1" i="0" strike="noStrike" sz="1000" u="none">
-                    <a:solidFill>
-                      <a:srgbClr val="FFFFFF"/>
-                    </a:solidFill>
-                    <a:latin typeface="Exo 2"/>
-                  </a:defRPr>
-                </a:pPr>
-              </a:p>
-            </c:txPr>
-            <c:dLblPos val="inEnd"/>
-            <c:showLegendKey val="0"/>
-            <c:showVal val="1"/>
-            <c:showCatName val="0"/>
-            <c:showSerName val="0"/>
-            <c:showPercent val="0"/>
-            <c:showBubbleSize val="0"/>
-            <c:showLeaderLines val="0"/>
-          </c:dLbls>
-          <c:cat>
-            <c:multiLvlStrRef>
-              <c:f>Sheet1!$A$2:$A$10</c:f>
-              <c:multiLvlStrCache>
-                <c:ptCount val="9"/>
-                <c:lvl>
-                  <c:pt idx="0">
-                    <c:v>Sessions</c:v>
-                  </c:pt>
-                  <c:pt idx="1">
-                    <c:v>Active users</c:v>
-                  </c:pt>
-                  <c:pt idx="2">
-                    <c:v>Engaged sessions</c:v>
-                  </c:pt>
-                  <c:pt idx="3">
-                    <c:v>Engagement rate</c:v>
-                  </c:pt>
-                  <c:pt idx="4">
-                    <c:v>Time per session</c:v>
-                  </c:pt>
-                  <c:pt idx="5">
-                    <c:v>Events per session</c:v>
-                  </c:pt>
-                  <c:pt idx="6">
-                    <c:v>Total events</c:v>
-                  </c:pt>
-                  <c:pt idx="7">
-                    <c:v>Key events</c:v>
-                  </c:pt>
-                  <c:pt idx="8">
-                    <c:v>Key events per session</c:v>
-                  </c:pt>
-                </c:lvl>
-              </c:multiLvlStrCache>
-            </c:multiLvlStrRef>
-          </c:cat>
-          <c:val>
-            <c:numRef>
-              <c:f>Sheet1!$B$2:$B$10</c:f>
-              <c:numCache>
-                <c:formatCode>General</c:formatCode>
-                <c:ptCount val="9"/>
-                <c:pt idx="0">
-                  <c:v>20.5</c:v>
-                </c:pt>
-                <c:pt idx="1">
-                  <c:v>18.9</c:v>
-                </c:pt>
-                <c:pt idx="2">
-                  <c:v>34.6</c:v>
-                </c:pt>
-                <c:pt idx="3">
-                  <c:v>11.8</c:v>
-                </c:pt>
-                <c:pt idx="4">
-                  <c:v>24.2</c:v>
-                </c:pt>
-                <c:pt idx="5">
-                  <c:v>19.2</c:v>
-                </c:pt>
-                <c:pt idx="6">
-                  <c:v>43.6</c:v>
-                </c:pt>
-                <c:pt idx="7">
-                  <c:v>8.1</c:v>
-                </c:pt>
-                <c:pt idx="8">
-                  <c:v>0</c:v>
-                </c:pt>
-              </c:numCache>
-            </c:numRef>
-          </c:val>
-        </c:ser>
-        <c:ser>
-          <c:idx val="1"/>
-          <c:order val="1"/>
-          <c:tx>
-            <c:strRef>
-              <c:f>Sheet1!$C$1</c:f>
-              <c:strCache>
-                <c:ptCount val="1"/>
-                <c:pt idx="0">
-                  <c:v>Arabic ahead</c:v>
-                </c:pt>
-              </c:strCache>
-            </c:strRef>
-          </c:tx>
-          <c:spPr>
-            <a:solidFill>
-              <a:srgbClr val="D4AF37"/>
-            </a:solidFill>
-            <a:effectLst/>
-          </c:spPr>
-          <c:invertIfNegative val="0"/>
-          <c:dLbls>
-            <c:numFmt formatCode="+0.0&quot;%&quot;;-0.0&quot;%&quot;;;" sourceLinked="0"/>
-            <c:txPr>
-              <a:bodyPr/>
-              <a:lstStyle/>
-              <a:p>
-                <a:pPr>
-                  <a:defRPr b="1" i="0" strike="noStrike" sz="1000" u="none">
-                    <a:solidFill>
-                      <a:srgbClr val="FFFFFF"/>
-                    </a:solidFill>
-                    <a:latin typeface="Exo 2"/>
-                  </a:defRPr>
-                </a:pPr>
-              </a:p>
-            </c:txPr>
-            <c:dLblPos val="inEnd"/>
-            <c:showLegendKey val="0"/>
-            <c:showVal val="1"/>
-            <c:showCatName val="0"/>
-            <c:showSerName val="0"/>
-            <c:showPercent val="0"/>
-            <c:showBubbleSize val="0"/>
-            <c:showLeaderLines val="0"/>
-          </c:dLbls>
-          <c:cat>
-            <c:multiLvlStrRef>
-              <c:f>Sheet1!$A$2:$A$10</c:f>
-              <c:multiLvlStrCache>
-                <c:ptCount val="9"/>
-                <c:lvl>
-                  <c:pt idx="0">
-                    <c:v>Sessions</c:v>
-                  </c:pt>
-                  <c:pt idx="1">
-                    <c:v>Active users</c:v>
-                  </c:pt>
-                  <c:pt idx="2">
-                    <c:v>Engaged sessions</c:v>
-                  </c:pt>
-                  <c:pt idx="3">
-                    <c:v>Engagement rate</c:v>
-                  </c:pt>
-                  <c:pt idx="4">
-                    <c:v>Time per session</c:v>
-                  </c:pt>
-                  <c:pt idx="5">
-                    <c:v>Events per session</c:v>
-                  </c:pt>
-                  <c:pt idx="6">
-                    <c:v>Total events</c:v>
-                  </c:pt>
-                  <c:pt idx="7">
-                    <c:v>Key events</c:v>
-                  </c:pt>
-                  <c:pt idx="8">
-                    <c:v>Key events per session</c:v>
-                  </c:pt>
-                </c:lvl>
-              </c:multiLvlStrCache>
-            </c:multiLvlStrRef>
-          </c:cat>
-          <c:val>
-            <c:numRef>
-              <c:f>Sheet1!$C$2:$C$10</c:f>
-              <c:numCache>
-                <c:formatCode>General</c:formatCode>
-                <c:ptCount val="9"/>
-                <c:pt idx="0">
-                  <c:v>0</c:v>
-                </c:pt>
-                <c:pt idx="1">
-                  <c:v>0</c:v>
-                </c:pt>
-                <c:pt idx="2">
-                  <c:v>0</c:v>
-                </c:pt>
-                <c:pt idx="3">
-                  <c:v>0</c:v>
-                </c:pt>
-                <c:pt idx="4">
-                  <c:v>0</c:v>
-                </c:pt>
-                <c:pt idx="5">
-                  <c:v>0</c:v>
-                </c:pt>
-                <c:pt idx="6">
-                  <c:v>0</c:v>
-                </c:pt>
-                <c:pt idx="7">
-                  <c:v>0</c:v>
-                </c:pt>
-                <c:pt idx="8">
-                  <c:v>-10.2</c:v>
-                </c:pt>
-              </c:numCache>
-            </c:numRef>
-          </c:val>
-        </c:ser>
-        <c:dLbls>
-          <c:numFmt formatCode="+0.0&quot;%&quot;;-0.0&quot;%&quot;;;" sourceLinked="0"/>
-          <c:txPr>
-            <a:bodyPr/>
-            <a:lstStyle/>
-            <a:p>
-              <a:pPr>
-                <a:defRPr b="1" i="0" strike="noStrike" sz="1000" u="none">
-                  <a:solidFill>
-                    <a:srgbClr val="FFFFFF"/>
-                  </a:solidFill>
-                  <a:latin typeface="Exo 2"/>
-                </a:defRPr>
-              </a:pPr>
-            </a:p>
-          </c:txPr>
-          <c:dLblPos val="inEnd"/>
-          <c:showLegendKey val="0"/>
-          <c:showVal val="1"/>
-          <c:showCatName val="0"/>
-          <c:showSerName val="0"/>
-          <c:showPercent val="0"/>
-          <c:showBubbleSize val="0"/>
-          <c:showLeaderLines val="0"/>
-        </c:dLbls>
-        <c:gapWidth val="40"/>
-        <c:overlap val="100"/>
-        <c:axId val="2094734554"/>
-        <c:axId val="2094734552"/>
-        <c:axId val="2094734556"/>
-      </c:barChart>
-      <c:catAx>
-        <c:axId val="2094734554"/>
-        <c:scaling>
-          <c:orientation val="maxMin"/>
-        </c:scaling>
-        <c:delete val="0"/>
-        <c:axPos val="l"/>
-        <c:numFmt formatCode="General" sourceLinked="1"/>
-        <c:majorTickMark val="out"/>
-        <c:minorTickMark val="none"/>
-        <c:tickLblPos val="low"/>
-        <c:spPr>
-          <a:ln w="12700" cap="flat">
-            <a:solidFill>
-              <a:srgbClr val="888888"/>
-            </a:solidFill>
-            <a:prstDash val="solid"/>
-            <a:round/>
-          </a:ln>
-        </c:spPr>
-        <c:txPr>
-          <a:bodyPr/>
-          <a:lstStyle/>
-          <a:p>
-            <a:pPr>
-              <a:defRPr sz="1000" b="0" i="0" u="none" strike="noStrike">
-                <a:solidFill>
-                  <a:srgbClr val="1F2A44"/>
-                </a:solidFill>
-                <a:latin typeface="Exo 2"/>
-              </a:defRPr>
-            </a:pPr>
-            <a:endParaRPr lang="en-US"/>
-          </a:p>
-        </c:txPr>
-        <c:crossAx val="2094734552"/>
-        <c:crosses val="autoZero"/>
-        <c:auto val="1"/>
-        <c:lblAlgn val="ctr"/>
-        <c:noMultiLvlLbl val="1"/>
-      </c:catAx>
-      <c:valAx>
-        <c:axId val="2094734552"/>
-        <c:scaling>
-          <c:orientation val="minMax"/>
-          <c:max val="50"/>
-          <c:min val="-20"/>
-        </c:scaling>
-        <c:delete val="1"/>
-        <c:axPos val="b"/>
-        <c:numFmt formatCode="General" sourceLinked="0"/>
-        <c:majorTickMark val="out"/>
-        <c:minorTickMark val="none"/>
-        <c:tickLblPos val="low"/>
-        <c:spPr>
-          <a:ln w="12700" cap="flat">
-            <a:solidFill>
-              <a:srgbClr val="888888"/>
-            </a:solidFill>
-            <a:prstDash val="solid"/>
-            <a:round/>
-          </a:ln>
-        </c:spPr>
-        <c:txPr>
-          <a:bodyPr/>
-          <a:lstStyle/>
-          <a:p>
-            <a:pPr>
-              <a:defRPr sz="1200" b="0" i="0" u="none" strike="noStrike">
-                <a:solidFill>
-                  <a:srgbClr val="000000"/>
-                </a:solidFill>
-                <a:latin typeface="Arial"/>
-              </a:defRPr>
-            </a:pPr>
-            <a:endParaRPr lang="en-US"/>
-          </a:p>
-        </c:txPr>
-        <c:crossAx val="2094734554"/>
-        <c:crosses val="autoZero"/>
-        <c:crossBetween val="between"/>
-      </c:valAx>
-      <c:spPr>
-        <a:noFill/>
-        <a:ln>
-          <a:noFill/>
-        </a:ln>
-        <a:effectLst/>
-      </c:spPr>
-    </c:plotArea>
-    <c:legend>
-      <c:legendPos val="b"/>
-      <c:overlay val="0"/>
-      <c:txPr>
-        <a:bodyPr/>
-        <a:lstStyle/>
-        <a:p>
-          <a:pPr>
-            <a:defRPr sz="1000">
-              <a:solidFill>
-                <a:srgbClr val="1F2A44"/>
-              </a:solidFill>
-              <a:latin typeface="Exo 2"/>
-              <a:cs typeface="Exo 2"/>
-            </a:defRPr>
-          </a:pPr>
-          <a:endParaRPr lang="en-US"/>
-        </a:p>
-      </c:txPr>
-    </c:legend>
-    <c:plotVisOnly val="1"/>
-    <c:dispBlanksAs val="span"/>
-  </c:chart>
-  <c:spPr>
-    <a:noFill/>
-    <a:ln>
-      <a:noFill/>
-    </a:ln>
-    <a:effectLst/>
-  </c:spPr>
-  <c:externalData r:id="rId1">
-    <c:autoUpdate val="0"/>
-  </c:externalData>
-</c:chartSpace>
 </file>
 
 <file path=ppt/notesMasters/notesMaster1.xml><?xml version="1.0" encoding="utf-8"?>
@@ -6032,22 +4848,864 @@
           </a:p>
         </p:txBody>
       </p:sp>
-      <p:graphicFrame>
-        <p:nvGraphicFramePr>
-          <p:cNvPr id="30" name="Chart 0" descr=""/>
-          <p:cNvGraphicFramePr/>
-          <p:nvPr/>
-        </p:nvGraphicFramePr>
-        <p:xfrm>
-          <a:off x="4434840" y="1508760"/>
-          <a:ext cx="7196328" cy="4069080"/>
-        </p:xfrm>
-        <a:graphic xmlns:a="http://schemas.openxmlformats.org/drawingml/2006/main">
-          <a:graphicData uri="http://schemas.openxmlformats.org/drawingml/2006/chart">
-            <c:chart xmlns:c="http://schemas.openxmlformats.org/drawingml/2006/chart" r:id="rId4"/>
-          </a:graphicData>
-        </a:graphic>
-      </p:graphicFrame>
+      <p:sp>
+        <p:nvSpPr>
+          <p:cNvPr id="30" name="Text 24"/>
+          <p:cNvSpPr txBox="1"/>
+          <p:nvPr/>
+        </p:nvSpPr>
+        <p:spPr>
+          <a:xfrm>
+            <a:off x="4434840" y="1508760"/>
+            <a:ext cx="7196328" cy="274320"/>
+          </a:xfrm>
+          <a:prstGeom prst="rect">
+            <a:avLst/>
+          </a:prstGeom>
+          <a:noFill/>
+          <a:ln/>
+        </p:spPr>
+        <p:txBody>
+          <a:bodyPr wrap="square" lIns="0" tIns="0" rIns="0" bIns="0" rtlCol="0" anchor="t"/>
+          <a:lstStyle/>
+          <a:p>
+            <a:pPr algn="ctr" indent="0" marL="0">
+              <a:buNone/>
+            </a:pPr>
+            <a:r>
+              <a:rPr lang="en-US" sz="1100" dirty="0">
+                <a:solidFill>
+                  <a:srgbClr val="132257"/>
+                </a:solidFill>
+                <a:latin typeface="Exo 2" pitchFamily="34" charset="0"/>
+                <a:ea typeface="Exo 2" pitchFamily="34" charset="-122"/>
+                <a:cs typeface="Exo 2" pitchFamily="34" charset="-120"/>
+              </a:rPr>
+              <a:t>Net new app downloads and onboarded users between dashboard dates</a:t>
+            </a:r>
+            <a:endParaRPr lang="en-US" sz="1100" dirty="0"/>
+          </a:p>
+        </p:txBody>
+      </p:sp>
+      <p:sp>
+        <p:nvSpPr>
+          <p:cNvPr id="31" name="Shape 25"/>
+          <p:cNvSpPr/>
+          <p:nvPr/>
+        </p:nvSpPr>
+        <p:spPr>
+          <a:xfrm>
+            <a:off x="4434840" y="4892040"/>
+            <a:ext cx="7196328" cy="0"/>
+          </a:xfrm>
+          <a:prstGeom prst="line">
+            <a:avLst/>
+          </a:prstGeom>
+          <a:noFill/>
+          <a:ln w="12700">
+            <a:solidFill>
+              <a:srgbClr val="C6CFE4"/>
+            </a:solidFill>
+            <a:prstDash val="solid"/>
+          </a:ln>
+        </p:spPr>
+      </p:sp>
+      <p:sp>
+        <p:nvSpPr>
+          <p:cNvPr id="32" name="Shape 26"/>
+          <p:cNvSpPr/>
+          <p:nvPr/>
+        </p:nvSpPr>
+        <p:spPr>
+          <a:xfrm>
+            <a:off x="4794954" y="2731770"/>
+            <a:ext cx="521139" cy="2160270"/>
+          </a:xfrm>
+          <a:prstGeom prst="rect">
+            <a:avLst/>
+          </a:prstGeom>
+          <a:solidFill>
+            <a:srgbClr val="132257"/>
+          </a:solidFill>
+          <a:ln w="12700">
+            <a:solidFill>
+              <a:srgbClr val="132257"/>
+            </a:solidFill>
+            <a:prstDash val="solid"/>
+          </a:ln>
+        </p:spPr>
+      </p:sp>
+      <p:sp>
+        <p:nvSpPr>
+          <p:cNvPr id="33" name="Text 27"/>
+          <p:cNvSpPr txBox="1"/>
+          <p:nvPr/>
+        </p:nvSpPr>
+        <p:spPr>
+          <a:xfrm>
+            <a:off x="4685226" y="2457450"/>
+            <a:ext cx="740595" cy="256032"/>
+          </a:xfrm>
+          <a:prstGeom prst="rect">
+            <a:avLst/>
+          </a:prstGeom>
+          <a:noFill/>
+          <a:ln/>
+        </p:spPr>
+        <p:txBody>
+          <a:bodyPr wrap="square" lIns="0" tIns="0" rIns="0" bIns="0" rtlCol="0" anchor="b"/>
+          <a:lstStyle/>
+          <a:p>
+            <a:pPr algn="ctr" indent="0" marL="0">
+              <a:buNone/>
+            </a:pPr>
+            <a:r>
+              <a:rPr lang="en-US" sz="1100" b="1" dirty="0">
+                <a:solidFill>
+                  <a:srgbClr val="132257"/>
+                </a:solidFill>
+                <a:latin typeface="Exo 2" pitchFamily="34" charset="0"/>
+                <a:ea typeface="Exo 2" pitchFamily="34" charset="-122"/>
+                <a:cs typeface="Exo 2" pitchFamily="34" charset="-120"/>
+              </a:rPr>
+              <a:t>30</a:t>
+            </a:r>
+            <a:endParaRPr lang="en-US" sz="1100" dirty="0"/>
+          </a:p>
+        </p:txBody>
+      </p:sp>
+      <p:sp>
+        <p:nvSpPr>
+          <p:cNvPr id="34" name="Shape 28"/>
+          <p:cNvSpPr/>
+          <p:nvPr/>
+        </p:nvSpPr>
+        <p:spPr>
+          <a:xfrm>
+            <a:off x="5352669" y="4820031"/>
+            <a:ext cx="521139" cy="72009"/>
+          </a:xfrm>
+          <a:prstGeom prst="rect">
+            <a:avLst/>
+          </a:prstGeom>
+          <a:solidFill>
+            <a:srgbClr val="1BA97C"/>
+          </a:solidFill>
+          <a:ln w="12700">
+            <a:solidFill>
+              <a:srgbClr val="1BA97C"/>
+            </a:solidFill>
+            <a:prstDash val="solid"/>
+          </a:ln>
+        </p:spPr>
+      </p:sp>
+      <p:sp>
+        <p:nvSpPr>
+          <p:cNvPr id="35" name="Text 29"/>
+          <p:cNvSpPr txBox="1"/>
+          <p:nvPr/>
+        </p:nvSpPr>
+        <p:spPr>
+          <a:xfrm>
+            <a:off x="5242941" y="4545711"/>
+            <a:ext cx="740595" cy="256032"/>
+          </a:xfrm>
+          <a:prstGeom prst="rect">
+            <a:avLst/>
+          </a:prstGeom>
+          <a:noFill/>
+          <a:ln/>
+        </p:spPr>
+        <p:txBody>
+          <a:bodyPr wrap="square" lIns="0" tIns="0" rIns="0" bIns="0" rtlCol="0" anchor="b"/>
+          <a:lstStyle/>
+          <a:p>
+            <a:pPr algn="ctr" indent="0" marL="0">
+              <a:buNone/>
+            </a:pPr>
+            <a:r>
+              <a:rPr lang="en-US" sz="1100" b="1" dirty="0">
+                <a:solidFill>
+                  <a:srgbClr val="132257"/>
+                </a:solidFill>
+                <a:latin typeface="Exo 2" pitchFamily="34" charset="0"/>
+                <a:ea typeface="Exo 2" pitchFamily="34" charset="-122"/>
+                <a:cs typeface="Exo 2" pitchFamily="34" charset="-120"/>
+              </a:rPr>
+              <a:t>1</a:t>
+            </a:r>
+            <a:endParaRPr lang="en-US" sz="1100" dirty="0"/>
+          </a:p>
+        </p:txBody>
+      </p:sp>
+      <p:sp>
+        <p:nvSpPr>
+          <p:cNvPr id="36" name="Text 30"/>
+          <p:cNvSpPr txBox="1"/>
+          <p:nvPr/>
+        </p:nvSpPr>
+        <p:spPr>
+          <a:xfrm>
+            <a:off x="4434840" y="4965192"/>
+            <a:ext cx="1799082" cy="274320"/>
+          </a:xfrm>
+          <a:prstGeom prst="rect">
+            <a:avLst/>
+          </a:prstGeom>
+          <a:noFill/>
+          <a:ln/>
+        </p:spPr>
+        <p:txBody>
+          <a:bodyPr wrap="square" lIns="0" tIns="0" rIns="0" bIns="0" rtlCol="0" anchor="t"/>
+          <a:lstStyle/>
+          <a:p>
+            <a:pPr algn="ctr" indent="0" marL="0">
+              <a:buNone/>
+            </a:pPr>
+            <a:r>
+              <a:rPr lang="en-US" sz="1050" dirty="0">
+                <a:solidFill>
+                  <a:srgbClr val="1F2A44"/>
+                </a:solidFill>
+                <a:latin typeface="Exo 2" pitchFamily="34" charset="0"/>
+                <a:ea typeface="Exo 2" pitchFamily="34" charset="-122"/>
+                <a:cs typeface="Exo 2" pitchFamily="34" charset="-120"/>
+              </a:rPr>
+              <a:t>1-8 Sep</a:t>
+            </a:r>
+            <a:endParaRPr lang="en-US" sz="1050" dirty="0"/>
+          </a:p>
+        </p:txBody>
+      </p:sp>
+      <p:sp>
+        <p:nvSpPr>
+          <p:cNvPr id="37" name="Shape 31"/>
+          <p:cNvSpPr/>
+          <p:nvPr/>
+        </p:nvSpPr>
+        <p:spPr>
+          <a:xfrm>
+            <a:off x="6594036" y="3451860"/>
+            <a:ext cx="521139" cy="1440180"/>
+          </a:xfrm>
+          <a:prstGeom prst="rect">
+            <a:avLst/>
+          </a:prstGeom>
+          <a:solidFill>
+            <a:srgbClr val="132257"/>
+          </a:solidFill>
+          <a:ln w="12700">
+            <a:solidFill>
+              <a:srgbClr val="132257"/>
+            </a:solidFill>
+            <a:prstDash val="solid"/>
+          </a:ln>
+        </p:spPr>
+      </p:sp>
+      <p:sp>
+        <p:nvSpPr>
+          <p:cNvPr id="38" name="Text 32"/>
+          <p:cNvSpPr txBox="1"/>
+          <p:nvPr/>
+        </p:nvSpPr>
+        <p:spPr>
+          <a:xfrm>
+            <a:off x="6484308" y="3177540"/>
+            <a:ext cx="740595" cy="256032"/>
+          </a:xfrm>
+          <a:prstGeom prst="rect">
+            <a:avLst/>
+          </a:prstGeom>
+          <a:noFill/>
+          <a:ln/>
+        </p:spPr>
+        <p:txBody>
+          <a:bodyPr wrap="square" lIns="0" tIns="0" rIns="0" bIns="0" rtlCol="0" anchor="b"/>
+          <a:lstStyle/>
+          <a:p>
+            <a:pPr algn="ctr" indent="0" marL="0">
+              <a:buNone/>
+            </a:pPr>
+            <a:r>
+              <a:rPr lang="en-US" sz="1100" b="1" dirty="0">
+                <a:solidFill>
+                  <a:srgbClr val="132257"/>
+                </a:solidFill>
+                <a:latin typeface="Exo 2" pitchFamily="34" charset="0"/>
+                <a:ea typeface="Exo 2" pitchFamily="34" charset="-122"/>
+                <a:cs typeface="Exo 2" pitchFamily="34" charset="-120"/>
+              </a:rPr>
+              <a:t>20</a:t>
+            </a:r>
+            <a:endParaRPr lang="en-US" sz="1100" dirty="0"/>
+          </a:p>
+        </p:txBody>
+      </p:sp>
+      <p:sp>
+        <p:nvSpPr>
+          <p:cNvPr id="39" name="Shape 33"/>
+          <p:cNvSpPr/>
+          <p:nvPr/>
+        </p:nvSpPr>
+        <p:spPr>
+          <a:xfrm>
+            <a:off x="7151751" y="4676013"/>
+            <a:ext cx="521139" cy="216027"/>
+          </a:xfrm>
+          <a:prstGeom prst="rect">
+            <a:avLst/>
+          </a:prstGeom>
+          <a:solidFill>
+            <a:srgbClr val="1BA97C"/>
+          </a:solidFill>
+          <a:ln w="12700">
+            <a:solidFill>
+              <a:srgbClr val="1BA97C"/>
+            </a:solidFill>
+            <a:prstDash val="solid"/>
+          </a:ln>
+        </p:spPr>
+      </p:sp>
+      <p:sp>
+        <p:nvSpPr>
+          <p:cNvPr id="40" name="Text 34"/>
+          <p:cNvSpPr txBox="1"/>
+          <p:nvPr/>
+        </p:nvSpPr>
+        <p:spPr>
+          <a:xfrm>
+            <a:off x="7042023" y="4401693"/>
+            <a:ext cx="740595" cy="256032"/>
+          </a:xfrm>
+          <a:prstGeom prst="rect">
+            <a:avLst/>
+          </a:prstGeom>
+          <a:noFill/>
+          <a:ln/>
+        </p:spPr>
+        <p:txBody>
+          <a:bodyPr wrap="square" lIns="0" tIns="0" rIns="0" bIns="0" rtlCol="0" anchor="b"/>
+          <a:lstStyle/>
+          <a:p>
+            <a:pPr algn="ctr" indent="0" marL="0">
+              <a:buNone/>
+            </a:pPr>
+            <a:r>
+              <a:rPr lang="en-US" sz="1100" b="1" dirty="0">
+                <a:solidFill>
+                  <a:srgbClr val="132257"/>
+                </a:solidFill>
+                <a:latin typeface="Exo 2" pitchFamily="34" charset="0"/>
+                <a:ea typeface="Exo 2" pitchFamily="34" charset="-122"/>
+                <a:cs typeface="Exo 2" pitchFamily="34" charset="-120"/>
+              </a:rPr>
+              <a:t>3</a:t>
+            </a:r>
+            <a:endParaRPr lang="en-US" sz="1100" dirty="0"/>
+          </a:p>
+        </p:txBody>
+      </p:sp>
+      <p:sp>
+        <p:nvSpPr>
+          <p:cNvPr id="41" name="Text 35"/>
+          <p:cNvSpPr txBox="1"/>
+          <p:nvPr/>
+        </p:nvSpPr>
+        <p:spPr>
+          <a:xfrm>
+            <a:off x="6233922" y="4965192"/>
+            <a:ext cx="1799082" cy="274320"/>
+          </a:xfrm>
+          <a:prstGeom prst="rect">
+            <a:avLst/>
+          </a:prstGeom>
+          <a:noFill/>
+          <a:ln/>
+        </p:spPr>
+        <p:txBody>
+          <a:bodyPr wrap="square" lIns="0" tIns="0" rIns="0" bIns="0" rtlCol="0" anchor="t"/>
+          <a:lstStyle/>
+          <a:p>
+            <a:pPr algn="ctr" indent="0" marL="0">
+              <a:buNone/>
+            </a:pPr>
+            <a:r>
+              <a:rPr lang="en-US" sz="1050" dirty="0">
+                <a:solidFill>
+                  <a:srgbClr val="1F2A44"/>
+                </a:solidFill>
+                <a:latin typeface="Exo 2" pitchFamily="34" charset="0"/>
+                <a:ea typeface="Exo 2" pitchFamily="34" charset="-122"/>
+                <a:cs typeface="Exo 2" pitchFamily="34" charset="-120"/>
+              </a:rPr>
+              <a:t>8-14 Sep</a:t>
+            </a:r>
+            <a:endParaRPr lang="en-US" sz="1050" dirty="0"/>
+          </a:p>
+        </p:txBody>
+      </p:sp>
+      <p:sp>
+        <p:nvSpPr>
+          <p:cNvPr id="42" name="Shape 36"/>
+          <p:cNvSpPr/>
+          <p:nvPr/>
+        </p:nvSpPr>
+        <p:spPr>
+          <a:xfrm>
+            <a:off x="8393118" y="3883914"/>
+            <a:ext cx="521139" cy="1008126"/>
+          </a:xfrm>
+          <a:prstGeom prst="rect">
+            <a:avLst/>
+          </a:prstGeom>
+          <a:solidFill>
+            <a:srgbClr val="132257"/>
+          </a:solidFill>
+          <a:ln w="12700">
+            <a:solidFill>
+              <a:srgbClr val="132257"/>
+            </a:solidFill>
+            <a:prstDash val="solid"/>
+          </a:ln>
+        </p:spPr>
+      </p:sp>
+      <p:sp>
+        <p:nvSpPr>
+          <p:cNvPr id="43" name="Text 37"/>
+          <p:cNvSpPr txBox="1"/>
+          <p:nvPr/>
+        </p:nvSpPr>
+        <p:spPr>
+          <a:xfrm>
+            <a:off x="8283390" y="3609594"/>
+            <a:ext cx="740595" cy="256032"/>
+          </a:xfrm>
+          <a:prstGeom prst="rect">
+            <a:avLst/>
+          </a:prstGeom>
+          <a:noFill/>
+          <a:ln/>
+        </p:spPr>
+        <p:txBody>
+          <a:bodyPr wrap="square" lIns="0" tIns="0" rIns="0" bIns="0" rtlCol="0" anchor="b"/>
+          <a:lstStyle/>
+          <a:p>
+            <a:pPr algn="ctr" indent="0" marL="0">
+              <a:buNone/>
+            </a:pPr>
+            <a:r>
+              <a:rPr lang="en-US" sz="1100" b="1" dirty="0">
+                <a:solidFill>
+                  <a:srgbClr val="132257"/>
+                </a:solidFill>
+                <a:latin typeface="Exo 2" pitchFamily="34" charset="0"/>
+                <a:ea typeface="Exo 2" pitchFamily="34" charset="-122"/>
+                <a:cs typeface="Exo 2" pitchFamily="34" charset="-120"/>
+              </a:rPr>
+              <a:t>14</a:t>
+            </a:r>
+            <a:endParaRPr lang="en-US" sz="1100" dirty="0"/>
+          </a:p>
+        </p:txBody>
+      </p:sp>
+      <p:sp>
+        <p:nvSpPr>
+          <p:cNvPr id="44" name="Shape 38"/>
+          <p:cNvSpPr/>
+          <p:nvPr/>
+        </p:nvSpPr>
+        <p:spPr>
+          <a:xfrm>
+            <a:off x="8950833" y="4531995"/>
+            <a:ext cx="521139" cy="360045"/>
+          </a:xfrm>
+          <a:prstGeom prst="rect">
+            <a:avLst/>
+          </a:prstGeom>
+          <a:solidFill>
+            <a:srgbClr val="1BA97C"/>
+          </a:solidFill>
+          <a:ln w="12700">
+            <a:solidFill>
+              <a:srgbClr val="1BA97C"/>
+            </a:solidFill>
+            <a:prstDash val="solid"/>
+          </a:ln>
+        </p:spPr>
+      </p:sp>
+      <p:sp>
+        <p:nvSpPr>
+          <p:cNvPr id="45" name="Text 39"/>
+          <p:cNvSpPr txBox="1"/>
+          <p:nvPr/>
+        </p:nvSpPr>
+        <p:spPr>
+          <a:xfrm>
+            <a:off x="8841105" y="4257675"/>
+            <a:ext cx="740595" cy="256032"/>
+          </a:xfrm>
+          <a:prstGeom prst="rect">
+            <a:avLst/>
+          </a:prstGeom>
+          <a:noFill/>
+          <a:ln/>
+        </p:spPr>
+        <p:txBody>
+          <a:bodyPr wrap="square" lIns="0" tIns="0" rIns="0" bIns="0" rtlCol="0" anchor="b"/>
+          <a:lstStyle/>
+          <a:p>
+            <a:pPr algn="ctr" indent="0" marL="0">
+              <a:buNone/>
+            </a:pPr>
+            <a:r>
+              <a:rPr lang="en-US" sz="1100" b="1" dirty="0">
+                <a:solidFill>
+                  <a:srgbClr val="132257"/>
+                </a:solidFill>
+                <a:latin typeface="Exo 2" pitchFamily="34" charset="0"/>
+                <a:ea typeface="Exo 2" pitchFamily="34" charset="-122"/>
+                <a:cs typeface="Exo 2" pitchFamily="34" charset="-120"/>
+              </a:rPr>
+              <a:t>5</a:t>
+            </a:r>
+            <a:endParaRPr lang="en-US" sz="1100" dirty="0"/>
+          </a:p>
+        </p:txBody>
+      </p:sp>
+      <p:sp>
+        <p:nvSpPr>
+          <p:cNvPr id="46" name="Text 40"/>
+          <p:cNvSpPr txBox="1"/>
+          <p:nvPr/>
+        </p:nvSpPr>
+        <p:spPr>
+          <a:xfrm>
+            <a:off x="8033004" y="4965192"/>
+            <a:ext cx="1799082" cy="274320"/>
+          </a:xfrm>
+          <a:prstGeom prst="rect">
+            <a:avLst/>
+          </a:prstGeom>
+          <a:noFill/>
+          <a:ln/>
+        </p:spPr>
+        <p:txBody>
+          <a:bodyPr wrap="square" lIns="0" tIns="0" rIns="0" bIns="0" rtlCol="0" anchor="t"/>
+          <a:lstStyle/>
+          <a:p>
+            <a:pPr algn="ctr" indent="0" marL="0">
+              <a:buNone/>
+            </a:pPr>
+            <a:r>
+              <a:rPr lang="en-US" sz="1050" dirty="0">
+                <a:solidFill>
+                  <a:srgbClr val="1F2A44"/>
+                </a:solidFill>
+                <a:latin typeface="Exo 2" pitchFamily="34" charset="0"/>
+                <a:ea typeface="Exo 2" pitchFamily="34" charset="-122"/>
+                <a:cs typeface="Exo 2" pitchFamily="34" charset="-120"/>
+              </a:rPr>
+              <a:t>14-21 Sep</a:t>
+            </a:r>
+            <a:endParaRPr lang="en-US" sz="1050" dirty="0"/>
+          </a:p>
+        </p:txBody>
+      </p:sp>
+      <p:sp>
+        <p:nvSpPr>
+          <p:cNvPr id="47" name="Shape 41"/>
+          <p:cNvSpPr/>
+          <p:nvPr/>
+        </p:nvSpPr>
+        <p:spPr>
+          <a:xfrm>
+            <a:off x="10192200" y="2299716"/>
+            <a:ext cx="521139" cy="2592324"/>
+          </a:xfrm>
+          <a:prstGeom prst="rect">
+            <a:avLst/>
+          </a:prstGeom>
+          <a:solidFill>
+            <a:srgbClr val="132257"/>
+          </a:solidFill>
+          <a:ln w="12700">
+            <a:solidFill>
+              <a:srgbClr val="132257"/>
+            </a:solidFill>
+            <a:prstDash val="solid"/>
+          </a:ln>
+        </p:spPr>
+      </p:sp>
+      <p:sp>
+        <p:nvSpPr>
+          <p:cNvPr id="48" name="Text 42"/>
+          <p:cNvSpPr txBox="1"/>
+          <p:nvPr/>
+        </p:nvSpPr>
+        <p:spPr>
+          <a:xfrm>
+            <a:off x="10082472" y="2025396"/>
+            <a:ext cx="740595" cy="256032"/>
+          </a:xfrm>
+          <a:prstGeom prst="rect">
+            <a:avLst/>
+          </a:prstGeom>
+          <a:noFill/>
+          <a:ln/>
+        </p:spPr>
+        <p:txBody>
+          <a:bodyPr wrap="square" lIns="0" tIns="0" rIns="0" bIns="0" rtlCol="0" anchor="b"/>
+          <a:lstStyle/>
+          <a:p>
+            <a:pPr algn="ctr" indent="0" marL="0">
+              <a:buNone/>
+            </a:pPr>
+            <a:r>
+              <a:rPr lang="en-US" sz="1100" b="1" dirty="0">
+                <a:solidFill>
+                  <a:srgbClr val="132257"/>
+                </a:solidFill>
+                <a:latin typeface="Exo 2" pitchFamily="34" charset="0"/>
+                <a:ea typeface="Exo 2" pitchFamily="34" charset="-122"/>
+                <a:cs typeface="Exo 2" pitchFamily="34" charset="-120"/>
+              </a:rPr>
+              <a:t>36</a:t>
+            </a:r>
+            <a:endParaRPr lang="en-US" sz="1100" dirty="0"/>
+          </a:p>
+        </p:txBody>
+      </p:sp>
+      <p:sp>
+        <p:nvSpPr>
+          <p:cNvPr id="49" name="Shape 43"/>
+          <p:cNvSpPr/>
+          <p:nvPr/>
+        </p:nvSpPr>
+        <p:spPr>
+          <a:xfrm>
+            <a:off x="10749915" y="4676013"/>
+            <a:ext cx="521139" cy="216027"/>
+          </a:xfrm>
+          <a:prstGeom prst="rect">
+            <a:avLst/>
+          </a:prstGeom>
+          <a:solidFill>
+            <a:srgbClr val="1BA97C"/>
+          </a:solidFill>
+          <a:ln w="12700">
+            <a:solidFill>
+              <a:srgbClr val="1BA97C"/>
+            </a:solidFill>
+            <a:prstDash val="solid"/>
+          </a:ln>
+        </p:spPr>
+      </p:sp>
+      <p:sp>
+        <p:nvSpPr>
+          <p:cNvPr id="50" name="Text 44"/>
+          <p:cNvSpPr txBox="1"/>
+          <p:nvPr/>
+        </p:nvSpPr>
+        <p:spPr>
+          <a:xfrm>
+            <a:off x="10640187" y="4401693"/>
+            <a:ext cx="740595" cy="256032"/>
+          </a:xfrm>
+          <a:prstGeom prst="rect">
+            <a:avLst/>
+          </a:prstGeom>
+          <a:noFill/>
+          <a:ln/>
+        </p:spPr>
+        <p:txBody>
+          <a:bodyPr wrap="square" lIns="0" tIns="0" rIns="0" bIns="0" rtlCol="0" anchor="b"/>
+          <a:lstStyle/>
+          <a:p>
+            <a:pPr algn="ctr" indent="0" marL="0">
+              <a:buNone/>
+            </a:pPr>
+            <a:r>
+              <a:rPr lang="en-US" sz="1100" b="1" dirty="0">
+                <a:solidFill>
+                  <a:srgbClr val="132257"/>
+                </a:solidFill>
+                <a:latin typeface="Exo 2" pitchFamily="34" charset="0"/>
+                <a:ea typeface="Exo 2" pitchFamily="34" charset="-122"/>
+                <a:cs typeface="Exo 2" pitchFamily="34" charset="-120"/>
+              </a:rPr>
+              <a:t>3</a:t>
+            </a:r>
+            <a:endParaRPr lang="en-US" sz="1100" dirty="0"/>
+          </a:p>
+        </p:txBody>
+      </p:sp>
+      <p:sp>
+        <p:nvSpPr>
+          <p:cNvPr id="51" name="Text 45"/>
+          <p:cNvSpPr txBox="1"/>
+          <p:nvPr/>
+        </p:nvSpPr>
+        <p:spPr>
+          <a:xfrm>
+            <a:off x="9832086" y="4965192"/>
+            <a:ext cx="1799082" cy="274320"/>
+          </a:xfrm>
+          <a:prstGeom prst="rect">
+            <a:avLst/>
+          </a:prstGeom>
+          <a:noFill/>
+          <a:ln/>
+        </p:spPr>
+        <p:txBody>
+          <a:bodyPr wrap="square" lIns="0" tIns="0" rIns="0" bIns="0" rtlCol="0" anchor="t"/>
+          <a:lstStyle/>
+          <a:p>
+            <a:pPr algn="ctr" indent="0" marL="0">
+              <a:buNone/>
+            </a:pPr>
+            <a:r>
+              <a:rPr lang="en-US" sz="1050" dirty="0">
+                <a:solidFill>
+                  <a:srgbClr val="1F2A44"/>
+                </a:solidFill>
+                <a:latin typeface="Exo 2" pitchFamily="34" charset="0"/>
+                <a:ea typeface="Exo 2" pitchFamily="34" charset="-122"/>
+                <a:cs typeface="Exo 2" pitchFamily="34" charset="-120"/>
+              </a:rPr>
+              <a:t>21-27 Sep (paid live)</a:t>
+            </a:r>
+            <a:endParaRPr lang="en-US" sz="1050" dirty="0"/>
+          </a:p>
+        </p:txBody>
+      </p:sp>
+      <p:sp>
+        <p:nvSpPr>
+          <p:cNvPr id="52" name="Shape 46"/>
+          <p:cNvSpPr/>
+          <p:nvPr/>
+        </p:nvSpPr>
+        <p:spPr>
+          <a:xfrm>
+            <a:off x="6592824" y="5358384"/>
+            <a:ext cx="128016" cy="128016"/>
+          </a:xfrm>
+          <a:prstGeom prst="rect">
+            <a:avLst/>
+          </a:prstGeom>
+          <a:solidFill>
+            <a:srgbClr val="132257"/>
+          </a:solidFill>
+          <a:ln w="12700">
+            <a:solidFill>
+              <a:srgbClr val="132257"/>
+            </a:solidFill>
+            <a:prstDash val="solid"/>
+          </a:ln>
+        </p:spPr>
+      </p:sp>
+      <p:sp>
+        <p:nvSpPr>
+          <p:cNvPr id="53" name="Text 47"/>
+          <p:cNvSpPr txBox="1"/>
+          <p:nvPr/>
+        </p:nvSpPr>
+        <p:spPr>
+          <a:xfrm>
+            <a:off x="6775704" y="5285232"/>
+            <a:ext cx="1394460" cy="274320"/>
+          </a:xfrm>
+          <a:prstGeom prst="rect">
+            <a:avLst/>
+          </a:prstGeom>
+          <a:noFill/>
+          <a:ln/>
+        </p:spPr>
+        <p:txBody>
+          <a:bodyPr wrap="square" lIns="0" tIns="0" rIns="0" bIns="0" rtlCol="0" anchor="ctr"/>
+          <a:lstStyle/>
+          <a:p>
+            <a:pPr indent="0" marL="0">
+              <a:buNone/>
+            </a:pPr>
+            <a:r>
+              <a:rPr lang="en-US" sz="1000" dirty="0">
+                <a:solidFill>
+                  <a:srgbClr val="1F2A44"/>
+                </a:solidFill>
+                <a:latin typeface="Exo 2" pitchFamily="34" charset="0"/>
+                <a:ea typeface="Exo 2" pitchFamily="34" charset="-122"/>
+                <a:cs typeface="Exo 2" pitchFamily="34" charset="-120"/>
+              </a:rPr>
+              <a:t>App downloads added</a:t>
+            </a:r>
+            <a:endParaRPr lang="en-US" sz="1000" dirty="0"/>
+          </a:p>
+        </p:txBody>
+      </p:sp>
+      <p:sp>
+        <p:nvSpPr>
+          <p:cNvPr id="54" name="Shape 48"/>
+          <p:cNvSpPr/>
+          <p:nvPr/>
+        </p:nvSpPr>
+        <p:spPr>
+          <a:xfrm>
+            <a:off x="8170164" y="5358384"/>
+            <a:ext cx="128016" cy="128016"/>
+          </a:xfrm>
+          <a:prstGeom prst="rect">
+            <a:avLst/>
+          </a:prstGeom>
+          <a:solidFill>
+            <a:srgbClr val="1BA97C"/>
+          </a:solidFill>
+          <a:ln w="12700">
+            <a:solidFill>
+              <a:srgbClr val="1BA97C"/>
+            </a:solidFill>
+            <a:prstDash val="solid"/>
+          </a:ln>
+        </p:spPr>
+      </p:sp>
+      <p:sp>
+        <p:nvSpPr>
+          <p:cNvPr id="55" name="Text 49"/>
+          <p:cNvSpPr txBox="1"/>
+          <p:nvPr/>
+        </p:nvSpPr>
+        <p:spPr>
+          <a:xfrm>
+            <a:off x="8353044" y="5285232"/>
+            <a:ext cx="1120140" cy="274320"/>
+          </a:xfrm>
+          <a:prstGeom prst="rect">
+            <a:avLst/>
+          </a:prstGeom>
+          <a:noFill/>
+          <a:ln/>
+        </p:spPr>
+        <p:txBody>
+          <a:bodyPr wrap="square" lIns="0" tIns="0" rIns="0" bIns="0" rtlCol="0" anchor="ctr"/>
+          <a:lstStyle/>
+          <a:p>
+            <a:pPr indent="0" marL="0">
+              <a:buNone/>
+            </a:pPr>
+            <a:r>
+              <a:rPr lang="en-US" sz="1000" dirty="0">
+                <a:solidFill>
+                  <a:srgbClr val="1F2A44"/>
+                </a:solidFill>
+                <a:latin typeface="Exo 2" pitchFamily="34" charset="0"/>
+                <a:ea typeface="Exo 2" pitchFamily="34" charset="-122"/>
+                <a:cs typeface="Exo 2" pitchFamily="34" charset="-120"/>
+              </a:rPr>
+              <a:t>Users onboarded</a:t>
+            </a:r>
+            <a:endParaRPr lang="en-US" sz="1000" dirty="0"/>
+          </a:p>
+        </p:txBody>
+      </p:sp>
     </p:spTree>
   </p:cSld>
   <p:clrMapOvr>
@@ -6475,32 +6133,16 @@
           </a:prstGeom>
         </p:spPr>
       </p:pic>
-      <p:graphicFrame>
-        <p:nvGraphicFramePr>
-          <p:cNvPr id="15" name="Chart 0" descr=""/>
-          <p:cNvGraphicFramePr/>
-          <p:nvPr/>
-        </p:nvGraphicFramePr>
-        <p:xfrm>
-          <a:off x="566928" y="1508760"/>
-          <a:ext cx="6720840" cy="4069080"/>
-        </p:xfrm>
-        <a:graphic xmlns:a="http://schemas.openxmlformats.org/drawingml/2006/main">
-          <a:graphicData uri="http://schemas.openxmlformats.org/drawingml/2006/chart">
-            <c:chart xmlns:c="http://schemas.openxmlformats.org/drawingml/2006/chart" r:id="rId4"/>
-          </a:graphicData>
-        </a:graphic>
-      </p:graphicFrame>
-      <p:sp>
-        <p:nvSpPr>
-          <p:cNvPr id="16" name="Text 9"/>
+      <p:sp>
+        <p:nvSpPr>
+          <p:cNvPr id="15" name="Text 9"/>
           <p:cNvSpPr txBox="1"/>
           <p:nvPr/>
         </p:nvSpPr>
         <p:spPr>
           <a:xfrm>
-            <a:off x="4892040" y="2011680"/>
-            <a:ext cx="2194560" cy="457200"/>
+            <a:off x="566928" y="1508760"/>
+            <a:ext cx="6720840" cy="274320"/>
           </a:xfrm>
           <a:prstGeom prst="rect">
             <a:avLst/>
@@ -6512,6 +6154,1786 @@
           <a:bodyPr wrap="square" lIns="0" tIns="0" rIns="0" bIns="0" rtlCol="0" anchor="t"/>
           <a:lstStyle/>
           <a:p>
+            <a:pPr algn="ctr" indent="0" marL="0">
+              <a:buNone/>
+            </a:pPr>
+            <a:r>
+              <a:rPr lang="en-US" sz="1100" dirty="0">
+                <a:solidFill>
+                  <a:srgbClr val="132257"/>
+                </a:solidFill>
+                <a:latin typeface="Exo 2" pitchFamily="34" charset="0"/>
+                <a:ea typeface="Exo 2" pitchFamily="34" charset="-122"/>
+                <a:cs typeface="Exo 2" pitchFamily="34" charset="-120"/>
+              </a:rPr>
+              <a:t>App installs, cumulative (Android + iOS), by dashboard report date</a:t>
+            </a:r>
+            <a:endParaRPr lang="en-US" sz="1100" dirty="0"/>
+          </a:p>
+        </p:txBody>
+      </p:sp>
+      <p:sp>
+        <p:nvSpPr>
+          <p:cNvPr id="16" name="Shape 10"/>
+          <p:cNvSpPr/>
+          <p:nvPr/>
+        </p:nvSpPr>
+        <p:spPr>
+          <a:xfrm>
+            <a:off x="1024128" y="5029200"/>
+            <a:ext cx="6172200" cy="0"/>
+          </a:xfrm>
+          <a:prstGeom prst="line">
+            <a:avLst/>
+          </a:prstGeom>
+          <a:noFill/>
+          <a:ln w="12700">
+            <a:solidFill>
+              <a:srgbClr val="C6CFE4"/>
+            </a:solidFill>
+            <a:prstDash val="solid"/>
+          </a:ln>
+        </p:spPr>
+      </p:sp>
+      <p:sp>
+        <p:nvSpPr>
+          <p:cNvPr id="17" name="Text 11"/>
+          <p:cNvSpPr txBox="1"/>
+          <p:nvPr/>
+        </p:nvSpPr>
+        <p:spPr>
+          <a:xfrm>
+            <a:off x="566928" y="4919472"/>
+            <a:ext cx="384048" cy="219456"/>
+          </a:xfrm>
+          <a:prstGeom prst="rect">
+            <a:avLst/>
+          </a:prstGeom>
+          <a:noFill/>
+          <a:ln/>
+        </p:spPr>
+        <p:txBody>
+          <a:bodyPr wrap="square" lIns="0" tIns="0" rIns="0" bIns="0" rtlCol="0" anchor="ctr"/>
+          <a:lstStyle/>
+          <a:p>
+            <a:pPr algn="r" indent="0" marL="0">
+              <a:buNone/>
+            </a:pPr>
+            <a:r>
+              <a:rPr lang="en-US" sz="900" dirty="0">
+                <a:solidFill>
+                  <a:srgbClr val="7A849C"/>
+                </a:solidFill>
+                <a:latin typeface="Exo 2" pitchFamily="34" charset="0"/>
+                <a:ea typeface="Exo 2" pitchFamily="34" charset="-122"/>
+                <a:cs typeface="Exo 2" pitchFamily="34" charset="-120"/>
+              </a:rPr>
+              <a:t>360</a:t>
+            </a:r>
+            <a:endParaRPr lang="en-US" sz="900" dirty="0"/>
+          </a:p>
+        </p:txBody>
+      </p:sp>
+      <p:sp>
+        <p:nvSpPr>
+          <p:cNvPr id="18" name="Shape 12"/>
+          <p:cNvSpPr/>
+          <p:nvPr/>
+        </p:nvSpPr>
+        <p:spPr>
+          <a:xfrm>
+            <a:off x="1024128" y="4263390"/>
+            <a:ext cx="6172200" cy="0"/>
+          </a:xfrm>
+          <a:prstGeom prst="line">
+            <a:avLst/>
+          </a:prstGeom>
+          <a:noFill/>
+          <a:ln w="9525">
+            <a:solidFill>
+              <a:srgbClr val="E6EAF2"/>
+            </a:solidFill>
+            <a:prstDash val="solid"/>
+          </a:ln>
+        </p:spPr>
+      </p:sp>
+      <p:sp>
+        <p:nvSpPr>
+          <p:cNvPr id="19" name="Text 13"/>
+          <p:cNvSpPr txBox="1"/>
+          <p:nvPr/>
+        </p:nvSpPr>
+        <p:spPr>
+          <a:xfrm>
+            <a:off x="566928" y="4153662"/>
+            <a:ext cx="384048" cy="219456"/>
+          </a:xfrm>
+          <a:prstGeom prst="rect">
+            <a:avLst/>
+          </a:prstGeom>
+          <a:noFill/>
+          <a:ln/>
+        </p:spPr>
+        <p:txBody>
+          <a:bodyPr wrap="square" lIns="0" tIns="0" rIns="0" bIns="0" rtlCol="0" anchor="ctr"/>
+          <a:lstStyle/>
+          <a:p>
+            <a:pPr algn="r" indent="0" marL="0">
+              <a:buNone/>
+            </a:pPr>
+            <a:r>
+              <a:rPr lang="en-US" sz="900" dirty="0">
+                <a:solidFill>
+                  <a:srgbClr val="7A849C"/>
+                </a:solidFill>
+                <a:latin typeface="Exo 2" pitchFamily="34" charset="0"/>
+                <a:ea typeface="Exo 2" pitchFamily="34" charset="-122"/>
+                <a:cs typeface="Exo 2" pitchFamily="34" charset="-120"/>
+              </a:rPr>
+              <a:t>390</a:t>
+            </a:r>
+            <a:endParaRPr lang="en-US" sz="900" dirty="0"/>
+          </a:p>
+        </p:txBody>
+      </p:sp>
+      <p:sp>
+        <p:nvSpPr>
+          <p:cNvPr id="20" name="Shape 14"/>
+          <p:cNvSpPr/>
+          <p:nvPr/>
+        </p:nvSpPr>
+        <p:spPr>
+          <a:xfrm>
+            <a:off x="1024128" y="3497580"/>
+            <a:ext cx="6172200" cy="0"/>
+          </a:xfrm>
+          <a:prstGeom prst="line">
+            <a:avLst/>
+          </a:prstGeom>
+          <a:noFill/>
+          <a:ln w="9525">
+            <a:solidFill>
+              <a:srgbClr val="E6EAF2"/>
+            </a:solidFill>
+            <a:prstDash val="solid"/>
+          </a:ln>
+        </p:spPr>
+      </p:sp>
+      <p:sp>
+        <p:nvSpPr>
+          <p:cNvPr id="21" name="Text 15"/>
+          <p:cNvSpPr txBox="1"/>
+          <p:nvPr/>
+        </p:nvSpPr>
+        <p:spPr>
+          <a:xfrm>
+            <a:off x="566928" y="3387852"/>
+            <a:ext cx="384048" cy="219456"/>
+          </a:xfrm>
+          <a:prstGeom prst="rect">
+            <a:avLst/>
+          </a:prstGeom>
+          <a:noFill/>
+          <a:ln/>
+        </p:spPr>
+        <p:txBody>
+          <a:bodyPr wrap="square" lIns="0" tIns="0" rIns="0" bIns="0" rtlCol="0" anchor="ctr"/>
+          <a:lstStyle/>
+          <a:p>
+            <a:pPr algn="r" indent="0" marL="0">
+              <a:buNone/>
+            </a:pPr>
+            <a:r>
+              <a:rPr lang="en-US" sz="900" dirty="0">
+                <a:solidFill>
+                  <a:srgbClr val="7A849C"/>
+                </a:solidFill>
+                <a:latin typeface="Exo 2" pitchFamily="34" charset="0"/>
+                <a:ea typeface="Exo 2" pitchFamily="34" charset="-122"/>
+                <a:cs typeface="Exo 2" pitchFamily="34" charset="-120"/>
+              </a:rPr>
+              <a:t>420</a:t>
+            </a:r>
+            <a:endParaRPr lang="en-US" sz="900" dirty="0"/>
+          </a:p>
+        </p:txBody>
+      </p:sp>
+      <p:sp>
+        <p:nvSpPr>
+          <p:cNvPr id="22" name="Shape 16"/>
+          <p:cNvSpPr/>
+          <p:nvPr/>
+        </p:nvSpPr>
+        <p:spPr>
+          <a:xfrm>
+            <a:off x="1024128" y="2731770"/>
+            <a:ext cx="6172200" cy="0"/>
+          </a:xfrm>
+          <a:prstGeom prst="line">
+            <a:avLst/>
+          </a:prstGeom>
+          <a:noFill/>
+          <a:ln w="9525">
+            <a:solidFill>
+              <a:srgbClr val="E6EAF2"/>
+            </a:solidFill>
+            <a:prstDash val="solid"/>
+          </a:ln>
+        </p:spPr>
+      </p:sp>
+      <p:sp>
+        <p:nvSpPr>
+          <p:cNvPr id="23" name="Text 17"/>
+          <p:cNvSpPr txBox="1"/>
+          <p:nvPr/>
+        </p:nvSpPr>
+        <p:spPr>
+          <a:xfrm>
+            <a:off x="566928" y="2622042"/>
+            <a:ext cx="384048" cy="219456"/>
+          </a:xfrm>
+          <a:prstGeom prst="rect">
+            <a:avLst/>
+          </a:prstGeom>
+          <a:noFill/>
+          <a:ln/>
+        </p:spPr>
+        <p:txBody>
+          <a:bodyPr wrap="square" lIns="0" tIns="0" rIns="0" bIns="0" rtlCol="0" anchor="ctr"/>
+          <a:lstStyle/>
+          <a:p>
+            <a:pPr algn="r" indent="0" marL="0">
+              <a:buNone/>
+            </a:pPr>
+            <a:r>
+              <a:rPr lang="en-US" sz="900" dirty="0">
+                <a:solidFill>
+                  <a:srgbClr val="7A849C"/>
+                </a:solidFill>
+                <a:latin typeface="Exo 2" pitchFamily="34" charset="0"/>
+                <a:ea typeface="Exo 2" pitchFamily="34" charset="-122"/>
+                <a:cs typeface="Exo 2" pitchFamily="34" charset="-120"/>
+              </a:rPr>
+              <a:t>450</a:t>
+            </a:r>
+            <a:endParaRPr lang="en-US" sz="900" dirty="0"/>
+          </a:p>
+        </p:txBody>
+      </p:sp>
+      <p:sp>
+        <p:nvSpPr>
+          <p:cNvPr id="24" name="Shape 18"/>
+          <p:cNvSpPr/>
+          <p:nvPr/>
+        </p:nvSpPr>
+        <p:spPr>
+          <a:xfrm>
+            <a:off x="1024128" y="1965960"/>
+            <a:ext cx="6172200" cy="0"/>
+          </a:xfrm>
+          <a:prstGeom prst="line">
+            <a:avLst/>
+          </a:prstGeom>
+          <a:noFill/>
+          <a:ln w="9525">
+            <a:solidFill>
+              <a:srgbClr val="E6EAF2"/>
+            </a:solidFill>
+            <a:prstDash val="solid"/>
+          </a:ln>
+        </p:spPr>
+      </p:sp>
+      <p:sp>
+        <p:nvSpPr>
+          <p:cNvPr id="25" name="Text 19"/>
+          <p:cNvSpPr txBox="1"/>
+          <p:nvPr/>
+        </p:nvSpPr>
+        <p:spPr>
+          <a:xfrm>
+            <a:off x="566928" y="1856232"/>
+            <a:ext cx="384048" cy="219456"/>
+          </a:xfrm>
+          <a:prstGeom prst="rect">
+            <a:avLst/>
+          </a:prstGeom>
+          <a:noFill/>
+          <a:ln/>
+        </p:spPr>
+        <p:txBody>
+          <a:bodyPr wrap="square" lIns="0" tIns="0" rIns="0" bIns="0" rtlCol="0" anchor="ctr"/>
+          <a:lstStyle/>
+          <a:p>
+            <a:pPr algn="r" indent="0" marL="0">
+              <a:buNone/>
+            </a:pPr>
+            <a:r>
+              <a:rPr lang="en-US" sz="900" dirty="0">
+                <a:solidFill>
+                  <a:srgbClr val="7A849C"/>
+                </a:solidFill>
+                <a:latin typeface="Exo 2" pitchFamily="34" charset="0"/>
+                <a:ea typeface="Exo 2" pitchFamily="34" charset="-122"/>
+                <a:cs typeface="Exo 2" pitchFamily="34" charset="-120"/>
+              </a:rPr>
+              <a:t>480</a:t>
+            </a:r>
+            <a:endParaRPr lang="en-US" sz="900" dirty="0"/>
+          </a:p>
+        </p:txBody>
+      </p:sp>
+      <p:sp>
+        <p:nvSpPr>
+          <p:cNvPr id="26" name="Shape 20"/>
+          <p:cNvSpPr/>
+          <p:nvPr/>
+        </p:nvSpPr>
+        <p:spPr>
+          <a:xfrm>
+            <a:off x="5879592" y="1920240"/>
+            <a:ext cx="0" cy="3108960"/>
+          </a:xfrm>
+          <a:prstGeom prst="line">
+            <a:avLst/>
+          </a:prstGeom>
+          <a:noFill/>
+          <a:ln w="15875">
+            <a:solidFill>
+              <a:srgbClr val="D4AF37"/>
+            </a:solidFill>
+            <a:prstDash val="dash"/>
+          </a:ln>
+        </p:spPr>
+      </p:sp>
+      <p:sp>
+        <p:nvSpPr>
+          <p:cNvPr id="27" name="Shape 21"/>
+          <p:cNvSpPr/>
+          <p:nvPr/>
+        </p:nvSpPr>
+        <p:spPr>
+          <a:xfrm flipV="1">
+            <a:off x="1161288" y="4288917"/>
+            <a:ext cx="393192" cy="408432"/>
+          </a:xfrm>
+          <a:prstGeom prst="line">
+            <a:avLst/>
+          </a:prstGeom>
+          <a:noFill/>
+          <a:ln w="31750">
+            <a:solidFill>
+              <a:srgbClr val="132257"/>
+            </a:solidFill>
+            <a:prstDash val="solid"/>
+          </a:ln>
+        </p:spPr>
+      </p:sp>
+      <p:sp>
+        <p:nvSpPr>
+          <p:cNvPr id="28" name="Shape 22"/>
+          <p:cNvSpPr/>
+          <p:nvPr/>
+        </p:nvSpPr>
+        <p:spPr>
+          <a:xfrm flipV="1">
+            <a:off x="1554480" y="4135755"/>
+            <a:ext cx="393192" cy="153162"/>
+          </a:xfrm>
+          <a:prstGeom prst="line">
+            <a:avLst/>
+          </a:prstGeom>
+          <a:noFill/>
+          <a:ln w="31750">
+            <a:solidFill>
+              <a:srgbClr val="132257"/>
+            </a:solidFill>
+            <a:prstDash val="solid"/>
+          </a:ln>
+        </p:spPr>
+      </p:sp>
+      <p:sp>
+        <p:nvSpPr>
+          <p:cNvPr id="29" name="Shape 23"/>
+          <p:cNvSpPr/>
+          <p:nvPr/>
+        </p:nvSpPr>
+        <p:spPr>
+          <a:xfrm flipV="1">
+            <a:off x="1947672" y="3931539"/>
+            <a:ext cx="393192" cy="204216"/>
+          </a:xfrm>
+          <a:prstGeom prst="line">
+            <a:avLst/>
+          </a:prstGeom>
+          <a:noFill/>
+          <a:ln w="31750">
+            <a:solidFill>
+              <a:srgbClr val="132257"/>
+            </a:solidFill>
+            <a:prstDash val="solid"/>
+          </a:ln>
+        </p:spPr>
+      </p:sp>
+      <p:sp>
+        <p:nvSpPr>
+          <p:cNvPr id="30" name="Shape 24"/>
+          <p:cNvSpPr/>
+          <p:nvPr/>
+        </p:nvSpPr>
+        <p:spPr>
+          <a:xfrm flipV="1">
+            <a:off x="2340864" y="3752850"/>
+            <a:ext cx="393192" cy="178689"/>
+          </a:xfrm>
+          <a:prstGeom prst="line">
+            <a:avLst/>
+          </a:prstGeom>
+          <a:noFill/>
+          <a:ln w="31750">
+            <a:solidFill>
+              <a:srgbClr val="132257"/>
+            </a:solidFill>
+            <a:prstDash val="solid"/>
+          </a:ln>
+        </p:spPr>
+      </p:sp>
+      <p:sp>
+        <p:nvSpPr>
+          <p:cNvPr id="31" name="Shape 25"/>
+          <p:cNvSpPr/>
+          <p:nvPr/>
+        </p:nvSpPr>
+        <p:spPr>
+          <a:xfrm flipV="1">
+            <a:off x="2734056" y="3650742"/>
+            <a:ext cx="393192" cy="102108"/>
+          </a:xfrm>
+          <a:prstGeom prst="line">
+            <a:avLst/>
+          </a:prstGeom>
+          <a:noFill/>
+          <a:ln w="31750">
+            <a:solidFill>
+              <a:srgbClr val="132257"/>
+            </a:solidFill>
+            <a:prstDash val="solid"/>
+          </a:ln>
+        </p:spPr>
+      </p:sp>
+      <p:sp>
+        <p:nvSpPr>
+          <p:cNvPr id="32" name="Shape 26"/>
+          <p:cNvSpPr/>
+          <p:nvPr/>
+        </p:nvSpPr>
+        <p:spPr>
+          <a:xfrm flipV="1">
+            <a:off x="3127248" y="3523107"/>
+            <a:ext cx="393192" cy="127635"/>
+          </a:xfrm>
+          <a:prstGeom prst="line">
+            <a:avLst/>
+          </a:prstGeom>
+          <a:noFill/>
+          <a:ln w="31750">
+            <a:solidFill>
+              <a:srgbClr val="132257"/>
+            </a:solidFill>
+            <a:prstDash val="solid"/>
+          </a:ln>
+        </p:spPr>
+      </p:sp>
+      <p:sp>
+        <p:nvSpPr>
+          <p:cNvPr id="33" name="Shape 27"/>
+          <p:cNvSpPr/>
+          <p:nvPr/>
+        </p:nvSpPr>
+        <p:spPr>
+          <a:xfrm flipV="1">
+            <a:off x="3520440" y="3420999"/>
+            <a:ext cx="393192" cy="102108"/>
+          </a:xfrm>
+          <a:prstGeom prst="line">
+            <a:avLst/>
+          </a:prstGeom>
+          <a:noFill/>
+          <a:ln w="31750">
+            <a:solidFill>
+              <a:srgbClr val="132257"/>
+            </a:solidFill>
+            <a:prstDash val="solid"/>
+          </a:ln>
+        </p:spPr>
+      </p:sp>
+      <p:sp>
+        <p:nvSpPr>
+          <p:cNvPr id="34" name="Shape 28"/>
+          <p:cNvSpPr/>
+          <p:nvPr/>
+        </p:nvSpPr>
+        <p:spPr>
+          <a:xfrm flipV="1">
+            <a:off x="3913632" y="3242310"/>
+            <a:ext cx="393192" cy="178689"/>
+          </a:xfrm>
+          <a:prstGeom prst="line">
+            <a:avLst/>
+          </a:prstGeom>
+          <a:noFill/>
+          <a:ln w="31750">
+            <a:solidFill>
+              <a:srgbClr val="132257"/>
+            </a:solidFill>
+            <a:prstDash val="solid"/>
+          </a:ln>
+        </p:spPr>
+      </p:sp>
+      <p:sp>
+        <p:nvSpPr>
+          <p:cNvPr id="35" name="Shape 29"/>
+          <p:cNvSpPr/>
+          <p:nvPr/>
+        </p:nvSpPr>
+        <p:spPr>
+          <a:xfrm flipV="1">
+            <a:off x="4306824" y="3191256"/>
+            <a:ext cx="393192" cy="51054"/>
+          </a:xfrm>
+          <a:prstGeom prst="line">
+            <a:avLst/>
+          </a:prstGeom>
+          <a:noFill/>
+          <a:ln w="31750">
+            <a:solidFill>
+              <a:srgbClr val="132257"/>
+            </a:solidFill>
+            <a:prstDash val="solid"/>
+          </a:ln>
+        </p:spPr>
+      </p:sp>
+      <p:sp>
+        <p:nvSpPr>
+          <p:cNvPr id="36" name="Shape 30"/>
+          <p:cNvSpPr/>
+          <p:nvPr/>
+        </p:nvSpPr>
+        <p:spPr>
+          <a:xfrm flipV="1">
+            <a:off x="4700016" y="3063621"/>
+            <a:ext cx="393192" cy="127635"/>
+          </a:xfrm>
+          <a:prstGeom prst="line">
+            <a:avLst/>
+          </a:prstGeom>
+          <a:noFill/>
+          <a:ln w="31750">
+            <a:solidFill>
+              <a:srgbClr val="132257"/>
+            </a:solidFill>
+            <a:prstDash val="solid"/>
+          </a:ln>
+        </p:spPr>
+      </p:sp>
+      <p:sp>
+        <p:nvSpPr>
+          <p:cNvPr id="37" name="Shape 31"/>
+          <p:cNvSpPr/>
+          <p:nvPr/>
+        </p:nvSpPr>
+        <p:spPr>
+          <a:xfrm>
+            <a:off x="5093208" y="3063621"/>
+            <a:ext cx="393192" cy="0"/>
+          </a:xfrm>
+          <a:prstGeom prst="line">
+            <a:avLst/>
+          </a:prstGeom>
+          <a:noFill/>
+          <a:ln w="31750">
+            <a:solidFill>
+              <a:srgbClr val="132257"/>
+            </a:solidFill>
+            <a:prstDash val="solid"/>
+          </a:ln>
+        </p:spPr>
+      </p:sp>
+      <p:sp>
+        <p:nvSpPr>
+          <p:cNvPr id="38" name="Shape 32"/>
+          <p:cNvSpPr/>
+          <p:nvPr/>
+        </p:nvSpPr>
+        <p:spPr>
+          <a:xfrm flipV="1">
+            <a:off x="5486400" y="2680716"/>
+            <a:ext cx="393192" cy="382905"/>
+          </a:xfrm>
+          <a:prstGeom prst="line">
+            <a:avLst/>
+          </a:prstGeom>
+          <a:noFill/>
+          <a:ln w="31750">
+            <a:solidFill>
+              <a:srgbClr val="132257"/>
+            </a:solidFill>
+            <a:prstDash val="solid"/>
+          </a:ln>
+        </p:spPr>
+      </p:sp>
+      <p:sp>
+        <p:nvSpPr>
+          <p:cNvPr id="39" name="Shape 33"/>
+          <p:cNvSpPr/>
+          <p:nvPr/>
+        </p:nvSpPr>
+        <p:spPr>
+          <a:xfrm flipV="1">
+            <a:off x="5879592" y="2629662"/>
+            <a:ext cx="393192" cy="51054"/>
+          </a:xfrm>
+          <a:prstGeom prst="line">
+            <a:avLst/>
+          </a:prstGeom>
+          <a:noFill/>
+          <a:ln w="31750">
+            <a:solidFill>
+              <a:srgbClr val="132257"/>
+            </a:solidFill>
+            <a:prstDash val="solid"/>
+          </a:ln>
+        </p:spPr>
+      </p:sp>
+      <p:sp>
+        <p:nvSpPr>
+          <p:cNvPr id="40" name="Shape 34"/>
+          <p:cNvSpPr/>
+          <p:nvPr/>
+        </p:nvSpPr>
+        <p:spPr>
+          <a:xfrm flipV="1">
+            <a:off x="6272784" y="2604135"/>
+            <a:ext cx="393192" cy="25527"/>
+          </a:xfrm>
+          <a:prstGeom prst="line">
+            <a:avLst/>
+          </a:prstGeom>
+          <a:noFill/>
+          <a:ln w="31750">
+            <a:solidFill>
+              <a:srgbClr val="132257"/>
+            </a:solidFill>
+            <a:prstDash val="solid"/>
+          </a:ln>
+        </p:spPr>
+      </p:sp>
+      <p:sp>
+        <p:nvSpPr>
+          <p:cNvPr id="41" name="Shape 35"/>
+          <p:cNvSpPr/>
+          <p:nvPr/>
+        </p:nvSpPr>
+        <p:spPr>
+          <a:xfrm flipV="1">
+            <a:off x="6665976" y="2144649"/>
+            <a:ext cx="393192" cy="459486"/>
+          </a:xfrm>
+          <a:prstGeom prst="line">
+            <a:avLst/>
+          </a:prstGeom>
+          <a:noFill/>
+          <a:ln w="31750">
+            <a:solidFill>
+              <a:srgbClr val="132257"/>
+            </a:solidFill>
+            <a:prstDash val="solid"/>
+          </a:ln>
+        </p:spPr>
+      </p:sp>
+      <p:sp>
+        <p:nvSpPr>
+          <p:cNvPr id="42" name="Shape 36"/>
+          <p:cNvSpPr/>
+          <p:nvPr/>
+        </p:nvSpPr>
+        <p:spPr>
+          <a:xfrm>
+            <a:off x="1115568" y="4651629"/>
+            <a:ext cx="91440" cy="91440"/>
+          </a:xfrm>
+          <a:prstGeom prst="ellipse">
+            <a:avLst/>
+          </a:prstGeom>
+          <a:solidFill>
+            <a:srgbClr val="132257"/>
+          </a:solidFill>
+          <a:ln w="12700">
+            <a:solidFill>
+              <a:srgbClr val="132257"/>
+            </a:solidFill>
+            <a:prstDash val="solid"/>
+          </a:ln>
+        </p:spPr>
+      </p:sp>
+      <p:sp>
+        <p:nvSpPr>
+          <p:cNvPr id="43" name="Text 37"/>
+          <p:cNvSpPr txBox="1"/>
+          <p:nvPr/>
+        </p:nvSpPr>
+        <p:spPr>
+          <a:xfrm>
+            <a:off x="886968" y="5084064"/>
+            <a:ext cx="548640" cy="219456"/>
+          </a:xfrm>
+          <a:prstGeom prst="rect">
+            <a:avLst/>
+          </a:prstGeom>
+          <a:noFill/>
+          <a:ln/>
+        </p:spPr>
+        <p:txBody>
+          <a:bodyPr wrap="square" lIns="0" tIns="0" rIns="0" bIns="0" rtlCol="0" anchor="t"/>
+          <a:lstStyle/>
+          <a:p>
+            <a:pPr algn="ctr" indent="0" marL="0">
+              <a:buNone/>
+            </a:pPr>
+            <a:r>
+              <a:rPr lang="en-US" sz="850" dirty="0">
+                <a:solidFill>
+                  <a:srgbClr val="7A849C"/>
+                </a:solidFill>
+                <a:latin typeface="Exo 2" pitchFamily="34" charset="0"/>
+                <a:ea typeface="Exo 2" pitchFamily="34" charset="-122"/>
+                <a:cs typeface="Exo 2" pitchFamily="34" charset="-120"/>
+              </a:rPr>
+              <a:t>1 Sep</a:t>
+            </a:r>
+            <a:endParaRPr lang="en-US" sz="850" dirty="0"/>
+          </a:p>
+        </p:txBody>
+      </p:sp>
+      <p:sp>
+        <p:nvSpPr>
+          <p:cNvPr id="44" name="Shape 38"/>
+          <p:cNvSpPr/>
+          <p:nvPr/>
+        </p:nvSpPr>
+        <p:spPr>
+          <a:xfrm>
+            <a:off x="1508760" y="4243197"/>
+            <a:ext cx="91440" cy="91440"/>
+          </a:xfrm>
+          <a:prstGeom prst="ellipse">
+            <a:avLst/>
+          </a:prstGeom>
+          <a:solidFill>
+            <a:srgbClr val="132257"/>
+          </a:solidFill>
+          <a:ln w="12700">
+            <a:solidFill>
+              <a:srgbClr val="132257"/>
+            </a:solidFill>
+            <a:prstDash val="solid"/>
+          </a:ln>
+        </p:spPr>
+      </p:sp>
+      <p:sp>
+        <p:nvSpPr>
+          <p:cNvPr id="45" name="Text 39"/>
+          <p:cNvSpPr txBox="1"/>
+          <p:nvPr/>
+        </p:nvSpPr>
+        <p:spPr>
+          <a:xfrm>
+            <a:off x="1280160" y="5084064"/>
+            <a:ext cx="548640" cy="219456"/>
+          </a:xfrm>
+          <a:prstGeom prst="rect">
+            <a:avLst/>
+          </a:prstGeom>
+          <a:noFill/>
+          <a:ln/>
+        </p:spPr>
+        <p:txBody>
+          <a:bodyPr wrap="square" lIns="0" tIns="0" rIns="0" bIns="0" rtlCol="0" anchor="t"/>
+          <a:lstStyle/>
+          <a:p>
+            <a:pPr algn="ctr" indent="0" marL="0">
+              <a:buNone/>
+            </a:pPr>
+            <a:r>
+              <a:rPr lang="en-US" sz="850" dirty="0">
+                <a:solidFill>
+                  <a:srgbClr val="7A849C"/>
+                </a:solidFill>
+                <a:latin typeface="Exo 2" pitchFamily="34" charset="0"/>
+                <a:ea typeface="Exo 2" pitchFamily="34" charset="-122"/>
+                <a:cs typeface="Exo 2" pitchFamily="34" charset="-120"/>
+              </a:rPr>
+              <a:t>2</a:t>
+            </a:r>
+            <a:endParaRPr lang="en-US" sz="850" dirty="0"/>
+          </a:p>
+        </p:txBody>
+      </p:sp>
+      <p:sp>
+        <p:nvSpPr>
+          <p:cNvPr id="46" name="Shape 40"/>
+          <p:cNvSpPr/>
+          <p:nvPr/>
+        </p:nvSpPr>
+        <p:spPr>
+          <a:xfrm>
+            <a:off x="1901952" y="4090035"/>
+            <a:ext cx="91440" cy="91440"/>
+          </a:xfrm>
+          <a:prstGeom prst="ellipse">
+            <a:avLst/>
+          </a:prstGeom>
+          <a:solidFill>
+            <a:srgbClr val="132257"/>
+          </a:solidFill>
+          <a:ln w="12700">
+            <a:solidFill>
+              <a:srgbClr val="132257"/>
+            </a:solidFill>
+            <a:prstDash val="solid"/>
+          </a:ln>
+        </p:spPr>
+      </p:sp>
+      <p:sp>
+        <p:nvSpPr>
+          <p:cNvPr id="47" name="Text 41"/>
+          <p:cNvSpPr txBox="1"/>
+          <p:nvPr/>
+        </p:nvSpPr>
+        <p:spPr>
+          <a:xfrm>
+            <a:off x="1673352" y="5084064"/>
+            <a:ext cx="548640" cy="219456"/>
+          </a:xfrm>
+          <a:prstGeom prst="rect">
+            <a:avLst/>
+          </a:prstGeom>
+          <a:noFill/>
+          <a:ln/>
+        </p:spPr>
+        <p:txBody>
+          <a:bodyPr wrap="square" lIns="0" tIns="0" rIns="0" bIns="0" rtlCol="0" anchor="t"/>
+          <a:lstStyle/>
+          <a:p>
+            <a:pPr algn="ctr" indent="0" marL="0">
+              <a:buNone/>
+            </a:pPr>
+            <a:r>
+              <a:rPr lang="en-US" sz="850" dirty="0">
+                <a:solidFill>
+                  <a:srgbClr val="7A849C"/>
+                </a:solidFill>
+                <a:latin typeface="Exo 2" pitchFamily="34" charset="0"/>
+                <a:ea typeface="Exo 2" pitchFamily="34" charset="-122"/>
+                <a:cs typeface="Exo 2" pitchFamily="34" charset="-120"/>
+              </a:rPr>
+              <a:t>3</a:t>
+            </a:r>
+            <a:endParaRPr lang="en-US" sz="850" dirty="0"/>
+          </a:p>
+        </p:txBody>
+      </p:sp>
+      <p:sp>
+        <p:nvSpPr>
+          <p:cNvPr id="48" name="Shape 42"/>
+          <p:cNvSpPr/>
+          <p:nvPr/>
+        </p:nvSpPr>
+        <p:spPr>
+          <a:xfrm>
+            <a:off x="2295144" y="3885819"/>
+            <a:ext cx="91440" cy="91440"/>
+          </a:xfrm>
+          <a:prstGeom prst="ellipse">
+            <a:avLst/>
+          </a:prstGeom>
+          <a:solidFill>
+            <a:srgbClr val="132257"/>
+          </a:solidFill>
+          <a:ln w="12700">
+            <a:solidFill>
+              <a:srgbClr val="132257"/>
+            </a:solidFill>
+            <a:prstDash val="solid"/>
+          </a:ln>
+        </p:spPr>
+      </p:sp>
+      <p:sp>
+        <p:nvSpPr>
+          <p:cNvPr id="49" name="Text 43"/>
+          <p:cNvSpPr txBox="1"/>
+          <p:nvPr/>
+        </p:nvSpPr>
+        <p:spPr>
+          <a:xfrm>
+            <a:off x="2066544" y="5084064"/>
+            <a:ext cx="548640" cy="219456"/>
+          </a:xfrm>
+          <a:prstGeom prst="rect">
+            <a:avLst/>
+          </a:prstGeom>
+          <a:noFill/>
+          <a:ln/>
+        </p:spPr>
+        <p:txBody>
+          <a:bodyPr wrap="square" lIns="0" tIns="0" rIns="0" bIns="0" rtlCol="0" anchor="t"/>
+          <a:lstStyle/>
+          <a:p>
+            <a:pPr algn="ctr" indent="0" marL="0">
+              <a:buNone/>
+            </a:pPr>
+            <a:r>
+              <a:rPr lang="en-US" sz="850" dirty="0">
+                <a:solidFill>
+                  <a:srgbClr val="7A849C"/>
+                </a:solidFill>
+                <a:latin typeface="Exo 2" pitchFamily="34" charset="0"/>
+                <a:ea typeface="Exo 2" pitchFamily="34" charset="-122"/>
+                <a:cs typeface="Exo 2" pitchFamily="34" charset="-120"/>
+              </a:rPr>
+              <a:t>8</a:t>
+            </a:r>
+            <a:endParaRPr lang="en-US" sz="850" dirty="0"/>
+          </a:p>
+        </p:txBody>
+      </p:sp>
+      <p:sp>
+        <p:nvSpPr>
+          <p:cNvPr id="50" name="Shape 44"/>
+          <p:cNvSpPr/>
+          <p:nvPr/>
+        </p:nvSpPr>
+        <p:spPr>
+          <a:xfrm>
+            <a:off x="2688336" y="3707130"/>
+            <a:ext cx="91440" cy="91440"/>
+          </a:xfrm>
+          <a:prstGeom prst="ellipse">
+            <a:avLst/>
+          </a:prstGeom>
+          <a:solidFill>
+            <a:srgbClr val="132257"/>
+          </a:solidFill>
+          <a:ln w="12700">
+            <a:solidFill>
+              <a:srgbClr val="132257"/>
+            </a:solidFill>
+            <a:prstDash val="solid"/>
+          </a:ln>
+        </p:spPr>
+      </p:sp>
+      <p:sp>
+        <p:nvSpPr>
+          <p:cNvPr id="51" name="Text 45"/>
+          <p:cNvSpPr txBox="1"/>
+          <p:nvPr/>
+        </p:nvSpPr>
+        <p:spPr>
+          <a:xfrm>
+            <a:off x="2459736" y="5084064"/>
+            <a:ext cx="548640" cy="219456"/>
+          </a:xfrm>
+          <a:prstGeom prst="rect">
+            <a:avLst/>
+          </a:prstGeom>
+          <a:noFill/>
+          <a:ln/>
+        </p:spPr>
+        <p:txBody>
+          <a:bodyPr wrap="square" lIns="0" tIns="0" rIns="0" bIns="0" rtlCol="0" anchor="t"/>
+          <a:lstStyle/>
+          <a:p>
+            <a:pPr algn="ctr" indent="0" marL="0">
+              <a:buNone/>
+            </a:pPr>
+            <a:r>
+              <a:rPr lang="en-US" sz="850" dirty="0">
+                <a:solidFill>
+                  <a:srgbClr val="7A849C"/>
+                </a:solidFill>
+                <a:latin typeface="Exo 2" pitchFamily="34" charset="0"/>
+                <a:ea typeface="Exo 2" pitchFamily="34" charset="-122"/>
+                <a:cs typeface="Exo 2" pitchFamily="34" charset="-120"/>
+              </a:rPr>
+              <a:t>9</a:t>
+            </a:r>
+            <a:endParaRPr lang="en-US" sz="850" dirty="0"/>
+          </a:p>
+        </p:txBody>
+      </p:sp>
+      <p:sp>
+        <p:nvSpPr>
+          <p:cNvPr id="52" name="Shape 46"/>
+          <p:cNvSpPr/>
+          <p:nvPr/>
+        </p:nvSpPr>
+        <p:spPr>
+          <a:xfrm>
+            <a:off x="3081528" y="3605022"/>
+            <a:ext cx="91440" cy="91440"/>
+          </a:xfrm>
+          <a:prstGeom prst="ellipse">
+            <a:avLst/>
+          </a:prstGeom>
+          <a:solidFill>
+            <a:srgbClr val="132257"/>
+          </a:solidFill>
+          <a:ln w="12700">
+            <a:solidFill>
+              <a:srgbClr val="132257"/>
+            </a:solidFill>
+            <a:prstDash val="solid"/>
+          </a:ln>
+        </p:spPr>
+      </p:sp>
+      <p:sp>
+        <p:nvSpPr>
+          <p:cNvPr id="53" name="Text 47"/>
+          <p:cNvSpPr txBox="1"/>
+          <p:nvPr/>
+        </p:nvSpPr>
+        <p:spPr>
+          <a:xfrm>
+            <a:off x="2852928" y="5084064"/>
+            <a:ext cx="548640" cy="219456"/>
+          </a:xfrm>
+          <a:prstGeom prst="rect">
+            <a:avLst/>
+          </a:prstGeom>
+          <a:noFill/>
+          <a:ln/>
+        </p:spPr>
+        <p:txBody>
+          <a:bodyPr wrap="square" lIns="0" tIns="0" rIns="0" bIns="0" rtlCol="0" anchor="t"/>
+          <a:lstStyle/>
+          <a:p>
+            <a:pPr algn="ctr" indent="0" marL="0">
+              <a:buNone/>
+            </a:pPr>
+            <a:r>
+              <a:rPr lang="en-US" sz="850" dirty="0">
+                <a:solidFill>
+                  <a:srgbClr val="7A849C"/>
+                </a:solidFill>
+                <a:latin typeface="Exo 2" pitchFamily="34" charset="0"/>
+                <a:ea typeface="Exo 2" pitchFamily="34" charset="-122"/>
+                <a:cs typeface="Exo 2" pitchFamily="34" charset="-120"/>
+              </a:rPr>
+              <a:t>10</a:t>
+            </a:r>
+            <a:endParaRPr lang="en-US" sz="850" dirty="0"/>
+          </a:p>
+        </p:txBody>
+      </p:sp>
+      <p:sp>
+        <p:nvSpPr>
+          <p:cNvPr id="54" name="Shape 48"/>
+          <p:cNvSpPr/>
+          <p:nvPr/>
+        </p:nvSpPr>
+        <p:spPr>
+          <a:xfrm>
+            <a:off x="3474720" y="3477387"/>
+            <a:ext cx="91440" cy="91440"/>
+          </a:xfrm>
+          <a:prstGeom prst="ellipse">
+            <a:avLst/>
+          </a:prstGeom>
+          <a:solidFill>
+            <a:srgbClr val="132257"/>
+          </a:solidFill>
+          <a:ln w="12700">
+            <a:solidFill>
+              <a:srgbClr val="132257"/>
+            </a:solidFill>
+            <a:prstDash val="solid"/>
+          </a:ln>
+        </p:spPr>
+      </p:sp>
+      <p:sp>
+        <p:nvSpPr>
+          <p:cNvPr id="55" name="Text 49"/>
+          <p:cNvSpPr txBox="1"/>
+          <p:nvPr/>
+        </p:nvSpPr>
+        <p:spPr>
+          <a:xfrm>
+            <a:off x="3246120" y="5084064"/>
+            <a:ext cx="548640" cy="219456"/>
+          </a:xfrm>
+          <a:prstGeom prst="rect">
+            <a:avLst/>
+          </a:prstGeom>
+          <a:noFill/>
+          <a:ln/>
+        </p:spPr>
+        <p:txBody>
+          <a:bodyPr wrap="square" lIns="0" tIns="0" rIns="0" bIns="0" rtlCol="0" anchor="t"/>
+          <a:lstStyle/>
+          <a:p>
+            <a:pPr algn="ctr" indent="0" marL="0">
+              <a:buNone/>
+            </a:pPr>
+            <a:r>
+              <a:rPr lang="en-US" sz="850" dirty="0">
+                <a:solidFill>
+                  <a:srgbClr val="7A849C"/>
+                </a:solidFill>
+                <a:latin typeface="Exo 2" pitchFamily="34" charset="0"/>
+                <a:ea typeface="Exo 2" pitchFamily="34" charset="-122"/>
+                <a:cs typeface="Exo 2" pitchFamily="34" charset="-120"/>
+              </a:rPr>
+              <a:t>13</a:t>
+            </a:r>
+            <a:endParaRPr lang="en-US" sz="850" dirty="0"/>
+          </a:p>
+        </p:txBody>
+      </p:sp>
+      <p:sp>
+        <p:nvSpPr>
+          <p:cNvPr id="56" name="Shape 50"/>
+          <p:cNvSpPr/>
+          <p:nvPr/>
+        </p:nvSpPr>
+        <p:spPr>
+          <a:xfrm>
+            <a:off x="3867912" y="3375279"/>
+            <a:ext cx="91440" cy="91440"/>
+          </a:xfrm>
+          <a:prstGeom prst="ellipse">
+            <a:avLst/>
+          </a:prstGeom>
+          <a:solidFill>
+            <a:srgbClr val="132257"/>
+          </a:solidFill>
+          <a:ln w="12700">
+            <a:solidFill>
+              <a:srgbClr val="132257"/>
+            </a:solidFill>
+            <a:prstDash val="solid"/>
+          </a:ln>
+        </p:spPr>
+      </p:sp>
+      <p:sp>
+        <p:nvSpPr>
+          <p:cNvPr id="57" name="Text 51"/>
+          <p:cNvSpPr txBox="1"/>
+          <p:nvPr/>
+        </p:nvSpPr>
+        <p:spPr>
+          <a:xfrm>
+            <a:off x="3639312" y="5084064"/>
+            <a:ext cx="548640" cy="219456"/>
+          </a:xfrm>
+          <a:prstGeom prst="rect">
+            <a:avLst/>
+          </a:prstGeom>
+          <a:noFill/>
+          <a:ln/>
+        </p:spPr>
+        <p:txBody>
+          <a:bodyPr wrap="square" lIns="0" tIns="0" rIns="0" bIns="0" rtlCol="0" anchor="t"/>
+          <a:lstStyle/>
+          <a:p>
+            <a:pPr algn="ctr" indent="0" marL="0">
+              <a:buNone/>
+            </a:pPr>
+            <a:r>
+              <a:rPr lang="en-US" sz="850" dirty="0">
+                <a:solidFill>
+                  <a:srgbClr val="7A849C"/>
+                </a:solidFill>
+                <a:latin typeface="Exo 2" pitchFamily="34" charset="0"/>
+                <a:ea typeface="Exo 2" pitchFamily="34" charset="-122"/>
+                <a:cs typeface="Exo 2" pitchFamily="34" charset="-120"/>
+              </a:rPr>
+              <a:t>14</a:t>
+            </a:r>
+            <a:endParaRPr lang="en-US" sz="850" dirty="0"/>
+          </a:p>
+        </p:txBody>
+      </p:sp>
+      <p:sp>
+        <p:nvSpPr>
+          <p:cNvPr id="58" name="Shape 52"/>
+          <p:cNvSpPr/>
+          <p:nvPr/>
+        </p:nvSpPr>
+        <p:spPr>
+          <a:xfrm>
+            <a:off x="4261104" y="3196590"/>
+            <a:ext cx="91440" cy="91440"/>
+          </a:xfrm>
+          <a:prstGeom prst="ellipse">
+            <a:avLst/>
+          </a:prstGeom>
+          <a:solidFill>
+            <a:srgbClr val="132257"/>
+          </a:solidFill>
+          <a:ln w="12700">
+            <a:solidFill>
+              <a:srgbClr val="132257"/>
+            </a:solidFill>
+            <a:prstDash val="solid"/>
+          </a:ln>
+        </p:spPr>
+      </p:sp>
+      <p:sp>
+        <p:nvSpPr>
+          <p:cNvPr id="59" name="Text 53"/>
+          <p:cNvSpPr txBox="1"/>
+          <p:nvPr/>
+        </p:nvSpPr>
+        <p:spPr>
+          <a:xfrm>
+            <a:off x="4032504" y="5084064"/>
+            <a:ext cx="548640" cy="219456"/>
+          </a:xfrm>
+          <a:prstGeom prst="rect">
+            <a:avLst/>
+          </a:prstGeom>
+          <a:noFill/>
+          <a:ln/>
+        </p:spPr>
+        <p:txBody>
+          <a:bodyPr wrap="square" lIns="0" tIns="0" rIns="0" bIns="0" rtlCol="0" anchor="t"/>
+          <a:lstStyle/>
+          <a:p>
+            <a:pPr algn="ctr" indent="0" marL="0">
+              <a:buNone/>
+            </a:pPr>
+            <a:r>
+              <a:rPr lang="en-US" sz="850" dirty="0">
+                <a:solidFill>
+                  <a:srgbClr val="7A849C"/>
+                </a:solidFill>
+                <a:latin typeface="Exo 2" pitchFamily="34" charset="0"/>
+                <a:ea typeface="Exo 2" pitchFamily="34" charset="-122"/>
+                <a:cs typeface="Exo 2" pitchFamily="34" charset="-120"/>
+              </a:rPr>
+              <a:t>16</a:t>
+            </a:r>
+            <a:endParaRPr lang="en-US" sz="850" dirty="0"/>
+          </a:p>
+        </p:txBody>
+      </p:sp>
+      <p:sp>
+        <p:nvSpPr>
+          <p:cNvPr id="60" name="Shape 54"/>
+          <p:cNvSpPr/>
+          <p:nvPr/>
+        </p:nvSpPr>
+        <p:spPr>
+          <a:xfrm>
+            <a:off x="4654296" y="3145536"/>
+            <a:ext cx="91440" cy="91440"/>
+          </a:xfrm>
+          <a:prstGeom prst="ellipse">
+            <a:avLst/>
+          </a:prstGeom>
+          <a:solidFill>
+            <a:srgbClr val="132257"/>
+          </a:solidFill>
+          <a:ln w="12700">
+            <a:solidFill>
+              <a:srgbClr val="132257"/>
+            </a:solidFill>
+            <a:prstDash val="solid"/>
+          </a:ln>
+        </p:spPr>
+      </p:sp>
+      <p:sp>
+        <p:nvSpPr>
+          <p:cNvPr id="61" name="Text 55"/>
+          <p:cNvSpPr txBox="1"/>
+          <p:nvPr/>
+        </p:nvSpPr>
+        <p:spPr>
+          <a:xfrm>
+            <a:off x="4425696" y="5084064"/>
+            <a:ext cx="548640" cy="219456"/>
+          </a:xfrm>
+          <a:prstGeom prst="rect">
+            <a:avLst/>
+          </a:prstGeom>
+          <a:noFill/>
+          <a:ln/>
+        </p:spPr>
+        <p:txBody>
+          <a:bodyPr wrap="square" lIns="0" tIns="0" rIns="0" bIns="0" rtlCol="0" anchor="t"/>
+          <a:lstStyle/>
+          <a:p>
+            <a:pPr algn="ctr" indent="0" marL="0">
+              <a:buNone/>
+            </a:pPr>
+            <a:r>
+              <a:rPr lang="en-US" sz="850" dirty="0">
+                <a:solidFill>
+                  <a:srgbClr val="7A849C"/>
+                </a:solidFill>
+                <a:latin typeface="Exo 2" pitchFamily="34" charset="0"/>
+                <a:ea typeface="Exo 2" pitchFamily="34" charset="-122"/>
+                <a:cs typeface="Exo 2" pitchFamily="34" charset="-120"/>
+              </a:rPr>
+              <a:t>17</a:t>
+            </a:r>
+            <a:endParaRPr lang="en-US" sz="850" dirty="0"/>
+          </a:p>
+        </p:txBody>
+      </p:sp>
+      <p:sp>
+        <p:nvSpPr>
+          <p:cNvPr id="62" name="Shape 56"/>
+          <p:cNvSpPr/>
+          <p:nvPr/>
+        </p:nvSpPr>
+        <p:spPr>
+          <a:xfrm>
+            <a:off x="5047488" y="3017901"/>
+            <a:ext cx="91440" cy="91440"/>
+          </a:xfrm>
+          <a:prstGeom prst="ellipse">
+            <a:avLst/>
+          </a:prstGeom>
+          <a:solidFill>
+            <a:srgbClr val="132257"/>
+          </a:solidFill>
+          <a:ln w="12700">
+            <a:solidFill>
+              <a:srgbClr val="132257"/>
+            </a:solidFill>
+            <a:prstDash val="solid"/>
+          </a:ln>
+        </p:spPr>
+      </p:sp>
+      <p:sp>
+        <p:nvSpPr>
+          <p:cNvPr id="63" name="Text 57"/>
+          <p:cNvSpPr txBox="1"/>
+          <p:nvPr/>
+        </p:nvSpPr>
+        <p:spPr>
+          <a:xfrm>
+            <a:off x="4818888" y="5084064"/>
+            <a:ext cx="548640" cy="219456"/>
+          </a:xfrm>
+          <a:prstGeom prst="rect">
+            <a:avLst/>
+          </a:prstGeom>
+          <a:noFill/>
+          <a:ln/>
+        </p:spPr>
+        <p:txBody>
+          <a:bodyPr wrap="square" lIns="0" tIns="0" rIns="0" bIns="0" rtlCol="0" anchor="t"/>
+          <a:lstStyle/>
+          <a:p>
+            <a:pPr algn="ctr" indent="0" marL="0">
+              <a:buNone/>
+            </a:pPr>
+            <a:r>
+              <a:rPr lang="en-US" sz="850" dirty="0">
+                <a:solidFill>
+                  <a:srgbClr val="7A849C"/>
+                </a:solidFill>
+                <a:latin typeface="Exo 2" pitchFamily="34" charset="0"/>
+                <a:ea typeface="Exo 2" pitchFamily="34" charset="-122"/>
+                <a:cs typeface="Exo 2" pitchFamily="34" charset="-120"/>
+              </a:rPr>
+              <a:t>20</a:t>
+            </a:r>
+            <a:endParaRPr lang="en-US" sz="850" dirty="0"/>
+          </a:p>
+        </p:txBody>
+      </p:sp>
+      <p:sp>
+        <p:nvSpPr>
+          <p:cNvPr id="64" name="Shape 58"/>
+          <p:cNvSpPr/>
+          <p:nvPr/>
+        </p:nvSpPr>
+        <p:spPr>
+          <a:xfrm>
+            <a:off x="5440680" y="3017901"/>
+            <a:ext cx="91440" cy="91440"/>
+          </a:xfrm>
+          <a:prstGeom prst="ellipse">
+            <a:avLst/>
+          </a:prstGeom>
+          <a:solidFill>
+            <a:srgbClr val="132257"/>
+          </a:solidFill>
+          <a:ln w="12700">
+            <a:solidFill>
+              <a:srgbClr val="132257"/>
+            </a:solidFill>
+            <a:prstDash val="solid"/>
+          </a:ln>
+        </p:spPr>
+      </p:sp>
+      <p:sp>
+        <p:nvSpPr>
+          <p:cNvPr id="65" name="Text 59"/>
+          <p:cNvSpPr txBox="1"/>
+          <p:nvPr/>
+        </p:nvSpPr>
+        <p:spPr>
+          <a:xfrm>
+            <a:off x="5212080" y="5084064"/>
+            <a:ext cx="548640" cy="219456"/>
+          </a:xfrm>
+          <a:prstGeom prst="rect">
+            <a:avLst/>
+          </a:prstGeom>
+          <a:noFill/>
+          <a:ln/>
+        </p:spPr>
+        <p:txBody>
+          <a:bodyPr wrap="square" lIns="0" tIns="0" rIns="0" bIns="0" rtlCol="0" anchor="t"/>
+          <a:lstStyle/>
+          <a:p>
+            <a:pPr algn="ctr" indent="0" marL="0">
+              <a:buNone/>
+            </a:pPr>
+            <a:r>
+              <a:rPr lang="en-US" sz="850" dirty="0">
+                <a:solidFill>
+                  <a:srgbClr val="7A849C"/>
+                </a:solidFill>
+                <a:latin typeface="Exo 2" pitchFamily="34" charset="0"/>
+                <a:ea typeface="Exo 2" pitchFamily="34" charset="-122"/>
+                <a:cs typeface="Exo 2" pitchFamily="34" charset="-120"/>
+              </a:rPr>
+              <a:t>21</a:t>
+            </a:r>
+            <a:endParaRPr lang="en-US" sz="850" dirty="0"/>
+          </a:p>
+        </p:txBody>
+      </p:sp>
+      <p:sp>
+        <p:nvSpPr>
+          <p:cNvPr id="66" name="Shape 60"/>
+          <p:cNvSpPr/>
+          <p:nvPr/>
+        </p:nvSpPr>
+        <p:spPr>
+          <a:xfrm>
+            <a:off x="5833872" y="2634996"/>
+            <a:ext cx="91440" cy="91440"/>
+          </a:xfrm>
+          <a:prstGeom prst="ellipse">
+            <a:avLst/>
+          </a:prstGeom>
+          <a:solidFill>
+            <a:srgbClr val="132257"/>
+          </a:solidFill>
+          <a:ln w="12700">
+            <a:solidFill>
+              <a:srgbClr val="132257"/>
+            </a:solidFill>
+            <a:prstDash val="solid"/>
+          </a:ln>
+        </p:spPr>
+      </p:sp>
+      <p:sp>
+        <p:nvSpPr>
+          <p:cNvPr id="67" name="Text 61"/>
+          <p:cNvSpPr txBox="1"/>
+          <p:nvPr/>
+        </p:nvSpPr>
+        <p:spPr>
+          <a:xfrm>
+            <a:off x="5605272" y="5084064"/>
+            <a:ext cx="548640" cy="219456"/>
+          </a:xfrm>
+          <a:prstGeom prst="rect">
+            <a:avLst/>
+          </a:prstGeom>
+          <a:noFill/>
+          <a:ln/>
+        </p:spPr>
+        <p:txBody>
+          <a:bodyPr wrap="square" lIns="0" tIns="0" rIns="0" bIns="0" rtlCol="0" anchor="t"/>
+          <a:lstStyle/>
+          <a:p>
+            <a:pPr algn="ctr" indent="0" marL="0">
+              <a:buNone/>
+            </a:pPr>
+            <a:r>
+              <a:rPr lang="en-US" sz="850" b="1" dirty="0">
+                <a:solidFill>
+                  <a:srgbClr val="9A7B1F"/>
+                </a:solidFill>
+                <a:latin typeface="Exo 2" pitchFamily="34" charset="0"/>
+                <a:ea typeface="Exo 2" pitchFamily="34" charset="-122"/>
+                <a:cs typeface="Exo 2" pitchFamily="34" charset="-120"/>
+              </a:rPr>
+              <a:t>22 Sep</a:t>
+            </a:r>
+            <a:endParaRPr lang="en-US" sz="850" dirty="0"/>
+          </a:p>
+        </p:txBody>
+      </p:sp>
+      <p:sp>
+        <p:nvSpPr>
+          <p:cNvPr id="68" name="Shape 62"/>
+          <p:cNvSpPr/>
+          <p:nvPr/>
+        </p:nvSpPr>
+        <p:spPr>
+          <a:xfrm>
+            <a:off x="6227064" y="2583942"/>
+            <a:ext cx="91440" cy="91440"/>
+          </a:xfrm>
+          <a:prstGeom prst="ellipse">
+            <a:avLst/>
+          </a:prstGeom>
+          <a:solidFill>
+            <a:srgbClr val="132257"/>
+          </a:solidFill>
+          <a:ln w="12700">
+            <a:solidFill>
+              <a:srgbClr val="132257"/>
+            </a:solidFill>
+            <a:prstDash val="solid"/>
+          </a:ln>
+        </p:spPr>
+      </p:sp>
+      <p:sp>
+        <p:nvSpPr>
+          <p:cNvPr id="69" name="Text 63"/>
+          <p:cNvSpPr txBox="1"/>
+          <p:nvPr/>
+        </p:nvSpPr>
+        <p:spPr>
+          <a:xfrm>
+            <a:off x="5998464" y="5084064"/>
+            <a:ext cx="548640" cy="219456"/>
+          </a:xfrm>
+          <a:prstGeom prst="rect">
+            <a:avLst/>
+          </a:prstGeom>
+          <a:noFill/>
+          <a:ln/>
+        </p:spPr>
+        <p:txBody>
+          <a:bodyPr wrap="square" lIns="0" tIns="0" rIns="0" bIns="0" rtlCol="0" anchor="t"/>
+          <a:lstStyle/>
+          <a:p>
+            <a:pPr algn="ctr" indent="0" marL="0">
+              <a:buNone/>
+            </a:pPr>
+            <a:r>
+              <a:rPr lang="en-US" sz="850" dirty="0">
+                <a:solidFill>
+                  <a:srgbClr val="7A849C"/>
+                </a:solidFill>
+                <a:latin typeface="Exo 2" pitchFamily="34" charset="0"/>
+                <a:ea typeface="Exo 2" pitchFamily="34" charset="-122"/>
+                <a:cs typeface="Exo 2" pitchFamily="34" charset="-120"/>
+              </a:rPr>
+              <a:t>23</a:t>
+            </a:r>
+            <a:endParaRPr lang="en-US" sz="850" dirty="0"/>
+          </a:p>
+        </p:txBody>
+      </p:sp>
+      <p:sp>
+        <p:nvSpPr>
+          <p:cNvPr id="70" name="Shape 64"/>
+          <p:cNvSpPr/>
+          <p:nvPr/>
+        </p:nvSpPr>
+        <p:spPr>
+          <a:xfrm>
+            <a:off x="6620256" y="2558415"/>
+            <a:ext cx="91440" cy="91440"/>
+          </a:xfrm>
+          <a:prstGeom prst="ellipse">
+            <a:avLst/>
+          </a:prstGeom>
+          <a:solidFill>
+            <a:srgbClr val="132257"/>
+          </a:solidFill>
+          <a:ln w="12700">
+            <a:solidFill>
+              <a:srgbClr val="132257"/>
+            </a:solidFill>
+            <a:prstDash val="solid"/>
+          </a:ln>
+        </p:spPr>
+      </p:sp>
+      <p:sp>
+        <p:nvSpPr>
+          <p:cNvPr id="71" name="Text 65"/>
+          <p:cNvSpPr txBox="1"/>
+          <p:nvPr/>
+        </p:nvSpPr>
+        <p:spPr>
+          <a:xfrm>
+            <a:off x="6391656" y="5084064"/>
+            <a:ext cx="548640" cy="219456"/>
+          </a:xfrm>
+          <a:prstGeom prst="rect">
+            <a:avLst/>
+          </a:prstGeom>
+          <a:noFill/>
+          <a:ln/>
+        </p:spPr>
+        <p:txBody>
+          <a:bodyPr wrap="square" lIns="0" tIns="0" rIns="0" bIns="0" rtlCol="0" anchor="t"/>
+          <a:lstStyle/>
+          <a:p>
+            <a:pPr algn="ctr" indent="0" marL="0">
+              <a:buNone/>
+            </a:pPr>
+            <a:r>
+              <a:rPr lang="en-US" sz="850" dirty="0">
+                <a:solidFill>
+                  <a:srgbClr val="7A849C"/>
+                </a:solidFill>
+                <a:latin typeface="Exo 2" pitchFamily="34" charset="0"/>
+                <a:ea typeface="Exo 2" pitchFamily="34" charset="-122"/>
+                <a:cs typeface="Exo 2" pitchFamily="34" charset="-120"/>
+              </a:rPr>
+              <a:t>24</a:t>
+            </a:r>
+            <a:endParaRPr lang="en-US" sz="850" dirty="0"/>
+          </a:p>
+        </p:txBody>
+      </p:sp>
+      <p:sp>
+        <p:nvSpPr>
+          <p:cNvPr id="72" name="Shape 66"/>
+          <p:cNvSpPr/>
+          <p:nvPr/>
+        </p:nvSpPr>
+        <p:spPr>
+          <a:xfrm>
+            <a:off x="7013448" y="2098929"/>
+            <a:ext cx="91440" cy="91440"/>
+          </a:xfrm>
+          <a:prstGeom prst="ellipse">
+            <a:avLst/>
+          </a:prstGeom>
+          <a:solidFill>
+            <a:srgbClr val="132257"/>
+          </a:solidFill>
+          <a:ln w="12700">
+            <a:solidFill>
+              <a:srgbClr val="132257"/>
+            </a:solidFill>
+            <a:prstDash val="solid"/>
+          </a:ln>
+        </p:spPr>
+      </p:sp>
+      <p:sp>
+        <p:nvSpPr>
+          <p:cNvPr id="73" name="Text 67"/>
+          <p:cNvSpPr txBox="1"/>
+          <p:nvPr/>
+        </p:nvSpPr>
+        <p:spPr>
+          <a:xfrm>
+            <a:off x="6784848" y="5084064"/>
+            <a:ext cx="548640" cy="219456"/>
+          </a:xfrm>
+          <a:prstGeom prst="rect">
+            <a:avLst/>
+          </a:prstGeom>
+          <a:noFill/>
+          <a:ln/>
+        </p:spPr>
+        <p:txBody>
+          <a:bodyPr wrap="square" lIns="0" tIns="0" rIns="0" bIns="0" rtlCol="0" anchor="t"/>
+          <a:lstStyle/>
+          <a:p>
+            <a:pPr algn="ctr" indent="0" marL="0">
+              <a:buNone/>
+            </a:pPr>
+            <a:r>
+              <a:rPr lang="en-US" sz="850" dirty="0">
+                <a:solidFill>
+                  <a:srgbClr val="7A849C"/>
+                </a:solidFill>
+                <a:latin typeface="Exo 2" pitchFamily="34" charset="0"/>
+                <a:ea typeface="Exo 2" pitchFamily="34" charset="-122"/>
+                <a:cs typeface="Exo 2" pitchFamily="34" charset="-120"/>
+              </a:rPr>
+              <a:t>27 Sep</a:t>
+            </a:r>
+            <a:endParaRPr lang="en-US" sz="850" dirty="0"/>
+          </a:p>
+        </p:txBody>
+      </p:sp>
+      <p:sp>
+        <p:nvSpPr>
+          <p:cNvPr id="74" name="Text 68"/>
+          <p:cNvSpPr txBox="1"/>
+          <p:nvPr/>
+        </p:nvSpPr>
+        <p:spPr>
+          <a:xfrm>
+            <a:off x="5422392" y="5285232"/>
+            <a:ext cx="914400" cy="201168"/>
+          </a:xfrm>
+          <a:prstGeom prst="rect">
+            <a:avLst/>
+          </a:prstGeom>
+          <a:noFill/>
+          <a:ln/>
+        </p:spPr>
+        <p:txBody>
+          <a:bodyPr wrap="square" lIns="0" tIns="0" rIns="0" bIns="0" rtlCol="0" anchor="t"/>
+          <a:lstStyle/>
+          <a:p>
+            <a:pPr algn="ctr" indent="0" marL="0">
+              <a:buNone/>
+            </a:pPr>
+            <a:r>
+              <a:rPr lang="en-US" sz="850" b="1" dirty="0">
+                <a:solidFill>
+                  <a:srgbClr val="9A7B1F"/>
+                </a:solidFill>
+                <a:latin typeface="Exo 2" pitchFamily="34" charset="0"/>
+                <a:ea typeface="Exo 2" pitchFamily="34" charset="-122"/>
+                <a:cs typeface="Exo 2" pitchFamily="34" charset="-120"/>
+              </a:rPr>
+              <a:t>Ads live</a:t>
+            </a:r>
+            <a:endParaRPr lang="en-US" sz="850" dirty="0"/>
+          </a:p>
+        </p:txBody>
+      </p:sp>
+      <p:sp>
+        <p:nvSpPr>
+          <p:cNvPr id="75" name="Text 69"/>
+          <p:cNvSpPr txBox="1"/>
+          <p:nvPr/>
+        </p:nvSpPr>
+        <p:spPr>
+          <a:xfrm>
+            <a:off x="6035040" y="3154680"/>
+            <a:ext cx="1234440" cy="640080"/>
+          </a:xfrm>
+          <a:prstGeom prst="rect">
+            <a:avLst/>
+          </a:prstGeom>
+          <a:noFill/>
+          <a:ln/>
+        </p:spPr>
+        <p:txBody>
+          <a:bodyPr wrap="square" lIns="0" tIns="0" rIns="0" bIns="0" rtlCol="0" anchor="t"/>
+          <a:lstStyle/>
+          <a:p>
             <a:pPr indent="0" marL="0">
               <a:buNone/>
             </a:pPr>
@@ -6549,7 +7971,7 @@
       </p:sp>
       <p:sp>
         <p:nvSpPr>
-          <p:cNvPr id="17" name="Text 10"/>
+          <p:cNvPr id="76" name="Text 70"/>
           <p:cNvSpPr txBox="1"/>
           <p:nvPr/>
         </p:nvSpPr>
@@ -6605,7 +8027,7 @@
       </p:sp>
       <p:sp>
         <p:nvSpPr>
-          <p:cNvPr id="18" name="Text 11"/>
+          <p:cNvPr id="77" name="Text 71"/>
           <p:cNvSpPr txBox="1"/>
           <p:nvPr/>
         </p:nvSpPr>
@@ -6644,7 +8066,7 @@
       </p:sp>
       <p:sp>
         <p:nvSpPr>
-          <p:cNvPr id="19" name="Shape 12"/>
+          <p:cNvPr id="78" name="Shape 72"/>
           <p:cNvSpPr/>
           <p:nvPr/>
         </p:nvSpPr>
@@ -6669,7 +8091,7 @@
       </p:sp>
       <p:sp>
         <p:nvSpPr>
-          <p:cNvPr id="20" name="Text 13"/>
+          <p:cNvPr id="79" name="Text 73"/>
           <p:cNvSpPr txBox="1"/>
           <p:nvPr/>
         </p:nvSpPr>
@@ -6708,7 +8130,7 @@
       </p:sp>
       <p:sp>
         <p:nvSpPr>
-          <p:cNvPr id="21" name="Text 14"/>
+          <p:cNvPr id="80" name="Text 74"/>
           <p:cNvSpPr txBox="1"/>
           <p:nvPr/>
         </p:nvSpPr>
@@ -6764,7 +8186,7 @@
       </p:sp>
       <p:sp>
         <p:nvSpPr>
-          <p:cNvPr id="22" name="Shape 15"/>
+          <p:cNvPr id="81" name="Shape 75"/>
           <p:cNvSpPr/>
           <p:nvPr/>
         </p:nvSpPr>
@@ -6789,7 +8211,7 @@
       </p:sp>
       <p:sp>
         <p:nvSpPr>
-          <p:cNvPr id="23" name="Text 16"/>
+          <p:cNvPr id="82" name="Text 76"/>
           <p:cNvSpPr txBox="1"/>
           <p:nvPr/>
         </p:nvSpPr>
@@ -6828,7 +8250,7 @@
       </p:sp>
       <p:sp>
         <p:nvSpPr>
-          <p:cNvPr id="24" name="Text 17"/>
+          <p:cNvPr id="83" name="Text 77"/>
           <p:cNvSpPr txBox="1"/>
           <p:nvPr/>
         </p:nvSpPr>
@@ -6884,7 +8306,7 @@
       </p:sp>
       <p:sp>
         <p:nvSpPr>
-          <p:cNvPr id="25" name="Shape 18"/>
+          <p:cNvPr id="84" name="Shape 78"/>
           <p:cNvSpPr/>
           <p:nvPr/>
         </p:nvSpPr>
@@ -6909,7 +8331,7 @@
       </p:sp>
       <p:sp>
         <p:nvSpPr>
-          <p:cNvPr id="26" name="Text 19"/>
+          <p:cNvPr id="85" name="Text 79"/>
           <p:cNvSpPr txBox="1"/>
           <p:nvPr/>
         </p:nvSpPr>
@@ -6948,7 +8370,7 @@
       </p:sp>
       <p:sp>
         <p:nvSpPr>
-          <p:cNvPr id="27" name="Text 20"/>
+          <p:cNvPr id="86" name="Text 80"/>
           <p:cNvSpPr txBox="1"/>
           <p:nvPr/>
         </p:nvSpPr>
@@ -7004,7 +8426,7 @@
       </p:sp>
       <p:sp>
         <p:nvSpPr>
-          <p:cNvPr id="28" name="Shape 21"/>
+          <p:cNvPr id="87" name="Shape 81"/>
           <p:cNvSpPr/>
           <p:nvPr/>
         </p:nvSpPr>
@@ -7029,7 +8451,7 @@
       </p:sp>
       <p:sp>
         <p:nvSpPr>
-          <p:cNvPr id="29" name="Text 22"/>
+          <p:cNvPr id="88" name="Text 82"/>
           <p:cNvSpPr txBox="1"/>
           <p:nvPr/>
         </p:nvSpPr>
@@ -7068,7 +8490,7 @@
       </p:sp>
       <p:sp>
         <p:nvSpPr>
-          <p:cNvPr id="30" name="Text 23"/>
+          <p:cNvPr id="89" name="Text 83"/>
           <p:cNvSpPr txBox="1"/>
           <p:nvPr/>
         </p:nvSpPr>
@@ -7124,7 +8546,7 @@
       </p:sp>
       <p:sp>
         <p:nvSpPr>
-          <p:cNvPr id="31" name="Shape 24"/>
+          <p:cNvPr id="90" name="Shape 84"/>
           <p:cNvSpPr/>
           <p:nvPr/>
         </p:nvSpPr>
@@ -7147,7 +8569,7 @@
       </p:sp>
       <p:sp>
         <p:nvSpPr>
-          <p:cNvPr id="32" name="Text 25"/>
+          <p:cNvPr id="91" name="Text 85"/>
           <p:cNvSpPr txBox="1"/>
           <p:nvPr/>
         </p:nvSpPr>
@@ -8413,22 +9835,1123 @@
           </a:p>
         </p:txBody>
       </p:sp>
-      <p:graphicFrame>
-        <p:nvGraphicFramePr>
-          <p:cNvPr id="37" name="Chart 0" descr=""/>
-          <p:cNvGraphicFramePr/>
-          <p:nvPr/>
-        </p:nvGraphicFramePr>
-        <p:xfrm>
-          <a:off x="5074920" y="1508760"/>
-          <a:ext cx="6556248" cy="4069080"/>
-        </p:xfrm>
-        <a:graphic xmlns:a="http://schemas.openxmlformats.org/drawingml/2006/main">
-          <a:graphicData uri="http://schemas.openxmlformats.org/drawingml/2006/chart">
-            <c:chart xmlns:c="http://schemas.openxmlformats.org/drawingml/2006/chart" r:id="rId4"/>
-          </a:graphicData>
-        </a:graphic>
-      </p:graphicFrame>
+      <p:sp>
+        <p:nvSpPr>
+          <p:cNvPr id="37" name="Text 31"/>
+          <p:cNvSpPr txBox="1"/>
+          <p:nvPr/>
+        </p:nvSpPr>
+        <p:spPr>
+          <a:xfrm>
+            <a:off x="5074920" y="1508760"/>
+            <a:ext cx="6556248" cy="274320"/>
+          </a:xfrm>
+          <a:prstGeom prst="rect">
+            <a:avLst/>
+          </a:prstGeom>
+          <a:noFill/>
+          <a:ln/>
+        </p:spPr>
+        <p:txBody>
+          <a:bodyPr wrap="square" lIns="0" tIns="0" rIns="0" bIns="0" rtlCol="0" anchor="t"/>
+          <a:lstStyle/>
+          <a:p>
+            <a:pPr algn="ctr" indent="0" marL="0">
+              <a:buNone/>
+            </a:pPr>
+            <a:r>
+              <a:rPr lang="en-US" sz="1100" dirty="0">
+                <a:solidFill>
+                  <a:srgbClr val="132257"/>
+                </a:solidFill>
+                <a:latin typeface="Exo 2" pitchFamily="34" charset="0"/>
+                <a:ea typeface="Exo 2" pitchFamily="34" charset="-122"/>
+                <a:cs typeface="Exo 2" pitchFamily="34" charset="-120"/>
+              </a:rPr>
+              <a:t>English relative to Arabic, % difference, 1-28 Sep</a:t>
+            </a:r>
+            <a:endParaRPr lang="en-US" sz="1100" dirty="0"/>
+          </a:p>
+        </p:txBody>
+      </p:sp>
+      <p:sp>
+        <p:nvSpPr>
+          <p:cNvPr id="38" name="Shape 32"/>
+          <p:cNvSpPr/>
+          <p:nvPr/>
+        </p:nvSpPr>
+        <p:spPr>
+          <a:xfrm>
+            <a:off x="8185709" y="1874520"/>
+            <a:ext cx="0" cy="3291840"/>
+          </a:xfrm>
+          <a:prstGeom prst="line">
+            <a:avLst/>
+          </a:prstGeom>
+          <a:noFill/>
+          <a:ln w="12700">
+            <a:solidFill>
+              <a:srgbClr val="C6CFE4"/>
+            </a:solidFill>
+            <a:prstDash val="solid"/>
+          </a:ln>
+        </p:spPr>
+      </p:sp>
+      <p:sp>
+        <p:nvSpPr>
+          <p:cNvPr id="39" name="Text 33"/>
+          <p:cNvSpPr txBox="1"/>
+          <p:nvPr/>
+        </p:nvSpPr>
+        <p:spPr>
+          <a:xfrm>
+            <a:off x="5074920" y="1920240"/>
+            <a:ext cx="1783080" cy="360680"/>
+          </a:xfrm>
+          <a:prstGeom prst="rect">
+            <a:avLst/>
+          </a:prstGeom>
+          <a:noFill/>
+          <a:ln/>
+        </p:spPr>
+        <p:txBody>
+          <a:bodyPr wrap="square" lIns="0" tIns="0" rIns="0" bIns="0" rtlCol="0" anchor="ctr"/>
+          <a:lstStyle/>
+          <a:p>
+            <a:pPr algn="r" indent="0" marL="0">
+              <a:buNone/>
+            </a:pPr>
+            <a:r>
+              <a:rPr lang="en-US" sz="1050" dirty="0">
+                <a:solidFill>
+                  <a:srgbClr val="1F2A44"/>
+                </a:solidFill>
+                <a:latin typeface="Exo 2" pitchFamily="34" charset="0"/>
+                <a:ea typeface="Exo 2" pitchFamily="34" charset="-122"/>
+                <a:cs typeface="Exo 2" pitchFamily="34" charset="-120"/>
+              </a:rPr>
+              <a:t>Sessions</a:t>
+            </a:r>
+            <a:endParaRPr lang="en-US" sz="1050" dirty="0"/>
+          </a:p>
+        </p:txBody>
+      </p:sp>
+      <p:sp>
+        <p:nvSpPr>
+          <p:cNvPr id="40" name="Shape 34"/>
+          <p:cNvSpPr/>
+          <p:nvPr/>
+        </p:nvSpPr>
+        <p:spPr>
+          <a:xfrm>
+            <a:off x="8185709" y="1988769"/>
+            <a:ext cx="1267176" cy="223622"/>
+          </a:xfrm>
+          <a:prstGeom prst="rect">
+            <a:avLst/>
+          </a:prstGeom>
+          <a:solidFill>
+            <a:srgbClr val="132257"/>
+          </a:solidFill>
+          <a:ln w="12700">
+            <a:solidFill>
+              <a:srgbClr val="132257"/>
+            </a:solidFill>
+            <a:prstDash val="solid"/>
+          </a:ln>
+        </p:spPr>
+      </p:sp>
+      <p:sp>
+        <p:nvSpPr>
+          <p:cNvPr id="41" name="Text 35"/>
+          <p:cNvSpPr txBox="1"/>
+          <p:nvPr/>
+        </p:nvSpPr>
+        <p:spPr>
+          <a:xfrm>
+            <a:off x="9498604" y="1988769"/>
+            <a:ext cx="731520" cy="223622"/>
+          </a:xfrm>
+          <a:prstGeom prst="rect">
+            <a:avLst/>
+          </a:prstGeom>
+          <a:noFill/>
+          <a:ln/>
+        </p:spPr>
+        <p:txBody>
+          <a:bodyPr wrap="square" lIns="0" tIns="0" rIns="0" bIns="0" rtlCol="0" anchor="ctr"/>
+          <a:lstStyle/>
+          <a:p>
+            <a:pPr indent="0" marL="0">
+              <a:buNone/>
+            </a:pPr>
+            <a:r>
+              <a:rPr lang="en-US" sz="1000" b="1" dirty="0">
+                <a:solidFill>
+                  <a:srgbClr val="132257"/>
+                </a:solidFill>
+                <a:latin typeface="Exo 2" pitchFamily="34" charset="0"/>
+                <a:ea typeface="Exo 2" pitchFamily="34" charset="-122"/>
+                <a:cs typeface="Exo 2" pitchFamily="34" charset="-120"/>
+              </a:rPr>
+              <a:t>+20.5%</a:t>
+            </a:r>
+            <a:endParaRPr lang="en-US" sz="1000" dirty="0"/>
+          </a:p>
+        </p:txBody>
+      </p:sp>
+      <p:sp>
+        <p:nvSpPr>
+          <p:cNvPr id="42" name="Text 36"/>
+          <p:cNvSpPr txBox="1"/>
+          <p:nvPr/>
+        </p:nvSpPr>
+        <p:spPr>
+          <a:xfrm>
+            <a:off x="5074920" y="2280920"/>
+            <a:ext cx="1783080" cy="360680"/>
+          </a:xfrm>
+          <a:prstGeom prst="rect">
+            <a:avLst/>
+          </a:prstGeom>
+          <a:noFill/>
+          <a:ln/>
+        </p:spPr>
+        <p:txBody>
+          <a:bodyPr wrap="square" lIns="0" tIns="0" rIns="0" bIns="0" rtlCol="0" anchor="ctr"/>
+          <a:lstStyle/>
+          <a:p>
+            <a:pPr algn="r" indent="0" marL="0">
+              <a:buNone/>
+            </a:pPr>
+            <a:r>
+              <a:rPr lang="en-US" sz="1050" dirty="0">
+                <a:solidFill>
+                  <a:srgbClr val="1F2A44"/>
+                </a:solidFill>
+                <a:latin typeface="Exo 2" pitchFamily="34" charset="0"/>
+                <a:ea typeface="Exo 2" pitchFamily="34" charset="-122"/>
+                <a:cs typeface="Exo 2" pitchFamily="34" charset="-120"/>
+              </a:rPr>
+              <a:t>Active users</a:t>
+            </a:r>
+            <a:endParaRPr lang="en-US" sz="1050" dirty="0"/>
+          </a:p>
+        </p:txBody>
+      </p:sp>
+      <p:sp>
+        <p:nvSpPr>
+          <p:cNvPr id="43" name="Shape 37"/>
+          <p:cNvSpPr/>
+          <p:nvPr/>
+        </p:nvSpPr>
+        <p:spPr>
+          <a:xfrm>
+            <a:off x="8185709" y="2349449"/>
+            <a:ext cx="1168274" cy="223622"/>
+          </a:xfrm>
+          <a:prstGeom prst="rect">
+            <a:avLst/>
+          </a:prstGeom>
+          <a:solidFill>
+            <a:srgbClr val="132257"/>
+          </a:solidFill>
+          <a:ln w="12700">
+            <a:solidFill>
+              <a:srgbClr val="132257"/>
+            </a:solidFill>
+            <a:prstDash val="solid"/>
+          </a:ln>
+        </p:spPr>
+      </p:sp>
+      <p:sp>
+        <p:nvSpPr>
+          <p:cNvPr id="44" name="Text 38"/>
+          <p:cNvSpPr txBox="1"/>
+          <p:nvPr/>
+        </p:nvSpPr>
+        <p:spPr>
+          <a:xfrm>
+            <a:off x="9399703" y="2349449"/>
+            <a:ext cx="731520" cy="223622"/>
+          </a:xfrm>
+          <a:prstGeom prst="rect">
+            <a:avLst/>
+          </a:prstGeom>
+          <a:noFill/>
+          <a:ln/>
+        </p:spPr>
+        <p:txBody>
+          <a:bodyPr wrap="square" lIns="0" tIns="0" rIns="0" bIns="0" rtlCol="0" anchor="ctr"/>
+          <a:lstStyle/>
+          <a:p>
+            <a:pPr indent="0" marL="0">
+              <a:buNone/>
+            </a:pPr>
+            <a:r>
+              <a:rPr lang="en-US" sz="1000" b="1" dirty="0">
+                <a:solidFill>
+                  <a:srgbClr val="132257"/>
+                </a:solidFill>
+                <a:latin typeface="Exo 2" pitchFamily="34" charset="0"/>
+                <a:ea typeface="Exo 2" pitchFamily="34" charset="-122"/>
+                <a:cs typeface="Exo 2" pitchFamily="34" charset="-120"/>
+              </a:rPr>
+              <a:t>+18.9%</a:t>
+            </a:r>
+            <a:endParaRPr lang="en-US" sz="1000" dirty="0"/>
+          </a:p>
+        </p:txBody>
+      </p:sp>
+      <p:sp>
+        <p:nvSpPr>
+          <p:cNvPr id="45" name="Text 39"/>
+          <p:cNvSpPr txBox="1"/>
+          <p:nvPr/>
+        </p:nvSpPr>
+        <p:spPr>
+          <a:xfrm>
+            <a:off x="5074920" y="2641600"/>
+            <a:ext cx="1783080" cy="360680"/>
+          </a:xfrm>
+          <a:prstGeom prst="rect">
+            <a:avLst/>
+          </a:prstGeom>
+          <a:noFill/>
+          <a:ln/>
+        </p:spPr>
+        <p:txBody>
+          <a:bodyPr wrap="square" lIns="0" tIns="0" rIns="0" bIns="0" rtlCol="0" anchor="ctr"/>
+          <a:lstStyle/>
+          <a:p>
+            <a:pPr algn="r" indent="0" marL="0">
+              <a:buNone/>
+            </a:pPr>
+            <a:r>
+              <a:rPr lang="en-US" sz="1050" dirty="0">
+                <a:solidFill>
+                  <a:srgbClr val="1F2A44"/>
+                </a:solidFill>
+                <a:latin typeface="Exo 2" pitchFamily="34" charset="0"/>
+                <a:ea typeface="Exo 2" pitchFamily="34" charset="-122"/>
+                <a:cs typeface="Exo 2" pitchFamily="34" charset="-120"/>
+              </a:rPr>
+              <a:t>Engaged sessions</a:t>
+            </a:r>
+            <a:endParaRPr lang="en-US" sz="1050" dirty="0"/>
+          </a:p>
+        </p:txBody>
+      </p:sp>
+      <p:sp>
+        <p:nvSpPr>
+          <p:cNvPr id="46" name="Shape 40"/>
+          <p:cNvSpPr/>
+          <p:nvPr/>
+        </p:nvSpPr>
+        <p:spPr>
+          <a:xfrm>
+            <a:off x="8185709" y="2710129"/>
+            <a:ext cx="2138745" cy="223622"/>
+          </a:xfrm>
+          <a:prstGeom prst="rect">
+            <a:avLst/>
+          </a:prstGeom>
+          <a:solidFill>
+            <a:srgbClr val="132257"/>
+          </a:solidFill>
+          <a:ln w="12700">
+            <a:solidFill>
+              <a:srgbClr val="132257"/>
+            </a:solidFill>
+            <a:prstDash val="solid"/>
+          </a:ln>
+        </p:spPr>
+      </p:sp>
+      <p:sp>
+        <p:nvSpPr>
+          <p:cNvPr id="47" name="Text 41"/>
+          <p:cNvSpPr txBox="1"/>
+          <p:nvPr/>
+        </p:nvSpPr>
+        <p:spPr>
+          <a:xfrm>
+            <a:off x="10370174" y="2710129"/>
+            <a:ext cx="731520" cy="223622"/>
+          </a:xfrm>
+          <a:prstGeom prst="rect">
+            <a:avLst/>
+          </a:prstGeom>
+          <a:noFill/>
+          <a:ln/>
+        </p:spPr>
+        <p:txBody>
+          <a:bodyPr wrap="square" lIns="0" tIns="0" rIns="0" bIns="0" rtlCol="0" anchor="ctr"/>
+          <a:lstStyle/>
+          <a:p>
+            <a:pPr indent="0" marL="0">
+              <a:buNone/>
+            </a:pPr>
+            <a:r>
+              <a:rPr lang="en-US" sz="1000" b="1" dirty="0">
+                <a:solidFill>
+                  <a:srgbClr val="132257"/>
+                </a:solidFill>
+                <a:latin typeface="Exo 2" pitchFamily="34" charset="0"/>
+                <a:ea typeface="Exo 2" pitchFamily="34" charset="-122"/>
+                <a:cs typeface="Exo 2" pitchFamily="34" charset="-120"/>
+              </a:rPr>
+              <a:t>+34.6%</a:t>
+            </a:r>
+            <a:endParaRPr lang="en-US" sz="1000" dirty="0"/>
+          </a:p>
+        </p:txBody>
+      </p:sp>
+      <p:sp>
+        <p:nvSpPr>
+          <p:cNvPr id="48" name="Text 42"/>
+          <p:cNvSpPr txBox="1"/>
+          <p:nvPr/>
+        </p:nvSpPr>
+        <p:spPr>
+          <a:xfrm>
+            <a:off x="5074920" y="3002280"/>
+            <a:ext cx="1783080" cy="360680"/>
+          </a:xfrm>
+          <a:prstGeom prst="rect">
+            <a:avLst/>
+          </a:prstGeom>
+          <a:noFill/>
+          <a:ln/>
+        </p:spPr>
+        <p:txBody>
+          <a:bodyPr wrap="square" lIns="0" tIns="0" rIns="0" bIns="0" rtlCol="0" anchor="ctr"/>
+          <a:lstStyle/>
+          <a:p>
+            <a:pPr algn="r" indent="0" marL="0">
+              <a:buNone/>
+            </a:pPr>
+            <a:r>
+              <a:rPr lang="en-US" sz="1050" dirty="0">
+                <a:solidFill>
+                  <a:srgbClr val="1F2A44"/>
+                </a:solidFill>
+                <a:latin typeface="Exo 2" pitchFamily="34" charset="0"/>
+                <a:ea typeface="Exo 2" pitchFamily="34" charset="-122"/>
+                <a:cs typeface="Exo 2" pitchFamily="34" charset="-120"/>
+              </a:rPr>
+              <a:t>Engagement rate</a:t>
+            </a:r>
+            <a:endParaRPr lang="en-US" sz="1050" dirty="0"/>
+          </a:p>
+        </p:txBody>
+      </p:sp>
+      <p:sp>
+        <p:nvSpPr>
+          <p:cNvPr id="49" name="Shape 43"/>
+          <p:cNvSpPr/>
+          <p:nvPr/>
+        </p:nvSpPr>
+        <p:spPr>
+          <a:xfrm>
+            <a:off x="8185709" y="3070809"/>
+            <a:ext cx="729399" cy="223622"/>
+          </a:xfrm>
+          <a:prstGeom prst="rect">
+            <a:avLst/>
+          </a:prstGeom>
+          <a:solidFill>
+            <a:srgbClr val="132257"/>
+          </a:solidFill>
+          <a:ln w="12700">
+            <a:solidFill>
+              <a:srgbClr val="132257"/>
+            </a:solidFill>
+            <a:prstDash val="solid"/>
+          </a:ln>
+        </p:spPr>
+      </p:sp>
+      <p:sp>
+        <p:nvSpPr>
+          <p:cNvPr id="50" name="Text 44"/>
+          <p:cNvSpPr txBox="1"/>
+          <p:nvPr/>
+        </p:nvSpPr>
+        <p:spPr>
+          <a:xfrm>
+            <a:off x="8960827" y="3070809"/>
+            <a:ext cx="731520" cy="223622"/>
+          </a:xfrm>
+          <a:prstGeom prst="rect">
+            <a:avLst/>
+          </a:prstGeom>
+          <a:noFill/>
+          <a:ln/>
+        </p:spPr>
+        <p:txBody>
+          <a:bodyPr wrap="square" lIns="0" tIns="0" rIns="0" bIns="0" rtlCol="0" anchor="ctr"/>
+          <a:lstStyle/>
+          <a:p>
+            <a:pPr indent="0" marL="0">
+              <a:buNone/>
+            </a:pPr>
+            <a:r>
+              <a:rPr lang="en-US" sz="1000" b="1" dirty="0">
+                <a:solidFill>
+                  <a:srgbClr val="132257"/>
+                </a:solidFill>
+                <a:latin typeface="Exo 2" pitchFamily="34" charset="0"/>
+                <a:ea typeface="Exo 2" pitchFamily="34" charset="-122"/>
+                <a:cs typeface="Exo 2" pitchFamily="34" charset="-120"/>
+              </a:rPr>
+              <a:t>+11.8%</a:t>
+            </a:r>
+            <a:endParaRPr lang="en-US" sz="1000" dirty="0"/>
+          </a:p>
+        </p:txBody>
+      </p:sp>
+      <p:sp>
+        <p:nvSpPr>
+          <p:cNvPr id="51" name="Text 45"/>
+          <p:cNvSpPr txBox="1"/>
+          <p:nvPr/>
+        </p:nvSpPr>
+        <p:spPr>
+          <a:xfrm>
+            <a:off x="5074920" y="3362960"/>
+            <a:ext cx="1783080" cy="360680"/>
+          </a:xfrm>
+          <a:prstGeom prst="rect">
+            <a:avLst/>
+          </a:prstGeom>
+          <a:noFill/>
+          <a:ln/>
+        </p:spPr>
+        <p:txBody>
+          <a:bodyPr wrap="square" lIns="0" tIns="0" rIns="0" bIns="0" rtlCol="0" anchor="ctr"/>
+          <a:lstStyle/>
+          <a:p>
+            <a:pPr algn="r" indent="0" marL="0">
+              <a:buNone/>
+            </a:pPr>
+            <a:r>
+              <a:rPr lang="en-US" sz="1050" dirty="0">
+                <a:solidFill>
+                  <a:srgbClr val="1F2A44"/>
+                </a:solidFill>
+                <a:latin typeface="Exo 2" pitchFamily="34" charset="0"/>
+                <a:ea typeface="Exo 2" pitchFamily="34" charset="-122"/>
+                <a:cs typeface="Exo 2" pitchFamily="34" charset="-120"/>
+              </a:rPr>
+              <a:t>Time per session</a:t>
+            </a:r>
+            <a:endParaRPr lang="en-US" sz="1050" dirty="0"/>
+          </a:p>
+        </p:txBody>
+      </p:sp>
+      <p:sp>
+        <p:nvSpPr>
+          <p:cNvPr id="52" name="Shape 46"/>
+          <p:cNvSpPr/>
+          <p:nvPr/>
+        </p:nvSpPr>
+        <p:spPr>
+          <a:xfrm>
+            <a:off x="8185709" y="3431489"/>
+            <a:ext cx="1495885" cy="223622"/>
+          </a:xfrm>
+          <a:prstGeom prst="rect">
+            <a:avLst/>
+          </a:prstGeom>
+          <a:solidFill>
+            <a:srgbClr val="132257"/>
+          </a:solidFill>
+          <a:ln w="12700">
+            <a:solidFill>
+              <a:srgbClr val="132257"/>
+            </a:solidFill>
+            <a:prstDash val="solid"/>
+          </a:ln>
+        </p:spPr>
+      </p:sp>
+      <p:sp>
+        <p:nvSpPr>
+          <p:cNvPr id="53" name="Text 47"/>
+          <p:cNvSpPr txBox="1"/>
+          <p:nvPr/>
+        </p:nvSpPr>
+        <p:spPr>
+          <a:xfrm>
+            <a:off x="9727314" y="3431489"/>
+            <a:ext cx="731520" cy="223622"/>
+          </a:xfrm>
+          <a:prstGeom prst="rect">
+            <a:avLst/>
+          </a:prstGeom>
+          <a:noFill/>
+          <a:ln/>
+        </p:spPr>
+        <p:txBody>
+          <a:bodyPr wrap="square" lIns="0" tIns="0" rIns="0" bIns="0" rtlCol="0" anchor="ctr"/>
+          <a:lstStyle/>
+          <a:p>
+            <a:pPr indent="0" marL="0">
+              <a:buNone/>
+            </a:pPr>
+            <a:r>
+              <a:rPr lang="en-US" sz="1000" b="1" dirty="0">
+                <a:solidFill>
+                  <a:srgbClr val="132257"/>
+                </a:solidFill>
+                <a:latin typeface="Exo 2" pitchFamily="34" charset="0"/>
+                <a:ea typeface="Exo 2" pitchFamily="34" charset="-122"/>
+                <a:cs typeface="Exo 2" pitchFamily="34" charset="-120"/>
+              </a:rPr>
+              <a:t>+24.2%</a:t>
+            </a:r>
+            <a:endParaRPr lang="en-US" sz="1000" dirty="0"/>
+          </a:p>
+        </p:txBody>
+      </p:sp>
+      <p:sp>
+        <p:nvSpPr>
+          <p:cNvPr id="54" name="Text 48"/>
+          <p:cNvSpPr txBox="1"/>
+          <p:nvPr/>
+        </p:nvSpPr>
+        <p:spPr>
+          <a:xfrm>
+            <a:off x="5074920" y="3723640"/>
+            <a:ext cx="1783080" cy="360680"/>
+          </a:xfrm>
+          <a:prstGeom prst="rect">
+            <a:avLst/>
+          </a:prstGeom>
+          <a:noFill/>
+          <a:ln/>
+        </p:spPr>
+        <p:txBody>
+          <a:bodyPr wrap="square" lIns="0" tIns="0" rIns="0" bIns="0" rtlCol="0" anchor="ctr"/>
+          <a:lstStyle/>
+          <a:p>
+            <a:pPr algn="r" indent="0" marL="0">
+              <a:buNone/>
+            </a:pPr>
+            <a:r>
+              <a:rPr lang="en-US" sz="1050" dirty="0">
+                <a:solidFill>
+                  <a:srgbClr val="1F2A44"/>
+                </a:solidFill>
+                <a:latin typeface="Exo 2" pitchFamily="34" charset="0"/>
+                <a:ea typeface="Exo 2" pitchFamily="34" charset="-122"/>
+                <a:cs typeface="Exo 2" pitchFamily="34" charset="-120"/>
+              </a:rPr>
+              <a:t>Events per session</a:t>
+            </a:r>
+            <a:endParaRPr lang="en-US" sz="1050" dirty="0"/>
+          </a:p>
+        </p:txBody>
+      </p:sp>
+      <p:sp>
+        <p:nvSpPr>
+          <p:cNvPr id="55" name="Shape 49"/>
+          <p:cNvSpPr/>
+          <p:nvPr/>
+        </p:nvSpPr>
+        <p:spPr>
+          <a:xfrm>
+            <a:off x="8185709" y="3792169"/>
+            <a:ext cx="1186818" cy="223622"/>
+          </a:xfrm>
+          <a:prstGeom prst="rect">
+            <a:avLst/>
+          </a:prstGeom>
+          <a:solidFill>
+            <a:srgbClr val="132257"/>
+          </a:solidFill>
+          <a:ln w="12700">
+            <a:solidFill>
+              <a:srgbClr val="132257"/>
+            </a:solidFill>
+            <a:prstDash val="solid"/>
+          </a:ln>
+        </p:spPr>
+      </p:sp>
+      <p:sp>
+        <p:nvSpPr>
+          <p:cNvPr id="56" name="Text 50"/>
+          <p:cNvSpPr txBox="1"/>
+          <p:nvPr/>
+        </p:nvSpPr>
+        <p:spPr>
+          <a:xfrm>
+            <a:off x="9418247" y="3792169"/>
+            <a:ext cx="731520" cy="223622"/>
+          </a:xfrm>
+          <a:prstGeom prst="rect">
+            <a:avLst/>
+          </a:prstGeom>
+          <a:noFill/>
+          <a:ln/>
+        </p:spPr>
+        <p:txBody>
+          <a:bodyPr wrap="square" lIns="0" tIns="0" rIns="0" bIns="0" rtlCol="0" anchor="ctr"/>
+          <a:lstStyle/>
+          <a:p>
+            <a:pPr indent="0" marL="0">
+              <a:buNone/>
+            </a:pPr>
+            <a:r>
+              <a:rPr lang="en-US" sz="1000" b="1" dirty="0">
+                <a:solidFill>
+                  <a:srgbClr val="132257"/>
+                </a:solidFill>
+                <a:latin typeface="Exo 2" pitchFamily="34" charset="0"/>
+                <a:ea typeface="Exo 2" pitchFamily="34" charset="-122"/>
+                <a:cs typeface="Exo 2" pitchFamily="34" charset="-120"/>
+              </a:rPr>
+              <a:t>+19.2%</a:t>
+            </a:r>
+            <a:endParaRPr lang="en-US" sz="1000" dirty="0"/>
+          </a:p>
+        </p:txBody>
+      </p:sp>
+      <p:sp>
+        <p:nvSpPr>
+          <p:cNvPr id="57" name="Text 51"/>
+          <p:cNvSpPr txBox="1"/>
+          <p:nvPr/>
+        </p:nvSpPr>
+        <p:spPr>
+          <a:xfrm>
+            <a:off x="5074920" y="4084320"/>
+            <a:ext cx="1783080" cy="360680"/>
+          </a:xfrm>
+          <a:prstGeom prst="rect">
+            <a:avLst/>
+          </a:prstGeom>
+          <a:noFill/>
+          <a:ln/>
+        </p:spPr>
+        <p:txBody>
+          <a:bodyPr wrap="square" lIns="0" tIns="0" rIns="0" bIns="0" rtlCol="0" anchor="ctr"/>
+          <a:lstStyle/>
+          <a:p>
+            <a:pPr algn="r" indent="0" marL="0">
+              <a:buNone/>
+            </a:pPr>
+            <a:r>
+              <a:rPr lang="en-US" sz="1050" dirty="0">
+                <a:solidFill>
+                  <a:srgbClr val="1F2A44"/>
+                </a:solidFill>
+                <a:latin typeface="Exo 2" pitchFamily="34" charset="0"/>
+                <a:ea typeface="Exo 2" pitchFamily="34" charset="-122"/>
+                <a:cs typeface="Exo 2" pitchFamily="34" charset="-120"/>
+              </a:rPr>
+              <a:t>Total events</a:t>
+            </a:r>
+            <a:endParaRPr lang="en-US" sz="1050" dirty="0"/>
+          </a:p>
+        </p:txBody>
+      </p:sp>
+      <p:sp>
+        <p:nvSpPr>
+          <p:cNvPr id="58" name="Shape 52"/>
+          <p:cNvSpPr/>
+          <p:nvPr/>
+        </p:nvSpPr>
+        <p:spPr>
+          <a:xfrm>
+            <a:off x="8185709" y="4152849"/>
+            <a:ext cx="2695066" cy="223622"/>
+          </a:xfrm>
+          <a:prstGeom prst="rect">
+            <a:avLst/>
+          </a:prstGeom>
+          <a:solidFill>
+            <a:srgbClr val="132257"/>
+          </a:solidFill>
+          <a:ln w="12700">
+            <a:solidFill>
+              <a:srgbClr val="132257"/>
+            </a:solidFill>
+            <a:prstDash val="solid"/>
+          </a:ln>
+        </p:spPr>
+      </p:sp>
+      <p:sp>
+        <p:nvSpPr>
+          <p:cNvPr id="59" name="Text 53"/>
+          <p:cNvSpPr txBox="1"/>
+          <p:nvPr/>
+        </p:nvSpPr>
+        <p:spPr>
+          <a:xfrm>
+            <a:off x="10926495" y="4152849"/>
+            <a:ext cx="731520" cy="223622"/>
+          </a:xfrm>
+          <a:prstGeom prst="rect">
+            <a:avLst/>
+          </a:prstGeom>
+          <a:noFill/>
+          <a:ln/>
+        </p:spPr>
+        <p:txBody>
+          <a:bodyPr wrap="square" lIns="0" tIns="0" rIns="0" bIns="0" rtlCol="0" anchor="ctr"/>
+          <a:lstStyle/>
+          <a:p>
+            <a:pPr indent="0" marL="0">
+              <a:buNone/>
+            </a:pPr>
+            <a:r>
+              <a:rPr lang="en-US" sz="1000" b="1" dirty="0">
+                <a:solidFill>
+                  <a:srgbClr val="132257"/>
+                </a:solidFill>
+                <a:latin typeface="Exo 2" pitchFamily="34" charset="0"/>
+                <a:ea typeface="Exo 2" pitchFamily="34" charset="-122"/>
+                <a:cs typeface="Exo 2" pitchFamily="34" charset="-120"/>
+              </a:rPr>
+              <a:t>+43.6%</a:t>
+            </a:r>
+            <a:endParaRPr lang="en-US" sz="1000" dirty="0"/>
+          </a:p>
+        </p:txBody>
+      </p:sp>
+      <p:sp>
+        <p:nvSpPr>
+          <p:cNvPr id="60" name="Text 54"/>
+          <p:cNvSpPr txBox="1"/>
+          <p:nvPr/>
+        </p:nvSpPr>
+        <p:spPr>
+          <a:xfrm>
+            <a:off x="5074920" y="4445000"/>
+            <a:ext cx="1783080" cy="360680"/>
+          </a:xfrm>
+          <a:prstGeom prst="rect">
+            <a:avLst/>
+          </a:prstGeom>
+          <a:noFill/>
+          <a:ln/>
+        </p:spPr>
+        <p:txBody>
+          <a:bodyPr wrap="square" lIns="0" tIns="0" rIns="0" bIns="0" rtlCol="0" anchor="ctr"/>
+          <a:lstStyle/>
+          <a:p>
+            <a:pPr algn="r" indent="0" marL="0">
+              <a:buNone/>
+            </a:pPr>
+            <a:r>
+              <a:rPr lang="en-US" sz="1050" dirty="0">
+                <a:solidFill>
+                  <a:srgbClr val="1F2A44"/>
+                </a:solidFill>
+                <a:latin typeface="Exo 2" pitchFamily="34" charset="0"/>
+                <a:ea typeface="Exo 2" pitchFamily="34" charset="-122"/>
+                <a:cs typeface="Exo 2" pitchFamily="34" charset="-120"/>
+              </a:rPr>
+              <a:t>Key events</a:t>
+            </a:r>
+            <a:endParaRPr lang="en-US" sz="1050" dirty="0"/>
+          </a:p>
+        </p:txBody>
+      </p:sp>
+      <p:sp>
+        <p:nvSpPr>
+          <p:cNvPr id="61" name="Shape 55"/>
+          <p:cNvSpPr/>
+          <p:nvPr/>
+        </p:nvSpPr>
+        <p:spPr>
+          <a:xfrm>
+            <a:off x="8185709" y="4513529"/>
+            <a:ext cx="500689" cy="223622"/>
+          </a:xfrm>
+          <a:prstGeom prst="rect">
+            <a:avLst/>
+          </a:prstGeom>
+          <a:solidFill>
+            <a:srgbClr val="132257"/>
+          </a:solidFill>
+          <a:ln w="12700">
+            <a:solidFill>
+              <a:srgbClr val="132257"/>
+            </a:solidFill>
+            <a:prstDash val="solid"/>
+          </a:ln>
+        </p:spPr>
+      </p:sp>
+      <p:sp>
+        <p:nvSpPr>
+          <p:cNvPr id="62" name="Text 56"/>
+          <p:cNvSpPr txBox="1"/>
+          <p:nvPr/>
+        </p:nvSpPr>
+        <p:spPr>
+          <a:xfrm>
+            <a:off x="8732118" y="4513529"/>
+            <a:ext cx="731520" cy="223622"/>
+          </a:xfrm>
+          <a:prstGeom prst="rect">
+            <a:avLst/>
+          </a:prstGeom>
+          <a:noFill/>
+          <a:ln/>
+        </p:spPr>
+        <p:txBody>
+          <a:bodyPr wrap="square" lIns="0" tIns="0" rIns="0" bIns="0" rtlCol="0" anchor="ctr"/>
+          <a:lstStyle/>
+          <a:p>
+            <a:pPr indent="0" marL="0">
+              <a:buNone/>
+            </a:pPr>
+            <a:r>
+              <a:rPr lang="en-US" sz="1000" b="1" dirty="0">
+                <a:solidFill>
+                  <a:srgbClr val="132257"/>
+                </a:solidFill>
+                <a:latin typeface="Exo 2" pitchFamily="34" charset="0"/>
+                <a:ea typeface="Exo 2" pitchFamily="34" charset="-122"/>
+                <a:cs typeface="Exo 2" pitchFamily="34" charset="-120"/>
+              </a:rPr>
+              <a:t>+8.1%</a:t>
+            </a:r>
+            <a:endParaRPr lang="en-US" sz="1000" dirty="0"/>
+          </a:p>
+        </p:txBody>
+      </p:sp>
+      <p:sp>
+        <p:nvSpPr>
+          <p:cNvPr id="63" name="Text 57"/>
+          <p:cNvSpPr txBox="1"/>
+          <p:nvPr/>
+        </p:nvSpPr>
+        <p:spPr>
+          <a:xfrm>
+            <a:off x="5074920" y="4805680"/>
+            <a:ext cx="1783080" cy="360680"/>
+          </a:xfrm>
+          <a:prstGeom prst="rect">
+            <a:avLst/>
+          </a:prstGeom>
+          <a:noFill/>
+          <a:ln/>
+        </p:spPr>
+        <p:txBody>
+          <a:bodyPr wrap="square" lIns="0" tIns="0" rIns="0" bIns="0" rtlCol="0" anchor="ctr"/>
+          <a:lstStyle/>
+          <a:p>
+            <a:pPr algn="r" indent="0" marL="0">
+              <a:buNone/>
+            </a:pPr>
+            <a:r>
+              <a:rPr lang="en-US" sz="1050" dirty="0">
+                <a:solidFill>
+                  <a:srgbClr val="1F2A44"/>
+                </a:solidFill>
+                <a:latin typeface="Exo 2" pitchFamily="34" charset="0"/>
+                <a:ea typeface="Exo 2" pitchFamily="34" charset="-122"/>
+                <a:cs typeface="Exo 2" pitchFamily="34" charset="-120"/>
+              </a:rPr>
+              <a:t>Key events per session</a:t>
+            </a:r>
+            <a:endParaRPr lang="en-US" sz="1050" dirty="0"/>
+          </a:p>
+        </p:txBody>
+      </p:sp>
+      <p:sp>
+        <p:nvSpPr>
+          <p:cNvPr id="64" name="Shape 58"/>
+          <p:cNvSpPr/>
+          <p:nvPr/>
+        </p:nvSpPr>
+        <p:spPr>
+          <a:xfrm>
+            <a:off x="7555212" y="4874209"/>
+            <a:ext cx="630497" cy="223622"/>
+          </a:xfrm>
+          <a:prstGeom prst="rect">
+            <a:avLst/>
+          </a:prstGeom>
+          <a:solidFill>
+            <a:srgbClr val="D4AF37"/>
+          </a:solidFill>
+          <a:ln w="12700">
+            <a:solidFill>
+              <a:srgbClr val="D4AF37"/>
+            </a:solidFill>
+            <a:prstDash val="solid"/>
+          </a:ln>
+        </p:spPr>
+      </p:sp>
+      <p:sp>
+        <p:nvSpPr>
+          <p:cNvPr id="65" name="Text 59"/>
+          <p:cNvSpPr txBox="1"/>
+          <p:nvPr/>
+        </p:nvSpPr>
+        <p:spPr>
+          <a:xfrm>
+            <a:off x="6777972" y="4874209"/>
+            <a:ext cx="731520" cy="223622"/>
+          </a:xfrm>
+          <a:prstGeom prst="rect">
+            <a:avLst/>
+          </a:prstGeom>
+          <a:noFill/>
+          <a:ln/>
+        </p:spPr>
+        <p:txBody>
+          <a:bodyPr wrap="square" lIns="0" tIns="0" rIns="0" bIns="0" rtlCol="0" anchor="ctr"/>
+          <a:lstStyle/>
+          <a:p>
+            <a:pPr algn="r" indent="0" marL="0">
+              <a:buNone/>
+            </a:pPr>
+            <a:r>
+              <a:rPr lang="en-US" sz="1000" b="1" dirty="0">
+                <a:solidFill>
+                  <a:srgbClr val="9A7B1F"/>
+                </a:solidFill>
+                <a:latin typeface="Exo 2" pitchFamily="34" charset="0"/>
+                <a:ea typeface="Exo 2" pitchFamily="34" charset="-122"/>
+                <a:cs typeface="Exo 2" pitchFamily="34" charset="-120"/>
+              </a:rPr>
+              <a:t>-10.2%</a:t>
+            </a:r>
+            <a:endParaRPr lang="en-US" sz="1000" dirty="0"/>
+          </a:p>
+        </p:txBody>
+      </p:sp>
+      <p:sp>
+        <p:nvSpPr>
+          <p:cNvPr id="66" name="Shape 60"/>
+          <p:cNvSpPr/>
+          <p:nvPr/>
+        </p:nvSpPr>
+        <p:spPr>
+          <a:xfrm>
+            <a:off x="7221474" y="5358384"/>
+            <a:ext cx="128016" cy="128016"/>
+          </a:xfrm>
+          <a:prstGeom prst="rect">
+            <a:avLst/>
+          </a:prstGeom>
+          <a:solidFill>
+            <a:srgbClr val="132257"/>
+          </a:solidFill>
+          <a:ln w="12700">
+            <a:solidFill>
+              <a:srgbClr val="132257"/>
+            </a:solidFill>
+            <a:prstDash val="solid"/>
+          </a:ln>
+        </p:spPr>
+      </p:sp>
+      <p:sp>
+        <p:nvSpPr>
+          <p:cNvPr id="67" name="Text 61"/>
+          <p:cNvSpPr txBox="1"/>
+          <p:nvPr/>
+        </p:nvSpPr>
+        <p:spPr>
+          <a:xfrm>
+            <a:off x="7404354" y="5285232"/>
+            <a:ext cx="982980" cy="274320"/>
+          </a:xfrm>
+          <a:prstGeom prst="rect">
+            <a:avLst/>
+          </a:prstGeom>
+          <a:noFill/>
+          <a:ln/>
+        </p:spPr>
+        <p:txBody>
+          <a:bodyPr wrap="square" lIns="0" tIns="0" rIns="0" bIns="0" rtlCol="0" anchor="ctr"/>
+          <a:lstStyle/>
+          <a:p>
+            <a:pPr indent="0" marL="0">
+              <a:buNone/>
+            </a:pPr>
+            <a:r>
+              <a:rPr lang="en-US" sz="1000" dirty="0">
+                <a:solidFill>
+                  <a:srgbClr val="1F2A44"/>
+                </a:solidFill>
+                <a:latin typeface="Exo 2" pitchFamily="34" charset="0"/>
+                <a:ea typeface="Exo 2" pitchFamily="34" charset="-122"/>
+                <a:cs typeface="Exo 2" pitchFamily="34" charset="-120"/>
+              </a:rPr>
+              <a:t>English ahead</a:t>
+            </a:r>
+            <a:endParaRPr lang="en-US" sz="1000" dirty="0"/>
+          </a:p>
+        </p:txBody>
+      </p:sp>
+      <p:sp>
+        <p:nvSpPr>
+          <p:cNvPr id="68" name="Shape 62"/>
+          <p:cNvSpPr/>
+          <p:nvPr/>
+        </p:nvSpPr>
+        <p:spPr>
+          <a:xfrm>
+            <a:off x="8387334" y="5358384"/>
+            <a:ext cx="128016" cy="128016"/>
+          </a:xfrm>
+          <a:prstGeom prst="rect">
+            <a:avLst/>
+          </a:prstGeom>
+          <a:solidFill>
+            <a:srgbClr val="D4AF37"/>
+          </a:solidFill>
+          <a:ln w="12700">
+            <a:solidFill>
+              <a:srgbClr val="D4AF37"/>
+            </a:solidFill>
+            <a:prstDash val="solid"/>
+          </a:ln>
+        </p:spPr>
+      </p:sp>
+      <p:sp>
+        <p:nvSpPr>
+          <p:cNvPr id="69" name="Text 63"/>
+          <p:cNvSpPr txBox="1"/>
+          <p:nvPr/>
+        </p:nvSpPr>
+        <p:spPr>
+          <a:xfrm>
+            <a:off x="8570214" y="5285232"/>
+            <a:ext cx="914400" cy="274320"/>
+          </a:xfrm>
+          <a:prstGeom prst="rect">
+            <a:avLst/>
+          </a:prstGeom>
+          <a:noFill/>
+          <a:ln/>
+        </p:spPr>
+        <p:txBody>
+          <a:bodyPr wrap="square" lIns="0" tIns="0" rIns="0" bIns="0" rtlCol="0" anchor="ctr"/>
+          <a:lstStyle/>
+          <a:p>
+            <a:pPr indent="0" marL="0">
+              <a:buNone/>
+            </a:pPr>
+            <a:r>
+              <a:rPr lang="en-US" sz="1000" dirty="0">
+                <a:solidFill>
+                  <a:srgbClr val="1F2A44"/>
+                </a:solidFill>
+                <a:latin typeface="Exo 2" pitchFamily="34" charset="0"/>
+                <a:ea typeface="Exo 2" pitchFamily="34" charset="-122"/>
+                <a:cs typeface="Exo 2" pitchFamily="34" charset="-120"/>
+              </a:rPr>
+              <a:t>Arabic ahead</a:t>
+            </a:r>
+            <a:endParaRPr lang="en-US" sz="1000" dirty="0"/>
+          </a:p>
+        </p:txBody>
+      </p:sp>
     </p:spTree>
   </p:cSld>
   <p:clrMapOvr>

--- a/emyaa-ceo-deck/output/final-deck/eMYAA-Marketing-Update-01.10.2026-CEO-Redesigned.pptx
+++ b/emyaa-ceo-deck/output/final-deck/eMYAA-Marketing-Update-01.10.2026-CEO-Redesigned.pptx
@@ -956,7 +956,7 @@
           <a:p>
             <a:r>
               <a:rPr lang="en-US" dirty="0"/>
-              <a:t>Decision 2 follows from the GA4 campaign export: Arabic has a lower engagement rate (86.9% vs 97.2%) but more key events per session (1.05 vs 0.94). Decision 3 follows from the dashboards: +36 downloads but +3 onboarded in the first six days of paid testing. Open items: gross deposits of $12,206 rest on Malek's message of 29 Sep with no written export (the dashboard's $10,029.69 is assets under management, a different measure; the Board shows both); the Board figures (61 clients, $12,206) are as at 28 Sep, and Board slide 3 wrongly says 'as at 17 September', corrected in the separate Board update file; no Ignite spend, cost per key event or LinkedIn lead data, and the key event is undefined; no September social exports; the 793% active-user rise (GA card, prior week implied) and LinkedIn +118% / +155% are not traceable to an export; LinkedIn followers 531 vs 586; $5,000 campaign T&amp;Cs sent for approval on 20 Jul with no sign-off on file. Market Pulse: in-app feature in discussion (Exante data access).</a:t>
+              <a:t>Decision 2 follows from the GA4 campaign export: Arabic has a lower engagement rate (86.9% vs 97.2%) but more key events per session (1.05 vs 0.94). Decision 3 follows from the dashboards: +36 downloads but +3 onboarded in the first six days of paid testing. Gross deposits: $12,206 is the total recorded on the platform to date, confirmed by management on 29 Sep (the dashboard's $10,029.69 is assets under management, a different measure; the Board shows both). Open items: the Board figures (61 clients, $12,206) are as at 28 Sep, and Board slide 3 wrongly says 'as at 17 September', corrected in the separate Board update file; no Ignite spend, cost per key event or LinkedIn lead data, and the key event is undefined; no September social exports; the 793% active-user rise (GA card, prior week implied) and LinkedIn +118% / +155% are not traceable to an export; LinkedIn followers 531 vs 586; $5,000 campaign T&amp;Cs sent for approval on 20 Jul with no sign-off on file. Market Pulse: in-app feature in discussion (Exante data access).</a:t>
             </a:r>
             <a:endParaRPr lang="en-US" dirty="0"/>
           </a:p>
@@ -12758,7 +12758,7 @@
                           <a:ea typeface="Exo 2" pitchFamily="34" charset="-122"/>
                           <a:cs typeface="Exo 2" pitchFamily="34" charset="-120"/>
                         </a:rPr>
-                        <a:t>Deposits: $12,206 has no written export yet</a:t>
+                        <a:t>Deposits: $12,206 to date, confirmed 29 Sep</a:t>
                       </a:r>
                       <a:endParaRPr lang="en-US" sz="950" dirty="0">
                         <a:latin typeface="Exo 2" charset="0"/>
@@ -12799,13 +12799,13 @@
                       <a:r>
                         <a:rPr lang="en-US" sz="950" b="1" dirty="0">
                           <a:solidFill>
-                            <a:srgbClr val="9A7B1F"/>
+                            <a:srgbClr val="1BA97C"/>
                           </a:solidFill>
                           <a:latin typeface="Exo 2" pitchFamily="34" charset="0"/>
                           <a:ea typeface="Exo 2" pitchFamily="34" charset="-122"/>
                           <a:cs typeface="Exo 2" pitchFamily="34" charset="-120"/>
                         </a:rPr>
-                        <a:t>Open</a:t>
+                        <a:t>Confirmed</a:t>
                       </a:r>
                       <a:endParaRPr lang="en-US" sz="950" dirty="0">
                         <a:latin typeface="Exo 2" charset="0"/>

--- a/emyaa-ceo-deck/output/final-deck/eMYAA-Marketing-Update-01.10.2026-CEO-Redesigned.pptx
+++ b/emyaa-ceo-deck/output/final-deck/eMYAA-Marketing-Update-01.10.2026-CEO-Redesigned.pptx
@@ -516,7 +516,7 @@
           <a:p>
             <a:r>
               <a:rPr lang="en-US" dirty="0"/>
-              <a:t>Sources: GA4 exports 1-28 Sep 2026; GA4 home card 21-27 Sep; daily performance dashboards to 27 Sep; eMYAA Board of Directors Update 17 Sep 2026 (plan, budget, segments, CAC targets); content calendars Sep and Oct 2026 (V2); Instagram profile grid screenshot; $5,000 campaign T&amp;Cs, approval checklist and 24F briefing. Anything without a source file is labelled 'reported' or 'per team'.</a:t>
+              <a:t>Sources: GA4 exports 1-28 Sep 2026; GA4 home card 21-27 Sep; daily performance dashboards to 29 Sep; eMYAA Board of Directors Update 17 Sep 2026 (plan, budget, segments, CAC targets); content calendars Sep and Oct 2026 (V2); Instagram profile grid screenshot; $5,000 campaign T&amp;Cs, approval checklist and 24F briefing. Anything without a source file is labelled 'reported' or 'per team'.</a:t>
             </a:r>
             <a:endParaRPr lang="en-US" dirty="0"/>
           </a:p>
@@ -692,7 +692,7 @@
           <a:p>
             <a:r>
               <a:rPr lang="en-US" dirty="0"/>
-              <a:t>Traffic: 587 sessions 1-28 Sep; google / cpc 409 (69.7%), direct 92, organic 39, referral 32 (incl. 7 Tag Assistant test sessions), ChatGPT 9, not available 6. 403 of 542 active users (74.4%) had Google Ads as first source. The GA home card reports 384 active users for 21-27 Sep, +793% vs the previous week; the prior week (about 43) is implied, not exported, so the figure stays 'reported'. Downloads (Android + iOS) on dashboard dates: 373, 403, 423, 437, 473; onboarded 48, 49, 52, 57, 60; funded accounts 13 on 21 Sep, 15 on 27 Sep; 54 trades. English vs Arabic Google Ads (1-28 Sep): engagement 97.2% vs 86.9%, key events per session 0.94 vs 1.05; the key event is not defined, so keep both live until it is defined and costed.</a:t>
+              <a:t>Traffic: 587 sessions 1-28 Sep; google / cpc 409 (69.7%), direct 92, organic 39, referral 32 (incl. 7 Tag Assistant test sessions), ChatGPT 9, not available 6. 403 of 542 active users (74.4%) had Google Ads as first source. The GA home card reports 384 active users for 21-27 Sep, +793% vs the previous week; the prior week (about 43) is implied, not exported, so the figure stays 'reported'. Downloads (Android + iOS) on dashboard dates 1, 8, 14, 21 and 29 Sep: 373, 403, 423, 437, 490; onboarded 48, 49, 52, 57, 61; funded accounts 13 on 21 Sep, 15 on 29 Sep; 55 trades on 29 Sep. English vs Arabic Google Ads (1-28 Sep): engagement 97.2% vs 86.9%, key events per session 0.94 vs 1.05; the key event is not defined, so keep both live until it is defined and costed.</a:t>
             </a:r>
             <a:endParaRPr lang="en-US" dirty="0"/>
           </a:p>
@@ -780,7 +780,7 @@
           <a:p>
             <a:r>
               <a:rPr lang="en-US" dirty="0"/>
-              <a:t>Installs (Android + iOS, cumulative) on dashboard report dates: 1 Sep 373, 2 Sep 389, 3 Sep 395, 8 Sep 403, 9 Sep 410, 10 Sep 414, 13 Sep 419, 14 Sep 423, 16 Sep 430, 17 Sep 432, 20 Sep 437, 21 Sep 437, 22 Sep 452, 23 Sep 454, 24 Sep 455, 27 Sep 473. Report dates are irregular, so the line is spaced by report, not by calendar day. Pace: +36 in the six days 21-27 Sep (6 a day) vs +30 in 1-8 Sep (4.3 a day, when the Ali Sabeel video and baseline sponsor ads were running) and +14 in 14-21 Sep. Split 21-27 Sep: Android +17, iOS +19. Funnel: 409 google / cpc sessions and 400 key events in GA4 (1-28 Sep); the key event is not defined in the export. Installs and onboarding come from the platform dashboard and cover all sources; there is no link yet from an ad click to an install. The app link (onelink.to/gpbwrg) already exists and can carry campaign tags. Onboarded users 57 to 60 over 21-27 Sep.</a:t>
+              <a:t>Installs (Android + iOS, cumulative) on dashboard report dates: 1 Sep 373, 2 Sep 389, 3 Sep 395, 8 Sep 403, 9 Sep 410, 10 Sep 414, 13 Sep 419, 14 Sep 423, 16 Sep 430, 17 Sep 432, 20 Sep 437, 21 Sep 437, 22 Sep 452, 23 Sep 454, 24 Sep 455, 27 Sep 473, 28 Sep 480, 29 Sep 490. Report dates are irregular, so the line is spaced by report, not by calendar day. Pace: +53 in the eight days 21-29 Sep (6.6 a day) vs +30 in 1-8 Sep (4.3 a day, when the Ali Sabeel video and baseline sponsor ads were running) and +14 in 14-21 Sep. Split 21-29 Sep: Android +20, iOS +33. Funnel: 409 google / cpc sessions and 400 key events in GA4 (1-28 Sep); the key event is not defined in the export. Installs and onboarding come from the platform dashboard and cover all sources; there is no link yet from an ad click to an install. The app link (onelink.to/gpbwrg) already exists and can carry campaign tags. Onboarded users 57 to 61 over 21-29 Sep.</a:t>
             </a:r>
             <a:endParaRPr lang="en-US" dirty="0"/>
           </a:p>
@@ -956,7 +956,7 @@
           <a:p>
             <a:r>
               <a:rPr lang="en-US" dirty="0"/>
-              <a:t>Decision 2 follows from the GA4 campaign export: Arabic has a lower engagement rate (86.9% vs 97.2%) but more key events per session (1.05 vs 0.94). Decision 3 follows from the dashboards: +36 downloads but +3 onboarded in the first six days of paid testing. Gross deposits: $12,206 is the total recorded on the platform to date, confirmed by management on 29 Sep (the dashboard's $10,029.69 is assets under management, a different measure; the Board shows both). Open items: the Board figures (61 clients, $12,206) are as at 28 Sep, and Board slide 3 wrongly says 'as at 17 September', corrected in the separate Board update file; no Ignite spend, cost per key event or LinkedIn lead data, and the key event is undefined; no September social exports; the 793% active-user rise (GA card, prior week implied) and LinkedIn +118% / +155% are not traceable to an export; LinkedIn followers 531 vs 586; $5,000 campaign T&amp;Cs sent for approval on 20 Jul with no sign-off on file. Market Pulse: in-app feature in discussion (Exante data access).</a:t>
+              <a:t>Decision 2 follows from the GA4 campaign export: Arabic has a lower engagement rate (86.9% vs 97.2%) but more key events per session (1.05 vs 0.94). Decision 3 follows from the dashboards: +53 downloads but +4 onboarded in the first six days of paid testing. Gross deposits: $12,206 is the total recorded on the platform to date, confirmed by management on 29 Sep (the dashboard's $10,029.69 is assets under management, a different measure; the Board shows both). Open items: the Board figures (61 clients, $12,206) are as at 28 Sep, and Board slide 3 wrongly says 'as at 17 September', corrected in the separate Board update file; no Ignite spend, cost per key event or LinkedIn lead data, and the key event is undefined; no September social exports; the 793% active-user rise (GA card, prior week implied) and LinkedIn +118% / +155% are not traceable to an export; LinkedIn followers 531 vs 586; $5,000 campaign T&amp;Cs sent for approval on 20 Jul with no sign-off on file. Market Pulse: in-app feature in discussion (Exante data access).</a:t>
             </a:r>
             <a:endParaRPr lang="en-US" dirty="0"/>
           </a:p>
@@ -1534,7 +1534,7 @@
                 <a:ea typeface="Exo 2" pitchFamily="34" charset="-122"/>
                 <a:cs typeface="Exo 2" pitchFamily="34" charset="-120"/>
               </a:rPr>
-              <a:t>Web: GA4, 1-28 Sep 2026  |  Platform: daily dashboard, 27 Sep 2026  |  Plan and budget: Board update, 17 Sep 2026</a:t>
+              <a:t>Web: GA4, 1-28 Sep 2026  |  Platform: daily dashboard, 29 Sep 2026  |  Plan and budget: Board update, 17 Sep 2026</a:t>
             </a:r>
             <a:endParaRPr lang="en-US" sz="1000" dirty="0"/>
           </a:p>
@@ -4239,7 +4239,7 @@
                 <a:ea typeface="Exo 2" pitchFamily="34" charset="-122"/>
                 <a:cs typeface="Exo 2" pitchFamily="34" charset="-120"/>
               </a:rPr>
-              <a:t>Source: GA4 exports 1-28 Sep 2026; eMYAA Daily Performance Dashboards, cumulative figures on report dates 1, 8, 14, 21 and 27 Sep 2026 (periods of 6 to 7 days).</a:t>
+              <a:t>Source: GA4 exports 1-28 Sep 2026; eMYAA Daily Performance Dashboards, cumulative figures on report dates 1, 8, 14, 21 and 29 Sep 2026 (periods of 6 to 8 days).</a:t>
             </a:r>
             <a:endParaRPr lang="en-US" sz="800" dirty="0"/>
           </a:p>
@@ -4597,7 +4597,7 @@
                 <a:ea typeface="Exo 2" pitchFamily="34" charset="-122"/>
                 <a:cs typeface="Exo 2" pitchFamily="34" charset="-120"/>
               </a:rPr>
-              <a:t>+36</a:t>
+              <a:t>+53</a:t>
             </a:r>
             <a:endParaRPr lang="en-US" sz="3400" dirty="0"/>
           </a:p>
@@ -4636,7 +4636,7 @@
                 <a:ea typeface="Exo 2" pitchFamily="34" charset="-122"/>
                 <a:cs typeface="Exo 2" pitchFamily="34" charset="-120"/>
               </a:rPr>
-              <a:t>app downloads in the six days after launch</a:t>
+              <a:t>app downloads in the eight days after launch</a:t>
             </a:r>
             <a:endParaRPr lang="en-US" sz="1150" dirty="0"/>
           </a:p>
@@ -4764,7 +4764,7 @@
                 <a:ea typeface="Exo 2" pitchFamily="34" charset="-122"/>
                 <a:cs typeface="Exo 2" pitchFamily="34" charset="-120"/>
               </a:rPr>
-              <a:t>+3</a:t>
+              <a:t>+4</a:t>
             </a:r>
             <a:endParaRPr lang="en-US" sz="3400" dirty="0"/>
           </a:p>
@@ -4803,7 +4803,7 @@
                 <a:ea typeface="Exo 2" pitchFamily="34" charset="-122"/>
                 <a:cs typeface="Exo 2" pitchFamily="34" charset="-120"/>
               </a:rPr>
-              <a:t>users onboarded in the same six days</a:t>
+              <a:t>users onboarded in the same eight days</a:t>
             </a:r>
             <a:endParaRPr lang="en-US" sz="1150" dirty="0"/>
           </a:p>
@@ -4842,7 +4842,7 @@
                 <a:ea typeface="Exo 2" pitchFamily="34" charset="-122"/>
                 <a:cs typeface="Exo 2" pitchFamily="34" charset="-120"/>
               </a:rPr>
-              <a:t>60 onboarded, 15 funded, as of 27 Sep</a:t>
+              <a:t>61 onboarded, 15 funded, as of 29 Sep</a:t>
             </a:r>
             <a:endParaRPr lang="en-US" sz="950" dirty="0"/>
           </a:p>
@@ -4918,8 +4918,8 @@
         </p:nvSpPr>
         <p:spPr>
           <a:xfrm>
-            <a:off x="4794954" y="2731770"/>
-            <a:ext cx="521139" cy="2160270"/>
+            <a:off x="4794954" y="3402199"/>
+            <a:ext cx="521139" cy="1489841"/>
           </a:xfrm>
           <a:prstGeom prst="rect">
             <a:avLst/>
@@ -4943,7 +4943,7 @@
         </p:nvSpPr>
         <p:spPr>
           <a:xfrm>
-            <a:off x="4685226" y="2457450"/>
+            <a:off x="4685226" y="3127879"/>
             <a:ext cx="740595" cy="256032"/>
           </a:xfrm>
           <a:prstGeom prst="rect">
@@ -4982,8 +4982,8 @@
         </p:nvSpPr>
         <p:spPr>
           <a:xfrm>
-            <a:off x="5352669" y="4820031"/>
-            <a:ext cx="521139" cy="72009"/>
+            <a:off x="5352669" y="4842379"/>
+            <a:ext cx="521139" cy="49661"/>
           </a:xfrm>
           <a:prstGeom prst="rect">
             <a:avLst/>
@@ -5007,7 +5007,7 @@
         </p:nvSpPr>
         <p:spPr>
           <a:xfrm>
-            <a:off x="5242941" y="4545711"/>
+            <a:off x="5242941" y="4568059"/>
             <a:ext cx="740595" cy="256032"/>
           </a:xfrm>
           <a:prstGeom prst="rect">
@@ -5085,8 +5085,8 @@
         </p:nvSpPr>
         <p:spPr>
           <a:xfrm>
-            <a:off x="6594036" y="3451860"/>
-            <a:ext cx="521139" cy="1440180"/>
+            <a:off x="6594036" y="3898812"/>
+            <a:ext cx="521139" cy="993228"/>
           </a:xfrm>
           <a:prstGeom prst="rect">
             <a:avLst/>
@@ -5110,7 +5110,7 @@
         </p:nvSpPr>
         <p:spPr>
           <a:xfrm>
-            <a:off x="6484308" y="3177540"/>
+            <a:off x="6484308" y="3624492"/>
             <a:ext cx="740595" cy="256032"/>
           </a:xfrm>
           <a:prstGeom prst="rect">
@@ -5149,8 +5149,8 @@
         </p:nvSpPr>
         <p:spPr>
           <a:xfrm>
-            <a:off x="7151751" y="4676013"/>
-            <a:ext cx="521139" cy="216027"/>
+            <a:off x="7151751" y="4743056"/>
+            <a:ext cx="521139" cy="148984"/>
           </a:xfrm>
           <a:prstGeom prst="rect">
             <a:avLst/>
@@ -5174,7 +5174,7 @@
         </p:nvSpPr>
         <p:spPr>
           <a:xfrm>
-            <a:off x="7042023" y="4401693"/>
+            <a:off x="7042023" y="4468736"/>
             <a:ext cx="740595" cy="256032"/>
           </a:xfrm>
           <a:prstGeom prst="rect">
@@ -5252,8 +5252,8 @@
         </p:nvSpPr>
         <p:spPr>
           <a:xfrm>
-            <a:off x="8393118" y="3883914"/>
-            <a:ext cx="521139" cy="1008126"/>
+            <a:off x="8393118" y="4196781"/>
+            <a:ext cx="521139" cy="695259"/>
           </a:xfrm>
           <a:prstGeom prst="rect">
             <a:avLst/>
@@ -5277,7 +5277,7 @@
         </p:nvSpPr>
         <p:spPr>
           <a:xfrm>
-            <a:off x="8283390" y="3609594"/>
+            <a:off x="8283390" y="3922461"/>
             <a:ext cx="740595" cy="256032"/>
           </a:xfrm>
           <a:prstGeom prst="rect">
@@ -5316,8 +5316,8 @@
         </p:nvSpPr>
         <p:spPr>
           <a:xfrm>
-            <a:off x="8950833" y="4531995"/>
-            <a:ext cx="521139" cy="360045"/>
+            <a:off x="8950833" y="4643733"/>
+            <a:ext cx="521139" cy="248307"/>
           </a:xfrm>
           <a:prstGeom prst="rect">
             <a:avLst/>
@@ -5341,7 +5341,7 @@
         </p:nvSpPr>
         <p:spPr>
           <a:xfrm>
-            <a:off x="8841105" y="4257675"/>
+            <a:off x="8841105" y="4369413"/>
             <a:ext cx="740595" cy="256032"/>
           </a:xfrm>
           <a:prstGeom prst="rect">
@@ -5419,8 +5419,8 @@
         </p:nvSpPr>
         <p:spPr>
           <a:xfrm>
-            <a:off x="10192200" y="2299716"/>
-            <a:ext cx="521139" cy="2592324"/>
+            <a:off x="10192200" y="2259987"/>
+            <a:ext cx="521139" cy="2632053"/>
           </a:xfrm>
           <a:prstGeom prst="rect">
             <a:avLst/>
@@ -5444,7 +5444,7 @@
         </p:nvSpPr>
         <p:spPr>
           <a:xfrm>
-            <a:off x="10082472" y="2025396"/>
+            <a:off x="10082472" y="1985667"/>
             <a:ext cx="740595" cy="256032"/>
           </a:xfrm>
           <a:prstGeom prst="rect">
@@ -5469,7 +5469,7 @@
                 <a:ea typeface="Exo 2" pitchFamily="34" charset="-122"/>
                 <a:cs typeface="Exo 2" pitchFamily="34" charset="-120"/>
               </a:rPr>
-              <a:t>36</a:t>
+              <a:t>53</a:t>
             </a:r>
             <a:endParaRPr lang="en-US" sz="1100" dirty="0"/>
           </a:p>
@@ -5483,8 +5483,8 @@
         </p:nvSpPr>
         <p:spPr>
           <a:xfrm>
-            <a:off x="10749915" y="4676013"/>
-            <a:ext cx="521139" cy="216027"/>
+            <a:off x="10749915" y="4693394"/>
+            <a:ext cx="521139" cy="198646"/>
           </a:xfrm>
           <a:prstGeom prst="rect">
             <a:avLst/>
@@ -5508,7 +5508,7 @@
         </p:nvSpPr>
         <p:spPr>
           <a:xfrm>
-            <a:off x="10640187" y="4401693"/>
+            <a:off x="10640187" y="4419074"/>
             <a:ext cx="740595" cy="256032"/>
           </a:xfrm>
           <a:prstGeom prst="rect">
@@ -5533,7 +5533,7 @@
                 <a:ea typeface="Exo 2" pitchFamily="34" charset="-122"/>
                 <a:cs typeface="Exo 2" pitchFamily="34" charset="-120"/>
               </a:rPr>
-              <a:t>3</a:t>
+              <a:t>4</a:t>
             </a:r>
             <a:endParaRPr lang="en-US" sz="1100" dirty="0"/>
           </a:p>
@@ -5572,7 +5572,7 @@
                 <a:ea typeface="Exo 2" pitchFamily="34" charset="-122"/>
                 <a:cs typeface="Exo 2" pitchFamily="34" charset="-120"/>
               </a:rPr>
-              <a:t>21-27 Sep (paid live)</a:t>
+              <a:t>21-29 Sep (paid live)</a:t>
             </a:r>
             <a:endParaRPr lang="en-US" sz="1050" dirty="0"/>
           </a:p>
@@ -6025,7 +6025,7 @@
                 <a:ea typeface="Exo 2" pitchFamily="34" charset="-122"/>
                 <a:cs typeface="Exo 2" pitchFamily="34" charset="-120"/>
               </a:rPr>
-              <a:t>Source: App installs: eMYAA Daily Performance Dashboards (Android + iOS, cumulative, on report dates 1-27 Sep 2026). Ads: GA4 Reports snapshot and Google Ads campaigns exports, 1-28 Sep 2026.</a:t>
+              <a:t>Source: App installs: eMYAA Daily Performance Dashboards (Android + iOS, cumulative, on report dates 1-29 Sep 2026). Ads: GA4 Reports snapshot and Google Ads campaigns exports, 1-28 Sep 2026.</a:t>
             </a:r>
             <a:endParaRPr lang="en-US" sz="800" dirty="0"/>
           </a:p>
@@ -6242,7 +6242,7 @@
         </p:nvSpPr>
         <p:spPr>
           <a:xfrm>
-            <a:off x="1024128" y="4263390"/>
+            <a:off x="1024128" y="4416552"/>
             <a:ext cx="6172200" cy="0"/>
           </a:xfrm>
           <a:prstGeom prst="line">
@@ -6265,7 +6265,7 @@
         </p:nvSpPr>
         <p:spPr>
           <a:xfrm>
-            <a:off x="566928" y="4153662"/>
+            <a:off x="566928" y="4306824"/>
             <a:ext cx="384048" cy="219456"/>
           </a:xfrm>
           <a:prstGeom prst="rect">
@@ -6304,7 +6304,7 @@
         </p:nvSpPr>
         <p:spPr>
           <a:xfrm>
-            <a:off x="1024128" y="3497580"/>
+            <a:off x="1024128" y="3803904"/>
             <a:ext cx="6172200" cy="0"/>
           </a:xfrm>
           <a:prstGeom prst="line">
@@ -6327,7 +6327,7 @@
         </p:nvSpPr>
         <p:spPr>
           <a:xfrm>
-            <a:off x="566928" y="3387852"/>
+            <a:off x="566928" y="3694176"/>
             <a:ext cx="384048" cy="219456"/>
           </a:xfrm>
           <a:prstGeom prst="rect">
@@ -6366,7 +6366,7 @@
         </p:nvSpPr>
         <p:spPr>
           <a:xfrm>
-            <a:off x="1024128" y="2731770"/>
+            <a:off x="1024128" y="3191256"/>
             <a:ext cx="6172200" cy="0"/>
           </a:xfrm>
           <a:prstGeom prst="line">
@@ -6389,7 +6389,7 @@
         </p:nvSpPr>
         <p:spPr>
           <a:xfrm>
-            <a:off x="566928" y="2622042"/>
+            <a:off x="566928" y="3081528"/>
             <a:ext cx="384048" cy="219456"/>
           </a:xfrm>
           <a:prstGeom prst="rect">
@@ -6428,7 +6428,7 @@
         </p:nvSpPr>
         <p:spPr>
           <a:xfrm>
-            <a:off x="1024128" y="1965960"/>
+            <a:off x="1024128" y="2578608"/>
             <a:ext cx="6172200" cy="0"/>
           </a:xfrm>
           <a:prstGeom prst="line">
@@ -6451,6 +6451,68 @@
         </p:nvSpPr>
         <p:spPr>
           <a:xfrm>
+            <a:off x="566928" y="2468880"/>
+            <a:ext cx="384048" cy="219456"/>
+          </a:xfrm>
+          <a:prstGeom prst="rect">
+            <a:avLst/>
+          </a:prstGeom>
+          <a:noFill/>
+          <a:ln/>
+        </p:spPr>
+        <p:txBody>
+          <a:bodyPr wrap="square" lIns="0" tIns="0" rIns="0" bIns="0" rtlCol="0" anchor="ctr"/>
+          <a:lstStyle/>
+          <a:p>
+            <a:pPr algn="r" indent="0" marL="0">
+              <a:buNone/>
+            </a:pPr>
+            <a:r>
+              <a:rPr lang="en-US" sz="900" dirty="0">
+                <a:solidFill>
+                  <a:srgbClr val="7A849C"/>
+                </a:solidFill>
+                <a:latin typeface="Exo 2" pitchFamily="34" charset="0"/>
+                <a:ea typeface="Exo 2" pitchFamily="34" charset="-122"/>
+                <a:cs typeface="Exo 2" pitchFamily="34" charset="-120"/>
+              </a:rPr>
+              <a:t>480</a:t>
+            </a:r>
+            <a:endParaRPr lang="en-US" sz="900" dirty="0"/>
+          </a:p>
+        </p:txBody>
+      </p:sp>
+      <p:sp>
+        <p:nvSpPr>
+          <p:cNvPr id="26" name="Shape 20"/>
+          <p:cNvSpPr/>
+          <p:nvPr/>
+        </p:nvSpPr>
+        <p:spPr>
+          <a:xfrm>
+            <a:off x="1024128" y="1965960"/>
+            <a:ext cx="6172200" cy="0"/>
+          </a:xfrm>
+          <a:prstGeom prst="line">
+            <a:avLst/>
+          </a:prstGeom>
+          <a:noFill/>
+          <a:ln w="9525">
+            <a:solidFill>
+              <a:srgbClr val="E6EAF2"/>
+            </a:solidFill>
+            <a:prstDash val="solid"/>
+          </a:ln>
+        </p:spPr>
+      </p:sp>
+      <p:sp>
+        <p:nvSpPr>
+          <p:cNvPr id="27" name="Text 21"/>
+          <p:cNvSpPr txBox="1"/>
+          <p:nvPr/>
+        </p:nvSpPr>
+        <p:spPr>
+          <a:xfrm>
             <a:off x="566928" y="1856232"/>
             <a:ext cx="384048" cy="219456"/>
           </a:xfrm>
@@ -6476,7 +6538,7 @@
                 <a:ea typeface="Exo 2" pitchFamily="34" charset="-122"/>
                 <a:cs typeface="Exo 2" pitchFamily="34" charset="-120"/>
               </a:rPr>
-              <a:t>480</a:t>
+              <a:t>510</a:t>
             </a:r>
             <a:endParaRPr lang="en-US" sz="900" dirty="0"/>
           </a:p>
@@ -6484,13 +6546,13 @@
       </p:sp>
       <p:sp>
         <p:nvSpPr>
-          <p:cNvPr id="26" name="Shape 20"/>
+          <p:cNvPr id="28" name="Shape 22"/>
           <p:cNvSpPr/>
           <p:nvPr/>
         </p:nvSpPr>
         <p:spPr>
           <a:xfrm>
-            <a:off x="5879592" y="1920240"/>
+            <a:off x="5324497" y="1920240"/>
             <a:ext cx="0" cy="3108960"/>
           </a:xfrm>
           <a:prstGeom prst="line">
@@ -6507,14 +6569,14 @@
       </p:sp>
       <p:sp>
         <p:nvSpPr>
-          <p:cNvPr id="27" name="Shape 21"/>
+          <p:cNvPr id="29" name="Shape 23"/>
           <p:cNvSpPr/>
           <p:nvPr/>
         </p:nvSpPr>
         <p:spPr>
           <a:xfrm flipV="1">
-            <a:off x="1161288" y="4288917"/>
-            <a:ext cx="393192" cy="408432"/>
+            <a:off x="1161288" y="4436974"/>
+            <a:ext cx="346934" cy="326746"/>
           </a:xfrm>
           <a:prstGeom prst="line">
             <a:avLst/>
@@ -6530,14 +6592,14 @@
       </p:sp>
       <p:sp>
         <p:nvSpPr>
-          <p:cNvPr id="28" name="Shape 22"/>
+          <p:cNvPr id="30" name="Shape 24"/>
           <p:cNvSpPr/>
           <p:nvPr/>
         </p:nvSpPr>
         <p:spPr>
           <a:xfrm flipV="1">
-            <a:off x="1554480" y="4135755"/>
-            <a:ext cx="393192" cy="153162"/>
+            <a:off x="1508222" y="4314444"/>
+            <a:ext cx="346934" cy="122530"/>
           </a:xfrm>
           <a:prstGeom prst="line">
             <a:avLst/>
@@ -6553,14 +6615,14 @@
       </p:sp>
       <p:sp>
         <p:nvSpPr>
-          <p:cNvPr id="29" name="Shape 23"/>
+          <p:cNvPr id="31" name="Shape 25"/>
           <p:cNvSpPr/>
           <p:nvPr/>
         </p:nvSpPr>
         <p:spPr>
           <a:xfrm flipV="1">
-            <a:off x="1947672" y="3931539"/>
-            <a:ext cx="393192" cy="204216"/>
+            <a:off x="1855156" y="4151071"/>
+            <a:ext cx="346934" cy="163373"/>
           </a:xfrm>
           <a:prstGeom prst="line">
             <a:avLst/>
@@ -6576,14 +6638,14 @@
       </p:sp>
       <p:sp>
         <p:nvSpPr>
-          <p:cNvPr id="30" name="Shape 24"/>
+          <p:cNvPr id="32" name="Shape 26"/>
           <p:cNvSpPr/>
           <p:nvPr/>
         </p:nvSpPr>
         <p:spPr>
           <a:xfrm flipV="1">
-            <a:off x="2340864" y="3752850"/>
-            <a:ext cx="393192" cy="178689"/>
+            <a:off x="2202090" y="4008120"/>
+            <a:ext cx="346934" cy="142951"/>
           </a:xfrm>
           <a:prstGeom prst="line">
             <a:avLst/>
@@ -6599,14 +6661,14 @@
       </p:sp>
       <p:sp>
         <p:nvSpPr>
-          <p:cNvPr id="31" name="Shape 25"/>
+          <p:cNvPr id="33" name="Shape 27"/>
           <p:cNvSpPr/>
           <p:nvPr/>
         </p:nvSpPr>
         <p:spPr>
           <a:xfrm flipV="1">
-            <a:off x="2734056" y="3650742"/>
-            <a:ext cx="393192" cy="102108"/>
+            <a:off x="2549024" y="3926434"/>
+            <a:ext cx="346934" cy="81686"/>
           </a:xfrm>
           <a:prstGeom prst="line">
             <a:avLst/>
@@ -6622,14 +6684,14 @@
       </p:sp>
       <p:sp>
         <p:nvSpPr>
-          <p:cNvPr id="32" name="Shape 26"/>
+          <p:cNvPr id="34" name="Shape 28"/>
           <p:cNvSpPr/>
           <p:nvPr/>
         </p:nvSpPr>
         <p:spPr>
           <a:xfrm flipV="1">
-            <a:off x="3127248" y="3523107"/>
-            <a:ext cx="393192" cy="127635"/>
+            <a:off x="2895959" y="3824326"/>
+            <a:ext cx="346934" cy="102108"/>
           </a:xfrm>
           <a:prstGeom prst="line">
             <a:avLst/>
@@ -6645,14 +6707,14 @@
       </p:sp>
       <p:sp>
         <p:nvSpPr>
-          <p:cNvPr id="33" name="Shape 27"/>
+          <p:cNvPr id="35" name="Shape 29"/>
           <p:cNvSpPr/>
           <p:nvPr/>
         </p:nvSpPr>
         <p:spPr>
           <a:xfrm flipV="1">
-            <a:off x="3520440" y="3420999"/>
-            <a:ext cx="393192" cy="102108"/>
+            <a:off x="3242893" y="3742639"/>
+            <a:ext cx="346934" cy="81686"/>
           </a:xfrm>
           <a:prstGeom prst="line">
             <a:avLst/>
@@ -6668,14 +6730,14 @@
       </p:sp>
       <p:sp>
         <p:nvSpPr>
-          <p:cNvPr id="34" name="Shape 28"/>
+          <p:cNvPr id="36" name="Shape 30"/>
           <p:cNvSpPr/>
           <p:nvPr/>
         </p:nvSpPr>
         <p:spPr>
           <a:xfrm flipV="1">
-            <a:off x="3913632" y="3242310"/>
-            <a:ext cx="393192" cy="178689"/>
+            <a:off x="3589827" y="3599688"/>
+            <a:ext cx="346934" cy="142951"/>
           </a:xfrm>
           <a:prstGeom prst="line">
             <a:avLst/>
@@ -6691,14 +6753,14 @@
       </p:sp>
       <p:sp>
         <p:nvSpPr>
-          <p:cNvPr id="35" name="Shape 29"/>
+          <p:cNvPr id="37" name="Shape 31"/>
           <p:cNvSpPr/>
           <p:nvPr/>
         </p:nvSpPr>
         <p:spPr>
           <a:xfrm flipV="1">
-            <a:off x="4306824" y="3191256"/>
-            <a:ext cx="393192" cy="51054"/>
+            <a:off x="3936761" y="3558845"/>
+            <a:ext cx="346934" cy="40843"/>
           </a:xfrm>
           <a:prstGeom prst="line">
             <a:avLst/>
@@ -6714,14 +6776,14 @@
       </p:sp>
       <p:sp>
         <p:nvSpPr>
-          <p:cNvPr id="36" name="Shape 30"/>
+          <p:cNvPr id="38" name="Shape 32"/>
           <p:cNvSpPr/>
           <p:nvPr/>
         </p:nvSpPr>
         <p:spPr>
           <a:xfrm flipV="1">
-            <a:off x="4700016" y="3063621"/>
-            <a:ext cx="393192" cy="127635"/>
+            <a:off x="4283695" y="3456737"/>
+            <a:ext cx="346934" cy="102108"/>
           </a:xfrm>
           <a:prstGeom prst="line">
             <a:avLst/>
@@ -6737,14 +6799,14 @@
       </p:sp>
       <p:sp>
         <p:nvSpPr>
-          <p:cNvPr id="37" name="Shape 31"/>
+          <p:cNvPr id="39" name="Shape 33"/>
           <p:cNvSpPr/>
           <p:nvPr/>
         </p:nvSpPr>
         <p:spPr>
           <a:xfrm>
-            <a:off x="5093208" y="3063621"/>
-            <a:ext cx="393192" cy="0"/>
+            <a:off x="4630629" y="3456737"/>
+            <a:ext cx="346934" cy="0"/>
           </a:xfrm>
           <a:prstGeom prst="line">
             <a:avLst/>
@@ -6760,14 +6822,14 @@
       </p:sp>
       <p:sp>
         <p:nvSpPr>
-          <p:cNvPr id="38" name="Shape 32"/>
+          <p:cNvPr id="40" name="Shape 34"/>
           <p:cNvSpPr/>
           <p:nvPr/>
         </p:nvSpPr>
         <p:spPr>
           <a:xfrm flipV="1">
-            <a:off x="5486400" y="2680716"/>
-            <a:ext cx="393192" cy="382905"/>
+            <a:off x="4977563" y="3150413"/>
+            <a:ext cx="346934" cy="306324"/>
           </a:xfrm>
           <a:prstGeom prst="line">
             <a:avLst/>
@@ -6783,14 +6845,14 @@
       </p:sp>
       <p:sp>
         <p:nvSpPr>
-          <p:cNvPr id="39" name="Shape 33"/>
+          <p:cNvPr id="41" name="Shape 35"/>
           <p:cNvSpPr/>
           <p:nvPr/>
         </p:nvSpPr>
         <p:spPr>
           <a:xfrm flipV="1">
-            <a:off x="5879592" y="2629662"/>
-            <a:ext cx="393192" cy="51054"/>
+            <a:off x="5324497" y="3109570"/>
+            <a:ext cx="346934" cy="40843"/>
           </a:xfrm>
           <a:prstGeom prst="line">
             <a:avLst/>
@@ -6806,14 +6868,14 @@
       </p:sp>
       <p:sp>
         <p:nvSpPr>
-          <p:cNvPr id="40" name="Shape 34"/>
+          <p:cNvPr id="42" name="Shape 36"/>
           <p:cNvSpPr/>
           <p:nvPr/>
         </p:nvSpPr>
         <p:spPr>
           <a:xfrm flipV="1">
-            <a:off x="6272784" y="2604135"/>
-            <a:ext cx="393192" cy="25527"/>
+            <a:off x="5671432" y="3089148"/>
+            <a:ext cx="346934" cy="20422"/>
           </a:xfrm>
           <a:prstGeom prst="line">
             <a:avLst/>
@@ -6829,14 +6891,14 @@
       </p:sp>
       <p:sp>
         <p:nvSpPr>
-          <p:cNvPr id="41" name="Shape 35"/>
+          <p:cNvPr id="43" name="Shape 37"/>
           <p:cNvSpPr/>
           <p:nvPr/>
         </p:nvSpPr>
         <p:spPr>
           <a:xfrm flipV="1">
-            <a:off x="6665976" y="2144649"/>
-            <a:ext cx="393192" cy="459486"/>
+            <a:off x="6018366" y="2721559"/>
+            <a:ext cx="346934" cy="367589"/>
           </a:xfrm>
           <a:prstGeom prst="line">
             <a:avLst/>
@@ -6852,13 +6914,59 @@
       </p:sp>
       <p:sp>
         <p:nvSpPr>
-          <p:cNvPr id="42" name="Shape 36"/>
+          <p:cNvPr id="44" name="Shape 38"/>
           <p:cNvSpPr/>
           <p:nvPr/>
         </p:nvSpPr>
         <p:spPr>
-          <a:xfrm>
-            <a:off x="1115568" y="4651629"/>
+          <a:xfrm flipV="1">
+            <a:off x="6365300" y="2578608"/>
+            <a:ext cx="346934" cy="142951"/>
+          </a:xfrm>
+          <a:prstGeom prst="line">
+            <a:avLst/>
+          </a:prstGeom>
+          <a:noFill/>
+          <a:ln w="31750">
+            <a:solidFill>
+              <a:srgbClr val="132257"/>
+            </a:solidFill>
+            <a:prstDash val="solid"/>
+          </a:ln>
+        </p:spPr>
+      </p:sp>
+      <p:sp>
+        <p:nvSpPr>
+          <p:cNvPr id="45" name="Shape 39"/>
+          <p:cNvSpPr/>
+          <p:nvPr/>
+        </p:nvSpPr>
+        <p:spPr>
+          <a:xfrm flipV="1">
+            <a:off x="6712234" y="2374392"/>
+            <a:ext cx="346934" cy="204216"/>
+          </a:xfrm>
+          <a:prstGeom prst="line">
+            <a:avLst/>
+          </a:prstGeom>
+          <a:noFill/>
+          <a:ln w="31750">
+            <a:solidFill>
+              <a:srgbClr val="132257"/>
+            </a:solidFill>
+            <a:prstDash val="solid"/>
+          </a:ln>
+        </p:spPr>
+      </p:sp>
+      <p:sp>
+        <p:nvSpPr>
+          <p:cNvPr id="46" name="Shape 40"/>
+          <p:cNvSpPr/>
+          <p:nvPr/>
+        </p:nvSpPr>
+        <p:spPr>
+          <a:xfrm>
+            <a:off x="1115568" y="4717999"/>
             <a:ext cx="91440" cy="91440"/>
           </a:xfrm>
           <a:prstGeom prst="ellipse">
@@ -6877,7 +6985,7 @@
       </p:sp>
       <p:sp>
         <p:nvSpPr>
-          <p:cNvPr id="43" name="Text 37"/>
+          <p:cNvPr id="47" name="Text 41"/>
           <p:cNvSpPr txBox="1"/>
           <p:nvPr/>
         </p:nvSpPr>
@@ -6916,13 +7024,13 @@
       </p:sp>
       <p:sp>
         <p:nvSpPr>
-          <p:cNvPr id="44" name="Shape 38"/>
+          <p:cNvPr id="48" name="Shape 42"/>
           <p:cNvSpPr/>
           <p:nvPr/>
         </p:nvSpPr>
         <p:spPr>
           <a:xfrm>
-            <a:off x="1508760" y="4243197"/>
+            <a:off x="1462502" y="4391254"/>
             <a:ext cx="91440" cy="91440"/>
           </a:xfrm>
           <a:prstGeom prst="ellipse">
@@ -6941,13 +7049,13 @@
       </p:sp>
       <p:sp>
         <p:nvSpPr>
-          <p:cNvPr id="45" name="Text 39"/>
+          <p:cNvPr id="49" name="Text 43"/>
           <p:cNvSpPr txBox="1"/>
           <p:nvPr/>
         </p:nvSpPr>
         <p:spPr>
           <a:xfrm>
-            <a:off x="1280160" y="5084064"/>
+            <a:off x="1233902" y="5084064"/>
             <a:ext cx="548640" cy="219456"/>
           </a:xfrm>
           <a:prstGeom prst="rect">
@@ -6980,13 +7088,13 @@
       </p:sp>
       <p:sp>
         <p:nvSpPr>
-          <p:cNvPr id="46" name="Shape 40"/>
+          <p:cNvPr id="50" name="Shape 44"/>
           <p:cNvSpPr/>
           <p:nvPr/>
         </p:nvSpPr>
         <p:spPr>
           <a:xfrm>
-            <a:off x="1901952" y="4090035"/>
+            <a:off x="1809436" y="4268724"/>
             <a:ext cx="91440" cy="91440"/>
           </a:xfrm>
           <a:prstGeom prst="ellipse">
@@ -7005,13 +7113,13 @@
       </p:sp>
       <p:sp>
         <p:nvSpPr>
-          <p:cNvPr id="47" name="Text 41"/>
+          <p:cNvPr id="51" name="Text 45"/>
           <p:cNvSpPr txBox="1"/>
           <p:nvPr/>
         </p:nvSpPr>
         <p:spPr>
           <a:xfrm>
-            <a:off x="1673352" y="5084064"/>
+            <a:off x="1580836" y="5084064"/>
             <a:ext cx="548640" cy="219456"/>
           </a:xfrm>
           <a:prstGeom prst="rect">
@@ -7044,13 +7152,13 @@
       </p:sp>
       <p:sp>
         <p:nvSpPr>
-          <p:cNvPr id="48" name="Shape 42"/>
+          <p:cNvPr id="52" name="Shape 46"/>
           <p:cNvSpPr/>
           <p:nvPr/>
         </p:nvSpPr>
         <p:spPr>
           <a:xfrm>
-            <a:off x="2295144" y="3885819"/>
+            <a:off x="2156370" y="4105351"/>
             <a:ext cx="91440" cy="91440"/>
           </a:xfrm>
           <a:prstGeom prst="ellipse">
@@ -7069,13 +7177,13 @@
       </p:sp>
       <p:sp>
         <p:nvSpPr>
-          <p:cNvPr id="49" name="Text 43"/>
+          <p:cNvPr id="53" name="Text 47"/>
           <p:cNvSpPr txBox="1"/>
           <p:nvPr/>
         </p:nvSpPr>
         <p:spPr>
           <a:xfrm>
-            <a:off x="2066544" y="5084064"/>
+            <a:off x="1927770" y="5084064"/>
             <a:ext cx="548640" cy="219456"/>
           </a:xfrm>
           <a:prstGeom prst="rect">
@@ -7108,13 +7216,13 @@
       </p:sp>
       <p:sp>
         <p:nvSpPr>
-          <p:cNvPr id="50" name="Shape 44"/>
+          <p:cNvPr id="54" name="Shape 48"/>
           <p:cNvSpPr/>
           <p:nvPr/>
         </p:nvSpPr>
         <p:spPr>
           <a:xfrm>
-            <a:off x="2688336" y="3707130"/>
+            <a:off x="2503304" y="3962400"/>
             <a:ext cx="91440" cy="91440"/>
           </a:xfrm>
           <a:prstGeom prst="ellipse">
@@ -7133,13 +7241,13 @@
       </p:sp>
       <p:sp>
         <p:nvSpPr>
-          <p:cNvPr id="51" name="Text 45"/>
+          <p:cNvPr id="55" name="Text 49"/>
           <p:cNvSpPr txBox="1"/>
           <p:nvPr/>
         </p:nvSpPr>
         <p:spPr>
           <a:xfrm>
-            <a:off x="2459736" y="5084064"/>
+            <a:off x="2274704" y="5084064"/>
             <a:ext cx="548640" cy="219456"/>
           </a:xfrm>
           <a:prstGeom prst="rect">
@@ -7172,13 +7280,13 @@
       </p:sp>
       <p:sp>
         <p:nvSpPr>
-          <p:cNvPr id="52" name="Shape 46"/>
+          <p:cNvPr id="56" name="Shape 50"/>
           <p:cNvSpPr/>
           <p:nvPr/>
         </p:nvSpPr>
         <p:spPr>
           <a:xfrm>
-            <a:off x="3081528" y="3605022"/>
+            <a:off x="2850239" y="3880714"/>
             <a:ext cx="91440" cy="91440"/>
           </a:xfrm>
           <a:prstGeom prst="ellipse">
@@ -7197,13 +7305,13 @@
       </p:sp>
       <p:sp>
         <p:nvSpPr>
-          <p:cNvPr id="53" name="Text 47"/>
+          <p:cNvPr id="57" name="Text 51"/>
           <p:cNvSpPr txBox="1"/>
           <p:nvPr/>
         </p:nvSpPr>
         <p:spPr>
           <a:xfrm>
-            <a:off x="2852928" y="5084064"/>
+            <a:off x="2621639" y="5084064"/>
             <a:ext cx="548640" cy="219456"/>
           </a:xfrm>
           <a:prstGeom prst="rect">
@@ -7236,13 +7344,13 @@
       </p:sp>
       <p:sp>
         <p:nvSpPr>
-          <p:cNvPr id="54" name="Shape 48"/>
+          <p:cNvPr id="58" name="Shape 52"/>
           <p:cNvSpPr/>
           <p:nvPr/>
         </p:nvSpPr>
         <p:spPr>
           <a:xfrm>
-            <a:off x="3474720" y="3477387"/>
+            <a:off x="3197173" y="3778606"/>
             <a:ext cx="91440" cy="91440"/>
           </a:xfrm>
           <a:prstGeom prst="ellipse">
@@ -7261,13 +7369,13 @@
       </p:sp>
       <p:sp>
         <p:nvSpPr>
-          <p:cNvPr id="55" name="Text 49"/>
+          <p:cNvPr id="59" name="Text 53"/>
           <p:cNvSpPr txBox="1"/>
           <p:nvPr/>
         </p:nvSpPr>
         <p:spPr>
           <a:xfrm>
-            <a:off x="3246120" y="5084064"/>
+            <a:off x="2968573" y="5084064"/>
             <a:ext cx="548640" cy="219456"/>
           </a:xfrm>
           <a:prstGeom prst="rect">
@@ -7300,13 +7408,13 @@
       </p:sp>
       <p:sp>
         <p:nvSpPr>
-          <p:cNvPr id="56" name="Shape 50"/>
+          <p:cNvPr id="60" name="Shape 54"/>
           <p:cNvSpPr/>
           <p:nvPr/>
         </p:nvSpPr>
         <p:spPr>
           <a:xfrm>
-            <a:off x="3867912" y="3375279"/>
+            <a:off x="3544107" y="3696919"/>
             <a:ext cx="91440" cy="91440"/>
           </a:xfrm>
           <a:prstGeom prst="ellipse">
@@ -7325,13 +7433,13 @@
       </p:sp>
       <p:sp>
         <p:nvSpPr>
-          <p:cNvPr id="57" name="Text 51"/>
+          <p:cNvPr id="61" name="Text 55"/>
           <p:cNvSpPr txBox="1"/>
           <p:nvPr/>
         </p:nvSpPr>
         <p:spPr>
           <a:xfrm>
-            <a:off x="3639312" y="5084064"/>
+            <a:off x="3315507" y="5084064"/>
             <a:ext cx="548640" cy="219456"/>
           </a:xfrm>
           <a:prstGeom prst="rect">
@@ -7364,13 +7472,13 @@
       </p:sp>
       <p:sp>
         <p:nvSpPr>
-          <p:cNvPr id="58" name="Shape 52"/>
+          <p:cNvPr id="62" name="Shape 56"/>
           <p:cNvSpPr/>
           <p:nvPr/>
         </p:nvSpPr>
         <p:spPr>
           <a:xfrm>
-            <a:off x="4261104" y="3196590"/>
+            <a:off x="3891041" y="3553968"/>
             <a:ext cx="91440" cy="91440"/>
           </a:xfrm>
           <a:prstGeom prst="ellipse">
@@ -7389,13 +7497,13 @@
       </p:sp>
       <p:sp>
         <p:nvSpPr>
-          <p:cNvPr id="59" name="Text 53"/>
+          <p:cNvPr id="63" name="Text 57"/>
           <p:cNvSpPr txBox="1"/>
           <p:nvPr/>
         </p:nvSpPr>
         <p:spPr>
           <a:xfrm>
-            <a:off x="4032504" y="5084064"/>
+            <a:off x="3662441" y="5084064"/>
             <a:ext cx="548640" cy="219456"/>
           </a:xfrm>
           <a:prstGeom prst="rect">
@@ -7428,13 +7536,13 @@
       </p:sp>
       <p:sp>
         <p:nvSpPr>
-          <p:cNvPr id="60" name="Shape 54"/>
+          <p:cNvPr id="64" name="Shape 58"/>
           <p:cNvSpPr/>
           <p:nvPr/>
         </p:nvSpPr>
         <p:spPr>
           <a:xfrm>
-            <a:off x="4654296" y="3145536"/>
+            <a:off x="4237975" y="3513125"/>
             <a:ext cx="91440" cy="91440"/>
           </a:xfrm>
           <a:prstGeom prst="ellipse">
@@ -7453,13 +7561,13 @@
       </p:sp>
       <p:sp>
         <p:nvSpPr>
-          <p:cNvPr id="61" name="Text 55"/>
+          <p:cNvPr id="65" name="Text 59"/>
           <p:cNvSpPr txBox="1"/>
           <p:nvPr/>
         </p:nvSpPr>
         <p:spPr>
           <a:xfrm>
-            <a:off x="4425696" y="5084064"/>
+            <a:off x="4009375" y="5084064"/>
             <a:ext cx="548640" cy="219456"/>
           </a:xfrm>
           <a:prstGeom prst="rect">
@@ -7492,13 +7600,13 @@
       </p:sp>
       <p:sp>
         <p:nvSpPr>
-          <p:cNvPr id="62" name="Shape 56"/>
+          <p:cNvPr id="66" name="Shape 60"/>
           <p:cNvSpPr/>
           <p:nvPr/>
         </p:nvSpPr>
         <p:spPr>
           <a:xfrm>
-            <a:off x="5047488" y="3017901"/>
+            <a:off x="4584909" y="3411017"/>
             <a:ext cx="91440" cy="91440"/>
           </a:xfrm>
           <a:prstGeom prst="ellipse">
@@ -7517,13 +7625,13 @@
       </p:sp>
       <p:sp>
         <p:nvSpPr>
-          <p:cNvPr id="63" name="Text 57"/>
+          <p:cNvPr id="67" name="Text 61"/>
           <p:cNvSpPr txBox="1"/>
           <p:nvPr/>
         </p:nvSpPr>
         <p:spPr>
           <a:xfrm>
-            <a:off x="4818888" y="5084064"/>
+            <a:off x="4356309" y="5084064"/>
             <a:ext cx="548640" cy="219456"/>
           </a:xfrm>
           <a:prstGeom prst="rect">
@@ -7556,13 +7664,13 @@
       </p:sp>
       <p:sp>
         <p:nvSpPr>
-          <p:cNvPr id="64" name="Shape 58"/>
+          <p:cNvPr id="68" name="Shape 62"/>
           <p:cNvSpPr/>
           <p:nvPr/>
         </p:nvSpPr>
         <p:spPr>
           <a:xfrm>
-            <a:off x="5440680" y="3017901"/>
+            <a:off x="4931843" y="3411017"/>
             <a:ext cx="91440" cy="91440"/>
           </a:xfrm>
           <a:prstGeom prst="ellipse">
@@ -7581,13 +7689,13 @@
       </p:sp>
       <p:sp>
         <p:nvSpPr>
-          <p:cNvPr id="65" name="Text 59"/>
+          <p:cNvPr id="69" name="Text 63"/>
           <p:cNvSpPr txBox="1"/>
           <p:nvPr/>
         </p:nvSpPr>
         <p:spPr>
           <a:xfrm>
-            <a:off x="5212080" y="5084064"/>
+            <a:off x="4703243" y="5084064"/>
             <a:ext cx="548640" cy="219456"/>
           </a:xfrm>
           <a:prstGeom prst="rect">
@@ -7620,13 +7728,13 @@
       </p:sp>
       <p:sp>
         <p:nvSpPr>
-          <p:cNvPr id="66" name="Shape 60"/>
+          <p:cNvPr id="70" name="Shape 64"/>
           <p:cNvSpPr/>
           <p:nvPr/>
         </p:nvSpPr>
         <p:spPr>
           <a:xfrm>
-            <a:off x="5833872" y="2634996"/>
+            <a:off x="5278777" y="3104693"/>
             <a:ext cx="91440" cy="91440"/>
           </a:xfrm>
           <a:prstGeom prst="ellipse">
@@ -7645,13 +7753,13 @@
       </p:sp>
       <p:sp>
         <p:nvSpPr>
-          <p:cNvPr id="67" name="Text 61"/>
+          <p:cNvPr id="71" name="Text 65"/>
           <p:cNvSpPr txBox="1"/>
           <p:nvPr/>
         </p:nvSpPr>
         <p:spPr>
           <a:xfrm>
-            <a:off x="5605272" y="5084064"/>
+            <a:off x="5050177" y="5084064"/>
             <a:ext cx="548640" cy="219456"/>
           </a:xfrm>
           <a:prstGeom prst="rect">
@@ -7684,13 +7792,13 @@
       </p:sp>
       <p:sp>
         <p:nvSpPr>
-          <p:cNvPr id="68" name="Shape 62"/>
+          <p:cNvPr id="72" name="Shape 66"/>
           <p:cNvSpPr/>
           <p:nvPr/>
         </p:nvSpPr>
         <p:spPr>
           <a:xfrm>
-            <a:off x="6227064" y="2583942"/>
+            <a:off x="5625712" y="3063850"/>
             <a:ext cx="91440" cy="91440"/>
           </a:xfrm>
           <a:prstGeom prst="ellipse">
@@ -7709,13 +7817,13 @@
       </p:sp>
       <p:sp>
         <p:nvSpPr>
-          <p:cNvPr id="69" name="Text 63"/>
+          <p:cNvPr id="73" name="Text 67"/>
           <p:cNvSpPr txBox="1"/>
           <p:nvPr/>
         </p:nvSpPr>
         <p:spPr>
           <a:xfrm>
-            <a:off x="5998464" y="5084064"/>
+            <a:off x="5397112" y="5084064"/>
             <a:ext cx="548640" cy="219456"/>
           </a:xfrm>
           <a:prstGeom prst="rect">
@@ -7748,13 +7856,13 @@
       </p:sp>
       <p:sp>
         <p:nvSpPr>
-          <p:cNvPr id="70" name="Shape 64"/>
+          <p:cNvPr id="74" name="Shape 68"/>
           <p:cNvSpPr/>
           <p:nvPr/>
         </p:nvSpPr>
         <p:spPr>
           <a:xfrm>
-            <a:off x="6620256" y="2558415"/>
+            <a:off x="5972646" y="3043428"/>
             <a:ext cx="91440" cy="91440"/>
           </a:xfrm>
           <a:prstGeom prst="ellipse">
@@ -7773,13 +7881,13 @@
       </p:sp>
       <p:sp>
         <p:nvSpPr>
-          <p:cNvPr id="71" name="Text 65"/>
+          <p:cNvPr id="75" name="Text 69"/>
           <p:cNvSpPr txBox="1"/>
           <p:nvPr/>
         </p:nvSpPr>
         <p:spPr>
           <a:xfrm>
-            <a:off x="6391656" y="5084064"/>
+            <a:off x="5744046" y="5084064"/>
             <a:ext cx="548640" cy="219456"/>
           </a:xfrm>
           <a:prstGeom prst="rect">
@@ -7812,13 +7920,13 @@
       </p:sp>
       <p:sp>
         <p:nvSpPr>
-          <p:cNvPr id="72" name="Shape 66"/>
+          <p:cNvPr id="76" name="Shape 70"/>
           <p:cNvSpPr/>
           <p:nvPr/>
         </p:nvSpPr>
         <p:spPr>
           <a:xfrm>
-            <a:off x="7013448" y="2098929"/>
+            <a:off x="6319580" y="2675839"/>
             <a:ext cx="91440" cy="91440"/>
           </a:xfrm>
           <a:prstGeom prst="ellipse">
@@ -7837,7 +7945,135 @@
       </p:sp>
       <p:sp>
         <p:nvSpPr>
-          <p:cNvPr id="73" name="Text 67"/>
+          <p:cNvPr id="77" name="Text 71"/>
+          <p:cNvSpPr txBox="1"/>
+          <p:nvPr/>
+        </p:nvSpPr>
+        <p:spPr>
+          <a:xfrm>
+            <a:off x="6090980" y="5084064"/>
+            <a:ext cx="548640" cy="219456"/>
+          </a:xfrm>
+          <a:prstGeom prst="rect">
+            <a:avLst/>
+          </a:prstGeom>
+          <a:noFill/>
+          <a:ln/>
+        </p:spPr>
+        <p:txBody>
+          <a:bodyPr wrap="square" lIns="0" tIns="0" rIns="0" bIns="0" rtlCol="0" anchor="t"/>
+          <a:lstStyle/>
+          <a:p>
+            <a:pPr algn="ctr" indent="0" marL="0">
+              <a:buNone/>
+            </a:pPr>
+            <a:r>
+              <a:rPr lang="en-US" sz="850" dirty="0">
+                <a:solidFill>
+                  <a:srgbClr val="7A849C"/>
+                </a:solidFill>
+                <a:latin typeface="Exo 2" pitchFamily="34" charset="0"/>
+                <a:ea typeface="Exo 2" pitchFamily="34" charset="-122"/>
+                <a:cs typeface="Exo 2" pitchFamily="34" charset="-120"/>
+              </a:rPr>
+              <a:t>27</a:t>
+            </a:r>
+            <a:endParaRPr lang="en-US" sz="850" dirty="0"/>
+          </a:p>
+        </p:txBody>
+      </p:sp>
+      <p:sp>
+        <p:nvSpPr>
+          <p:cNvPr id="78" name="Shape 72"/>
+          <p:cNvSpPr/>
+          <p:nvPr/>
+        </p:nvSpPr>
+        <p:spPr>
+          <a:xfrm>
+            <a:off x="6666514" y="2532888"/>
+            <a:ext cx="91440" cy="91440"/>
+          </a:xfrm>
+          <a:prstGeom prst="ellipse">
+            <a:avLst/>
+          </a:prstGeom>
+          <a:solidFill>
+            <a:srgbClr val="132257"/>
+          </a:solidFill>
+          <a:ln w="12700">
+            <a:solidFill>
+              <a:srgbClr val="132257"/>
+            </a:solidFill>
+            <a:prstDash val="solid"/>
+          </a:ln>
+        </p:spPr>
+      </p:sp>
+      <p:sp>
+        <p:nvSpPr>
+          <p:cNvPr id="79" name="Text 73"/>
+          <p:cNvSpPr txBox="1"/>
+          <p:nvPr/>
+        </p:nvSpPr>
+        <p:spPr>
+          <a:xfrm>
+            <a:off x="6437914" y="5084064"/>
+            <a:ext cx="548640" cy="219456"/>
+          </a:xfrm>
+          <a:prstGeom prst="rect">
+            <a:avLst/>
+          </a:prstGeom>
+          <a:noFill/>
+          <a:ln/>
+        </p:spPr>
+        <p:txBody>
+          <a:bodyPr wrap="square" lIns="0" tIns="0" rIns="0" bIns="0" rtlCol="0" anchor="t"/>
+          <a:lstStyle/>
+          <a:p>
+            <a:pPr algn="ctr" indent="0" marL="0">
+              <a:buNone/>
+            </a:pPr>
+            <a:r>
+              <a:rPr lang="en-US" sz="850" dirty="0">
+                <a:solidFill>
+                  <a:srgbClr val="7A849C"/>
+                </a:solidFill>
+                <a:latin typeface="Exo 2" pitchFamily="34" charset="0"/>
+                <a:ea typeface="Exo 2" pitchFamily="34" charset="-122"/>
+                <a:cs typeface="Exo 2" pitchFamily="34" charset="-120"/>
+              </a:rPr>
+              <a:t>28</a:t>
+            </a:r>
+            <a:endParaRPr lang="en-US" sz="850" dirty="0"/>
+          </a:p>
+        </p:txBody>
+      </p:sp>
+      <p:sp>
+        <p:nvSpPr>
+          <p:cNvPr id="80" name="Shape 74"/>
+          <p:cNvSpPr/>
+          <p:nvPr/>
+        </p:nvSpPr>
+        <p:spPr>
+          <a:xfrm>
+            <a:off x="7013448" y="2328672"/>
+            <a:ext cx="91440" cy="91440"/>
+          </a:xfrm>
+          <a:prstGeom prst="ellipse">
+            <a:avLst/>
+          </a:prstGeom>
+          <a:solidFill>
+            <a:srgbClr val="132257"/>
+          </a:solidFill>
+          <a:ln w="12700">
+            <a:solidFill>
+              <a:srgbClr val="132257"/>
+            </a:solidFill>
+            <a:prstDash val="solid"/>
+          </a:ln>
+        </p:spPr>
+      </p:sp>
+      <p:sp>
+        <p:nvSpPr>
+          <p:cNvPr id="81" name="Text 75"/>
           <p:cNvSpPr txBox="1"/>
           <p:nvPr/>
         </p:nvSpPr>
@@ -7868,7 +8104,7 @@
                 <a:ea typeface="Exo 2" pitchFamily="34" charset="-122"/>
                 <a:cs typeface="Exo 2" pitchFamily="34" charset="-120"/>
               </a:rPr>
-              <a:t>27 Sep</a:t>
+              <a:t>29 Sep</a:t>
             </a:r>
             <a:endParaRPr lang="en-US" sz="850" dirty="0"/>
           </a:p>
@@ -7876,13 +8112,13 @@
       </p:sp>
       <p:sp>
         <p:nvSpPr>
-          <p:cNvPr id="74" name="Text 68"/>
+          <p:cNvPr id="82" name="Text 76"/>
           <p:cNvSpPr txBox="1"/>
           <p:nvPr/>
         </p:nvSpPr>
         <p:spPr>
           <a:xfrm>
-            <a:off x="5422392" y="5285232"/>
+            <a:off x="4867297" y="5285232"/>
             <a:ext cx="914400" cy="201168"/>
           </a:xfrm>
           <a:prstGeom prst="rect">
@@ -7915,7 +8151,7 @@
       </p:sp>
       <p:sp>
         <p:nvSpPr>
-          <p:cNvPr id="75" name="Text 69"/>
+          <p:cNvPr id="83" name="Text 77"/>
           <p:cNvSpPr txBox="1"/>
           <p:nvPr/>
         </p:nvSpPr>
@@ -7946,7 +8182,7 @@
                 <a:ea typeface="Exo 2" pitchFamily="34" charset="-122"/>
                 <a:cs typeface="Exo 2" pitchFamily="34" charset="-120"/>
               </a:rPr>
-              <a:t>+36 in 6 days</a:t>
+              <a:t>+53 in 8 days</a:t>
             </a:r>
             <a:endParaRPr lang="en-US" sz="1050" dirty="0"/>
           </a:p>
@@ -7963,7 +8199,7 @@
                 <a:ea typeface="Exo 2" pitchFamily="34" charset="-122"/>
                 <a:cs typeface="Exo 2" pitchFamily="34" charset="-120"/>
               </a:rPr>
-              <a:t>21-27 Sep, after launch</a:t>
+              <a:t>21-29 Sep, after launch</a:t>
             </a:r>
             <a:endParaRPr lang="en-US" sz="1050" dirty="0"/>
           </a:p>
@@ -7971,7 +8207,7 @@
       </p:sp>
       <p:sp>
         <p:nvSpPr>
-          <p:cNvPr id="76" name="Text 70"/>
+          <p:cNvPr id="84" name="Text 78"/>
           <p:cNvSpPr txBox="1"/>
           <p:nvPr/>
         </p:nvSpPr>
@@ -8027,7 +8263,7 @@
       </p:sp>
       <p:sp>
         <p:nvSpPr>
-          <p:cNvPr id="77" name="Text 71"/>
+          <p:cNvPr id="85" name="Text 79"/>
           <p:cNvSpPr txBox="1"/>
           <p:nvPr/>
         </p:nvSpPr>
@@ -8066,7 +8302,7 @@
       </p:sp>
       <p:sp>
         <p:nvSpPr>
-          <p:cNvPr id="78" name="Shape 72"/>
+          <p:cNvPr id="86" name="Shape 80"/>
           <p:cNvSpPr/>
           <p:nvPr/>
         </p:nvSpPr>
@@ -8091,7 +8327,7 @@
       </p:sp>
       <p:sp>
         <p:nvSpPr>
-          <p:cNvPr id="79" name="Text 73"/>
+          <p:cNvPr id="87" name="Text 81"/>
           <p:cNvSpPr txBox="1"/>
           <p:nvPr/>
         </p:nvSpPr>
@@ -8130,7 +8366,7 @@
       </p:sp>
       <p:sp>
         <p:nvSpPr>
-          <p:cNvPr id="80" name="Text 74"/>
+          <p:cNvPr id="88" name="Text 82"/>
           <p:cNvSpPr txBox="1"/>
           <p:nvPr/>
         </p:nvSpPr>
@@ -8186,7 +8422,7 @@
       </p:sp>
       <p:sp>
         <p:nvSpPr>
-          <p:cNvPr id="81" name="Shape 75"/>
+          <p:cNvPr id="89" name="Shape 83"/>
           <p:cNvSpPr/>
           <p:nvPr/>
         </p:nvSpPr>
@@ -8211,7 +8447,7 @@
       </p:sp>
       <p:sp>
         <p:nvSpPr>
-          <p:cNvPr id="82" name="Text 76"/>
+          <p:cNvPr id="90" name="Text 84"/>
           <p:cNvSpPr txBox="1"/>
           <p:nvPr/>
         </p:nvSpPr>
@@ -8250,7 +8486,7 @@
       </p:sp>
       <p:sp>
         <p:nvSpPr>
-          <p:cNvPr id="83" name="Text 77"/>
+          <p:cNvPr id="91" name="Text 85"/>
           <p:cNvSpPr txBox="1"/>
           <p:nvPr/>
         </p:nvSpPr>
@@ -8306,7 +8542,7 @@
       </p:sp>
       <p:sp>
         <p:nvSpPr>
-          <p:cNvPr id="84" name="Shape 78"/>
+          <p:cNvPr id="92" name="Shape 86"/>
           <p:cNvSpPr/>
           <p:nvPr/>
         </p:nvSpPr>
@@ -8331,7 +8567,7 @@
       </p:sp>
       <p:sp>
         <p:nvSpPr>
-          <p:cNvPr id="85" name="Text 79"/>
+          <p:cNvPr id="93" name="Text 87"/>
           <p:cNvSpPr txBox="1"/>
           <p:nvPr/>
         </p:nvSpPr>
@@ -8362,7 +8598,7 @@
                 <a:ea typeface="Exo 2" pitchFamily="34" charset="-122"/>
                 <a:cs typeface="Exo 2" pitchFamily="34" charset="-120"/>
               </a:rPr>
-              <a:t>+36</a:t>
+              <a:t>+53</a:t>
             </a:r>
             <a:endParaRPr lang="en-US" sz="2200" dirty="0"/>
           </a:p>
@@ -8370,7 +8606,7 @@
       </p:sp>
       <p:sp>
         <p:nvSpPr>
-          <p:cNvPr id="86" name="Text 80"/>
+          <p:cNvPr id="94" name="Text 88"/>
           <p:cNvSpPr txBox="1"/>
           <p:nvPr/>
         </p:nvSpPr>
@@ -8401,7 +8637,7 @@
                 <a:ea typeface="Exo 2" pitchFamily="34" charset="-122"/>
                 <a:cs typeface="Exo 2" pitchFamily="34" charset="-120"/>
               </a:rPr>
-              <a:t>app installs, 21-27 Sep</a:t>
+              <a:t>app installs, 21-29 Sep</a:t>
             </a:r>
             <a:endParaRPr lang="en-US" sz="1000" dirty="0"/>
           </a:p>
@@ -8426,7 +8662,7 @@
       </p:sp>
       <p:sp>
         <p:nvSpPr>
-          <p:cNvPr id="87" name="Shape 81"/>
+          <p:cNvPr id="95" name="Shape 89"/>
           <p:cNvSpPr/>
           <p:nvPr/>
         </p:nvSpPr>
@@ -8451,7 +8687,7 @@
       </p:sp>
       <p:sp>
         <p:nvSpPr>
-          <p:cNvPr id="88" name="Text 82"/>
+          <p:cNvPr id="96" name="Text 90"/>
           <p:cNvSpPr txBox="1"/>
           <p:nvPr/>
         </p:nvSpPr>
@@ -8482,7 +8718,7 @@
                 <a:ea typeface="Exo 2" pitchFamily="34" charset="-122"/>
                 <a:cs typeface="Exo 2" pitchFamily="34" charset="-120"/>
               </a:rPr>
-              <a:t>+3</a:t>
+              <a:t>+4</a:t>
             </a:r>
             <a:endParaRPr lang="en-US" sz="2200" dirty="0"/>
           </a:p>
@@ -8490,7 +8726,7 @@
       </p:sp>
       <p:sp>
         <p:nvSpPr>
-          <p:cNvPr id="89" name="Text 83"/>
+          <p:cNvPr id="97" name="Text 91"/>
           <p:cNvSpPr txBox="1"/>
           <p:nvPr/>
         </p:nvSpPr>
@@ -8521,7 +8757,7 @@
                 <a:ea typeface="Exo 2" pitchFamily="34" charset="-122"/>
                 <a:cs typeface="Exo 2" pitchFamily="34" charset="-120"/>
               </a:rPr>
-              <a:t>onboarded, 21-27 Sep</a:t>
+              <a:t>onboarded, 21-29 Sep</a:t>
             </a:r>
             <a:endParaRPr lang="en-US" sz="1000" dirty="0"/>
           </a:p>
@@ -8546,7 +8782,7 @@
       </p:sp>
       <p:sp>
         <p:nvSpPr>
-          <p:cNvPr id="90" name="Shape 84"/>
+          <p:cNvPr id="98" name="Shape 92"/>
           <p:cNvSpPr/>
           <p:nvPr/>
         </p:nvSpPr>
@@ -8569,7 +8805,7 @@
       </p:sp>
       <p:sp>
         <p:nvSpPr>
-          <p:cNvPr id="91" name="Text 85"/>
+          <p:cNvPr id="99" name="Text 93"/>
           <p:cNvSpPr txBox="1"/>
           <p:nvPr/>
         </p:nvSpPr>
